--- a/presentation.pptx
+++ b/presentation.pptx
@@ -5,7 +5,7 @@
     <p:sldMasterId id="2147483660" r:id="rId1"/>
   </p:sldMasterIdLst>
   <p:notesMasterIdLst>
-    <p:notesMasterId r:id="rId13"/>
+    <p:notesMasterId r:id="rId22"/>
   </p:notesMasterIdLst>
   <p:sldIdLst>
     <p:sldId id="257" r:id="rId2"/>
@@ -18,7 +18,16 @@
     <p:sldId id="294" r:id="rId9"/>
     <p:sldId id="295" r:id="rId10"/>
     <p:sldId id="296" r:id="rId11"/>
-    <p:sldId id="288" r:id="rId12"/>
+    <p:sldId id="297" r:id="rId12"/>
+    <p:sldId id="298" r:id="rId13"/>
+    <p:sldId id="299" r:id="rId14"/>
+    <p:sldId id="300" r:id="rId15"/>
+    <p:sldId id="301" r:id="rId16"/>
+    <p:sldId id="302" r:id="rId17"/>
+    <p:sldId id="303" r:id="rId18"/>
+    <p:sldId id="304" r:id="rId19"/>
+    <p:sldId id="305" r:id="rId20"/>
+    <p:sldId id="288" r:id="rId21"/>
   </p:sldIdLst>
   <p:sldSz cx="12192000" cy="6858000"/>
   <p:notesSz cx="6858000" cy="9144000"/>
@@ -128,7 +137,7 @@
 <file path=ppt/revisionInfo.xml><?xml version="1.0" encoding="utf-8"?>
 <p1510:revInfo xmlns:a="http://schemas.openxmlformats.org/drawingml/2006/main" xmlns:r="http://schemas.openxmlformats.org/officeDocument/2006/relationships" xmlns:p1510="http://schemas.microsoft.com/office/powerpoint/2015/10/main">
   <p1510:revLst>
-    <p1510:client id="{E2922590-C897-4D5E-94A5-7835129BD264}" v="15" dt="2026-01-05T09:10:13.144"/>
+    <p1510:client id="{E2922590-C897-4D5E-94A5-7835129BD264}" v="27" dt="2026-01-05T10:57:45.436"/>
   </p1510:revLst>
 </p1510:revInfo>
 </file>
@@ -138,7 +147,7 @@
   <pc:docChgLst>
     <pc:chgData name="Dominique RIGHETTO" userId="512fe077-82ad-424c-88a3-15e852b5861d" providerId="ADAL" clId="{8B7CB91F-10CE-42C2-B9B8-BFF2D3401655}"/>
     <pc:docChg chg="undo custSel addSld delSld modSld sldOrd modMainMaster">
-      <pc:chgData name="Dominique RIGHETTO" userId="512fe077-82ad-424c-88a3-15e852b5861d" providerId="ADAL" clId="{8B7CB91F-10CE-42C2-B9B8-BFF2D3401655}" dt="2026-01-05T09:35:39.981" v="2322" actId="20577"/>
+      <pc:chgData name="Dominique RIGHETTO" userId="512fe077-82ad-424c-88a3-15e852b5861d" providerId="ADAL" clId="{8B7CB91F-10CE-42C2-B9B8-BFF2D3401655}" dt="2026-01-05T10:59:37.292" v="3774" actId="1037"/>
       <pc:docMkLst>
         <pc:docMk/>
       </pc:docMkLst>
@@ -629,7 +638,7 @@
         </pc:picChg>
       </pc:sldChg>
       <pc:sldChg chg="addSp delSp modSp add mod ord">
-        <pc:chgData name="Dominique RIGHETTO" userId="512fe077-82ad-424c-88a3-15e852b5861d" providerId="ADAL" clId="{8B7CB91F-10CE-42C2-B9B8-BFF2D3401655}" dt="2026-01-05T09:35:39.981" v="2322" actId="20577"/>
+        <pc:chgData name="Dominique RIGHETTO" userId="512fe077-82ad-424c-88a3-15e852b5861d" providerId="ADAL" clId="{8B7CB91F-10CE-42C2-B9B8-BFF2D3401655}" dt="2026-01-05T09:59:30.981" v="2329" actId="14861"/>
         <pc:sldMkLst>
           <pc:docMk/>
           <pc:sldMk cId="546162947" sldId="296"/>
@@ -650,8 +659,8 @@
             <ac:spMk id="3" creationId="{C89D633C-3E2D-C620-330F-995671BAA090}"/>
           </ac:spMkLst>
         </pc:spChg>
-        <pc:picChg chg="add mod">
-          <ac:chgData name="Dominique RIGHETTO" userId="512fe077-82ad-424c-88a3-15e852b5861d" providerId="ADAL" clId="{8B7CB91F-10CE-42C2-B9B8-BFF2D3401655}" dt="2026-01-05T09:34:39.961" v="2298" actId="14861"/>
+        <pc:picChg chg="add del mod">
+          <ac:chgData name="Dominique RIGHETTO" userId="512fe077-82ad-424c-88a3-15e852b5861d" providerId="ADAL" clId="{8B7CB91F-10CE-42C2-B9B8-BFF2D3401655}" dt="2026-01-05T09:58:00.326" v="2323" actId="478"/>
           <ac:picMkLst>
             <pc:docMk/>
             <pc:sldMk cId="546162947" sldId="296"/>
@@ -664,6 +673,429 @@
             <pc:docMk/>
             <pc:sldMk cId="546162947" sldId="296"/>
             <ac:picMk id="6" creationId="{61DC0705-AD07-B80F-06C4-D877F4F1EB1A}"/>
+          </ac:picMkLst>
+        </pc:picChg>
+        <pc:picChg chg="add mod">
+          <ac:chgData name="Dominique RIGHETTO" userId="512fe077-82ad-424c-88a3-15e852b5861d" providerId="ADAL" clId="{8B7CB91F-10CE-42C2-B9B8-BFF2D3401655}" dt="2026-01-05T09:59:30.981" v="2329" actId="14861"/>
+          <ac:picMkLst>
+            <pc:docMk/>
+            <pc:sldMk cId="546162947" sldId="296"/>
+            <ac:picMk id="6" creationId="{99059005-BA3A-F6BB-37CD-87E255CF8D33}"/>
+          </ac:picMkLst>
+        </pc:picChg>
+      </pc:sldChg>
+      <pc:sldChg chg="addSp delSp modSp add mod">
+        <pc:chgData name="Dominique RIGHETTO" userId="512fe077-82ad-424c-88a3-15e852b5861d" providerId="ADAL" clId="{8B7CB91F-10CE-42C2-B9B8-BFF2D3401655}" dt="2026-01-05T10:39:09.734" v="3340" actId="207"/>
+        <pc:sldMkLst>
+          <pc:docMk/>
+          <pc:sldMk cId="709545358" sldId="297"/>
+        </pc:sldMkLst>
+        <pc:spChg chg="mod">
+          <ac:chgData name="Dominique RIGHETTO" userId="512fe077-82ad-424c-88a3-15e852b5861d" providerId="ADAL" clId="{8B7CB91F-10CE-42C2-B9B8-BFF2D3401655}" dt="2026-01-05T10:24:08.837" v="3023" actId="20577"/>
+          <ac:spMkLst>
+            <pc:docMk/>
+            <pc:sldMk cId="709545358" sldId="297"/>
+            <ac:spMk id="2" creationId="{B845A4E6-506C-8A54-282B-B9A27DF974D9}"/>
+          </ac:spMkLst>
+        </pc:spChg>
+        <pc:spChg chg="mod">
+          <ac:chgData name="Dominique RIGHETTO" userId="512fe077-82ad-424c-88a3-15e852b5861d" providerId="ADAL" clId="{8B7CB91F-10CE-42C2-B9B8-BFF2D3401655}" dt="2026-01-05T10:39:09.734" v="3340" actId="207"/>
+          <ac:spMkLst>
+            <pc:docMk/>
+            <pc:sldMk cId="709545358" sldId="297"/>
+            <ac:spMk id="3" creationId="{EA2D3DAB-E05A-AC9C-4BBB-4A581D9BF3D5}"/>
+          </ac:spMkLst>
+        </pc:spChg>
+        <pc:picChg chg="add mod">
+          <ac:chgData name="Dominique RIGHETTO" userId="512fe077-82ad-424c-88a3-15e852b5861d" providerId="ADAL" clId="{8B7CB91F-10CE-42C2-B9B8-BFF2D3401655}" dt="2026-01-05T10:05:09.338" v="2573" actId="108"/>
+          <ac:picMkLst>
+            <pc:docMk/>
+            <pc:sldMk cId="709545358" sldId="297"/>
+            <ac:picMk id="5" creationId="{B2535224-3613-CF14-2DE1-50957EDA5478}"/>
+          </ac:picMkLst>
+        </pc:picChg>
+        <pc:picChg chg="del">
+          <ac:chgData name="Dominique RIGHETTO" userId="512fe077-82ad-424c-88a3-15e852b5861d" providerId="ADAL" clId="{8B7CB91F-10CE-42C2-B9B8-BFF2D3401655}" dt="2026-01-05T10:00:04.684" v="2331" actId="478"/>
+          <ac:picMkLst>
+            <pc:docMk/>
+            <pc:sldMk cId="709545358" sldId="297"/>
+            <ac:picMk id="6" creationId="{570DB731-1B05-EC28-08B1-F441A2F8AB71}"/>
+          </ac:picMkLst>
+        </pc:picChg>
+        <pc:picChg chg="add mod">
+          <ac:chgData name="Dominique RIGHETTO" userId="512fe077-82ad-424c-88a3-15e852b5861d" providerId="ADAL" clId="{8B7CB91F-10CE-42C2-B9B8-BFF2D3401655}" dt="2026-01-05T10:05:11.914" v="2574" actId="108"/>
+          <ac:picMkLst>
+            <pc:docMk/>
+            <pc:sldMk cId="709545358" sldId="297"/>
+            <ac:picMk id="8" creationId="{CDEA6B6B-ADE2-DDA5-F518-5F11F0C59B9D}"/>
+          </ac:picMkLst>
+        </pc:picChg>
+      </pc:sldChg>
+      <pc:sldChg chg="addSp delSp modSp add mod">
+        <pc:chgData name="Dominique RIGHETTO" userId="512fe077-82ad-424c-88a3-15e852b5861d" providerId="ADAL" clId="{8B7CB91F-10CE-42C2-B9B8-BFF2D3401655}" dt="2026-01-05T10:39:36.372" v="3346" actId="20577"/>
+        <pc:sldMkLst>
+          <pc:docMk/>
+          <pc:sldMk cId="3961351739" sldId="298"/>
+        </pc:sldMkLst>
+        <pc:spChg chg="mod">
+          <ac:chgData name="Dominique RIGHETTO" userId="512fe077-82ad-424c-88a3-15e852b5861d" providerId="ADAL" clId="{8B7CB91F-10CE-42C2-B9B8-BFF2D3401655}" dt="2026-01-05T10:24:15.326" v="3032" actId="20577"/>
+          <ac:spMkLst>
+            <pc:docMk/>
+            <pc:sldMk cId="3961351739" sldId="298"/>
+            <ac:spMk id="2" creationId="{A48B1937-E229-DAB6-0930-B3E44E3920DE}"/>
+          </ac:spMkLst>
+        </pc:spChg>
+        <pc:spChg chg="mod">
+          <ac:chgData name="Dominique RIGHETTO" userId="512fe077-82ad-424c-88a3-15e852b5861d" providerId="ADAL" clId="{8B7CB91F-10CE-42C2-B9B8-BFF2D3401655}" dt="2026-01-05T10:39:36.372" v="3346" actId="20577"/>
+          <ac:spMkLst>
+            <pc:docMk/>
+            <pc:sldMk cId="3961351739" sldId="298"/>
+            <ac:spMk id="3" creationId="{83029DA1-9BCD-3EBD-0C74-543E48734A9E}"/>
+          </ac:spMkLst>
+        </pc:spChg>
+        <pc:spChg chg="add mod">
+          <ac:chgData name="Dominique RIGHETTO" userId="512fe077-82ad-424c-88a3-15e852b5861d" providerId="ADAL" clId="{8B7CB91F-10CE-42C2-B9B8-BFF2D3401655}" dt="2026-01-05T10:21:48.946" v="2888" actId="207"/>
+          <ac:spMkLst>
+            <pc:docMk/>
+            <pc:sldMk cId="3961351739" sldId="298"/>
+            <ac:spMk id="7" creationId="{902C893A-AE8C-38CF-319B-BB6D877250CE}"/>
+          </ac:spMkLst>
+        </pc:spChg>
+        <pc:picChg chg="del">
+          <ac:chgData name="Dominique RIGHETTO" userId="512fe077-82ad-424c-88a3-15e852b5861d" providerId="ADAL" clId="{8B7CB91F-10CE-42C2-B9B8-BFF2D3401655}" dt="2026-01-05T10:05:48.540" v="2580" actId="478"/>
+          <ac:picMkLst>
+            <pc:docMk/>
+            <pc:sldMk cId="3961351739" sldId="298"/>
+            <ac:picMk id="5" creationId="{C5659996-2D64-F9A5-690D-262F08D76BA9}"/>
+          </ac:picMkLst>
+        </pc:picChg>
+        <pc:picChg chg="add mod">
+          <ac:chgData name="Dominique RIGHETTO" userId="512fe077-82ad-424c-88a3-15e852b5861d" providerId="ADAL" clId="{8B7CB91F-10CE-42C2-B9B8-BFF2D3401655}" dt="2026-01-05T10:18:29.644" v="2858" actId="1076"/>
+          <ac:picMkLst>
+            <pc:docMk/>
+            <pc:sldMk cId="3961351739" sldId="298"/>
+            <ac:picMk id="6" creationId="{4EBD515D-220C-665B-DCFE-5BDD41EA43E8}"/>
+          </ac:picMkLst>
+        </pc:picChg>
+        <pc:picChg chg="del">
+          <ac:chgData name="Dominique RIGHETTO" userId="512fe077-82ad-424c-88a3-15e852b5861d" providerId="ADAL" clId="{8B7CB91F-10CE-42C2-B9B8-BFF2D3401655}" dt="2026-01-05T10:05:49.496" v="2581" actId="478"/>
+          <ac:picMkLst>
+            <pc:docMk/>
+            <pc:sldMk cId="3961351739" sldId="298"/>
+            <ac:picMk id="8" creationId="{E304B818-AAB6-5713-E8EC-07DE23F6D58B}"/>
+          </ac:picMkLst>
+        </pc:picChg>
+      </pc:sldChg>
+      <pc:sldChg chg="addSp delSp modSp add mod ord">
+        <pc:chgData name="Dominique RIGHETTO" userId="512fe077-82ad-424c-88a3-15e852b5861d" providerId="ADAL" clId="{8B7CB91F-10CE-42C2-B9B8-BFF2D3401655}" dt="2026-01-05T10:42:44.005" v="3407" actId="20577"/>
+        <pc:sldMkLst>
+          <pc:docMk/>
+          <pc:sldMk cId="2399632653" sldId="299"/>
+        </pc:sldMkLst>
+        <pc:spChg chg="mod">
+          <ac:chgData name="Dominique RIGHETTO" userId="512fe077-82ad-424c-88a3-15e852b5861d" providerId="ADAL" clId="{8B7CB91F-10CE-42C2-B9B8-BFF2D3401655}" dt="2026-01-05T10:24:23.262" v="3034" actId="20577"/>
+          <ac:spMkLst>
+            <pc:docMk/>
+            <pc:sldMk cId="2399632653" sldId="299"/>
+            <ac:spMk id="2" creationId="{3D5DB75B-6770-31DB-523A-9A3D7DBF1E60}"/>
+          </ac:spMkLst>
+        </pc:spChg>
+        <pc:spChg chg="mod">
+          <ac:chgData name="Dominique RIGHETTO" userId="512fe077-82ad-424c-88a3-15e852b5861d" providerId="ADAL" clId="{8B7CB91F-10CE-42C2-B9B8-BFF2D3401655}" dt="2026-01-05T10:42:44.005" v="3407" actId="20577"/>
+          <ac:spMkLst>
+            <pc:docMk/>
+            <pc:sldMk cId="2399632653" sldId="299"/>
+            <ac:spMk id="3" creationId="{741381EB-99BC-524D-D960-85D1ABC4DC70}"/>
+          </ac:spMkLst>
+        </pc:spChg>
+        <pc:picChg chg="del">
+          <ac:chgData name="Dominique RIGHETTO" userId="512fe077-82ad-424c-88a3-15e852b5861d" providerId="ADAL" clId="{8B7CB91F-10CE-42C2-B9B8-BFF2D3401655}" dt="2026-01-05T10:25:50.207" v="3035" actId="478"/>
+          <ac:picMkLst>
+            <pc:docMk/>
+            <pc:sldMk cId="2399632653" sldId="299"/>
+            <ac:picMk id="5" creationId="{27B38A17-D9B0-3D51-B75B-B556450D89EE}"/>
+          </ac:picMkLst>
+        </pc:picChg>
+        <pc:picChg chg="add mod">
+          <ac:chgData name="Dominique RIGHETTO" userId="512fe077-82ad-424c-88a3-15e852b5861d" providerId="ADAL" clId="{8B7CB91F-10CE-42C2-B9B8-BFF2D3401655}" dt="2026-01-05T10:26:57.342" v="3043" actId="108"/>
+          <ac:picMkLst>
+            <pc:docMk/>
+            <pc:sldMk cId="2399632653" sldId="299"/>
+            <ac:picMk id="6" creationId="{34B80029-5A50-92BD-D91B-7B26F946AAA4}"/>
+          </ac:picMkLst>
+        </pc:picChg>
+        <pc:picChg chg="del">
+          <ac:chgData name="Dominique RIGHETTO" userId="512fe077-82ad-424c-88a3-15e852b5861d" providerId="ADAL" clId="{8B7CB91F-10CE-42C2-B9B8-BFF2D3401655}" dt="2026-01-05T10:26:43.564" v="3039" actId="478"/>
+          <ac:picMkLst>
+            <pc:docMk/>
+            <pc:sldMk cId="2399632653" sldId="299"/>
+            <ac:picMk id="8" creationId="{0F3F0767-05F2-53BF-C4DA-6C12AAA0F513}"/>
+          </ac:picMkLst>
+        </pc:picChg>
+      </pc:sldChg>
+      <pc:sldChg chg="addSp delSp modSp add mod">
+        <pc:chgData name="Dominique RIGHETTO" userId="512fe077-82ad-424c-88a3-15e852b5861d" providerId="ADAL" clId="{8B7CB91F-10CE-42C2-B9B8-BFF2D3401655}" dt="2026-01-05T10:38:54.675" v="3339" actId="207"/>
+        <pc:sldMkLst>
+          <pc:docMk/>
+          <pc:sldMk cId="1761927550" sldId="300"/>
+        </pc:sldMkLst>
+        <pc:spChg chg="mod">
+          <ac:chgData name="Dominique RIGHETTO" userId="512fe077-82ad-424c-88a3-15e852b5861d" providerId="ADAL" clId="{8B7CB91F-10CE-42C2-B9B8-BFF2D3401655}" dt="2026-01-05T10:38:54.675" v="3339" actId="207"/>
+          <ac:spMkLst>
+            <pc:docMk/>
+            <pc:sldMk cId="1761927550" sldId="300"/>
+            <ac:spMk id="3" creationId="{0C7D0AE3-4D9F-D903-11DB-723CC3B837B9}"/>
+          </ac:spMkLst>
+        </pc:spChg>
+        <pc:picChg chg="add mod">
+          <ac:chgData name="Dominique RIGHETTO" userId="512fe077-82ad-424c-88a3-15e852b5861d" providerId="ADAL" clId="{8B7CB91F-10CE-42C2-B9B8-BFF2D3401655}" dt="2026-01-05T10:28:38.892" v="3190" actId="108"/>
+          <ac:picMkLst>
+            <pc:docMk/>
+            <pc:sldMk cId="1761927550" sldId="300"/>
+            <ac:picMk id="5" creationId="{037C562B-8E3E-0BB5-2C7F-AB3C29B44C6A}"/>
+          </ac:picMkLst>
+        </pc:picChg>
+        <pc:picChg chg="del">
+          <ac:chgData name="Dominique RIGHETTO" userId="512fe077-82ad-424c-88a3-15e852b5861d" providerId="ADAL" clId="{8B7CB91F-10CE-42C2-B9B8-BFF2D3401655}" dt="2026-01-05T10:27:13.897" v="3051" actId="478"/>
+          <ac:picMkLst>
+            <pc:docMk/>
+            <pc:sldMk cId="1761927550" sldId="300"/>
+            <ac:picMk id="6" creationId="{4899777B-5FFC-3F6A-798F-A85A809DCCBF}"/>
+          </ac:picMkLst>
+        </pc:picChg>
+        <pc:picChg chg="del">
+          <ac:chgData name="Dominique RIGHETTO" userId="512fe077-82ad-424c-88a3-15e852b5861d" providerId="ADAL" clId="{8B7CB91F-10CE-42C2-B9B8-BFF2D3401655}" dt="2026-01-05T10:28:24.277" v="3186" actId="478"/>
+          <ac:picMkLst>
+            <pc:docMk/>
+            <pc:sldMk cId="1761927550" sldId="300"/>
+            <ac:picMk id="8" creationId="{4C71C728-FF18-4D64-431A-56FB07317519}"/>
+          </ac:picMkLst>
+        </pc:picChg>
+      </pc:sldChg>
+      <pc:sldChg chg="addSp delSp modSp add mod ord">
+        <pc:chgData name="Dominique RIGHETTO" userId="512fe077-82ad-424c-88a3-15e852b5861d" providerId="ADAL" clId="{8B7CB91F-10CE-42C2-B9B8-BFF2D3401655}" dt="2026-01-05T10:39:59.145" v="3359" actId="20577"/>
+        <pc:sldMkLst>
+          <pc:docMk/>
+          <pc:sldMk cId="4107305617" sldId="301"/>
+        </pc:sldMkLst>
+        <pc:spChg chg="mod">
+          <ac:chgData name="Dominique RIGHETTO" userId="512fe077-82ad-424c-88a3-15e852b5861d" providerId="ADAL" clId="{8B7CB91F-10CE-42C2-B9B8-BFF2D3401655}" dt="2026-01-05T10:34:06.909" v="3334" actId="20577"/>
+          <ac:spMkLst>
+            <pc:docMk/>
+            <pc:sldMk cId="4107305617" sldId="301"/>
+            <ac:spMk id="2" creationId="{91F11321-5C53-C769-25FD-3C480E97DDCE}"/>
+          </ac:spMkLst>
+        </pc:spChg>
+        <pc:spChg chg="mod">
+          <ac:chgData name="Dominique RIGHETTO" userId="512fe077-82ad-424c-88a3-15e852b5861d" providerId="ADAL" clId="{8B7CB91F-10CE-42C2-B9B8-BFF2D3401655}" dt="2026-01-05T10:39:51.533" v="3355" actId="20577"/>
+          <ac:spMkLst>
+            <pc:docMk/>
+            <pc:sldMk cId="4107305617" sldId="301"/>
+            <ac:spMk id="3" creationId="{C97DF473-2026-6250-AA6D-4604CACF6121}"/>
+          </ac:spMkLst>
+        </pc:spChg>
+        <pc:spChg chg="mod">
+          <ac:chgData name="Dominique RIGHETTO" userId="512fe077-82ad-424c-88a3-15e852b5861d" providerId="ADAL" clId="{8B7CB91F-10CE-42C2-B9B8-BFF2D3401655}" dt="2026-01-05T10:39:59.145" v="3359" actId="20577"/>
+          <ac:spMkLst>
+            <pc:docMk/>
+            <pc:sldMk cId="4107305617" sldId="301"/>
+            <ac:spMk id="7" creationId="{00720CE7-DA57-E954-96B6-C6C46BD85D34}"/>
+          </ac:spMkLst>
+        </pc:spChg>
+        <pc:picChg chg="add mod">
+          <ac:chgData name="Dominique RIGHETTO" userId="512fe077-82ad-424c-88a3-15e852b5861d" providerId="ADAL" clId="{8B7CB91F-10CE-42C2-B9B8-BFF2D3401655}" dt="2026-01-05T10:37:41.652" v="3338" actId="14861"/>
+          <ac:picMkLst>
+            <pc:docMk/>
+            <pc:sldMk cId="4107305617" sldId="301"/>
+            <ac:picMk id="5" creationId="{AED93A08-AC91-1552-0522-6366FEE89055}"/>
+          </ac:picMkLst>
+        </pc:picChg>
+        <pc:picChg chg="del">
+          <ac:chgData name="Dominique RIGHETTO" userId="512fe077-82ad-424c-88a3-15e852b5861d" providerId="ADAL" clId="{8B7CB91F-10CE-42C2-B9B8-BFF2D3401655}" dt="2026-01-05T10:33:30.470" v="3332" actId="478"/>
+          <ac:picMkLst>
+            <pc:docMk/>
+            <pc:sldMk cId="4107305617" sldId="301"/>
+            <ac:picMk id="6" creationId="{121C7093-80E3-5906-5D94-7A484BABE94E}"/>
+          </ac:picMkLst>
+        </pc:picChg>
+      </pc:sldChg>
+      <pc:sldChg chg="addSp delSp modSp add mod ord">
+        <pc:chgData name="Dominique RIGHETTO" userId="512fe077-82ad-424c-88a3-15e852b5861d" providerId="ADAL" clId="{8B7CB91F-10CE-42C2-B9B8-BFF2D3401655}" dt="2026-01-05T10:42:38.769" v="3405" actId="20577"/>
+        <pc:sldMkLst>
+          <pc:docMk/>
+          <pc:sldMk cId="3214065329" sldId="302"/>
+        </pc:sldMkLst>
+        <pc:spChg chg="mod">
+          <ac:chgData name="Dominique RIGHETTO" userId="512fe077-82ad-424c-88a3-15e852b5861d" providerId="ADAL" clId="{8B7CB91F-10CE-42C2-B9B8-BFF2D3401655}" dt="2026-01-05T10:40:27.299" v="3364" actId="20577"/>
+          <ac:spMkLst>
+            <pc:docMk/>
+            <pc:sldMk cId="3214065329" sldId="302"/>
+            <ac:spMk id="2" creationId="{F53A0447-9D5C-7901-90EC-9DCA1B8EEF2E}"/>
+          </ac:spMkLst>
+        </pc:spChg>
+        <pc:spChg chg="mod">
+          <ac:chgData name="Dominique RIGHETTO" userId="512fe077-82ad-424c-88a3-15e852b5861d" providerId="ADAL" clId="{8B7CB91F-10CE-42C2-B9B8-BFF2D3401655}" dt="2026-01-05T10:42:38.769" v="3405" actId="20577"/>
+          <ac:spMkLst>
+            <pc:docMk/>
+            <pc:sldMk cId="3214065329" sldId="302"/>
+            <ac:spMk id="3" creationId="{AE353607-3A14-0643-DFFA-C974C4DCCC09}"/>
+          </ac:spMkLst>
+        </pc:spChg>
+        <pc:picChg chg="add mod">
+          <ac:chgData name="Dominique RIGHETTO" userId="512fe077-82ad-424c-88a3-15e852b5861d" providerId="ADAL" clId="{8B7CB91F-10CE-42C2-B9B8-BFF2D3401655}" dt="2026-01-05T10:42:19.671" v="3400" actId="14861"/>
+          <ac:picMkLst>
+            <pc:docMk/>
+            <pc:sldMk cId="3214065329" sldId="302"/>
+            <ac:picMk id="5" creationId="{466B5590-4ED1-AC27-53F1-E62264BECCF5}"/>
+          </ac:picMkLst>
+        </pc:picChg>
+        <pc:picChg chg="del">
+          <ac:chgData name="Dominique RIGHETTO" userId="512fe077-82ad-424c-88a3-15e852b5861d" providerId="ADAL" clId="{8B7CB91F-10CE-42C2-B9B8-BFF2D3401655}" dt="2026-01-05T10:41:58.694" v="3394" actId="478"/>
+          <ac:picMkLst>
+            <pc:docMk/>
+            <pc:sldMk cId="3214065329" sldId="302"/>
+            <ac:picMk id="6" creationId="{9A1F706E-74E3-6496-8FCE-CA94A9572665}"/>
+          </ac:picMkLst>
+        </pc:picChg>
+      </pc:sldChg>
+      <pc:sldChg chg="addSp delSp modSp add mod ord">
+        <pc:chgData name="Dominique RIGHETTO" userId="512fe077-82ad-424c-88a3-15e852b5861d" providerId="ADAL" clId="{8B7CB91F-10CE-42C2-B9B8-BFF2D3401655}" dt="2026-01-05T10:45:47.048" v="3608" actId="14861"/>
+        <pc:sldMkLst>
+          <pc:docMk/>
+          <pc:sldMk cId="715954666" sldId="303"/>
+        </pc:sldMkLst>
+        <pc:spChg chg="mod">
+          <ac:chgData name="Dominique RIGHETTO" userId="512fe077-82ad-424c-88a3-15e852b5861d" providerId="ADAL" clId="{8B7CB91F-10CE-42C2-B9B8-BFF2D3401655}" dt="2026-01-05T10:43:40.044" v="3412" actId="20577"/>
+          <ac:spMkLst>
+            <pc:docMk/>
+            <pc:sldMk cId="715954666" sldId="303"/>
+            <ac:spMk id="2" creationId="{A9F313D3-9682-06E4-65D5-8FFB9CA90034}"/>
+          </ac:spMkLst>
+        </pc:spChg>
+        <pc:spChg chg="mod">
+          <ac:chgData name="Dominique RIGHETTO" userId="512fe077-82ad-424c-88a3-15e852b5861d" providerId="ADAL" clId="{8B7CB91F-10CE-42C2-B9B8-BFF2D3401655}" dt="2026-01-05T10:45:08.656" v="3601" actId="20577"/>
+          <ac:spMkLst>
+            <pc:docMk/>
+            <pc:sldMk cId="715954666" sldId="303"/>
+            <ac:spMk id="3" creationId="{488F0DFF-4B1E-61BD-3A0C-17B1828785FB}"/>
+          </ac:spMkLst>
+        </pc:spChg>
+        <pc:picChg chg="del mod">
+          <ac:chgData name="Dominique RIGHETTO" userId="512fe077-82ad-424c-88a3-15e852b5861d" providerId="ADAL" clId="{8B7CB91F-10CE-42C2-B9B8-BFF2D3401655}" dt="2026-01-05T10:45:36.969" v="3602" actId="478"/>
+          <ac:picMkLst>
+            <pc:docMk/>
+            <pc:sldMk cId="715954666" sldId="303"/>
+            <ac:picMk id="5" creationId="{7E48A633-9522-9785-791F-5471505C42F7}"/>
+          </ac:picMkLst>
+        </pc:picChg>
+        <pc:picChg chg="add mod">
+          <ac:chgData name="Dominique RIGHETTO" userId="512fe077-82ad-424c-88a3-15e852b5861d" providerId="ADAL" clId="{8B7CB91F-10CE-42C2-B9B8-BFF2D3401655}" dt="2026-01-05T10:45:47.048" v="3608" actId="14861"/>
+          <ac:picMkLst>
+            <pc:docMk/>
+            <pc:sldMk cId="715954666" sldId="303"/>
+            <ac:picMk id="6" creationId="{475FA4F2-50B1-AA80-BC0E-12B86ECF77B6}"/>
+          </ac:picMkLst>
+        </pc:picChg>
+      </pc:sldChg>
+      <pc:sldChg chg="addSp delSp modSp add mod ord">
+        <pc:chgData name="Dominique RIGHETTO" userId="512fe077-82ad-424c-88a3-15e852b5861d" providerId="ADAL" clId="{8B7CB91F-10CE-42C2-B9B8-BFF2D3401655}" dt="2026-01-05T10:48:38.463" v="3641" actId="20577"/>
+        <pc:sldMkLst>
+          <pc:docMk/>
+          <pc:sldMk cId="24537132" sldId="304"/>
+        </pc:sldMkLst>
+        <pc:spChg chg="mod">
+          <ac:chgData name="Dominique RIGHETTO" userId="512fe077-82ad-424c-88a3-15e852b5861d" providerId="ADAL" clId="{8B7CB91F-10CE-42C2-B9B8-BFF2D3401655}" dt="2026-01-05T10:46:17.725" v="3613" actId="20577"/>
+          <ac:spMkLst>
+            <pc:docMk/>
+            <pc:sldMk cId="24537132" sldId="304"/>
+            <ac:spMk id="2" creationId="{66E27314-9212-A847-3ABE-683FE3011090}"/>
+          </ac:spMkLst>
+        </pc:spChg>
+        <pc:spChg chg="mod">
+          <ac:chgData name="Dominique RIGHETTO" userId="512fe077-82ad-424c-88a3-15e852b5861d" providerId="ADAL" clId="{8B7CB91F-10CE-42C2-B9B8-BFF2D3401655}" dt="2026-01-05T10:46:29.543" v="3632" actId="313"/>
+          <ac:spMkLst>
+            <pc:docMk/>
+            <pc:sldMk cId="24537132" sldId="304"/>
+            <ac:spMk id="3" creationId="{5A37EFEA-EF0C-F5AE-34D8-5C9A939C7816}"/>
+          </ac:spMkLst>
+        </pc:spChg>
+        <pc:spChg chg="mod">
+          <ac:chgData name="Dominique RIGHETTO" userId="512fe077-82ad-424c-88a3-15e852b5861d" providerId="ADAL" clId="{8B7CB91F-10CE-42C2-B9B8-BFF2D3401655}" dt="2026-01-05T10:48:38.463" v="3641" actId="20577"/>
+          <ac:spMkLst>
+            <pc:docMk/>
+            <pc:sldMk cId="24537132" sldId="304"/>
+            <ac:spMk id="7" creationId="{6158CC15-0C5B-B386-40D7-1FC6D70E2110}"/>
+          </ac:spMkLst>
+        </pc:spChg>
+        <pc:picChg chg="del">
+          <ac:chgData name="Dominique RIGHETTO" userId="512fe077-82ad-424c-88a3-15e852b5861d" providerId="ADAL" clId="{8B7CB91F-10CE-42C2-B9B8-BFF2D3401655}" dt="2026-01-05T10:48:05.185" v="3633" actId="478"/>
+          <ac:picMkLst>
+            <pc:docMk/>
+            <pc:sldMk cId="24537132" sldId="304"/>
+            <ac:picMk id="5" creationId="{ED462643-CC0B-F1FB-B6D0-080C0CA80837}"/>
+          </ac:picMkLst>
+        </pc:picChg>
+        <pc:picChg chg="add mod">
+          <ac:chgData name="Dominique RIGHETTO" userId="512fe077-82ad-424c-88a3-15e852b5861d" providerId="ADAL" clId="{8B7CB91F-10CE-42C2-B9B8-BFF2D3401655}" dt="2026-01-05T10:48:13.259" v="3637" actId="14861"/>
+          <ac:picMkLst>
+            <pc:docMk/>
+            <pc:sldMk cId="24537132" sldId="304"/>
+            <ac:picMk id="6" creationId="{6B4CFFA8-1969-CA7F-940D-965CDD058C7B}"/>
+          </ac:picMkLst>
+        </pc:picChg>
+      </pc:sldChg>
+      <pc:sldChg chg="addSp delSp modSp add mod ord">
+        <pc:chgData name="Dominique RIGHETTO" userId="512fe077-82ad-424c-88a3-15e852b5861d" providerId="ADAL" clId="{8B7CB91F-10CE-42C2-B9B8-BFF2D3401655}" dt="2026-01-05T10:59:37.292" v="3774" actId="1037"/>
+        <pc:sldMkLst>
+          <pc:docMk/>
+          <pc:sldMk cId="989586433" sldId="305"/>
+        </pc:sldMkLst>
+        <pc:spChg chg="mod">
+          <ac:chgData name="Dominique RIGHETTO" userId="512fe077-82ad-424c-88a3-15e852b5861d" providerId="ADAL" clId="{8B7CB91F-10CE-42C2-B9B8-BFF2D3401655}" dt="2026-01-05T10:50:35.575" v="3675" actId="20577"/>
+          <ac:spMkLst>
+            <pc:docMk/>
+            <pc:sldMk cId="989586433" sldId="305"/>
+            <ac:spMk id="2" creationId="{834B7364-6C98-7044-CEB2-5328BCDFDC6B}"/>
+          </ac:spMkLst>
+        </pc:spChg>
+        <pc:spChg chg="mod">
+          <ac:chgData name="Dominique RIGHETTO" userId="512fe077-82ad-424c-88a3-15e852b5861d" providerId="ADAL" clId="{8B7CB91F-10CE-42C2-B9B8-BFF2D3401655}" dt="2026-01-05T10:56:43.415" v="3760" actId="313"/>
+          <ac:spMkLst>
+            <pc:docMk/>
+            <pc:sldMk cId="989586433" sldId="305"/>
+            <ac:spMk id="3" creationId="{4DBACDBD-B750-A641-A360-8510B71B52F8}"/>
+          </ac:spMkLst>
+        </pc:spChg>
+        <pc:spChg chg="add mod">
+          <ac:chgData name="Dominique RIGHETTO" userId="512fe077-82ad-424c-88a3-15e852b5861d" providerId="ADAL" clId="{8B7CB91F-10CE-42C2-B9B8-BFF2D3401655}" dt="2026-01-05T10:59:19.418" v="3770" actId="1076"/>
+          <ac:spMkLst>
+            <pc:docMk/>
+            <pc:sldMk cId="989586433" sldId="305"/>
+            <ac:spMk id="9" creationId="{43CC8CFB-4C99-259F-A2E1-C1966F2A9256}"/>
+          </ac:spMkLst>
+        </pc:spChg>
+        <pc:picChg chg="del">
+          <ac:chgData name="Dominique RIGHETTO" userId="512fe077-82ad-424c-88a3-15e852b5861d" providerId="ADAL" clId="{8B7CB91F-10CE-42C2-B9B8-BFF2D3401655}" dt="2026-01-05T10:48:59.831" v="3645" actId="478"/>
+          <ac:picMkLst>
+            <pc:docMk/>
+            <pc:sldMk cId="989586433" sldId="305"/>
+            <ac:picMk id="5" creationId="{19E4CFDB-9F54-674E-5280-33F4416CA6C5}"/>
+          </ac:picMkLst>
+        </pc:picChg>
+        <pc:picChg chg="add mod">
+          <ac:chgData name="Dominique RIGHETTO" userId="512fe077-82ad-424c-88a3-15e852b5861d" providerId="ADAL" clId="{8B7CB91F-10CE-42C2-B9B8-BFF2D3401655}" dt="2026-01-05T10:59:37.292" v="3774" actId="1037"/>
+          <ac:picMkLst>
+            <pc:docMk/>
+            <pc:sldMk cId="989586433" sldId="305"/>
+            <ac:picMk id="6" creationId="{E63415D6-6D65-95E4-C7BC-8A1B52CE7E8A}"/>
+          </ac:picMkLst>
+        </pc:picChg>
+        <pc:picChg chg="add mod">
+          <ac:chgData name="Dominique RIGHETTO" userId="512fe077-82ad-424c-88a3-15e852b5861d" providerId="ADAL" clId="{8B7CB91F-10CE-42C2-B9B8-BFF2D3401655}" dt="2026-01-05T10:58:58.421" v="3767" actId="1076"/>
+          <ac:picMkLst>
+            <pc:docMk/>
+            <pc:sldMk cId="989586433" sldId="305"/>
+            <ac:picMk id="8" creationId="{D6C333E4-EAB2-386F-0AA9-7808BDB89AD5}"/>
           </ac:picMkLst>
         </pc:picChg>
       </pc:sldChg>
@@ -43771,10 +44203,10 @@
       </p:sp>
       <p:pic>
         <p:nvPicPr>
-          <p:cNvPr id="5" name="Picture 4">
+          <p:cNvPr id="6" name="Picture 5">
             <a:extLst>
               <a:ext uri="{FF2B5EF4-FFF2-40B4-BE49-F238E27FC236}">
-                <a16:creationId xmlns:a16="http://schemas.microsoft.com/office/drawing/2014/main" id="{E19C5A8C-6DBB-317B-9B48-46D19F9CC066}"/>
+                <a16:creationId xmlns:a16="http://schemas.microsoft.com/office/drawing/2014/main" id="{99059005-BA3A-F6BB-37CD-87E255CF8D33}"/>
               </a:ext>
             </a:extLst>
           </p:cNvPr>
@@ -43791,8 +44223,8 @@
         </p:blipFill>
         <p:spPr>
           <a:xfrm>
-            <a:off x="2616660" y="2024480"/>
-            <a:ext cx="7103221" cy="3982915"/>
+            <a:off x="1960560" y="2001898"/>
+            <a:ext cx="8270880" cy="3924449"/>
           </a:xfrm>
           <a:prstGeom prst="rect">
             <a:avLst/>
@@ -43816,6 +44248,249 @@
   <p:clrMapOvr>
     <a:masterClrMapping/>
   </p:clrMapOvr>
+  <mc:AlternateContent xmlns:mc="http://schemas.openxmlformats.org/markup-compatibility/2006" xmlns:p14="http://schemas.microsoft.com/office/powerpoint/2010/main">
+    <mc:Choice Requires="p14">
+      <p:transition spd="med" p14:dur="700">
+        <p:fade/>
+      </p:transition>
+    </mc:Choice>
+    <mc:Fallback xmlns="">
+      <p:transition spd="med">
+        <p:fade/>
+      </p:transition>
+    </mc:Fallback>
+  </mc:AlternateContent>
+</p:sld>
+</file>
+
+<file path=ppt/slides/slide11.xml><?xml version="1.0" encoding="utf-8"?>
+<p:sld xmlns:a="http://schemas.openxmlformats.org/drawingml/2006/main" xmlns:r="http://schemas.openxmlformats.org/officeDocument/2006/relationships" xmlns:p="http://schemas.openxmlformats.org/presentationml/2006/main">
+  <p:cSld>
+    <p:spTree>
+      <p:nvGrpSpPr>
+        <p:cNvPr id="1" name="">
+          <a:extLst>
+            <a:ext uri="{FF2B5EF4-FFF2-40B4-BE49-F238E27FC236}">
+              <a16:creationId xmlns:a16="http://schemas.microsoft.com/office/drawing/2014/main" id="{E346FFC1-FE2F-6CD6-EA62-E769DBBDB7A6}"/>
+            </a:ext>
+          </a:extLst>
+        </p:cNvPr>
+        <p:cNvGrpSpPr/>
+        <p:nvPr/>
+      </p:nvGrpSpPr>
+      <p:grpSpPr>
+        <a:xfrm>
+          <a:off x="0" y="0"/>
+          <a:ext cx="0" cy="0"/>
+          <a:chOff x="0" y="0"/>
+          <a:chExt cx="0" cy="0"/>
+        </a:xfrm>
+      </p:grpSpPr>
+      <p:sp>
+        <p:nvSpPr>
+          <p:cNvPr id="2" name="Titre 1">
+            <a:extLst>
+              <a:ext uri="{FF2B5EF4-FFF2-40B4-BE49-F238E27FC236}">
+                <a16:creationId xmlns:a16="http://schemas.microsoft.com/office/drawing/2014/main" id="{B845A4E6-506C-8A54-282B-B9A27DF974D9}"/>
+              </a:ext>
+            </a:extLst>
+          </p:cNvPr>
+          <p:cNvSpPr>
+            <a:spLocks noGrp="1"/>
+          </p:cNvSpPr>
+          <p:nvPr>
+            <p:ph type="title"/>
+          </p:nvPr>
+        </p:nvSpPr>
+        <p:spPr/>
+        <p:txBody>
+          <a:bodyPr/>
+          <a:lstStyle/>
+          <a:p>
+            <a:r>
+              <a:rPr lang="en-US" dirty="0"/>
+              <a:t>📖 Let’s the story begin – Round n°1</a:t>
+            </a:r>
+          </a:p>
+        </p:txBody>
+      </p:sp>
+      <p:sp>
+        <p:nvSpPr>
+          <p:cNvPr id="3" name="Espace réservé du texte 2">
+            <a:extLst>
+              <a:ext uri="{FF2B5EF4-FFF2-40B4-BE49-F238E27FC236}">
+                <a16:creationId xmlns:a16="http://schemas.microsoft.com/office/drawing/2014/main" id="{EA2D3DAB-E05A-AC9C-4BBB-4A581D9BF3D5}"/>
+              </a:ext>
+            </a:extLst>
+          </p:cNvPr>
+          <p:cNvSpPr>
+            <a:spLocks noGrp="1"/>
+          </p:cNvSpPr>
+          <p:nvPr>
+            <p:ph type="body" sz="quarter" idx="15"/>
+          </p:nvPr>
+        </p:nvSpPr>
+        <p:spPr>
+          <a:xfrm>
+            <a:off x="588000" y="977317"/>
+            <a:ext cx="11419970" cy="4949030"/>
+          </a:xfrm>
+        </p:spPr>
+        <p:txBody>
+          <a:bodyPr/>
+          <a:lstStyle/>
+          <a:p>
+            <a:r>
+              <a:rPr lang="en-US" sz="2800" b="0" dirty="0">
+                <a:solidFill>
+                  <a:schemeClr val="tx2"/>
+                </a:solidFill>
+              </a:rPr>
+              <a:t> A first test was performed with a Windows binary file renamed as a pdf file:</a:t>
+            </a:r>
+          </a:p>
+          <a:p>
+            <a:endParaRPr lang="en-US" sz="2800" b="0" dirty="0">
+              <a:solidFill>
+                <a:schemeClr val="tx2"/>
+              </a:solidFill>
+            </a:endParaRPr>
+          </a:p>
+          <a:p>
+            <a:pPr marL="0" indent="0">
+              <a:buNone/>
+            </a:pPr>
+            <a:r>
+              <a:rPr lang="en-US" sz="2800" b="0" dirty="0">
+                <a:solidFill>
+                  <a:schemeClr val="tx2"/>
+                </a:solidFill>
+              </a:rPr>
+              <a:t> </a:t>
+            </a:r>
+          </a:p>
+          <a:p>
+            <a:r>
+              <a:rPr lang="en-US" sz="2800" b="0" dirty="0">
+                <a:solidFill>
+                  <a:schemeClr val="tx2"/>
+                </a:solidFill>
+              </a:rPr>
+              <a:t> The goal was to test is the service ensure that </a:t>
+            </a:r>
+            <a:r>
+              <a:rPr lang="en-US" sz="2800" b="0" dirty="0">
+                <a:solidFill>
+                  <a:schemeClr val="accent5"/>
+                </a:solidFill>
+              </a:rPr>
+              <a:t>the provided file is a valid PDF file</a:t>
+            </a:r>
+            <a:r>
+              <a:rPr lang="en-US" sz="2800" b="0" dirty="0">
+                <a:solidFill>
+                  <a:schemeClr val="tx2"/>
+                </a:solidFill>
+              </a:rPr>
+              <a:t>:</a:t>
+            </a:r>
+          </a:p>
+          <a:p>
+            <a:pPr marL="0" indent="0">
+              <a:buNone/>
+            </a:pPr>
+            <a:endParaRPr lang="en-US" sz="2800" b="0" dirty="0">
+              <a:solidFill>
+                <a:schemeClr val="tx2"/>
+              </a:solidFill>
+            </a:endParaRPr>
+          </a:p>
+        </p:txBody>
+      </p:sp>
+      <p:pic>
+        <p:nvPicPr>
+          <p:cNvPr id="5" name="Picture 4">
+            <a:extLst>
+              <a:ext uri="{FF2B5EF4-FFF2-40B4-BE49-F238E27FC236}">
+                <a16:creationId xmlns:a16="http://schemas.microsoft.com/office/drawing/2014/main" id="{B2535224-3613-CF14-2DE1-50957EDA5478}"/>
+              </a:ext>
+            </a:extLst>
+          </p:cNvPr>
+          <p:cNvPicPr>
+            <a:picLocks noChangeAspect="1"/>
+          </p:cNvPicPr>
+          <p:nvPr/>
+        </p:nvPicPr>
+        <p:blipFill>
+          <a:blip r:embed="rId2"/>
+          <a:stretch>
+            <a:fillRect/>
+          </a:stretch>
+        </p:blipFill>
+        <p:spPr>
+          <a:xfrm>
+            <a:off x="785427" y="2381659"/>
+            <a:ext cx="11025116" cy="744312"/>
+          </a:xfrm>
+          <a:prstGeom prst="rect">
+            <a:avLst/>
+          </a:prstGeom>
+          <a:effectLst>
+            <a:outerShdw blurRad="50800" dist="38100" dir="2700000" algn="tl" rotWithShape="0">
+              <a:prstClr val="black">
+                <a:alpha val="40000"/>
+              </a:prstClr>
+            </a:outerShdw>
+          </a:effectLst>
+        </p:spPr>
+      </p:pic>
+      <p:pic>
+        <p:nvPicPr>
+          <p:cNvPr id="8" name="Picture 7">
+            <a:extLst>
+              <a:ext uri="{FF2B5EF4-FFF2-40B4-BE49-F238E27FC236}">
+                <a16:creationId xmlns:a16="http://schemas.microsoft.com/office/drawing/2014/main" id="{CDEA6B6B-ADE2-DDA5-F518-5F11F0C59B9D}"/>
+              </a:ext>
+            </a:extLst>
+          </p:cNvPr>
+          <p:cNvPicPr>
+            <a:picLocks noChangeAspect="1"/>
+          </p:cNvPicPr>
+          <p:nvPr/>
+        </p:nvPicPr>
+        <p:blipFill>
+          <a:blip r:embed="rId3"/>
+          <a:stretch>
+            <a:fillRect/>
+          </a:stretch>
+        </p:blipFill>
+        <p:spPr>
+          <a:xfrm>
+            <a:off x="1484186" y="4802226"/>
+            <a:ext cx="9223627" cy="744312"/>
+          </a:xfrm>
+          <a:prstGeom prst="rect">
+            <a:avLst/>
+          </a:prstGeom>
+          <a:effectLst>
+            <a:outerShdw blurRad="50800" dist="38100" dir="2700000" algn="tl" rotWithShape="0">
+              <a:prstClr val="black">
+                <a:alpha val="40000"/>
+              </a:prstClr>
+            </a:outerShdw>
+          </a:effectLst>
+        </p:spPr>
+      </p:pic>
+    </p:spTree>
+    <p:extLst>
+      <p:ext uri="{BB962C8B-B14F-4D97-AF65-F5344CB8AC3E}">
+        <p14:creationId xmlns:p14="http://schemas.microsoft.com/office/powerpoint/2010/main" val="709545358"/>
+      </p:ext>
+    </p:extLst>
+  </p:cSld>
+  <p:clrMapOvr>
+    <a:masterClrMapping/>
+  </p:clrMapOvr>
   <mc:AlternateContent xmlns:mc="http://schemas.openxmlformats.org/markup-compatibility/2006">
     <mc:Choice xmlns:p14="http://schemas.microsoft.com/office/powerpoint/2010/main" Requires="p14">
       <p:transition spd="med" p14:dur="700">
@@ -43831,12 +44506,18 @@
 </p:sld>
 </file>
 
-<file path=ppt/slides/slide11.xml><?xml version="1.0" encoding="utf-8"?>
+<file path=ppt/slides/slide12.xml><?xml version="1.0" encoding="utf-8"?>
 <p:sld xmlns:a="http://schemas.openxmlformats.org/drawingml/2006/main" xmlns:r="http://schemas.openxmlformats.org/officeDocument/2006/relationships" xmlns:p="http://schemas.openxmlformats.org/presentationml/2006/main">
   <p:cSld>
     <p:spTree>
       <p:nvGrpSpPr>
-        <p:cNvPr id="1" name=""/>
+        <p:cNvPr id="1" name="">
+          <a:extLst>
+            <a:ext uri="{FF2B5EF4-FFF2-40B4-BE49-F238E27FC236}">
+              <a16:creationId xmlns:a16="http://schemas.microsoft.com/office/drawing/2014/main" id="{21ABB043-FCDD-8E77-8DD7-910EF2C441E0}"/>
+            </a:ext>
+          </a:extLst>
+        </p:cNvPr>
         <p:cNvGrpSpPr/>
         <p:nvPr/>
       </p:nvGrpSpPr>
@@ -43848,23 +44529,1721 @@
           <a:chExt cx="0" cy="0"/>
         </a:xfrm>
       </p:grpSpPr>
+      <p:sp>
+        <p:nvSpPr>
+          <p:cNvPr id="2" name="Titre 1">
+            <a:extLst>
+              <a:ext uri="{FF2B5EF4-FFF2-40B4-BE49-F238E27FC236}">
+                <a16:creationId xmlns:a16="http://schemas.microsoft.com/office/drawing/2014/main" id="{A48B1937-E229-DAB6-0930-B3E44E3920DE}"/>
+              </a:ext>
+            </a:extLst>
+          </p:cNvPr>
+          <p:cNvSpPr>
+            <a:spLocks noGrp="1"/>
+          </p:cNvSpPr>
+          <p:nvPr>
+            <p:ph type="title"/>
+          </p:nvPr>
+        </p:nvSpPr>
+        <p:spPr/>
+        <p:txBody>
+          <a:bodyPr/>
+          <a:lstStyle/>
+          <a:p>
+            <a:r>
+              <a:rPr lang="en-US" dirty="0"/>
+              <a:t>📖 Let’s the story begin – Round n°1</a:t>
+            </a:r>
+          </a:p>
+        </p:txBody>
+      </p:sp>
+      <p:sp>
+        <p:nvSpPr>
+          <p:cNvPr id="3" name="Espace réservé du texte 2">
+            <a:extLst>
+              <a:ext uri="{FF2B5EF4-FFF2-40B4-BE49-F238E27FC236}">
+                <a16:creationId xmlns:a16="http://schemas.microsoft.com/office/drawing/2014/main" id="{83029DA1-9BCD-3EBD-0C74-543E48734A9E}"/>
+              </a:ext>
+            </a:extLst>
+          </p:cNvPr>
+          <p:cNvSpPr>
+            <a:spLocks noGrp="1"/>
+          </p:cNvSpPr>
+          <p:nvPr>
+            <p:ph type="body" sz="quarter" idx="15"/>
+          </p:nvPr>
+        </p:nvSpPr>
+        <p:spPr>
+          <a:xfrm>
+            <a:off x="588000" y="977317"/>
+            <a:ext cx="11419970" cy="4949030"/>
+          </a:xfrm>
+        </p:spPr>
+        <p:txBody>
+          <a:bodyPr/>
+          <a:lstStyle/>
+          <a:p>
+            <a:r>
+              <a:rPr lang="en-US" sz="2800" b="0" dirty="0">
+                <a:solidFill>
+                  <a:schemeClr val="tx2"/>
+                </a:solidFill>
+              </a:rPr>
+              <a:t> 🤔 Test failed so the following additional validation was proposed to the team:</a:t>
+            </a:r>
+          </a:p>
+          <a:p>
+            <a:pPr lvl="1"/>
+            <a:r>
+              <a:rPr lang="en-US" sz="2400" dirty="0"/>
+              <a:t>Ensure that the provided file is valid PDF by try loading it via a PDF parser.</a:t>
+            </a:r>
+          </a:p>
+          <a:p>
+            <a:pPr marL="0" lvl="1" indent="0">
+              <a:buNone/>
+            </a:pPr>
+            <a:endParaRPr lang="en-US" sz="2400" b="0" dirty="0">
+              <a:solidFill>
+                <a:schemeClr val="tx2"/>
+              </a:solidFill>
+            </a:endParaRPr>
+          </a:p>
+          <a:p>
+            <a:r>
+              <a:rPr lang="en-US" sz="2800" b="0" dirty="0">
+                <a:solidFill>
+                  <a:schemeClr val="tx2"/>
+                </a:solidFill>
+              </a:rPr>
+              <a:t> ✅ Test passed after the adding of the additional validation:</a:t>
+            </a:r>
+          </a:p>
+          <a:p>
+            <a:endParaRPr lang="en-US" sz="2800" b="0" dirty="0">
+              <a:solidFill>
+                <a:schemeClr val="tx2"/>
+              </a:solidFill>
+            </a:endParaRPr>
+          </a:p>
+          <a:p>
+            <a:pPr marL="0" indent="0">
+              <a:buNone/>
+            </a:pPr>
+            <a:r>
+              <a:rPr lang="en-US" sz="2800" b="0" dirty="0">
+                <a:solidFill>
+                  <a:schemeClr val="tx2"/>
+                </a:solidFill>
+              </a:rPr>
+              <a:t>  </a:t>
+            </a:r>
+          </a:p>
+        </p:txBody>
+      </p:sp>
+      <p:pic>
+        <p:nvPicPr>
+          <p:cNvPr id="6" name="Picture 5">
+            <a:extLst>
+              <a:ext uri="{FF2B5EF4-FFF2-40B4-BE49-F238E27FC236}">
+                <a16:creationId xmlns:a16="http://schemas.microsoft.com/office/drawing/2014/main" id="{4EBD515D-220C-665B-DCFE-5BDD41EA43E8}"/>
+              </a:ext>
+            </a:extLst>
+          </p:cNvPr>
+          <p:cNvPicPr>
+            <a:picLocks noChangeAspect="1"/>
+          </p:cNvPicPr>
+          <p:nvPr/>
+        </p:nvPicPr>
+        <p:blipFill>
+          <a:blip r:embed="rId2"/>
+          <a:stretch>
+            <a:fillRect/>
+          </a:stretch>
+        </p:blipFill>
+        <p:spPr>
+          <a:xfrm>
+            <a:off x="1464702" y="4251883"/>
+            <a:ext cx="9262596" cy="670991"/>
+          </a:xfrm>
+          <a:prstGeom prst="rect">
+            <a:avLst/>
+          </a:prstGeom>
+          <a:effectLst>
+            <a:outerShdw blurRad="50800" dist="38100" dir="2700000" algn="tl" rotWithShape="0">
+              <a:prstClr val="black">
+                <a:alpha val="40000"/>
+              </a:prstClr>
+            </a:outerShdw>
+          </a:effectLst>
+        </p:spPr>
+      </p:pic>
+      <p:sp>
+        <p:nvSpPr>
+          <p:cNvPr id="7" name="TextBox 6">
+            <a:extLst>
+              <a:ext uri="{FF2B5EF4-FFF2-40B4-BE49-F238E27FC236}">
+                <a16:creationId xmlns:a16="http://schemas.microsoft.com/office/drawing/2014/main" id="{902C893A-AE8C-38CF-319B-BB6D877250CE}"/>
+              </a:ext>
+            </a:extLst>
+          </p:cNvPr>
+          <p:cNvSpPr txBox="1"/>
+          <p:nvPr/>
+        </p:nvSpPr>
+        <p:spPr>
+          <a:xfrm>
+            <a:off x="8967059" y="113779"/>
+            <a:ext cx="3040911" cy="246221"/>
+          </a:xfrm>
+          <a:prstGeom prst="rect">
+            <a:avLst/>
+          </a:prstGeom>
+          <a:noFill/>
+        </p:spPr>
+        <p:txBody>
+          <a:bodyPr wrap="square" lIns="0" tIns="0" rIns="0" bIns="0" rtlCol="0">
+            <a:spAutoFit/>
+          </a:bodyPr>
+          <a:lstStyle/>
+          <a:p>
+            <a:pPr algn="l"/>
+            <a:r>
+              <a:rPr lang="en-US" sz="1600" noProof="0" dirty="0">
+                <a:solidFill>
+                  <a:schemeClr val="accent3"/>
+                </a:solidFill>
+              </a:rPr>
+              <a:t>🤬 Level of exasperation: 16%</a:t>
+            </a:r>
+          </a:p>
+        </p:txBody>
+      </p:sp>
     </p:spTree>
     <p:extLst>
       <p:ext uri="{BB962C8B-B14F-4D97-AF65-F5344CB8AC3E}">
-        <p14:creationId xmlns:p14="http://schemas.microsoft.com/office/powerpoint/2010/main" val="3277138299"/>
+        <p14:creationId xmlns:p14="http://schemas.microsoft.com/office/powerpoint/2010/main" val="3961351739"/>
       </p:ext>
     </p:extLst>
   </p:cSld>
   <p:clrMapOvr>
     <a:masterClrMapping/>
   </p:clrMapOvr>
-  <mc:AlternateContent xmlns:mc="http://schemas.openxmlformats.org/markup-compatibility/2006" xmlns:p14="http://schemas.microsoft.com/office/powerpoint/2010/main">
-    <mc:Choice Requires="p14">
+  <mc:AlternateContent xmlns:mc="http://schemas.openxmlformats.org/markup-compatibility/2006">
+    <mc:Choice xmlns:p14="http://schemas.microsoft.com/office/powerpoint/2010/main" Requires="p14">
       <p:transition spd="med" p14:dur="700">
         <p:fade/>
       </p:transition>
     </mc:Choice>
-    <mc:Fallback xmlns="">
+    <mc:Fallback>
+      <p:transition spd="med">
+        <p:fade/>
+      </p:transition>
+    </mc:Fallback>
+  </mc:AlternateContent>
+</p:sld>
+</file>
+
+<file path=ppt/slides/slide13.xml><?xml version="1.0" encoding="utf-8"?>
+<p:sld xmlns:a="http://schemas.openxmlformats.org/drawingml/2006/main" xmlns:r="http://schemas.openxmlformats.org/officeDocument/2006/relationships" xmlns:p="http://schemas.openxmlformats.org/presentationml/2006/main">
+  <p:cSld>
+    <p:spTree>
+      <p:nvGrpSpPr>
+        <p:cNvPr id="1" name="">
+          <a:extLst>
+            <a:ext uri="{FF2B5EF4-FFF2-40B4-BE49-F238E27FC236}">
+              <a16:creationId xmlns:a16="http://schemas.microsoft.com/office/drawing/2014/main" id="{DE9365A8-FB91-8218-737D-7E75815AA090}"/>
+            </a:ext>
+          </a:extLst>
+        </p:cNvPr>
+        <p:cNvGrpSpPr/>
+        <p:nvPr/>
+      </p:nvGrpSpPr>
+      <p:grpSpPr>
+        <a:xfrm>
+          <a:off x="0" y="0"/>
+          <a:ext cx="0" cy="0"/>
+          <a:chOff x="0" y="0"/>
+          <a:chExt cx="0" cy="0"/>
+        </a:xfrm>
+      </p:grpSpPr>
+      <p:sp>
+        <p:nvSpPr>
+          <p:cNvPr id="2" name="Titre 1">
+            <a:extLst>
+              <a:ext uri="{FF2B5EF4-FFF2-40B4-BE49-F238E27FC236}">
+                <a16:creationId xmlns:a16="http://schemas.microsoft.com/office/drawing/2014/main" id="{3D5DB75B-6770-31DB-523A-9A3D7DBF1E60}"/>
+              </a:ext>
+            </a:extLst>
+          </p:cNvPr>
+          <p:cNvSpPr>
+            <a:spLocks noGrp="1"/>
+          </p:cNvSpPr>
+          <p:nvPr>
+            <p:ph type="title"/>
+          </p:nvPr>
+        </p:nvSpPr>
+        <p:spPr/>
+        <p:txBody>
+          <a:bodyPr/>
+          <a:lstStyle/>
+          <a:p>
+            <a:r>
+              <a:rPr lang="en-US" dirty="0"/>
+              <a:t>📖 Let’s the story begin – Round n°2</a:t>
+            </a:r>
+          </a:p>
+        </p:txBody>
+      </p:sp>
+      <p:sp>
+        <p:nvSpPr>
+          <p:cNvPr id="3" name="Espace réservé du texte 2">
+            <a:extLst>
+              <a:ext uri="{FF2B5EF4-FFF2-40B4-BE49-F238E27FC236}">
+                <a16:creationId xmlns:a16="http://schemas.microsoft.com/office/drawing/2014/main" id="{741381EB-99BC-524D-D960-85D1ABC4DC70}"/>
+              </a:ext>
+            </a:extLst>
+          </p:cNvPr>
+          <p:cNvSpPr>
+            <a:spLocks noGrp="1"/>
+          </p:cNvSpPr>
+          <p:nvPr>
+            <p:ph type="body" sz="quarter" idx="15"/>
+          </p:nvPr>
+        </p:nvSpPr>
+        <p:spPr>
+          <a:xfrm>
+            <a:off x="588000" y="977317"/>
+            <a:ext cx="11419970" cy="4949030"/>
+          </a:xfrm>
+        </p:spPr>
+        <p:txBody>
+          <a:bodyPr/>
+          <a:lstStyle/>
+          <a:p>
+            <a:r>
+              <a:rPr lang="en-US" sz="2800" b="0" dirty="0">
+                <a:solidFill>
+                  <a:schemeClr val="tx2"/>
+                </a:solidFill>
+              </a:rPr>
+              <a:t> A second test was performed with a valid PDF file containing a JavaScript code triggered when the file is opened:</a:t>
+            </a:r>
+          </a:p>
+          <a:p>
+            <a:endParaRPr lang="en-US" sz="2800" b="0" dirty="0">
+              <a:solidFill>
+                <a:schemeClr val="tx2"/>
+              </a:solidFill>
+            </a:endParaRPr>
+          </a:p>
+          <a:p>
+            <a:pPr marL="0" indent="0">
+              <a:buNone/>
+            </a:pPr>
+            <a:r>
+              <a:rPr lang="en-US" sz="2800" b="0" dirty="0">
+                <a:solidFill>
+                  <a:schemeClr val="tx2"/>
+                </a:solidFill>
+              </a:rPr>
+              <a:t> </a:t>
+            </a:r>
+          </a:p>
+          <a:p>
+            <a:pPr marL="0" indent="0">
+              <a:buNone/>
+            </a:pPr>
+            <a:endParaRPr lang="en-US" sz="2800" b="0" dirty="0">
+              <a:solidFill>
+                <a:schemeClr val="tx2"/>
+              </a:solidFill>
+            </a:endParaRPr>
+          </a:p>
+        </p:txBody>
+      </p:sp>
+      <p:pic>
+        <p:nvPicPr>
+          <p:cNvPr id="6" name="Picture 5">
+            <a:extLst>
+              <a:ext uri="{FF2B5EF4-FFF2-40B4-BE49-F238E27FC236}">
+                <a16:creationId xmlns:a16="http://schemas.microsoft.com/office/drawing/2014/main" id="{34B80029-5A50-92BD-D91B-7B26F946AAA4}"/>
+              </a:ext>
+            </a:extLst>
+          </p:cNvPr>
+          <p:cNvPicPr>
+            <a:picLocks noChangeAspect="1"/>
+          </p:cNvPicPr>
+          <p:nvPr/>
+        </p:nvPicPr>
+        <p:blipFill>
+          <a:blip r:embed="rId2"/>
+          <a:stretch>
+            <a:fillRect/>
+          </a:stretch>
+        </p:blipFill>
+        <p:spPr>
+          <a:xfrm>
+            <a:off x="2466103" y="2001809"/>
+            <a:ext cx="6964977" cy="3924538"/>
+          </a:xfrm>
+          <a:prstGeom prst="rect">
+            <a:avLst/>
+          </a:prstGeom>
+          <a:effectLst>
+            <a:outerShdw blurRad="50800" dist="38100" dir="2700000" algn="tl" rotWithShape="0">
+              <a:prstClr val="black">
+                <a:alpha val="40000"/>
+              </a:prstClr>
+            </a:outerShdw>
+          </a:effectLst>
+        </p:spPr>
+      </p:pic>
+    </p:spTree>
+    <p:extLst>
+      <p:ext uri="{BB962C8B-B14F-4D97-AF65-F5344CB8AC3E}">
+        <p14:creationId xmlns:p14="http://schemas.microsoft.com/office/powerpoint/2010/main" val="2399632653"/>
+      </p:ext>
+    </p:extLst>
+  </p:cSld>
+  <p:clrMapOvr>
+    <a:masterClrMapping/>
+  </p:clrMapOvr>
+  <mc:AlternateContent xmlns:mc="http://schemas.openxmlformats.org/markup-compatibility/2006">
+    <mc:Choice xmlns:p14="http://schemas.microsoft.com/office/powerpoint/2010/main" Requires="p14">
+      <p:transition spd="med" p14:dur="700">
+        <p:fade/>
+      </p:transition>
+    </mc:Choice>
+    <mc:Fallback>
+      <p:transition spd="med">
+        <p:fade/>
+      </p:transition>
+    </mc:Fallback>
+  </mc:AlternateContent>
+</p:sld>
+</file>
+
+<file path=ppt/slides/slide14.xml><?xml version="1.0" encoding="utf-8"?>
+<p:sld xmlns:a="http://schemas.openxmlformats.org/drawingml/2006/main" xmlns:r="http://schemas.openxmlformats.org/officeDocument/2006/relationships" xmlns:p="http://schemas.openxmlformats.org/presentationml/2006/main">
+  <p:cSld>
+    <p:spTree>
+      <p:nvGrpSpPr>
+        <p:cNvPr id="1" name="">
+          <a:extLst>
+            <a:ext uri="{FF2B5EF4-FFF2-40B4-BE49-F238E27FC236}">
+              <a16:creationId xmlns:a16="http://schemas.microsoft.com/office/drawing/2014/main" id="{F2F6E62F-D9BE-06EF-9EF1-AF13C9CF7F7D}"/>
+            </a:ext>
+          </a:extLst>
+        </p:cNvPr>
+        <p:cNvGrpSpPr/>
+        <p:nvPr/>
+      </p:nvGrpSpPr>
+      <p:grpSpPr>
+        <a:xfrm>
+          <a:off x="0" y="0"/>
+          <a:ext cx="0" cy="0"/>
+          <a:chOff x="0" y="0"/>
+          <a:chExt cx="0" cy="0"/>
+        </a:xfrm>
+      </p:grpSpPr>
+      <p:sp>
+        <p:nvSpPr>
+          <p:cNvPr id="2" name="Titre 1">
+            <a:extLst>
+              <a:ext uri="{FF2B5EF4-FFF2-40B4-BE49-F238E27FC236}">
+                <a16:creationId xmlns:a16="http://schemas.microsoft.com/office/drawing/2014/main" id="{F12FADC8-4494-0183-9CC5-4A0F2526C85E}"/>
+              </a:ext>
+            </a:extLst>
+          </p:cNvPr>
+          <p:cNvSpPr>
+            <a:spLocks noGrp="1"/>
+          </p:cNvSpPr>
+          <p:nvPr>
+            <p:ph type="title"/>
+          </p:nvPr>
+        </p:nvSpPr>
+        <p:spPr/>
+        <p:txBody>
+          <a:bodyPr/>
+          <a:lstStyle/>
+          <a:p>
+            <a:r>
+              <a:rPr lang="en-US" dirty="0"/>
+              <a:t>📖 Let’s the story begin – Round n°2</a:t>
+            </a:r>
+          </a:p>
+        </p:txBody>
+      </p:sp>
+      <p:sp>
+        <p:nvSpPr>
+          <p:cNvPr id="3" name="Espace réservé du texte 2">
+            <a:extLst>
+              <a:ext uri="{FF2B5EF4-FFF2-40B4-BE49-F238E27FC236}">
+                <a16:creationId xmlns:a16="http://schemas.microsoft.com/office/drawing/2014/main" id="{0C7D0AE3-4D9F-D903-11DB-723CC3B837B9}"/>
+              </a:ext>
+            </a:extLst>
+          </p:cNvPr>
+          <p:cNvSpPr>
+            <a:spLocks noGrp="1"/>
+          </p:cNvSpPr>
+          <p:nvPr>
+            <p:ph type="body" sz="quarter" idx="15"/>
+          </p:nvPr>
+        </p:nvSpPr>
+        <p:spPr>
+          <a:xfrm>
+            <a:off x="588000" y="977317"/>
+            <a:ext cx="11419970" cy="4949030"/>
+          </a:xfrm>
+        </p:spPr>
+        <p:txBody>
+          <a:bodyPr/>
+          <a:lstStyle/>
+          <a:p>
+            <a:r>
+              <a:rPr lang="en-US" sz="2800" b="0" dirty="0">
+                <a:solidFill>
+                  <a:schemeClr val="tx2"/>
+                </a:solidFill>
+              </a:rPr>
+              <a:t> The goal was to test if the service ensure that the provided PDF file do not contain any JavaScript code that </a:t>
+            </a:r>
+            <a:r>
+              <a:rPr lang="en-US" sz="2800" b="0" dirty="0">
+                <a:solidFill>
+                  <a:schemeClr val="accent5"/>
+                </a:solidFill>
+              </a:rPr>
+              <a:t>can trigger actions on behalf of the user </a:t>
+            </a:r>
+            <a:r>
+              <a:rPr lang="en-US" sz="2800" b="0" dirty="0">
+                <a:solidFill>
+                  <a:schemeClr val="tx2"/>
+                </a:solidFill>
+              </a:rPr>
+              <a:t>when he open the file:</a:t>
+            </a:r>
+          </a:p>
+          <a:p>
+            <a:pPr marL="0" indent="0">
+              <a:buNone/>
+            </a:pPr>
+            <a:endParaRPr lang="en-US" sz="2800" b="0" dirty="0">
+              <a:solidFill>
+                <a:schemeClr val="tx2"/>
+              </a:solidFill>
+            </a:endParaRPr>
+          </a:p>
+        </p:txBody>
+      </p:sp>
+      <p:pic>
+        <p:nvPicPr>
+          <p:cNvPr id="5" name="Picture 4">
+            <a:extLst>
+              <a:ext uri="{FF2B5EF4-FFF2-40B4-BE49-F238E27FC236}">
+                <a16:creationId xmlns:a16="http://schemas.microsoft.com/office/drawing/2014/main" id="{037C562B-8E3E-0BB5-2C7F-AB3C29B44C6A}"/>
+              </a:ext>
+            </a:extLst>
+          </p:cNvPr>
+          <p:cNvPicPr>
+            <a:picLocks noChangeAspect="1"/>
+          </p:cNvPicPr>
+          <p:nvPr/>
+        </p:nvPicPr>
+        <p:blipFill>
+          <a:blip r:embed="rId2"/>
+          <a:stretch>
+            <a:fillRect/>
+          </a:stretch>
+        </p:blipFill>
+        <p:spPr>
+          <a:xfrm>
+            <a:off x="1113538" y="2978498"/>
+            <a:ext cx="9964923" cy="946668"/>
+          </a:xfrm>
+          <a:prstGeom prst="rect">
+            <a:avLst/>
+          </a:prstGeom>
+          <a:effectLst>
+            <a:outerShdw blurRad="50800" dist="38100" dir="2700000" algn="tl" rotWithShape="0">
+              <a:prstClr val="black">
+                <a:alpha val="40000"/>
+              </a:prstClr>
+            </a:outerShdw>
+          </a:effectLst>
+        </p:spPr>
+      </p:pic>
+    </p:spTree>
+    <p:extLst>
+      <p:ext uri="{BB962C8B-B14F-4D97-AF65-F5344CB8AC3E}">
+        <p14:creationId xmlns:p14="http://schemas.microsoft.com/office/powerpoint/2010/main" val="1761927550"/>
+      </p:ext>
+    </p:extLst>
+  </p:cSld>
+  <p:clrMapOvr>
+    <a:masterClrMapping/>
+  </p:clrMapOvr>
+  <mc:AlternateContent xmlns:mc="http://schemas.openxmlformats.org/markup-compatibility/2006">
+    <mc:Choice xmlns:p14="http://schemas.microsoft.com/office/powerpoint/2010/main" Requires="p14">
+      <p:transition spd="med" p14:dur="700">
+        <p:fade/>
+      </p:transition>
+    </mc:Choice>
+    <mc:Fallback>
+      <p:transition spd="med">
+        <p:fade/>
+      </p:transition>
+    </mc:Fallback>
+  </mc:AlternateContent>
+</p:sld>
+</file>
+
+<file path=ppt/slides/slide15.xml><?xml version="1.0" encoding="utf-8"?>
+<p:sld xmlns:a="http://schemas.openxmlformats.org/drawingml/2006/main" xmlns:r="http://schemas.openxmlformats.org/officeDocument/2006/relationships" xmlns:p="http://schemas.openxmlformats.org/presentationml/2006/main">
+  <p:cSld>
+    <p:spTree>
+      <p:nvGrpSpPr>
+        <p:cNvPr id="1" name="">
+          <a:extLst>
+            <a:ext uri="{FF2B5EF4-FFF2-40B4-BE49-F238E27FC236}">
+              <a16:creationId xmlns:a16="http://schemas.microsoft.com/office/drawing/2014/main" id="{E89AEBC2-9AC3-4712-6B5E-BD025C4259B1}"/>
+            </a:ext>
+          </a:extLst>
+        </p:cNvPr>
+        <p:cNvGrpSpPr/>
+        <p:nvPr/>
+      </p:nvGrpSpPr>
+      <p:grpSpPr>
+        <a:xfrm>
+          <a:off x="0" y="0"/>
+          <a:ext cx="0" cy="0"/>
+          <a:chOff x="0" y="0"/>
+          <a:chExt cx="0" cy="0"/>
+        </a:xfrm>
+      </p:grpSpPr>
+      <p:sp>
+        <p:nvSpPr>
+          <p:cNvPr id="2" name="Titre 1">
+            <a:extLst>
+              <a:ext uri="{FF2B5EF4-FFF2-40B4-BE49-F238E27FC236}">
+                <a16:creationId xmlns:a16="http://schemas.microsoft.com/office/drawing/2014/main" id="{91F11321-5C53-C769-25FD-3C480E97DDCE}"/>
+              </a:ext>
+            </a:extLst>
+          </p:cNvPr>
+          <p:cNvSpPr>
+            <a:spLocks noGrp="1"/>
+          </p:cNvSpPr>
+          <p:nvPr>
+            <p:ph type="title"/>
+          </p:nvPr>
+        </p:nvSpPr>
+        <p:spPr/>
+        <p:txBody>
+          <a:bodyPr/>
+          <a:lstStyle/>
+          <a:p>
+            <a:r>
+              <a:rPr lang="en-US" dirty="0"/>
+              <a:t>📖 Let’s the story begin – Round n°2</a:t>
+            </a:r>
+          </a:p>
+        </p:txBody>
+      </p:sp>
+      <p:sp>
+        <p:nvSpPr>
+          <p:cNvPr id="3" name="Espace réservé du texte 2">
+            <a:extLst>
+              <a:ext uri="{FF2B5EF4-FFF2-40B4-BE49-F238E27FC236}">
+                <a16:creationId xmlns:a16="http://schemas.microsoft.com/office/drawing/2014/main" id="{C97DF473-2026-6250-AA6D-4604CACF6121}"/>
+              </a:ext>
+            </a:extLst>
+          </p:cNvPr>
+          <p:cNvSpPr>
+            <a:spLocks noGrp="1"/>
+          </p:cNvSpPr>
+          <p:nvPr>
+            <p:ph type="body" sz="quarter" idx="15"/>
+          </p:nvPr>
+        </p:nvSpPr>
+        <p:spPr>
+          <a:xfrm>
+            <a:off x="588000" y="977317"/>
+            <a:ext cx="11419970" cy="4949030"/>
+          </a:xfrm>
+        </p:spPr>
+        <p:txBody>
+          <a:bodyPr/>
+          <a:lstStyle/>
+          <a:p>
+            <a:r>
+              <a:rPr lang="en-US" sz="2800" b="0" dirty="0">
+                <a:solidFill>
+                  <a:schemeClr val="tx2"/>
+                </a:solidFill>
+              </a:rPr>
+              <a:t>  🤔 Test failed so the following additional validation was proposed to the team:</a:t>
+            </a:r>
+          </a:p>
+          <a:p>
+            <a:pPr lvl="1"/>
+            <a:r>
+              <a:rPr lang="en-US" sz="2400" dirty="0"/>
+              <a:t>Ensure that the provided file do not contains any JavaScript code.</a:t>
+            </a:r>
+          </a:p>
+          <a:p>
+            <a:pPr marL="0" lvl="1" indent="0">
+              <a:buNone/>
+            </a:pPr>
+            <a:endParaRPr lang="en-US" sz="2400" b="0" dirty="0">
+              <a:solidFill>
+                <a:schemeClr val="tx2"/>
+              </a:solidFill>
+            </a:endParaRPr>
+          </a:p>
+          <a:p>
+            <a:r>
+              <a:rPr lang="en-US" sz="2800" b="0" dirty="0">
+                <a:solidFill>
+                  <a:schemeClr val="tx2"/>
+                </a:solidFill>
+              </a:rPr>
+              <a:t> ✅ Test passed after the adding of the additional validation:</a:t>
+            </a:r>
+          </a:p>
+          <a:p>
+            <a:endParaRPr lang="en-US" sz="2800" b="0" dirty="0">
+              <a:solidFill>
+                <a:schemeClr val="tx2"/>
+              </a:solidFill>
+            </a:endParaRPr>
+          </a:p>
+          <a:p>
+            <a:pPr marL="0" indent="0">
+              <a:buNone/>
+            </a:pPr>
+            <a:r>
+              <a:rPr lang="en-US" sz="2800" b="0" dirty="0">
+                <a:solidFill>
+                  <a:schemeClr val="tx2"/>
+                </a:solidFill>
+              </a:rPr>
+              <a:t>  </a:t>
+            </a:r>
+          </a:p>
+        </p:txBody>
+      </p:sp>
+      <p:sp>
+        <p:nvSpPr>
+          <p:cNvPr id="7" name="TextBox 6">
+            <a:extLst>
+              <a:ext uri="{FF2B5EF4-FFF2-40B4-BE49-F238E27FC236}">
+                <a16:creationId xmlns:a16="http://schemas.microsoft.com/office/drawing/2014/main" id="{00720CE7-DA57-E954-96B6-C6C46BD85D34}"/>
+              </a:ext>
+            </a:extLst>
+          </p:cNvPr>
+          <p:cNvSpPr txBox="1"/>
+          <p:nvPr/>
+        </p:nvSpPr>
+        <p:spPr>
+          <a:xfrm>
+            <a:off x="8967059" y="113779"/>
+            <a:ext cx="3040911" cy="246221"/>
+          </a:xfrm>
+          <a:prstGeom prst="rect">
+            <a:avLst/>
+          </a:prstGeom>
+          <a:noFill/>
+        </p:spPr>
+        <p:txBody>
+          <a:bodyPr wrap="square" lIns="0" tIns="0" rIns="0" bIns="0" rtlCol="0">
+            <a:spAutoFit/>
+          </a:bodyPr>
+          <a:lstStyle/>
+          <a:p>
+            <a:pPr algn="l"/>
+            <a:r>
+              <a:rPr lang="en-US" sz="1600" noProof="0" dirty="0">
+                <a:solidFill>
+                  <a:schemeClr val="accent3"/>
+                </a:solidFill>
+              </a:rPr>
+              <a:t>🤬 Level of exasperation: </a:t>
+            </a:r>
+            <a:r>
+              <a:rPr lang="en-US" sz="1600" dirty="0">
+                <a:solidFill>
+                  <a:schemeClr val="accent3"/>
+                </a:solidFill>
+              </a:rPr>
+              <a:t>32</a:t>
+            </a:r>
+            <a:r>
+              <a:rPr lang="en-US" sz="1600" noProof="0" dirty="0">
+                <a:solidFill>
+                  <a:schemeClr val="accent3"/>
+                </a:solidFill>
+              </a:rPr>
+              <a:t>%</a:t>
+            </a:r>
+          </a:p>
+        </p:txBody>
+      </p:sp>
+      <p:pic>
+        <p:nvPicPr>
+          <p:cNvPr id="5" name="Picture 4">
+            <a:extLst>
+              <a:ext uri="{FF2B5EF4-FFF2-40B4-BE49-F238E27FC236}">
+                <a16:creationId xmlns:a16="http://schemas.microsoft.com/office/drawing/2014/main" id="{AED93A08-AC91-1552-0522-6366FEE89055}"/>
+              </a:ext>
+            </a:extLst>
+          </p:cNvPr>
+          <p:cNvPicPr>
+            <a:picLocks noChangeAspect="1"/>
+          </p:cNvPicPr>
+          <p:nvPr/>
+        </p:nvPicPr>
+        <p:blipFill>
+          <a:blip r:embed="rId2"/>
+          <a:stretch>
+            <a:fillRect/>
+          </a:stretch>
+        </p:blipFill>
+        <p:spPr>
+          <a:xfrm>
+            <a:off x="1923321" y="4318998"/>
+            <a:ext cx="8749328" cy="763364"/>
+          </a:xfrm>
+          <a:prstGeom prst="rect">
+            <a:avLst/>
+          </a:prstGeom>
+          <a:effectLst>
+            <a:outerShdw blurRad="50800" dist="38100" dir="2700000" algn="tl" rotWithShape="0">
+              <a:prstClr val="black">
+                <a:alpha val="40000"/>
+              </a:prstClr>
+            </a:outerShdw>
+          </a:effectLst>
+        </p:spPr>
+      </p:pic>
+    </p:spTree>
+    <p:extLst>
+      <p:ext uri="{BB962C8B-B14F-4D97-AF65-F5344CB8AC3E}">
+        <p14:creationId xmlns:p14="http://schemas.microsoft.com/office/powerpoint/2010/main" val="4107305617"/>
+      </p:ext>
+    </p:extLst>
+  </p:cSld>
+  <p:clrMapOvr>
+    <a:masterClrMapping/>
+  </p:clrMapOvr>
+  <mc:AlternateContent xmlns:mc="http://schemas.openxmlformats.org/markup-compatibility/2006">
+    <mc:Choice xmlns:p14="http://schemas.microsoft.com/office/powerpoint/2010/main" Requires="p14">
+      <p:transition spd="med" p14:dur="700">
+        <p:fade/>
+      </p:transition>
+    </mc:Choice>
+    <mc:Fallback>
+      <p:transition spd="med">
+        <p:fade/>
+      </p:transition>
+    </mc:Fallback>
+  </mc:AlternateContent>
+</p:sld>
+</file>
+
+<file path=ppt/slides/slide16.xml><?xml version="1.0" encoding="utf-8"?>
+<p:sld xmlns:a="http://schemas.openxmlformats.org/drawingml/2006/main" xmlns:r="http://schemas.openxmlformats.org/officeDocument/2006/relationships" xmlns:p="http://schemas.openxmlformats.org/presentationml/2006/main">
+  <p:cSld>
+    <p:spTree>
+      <p:nvGrpSpPr>
+        <p:cNvPr id="1" name="">
+          <a:extLst>
+            <a:ext uri="{FF2B5EF4-FFF2-40B4-BE49-F238E27FC236}">
+              <a16:creationId xmlns:a16="http://schemas.microsoft.com/office/drawing/2014/main" id="{05985331-1CE8-342D-C354-3CE44C288D06}"/>
+            </a:ext>
+          </a:extLst>
+        </p:cNvPr>
+        <p:cNvGrpSpPr/>
+        <p:nvPr/>
+      </p:nvGrpSpPr>
+      <p:grpSpPr>
+        <a:xfrm>
+          <a:off x="0" y="0"/>
+          <a:ext cx="0" cy="0"/>
+          <a:chOff x="0" y="0"/>
+          <a:chExt cx="0" cy="0"/>
+        </a:xfrm>
+      </p:grpSpPr>
+      <p:sp>
+        <p:nvSpPr>
+          <p:cNvPr id="2" name="Titre 1">
+            <a:extLst>
+              <a:ext uri="{FF2B5EF4-FFF2-40B4-BE49-F238E27FC236}">
+                <a16:creationId xmlns:a16="http://schemas.microsoft.com/office/drawing/2014/main" id="{F53A0447-9D5C-7901-90EC-9DCA1B8EEF2E}"/>
+              </a:ext>
+            </a:extLst>
+          </p:cNvPr>
+          <p:cNvSpPr>
+            <a:spLocks noGrp="1"/>
+          </p:cNvSpPr>
+          <p:nvPr>
+            <p:ph type="title"/>
+          </p:nvPr>
+        </p:nvSpPr>
+        <p:spPr/>
+        <p:txBody>
+          <a:bodyPr/>
+          <a:lstStyle/>
+          <a:p>
+            <a:r>
+              <a:rPr lang="en-US" dirty="0"/>
+              <a:t>📖 Let’s the story begin – Round n°3</a:t>
+            </a:r>
+          </a:p>
+        </p:txBody>
+      </p:sp>
+      <p:sp>
+        <p:nvSpPr>
+          <p:cNvPr id="3" name="Espace réservé du texte 2">
+            <a:extLst>
+              <a:ext uri="{FF2B5EF4-FFF2-40B4-BE49-F238E27FC236}">
+                <a16:creationId xmlns:a16="http://schemas.microsoft.com/office/drawing/2014/main" id="{AE353607-3A14-0643-DFFA-C974C4DCCC09}"/>
+              </a:ext>
+            </a:extLst>
+          </p:cNvPr>
+          <p:cNvSpPr>
+            <a:spLocks noGrp="1"/>
+          </p:cNvSpPr>
+          <p:nvPr>
+            <p:ph type="body" sz="quarter" idx="15"/>
+          </p:nvPr>
+        </p:nvSpPr>
+        <p:spPr>
+          <a:xfrm>
+            <a:off x="588000" y="977317"/>
+            <a:ext cx="11419970" cy="4949030"/>
+          </a:xfrm>
+        </p:spPr>
+        <p:txBody>
+          <a:bodyPr/>
+          <a:lstStyle/>
+          <a:p>
+            <a:r>
+              <a:rPr lang="en-US" sz="2800" b="0" dirty="0">
+                <a:solidFill>
+                  <a:schemeClr val="tx2"/>
+                </a:solidFill>
+              </a:rPr>
+              <a:t> A third test was performed with a valid PDF file containing an attached malicious file:</a:t>
+            </a:r>
+          </a:p>
+          <a:p>
+            <a:endParaRPr lang="en-US" sz="2800" b="0" dirty="0">
+              <a:solidFill>
+                <a:schemeClr val="tx2"/>
+              </a:solidFill>
+            </a:endParaRPr>
+          </a:p>
+          <a:p>
+            <a:pPr marL="0" indent="0">
+              <a:buNone/>
+            </a:pPr>
+            <a:r>
+              <a:rPr lang="en-US" sz="2800" b="0" dirty="0">
+                <a:solidFill>
+                  <a:schemeClr val="tx2"/>
+                </a:solidFill>
+              </a:rPr>
+              <a:t> </a:t>
+            </a:r>
+          </a:p>
+          <a:p>
+            <a:pPr marL="0" indent="0">
+              <a:buNone/>
+            </a:pPr>
+            <a:endParaRPr lang="en-US" sz="2800" b="0" dirty="0">
+              <a:solidFill>
+                <a:schemeClr val="tx2"/>
+              </a:solidFill>
+            </a:endParaRPr>
+          </a:p>
+        </p:txBody>
+      </p:sp>
+      <p:pic>
+        <p:nvPicPr>
+          <p:cNvPr id="5" name="Picture 4">
+            <a:extLst>
+              <a:ext uri="{FF2B5EF4-FFF2-40B4-BE49-F238E27FC236}">
+                <a16:creationId xmlns:a16="http://schemas.microsoft.com/office/drawing/2014/main" id="{466B5590-4ED1-AC27-53F1-E62264BECCF5}"/>
+              </a:ext>
+            </a:extLst>
+          </p:cNvPr>
+          <p:cNvPicPr>
+            <a:picLocks noChangeAspect="1"/>
+          </p:cNvPicPr>
+          <p:nvPr/>
+        </p:nvPicPr>
+        <p:blipFill>
+          <a:blip r:embed="rId2"/>
+          <a:stretch>
+            <a:fillRect/>
+          </a:stretch>
+        </p:blipFill>
+        <p:spPr>
+          <a:xfrm>
+            <a:off x="2050319" y="1945758"/>
+            <a:ext cx="8893976" cy="4552242"/>
+          </a:xfrm>
+          <a:prstGeom prst="rect">
+            <a:avLst/>
+          </a:prstGeom>
+          <a:effectLst>
+            <a:outerShdw blurRad="50800" dist="38100" dir="2700000" algn="tl" rotWithShape="0">
+              <a:prstClr val="black">
+                <a:alpha val="40000"/>
+              </a:prstClr>
+            </a:outerShdw>
+          </a:effectLst>
+        </p:spPr>
+      </p:pic>
+    </p:spTree>
+    <p:extLst>
+      <p:ext uri="{BB962C8B-B14F-4D97-AF65-F5344CB8AC3E}">
+        <p14:creationId xmlns:p14="http://schemas.microsoft.com/office/powerpoint/2010/main" val="3214065329"/>
+      </p:ext>
+    </p:extLst>
+  </p:cSld>
+  <p:clrMapOvr>
+    <a:masterClrMapping/>
+  </p:clrMapOvr>
+  <mc:AlternateContent xmlns:mc="http://schemas.openxmlformats.org/markup-compatibility/2006">
+    <mc:Choice xmlns:p14="http://schemas.microsoft.com/office/powerpoint/2010/main" Requires="p14">
+      <p:transition spd="med" p14:dur="700">
+        <p:fade/>
+      </p:transition>
+    </mc:Choice>
+    <mc:Fallback>
+      <p:transition spd="med">
+        <p:fade/>
+      </p:transition>
+    </mc:Fallback>
+  </mc:AlternateContent>
+</p:sld>
+</file>
+
+<file path=ppt/slides/slide17.xml><?xml version="1.0" encoding="utf-8"?>
+<p:sld xmlns:a="http://schemas.openxmlformats.org/drawingml/2006/main" xmlns:r="http://schemas.openxmlformats.org/officeDocument/2006/relationships" xmlns:p="http://schemas.openxmlformats.org/presentationml/2006/main">
+  <p:cSld>
+    <p:spTree>
+      <p:nvGrpSpPr>
+        <p:cNvPr id="1" name="">
+          <a:extLst>
+            <a:ext uri="{FF2B5EF4-FFF2-40B4-BE49-F238E27FC236}">
+              <a16:creationId xmlns:a16="http://schemas.microsoft.com/office/drawing/2014/main" id="{90D5AE30-FC26-0A47-77B2-F81AA5ACC79F}"/>
+            </a:ext>
+          </a:extLst>
+        </p:cNvPr>
+        <p:cNvGrpSpPr/>
+        <p:nvPr/>
+      </p:nvGrpSpPr>
+      <p:grpSpPr>
+        <a:xfrm>
+          <a:off x="0" y="0"/>
+          <a:ext cx="0" cy="0"/>
+          <a:chOff x="0" y="0"/>
+          <a:chExt cx="0" cy="0"/>
+        </a:xfrm>
+      </p:grpSpPr>
+      <p:sp>
+        <p:nvSpPr>
+          <p:cNvPr id="2" name="Titre 1">
+            <a:extLst>
+              <a:ext uri="{FF2B5EF4-FFF2-40B4-BE49-F238E27FC236}">
+                <a16:creationId xmlns:a16="http://schemas.microsoft.com/office/drawing/2014/main" id="{A9F313D3-9682-06E4-65D5-8FFB9CA90034}"/>
+              </a:ext>
+            </a:extLst>
+          </p:cNvPr>
+          <p:cNvSpPr>
+            <a:spLocks noGrp="1"/>
+          </p:cNvSpPr>
+          <p:nvPr>
+            <p:ph type="title"/>
+          </p:nvPr>
+        </p:nvSpPr>
+        <p:spPr/>
+        <p:txBody>
+          <a:bodyPr/>
+          <a:lstStyle/>
+          <a:p>
+            <a:r>
+              <a:rPr lang="en-US" dirty="0"/>
+              <a:t>📖 Let’s the story begin – Round n°3</a:t>
+            </a:r>
+          </a:p>
+        </p:txBody>
+      </p:sp>
+      <p:sp>
+        <p:nvSpPr>
+          <p:cNvPr id="3" name="Espace réservé du texte 2">
+            <a:extLst>
+              <a:ext uri="{FF2B5EF4-FFF2-40B4-BE49-F238E27FC236}">
+                <a16:creationId xmlns:a16="http://schemas.microsoft.com/office/drawing/2014/main" id="{488F0DFF-4B1E-61BD-3A0C-17B1828785FB}"/>
+              </a:ext>
+            </a:extLst>
+          </p:cNvPr>
+          <p:cNvSpPr>
+            <a:spLocks noGrp="1"/>
+          </p:cNvSpPr>
+          <p:nvPr>
+            <p:ph type="body" sz="quarter" idx="15"/>
+          </p:nvPr>
+        </p:nvSpPr>
+        <p:spPr>
+          <a:xfrm>
+            <a:off x="588000" y="977317"/>
+            <a:ext cx="11419970" cy="4949030"/>
+          </a:xfrm>
+        </p:spPr>
+        <p:txBody>
+          <a:bodyPr/>
+          <a:lstStyle/>
+          <a:p>
+            <a:r>
+              <a:rPr lang="en-US" sz="2800" b="0" dirty="0">
+                <a:solidFill>
+                  <a:schemeClr val="tx2"/>
+                </a:solidFill>
+              </a:rPr>
+              <a:t> The goal was to test if the service ensure that the provided PDF file do not contain any dangerous attachment.</a:t>
+            </a:r>
+          </a:p>
+          <a:p>
+            <a:r>
+              <a:rPr lang="en-US" sz="2800" b="0" dirty="0">
+                <a:solidFill>
+                  <a:schemeClr val="tx2"/>
+                </a:solidFill>
+              </a:rPr>
+              <a:t> Such attachment file can be opened and executed by the user using instruction into the PDF indented to trick him (phishing approach).</a:t>
+            </a:r>
+          </a:p>
+          <a:p>
+            <a:pPr marL="0" indent="0">
+              <a:buNone/>
+            </a:pPr>
+            <a:endParaRPr lang="en-US" sz="2800" b="0" dirty="0">
+              <a:solidFill>
+                <a:schemeClr val="tx2"/>
+              </a:solidFill>
+            </a:endParaRPr>
+          </a:p>
+        </p:txBody>
+      </p:sp>
+      <p:pic>
+        <p:nvPicPr>
+          <p:cNvPr id="6" name="Picture 5">
+            <a:extLst>
+              <a:ext uri="{FF2B5EF4-FFF2-40B4-BE49-F238E27FC236}">
+                <a16:creationId xmlns:a16="http://schemas.microsoft.com/office/drawing/2014/main" id="{475FA4F2-50B1-AA80-BC0E-12B86ECF77B6}"/>
+              </a:ext>
+            </a:extLst>
+          </p:cNvPr>
+          <p:cNvPicPr>
+            <a:picLocks noChangeAspect="1"/>
+          </p:cNvPicPr>
+          <p:nvPr/>
+        </p:nvPicPr>
+        <p:blipFill>
+          <a:blip r:embed="rId2"/>
+          <a:stretch>
+            <a:fillRect/>
+          </a:stretch>
+        </p:blipFill>
+        <p:spPr>
+          <a:xfrm>
+            <a:off x="1331881" y="3989389"/>
+            <a:ext cx="9528237" cy="827159"/>
+          </a:xfrm>
+          <a:prstGeom prst="rect">
+            <a:avLst/>
+          </a:prstGeom>
+          <a:effectLst>
+            <a:outerShdw blurRad="50800" dist="38100" dir="2700000" algn="tl" rotWithShape="0">
+              <a:prstClr val="black">
+                <a:alpha val="40000"/>
+              </a:prstClr>
+            </a:outerShdw>
+          </a:effectLst>
+        </p:spPr>
+      </p:pic>
+    </p:spTree>
+    <p:extLst>
+      <p:ext uri="{BB962C8B-B14F-4D97-AF65-F5344CB8AC3E}">
+        <p14:creationId xmlns:p14="http://schemas.microsoft.com/office/powerpoint/2010/main" val="715954666"/>
+      </p:ext>
+    </p:extLst>
+  </p:cSld>
+  <p:clrMapOvr>
+    <a:masterClrMapping/>
+  </p:clrMapOvr>
+  <mc:AlternateContent xmlns:mc="http://schemas.openxmlformats.org/markup-compatibility/2006">
+    <mc:Choice xmlns:p14="http://schemas.microsoft.com/office/powerpoint/2010/main" Requires="p14">
+      <p:transition spd="med" p14:dur="700">
+        <p:fade/>
+      </p:transition>
+    </mc:Choice>
+    <mc:Fallback>
+      <p:transition spd="med">
+        <p:fade/>
+      </p:transition>
+    </mc:Fallback>
+  </mc:AlternateContent>
+</p:sld>
+</file>
+
+<file path=ppt/slides/slide18.xml><?xml version="1.0" encoding="utf-8"?>
+<p:sld xmlns:a="http://schemas.openxmlformats.org/drawingml/2006/main" xmlns:r="http://schemas.openxmlformats.org/officeDocument/2006/relationships" xmlns:p="http://schemas.openxmlformats.org/presentationml/2006/main">
+  <p:cSld>
+    <p:spTree>
+      <p:nvGrpSpPr>
+        <p:cNvPr id="1" name="">
+          <a:extLst>
+            <a:ext uri="{FF2B5EF4-FFF2-40B4-BE49-F238E27FC236}">
+              <a16:creationId xmlns:a16="http://schemas.microsoft.com/office/drawing/2014/main" id="{388F61FD-6440-F6E0-41D0-EFD18D41A24D}"/>
+            </a:ext>
+          </a:extLst>
+        </p:cNvPr>
+        <p:cNvGrpSpPr/>
+        <p:nvPr/>
+      </p:nvGrpSpPr>
+      <p:grpSpPr>
+        <a:xfrm>
+          <a:off x="0" y="0"/>
+          <a:ext cx="0" cy="0"/>
+          <a:chOff x="0" y="0"/>
+          <a:chExt cx="0" cy="0"/>
+        </a:xfrm>
+      </p:grpSpPr>
+      <p:sp>
+        <p:nvSpPr>
+          <p:cNvPr id="2" name="Titre 1">
+            <a:extLst>
+              <a:ext uri="{FF2B5EF4-FFF2-40B4-BE49-F238E27FC236}">
+                <a16:creationId xmlns:a16="http://schemas.microsoft.com/office/drawing/2014/main" id="{66E27314-9212-A847-3ABE-683FE3011090}"/>
+              </a:ext>
+            </a:extLst>
+          </p:cNvPr>
+          <p:cNvSpPr>
+            <a:spLocks noGrp="1"/>
+          </p:cNvSpPr>
+          <p:nvPr>
+            <p:ph type="title"/>
+          </p:nvPr>
+        </p:nvSpPr>
+        <p:spPr/>
+        <p:txBody>
+          <a:bodyPr/>
+          <a:lstStyle/>
+          <a:p>
+            <a:r>
+              <a:rPr lang="en-US" dirty="0"/>
+              <a:t>📖 Let’s the story begin – Round n°3</a:t>
+            </a:r>
+          </a:p>
+        </p:txBody>
+      </p:sp>
+      <p:sp>
+        <p:nvSpPr>
+          <p:cNvPr id="3" name="Espace réservé du texte 2">
+            <a:extLst>
+              <a:ext uri="{FF2B5EF4-FFF2-40B4-BE49-F238E27FC236}">
+                <a16:creationId xmlns:a16="http://schemas.microsoft.com/office/drawing/2014/main" id="{5A37EFEA-EF0C-F5AE-34D8-5C9A939C7816}"/>
+              </a:ext>
+            </a:extLst>
+          </p:cNvPr>
+          <p:cNvSpPr>
+            <a:spLocks noGrp="1"/>
+          </p:cNvSpPr>
+          <p:nvPr>
+            <p:ph type="body" sz="quarter" idx="15"/>
+          </p:nvPr>
+        </p:nvSpPr>
+        <p:spPr>
+          <a:xfrm>
+            <a:off x="588000" y="977317"/>
+            <a:ext cx="11419970" cy="4949030"/>
+          </a:xfrm>
+        </p:spPr>
+        <p:txBody>
+          <a:bodyPr/>
+          <a:lstStyle/>
+          <a:p>
+            <a:r>
+              <a:rPr lang="en-US" sz="2800" b="0" dirty="0">
+                <a:solidFill>
+                  <a:schemeClr val="tx2"/>
+                </a:solidFill>
+              </a:rPr>
+              <a:t>  🤔 Test failed so the following additional validation was proposed to the team:</a:t>
+            </a:r>
+          </a:p>
+          <a:p>
+            <a:pPr lvl="1"/>
+            <a:r>
+              <a:rPr lang="en-US" sz="2400" dirty="0"/>
+              <a:t>Ensure that the provided file do not contains any attachments files.</a:t>
+            </a:r>
+          </a:p>
+          <a:p>
+            <a:pPr marL="0" lvl="1" indent="0">
+              <a:buNone/>
+            </a:pPr>
+            <a:endParaRPr lang="en-US" sz="2400" b="0" dirty="0">
+              <a:solidFill>
+                <a:schemeClr val="tx2"/>
+              </a:solidFill>
+            </a:endParaRPr>
+          </a:p>
+          <a:p>
+            <a:r>
+              <a:rPr lang="en-US" sz="2800" b="0" dirty="0">
+                <a:solidFill>
+                  <a:schemeClr val="tx2"/>
+                </a:solidFill>
+              </a:rPr>
+              <a:t> ✅ Test passed after the adding of the additional validation:</a:t>
+            </a:r>
+          </a:p>
+          <a:p>
+            <a:endParaRPr lang="en-US" sz="2800" b="0" dirty="0">
+              <a:solidFill>
+                <a:schemeClr val="tx2"/>
+              </a:solidFill>
+            </a:endParaRPr>
+          </a:p>
+          <a:p>
+            <a:pPr marL="0" indent="0">
+              <a:buNone/>
+            </a:pPr>
+            <a:r>
+              <a:rPr lang="en-US" sz="2800" b="0" dirty="0">
+                <a:solidFill>
+                  <a:schemeClr val="tx2"/>
+                </a:solidFill>
+              </a:rPr>
+              <a:t>  </a:t>
+            </a:r>
+          </a:p>
+        </p:txBody>
+      </p:sp>
+      <p:sp>
+        <p:nvSpPr>
+          <p:cNvPr id="7" name="TextBox 6">
+            <a:extLst>
+              <a:ext uri="{FF2B5EF4-FFF2-40B4-BE49-F238E27FC236}">
+                <a16:creationId xmlns:a16="http://schemas.microsoft.com/office/drawing/2014/main" id="{6158CC15-0C5B-B386-40D7-1FC6D70E2110}"/>
+              </a:ext>
+            </a:extLst>
+          </p:cNvPr>
+          <p:cNvSpPr txBox="1"/>
+          <p:nvPr/>
+        </p:nvSpPr>
+        <p:spPr>
+          <a:xfrm>
+            <a:off x="8967059" y="113779"/>
+            <a:ext cx="3040911" cy="246221"/>
+          </a:xfrm>
+          <a:prstGeom prst="rect">
+            <a:avLst/>
+          </a:prstGeom>
+          <a:noFill/>
+        </p:spPr>
+        <p:txBody>
+          <a:bodyPr wrap="square" lIns="0" tIns="0" rIns="0" bIns="0" rtlCol="0">
+            <a:spAutoFit/>
+          </a:bodyPr>
+          <a:lstStyle/>
+          <a:p>
+            <a:pPr algn="l"/>
+            <a:r>
+              <a:rPr lang="en-US" sz="1600" noProof="0" dirty="0">
+                <a:solidFill>
+                  <a:schemeClr val="accent3"/>
+                </a:solidFill>
+              </a:rPr>
+              <a:t>🤬 Level of exasperation: 48%</a:t>
+            </a:r>
+          </a:p>
+        </p:txBody>
+      </p:sp>
+      <p:pic>
+        <p:nvPicPr>
+          <p:cNvPr id="6" name="Picture 5">
+            <a:extLst>
+              <a:ext uri="{FF2B5EF4-FFF2-40B4-BE49-F238E27FC236}">
+                <a16:creationId xmlns:a16="http://schemas.microsoft.com/office/drawing/2014/main" id="{6B4CFFA8-1969-CA7F-940D-965CDD058C7B}"/>
+              </a:ext>
+            </a:extLst>
+          </p:cNvPr>
+          <p:cNvPicPr>
+            <a:picLocks noChangeAspect="1"/>
+          </p:cNvPicPr>
+          <p:nvPr/>
+        </p:nvPicPr>
+        <p:blipFill>
+          <a:blip r:embed="rId2"/>
+          <a:stretch>
+            <a:fillRect/>
+          </a:stretch>
+        </p:blipFill>
+        <p:spPr>
+          <a:xfrm>
+            <a:off x="1627179" y="4437063"/>
+            <a:ext cx="8530412" cy="772890"/>
+          </a:xfrm>
+          <a:prstGeom prst="rect">
+            <a:avLst/>
+          </a:prstGeom>
+          <a:effectLst>
+            <a:outerShdw blurRad="50800" dist="38100" dir="2700000" algn="tl" rotWithShape="0">
+              <a:prstClr val="black">
+                <a:alpha val="40000"/>
+              </a:prstClr>
+            </a:outerShdw>
+          </a:effectLst>
+        </p:spPr>
+      </p:pic>
+    </p:spTree>
+    <p:extLst>
+      <p:ext uri="{BB962C8B-B14F-4D97-AF65-F5344CB8AC3E}">
+        <p14:creationId xmlns:p14="http://schemas.microsoft.com/office/powerpoint/2010/main" val="24537132"/>
+      </p:ext>
+    </p:extLst>
+  </p:cSld>
+  <p:clrMapOvr>
+    <a:masterClrMapping/>
+  </p:clrMapOvr>
+  <mc:AlternateContent xmlns:mc="http://schemas.openxmlformats.org/markup-compatibility/2006">
+    <mc:Choice xmlns:p14="http://schemas.microsoft.com/office/powerpoint/2010/main" Requires="p14">
+      <p:transition spd="med" p14:dur="700">
+        <p:fade/>
+      </p:transition>
+    </mc:Choice>
+    <mc:Fallback>
+      <p:transition spd="med">
+        <p:fade/>
+      </p:transition>
+    </mc:Fallback>
+  </mc:AlternateContent>
+</p:sld>
+</file>
+
+<file path=ppt/slides/slide19.xml><?xml version="1.0" encoding="utf-8"?>
+<p:sld xmlns:a="http://schemas.openxmlformats.org/drawingml/2006/main" xmlns:r="http://schemas.openxmlformats.org/officeDocument/2006/relationships" xmlns:p="http://schemas.openxmlformats.org/presentationml/2006/main">
+  <p:cSld>
+    <p:spTree>
+      <p:nvGrpSpPr>
+        <p:cNvPr id="1" name="">
+          <a:extLst>
+            <a:ext uri="{FF2B5EF4-FFF2-40B4-BE49-F238E27FC236}">
+              <a16:creationId xmlns:a16="http://schemas.microsoft.com/office/drawing/2014/main" id="{0822EBE0-4042-E45E-6CF2-04CE0381729C}"/>
+            </a:ext>
+          </a:extLst>
+        </p:cNvPr>
+        <p:cNvGrpSpPr/>
+        <p:nvPr/>
+      </p:nvGrpSpPr>
+      <p:grpSpPr>
+        <a:xfrm>
+          <a:off x="0" y="0"/>
+          <a:ext cx="0" cy="0"/>
+          <a:chOff x="0" y="0"/>
+          <a:chExt cx="0" cy="0"/>
+        </a:xfrm>
+      </p:grpSpPr>
+      <p:sp>
+        <p:nvSpPr>
+          <p:cNvPr id="2" name="Titre 1">
+            <a:extLst>
+              <a:ext uri="{FF2B5EF4-FFF2-40B4-BE49-F238E27FC236}">
+                <a16:creationId xmlns:a16="http://schemas.microsoft.com/office/drawing/2014/main" id="{834B7364-6C98-7044-CEB2-5328BCDFDC6B}"/>
+              </a:ext>
+            </a:extLst>
+          </p:cNvPr>
+          <p:cNvSpPr>
+            <a:spLocks noGrp="1"/>
+          </p:cNvSpPr>
+          <p:nvPr>
+            <p:ph type="title"/>
+          </p:nvPr>
+        </p:nvSpPr>
+        <p:spPr/>
+        <p:txBody>
+          <a:bodyPr/>
+          <a:lstStyle/>
+          <a:p>
+            <a:r>
+              <a:rPr lang="en-US" dirty="0"/>
+              <a:t>📖 Let’s the story begin – Round n°4</a:t>
+            </a:r>
+          </a:p>
+        </p:txBody>
+      </p:sp>
+      <p:sp>
+        <p:nvSpPr>
+          <p:cNvPr id="3" name="Espace réservé du texte 2">
+            <a:extLst>
+              <a:ext uri="{FF2B5EF4-FFF2-40B4-BE49-F238E27FC236}">
+                <a16:creationId xmlns:a16="http://schemas.microsoft.com/office/drawing/2014/main" id="{4DBACDBD-B750-A641-A360-8510B71B52F8}"/>
+              </a:ext>
+            </a:extLst>
+          </p:cNvPr>
+          <p:cNvSpPr>
+            <a:spLocks noGrp="1"/>
+          </p:cNvSpPr>
+          <p:nvPr>
+            <p:ph type="body" sz="quarter" idx="15"/>
+          </p:nvPr>
+        </p:nvSpPr>
+        <p:spPr>
+          <a:xfrm>
+            <a:off x="588000" y="977317"/>
+            <a:ext cx="11419970" cy="4949030"/>
+          </a:xfrm>
+        </p:spPr>
+        <p:txBody>
+          <a:bodyPr/>
+          <a:lstStyle/>
+          <a:p>
+            <a:r>
+              <a:rPr lang="en-US" sz="2800" b="0" dirty="0">
+                <a:solidFill>
+                  <a:schemeClr val="tx2"/>
+                </a:solidFill>
+              </a:rPr>
+              <a:t> A fourth test was performed with a valid PDF file containing an </a:t>
+            </a:r>
+            <a:r>
+              <a:rPr lang="en-US" sz="2800" b="0" dirty="0">
+                <a:solidFill>
+                  <a:schemeClr val="tx2"/>
+                </a:solidFill>
+                <a:hlinkClick r:id="rId2"/>
+              </a:rPr>
+              <a:t>XML Forms Architecture</a:t>
+            </a:r>
+            <a:r>
+              <a:rPr lang="en-US" sz="2800" b="0" dirty="0">
+                <a:solidFill>
+                  <a:schemeClr val="tx2"/>
+                </a:solidFill>
+              </a:rPr>
+              <a:t> (XFA) form with an </a:t>
+            </a:r>
+            <a:r>
+              <a:rPr lang="en-US" sz="2800" b="0" dirty="0">
+                <a:solidFill>
+                  <a:schemeClr val="tx2"/>
+                </a:solidFill>
+                <a:hlinkClick r:id="rId3"/>
+              </a:rPr>
+              <a:t>XML External Entity </a:t>
+            </a:r>
+            <a:r>
+              <a:rPr lang="en-US" sz="2800" b="0" dirty="0">
+                <a:solidFill>
+                  <a:schemeClr val="tx2"/>
+                </a:solidFill>
+              </a:rPr>
+              <a:t>reference to an external domain:</a:t>
+            </a:r>
+          </a:p>
+          <a:p>
+            <a:endParaRPr lang="en-US" sz="2800" b="0" dirty="0">
+              <a:solidFill>
+                <a:schemeClr val="tx2"/>
+              </a:solidFill>
+            </a:endParaRPr>
+          </a:p>
+          <a:p>
+            <a:pPr marL="0" indent="0">
+              <a:buNone/>
+            </a:pPr>
+            <a:r>
+              <a:rPr lang="en-US" sz="2800" b="0" dirty="0">
+                <a:solidFill>
+                  <a:schemeClr val="tx2"/>
+                </a:solidFill>
+              </a:rPr>
+              <a:t> </a:t>
+            </a:r>
+          </a:p>
+          <a:p>
+            <a:pPr marL="0" indent="0">
+              <a:buNone/>
+            </a:pPr>
+            <a:endParaRPr lang="en-US" sz="2800" b="0" dirty="0">
+              <a:solidFill>
+                <a:schemeClr val="tx2"/>
+              </a:solidFill>
+            </a:endParaRPr>
+          </a:p>
+        </p:txBody>
+      </p:sp>
+      <p:pic>
+        <p:nvPicPr>
+          <p:cNvPr id="6" name="Picture 5">
+            <a:extLst>
+              <a:ext uri="{FF2B5EF4-FFF2-40B4-BE49-F238E27FC236}">
+                <a16:creationId xmlns:a16="http://schemas.microsoft.com/office/drawing/2014/main" id="{E63415D6-6D65-95E4-C7BC-8A1B52CE7E8A}"/>
+              </a:ext>
+            </a:extLst>
+          </p:cNvPr>
+          <p:cNvPicPr>
+            <a:picLocks noChangeAspect="1"/>
+          </p:cNvPicPr>
+          <p:nvPr/>
+        </p:nvPicPr>
+        <p:blipFill>
+          <a:blip r:embed="rId4"/>
+          <a:stretch>
+            <a:fillRect/>
+          </a:stretch>
+        </p:blipFill>
+        <p:spPr>
+          <a:xfrm>
+            <a:off x="5156139" y="2561007"/>
+            <a:ext cx="7003962" cy="4241241"/>
+          </a:xfrm>
+          <a:prstGeom prst="rect">
+            <a:avLst/>
+          </a:prstGeom>
+          <a:effectLst>
+            <a:outerShdw blurRad="50800" dist="38100" dir="2700000" algn="tl" rotWithShape="0">
+              <a:prstClr val="black">
+                <a:alpha val="40000"/>
+              </a:prstClr>
+            </a:outerShdw>
+          </a:effectLst>
+        </p:spPr>
+      </p:pic>
+      <p:pic>
+        <p:nvPicPr>
+          <p:cNvPr id="8" name="Picture 7">
+            <a:extLst>
+              <a:ext uri="{FF2B5EF4-FFF2-40B4-BE49-F238E27FC236}">
+                <a16:creationId xmlns:a16="http://schemas.microsoft.com/office/drawing/2014/main" id="{D6C333E4-EAB2-386F-0AA9-7808BDB89AD5}"/>
+              </a:ext>
+            </a:extLst>
+          </p:cNvPr>
+          <p:cNvPicPr>
+            <a:picLocks noChangeAspect="1"/>
+          </p:cNvPicPr>
+          <p:nvPr/>
+        </p:nvPicPr>
+        <p:blipFill>
+          <a:blip r:embed="rId5"/>
+          <a:stretch>
+            <a:fillRect/>
+          </a:stretch>
+        </p:blipFill>
+        <p:spPr>
+          <a:xfrm>
+            <a:off x="136192" y="2561008"/>
+            <a:ext cx="4989389" cy="622284"/>
+          </a:xfrm>
+          <a:prstGeom prst="rect">
+            <a:avLst/>
+          </a:prstGeom>
+          <a:effectLst>
+            <a:outerShdw blurRad="50800" dist="38100" dir="2700000" algn="tl" rotWithShape="0">
+              <a:prstClr val="black">
+                <a:alpha val="40000"/>
+              </a:prstClr>
+            </a:outerShdw>
+          </a:effectLst>
+        </p:spPr>
+      </p:pic>
+      <p:sp>
+        <p:nvSpPr>
+          <p:cNvPr id="9" name="Arrow: Bent-Up 8">
+            <a:extLst>
+              <a:ext uri="{FF2B5EF4-FFF2-40B4-BE49-F238E27FC236}">
+                <a16:creationId xmlns:a16="http://schemas.microsoft.com/office/drawing/2014/main" id="{43CC8CFB-4C99-259F-A2E1-C1966F2A9256}"/>
+              </a:ext>
+            </a:extLst>
+          </p:cNvPr>
+          <p:cNvSpPr/>
+          <p:nvPr/>
+        </p:nvSpPr>
+        <p:spPr>
+          <a:xfrm rot="5400000">
+            <a:off x="3901498" y="3605876"/>
+            <a:ext cx="1669312" cy="903767"/>
+          </a:xfrm>
+          <a:prstGeom prst="bentUpArrow">
+            <a:avLst/>
+          </a:prstGeom>
+          <a:gradFill>
+            <a:gsLst>
+              <a:gs pos="0">
+                <a:schemeClr val="tx2">
+                  <a:alpha val="0"/>
+                </a:schemeClr>
+              </a:gs>
+              <a:gs pos="100000">
+                <a:schemeClr val="tx2"/>
+              </a:gs>
+            </a:gsLst>
+            <a:lin ang="16800000" scaled="0"/>
+          </a:gradFill>
+          <a:ln>
+            <a:noFill/>
+          </a:ln>
+        </p:spPr>
+        <p:style>
+          <a:lnRef idx="2">
+            <a:schemeClr val="accent1">
+              <a:shade val="50000"/>
+            </a:schemeClr>
+          </a:lnRef>
+          <a:fillRef idx="1">
+            <a:schemeClr val="accent1"/>
+          </a:fillRef>
+          <a:effectRef idx="0">
+            <a:schemeClr val="accent1"/>
+          </a:effectRef>
+          <a:fontRef idx="minor">
+            <a:schemeClr val="lt1"/>
+          </a:fontRef>
+        </p:style>
+        <p:txBody>
+          <a:bodyPr rtlCol="0" anchor="ctr"/>
+          <a:lstStyle/>
+          <a:p>
+            <a:pPr algn="ctr"/>
+            <a:endParaRPr lang="fr-FR"/>
+          </a:p>
+        </p:txBody>
+      </p:sp>
+    </p:spTree>
+    <p:extLst>
+      <p:ext uri="{BB962C8B-B14F-4D97-AF65-F5344CB8AC3E}">
+        <p14:creationId xmlns:p14="http://schemas.microsoft.com/office/powerpoint/2010/main" val="989586433"/>
+      </p:ext>
+    </p:extLst>
+  </p:cSld>
+  <p:clrMapOvr>
+    <a:masterClrMapping/>
+  </p:clrMapOvr>
+  <mc:AlternateContent xmlns:mc="http://schemas.openxmlformats.org/markup-compatibility/2006">
+    <mc:Choice xmlns:p14="http://schemas.microsoft.com/office/powerpoint/2010/main" Requires="p14">
+      <p:transition spd="med" p14:dur="700">
+        <p:fade/>
+      </p:transition>
+    </mc:Choice>
+    <mc:Fallback>
       <p:transition spd="med">
         <p:fade/>
       </p:transition>
@@ -44007,6 +46386,48 @@
     <p:extLst>
       <p:ext uri="{BB962C8B-B14F-4D97-AF65-F5344CB8AC3E}">
         <p14:creationId xmlns:p14="http://schemas.microsoft.com/office/powerpoint/2010/main" val="2121745454"/>
+      </p:ext>
+    </p:extLst>
+  </p:cSld>
+  <p:clrMapOvr>
+    <a:masterClrMapping/>
+  </p:clrMapOvr>
+  <mc:AlternateContent xmlns:mc="http://schemas.openxmlformats.org/markup-compatibility/2006" xmlns:p14="http://schemas.microsoft.com/office/powerpoint/2010/main">
+    <mc:Choice Requires="p14">
+      <p:transition spd="med" p14:dur="700">
+        <p:fade/>
+      </p:transition>
+    </mc:Choice>
+    <mc:Fallback xmlns="">
+      <p:transition spd="med">
+        <p:fade/>
+      </p:transition>
+    </mc:Fallback>
+  </mc:AlternateContent>
+</p:sld>
+</file>
+
+<file path=ppt/slides/slide20.xml><?xml version="1.0" encoding="utf-8"?>
+<p:sld xmlns:a="http://schemas.openxmlformats.org/drawingml/2006/main" xmlns:r="http://schemas.openxmlformats.org/officeDocument/2006/relationships" xmlns:p="http://schemas.openxmlformats.org/presentationml/2006/main">
+  <p:cSld>
+    <p:spTree>
+      <p:nvGrpSpPr>
+        <p:cNvPr id="1" name=""/>
+        <p:cNvGrpSpPr/>
+        <p:nvPr/>
+      </p:nvGrpSpPr>
+      <p:grpSpPr>
+        <a:xfrm>
+          <a:off x="0" y="0"/>
+          <a:ext cx="0" cy="0"/>
+          <a:chOff x="0" y="0"/>
+          <a:chExt cx="0" cy="0"/>
+        </a:xfrm>
+      </p:grpSpPr>
+    </p:spTree>
+    <p:extLst>
+      <p:ext uri="{BB962C8B-B14F-4D97-AF65-F5344CB8AC3E}">
+        <p14:creationId xmlns:p14="http://schemas.microsoft.com/office/powerpoint/2010/main" val="3277138299"/>
       </p:ext>
     </p:extLst>
   </p:cSld>
@@ -44201,13 +46622,13 @@
   <p:clrMapOvr>
     <a:masterClrMapping/>
   </p:clrMapOvr>
-  <mc:AlternateContent xmlns:mc="http://schemas.openxmlformats.org/markup-compatibility/2006">
-    <mc:Choice xmlns:p14="http://schemas.microsoft.com/office/powerpoint/2010/main" Requires="p14">
+  <mc:AlternateContent xmlns:mc="http://schemas.openxmlformats.org/markup-compatibility/2006" xmlns:p14="http://schemas.microsoft.com/office/powerpoint/2010/main">
+    <mc:Choice Requires="p14">
       <p:transition spd="med" p14:dur="700">
         <p:fade/>
       </p:transition>
     </mc:Choice>
-    <mc:Fallback>
+    <mc:Fallback xmlns="">
       <p:transition spd="med">
         <p:fade/>
       </p:transition>
@@ -44370,13 +46791,13 @@
   <p:clrMapOvr>
     <a:masterClrMapping/>
   </p:clrMapOvr>
-  <mc:AlternateContent xmlns:mc="http://schemas.openxmlformats.org/markup-compatibility/2006">
-    <mc:Choice xmlns:p14="http://schemas.microsoft.com/office/powerpoint/2010/main" Requires="p14">
+  <mc:AlternateContent xmlns:mc="http://schemas.openxmlformats.org/markup-compatibility/2006" xmlns:p14="http://schemas.microsoft.com/office/powerpoint/2010/main">
+    <mc:Choice Requires="p14">
       <p:transition spd="med" p14:dur="700">
         <p:fade/>
       </p:transition>
     </mc:Choice>
-    <mc:Fallback>
+    <mc:Fallback xmlns="">
       <p:transition spd="med">
         <p:fade/>
       </p:transition>
@@ -44552,13 +46973,13 @@
   <p:clrMapOvr>
     <a:masterClrMapping/>
   </p:clrMapOvr>
-  <mc:AlternateContent xmlns:mc="http://schemas.openxmlformats.org/markup-compatibility/2006">
-    <mc:Choice xmlns:p14="http://schemas.microsoft.com/office/powerpoint/2010/main" Requires="p14">
+  <mc:AlternateContent xmlns:mc="http://schemas.openxmlformats.org/markup-compatibility/2006" xmlns:p14="http://schemas.microsoft.com/office/powerpoint/2010/main">
+    <mc:Choice Requires="p14">
       <p:transition spd="med" p14:dur="700">
         <p:fade/>
       </p:transition>
     </mc:Choice>
-    <mc:Fallback>
+    <mc:Fallback xmlns="">
       <p:transition spd="med">
         <p:fade/>
       </p:transition>
@@ -44835,13 +47256,13 @@
   <p:clrMapOvr>
     <a:masterClrMapping/>
   </p:clrMapOvr>
-  <mc:AlternateContent xmlns:mc="http://schemas.openxmlformats.org/markup-compatibility/2006">
-    <mc:Choice xmlns:p14="http://schemas.microsoft.com/office/powerpoint/2010/main" Requires="p14">
+  <mc:AlternateContent xmlns:mc="http://schemas.openxmlformats.org/markup-compatibility/2006" xmlns:p14="http://schemas.microsoft.com/office/powerpoint/2010/main">
+    <mc:Choice Requires="p14">
       <p:transition spd="med" p14:dur="700">
         <p:fade/>
       </p:transition>
     </mc:Choice>
-    <mc:Fallback>
+    <mc:Fallback xmlns="">
       <p:transition spd="med">
         <p:fade/>
       </p:transition>
@@ -45001,13 +47422,13 @@
   <p:clrMapOvr>
     <a:masterClrMapping/>
   </p:clrMapOvr>
-  <mc:AlternateContent xmlns:mc="http://schemas.openxmlformats.org/markup-compatibility/2006">
-    <mc:Choice xmlns:p14="http://schemas.microsoft.com/office/powerpoint/2010/main" Requires="p14">
+  <mc:AlternateContent xmlns:mc="http://schemas.openxmlformats.org/markup-compatibility/2006" xmlns:p14="http://schemas.microsoft.com/office/powerpoint/2010/main">
+    <mc:Choice Requires="p14">
       <p:transition spd="med" p14:dur="700">
         <p:fade/>
       </p:transition>
     </mc:Choice>
-    <mc:Fallback>
+    <mc:Fallback xmlns="">
       <p:transition spd="med">
         <p:fade/>
       </p:transition>
@@ -45086,13 +47507,13 @@
   <p:clrMapOvr>
     <a:masterClrMapping/>
   </p:clrMapOvr>
-  <mc:AlternateContent xmlns:mc="http://schemas.openxmlformats.org/markup-compatibility/2006">
-    <mc:Choice xmlns:p14="http://schemas.microsoft.com/office/powerpoint/2010/main" Requires="p14">
+  <mc:AlternateContent xmlns:mc="http://schemas.openxmlformats.org/markup-compatibility/2006" xmlns:p14="http://schemas.microsoft.com/office/powerpoint/2010/main">
+    <mc:Choice Requires="p14">
       <p:transition spd="med" p14:dur="700">
         <p:fade/>
       </p:transition>
     </mc:Choice>
-    <mc:Fallback>
+    <mc:Fallback xmlns="">
       <p:transition spd="med">
         <p:fade/>
       </p:transition>
@@ -45300,13 +47721,13 @@
   <p:clrMapOvr>
     <a:masterClrMapping/>
   </p:clrMapOvr>
-  <mc:AlternateContent xmlns:mc="http://schemas.openxmlformats.org/markup-compatibility/2006">
-    <mc:Choice xmlns:p14="http://schemas.microsoft.com/office/powerpoint/2010/main" Requires="p14">
+  <mc:AlternateContent xmlns:mc="http://schemas.openxmlformats.org/markup-compatibility/2006" xmlns:p14="http://schemas.microsoft.com/office/powerpoint/2010/main">
+    <mc:Choice Requires="p14">
       <p:transition spd="med" p14:dur="700">
         <p:fade/>
       </p:transition>
     </mc:Choice>
-    <mc:Fallback>
+    <mc:Fallback xmlns="">
       <p:transition spd="med">
         <p:fade/>
       </p:transition>

--- a/presentation.pptx
+++ b/presentation.pptx
@@ -5,7 +5,7 @@
     <p:sldMasterId id="2147483660" r:id="rId1"/>
   </p:sldMasterIdLst>
   <p:notesMasterIdLst>
-    <p:notesMasterId r:id="rId22"/>
+    <p:notesMasterId r:id="rId30"/>
   </p:notesMasterIdLst>
   <p:sldIdLst>
     <p:sldId id="257" r:id="rId2"/>
@@ -27,7 +27,15 @@
     <p:sldId id="303" r:id="rId18"/>
     <p:sldId id="304" r:id="rId19"/>
     <p:sldId id="305" r:id="rId20"/>
-    <p:sldId id="288" r:id="rId21"/>
+    <p:sldId id="306" r:id="rId21"/>
+    <p:sldId id="307" r:id="rId22"/>
+    <p:sldId id="308" r:id="rId23"/>
+    <p:sldId id="309" r:id="rId24"/>
+    <p:sldId id="311" r:id="rId25"/>
+    <p:sldId id="310" r:id="rId26"/>
+    <p:sldId id="312" r:id="rId27"/>
+    <p:sldId id="313" r:id="rId28"/>
+    <p:sldId id="288" r:id="rId29"/>
   </p:sldIdLst>
   <p:sldSz cx="12192000" cy="6858000"/>
   <p:notesSz cx="6858000" cy="9144000"/>
@@ -137,7 +145,7 @@
 <file path=ppt/revisionInfo.xml><?xml version="1.0" encoding="utf-8"?>
 <p1510:revInfo xmlns:a="http://schemas.openxmlformats.org/drawingml/2006/main" xmlns:r="http://schemas.openxmlformats.org/officeDocument/2006/relationships" xmlns:p1510="http://schemas.microsoft.com/office/powerpoint/2015/10/main">
   <p1510:revLst>
-    <p1510:client id="{E2922590-C897-4D5E-94A5-7835129BD264}" v="27" dt="2026-01-05T10:57:45.436"/>
+    <p1510:client id="{E2922590-C897-4D5E-94A5-7835129BD264}" v="38" dt="2026-01-05T15:51:23.733"/>
   </p1510:revLst>
 </p1510:revInfo>
 </file>
@@ -147,7 +155,7 @@
   <pc:docChgLst>
     <pc:chgData name="Dominique RIGHETTO" userId="512fe077-82ad-424c-88a3-15e852b5861d" providerId="ADAL" clId="{8B7CB91F-10CE-42C2-B9B8-BFF2D3401655}"/>
     <pc:docChg chg="undo custSel addSld delSld modSld sldOrd modMainMaster">
-      <pc:chgData name="Dominique RIGHETTO" userId="512fe077-82ad-424c-88a3-15e852b5861d" providerId="ADAL" clId="{8B7CB91F-10CE-42C2-B9B8-BFF2D3401655}" dt="2026-01-05T10:59:37.292" v="3774" actId="1037"/>
+      <pc:chgData name="Dominique RIGHETTO" userId="512fe077-82ad-424c-88a3-15e852b5861d" providerId="ADAL" clId="{8B7CB91F-10CE-42C2-B9B8-BFF2D3401655}" dt="2026-01-05T15:50:13.653" v="4776" actId="20577"/>
       <pc:docMkLst>
         <pc:docMk/>
       </pc:docMkLst>
@@ -685,7 +693,7 @@
         </pc:picChg>
       </pc:sldChg>
       <pc:sldChg chg="addSp delSp modSp add mod">
-        <pc:chgData name="Dominique RIGHETTO" userId="512fe077-82ad-424c-88a3-15e852b5861d" providerId="ADAL" clId="{8B7CB91F-10CE-42C2-B9B8-BFF2D3401655}" dt="2026-01-05T10:39:09.734" v="3340" actId="207"/>
+        <pc:chgData name="Dominique RIGHETTO" userId="512fe077-82ad-424c-88a3-15e852b5861d" providerId="ADAL" clId="{8B7CB91F-10CE-42C2-B9B8-BFF2D3401655}" dt="2026-01-05T15:06:24.477" v="4519" actId="108"/>
         <pc:sldMkLst>
           <pc:docMk/>
           <pc:sldMk cId="709545358" sldId="297"/>
@@ -699,7 +707,7 @@
           </ac:spMkLst>
         </pc:spChg>
         <pc:spChg chg="mod">
-          <ac:chgData name="Dominique RIGHETTO" userId="512fe077-82ad-424c-88a3-15e852b5861d" providerId="ADAL" clId="{8B7CB91F-10CE-42C2-B9B8-BFF2D3401655}" dt="2026-01-05T10:39:09.734" v="3340" actId="207"/>
+          <ac:chgData name="Dominique RIGHETTO" userId="512fe077-82ad-424c-88a3-15e852b5861d" providerId="ADAL" clId="{8B7CB91F-10CE-42C2-B9B8-BFF2D3401655}" dt="2026-01-05T15:06:24.477" v="4519" actId="108"/>
           <ac:spMkLst>
             <pc:docMk/>
             <pc:sldMk cId="709545358" sldId="297"/>
@@ -834,13 +842,13 @@
         </pc:picChg>
       </pc:sldChg>
       <pc:sldChg chg="addSp delSp modSp add mod">
-        <pc:chgData name="Dominique RIGHETTO" userId="512fe077-82ad-424c-88a3-15e852b5861d" providerId="ADAL" clId="{8B7CB91F-10CE-42C2-B9B8-BFF2D3401655}" dt="2026-01-05T10:38:54.675" v="3339" actId="207"/>
+        <pc:chgData name="Dominique RIGHETTO" userId="512fe077-82ad-424c-88a3-15e852b5861d" providerId="ADAL" clId="{8B7CB91F-10CE-42C2-B9B8-BFF2D3401655}" dt="2026-01-05T15:06:34.004" v="4520" actId="108"/>
         <pc:sldMkLst>
           <pc:docMk/>
           <pc:sldMk cId="1761927550" sldId="300"/>
         </pc:sldMkLst>
         <pc:spChg chg="mod">
-          <ac:chgData name="Dominique RIGHETTO" userId="512fe077-82ad-424c-88a3-15e852b5861d" providerId="ADAL" clId="{8B7CB91F-10CE-42C2-B9B8-BFF2D3401655}" dt="2026-01-05T10:38:54.675" v="3339" actId="207"/>
+          <ac:chgData name="Dominique RIGHETTO" userId="512fe077-82ad-424c-88a3-15e852b5861d" providerId="ADAL" clId="{8B7CB91F-10CE-42C2-B9B8-BFF2D3401655}" dt="2026-01-05T15:06:34.004" v="4520" actId="108"/>
           <ac:spMkLst>
             <pc:docMk/>
             <pc:sldMk cId="1761927550" sldId="300"/>
@@ -959,7 +967,7 @@
         </pc:picChg>
       </pc:sldChg>
       <pc:sldChg chg="addSp delSp modSp add mod ord">
-        <pc:chgData name="Dominique RIGHETTO" userId="512fe077-82ad-424c-88a3-15e852b5861d" providerId="ADAL" clId="{8B7CB91F-10CE-42C2-B9B8-BFF2D3401655}" dt="2026-01-05T10:45:47.048" v="3608" actId="14861"/>
+        <pc:chgData name="Dominique RIGHETTO" userId="512fe077-82ad-424c-88a3-15e852b5861d" providerId="ADAL" clId="{8B7CB91F-10CE-42C2-B9B8-BFF2D3401655}" dt="2026-01-05T15:06:41.432" v="4521" actId="108"/>
         <pc:sldMkLst>
           <pc:docMk/>
           <pc:sldMk cId="715954666" sldId="303"/>
@@ -973,7 +981,7 @@
           </ac:spMkLst>
         </pc:spChg>
         <pc:spChg chg="mod">
-          <ac:chgData name="Dominique RIGHETTO" userId="512fe077-82ad-424c-88a3-15e852b5861d" providerId="ADAL" clId="{8B7CB91F-10CE-42C2-B9B8-BFF2D3401655}" dt="2026-01-05T10:45:08.656" v="3601" actId="20577"/>
+          <ac:chgData name="Dominique RIGHETTO" userId="512fe077-82ad-424c-88a3-15e852b5861d" providerId="ADAL" clId="{8B7CB91F-10CE-42C2-B9B8-BFF2D3401655}" dt="2026-01-05T15:06:41.432" v="4521" actId="108"/>
           <ac:spMkLst>
             <pc:docMk/>
             <pc:sldMk cId="715954666" sldId="303"/>
@@ -989,7 +997,7 @@
           </ac:picMkLst>
         </pc:picChg>
         <pc:picChg chg="add mod">
-          <ac:chgData name="Dominique RIGHETTO" userId="512fe077-82ad-424c-88a3-15e852b5861d" providerId="ADAL" clId="{8B7CB91F-10CE-42C2-B9B8-BFF2D3401655}" dt="2026-01-05T10:45:47.048" v="3608" actId="14861"/>
+          <ac:chgData name="Dominique RIGHETTO" userId="512fe077-82ad-424c-88a3-15e852b5861d" providerId="ADAL" clId="{8B7CB91F-10CE-42C2-B9B8-BFF2D3401655}" dt="2026-01-05T15:04:26.999" v="4510" actId="1076"/>
           <ac:picMkLst>
             <pc:docMk/>
             <pc:sldMk cId="715954666" sldId="303"/>
@@ -1045,7 +1053,7 @@
         </pc:picChg>
       </pc:sldChg>
       <pc:sldChg chg="addSp delSp modSp add mod ord">
-        <pc:chgData name="Dominique RIGHETTO" userId="512fe077-82ad-424c-88a3-15e852b5861d" providerId="ADAL" clId="{8B7CB91F-10CE-42C2-B9B8-BFF2D3401655}" dt="2026-01-05T10:59:37.292" v="3774" actId="1037"/>
+        <pc:chgData name="Dominique RIGHETTO" userId="512fe077-82ad-424c-88a3-15e852b5861d" providerId="ADAL" clId="{8B7CB91F-10CE-42C2-B9B8-BFF2D3401655}" dt="2026-01-05T14:48:49.033" v="4197" actId="14100"/>
         <pc:sldMkLst>
           <pc:docMk/>
           <pc:sldMk cId="989586433" sldId="305"/>
@@ -1066,12 +1074,28 @@
             <ac:spMk id="3" creationId="{4DBACDBD-B750-A641-A360-8510B71B52F8}"/>
           </ac:spMkLst>
         </pc:spChg>
+        <pc:spChg chg="add mod ord">
+          <ac:chgData name="Dominique RIGHETTO" userId="512fe077-82ad-424c-88a3-15e852b5861d" providerId="ADAL" clId="{8B7CB91F-10CE-42C2-B9B8-BFF2D3401655}" dt="2026-01-05T14:48:49.033" v="4197" actId="14100"/>
+          <ac:spMkLst>
+            <pc:docMk/>
+            <pc:sldMk cId="989586433" sldId="305"/>
+            <ac:spMk id="7" creationId="{AA1481E2-E225-CB1E-5FC0-20D0387972C4}"/>
+          </ac:spMkLst>
+        </pc:spChg>
         <pc:spChg chg="add mod">
-          <ac:chgData name="Dominique RIGHETTO" userId="512fe077-82ad-424c-88a3-15e852b5861d" providerId="ADAL" clId="{8B7CB91F-10CE-42C2-B9B8-BFF2D3401655}" dt="2026-01-05T10:59:19.418" v="3770" actId="1076"/>
+          <ac:chgData name="Dominique RIGHETTO" userId="512fe077-82ad-424c-88a3-15e852b5861d" providerId="ADAL" clId="{8B7CB91F-10CE-42C2-B9B8-BFF2D3401655}" dt="2026-01-05T14:48:40.318" v="4194" actId="1076"/>
           <ac:spMkLst>
             <pc:docMk/>
             <pc:sldMk cId="989586433" sldId="305"/>
             <ac:spMk id="9" creationId="{43CC8CFB-4C99-259F-A2E1-C1966F2A9256}"/>
+          </ac:spMkLst>
+        </pc:spChg>
+        <pc:spChg chg="add del mod">
+          <ac:chgData name="Dominique RIGHETTO" userId="512fe077-82ad-424c-88a3-15e852b5861d" providerId="ADAL" clId="{8B7CB91F-10CE-42C2-B9B8-BFF2D3401655}" dt="2026-01-05T14:46:27.088" v="4185" actId="478"/>
+          <ac:spMkLst>
+            <pc:docMk/>
+            <pc:sldMk cId="989586433" sldId="305"/>
+            <ac:spMk id="12" creationId="{F0128405-7D4E-CF9E-D8CB-320938C1CEAC}"/>
           </ac:spMkLst>
         </pc:spChg>
         <pc:picChg chg="del">
@@ -1082,8 +1106,16 @@
             <ac:picMk id="5" creationId="{19E4CFDB-9F54-674E-5280-33F4416CA6C5}"/>
           </ac:picMkLst>
         </pc:picChg>
-        <pc:picChg chg="add mod">
-          <ac:chgData name="Dominique RIGHETTO" userId="512fe077-82ad-424c-88a3-15e852b5861d" providerId="ADAL" clId="{8B7CB91F-10CE-42C2-B9B8-BFF2D3401655}" dt="2026-01-05T10:59:37.292" v="3774" actId="1037"/>
+        <pc:picChg chg="add del mod">
+          <ac:chgData name="Dominique RIGHETTO" userId="512fe077-82ad-424c-88a3-15e852b5861d" providerId="ADAL" clId="{8B7CB91F-10CE-42C2-B9B8-BFF2D3401655}" dt="2026-01-05T14:44:29.699" v="4160" actId="478"/>
+          <ac:picMkLst>
+            <pc:docMk/>
+            <pc:sldMk cId="989586433" sldId="305"/>
+            <ac:picMk id="5" creationId="{C7A73C33-6AB9-F717-0095-281B790D3D92}"/>
+          </ac:picMkLst>
+        </pc:picChg>
+        <pc:picChg chg="add del mod">
+          <ac:chgData name="Dominique RIGHETTO" userId="512fe077-82ad-424c-88a3-15e852b5861d" providerId="ADAL" clId="{8B7CB91F-10CE-42C2-B9B8-BFF2D3401655}" dt="2026-01-05T14:42:40.702" v="4144" actId="478"/>
           <ac:picMkLst>
             <pc:docMk/>
             <pc:sldMk cId="989586433" sldId="305"/>
@@ -1091,11 +1123,434 @@
           </ac:picMkLst>
         </pc:picChg>
         <pc:picChg chg="add mod">
-          <ac:chgData name="Dominique RIGHETTO" userId="512fe077-82ad-424c-88a3-15e852b5861d" providerId="ADAL" clId="{8B7CB91F-10CE-42C2-B9B8-BFF2D3401655}" dt="2026-01-05T10:58:58.421" v="3767" actId="1076"/>
+          <ac:chgData name="Dominique RIGHETTO" userId="512fe077-82ad-424c-88a3-15e852b5861d" providerId="ADAL" clId="{8B7CB91F-10CE-42C2-B9B8-BFF2D3401655}" dt="2026-01-05T14:48:30.216" v="4191" actId="14100"/>
           <ac:picMkLst>
             <pc:docMk/>
             <pc:sldMk cId="989586433" sldId="305"/>
             <ac:picMk id="8" creationId="{D6C333E4-EAB2-386F-0AA9-7808BDB89AD5}"/>
+          </ac:picMkLst>
+        </pc:picChg>
+        <pc:picChg chg="add mod modCrop">
+          <ac:chgData name="Dominique RIGHETTO" userId="512fe077-82ad-424c-88a3-15e852b5861d" providerId="ADAL" clId="{8B7CB91F-10CE-42C2-B9B8-BFF2D3401655}" dt="2026-01-05T14:48:36.590" v="4193" actId="14100"/>
+          <ac:picMkLst>
+            <pc:docMk/>
+            <pc:sldMk cId="989586433" sldId="305"/>
+            <ac:picMk id="11" creationId="{14FDD82F-A001-EF7F-B4A6-AC95A767E4F0}"/>
+          </ac:picMkLst>
+        </pc:picChg>
+      </pc:sldChg>
+      <pc:sldChg chg="delSp modSp add mod ord">
+        <pc:chgData name="Dominique RIGHETTO" userId="512fe077-82ad-424c-88a3-15e852b5861d" providerId="ADAL" clId="{8B7CB91F-10CE-42C2-B9B8-BFF2D3401655}" dt="2026-01-05T14:49:44.140" v="4207" actId="20577"/>
+        <pc:sldMkLst>
+          <pc:docMk/>
+          <pc:sldMk cId="1692727651" sldId="306"/>
+        </pc:sldMkLst>
+        <pc:spChg chg="mod">
+          <ac:chgData name="Dominique RIGHETTO" userId="512fe077-82ad-424c-88a3-15e852b5861d" providerId="ADAL" clId="{8B7CB91F-10CE-42C2-B9B8-BFF2D3401655}" dt="2026-01-05T13:31:31.412" v="3779" actId="20577"/>
+          <ac:spMkLst>
+            <pc:docMk/>
+            <pc:sldMk cId="1692727651" sldId="306"/>
+            <ac:spMk id="2" creationId="{11157380-E6C6-BFA4-9C04-458C2CBB76E3}"/>
+          </ac:spMkLst>
+        </pc:spChg>
+        <pc:spChg chg="mod">
+          <ac:chgData name="Dominique RIGHETTO" userId="512fe077-82ad-424c-88a3-15e852b5861d" providerId="ADAL" clId="{8B7CB91F-10CE-42C2-B9B8-BFF2D3401655}" dt="2026-01-05T14:49:44.140" v="4207" actId="20577"/>
+          <ac:spMkLst>
+            <pc:docMk/>
+            <pc:sldMk cId="1692727651" sldId="306"/>
+            <ac:spMk id="3" creationId="{3891132A-A1FF-9CE4-2144-AF041DB3EBB3}"/>
+          </ac:spMkLst>
+        </pc:spChg>
+        <pc:picChg chg="del">
+          <ac:chgData name="Dominique RIGHETTO" userId="512fe077-82ad-424c-88a3-15e852b5861d" providerId="ADAL" clId="{8B7CB91F-10CE-42C2-B9B8-BFF2D3401655}" dt="2026-01-05T13:33:21.581" v="3904" actId="478"/>
+          <ac:picMkLst>
+            <pc:docMk/>
+            <pc:sldMk cId="1692727651" sldId="306"/>
+            <ac:picMk id="6" creationId="{DDB3C190-729A-F4E7-6478-4C100CDCEB0D}"/>
+          </ac:picMkLst>
+        </pc:picChg>
+      </pc:sldChg>
+      <pc:sldChg chg="addSp delSp modSp add mod">
+        <pc:chgData name="Dominique RIGHETTO" userId="512fe077-82ad-424c-88a3-15e852b5861d" providerId="ADAL" clId="{8B7CB91F-10CE-42C2-B9B8-BFF2D3401655}" dt="2026-01-05T14:41:36.204" v="4143" actId="14861"/>
+        <pc:sldMkLst>
+          <pc:docMk/>
+          <pc:sldMk cId="3958721667" sldId="307"/>
+        </pc:sldMkLst>
+        <pc:spChg chg="del">
+          <ac:chgData name="Dominique RIGHETTO" userId="512fe077-82ad-424c-88a3-15e852b5861d" providerId="ADAL" clId="{8B7CB91F-10CE-42C2-B9B8-BFF2D3401655}" dt="2026-01-05T14:40:34.348" v="4137" actId="478"/>
+          <ac:spMkLst>
+            <pc:docMk/>
+            <pc:sldMk cId="3958721667" sldId="307"/>
+            <ac:spMk id="3" creationId="{C0CC1EA4-5EDA-5F21-FF78-5DA844B609EB}"/>
+          </ac:spMkLst>
+        </pc:spChg>
+        <pc:spChg chg="add del mod">
+          <ac:chgData name="Dominique RIGHETTO" userId="512fe077-82ad-424c-88a3-15e852b5861d" providerId="ADAL" clId="{8B7CB91F-10CE-42C2-B9B8-BFF2D3401655}" dt="2026-01-05T14:40:37.832" v="4138" actId="478"/>
+          <ac:spMkLst>
+            <pc:docMk/>
+            <pc:sldMk cId="3958721667" sldId="307"/>
+            <ac:spMk id="5" creationId="{5B0D9699-5C21-4AB7-EBBF-5A4BB39B4F42}"/>
+          </ac:spMkLst>
+        </pc:spChg>
+        <pc:picChg chg="add mod">
+          <ac:chgData name="Dominique RIGHETTO" userId="512fe077-82ad-424c-88a3-15e852b5861d" providerId="ADAL" clId="{8B7CB91F-10CE-42C2-B9B8-BFF2D3401655}" dt="2026-01-05T14:41:36.204" v="4143" actId="14861"/>
+          <ac:picMkLst>
+            <pc:docMk/>
+            <pc:sldMk cId="3958721667" sldId="307"/>
+            <ac:picMk id="7" creationId="{1E8E8772-F4E3-6F5A-F5C5-E01FF188109F}"/>
+          </ac:picMkLst>
+        </pc:picChg>
+      </pc:sldChg>
+      <pc:sldChg chg="addSp delSp modSp add mod ord">
+        <pc:chgData name="Dominique RIGHETTO" userId="512fe077-82ad-424c-88a3-15e852b5861d" providerId="ADAL" clId="{8B7CB91F-10CE-42C2-B9B8-BFF2D3401655}" dt="2026-01-05T14:53:34.318" v="4230" actId="207"/>
+        <pc:sldMkLst>
+          <pc:docMk/>
+          <pc:sldMk cId="2964034352" sldId="308"/>
+        </pc:sldMkLst>
+        <pc:spChg chg="mod">
+          <ac:chgData name="Dominique RIGHETTO" userId="512fe077-82ad-424c-88a3-15e852b5861d" providerId="ADAL" clId="{8B7CB91F-10CE-42C2-B9B8-BFF2D3401655}" dt="2026-01-05T14:50:16.554" v="4212" actId="20577"/>
+          <ac:spMkLst>
+            <pc:docMk/>
+            <pc:sldMk cId="2964034352" sldId="308"/>
+            <ac:spMk id="2" creationId="{315112D2-667A-5ACA-2D54-8841534A1F0B}"/>
+          </ac:spMkLst>
+        </pc:spChg>
+        <pc:spChg chg="mod">
+          <ac:chgData name="Dominique RIGHETTO" userId="512fe077-82ad-424c-88a3-15e852b5861d" providerId="ADAL" clId="{8B7CB91F-10CE-42C2-B9B8-BFF2D3401655}" dt="2026-01-05T14:50:23.442" v="4221" actId="20577"/>
+          <ac:spMkLst>
+            <pc:docMk/>
+            <pc:sldMk cId="2964034352" sldId="308"/>
+            <ac:spMk id="3" creationId="{A8F0DB80-3BA9-573F-68E4-4730BBA07D63}"/>
+          </ac:spMkLst>
+        </pc:spChg>
+        <pc:spChg chg="mod">
+          <ac:chgData name="Dominique RIGHETTO" userId="512fe077-82ad-424c-88a3-15e852b5861d" providerId="ADAL" clId="{8B7CB91F-10CE-42C2-B9B8-BFF2D3401655}" dt="2026-01-05T14:53:34.318" v="4230" actId="207"/>
+          <ac:spMkLst>
+            <pc:docMk/>
+            <pc:sldMk cId="2964034352" sldId="308"/>
+            <ac:spMk id="7" creationId="{57A1192D-9FD8-26B8-E303-C1AD3B37DEEE}"/>
+          </ac:spMkLst>
+        </pc:spChg>
+        <pc:picChg chg="add mod">
+          <ac:chgData name="Dominique RIGHETTO" userId="512fe077-82ad-424c-88a3-15e852b5861d" providerId="ADAL" clId="{8B7CB91F-10CE-42C2-B9B8-BFF2D3401655}" dt="2026-01-05T14:53:03.572" v="4227" actId="108"/>
+          <ac:picMkLst>
+            <pc:docMk/>
+            <pc:sldMk cId="2964034352" sldId="308"/>
+            <ac:picMk id="5" creationId="{40913B38-1455-23B0-9894-4B7225F128A5}"/>
+          </ac:picMkLst>
+        </pc:picChg>
+        <pc:picChg chg="del">
+          <ac:chgData name="Dominique RIGHETTO" userId="512fe077-82ad-424c-88a3-15e852b5861d" providerId="ADAL" clId="{8B7CB91F-10CE-42C2-B9B8-BFF2D3401655}" dt="2026-01-05T14:52:51.224" v="4222" actId="478"/>
+          <ac:picMkLst>
+            <pc:docMk/>
+            <pc:sldMk cId="2964034352" sldId="308"/>
+            <ac:picMk id="6" creationId="{7B801C81-762A-D5EE-7DAD-6E34625E8A73}"/>
+          </ac:picMkLst>
+        </pc:picChg>
+      </pc:sldChg>
+      <pc:sldChg chg="addSp delSp modSp add mod ord">
+        <pc:chgData name="Dominique RIGHETTO" userId="512fe077-82ad-424c-88a3-15e852b5861d" providerId="ADAL" clId="{8B7CB91F-10CE-42C2-B9B8-BFF2D3401655}" dt="2026-01-05T15:21:18.865" v="4624" actId="14100"/>
+        <pc:sldMkLst>
+          <pc:docMk/>
+          <pc:sldMk cId="625439952" sldId="309"/>
+        </pc:sldMkLst>
+        <pc:spChg chg="mod">
+          <ac:chgData name="Dominique RIGHETTO" userId="512fe077-82ad-424c-88a3-15e852b5861d" providerId="ADAL" clId="{8B7CB91F-10CE-42C2-B9B8-BFF2D3401655}" dt="2026-01-05T14:59:21.621" v="4235" actId="20577"/>
+          <ac:spMkLst>
+            <pc:docMk/>
+            <pc:sldMk cId="625439952" sldId="309"/>
+            <ac:spMk id="2" creationId="{0F3B0007-69E6-BDDF-D1A7-F14E86700773}"/>
+          </ac:spMkLst>
+        </pc:spChg>
+        <pc:spChg chg="mod">
+          <ac:chgData name="Dominique RIGHETTO" userId="512fe077-82ad-424c-88a3-15e852b5861d" providerId="ADAL" clId="{8B7CB91F-10CE-42C2-B9B8-BFF2D3401655}" dt="2026-01-05T15:08:46.969" v="4555" actId="20577"/>
+          <ac:spMkLst>
+            <pc:docMk/>
+            <pc:sldMk cId="625439952" sldId="309"/>
+            <ac:spMk id="3" creationId="{278B57A3-956B-6E65-1863-5D3E5605B75E}"/>
+          </ac:spMkLst>
+        </pc:spChg>
+        <pc:spChg chg="del">
+          <ac:chgData name="Dominique RIGHETTO" userId="512fe077-82ad-424c-88a3-15e852b5861d" providerId="ADAL" clId="{8B7CB91F-10CE-42C2-B9B8-BFF2D3401655}" dt="2026-01-05T14:59:36.995" v="4244" actId="478"/>
+          <ac:spMkLst>
+            <pc:docMk/>
+            <pc:sldMk cId="625439952" sldId="309"/>
+            <ac:spMk id="7" creationId="{30A8EB54-950B-AE3D-6A7B-0D5A0E87E466}"/>
+          </ac:spMkLst>
+        </pc:spChg>
+        <pc:spChg chg="del">
+          <ac:chgData name="Dominique RIGHETTO" userId="512fe077-82ad-424c-88a3-15e852b5861d" providerId="ADAL" clId="{8B7CB91F-10CE-42C2-B9B8-BFF2D3401655}" dt="2026-01-05T14:59:33.876" v="4242" actId="478"/>
+          <ac:spMkLst>
+            <pc:docMk/>
+            <pc:sldMk cId="625439952" sldId="309"/>
+            <ac:spMk id="9" creationId="{61CA3FDA-0972-D95E-580C-1D7E1A643872}"/>
+          </ac:spMkLst>
+        </pc:spChg>
+        <pc:spChg chg="add mod">
+          <ac:chgData name="Dominique RIGHETTO" userId="512fe077-82ad-424c-88a3-15e852b5861d" providerId="ADAL" clId="{8B7CB91F-10CE-42C2-B9B8-BFF2D3401655}" dt="2026-01-05T15:19:11.214" v="4608" actId="20577"/>
+          <ac:spMkLst>
+            <pc:docMk/>
+            <pc:sldMk cId="625439952" sldId="309"/>
+            <ac:spMk id="10" creationId="{A7BFD8A7-ED6E-CB26-E0EE-5F2A6543B2BE}"/>
+          </ac:spMkLst>
+        </pc:spChg>
+        <pc:spChg chg="add mod ord">
+          <ac:chgData name="Dominique RIGHETTO" userId="512fe077-82ad-424c-88a3-15e852b5861d" providerId="ADAL" clId="{8B7CB91F-10CE-42C2-B9B8-BFF2D3401655}" dt="2026-01-05T15:21:18.865" v="4624" actId="14100"/>
+          <ac:spMkLst>
+            <pc:docMk/>
+            <pc:sldMk cId="625439952" sldId="309"/>
+            <ac:spMk id="12" creationId="{0364D1ED-1FFF-D3D7-3378-10C1EA44D21F}"/>
+          </ac:spMkLst>
+        </pc:spChg>
+        <pc:picChg chg="add del mod modCrop">
+          <ac:chgData name="Dominique RIGHETTO" userId="512fe077-82ad-424c-88a3-15e852b5861d" providerId="ADAL" clId="{8B7CB91F-10CE-42C2-B9B8-BFF2D3401655}" dt="2026-01-05T15:20:51.214" v="4614" actId="478"/>
+          <ac:picMkLst>
+            <pc:docMk/>
+            <pc:sldMk cId="625439952" sldId="309"/>
+            <ac:picMk id="5" creationId="{565F0C9E-6E6E-F1F9-48D7-936F32B20595}"/>
+          </ac:picMkLst>
+        </pc:picChg>
+        <pc:picChg chg="add mod">
+          <ac:chgData name="Dominique RIGHETTO" userId="512fe077-82ad-424c-88a3-15e852b5861d" providerId="ADAL" clId="{8B7CB91F-10CE-42C2-B9B8-BFF2D3401655}" dt="2026-01-05T15:07:11.046" v="4527"/>
+          <ac:picMkLst>
+            <pc:docMk/>
+            <pc:sldMk cId="625439952" sldId="309"/>
+            <ac:picMk id="6" creationId="{060D9616-7F41-3059-7EFF-243BEF9597F9}"/>
+          </ac:picMkLst>
+        </pc:picChg>
+        <pc:picChg chg="del">
+          <ac:chgData name="Dominique RIGHETTO" userId="512fe077-82ad-424c-88a3-15e852b5861d" providerId="ADAL" clId="{8B7CB91F-10CE-42C2-B9B8-BFF2D3401655}" dt="2026-01-05T14:59:32.356" v="4241" actId="478"/>
+          <ac:picMkLst>
+            <pc:docMk/>
+            <pc:sldMk cId="625439952" sldId="309"/>
+            <ac:picMk id="8" creationId="{A62A7847-7334-10FE-79FE-06D50DE8DBC4}"/>
+          </ac:picMkLst>
+        </pc:picChg>
+        <pc:picChg chg="del">
+          <ac:chgData name="Dominique RIGHETTO" userId="512fe077-82ad-424c-88a3-15e852b5861d" providerId="ADAL" clId="{8B7CB91F-10CE-42C2-B9B8-BFF2D3401655}" dt="2026-01-05T14:59:34.716" v="4243" actId="478"/>
+          <ac:picMkLst>
+            <pc:docMk/>
+            <pc:sldMk cId="625439952" sldId="309"/>
+            <ac:picMk id="11" creationId="{FF1A43D7-04AD-62F4-0529-434A05957678}"/>
+          </ac:picMkLst>
+        </pc:picChg>
+        <pc:picChg chg="add mod">
+          <ac:chgData name="Dominique RIGHETTO" userId="512fe077-82ad-424c-88a3-15e852b5861d" providerId="ADAL" clId="{8B7CB91F-10CE-42C2-B9B8-BFF2D3401655}" dt="2026-01-05T15:21:03.305" v="4619" actId="14100"/>
+          <ac:picMkLst>
+            <pc:docMk/>
+            <pc:sldMk cId="625439952" sldId="309"/>
+            <ac:picMk id="14" creationId="{6ECDF1AA-B65E-A525-23B4-1B6370788CE5}"/>
+          </ac:picMkLst>
+        </pc:picChg>
+      </pc:sldChg>
+      <pc:sldChg chg="addSp delSp modSp add mod ord">
+        <pc:chgData name="Dominique RIGHETTO" userId="512fe077-82ad-424c-88a3-15e852b5861d" providerId="ADAL" clId="{8B7CB91F-10CE-42C2-B9B8-BFF2D3401655}" dt="2026-01-05T15:23:02.147" v="4658" actId="20577"/>
+        <pc:sldMkLst>
+          <pc:docMk/>
+          <pc:sldMk cId="497681082" sldId="310"/>
+        </pc:sldMkLst>
+        <pc:spChg chg="mod">
+          <ac:chgData name="Dominique RIGHETTO" userId="512fe077-82ad-424c-88a3-15e852b5861d" providerId="ADAL" clId="{8B7CB91F-10CE-42C2-B9B8-BFF2D3401655}" dt="2026-01-05T15:01:47.219" v="4293" actId="20577"/>
+          <ac:spMkLst>
+            <pc:docMk/>
+            <pc:sldMk cId="497681082" sldId="310"/>
+            <ac:spMk id="2" creationId="{C48E3CF9-CB24-1DB0-A3CE-9DBCDE187153}"/>
+          </ac:spMkLst>
+        </pc:spChg>
+        <pc:spChg chg="mod">
+          <ac:chgData name="Dominique RIGHETTO" userId="512fe077-82ad-424c-88a3-15e852b5861d" providerId="ADAL" clId="{8B7CB91F-10CE-42C2-B9B8-BFF2D3401655}" dt="2026-01-05T15:23:02.147" v="4658" actId="20577"/>
+          <ac:spMkLst>
+            <pc:docMk/>
+            <pc:sldMk cId="497681082" sldId="310"/>
+            <ac:spMk id="3" creationId="{7724CFBE-895C-529D-962F-48F3B3F99C9A}"/>
+          </ac:spMkLst>
+        </pc:spChg>
+        <pc:picChg chg="add mod">
+          <ac:chgData name="Dominique RIGHETTO" userId="512fe077-82ad-424c-88a3-15e852b5861d" providerId="ADAL" clId="{8B7CB91F-10CE-42C2-B9B8-BFF2D3401655}" dt="2026-01-05T15:04:44.524" v="4517" actId="1076"/>
+          <ac:picMkLst>
+            <pc:docMk/>
+            <pc:sldMk cId="497681082" sldId="310"/>
+            <ac:picMk id="5" creationId="{98E7A59E-620D-AB2E-0ABE-776E5686CFD5}"/>
+          </ac:picMkLst>
+        </pc:picChg>
+        <pc:picChg chg="del">
+          <ac:chgData name="Dominique RIGHETTO" userId="512fe077-82ad-424c-88a3-15e852b5861d" providerId="ADAL" clId="{8B7CB91F-10CE-42C2-B9B8-BFF2D3401655}" dt="2026-01-05T15:03:32.051" v="4474" actId="478"/>
+          <ac:picMkLst>
+            <pc:docMk/>
+            <pc:sldMk cId="497681082" sldId="310"/>
+            <ac:picMk id="6" creationId="{CEF149A3-B6C9-B8F6-6621-F9AE4F7B490C}"/>
+          </ac:picMkLst>
+        </pc:picChg>
+      </pc:sldChg>
+      <pc:sldChg chg="addSp delSp modSp add mod">
+        <pc:chgData name="Dominique RIGHETTO" userId="512fe077-82ad-424c-88a3-15e852b5861d" providerId="ADAL" clId="{8B7CB91F-10CE-42C2-B9B8-BFF2D3401655}" dt="2026-01-05T15:19:26.609" v="4610" actId="1076"/>
+        <pc:sldMkLst>
+          <pc:docMk/>
+          <pc:sldMk cId="1502947638" sldId="311"/>
+        </pc:sldMkLst>
+        <pc:spChg chg="del">
+          <ac:chgData name="Dominique RIGHETTO" userId="512fe077-82ad-424c-88a3-15e852b5861d" providerId="ADAL" clId="{8B7CB91F-10CE-42C2-B9B8-BFF2D3401655}" dt="2026-01-05T15:07:19.483" v="4529" actId="478"/>
+          <ac:spMkLst>
+            <pc:docMk/>
+            <pc:sldMk cId="1502947638" sldId="311"/>
+            <ac:spMk id="3" creationId="{0A2D07C9-CB99-6D3B-F209-98AA779960A1}"/>
+          </ac:spMkLst>
+        </pc:spChg>
+        <pc:spChg chg="add del mod">
+          <ac:chgData name="Dominique RIGHETTO" userId="512fe077-82ad-424c-88a3-15e852b5861d" providerId="ADAL" clId="{8B7CB91F-10CE-42C2-B9B8-BFF2D3401655}" dt="2026-01-05T15:07:20.928" v="4530" actId="478"/>
+          <ac:spMkLst>
+            <pc:docMk/>
+            <pc:sldMk cId="1502947638" sldId="311"/>
+            <ac:spMk id="6" creationId="{F4DF2A68-AD91-9259-9EFD-F55BE655885D}"/>
+          </ac:spMkLst>
+        </pc:spChg>
+        <pc:picChg chg="del">
+          <ac:chgData name="Dominique RIGHETTO" userId="512fe077-82ad-424c-88a3-15e852b5861d" providerId="ADAL" clId="{8B7CB91F-10CE-42C2-B9B8-BFF2D3401655}" dt="2026-01-05T15:07:21.789" v="4531" actId="478"/>
+          <ac:picMkLst>
+            <pc:docMk/>
+            <pc:sldMk cId="1502947638" sldId="311"/>
+            <ac:picMk id="5" creationId="{9D05FDD9-2189-4212-83A0-3FB54DAABE3D}"/>
+          </ac:picMkLst>
+        </pc:picChg>
+        <pc:picChg chg="add del mod modCrop">
+          <ac:chgData name="Dominique RIGHETTO" userId="512fe077-82ad-424c-88a3-15e852b5861d" providerId="ADAL" clId="{8B7CB91F-10CE-42C2-B9B8-BFF2D3401655}" dt="2026-01-05T15:17:00.266" v="4580" actId="478"/>
+          <ac:picMkLst>
+            <pc:docMk/>
+            <pc:sldMk cId="1502947638" sldId="311"/>
+            <ac:picMk id="8" creationId="{6B0BB634-23C3-A70A-54AC-D138D5B822EA}"/>
+          </ac:picMkLst>
+        </pc:picChg>
+        <pc:picChg chg="add mod modCrop">
+          <ac:chgData name="Dominique RIGHETTO" userId="512fe077-82ad-424c-88a3-15e852b5861d" providerId="ADAL" clId="{8B7CB91F-10CE-42C2-B9B8-BFF2D3401655}" dt="2026-01-05T15:19:26.609" v="4610" actId="1076"/>
+          <ac:picMkLst>
+            <pc:docMk/>
+            <pc:sldMk cId="1502947638" sldId="311"/>
+            <ac:picMk id="10" creationId="{C676507D-8D55-F03F-60D5-6EA1D309D23F}"/>
+          </ac:picMkLst>
+        </pc:picChg>
+        <pc:picChg chg="add mod">
+          <ac:chgData name="Dominique RIGHETTO" userId="512fe077-82ad-424c-88a3-15e852b5861d" providerId="ADAL" clId="{8B7CB91F-10CE-42C2-B9B8-BFF2D3401655}" dt="2026-01-05T15:19:23.010" v="4609" actId="1076"/>
+          <ac:picMkLst>
+            <pc:docMk/>
+            <pc:sldMk cId="1502947638" sldId="311"/>
+            <ac:picMk id="12" creationId="{7029D462-864D-D455-3E8C-2BC297238028}"/>
+          </ac:picMkLst>
+        </pc:picChg>
+      </pc:sldChg>
+      <pc:sldChg chg="addSp delSp modSp add del mod">
+        <pc:chgData name="Dominique RIGHETTO" userId="512fe077-82ad-424c-88a3-15e852b5861d" providerId="ADAL" clId="{8B7CB91F-10CE-42C2-B9B8-BFF2D3401655}" dt="2026-01-05T15:22:10.947" v="4625" actId="47"/>
+        <pc:sldMkLst>
+          <pc:docMk/>
+          <pc:sldMk cId="417307664" sldId="312"/>
+        </pc:sldMkLst>
+        <pc:picChg chg="add del mod">
+          <ac:chgData name="Dominique RIGHETTO" userId="512fe077-82ad-424c-88a3-15e852b5861d" providerId="ADAL" clId="{8B7CB91F-10CE-42C2-B9B8-BFF2D3401655}" dt="2026-01-05T15:09:55.101" v="4556" actId="478"/>
+          <ac:picMkLst>
+            <pc:docMk/>
+            <pc:sldMk cId="417307664" sldId="312"/>
+            <ac:picMk id="4" creationId="{F09F7F5E-ADAB-2E25-FA07-EC95D2B68FDE}"/>
+          </ac:picMkLst>
+        </pc:picChg>
+        <pc:picChg chg="del">
+          <ac:chgData name="Dominique RIGHETTO" userId="512fe077-82ad-424c-88a3-15e852b5861d" providerId="ADAL" clId="{8B7CB91F-10CE-42C2-B9B8-BFF2D3401655}" dt="2026-01-05T15:08:25.100" v="4539" actId="478"/>
+          <ac:picMkLst>
+            <pc:docMk/>
+            <pc:sldMk cId="417307664" sldId="312"/>
+            <ac:picMk id="8" creationId="{34F69B83-5398-119C-60A6-C14965AA410B}"/>
+          </ac:picMkLst>
+        </pc:picChg>
+      </pc:sldChg>
+      <pc:sldChg chg="addSp delSp modSp add mod ord">
+        <pc:chgData name="Dominique RIGHETTO" userId="512fe077-82ad-424c-88a3-15e852b5861d" providerId="ADAL" clId="{8B7CB91F-10CE-42C2-B9B8-BFF2D3401655}" dt="2026-01-05T15:49:14.065" v="4755" actId="14861"/>
+        <pc:sldMkLst>
+          <pc:docMk/>
+          <pc:sldMk cId="750126829" sldId="312"/>
+        </pc:sldMkLst>
+        <pc:spChg chg="mod">
+          <ac:chgData name="Dominique RIGHETTO" userId="512fe077-82ad-424c-88a3-15e852b5861d" providerId="ADAL" clId="{8B7CB91F-10CE-42C2-B9B8-BFF2D3401655}" dt="2026-01-05T15:23:31.737" v="4665" actId="20577"/>
+          <ac:spMkLst>
+            <pc:docMk/>
+            <pc:sldMk cId="750126829" sldId="312"/>
+            <ac:spMk id="2" creationId="{98F14790-074C-95E2-C4EF-910EA1CD2AF1}"/>
+          </ac:spMkLst>
+        </pc:spChg>
+        <pc:spChg chg="mod">
+          <ac:chgData name="Dominique RIGHETTO" userId="512fe077-82ad-424c-88a3-15e852b5861d" providerId="ADAL" clId="{8B7CB91F-10CE-42C2-B9B8-BFF2D3401655}" dt="2026-01-05T15:24:03.038" v="4748" actId="20577"/>
+          <ac:spMkLst>
+            <pc:docMk/>
+            <pc:sldMk cId="750126829" sldId="312"/>
+            <ac:spMk id="3" creationId="{BE28F0C4-9907-93B2-D5DA-46FB3B31BFBF}"/>
+          </ac:spMkLst>
+        </pc:spChg>
+        <pc:spChg chg="mod">
+          <ac:chgData name="Dominique RIGHETTO" userId="512fe077-82ad-424c-88a3-15e852b5861d" providerId="ADAL" clId="{8B7CB91F-10CE-42C2-B9B8-BFF2D3401655}" dt="2026-01-05T15:24:29.591" v="4751" actId="207"/>
+          <ac:spMkLst>
+            <pc:docMk/>
+            <pc:sldMk cId="750126829" sldId="312"/>
+            <ac:spMk id="7" creationId="{BA798E0F-45CC-AAFD-85E7-A216053474BA}"/>
+          </ac:spMkLst>
+        </pc:spChg>
+        <pc:picChg chg="del">
+          <ac:chgData name="Dominique RIGHETTO" userId="512fe077-82ad-424c-88a3-15e852b5861d" providerId="ADAL" clId="{8B7CB91F-10CE-42C2-B9B8-BFF2D3401655}" dt="2026-01-05T15:23:34.457" v="4666" actId="478"/>
+          <ac:picMkLst>
+            <pc:docMk/>
+            <pc:sldMk cId="750126829" sldId="312"/>
+            <ac:picMk id="5" creationId="{F4CE89E5-16AC-4C09-B9BF-3738906E7E27}"/>
+          </ac:picMkLst>
+        </pc:picChg>
+        <pc:picChg chg="add mod">
+          <ac:chgData name="Dominique RIGHETTO" userId="512fe077-82ad-424c-88a3-15e852b5861d" providerId="ADAL" clId="{8B7CB91F-10CE-42C2-B9B8-BFF2D3401655}" dt="2026-01-05T15:49:14.065" v="4755" actId="14861"/>
+          <ac:picMkLst>
+            <pc:docMk/>
+            <pc:sldMk cId="750126829" sldId="312"/>
+            <ac:picMk id="6" creationId="{A12CF8EB-E28E-6000-70F9-43E20A4527EC}"/>
+          </ac:picMkLst>
+        </pc:picChg>
+      </pc:sldChg>
+      <pc:sldChg chg="delSp modSp add mod ord">
+        <pc:chgData name="Dominique RIGHETTO" userId="512fe077-82ad-424c-88a3-15e852b5861d" providerId="ADAL" clId="{8B7CB91F-10CE-42C2-B9B8-BFF2D3401655}" dt="2026-01-05T15:50:13.653" v="4776" actId="20577"/>
+        <pc:sldMkLst>
+          <pc:docMk/>
+          <pc:sldMk cId="1989195103" sldId="313"/>
+        </pc:sldMkLst>
+        <pc:spChg chg="mod">
+          <ac:chgData name="Dominique RIGHETTO" userId="512fe077-82ad-424c-88a3-15e852b5861d" providerId="ADAL" clId="{8B7CB91F-10CE-42C2-B9B8-BFF2D3401655}" dt="2026-01-05T15:50:13.653" v="4776" actId="20577"/>
+          <ac:spMkLst>
+            <pc:docMk/>
+            <pc:sldMk cId="1989195103" sldId="313"/>
+            <ac:spMk id="2" creationId="{C57B4822-73D2-F2DE-4902-BDBAB052CFDC}"/>
+          </ac:spMkLst>
+        </pc:spChg>
+        <pc:spChg chg="mod">
+          <ac:chgData name="Dominique RIGHETTO" userId="512fe077-82ad-424c-88a3-15e852b5861d" providerId="ADAL" clId="{8B7CB91F-10CE-42C2-B9B8-BFF2D3401655}" dt="2026-01-05T15:50:09.955" v="4774" actId="5793"/>
+          <ac:spMkLst>
+            <pc:docMk/>
+            <pc:sldMk cId="1989195103" sldId="313"/>
+            <ac:spMk id="3" creationId="{2BDD3EBC-02D0-7D15-A14C-72BB94993CF4}"/>
+          </ac:spMkLst>
+        </pc:spChg>
+        <pc:spChg chg="del">
+          <ac:chgData name="Dominique RIGHETTO" userId="512fe077-82ad-424c-88a3-15e852b5861d" providerId="ADAL" clId="{8B7CB91F-10CE-42C2-B9B8-BFF2D3401655}" dt="2026-01-05T15:50:04.100" v="4770" actId="478"/>
+          <ac:spMkLst>
+            <pc:docMk/>
+            <pc:sldMk cId="1989195103" sldId="313"/>
+            <ac:spMk id="10" creationId="{3F184BA4-1FB2-84AE-360A-E469D75A8F7A}"/>
+          </ac:spMkLst>
+        </pc:spChg>
+        <pc:spChg chg="del">
+          <ac:chgData name="Dominique RIGHETTO" userId="512fe077-82ad-424c-88a3-15e852b5861d" providerId="ADAL" clId="{8B7CB91F-10CE-42C2-B9B8-BFF2D3401655}" dt="2026-01-05T15:50:02.238" v="4769" actId="478"/>
+          <ac:spMkLst>
+            <pc:docMk/>
+            <pc:sldMk cId="1989195103" sldId="313"/>
+            <ac:spMk id="12" creationId="{CECE5D38-4E4A-B501-5C10-170C135016C1}"/>
+          </ac:spMkLst>
+        </pc:spChg>
+        <pc:picChg chg="del">
+          <ac:chgData name="Dominique RIGHETTO" userId="512fe077-82ad-424c-88a3-15e852b5861d" providerId="ADAL" clId="{8B7CB91F-10CE-42C2-B9B8-BFF2D3401655}" dt="2026-01-05T15:50:00.941" v="4768" actId="478"/>
+          <ac:picMkLst>
+            <pc:docMk/>
+            <pc:sldMk cId="1989195103" sldId="313"/>
+            <ac:picMk id="14" creationId="{B9C54380-54CA-94C8-BF91-239A1FF95C15}"/>
           </ac:picMkLst>
         </pc:picChg>
       </pc:sldChg>
@@ -44376,23 +44831,7 @@
                   <a:schemeClr val="tx2"/>
                 </a:solidFill>
               </a:rPr>
-              <a:t> The goal was to test is the service ensure that </a:t>
-            </a:r>
-            <a:r>
-              <a:rPr lang="en-US" sz="2800" b="0" dirty="0">
-                <a:solidFill>
-                  <a:schemeClr val="accent5"/>
-                </a:solidFill>
-              </a:rPr>
-              <a:t>the provided file is a valid PDF file</a:t>
-            </a:r>
-            <a:r>
-              <a:rPr lang="en-US" sz="2800" b="0" dirty="0">
-                <a:solidFill>
-                  <a:schemeClr val="tx2"/>
-                </a:solidFill>
-              </a:rPr>
-              <a:t>:</a:t>
+              <a:t> The goal was to test is the service ensure that the provided file is a valid PDF file:</a:t>
             </a:r>
           </a:p>
           <a:p>
@@ -44491,13 +44930,13 @@
   <p:clrMapOvr>
     <a:masterClrMapping/>
   </p:clrMapOvr>
-  <mc:AlternateContent xmlns:mc="http://schemas.openxmlformats.org/markup-compatibility/2006">
-    <mc:Choice xmlns:p14="http://schemas.microsoft.com/office/powerpoint/2010/main" Requires="p14">
+  <mc:AlternateContent xmlns:mc="http://schemas.openxmlformats.org/markup-compatibility/2006" xmlns:p14="http://schemas.microsoft.com/office/powerpoint/2010/main">
+    <mc:Choice Requires="p14">
       <p:transition spd="med" p14:dur="700">
         <p:fade/>
       </p:transition>
     </mc:Choice>
-    <mc:Fallback>
+    <mc:Fallback xmlns="">
       <p:transition spd="med">
         <p:fade/>
       </p:transition>
@@ -44728,13 +45167,13 @@
   <p:clrMapOvr>
     <a:masterClrMapping/>
   </p:clrMapOvr>
-  <mc:AlternateContent xmlns:mc="http://schemas.openxmlformats.org/markup-compatibility/2006">
-    <mc:Choice xmlns:p14="http://schemas.microsoft.com/office/powerpoint/2010/main" Requires="p14">
+  <mc:AlternateContent xmlns:mc="http://schemas.openxmlformats.org/markup-compatibility/2006" xmlns:p14="http://schemas.microsoft.com/office/powerpoint/2010/main">
+    <mc:Choice Requires="p14">
       <p:transition spd="med" p14:dur="700">
         <p:fade/>
       </p:transition>
     </mc:Choice>
-    <mc:Fallback>
+    <mc:Fallback xmlns="">
       <p:transition spd="med">
         <p:fade/>
       </p:transition>
@@ -44908,13 +45347,13 @@
   <p:clrMapOvr>
     <a:masterClrMapping/>
   </p:clrMapOvr>
-  <mc:AlternateContent xmlns:mc="http://schemas.openxmlformats.org/markup-compatibility/2006">
-    <mc:Choice xmlns:p14="http://schemas.microsoft.com/office/powerpoint/2010/main" Requires="p14">
+  <mc:AlternateContent xmlns:mc="http://schemas.openxmlformats.org/markup-compatibility/2006" xmlns:p14="http://schemas.microsoft.com/office/powerpoint/2010/main">
+    <mc:Choice Requires="p14">
       <p:transition spd="med" p14:dur="700">
         <p:fade/>
       </p:transition>
     </mc:Choice>
-    <mc:Fallback>
+    <mc:Fallback xmlns="">
       <p:transition spd="med">
         <p:fade/>
       </p:transition>
@@ -45006,7 +45445,7 @@
                   <a:schemeClr val="tx2"/>
                 </a:solidFill>
               </a:rPr>
-              <a:t> The goal was to test if the service ensure that the provided PDF file do not contain any JavaScript code that </a:t>
+              <a:t> The goal was to test if the service ensure that the provided PDF file do not contain any JavaScript code that can trigger actions on behalf of the user</a:t>
             </a:r>
             <a:r>
               <a:rPr lang="en-US" sz="2800" b="0" dirty="0">
@@ -45014,7 +45453,7 @@
                   <a:schemeClr val="accent5"/>
                 </a:solidFill>
               </a:rPr>
-              <a:t>can trigger actions on behalf of the user </a:t>
+              <a:t> </a:t>
             </a:r>
             <a:r>
               <a:rPr lang="en-US" sz="2800" b="0" dirty="0">
@@ -45084,13 +45523,13 @@
   <p:clrMapOvr>
     <a:masterClrMapping/>
   </p:clrMapOvr>
-  <mc:AlternateContent xmlns:mc="http://schemas.openxmlformats.org/markup-compatibility/2006">
-    <mc:Choice xmlns:p14="http://schemas.microsoft.com/office/powerpoint/2010/main" Requires="p14">
+  <mc:AlternateContent xmlns:mc="http://schemas.openxmlformats.org/markup-compatibility/2006" xmlns:p14="http://schemas.microsoft.com/office/powerpoint/2010/main">
+    <mc:Choice Requires="p14">
       <p:transition spd="med" p14:dur="700">
         <p:fade/>
       </p:transition>
     </mc:Choice>
-    <mc:Fallback>
+    <mc:Fallback xmlns="">
       <p:transition spd="med">
         <p:fade/>
       </p:transition>
@@ -45337,13 +45776,13 @@
   <p:clrMapOvr>
     <a:masterClrMapping/>
   </p:clrMapOvr>
-  <mc:AlternateContent xmlns:mc="http://schemas.openxmlformats.org/markup-compatibility/2006">
-    <mc:Choice xmlns:p14="http://schemas.microsoft.com/office/powerpoint/2010/main" Requires="p14">
+  <mc:AlternateContent xmlns:mc="http://schemas.openxmlformats.org/markup-compatibility/2006" xmlns:p14="http://schemas.microsoft.com/office/powerpoint/2010/main">
+    <mc:Choice Requires="p14">
       <p:transition spd="med" p14:dur="700">
         <p:fade/>
       </p:transition>
     </mc:Choice>
-    <mc:Fallback>
+    <mc:Fallback xmlns="">
       <p:transition spd="med">
         <p:fade/>
       </p:transition>
@@ -45517,13 +45956,13 @@
   <p:clrMapOvr>
     <a:masterClrMapping/>
   </p:clrMapOvr>
-  <mc:AlternateContent xmlns:mc="http://schemas.openxmlformats.org/markup-compatibility/2006">
-    <mc:Choice xmlns:p14="http://schemas.microsoft.com/office/powerpoint/2010/main" Requires="p14">
+  <mc:AlternateContent xmlns:mc="http://schemas.openxmlformats.org/markup-compatibility/2006" xmlns:p14="http://schemas.microsoft.com/office/powerpoint/2010/main">
+    <mc:Choice Requires="p14">
       <p:transition spd="med" p14:dur="700">
         <p:fade/>
       </p:transition>
     </mc:Choice>
-    <mc:Fallback>
+    <mc:Fallback xmlns="">
       <p:transition spd="med">
         <p:fade/>
       </p:transition>
@@ -45619,6 +46058,16 @@
             </a:r>
           </a:p>
           <a:p>
+            <a:pPr marL="0" indent="0">
+              <a:buNone/>
+            </a:pPr>
+            <a:endParaRPr lang="en-US" sz="2800" b="0" dirty="0">
+              <a:solidFill>
+                <a:schemeClr val="tx2"/>
+              </a:solidFill>
+            </a:endParaRPr>
+          </a:p>
+          <a:p>
             <a:r>
               <a:rPr lang="en-US" sz="2800" b="0" dirty="0">
                 <a:solidFill>
@@ -45662,7 +46111,7 @@
         </p:blipFill>
         <p:spPr>
           <a:xfrm>
-            <a:off x="1331881" y="3989389"/>
+            <a:off x="1331881" y="4584812"/>
             <a:ext cx="9528237" cy="827159"/>
           </a:xfrm>
           <a:prstGeom prst="rect">
@@ -45687,13 +46136,13 @@
   <p:clrMapOvr>
     <a:masterClrMapping/>
   </p:clrMapOvr>
-  <mc:AlternateContent xmlns:mc="http://schemas.openxmlformats.org/markup-compatibility/2006">
-    <mc:Choice xmlns:p14="http://schemas.microsoft.com/office/powerpoint/2010/main" Requires="p14">
+  <mc:AlternateContent xmlns:mc="http://schemas.openxmlformats.org/markup-compatibility/2006" xmlns:p14="http://schemas.microsoft.com/office/powerpoint/2010/main">
+    <mc:Choice Requires="p14">
       <p:transition spd="med" p14:dur="700">
         <p:fade/>
       </p:transition>
     </mc:Choice>
-    <mc:Fallback>
+    <mc:Fallback xmlns="">
       <p:transition spd="med">
         <p:fade/>
       </p:transition>
@@ -45924,13 +46373,13 @@
   <p:clrMapOvr>
     <a:masterClrMapping/>
   </p:clrMapOvr>
-  <mc:AlternateContent xmlns:mc="http://schemas.openxmlformats.org/markup-compatibility/2006">
-    <mc:Choice xmlns:p14="http://schemas.microsoft.com/office/powerpoint/2010/main" Requires="p14">
+  <mc:AlternateContent xmlns:mc="http://schemas.openxmlformats.org/markup-compatibility/2006" xmlns:p14="http://schemas.microsoft.com/office/powerpoint/2010/main">
+    <mc:Choice Requires="p14">
       <p:transition spd="med" p14:dur="700">
         <p:fade/>
       </p:transition>
     </mc:Choice>
-    <mc:Fallback>
+    <mc:Fallback xmlns="">
       <p:transition spd="med">
         <p:fade/>
       </p:transition>
@@ -46093,10 +46542,10 @@
       </p:sp>
       <p:pic>
         <p:nvPicPr>
-          <p:cNvPr id="6" name="Picture 5">
+          <p:cNvPr id="8" name="Picture 7">
             <a:extLst>
               <a:ext uri="{FF2B5EF4-FFF2-40B4-BE49-F238E27FC236}">
-                <a16:creationId xmlns:a16="http://schemas.microsoft.com/office/drawing/2014/main" id="{E63415D6-6D65-95E4-C7BC-8A1B52CE7E8A}"/>
+                <a16:creationId xmlns:a16="http://schemas.microsoft.com/office/drawing/2014/main" id="{D6C333E4-EAB2-386F-0AA9-7808BDB89AD5}"/>
               </a:ext>
             </a:extLst>
           </p:cNvPr>
@@ -46113,45 +46562,8 @@
         </p:blipFill>
         <p:spPr>
           <a:xfrm>
-            <a:off x="5156139" y="2561007"/>
-            <a:ext cx="7003962" cy="4241241"/>
-          </a:xfrm>
-          <a:prstGeom prst="rect">
-            <a:avLst/>
-          </a:prstGeom>
-          <a:effectLst>
-            <a:outerShdw blurRad="50800" dist="38100" dir="2700000" algn="tl" rotWithShape="0">
-              <a:prstClr val="black">
-                <a:alpha val="40000"/>
-              </a:prstClr>
-            </a:outerShdw>
-          </a:effectLst>
-        </p:spPr>
-      </p:pic>
-      <p:pic>
-        <p:nvPicPr>
-          <p:cNvPr id="8" name="Picture 7">
-            <a:extLst>
-              <a:ext uri="{FF2B5EF4-FFF2-40B4-BE49-F238E27FC236}">
-                <a16:creationId xmlns:a16="http://schemas.microsoft.com/office/drawing/2014/main" id="{D6C333E4-EAB2-386F-0AA9-7808BDB89AD5}"/>
-              </a:ext>
-            </a:extLst>
-          </p:cNvPr>
-          <p:cNvPicPr>
-            <a:picLocks noChangeAspect="1"/>
-          </p:cNvPicPr>
-          <p:nvPr/>
-        </p:nvPicPr>
-        <p:blipFill>
-          <a:blip r:embed="rId5"/>
-          <a:stretch>
-            <a:fillRect/>
-          </a:stretch>
-        </p:blipFill>
-        <p:spPr>
-          <a:xfrm>
-            <a:off x="136192" y="2561008"/>
-            <a:ext cx="4989389" cy="622284"/>
+            <a:off x="184029" y="2423619"/>
+            <a:ext cx="5162139" cy="643830"/>
           </a:xfrm>
           <a:prstGeom prst="rect">
             <a:avLst/>
@@ -46179,7 +46591,7 @@
         </p:nvSpPr>
         <p:spPr>
           <a:xfrm rot="5400000">
-            <a:off x="3901498" y="3605876"/>
+            <a:off x="21897" y="3450221"/>
             <a:ext cx="1669312" cy="903767"/>
           </a:xfrm>
           <a:prstGeom prst="bentUpArrow">
@@ -46227,6 +46639,96 @@
           </a:p>
         </p:txBody>
       </p:sp>
+      <p:pic>
+        <p:nvPicPr>
+          <p:cNvPr id="11" name="Picture 10">
+            <a:extLst>
+              <a:ext uri="{FF2B5EF4-FFF2-40B4-BE49-F238E27FC236}">
+                <a16:creationId xmlns:a16="http://schemas.microsoft.com/office/drawing/2014/main" id="{14FDD82F-A001-EF7F-B4A6-AC95A767E4F0}"/>
+              </a:ext>
+            </a:extLst>
+          </p:cNvPr>
+          <p:cNvPicPr>
+            <a:picLocks noChangeAspect="1"/>
+          </p:cNvPicPr>
+          <p:nvPr/>
+        </p:nvPicPr>
+        <p:blipFill>
+          <a:blip r:embed="rId5"/>
+          <a:srcRect b="47701"/>
+          <a:stretch>
+            <a:fillRect/>
+          </a:stretch>
+        </p:blipFill>
+        <p:spPr>
+          <a:xfrm>
+            <a:off x="1308437" y="3540642"/>
+            <a:ext cx="10787676" cy="2534561"/>
+          </a:xfrm>
+          <a:prstGeom prst="rect">
+            <a:avLst/>
+          </a:prstGeom>
+          <a:effectLst>
+            <a:outerShdw blurRad="50800" dist="38100" dir="2700000" algn="tl" rotWithShape="0">
+              <a:prstClr val="black">
+                <a:alpha val="40000"/>
+              </a:prstClr>
+            </a:outerShdw>
+          </a:effectLst>
+        </p:spPr>
+      </p:pic>
+      <p:sp>
+        <p:nvSpPr>
+          <p:cNvPr id="7" name="Rectangle 6">
+            <a:extLst>
+              <a:ext uri="{FF2B5EF4-FFF2-40B4-BE49-F238E27FC236}">
+                <a16:creationId xmlns:a16="http://schemas.microsoft.com/office/drawing/2014/main" id="{AA1481E2-E225-CB1E-5FC0-20D0387972C4}"/>
+              </a:ext>
+            </a:extLst>
+          </p:cNvPr>
+          <p:cNvSpPr/>
+          <p:nvPr/>
+        </p:nvSpPr>
+        <p:spPr>
+          <a:xfrm>
+            <a:off x="1850064" y="4263656"/>
+            <a:ext cx="10157906" cy="871870"/>
+          </a:xfrm>
+          <a:prstGeom prst="rect">
+            <a:avLst/>
+          </a:prstGeom>
+          <a:noFill/>
+          <a:ln w="31750">
+            <a:solidFill>
+              <a:schemeClr val="accent6"/>
+            </a:solidFill>
+          </a:ln>
+        </p:spPr>
+        <p:style>
+          <a:lnRef idx="2">
+            <a:schemeClr val="accent1">
+              <a:shade val="50000"/>
+            </a:schemeClr>
+          </a:lnRef>
+          <a:fillRef idx="1">
+            <a:schemeClr val="accent1"/>
+          </a:fillRef>
+          <a:effectRef idx="0">
+            <a:schemeClr val="accent1"/>
+          </a:effectRef>
+          <a:fontRef idx="minor">
+            <a:schemeClr val="lt1"/>
+          </a:fontRef>
+        </p:style>
+        <p:txBody>
+          <a:bodyPr rtlCol="0" anchor="ctr"/>
+          <a:lstStyle/>
+          <a:p>
+            <a:pPr algn="ctr"/>
+            <a:endParaRPr lang="fr-FR"/>
+          </a:p>
+        </p:txBody>
+      </p:sp>
     </p:spTree>
     <p:extLst>
       <p:ext uri="{BB962C8B-B14F-4D97-AF65-F5344CB8AC3E}">
@@ -46237,13 +46739,13 @@
   <p:clrMapOvr>
     <a:masterClrMapping/>
   </p:clrMapOvr>
-  <mc:AlternateContent xmlns:mc="http://schemas.openxmlformats.org/markup-compatibility/2006">
-    <mc:Choice xmlns:p14="http://schemas.microsoft.com/office/powerpoint/2010/main" Requires="p14">
+  <mc:AlternateContent xmlns:mc="http://schemas.openxmlformats.org/markup-compatibility/2006" xmlns:p14="http://schemas.microsoft.com/office/powerpoint/2010/main">
+    <mc:Choice Requires="p14">
       <p:transition spd="med" p14:dur="700">
         <p:fade/>
       </p:transition>
     </mc:Choice>
-    <mc:Fallback>
+    <mc:Fallback xmlns="">
       <p:transition spd="med">
         <p:fade/>
       </p:transition>
@@ -46408,6 +46910,1602 @@
 </file>
 
 <file path=ppt/slides/slide20.xml><?xml version="1.0" encoding="utf-8"?>
+<p:sld xmlns:a="http://schemas.openxmlformats.org/drawingml/2006/main" xmlns:r="http://schemas.openxmlformats.org/officeDocument/2006/relationships" xmlns:p="http://schemas.openxmlformats.org/presentationml/2006/main">
+  <p:cSld>
+    <p:spTree>
+      <p:nvGrpSpPr>
+        <p:cNvPr id="1" name="">
+          <a:extLst>
+            <a:ext uri="{FF2B5EF4-FFF2-40B4-BE49-F238E27FC236}">
+              <a16:creationId xmlns:a16="http://schemas.microsoft.com/office/drawing/2014/main" id="{CEAA8FBD-E92C-5064-74C3-DAF03EAFC9EB}"/>
+            </a:ext>
+          </a:extLst>
+        </p:cNvPr>
+        <p:cNvGrpSpPr/>
+        <p:nvPr/>
+      </p:nvGrpSpPr>
+      <p:grpSpPr>
+        <a:xfrm>
+          <a:off x="0" y="0"/>
+          <a:ext cx="0" cy="0"/>
+          <a:chOff x="0" y="0"/>
+          <a:chExt cx="0" cy="0"/>
+        </a:xfrm>
+      </p:grpSpPr>
+      <p:sp>
+        <p:nvSpPr>
+          <p:cNvPr id="2" name="Titre 1">
+            <a:extLst>
+              <a:ext uri="{FF2B5EF4-FFF2-40B4-BE49-F238E27FC236}">
+                <a16:creationId xmlns:a16="http://schemas.microsoft.com/office/drawing/2014/main" id="{11157380-E6C6-BFA4-9C04-458C2CBB76E3}"/>
+              </a:ext>
+            </a:extLst>
+          </p:cNvPr>
+          <p:cNvSpPr>
+            <a:spLocks noGrp="1"/>
+          </p:cNvSpPr>
+          <p:nvPr>
+            <p:ph type="title"/>
+          </p:nvPr>
+        </p:nvSpPr>
+        <p:spPr/>
+        <p:txBody>
+          <a:bodyPr/>
+          <a:lstStyle/>
+          <a:p>
+            <a:r>
+              <a:rPr lang="en-US" dirty="0"/>
+              <a:t>📖 Let’s the story begin – Round n°4</a:t>
+            </a:r>
+          </a:p>
+        </p:txBody>
+      </p:sp>
+      <p:sp>
+        <p:nvSpPr>
+          <p:cNvPr id="3" name="Espace réservé du texte 2">
+            <a:extLst>
+              <a:ext uri="{FF2B5EF4-FFF2-40B4-BE49-F238E27FC236}">
+                <a16:creationId xmlns:a16="http://schemas.microsoft.com/office/drawing/2014/main" id="{3891132A-A1FF-9CE4-2144-AF041DB3EBB3}"/>
+              </a:ext>
+            </a:extLst>
+          </p:cNvPr>
+          <p:cNvSpPr>
+            <a:spLocks noGrp="1"/>
+          </p:cNvSpPr>
+          <p:nvPr>
+            <p:ph type="body" sz="quarter" idx="15"/>
+          </p:nvPr>
+        </p:nvSpPr>
+        <p:spPr>
+          <a:xfrm>
+            <a:off x="588000" y="977317"/>
+            <a:ext cx="11419970" cy="4949030"/>
+          </a:xfrm>
+        </p:spPr>
+        <p:txBody>
+          <a:bodyPr/>
+          <a:lstStyle/>
+          <a:p>
+            <a:r>
+              <a:rPr lang="en-US" sz="2800" b="0" dirty="0">
+                <a:solidFill>
+                  <a:schemeClr val="tx2"/>
+                </a:solidFill>
+              </a:rPr>
+              <a:t> The goal was to test if the service ensure that the library used to parse the PDF file is not prone to the following vulnerabilities:</a:t>
+            </a:r>
+          </a:p>
+          <a:p>
+            <a:pPr lvl="1"/>
+            <a:r>
+              <a:rPr lang="fr-FR" sz="2400" b="0" dirty="0">
+                <a:solidFill>
+                  <a:schemeClr val="tx2"/>
+                </a:solidFill>
+                <a:hlinkClick r:id="rId2"/>
+              </a:rPr>
+              <a:t>XML </a:t>
+            </a:r>
+            <a:r>
+              <a:rPr lang="fr-FR" sz="2400" b="0" dirty="0" err="1">
+                <a:solidFill>
+                  <a:schemeClr val="tx2"/>
+                </a:solidFill>
+                <a:hlinkClick r:id="rId2"/>
+              </a:rPr>
+              <a:t>External</a:t>
+            </a:r>
+            <a:r>
+              <a:rPr lang="fr-FR" sz="2400" b="0" dirty="0">
+                <a:solidFill>
+                  <a:schemeClr val="tx2"/>
+                </a:solidFill>
+                <a:hlinkClick r:id="rId2"/>
+              </a:rPr>
+              <a:t> </a:t>
+            </a:r>
+            <a:r>
+              <a:rPr lang="fr-FR" sz="2400" b="0" dirty="0" err="1">
+                <a:solidFill>
+                  <a:schemeClr val="tx2"/>
+                </a:solidFill>
+                <a:hlinkClick r:id="rId2"/>
+              </a:rPr>
+              <a:t>Entity</a:t>
+            </a:r>
+            <a:r>
+              <a:rPr lang="fr-FR" sz="2400" b="0" dirty="0">
+                <a:solidFill>
+                  <a:schemeClr val="tx2"/>
+                </a:solidFill>
+                <a:hlinkClick r:id="rId2"/>
+              </a:rPr>
+              <a:t> injection</a:t>
+            </a:r>
+            <a:r>
+              <a:rPr lang="fr-FR" sz="2400" b="0" dirty="0">
+                <a:solidFill>
+                  <a:schemeClr val="tx2"/>
+                </a:solidFill>
+              </a:rPr>
+              <a:t> (XXE)</a:t>
+            </a:r>
+          </a:p>
+          <a:p>
+            <a:pPr lvl="1"/>
+            <a:r>
+              <a:rPr lang="en-US" sz="2400" b="0" dirty="0">
+                <a:solidFill>
+                  <a:schemeClr val="tx2"/>
+                </a:solidFill>
+                <a:hlinkClick r:id="rId3"/>
+              </a:rPr>
+              <a:t>Server-Side Request Forgery</a:t>
+            </a:r>
+            <a:r>
+              <a:rPr lang="en-US" sz="2400" b="0" dirty="0">
+                <a:solidFill>
+                  <a:schemeClr val="tx2"/>
+                </a:solidFill>
+              </a:rPr>
+              <a:t> (SSRF)</a:t>
+            </a:r>
+          </a:p>
+          <a:p>
+            <a:pPr marL="0" indent="0">
+              <a:buNone/>
+            </a:pPr>
+            <a:r>
+              <a:rPr lang="en-US" sz="2800" b="0" dirty="0">
+                <a:solidFill>
+                  <a:schemeClr val="tx2"/>
+                </a:solidFill>
+              </a:rPr>
+              <a:t> </a:t>
+            </a:r>
+          </a:p>
+          <a:p>
+            <a:r>
+              <a:rPr lang="en-US" sz="2800" b="0" dirty="0">
+                <a:solidFill>
+                  <a:schemeClr val="tx2"/>
+                </a:solidFill>
+              </a:rPr>
+              <a:t>Such vulnerabilities can lead to abuse like the following:</a:t>
+            </a:r>
+          </a:p>
+          <a:p>
+            <a:pPr lvl="1"/>
+            <a:r>
+              <a:rPr lang="en-US" sz="2400" dirty="0"/>
+              <a:t>Read local files on the host on which the service is deployed.</a:t>
+            </a:r>
+          </a:p>
+          <a:p>
+            <a:pPr lvl="1"/>
+            <a:r>
+              <a:rPr lang="en-US" sz="2400" b="0" dirty="0">
+                <a:solidFill>
+                  <a:schemeClr val="tx2"/>
+                </a:solidFill>
+              </a:rPr>
+              <a:t>Instruct the </a:t>
+            </a:r>
+            <a:r>
+              <a:rPr lang="en-US" sz="2400" dirty="0"/>
+              <a:t>host, on which the service is deployed, to perform network requests.</a:t>
+            </a:r>
+          </a:p>
+          <a:p>
+            <a:pPr lvl="1"/>
+            <a:r>
+              <a:rPr lang="en-US" sz="2400" dirty="0"/>
+              <a:t>…</a:t>
+            </a:r>
+            <a:endParaRPr lang="en-US" sz="2400" b="0" dirty="0">
+              <a:solidFill>
+                <a:schemeClr val="tx2"/>
+              </a:solidFill>
+            </a:endParaRPr>
+          </a:p>
+          <a:p>
+            <a:pPr marL="0" indent="0">
+              <a:buNone/>
+            </a:pPr>
+            <a:endParaRPr lang="en-US" sz="2800" b="0" dirty="0">
+              <a:solidFill>
+                <a:schemeClr val="tx2"/>
+              </a:solidFill>
+            </a:endParaRPr>
+          </a:p>
+        </p:txBody>
+      </p:sp>
+    </p:spTree>
+    <p:extLst>
+      <p:ext uri="{BB962C8B-B14F-4D97-AF65-F5344CB8AC3E}">
+        <p14:creationId xmlns:p14="http://schemas.microsoft.com/office/powerpoint/2010/main" val="1692727651"/>
+      </p:ext>
+    </p:extLst>
+  </p:cSld>
+  <p:clrMapOvr>
+    <a:masterClrMapping/>
+  </p:clrMapOvr>
+  <mc:AlternateContent xmlns:mc="http://schemas.openxmlformats.org/markup-compatibility/2006">
+    <mc:Choice xmlns:p14="http://schemas.microsoft.com/office/powerpoint/2010/main" Requires="p14">
+      <p:transition spd="med" p14:dur="700">
+        <p:fade/>
+      </p:transition>
+    </mc:Choice>
+    <mc:Fallback>
+      <p:transition spd="med">
+        <p:fade/>
+      </p:transition>
+    </mc:Fallback>
+  </mc:AlternateContent>
+</p:sld>
+</file>
+
+<file path=ppt/slides/slide21.xml><?xml version="1.0" encoding="utf-8"?>
+<p:sld xmlns:a="http://schemas.openxmlformats.org/drawingml/2006/main" xmlns:r="http://schemas.openxmlformats.org/officeDocument/2006/relationships" xmlns:p="http://schemas.openxmlformats.org/presentationml/2006/main">
+  <p:cSld>
+    <p:spTree>
+      <p:nvGrpSpPr>
+        <p:cNvPr id="1" name="">
+          <a:extLst>
+            <a:ext uri="{FF2B5EF4-FFF2-40B4-BE49-F238E27FC236}">
+              <a16:creationId xmlns:a16="http://schemas.microsoft.com/office/drawing/2014/main" id="{AF238041-9C83-A9E6-17DD-B91D2E74A12D}"/>
+            </a:ext>
+          </a:extLst>
+        </p:cNvPr>
+        <p:cNvGrpSpPr/>
+        <p:nvPr/>
+      </p:nvGrpSpPr>
+      <p:grpSpPr>
+        <a:xfrm>
+          <a:off x="0" y="0"/>
+          <a:ext cx="0" cy="0"/>
+          <a:chOff x="0" y="0"/>
+          <a:chExt cx="0" cy="0"/>
+        </a:xfrm>
+      </p:grpSpPr>
+      <p:sp>
+        <p:nvSpPr>
+          <p:cNvPr id="2" name="Titre 1">
+            <a:extLst>
+              <a:ext uri="{FF2B5EF4-FFF2-40B4-BE49-F238E27FC236}">
+                <a16:creationId xmlns:a16="http://schemas.microsoft.com/office/drawing/2014/main" id="{4E724C6E-524B-07A1-0402-CF686FCF8071}"/>
+              </a:ext>
+            </a:extLst>
+          </p:cNvPr>
+          <p:cNvSpPr>
+            <a:spLocks noGrp="1"/>
+          </p:cNvSpPr>
+          <p:nvPr>
+            <p:ph type="title"/>
+          </p:nvPr>
+        </p:nvSpPr>
+        <p:spPr/>
+        <p:txBody>
+          <a:bodyPr/>
+          <a:lstStyle/>
+          <a:p>
+            <a:r>
+              <a:rPr lang="en-US" dirty="0"/>
+              <a:t>📖 Let’s the story begin – Round n°4</a:t>
+            </a:r>
+          </a:p>
+        </p:txBody>
+      </p:sp>
+      <p:pic>
+        <p:nvPicPr>
+          <p:cNvPr id="7" name="Picture 6">
+            <a:extLst>
+              <a:ext uri="{FF2B5EF4-FFF2-40B4-BE49-F238E27FC236}">
+                <a16:creationId xmlns:a16="http://schemas.microsoft.com/office/drawing/2014/main" id="{1E8E8772-F4E3-6F5A-F5C5-E01FF188109F}"/>
+              </a:ext>
+            </a:extLst>
+          </p:cNvPr>
+          <p:cNvPicPr>
+            <a:picLocks noChangeAspect="1"/>
+          </p:cNvPicPr>
+          <p:nvPr/>
+        </p:nvPicPr>
+        <p:blipFill>
+          <a:blip r:embed="rId2"/>
+          <a:stretch>
+            <a:fillRect/>
+          </a:stretch>
+        </p:blipFill>
+        <p:spPr>
+          <a:xfrm>
+            <a:off x="588000" y="1185530"/>
+            <a:ext cx="11276782" cy="4486940"/>
+          </a:xfrm>
+          <a:prstGeom prst="rect">
+            <a:avLst/>
+          </a:prstGeom>
+          <a:effectLst>
+            <a:outerShdw blurRad="50800" dist="38100" dir="2700000" algn="tl" rotWithShape="0">
+              <a:prstClr val="black">
+                <a:alpha val="40000"/>
+              </a:prstClr>
+            </a:outerShdw>
+          </a:effectLst>
+        </p:spPr>
+      </p:pic>
+    </p:spTree>
+    <p:extLst>
+      <p:ext uri="{BB962C8B-B14F-4D97-AF65-F5344CB8AC3E}">
+        <p14:creationId xmlns:p14="http://schemas.microsoft.com/office/powerpoint/2010/main" val="3958721667"/>
+      </p:ext>
+    </p:extLst>
+  </p:cSld>
+  <p:clrMapOvr>
+    <a:masterClrMapping/>
+  </p:clrMapOvr>
+  <mc:AlternateContent xmlns:mc="http://schemas.openxmlformats.org/markup-compatibility/2006">
+    <mc:Choice xmlns:p14="http://schemas.microsoft.com/office/powerpoint/2010/main" Requires="p14">
+      <p:transition spd="med" p14:dur="700">
+        <p:fade/>
+      </p:transition>
+    </mc:Choice>
+    <mc:Fallback>
+      <p:transition spd="med">
+        <p:fade/>
+      </p:transition>
+    </mc:Fallback>
+  </mc:AlternateContent>
+</p:sld>
+</file>
+
+<file path=ppt/slides/slide22.xml><?xml version="1.0" encoding="utf-8"?>
+<p:sld xmlns:a="http://schemas.openxmlformats.org/drawingml/2006/main" xmlns:r="http://schemas.openxmlformats.org/officeDocument/2006/relationships" xmlns:p="http://schemas.openxmlformats.org/presentationml/2006/main">
+  <p:cSld>
+    <p:spTree>
+      <p:nvGrpSpPr>
+        <p:cNvPr id="1" name="">
+          <a:extLst>
+            <a:ext uri="{FF2B5EF4-FFF2-40B4-BE49-F238E27FC236}">
+              <a16:creationId xmlns:a16="http://schemas.microsoft.com/office/drawing/2014/main" id="{4397D6B8-478B-2D1F-3EA0-754B136AC96C}"/>
+            </a:ext>
+          </a:extLst>
+        </p:cNvPr>
+        <p:cNvGrpSpPr/>
+        <p:nvPr/>
+      </p:nvGrpSpPr>
+      <p:grpSpPr>
+        <a:xfrm>
+          <a:off x="0" y="0"/>
+          <a:ext cx="0" cy="0"/>
+          <a:chOff x="0" y="0"/>
+          <a:chExt cx="0" cy="0"/>
+        </a:xfrm>
+      </p:grpSpPr>
+      <p:sp>
+        <p:nvSpPr>
+          <p:cNvPr id="2" name="Titre 1">
+            <a:extLst>
+              <a:ext uri="{FF2B5EF4-FFF2-40B4-BE49-F238E27FC236}">
+                <a16:creationId xmlns:a16="http://schemas.microsoft.com/office/drawing/2014/main" id="{315112D2-667A-5ACA-2D54-8841534A1F0B}"/>
+              </a:ext>
+            </a:extLst>
+          </p:cNvPr>
+          <p:cNvSpPr>
+            <a:spLocks noGrp="1"/>
+          </p:cNvSpPr>
+          <p:nvPr>
+            <p:ph type="title"/>
+          </p:nvPr>
+        </p:nvSpPr>
+        <p:spPr/>
+        <p:txBody>
+          <a:bodyPr/>
+          <a:lstStyle/>
+          <a:p>
+            <a:r>
+              <a:rPr lang="en-US" dirty="0"/>
+              <a:t>📖 Let’s the story begin – Round n°4</a:t>
+            </a:r>
+          </a:p>
+        </p:txBody>
+      </p:sp>
+      <p:sp>
+        <p:nvSpPr>
+          <p:cNvPr id="3" name="Espace réservé du texte 2">
+            <a:extLst>
+              <a:ext uri="{FF2B5EF4-FFF2-40B4-BE49-F238E27FC236}">
+                <a16:creationId xmlns:a16="http://schemas.microsoft.com/office/drawing/2014/main" id="{A8F0DB80-3BA9-573F-68E4-4730BBA07D63}"/>
+              </a:ext>
+            </a:extLst>
+          </p:cNvPr>
+          <p:cNvSpPr>
+            <a:spLocks noGrp="1"/>
+          </p:cNvSpPr>
+          <p:nvPr>
+            <p:ph type="body" sz="quarter" idx="15"/>
+          </p:nvPr>
+        </p:nvSpPr>
+        <p:spPr>
+          <a:xfrm>
+            <a:off x="588000" y="977317"/>
+            <a:ext cx="11419970" cy="4949030"/>
+          </a:xfrm>
+        </p:spPr>
+        <p:txBody>
+          <a:bodyPr/>
+          <a:lstStyle/>
+          <a:p>
+            <a:r>
+              <a:rPr lang="en-US" sz="2800" b="0" dirty="0">
+                <a:solidFill>
+                  <a:schemeClr val="tx2"/>
+                </a:solidFill>
+              </a:rPr>
+              <a:t>  🤔 Test failed so the following additional validation was proposed to the team:</a:t>
+            </a:r>
+          </a:p>
+          <a:p>
+            <a:pPr lvl="1"/>
+            <a:r>
+              <a:rPr lang="en-US" sz="2400" dirty="0"/>
+              <a:t>Ensure that the provided file do not contains any XFA forms.</a:t>
+            </a:r>
+          </a:p>
+          <a:p>
+            <a:pPr marL="0" lvl="1" indent="0">
+              <a:buNone/>
+            </a:pPr>
+            <a:endParaRPr lang="en-US" sz="2400" b="0" dirty="0">
+              <a:solidFill>
+                <a:schemeClr val="tx2"/>
+              </a:solidFill>
+            </a:endParaRPr>
+          </a:p>
+          <a:p>
+            <a:r>
+              <a:rPr lang="en-US" sz="2800" b="0" dirty="0">
+                <a:solidFill>
+                  <a:schemeClr val="tx2"/>
+                </a:solidFill>
+              </a:rPr>
+              <a:t> ✅ Test passed after the adding of the additional validation:</a:t>
+            </a:r>
+          </a:p>
+          <a:p>
+            <a:endParaRPr lang="en-US" sz="2800" b="0" dirty="0">
+              <a:solidFill>
+                <a:schemeClr val="tx2"/>
+              </a:solidFill>
+            </a:endParaRPr>
+          </a:p>
+          <a:p>
+            <a:pPr marL="0" indent="0">
+              <a:buNone/>
+            </a:pPr>
+            <a:r>
+              <a:rPr lang="en-US" sz="2800" b="0" dirty="0">
+                <a:solidFill>
+                  <a:schemeClr val="tx2"/>
+                </a:solidFill>
+              </a:rPr>
+              <a:t>  </a:t>
+            </a:r>
+          </a:p>
+        </p:txBody>
+      </p:sp>
+      <p:sp>
+        <p:nvSpPr>
+          <p:cNvPr id="7" name="TextBox 6">
+            <a:extLst>
+              <a:ext uri="{FF2B5EF4-FFF2-40B4-BE49-F238E27FC236}">
+                <a16:creationId xmlns:a16="http://schemas.microsoft.com/office/drawing/2014/main" id="{57A1192D-9FD8-26B8-E303-C1AD3B37DEEE}"/>
+              </a:ext>
+            </a:extLst>
+          </p:cNvPr>
+          <p:cNvSpPr txBox="1"/>
+          <p:nvPr/>
+        </p:nvSpPr>
+        <p:spPr>
+          <a:xfrm>
+            <a:off x="8967059" y="113779"/>
+            <a:ext cx="3040911" cy="246221"/>
+          </a:xfrm>
+          <a:prstGeom prst="rect">
+            <a:avLst/>
+          </a:prstGeom>
+          <a:noFill/>
+        </p:spPr>
+        <p:txBody>
+          <a:bodyPr wrap="square" lIns="0" tIns="0" rIns="0" bIns="0" rtlCol="0">
+            <a:spAutoFit/>
+          </a:bodyPr>
+          <a:lstStyle/>
+          <a:p>
+            <a:pPr algn="l"/>
+            <a:r>
+              <a:rPr lang="en-US" sz="1600" noProof="0" dirty="0">
+                <a:solidFill>
+                  <a:schemeClr val="accent5"/>
+                </a:solidFill>
+              </a:rPr>
+              <a:t>🤬 Level of exasperation: 64%</a:t>
+            </a:r>
+          </a:p>
+        </p:txBody>
+      </p:sp>
+      <p:pic>
+        <p:nvPicPr>
+          <p:cNvPr id="5" name="Picture 4">
+            <a:extLst>
+              <a:ext uri="{FF2B5EF4-FFF2-40B4-BE49-F238E27FC236}">
+                <a16:creationId xmlns:a16="http://schemas.microsoft.com/office/drawing/2014/main" id="{40913B38-1455-23B0-9894-4B7225F128A5}"/>
+              </a:ext>
+            </a:extLst>
+          </p:cNvPr>
+          <p:cNvPicPr>
+            <a:picLocks noChangeAspect="1"/>
+          </p:cNvPicPr>
+          <p:nvPr/>
+        </p:nvPicPr>
+        <p:blipFill>
+          <a:blip r:embed="rId2"/>
+          <a:stretch>
+            <a:fillRect/>
+          </a:stretch>
+        </p:blipFill>
+        <p:spPr>
+          <a:xfrm>
+            <a:off x="1965851" y="4269493"/>
+            <a:ext cx="7960584" cy="653381"/>
+          </a:xfrm>
+          <a:prstGeom prst="rect">
+            <a:avLst/>
+          </a:prstGeom>
+          <a:effectLst>
+            <a:outerShdw blurRad="50800" dist="38100" dir="2700000" algn="tl" rotWithShape="0">
+              <a:prstClr val="black">
+                <a:alpha val="40000"/>
+              </a:prstClr>
+            </a:outerShdw>
+          </a:effectLst>
+        </p:spPr>
+      </p:pic>
+    </p:spTree>
+    <p:extLst>
+      <p:ext uri="{BB962C8B-B14F-4D97-AF65-F5344CB8AC3E}">
+        <p14:creationId xmlns:p14="http://schemas.microsoft.com/office/powerpoint/2010/main" val="2964034352"/>
+      </p:ext>
+    </p:extLst>
+  </p:cSld>
+  <p:clrMapOvr>
+    <a:masterClrMapping/>
+  </p:clrMapOvr>
+  <mc:AlternateContent xmlns:mc="http://schemas.openxmlformats.org/markup-compatibility/2006">
+    <mc:Choice xmlns:p14="http://schemas.microsoft.com/office/powerpoint/2010/main" Requires="p14">
+      <p:transition spd="med" p14:dur="700">
+        <p:fade/>
+      </p:transition>
+    </mc:Choice>
+    <mc:Fallback>
+      <p:transition spd="med">
+        <p:fade/>
+      </p:transition>
+    </mc:Fallback>
+  </mc:AlternateContent>
+</p:sld>
+</file>
+
+<file path=ppt/slides/slide23.xml><?xml version="1.0" encoding="utf-8"?>
+<p:sld xmlns:a="http://schemas.openxmlformats.org/drawingml/2006/main" xmlns:r="http://schemas.openxmlformats.org/officeDocument/2006/relationships" xmlns:p="http://schemas.openxmlformats.org/presentationml/2006/main">
+  <p:cSld>
+    <p:spTree>
+      <p:nvGrpSpPr>
+        <p:cNvPr id="1" name="">
+          <a:extLst>
+            <a:ext uri="{FF2B5EF4-FFF2-40B4-BE49-F238E27FC236}">
+              <a16:creationId xmlns:a16="http://schemas.microsoft.com/office/drawing/2014/main" id="{508AB217-8DF4-64B1-EDD1-42A022C46D43}"/>
+            </a:ext>
+          </a:extLst>
+        </p:cNvPr>
+        <p:cNvGrpSpPr/>
+        <p:nvPr/>
+      </p:nvGrpSpPr>
+      <p:grpSpPr>
+        <a:xfrm>
+          <a:off x="0" y="0"/>
+          <a:ext cx="0" cy="0"/>
+          <a:chOff x="0" y="0"/>
+          <a:chExt cx="0" cy="0"/>
+        </a:xfrm>
+      </p:grpSpPr>
+      <p:sp>
+        <p:nvSpPr>
+          <p:cNvPr id="2" name="Titre 1">
+            <a:extLst>
+              <a:ext uri="{FF2B5EF4-FFF2-40B4-BE49-F238E27FC236}">
+                <a16:creationId xmlns:a16="http://schemas.microsoft.com/office/drawing/2014/main" id="{0F3B0007-69E6-BDDF-D1A7-F14E86700773}"/>
+              </a:ext>
+            </a:extLst>
+          </p:cNvPr>
+          <p:cNvSpPr>
+            <a:spLocks noGrp="1"/>
+          </p:cNvSpPr>
+          <p:nvPr>
+            <p:ph type="title"/>
+          </p:nvPr>
+        </p:nvSpPr>
+        <p:spPr/>
+        <p:txBody>
+          <a:bodyPr/>
+          <a:lstStyle/>
+          <a:p>
+            <a:r>
+              <a:rPr lang="en-US" dirty="0"/>
+              <a:t>📖 Let’s the story begin – Round n°5</a:t>
+            </a:r>
+          </a:p>
+        </p:txBody>
+      </p:sp>
+      <p:sp>
+        <p:nvSpPr>
+          <p:cNvPr id="3" name="Espace réservé du texte 2">
+            <a:extLst>
+              <a:ext uri="{FF2B5EF4-FFF2-40B4-BE49-F238E27FC236}">
+                <a16:creationId xmlns:a16="http://schemas.microsoft.com/office/drawing/2014/main" id="{278B57A3-956B-6E65-1863-5D3E5605B75E}"/>
+              </a:ext>
+            </a:extLst>
+          </p:cNvPr>
+          <p:cNvSpPr>
+            <a:spLocks noGrp="1"/>
+          </p:cNvSpPr>
+          <p:nvPr>
+            <p:ph type="body" sz="quarter" idx="15"/>
+          </p:nvPr>
+        </p:nvSpPr>
+        <p:spPr>
+          <a:xfrm>
+            <a:off x="588000" y="977317"/>
+            <a:ext cx="11419970" cy="4949030"/>
+          </a:xfrm>
+        </p:spPr>
+        <p:txBody>
+          <a:bodyPr/>
+          <a:lstStyle/>
+          <a:p>
+            <a:r>
+              <a:rPr lang="en-US" sz="2800" b="0" dirty="0">
+                <a:solidFill>
+                  <a:schemeClr val="tx2"/>
+                </a:solidFill>
+              </a:rPr>
+              <a:t> A fifth test was performed with a valid PDF file containing a link to a malicious file:</a:t>
+            </a:r>
+          </a:p>
+          <a:p>
+            <a:endParaRPr lang="en-US" sz="2800" b="0" dirty="0">
+              <a:solidFill>
+                <a:schemeClr val="tx2"/>
+              </a:solidFill>
+            </a:endParaRPr>
+          </a:p>
+          <a:p>
+            <a:pPr marL="0" indent="0">
+              <a:buNone/>
+            </a:pPr>
+            <a:r>
+              <a:rPr lang="en-US" sz="2800" b="0" dirty="0">
+                <a:solidFill>
+                  <a:schemeClr val="tx2"/>
+                </a:solidFill>
+              </a:rPr>
+              <a:t> </a:t>
+            </a:r>
+          </a:p>
+          <a:p>
+            <a:pPr marL="0" indent="0">
+              <a:buNone/>
+            </a:pPr>
+            <a:endParaRPr lang="en-US" sz="2800" b="0" dirty="0">
+              <a:solidFill>
+                <a:schemeClr val="tx2"/>
+              </a:solidFill>
+            </a:endParaRPr>
+          </a:p>
+        </p:txBody>
+      </p:sp>
+      <p:sp>
+        <p:nvSpPr>
+          <p:cNvPr id="10" name="TextBox 9">
+            <a:extLst>
+              <a:ext uri="{FF2B5EF4-FFF2-40B4-BE49-F238E27FC236}">
+                <a16:creationId xmlns:a16="http://schemas.microsoft.com/office/drawing/2014/main" id="{A7BFD8A7-ED6E-CB26-E0EE-5F2A6543B2BE}"/>
+              </a:ext>
+            </a:extLst>
+          </p:cNvPr>
+          <p:cNvSpPr txBox="1"/>
+          <p:nvPr/>
+        </p:nvSpPr>
+        <p:spPr>
+          <a:xfrm>
+            <a:off x="244549" y="5847907"/>
+            <a:ext cx="10302949" cy="215444"/>
+          </a:xfrm>
+          <a:prstGeom prst="rect">
+            <a:avLst/>
+          </a:prstGeom>
+          <a:noFill/>
+        </p:spPr>
+        <p:txBody>
+          <a:bodyPr wrap="square" lIns="0" tIns="0" rIns="0" bIns="0" rtlCol="0">
+            <a:spAutoFit/>
+          </a:bodyPr>
+          <a:lstStyle/>
+          <a:p>
+            <a:r>
+              <a:rPr lang="fr-FR" sz="1400" dirty="0">
+                <a:latin typeface="Consolas" panose="020B0609020204030204" pitchFamily="49" charset="0"/>
+              </a:rPr>
+              <a:t>hxxps://github.com/AlessandroZ/LaZagne/releases/download/2.4.3/lazagne.exe </a:t>
+            </a:r>
+          </a:p>
+        </p:txBody>
+      </p:sp>
+      <p:pic>
+        <p:nvPicPr>
+          <p:cNvPr id="14" name="Picture 13">
+            <a:extLst>
+              <a:ext uri="{FF2B5EF4-FFF2-40B4-BE49-F238E27FC236}">
+                <a16:creationId xmlns:a16="http://schemas.microsoft.com/office/drawing/2014/main" id="{6ECDF1AA-B65E-A525-23B4-1B6370788CE5}"/>
+              </a:ext>
+            </a:extLst>
+          </p:cNvPr>
+          <p:cNvPicPr>
+            <a:picLocks noChangeAspect="1"/>
+          </p:cNvPicPr>
+          <p:nvPr/>
+        </p:nvPicPr>
+        <p:blipFill>
+          <a:blip r:embed="rId2"/>
+          <a:stretch>
+            <a:fillRect/>
+          </a:stretch>
+        </p:blipFill>
+        <p:spPr>
+          <a:xfrm>
+            <a:off x="4065147" y="1588140"/>
+            <a:ext cx="7872177" cy="4011782"/>
+          </a:xfrm>
+          <a:prstGeom prst="rect">
+            <a:avLst/>
+          </a:prstGeom>
+          <a:effectLst>
+            <a:outerShdw blurRad="50800" dist="38100" dir="2700000" algn="tl" rotWithShape="0">
+              <a:prstClr val="black">
+                <a:alpha val="40000"/>
+              </a:prstClr>
+            </a:outerShdw>
+          </a:effectLst>
+        </p:spPr>
+      </p:pic>
+      <p:sp>
+        <p:nvSpPr>
+          <p:cNvPr id="12" name="Arrow: Bent-Up 11">
+            <a:extLst>
+              <a:ext uri="{FF2B5EF4-FFF2-40B4-BE49-F238E27FC236}">
+                <a16:creationId xmlns:a16="http://schemas.microsoft.com/office/drawing/2014/main" id="{0364D1ED-1FFF-D3D7-3378-10C1EA44D21F}"/>
+              </a:ext>
+            </a:extLst>
+          </p:cNvPr>
+          <p:cNvSpPr/>
+          <p:nvPr/>
+        </p:nvSpPr>
+        <p:spPr>
+          <a:xfrm rot="10800000">
+            <a:off x="5316278" y="5179164"/>
+            <a:ext cx="1056167" cy="668742"/>
+          </a:xfrm>
+          <a:prstGeom prst="bentUpArrow">
+            <a:avLst/>
+          </a:prstGeom>
+          <a:gradFill>
+            <a:gsLst>
+              <a:gs pos="0">
+                <a:schemeClr val="tx2">
+                  <a:alpha val="0"/>
+                </a:schemeClr>
+              </a:gs>
+              <a:gs pos="100000">
+                <a:schemeClr val="tx2"/>
+              </a:gs>
+            </a:gsLst>
+            <a:lin ang="16800000" scaled="0"/>
+          </a:gradFill>
+          <a:ln>
+            <a:noFill/>
+          </a:ln>
+        </p:spPr>
+        <p:style>
+          <a:lnRef idx="2">
+            <a:schemeClr val="accent1">
+              <a:shade val="50000"/>
+            </a:schemeClr>
+          </a:lnRef>
+          <a:fillRef idx="1">
+            <a:schemeClr val="accent1"/>
+          </a:fillRef>
+          <a:effectRef idx="0">
+            <a:schemeClr val="accent1"/>
+          </a:effectRef>
+          <a:fontRef idx="minor">
+            <a:schemeClr val="lt1"/>
+          </a:fontRef>
+        </p:style>
+        <p:txBody>
+          <a:bodyPr rtlCol="0" anchor="ctr"/>
+          <a:lstStyle/>
+          <a:p>
+            <a:pPr algn="ctr"/>
+            <a:endParaRPr lang="fr-FR"/>
+          </a:p>
+        </p:txBody>
+      </p:sp>
+    </p:spTree>
+    <p:extLst>
+      <p:ext uri="{BB962C8B-B14F-4D97-AF65-F5344CB8AC3E}">
+        <p14:creationId xmlns:p14="http://schemas.microsoft.com/office/powerpoint/2010/main" val="625439952"/>
+      </p:ext>
+    </p:extLst>
+  </p:cSld>
+  <p:clrMapOvr>
+    <a:masterClrMapping/>
+  </p:clrMapOvr>
+  <mc:AlternateContent xmlns:mc="http://schemas.openxmlformats.org/markup-compatibility/2006">
+    <mc:Choice xmlns:p14="http://schemas.microsoft.com/office/powerpoint/2010/main" Requires="p14">
+      <p:transition spd="med" p14:dur="700">
+        <p:fade/>
+      </p:transition>
+    </mc:Choice>
+    <mc:Fallback>
+      <p:transition spd="med">
+        <p:fade/>
+      </p:transition>
+    </mc:Fallback>
+  </mc:AlternateContent>
+</p:sld>
+</file>
+
+<file path=ppt/slides/slide24.xml><?xml version="1.0" encoding="utf-8"?>
+<p:sld xmlns:a="http://schemas.openxmlformats.org/drawingml/2006/main" xmlns:r="http://schemas.openxmlformats.org/officeDocument/2006/relationships" xmlns:p="http://schemas.openxmlformats.org/presentationml/2006/main">
+  <p:cSld>
+    <p:spTree>
+      <p:nvGrpSpPr>
+        <p:cNvPr id="1" name="">
+          <a:extLst>
+            <a:ext uri="{FF2B5EF4-FFF2-40B4-BE49-F238E27FC236}">
+              <a16:creationId xmlns:a16="http://schemas.microsoft.com/office/drawing/2014/main" id="{68EF9E3A-DBAC-ED27-E37D-00F2C2AC6DCF}"/>
+            </a:ext>
+          </a:extLst>
+        </p:cNvPr>
+        <p:cNvGrpSpPr/>
+        <p:nvPr/>
+      </p:nvGrpSpPr>
+      <p:grpSpPr>
+        <a:xfrm>
+          <a:off x="0" y="0"/>
+          <a:ext cx="0" cy="0"/>
+          <a:chOff x="0" y="0"/>
+          <a:chExt cx="0" cy="0"/>
+        </a:xfrm>
+      </p:grpSpPr>
+      <p:sp>
+        <p:nvSpPr>
+          <p:cNvPr id="2" name="Titre 1">
+            <a:extLst>
+              <a:ext uri="{FF2B5EF4-FFF2-40B4-BE49-F238E27FC236}">
+                <a16:creationId xmlns:a16="http://schemas.microsoft.com/office/drawing/2014/main" id="{74300DE6-754B-0978-BC1C-9A5D3C6088FA}"/>
+              </a:ext>
+            </a:extLst>
+          </p:cNvPr>
+          <p:cNvSpPr>
+            <a:spLocks noGrp="1"/>
+          </p:cNvSpPr>
+          <p:nvPr>
+            <p:ph type="title"/>
+          </p:nvPr>
+        </p:nvSpPr>
+        <p:spPr/>
+        <p:txBody>
+          <a:bodyPr/>
+          <a:lstStyle/>
+          <a:p>
+            <a:r>
+              <a:rPr lang="en-US" dirty="0"/>
+              <a:t>📖 Let’s the story begin – Round n°5</a:t>
+            </a:r>
+          </a:p>
+        </p:txBody>
+      </p:sp>
+      <p:pic>
+        <p:nvPicPr>
+          <p:cNvPr id="10" name="Picture 9">
+            <a:extLst>
+              <a:ext uri="{FF2B5EF4-FFF2-40B4-BE49-F238E27FC236}">
+                <a16:creationId xmlns:a16="http://schemas.microsoft.com/office/drawing/2014/main" id="{C676507D-8D55-F03F-60D5-6EA1D309D23F}"/>
+              </a:ext>
+            </a:extLst>
+          </p:cNvPr>
+          <p:cNvPicPr>
+            <a:picLocks noChangeAspect="1"/>
+          </p:cNvPicPr>
+          <p:nvPr/>
+        </p:nvPicPr>
+        <p:blipFill>
+          <a:blip r:embed="rId2"/>
+          <a:srcRect r="25626"/>
+          <a:stretch>
+            <a:fillRect/>
+          </a:stretch>
+        </p:blipFill>
+        <p:spPr>
+          <a:xfrm>
+            <a:off x="1135939" y="2448798"/>
+            <a:ext cx="10510449" cy="3190771"/>
+          </a:xfrm>
+          <a:prstGeom prst="rect">
+            <a:avLst/>
+          </a:prstGeom>
+          <a:effectLst>
+            <a:outerShdw blurRad="50800" dist="38100" dir="2700000" algn="tl" rotWithShape="0">
+              <a:prstClr val="black">
+                <a:alpha val="40000"/>
+              </a:prstClr>
+            </a:outerShdw>
+          </a:effectLst>
+        </p:spPr>
+      </p:pic>
+      <p:pic>
+        <p:nvPicPr>
+          <p:cNvPr id="12" name="Picture 11">
+            <a:extLst>
+              <a:ext uri="{FF2B5EF4-FFF2-40B4-BE49-F238E27FC236}">
+                <a16:creationId xmlns:a16="http://schemas.microsoft.com/office/drawing/2014/main" id="{7029D462-864D-D455-3E8C-2BC297238028}"/>
+              </a:ext>
+            </a:extLst>
+          </p:cNvPr>
+          <p:cNvPicPr>
+            <a:picLocks noChangeAspect="1"/>
+          </p:cNvPicPr>
+          <p:nvPr/>
+        </p:nvPicPr>
+        <p:blipFill>
+          <a:blip r:embed="rId3"/>
+          <a:stretch>
+            <a:fillRect/>
+          </a:stretch>
+        </p:blipFill>
+        <p:spPr>
+          <a:xfrm>
+            <a:off x="2310116" y="945294"/>
+            <a:ext cx="8162096" cy="1287542"/>
+          </a:xfrm>
+          <a:prstGeom prst="rect">
+            <a:avLst/>
+          </a:prstGeom>
+          <a:effectLst>
+            <a:outerShdw blurRad="50800" dist="38100" dir="2700000" algn="tl" rotWithShape="0">
+              <a:prstClr val="black">
+                <a:alpha val="40000"/>
+              </a:prstClr>
+            </a:outerShdw>
+          </a:effectLst>
+        </p:spPr>
+      </p:pic>
+    </p:spTree>
+    <p:extLst>
+      <p:ext uri="{BB962C8B-B14F-4D97-AF65-F5344CB8AC3E}">
+        <p14:creationId xmlns:p14="http://schemas.microsoft.com/office/powerpoint/2010/main" val="1502947638"/>
+      </p:ext>
+    </p:extLst>
+  </p:cSld>
+  <p:clrMapOvr>
+    <a:masterClrMapping/>
+  </p:clrMapOvr>
+  <mc:AlternateContent xmlns:mc="http://schemas.openxmlformats.org/markup-compatibility/2006">
+    <mc:Choice xmlns:p14="http://schemas.microsoft.com/office/powerpoint/2010/main" Requires="p14">
+      <p:transition spd="med" p14:dur="700">
+        <p:fade/>
+      </p:transition>
+    </mc:Choice>
+    <mc:Fallback>
+      <p:transition spd="med">
+        <p:fade/>
+      </p:transition>
+    </mc:Fallback>
+  </mc:AlternateContent>
+</p:sld>
+</file>
+
+<file path=ppt/slides/slide25.xml><?xml version="1.0" encoding="utf-8"?>
+<p:sld xmlns:a="http://schemas.openxmlformats.org/drawingml/2006/main" xmlns:r="http://schemas.openxmlformats.org/officeDocument/2006/relationships" xmlns:p="http://schemas.openxmlformats.org/presentationml/2006/main">
+  <p:cSld>
+    <p:spTree>
+      <p:nvGrpSpPr>
+        <p:cNvPr id="1" name="">
+          <a:extLst>
+            <a:ext uri="{FF2B5EF4-FFF2-40B4-BE49-F238E27FC236}">
+              <a16:creationId xmlns:a16="http://schemas.microsoft.com/office/drawing/2014/main" id="{5D8130AE-B1B4-DDD4-96EC-80A1BA7D0915}"/>
+            </a:ext>
+          </a:extLst>
+        </p:cNvPr>
+        <p:cNvGrpSpPr/>
+        <p:nvPr/>
+      </p:nvGrpSpPr>
+      <p:grpSpPr>
+        <a:xfrm>
+          <a:off x="0" y="0"/>
+          <a:ext cx="0" cy="0"/>
+          <a:chOff x="0" y="0"/>
+          <a:chExt cx="0" cy="0"/>
+        </a:xfrm>
+      </p:grpSpPr>
+      <p:sp>
+        <p:nvSpPr>
+          <p:cNvPr id="2" name="Titre 1">
+            <a:extLst>
+              <a:ext uri="{FF2B5EF4-FFF2-40B4-BE49-F238E27FC236}">
+                <a16:creationId xmlns:a16="http://schemas.microsoft.com/office/drawing/2014/main" id="{C48E3CF9-CB24-1DB0-A3CE-9DBCDE187153}"/>
+              </a:ext>
+            </a:extLst>
+          </p:cNvPr>
+          <p:cNvSpPr>
+            <a:spLocks noGrp="1"/>
+          </p:cNvSpPr>
+          <p:nvPr>
+            <p:ph type="title"/>
+          </p:nvPr>
+        </p:nvSpPr>
+        <p:spPr/>
+        <p:txBody>
+          <a:bodyPr/>
+          <a:lstStyle/>
+          <a:p>
+            <a:r>
+              <a:rPr lang="en-US" dirty="0"/>
+              <a:t>📖 Let’s the story begin – Round n°5</a:t>
+            </a:r>
+          </a:p>
+        </p:txBody>
+      </p:sp>
+      <p:sp>
+        <p:nvSpPr>
+          <p:cNvPr id="3" name="Espace réservé du texte 2">
+            <a:extLst>
+              <a:ext uri="{FF2B5EF4-FFF2-40B4-BE49-F238E27FC236}">
+                <a16:creationId xmlns:a16="http://schemas.microsoft.com/office/drawing/2014/main" id="{7724CFBE-895C-529D-962F-48F3B3F99C9A}"/>
+              </a:ext>
+            </a:extLst>
+          </p:cNvPr>
+          <p:cNvSpPr>
+            <a:spLocks noGrp="1"/>
+          </p:cNvSpPr>
+          <p:nvPr>
+            <p:ph type="body" sz="quarter" idx="15"/>
+          </p:nvPr>
+        </p:nvSpPr>
+        <p:spPr>
+          <a:xfrm>
+            <a:off x="588000" y="977317"/>
+            <a:ext cx="11419970" cy="4949030"/>
+          </a:xfrm>
+        </p:spPr>
+        <p:txBody>
+          <a:bodyPr/>
+          <a:lstStyle/>
+          <a:p>
+            <a:r>
+              <a:rPr lang="en-US" sz="2800" b="0" dirty="0">
+                <a:solidFill>
+                  <a:schemeClr val="tx2"/>
+                </a:solidFill>
+              </a:rPr>
+              <a:t> The goal was to test if the service ensure that the provided PDF file do not contain any link to dangerous content.</a:t>
+            </a:r>
+          </a:p>
+          <a:p>
+            <a:pPr marL="0" indent="0">
+              <a:buNone/>
+            </a:pPr>
+            <a:endParaRPr lang="en-US" sz="2800" b="0" dirty="0">
+              <a:solidFill>
+                <a:schemeClr val="tx2"/>
+              </a:solidFill>
+            </a:endParaRPr>
+          </a:p>
+          <a:p>
+            <a:r>
+              <a:rPr lang="en-US" sz="2800" b="0" dirty="0">
+                <a:solidFill>
+                  <a:schemeClr val="tx2"/>
+                </a:solidFill>
+              </a:rPr>
+              <a:t> Such link can used, in addition to instruction into the PDF, to trick the user to click on the link and then download/execute the referenced malicious program (phishing approach).</a:t>
+            </a:r>
+          </a:p>
+          <a:p>
+            <a:pPr marL="0" indent="0">
+              <a:buNone/>
+            </a:pPr>
+            <a:endParaRPr lang="en-US" sz="2800" b="0" dirty="0">
+              <a:solidFill>
+                <a:schemeClr val="tx2"/>
+              </a:solidFill>
+            </a:endParaRPr>
+          </a:p>
+        </p:txBody>
+      </p:sp>
+      <p:pic>
+        <p:nvPicPr>
+          <p:cNvPr id="5" name="Picture 4">
+            <a:extLst>
+              <a:ext uri="{FF2B5EF4-FFF2-40B4-BE49-F238E27FC236}">
+                <a16:creationId xmlns:a16="http://schemas.microsoft.com/office/drawing/2014/main" id="{98E7A59E-620D-AB2E-0ABE-776E5686CFD5}"/>
+              </a:ext>
+            </a:extLst>
+          </p:cNvPr>
+          <p:cNvPicPr>
+            <a:picLocks noChangeAspect="1"/>
+          </p:cNvPicPr>
+          <p:nvPr/>
+        </p:nvPicPr>
+        <p:blipFill>
+          <a:blip r:embed="rId2"/>
+          <a:stretch>
+            <a:fillRect/>
+          </a:stretch>
+        </p:blipFill>
+        <p:spPr>
+          <a:xfrm>
+            <a:off x="1396525" y="5033365"/>
+            <a:ext cx="9398949" cy="847318"/>
+          </a:xfrm>
+          <a:prstGeom prst="rect">
+            <a:avLst/>
+          </a:prstGeom>
+          <a:effectLst>
+            <a:outerShdw blurRad="50800" dist="38100" dir="2700000" algn="tl" rotWithShape="0">
+              <a:prstClr val="black">
+                <a:alpha val="40000"/>
+              </a:prstClr>
+            </a:outerShdw>
+          </a:effectLst>
+        </p:spPr>
+      </p:pic>
+    </p:spTree>
+    <p:extLst>
+      <p:ext uri="{BB962C8B-B14F-4D97-AF65-F5344CB8AC3E}">
+        <p14:creationId xmlns:p14="http://schemas.microsoft.com/office/powerpoint/2010/main" val="497681082"/>
+      </p:ext>
+    </p:extLst>
+  </p:cSld>
+  <p:clrMapOvr>
+    <a:masterClrMapping/>
+  </p:clrMapOvr>
+  <mc:AlternateContent xmlns:mc="http://schemas.openxmlformats.org/markup-compatibility/2006">
+    <mc:Choice xmlns:p14="http://schemas.microsoft.com/office/powerpoint/2010/main" Requires="p14">
+      <p:transition spd="med" p14:dur="700">
+        <p:fade/>
+      </p:transition>
+    </mc:Choice>
+    <mc:Fallback>
+      <p:transition spd="med">
+        <p:fade/>
+      </p:transition>
+    </mc:Fallback>
+  </mc:AlternateContent>
+</p:sld>
+</file>
+
+<file path=ppt/slides/slide26.xml><?xml version="1.0" encoding="utf-8"?>
+<p:sld xmlns:a="http://schemas.openxmlformats.org/drawingml/2006/main" xmlns:r="http://schemas.openxmlformats.org/officeDocument/2006/relationships" xmlns:p="http://schemas.openxmlformats.org/presentationml/2006/main">
+  <p:cSld>
+    <p:spTree>
+      <p:nvGrpSpPr>
+        <p:cNvPr id="1" name="">
+          <a:extLst>
+            <a:ext uri="{FF2B5EF4-FFF2-40B4-BE49-F238E27FC236}">
+              <a16:creationId xmlns:a16="http://schemas.microsoft.com/office/drawing/2014/main" id="{A38BB301-497D-CCB0-26BB-78AA2C28E93B}"/>
+            </a:ext>
+          </a:extLst>
+        </p:cNvPr>
+        <p:cNvGrpSpPr/>
+        <p:nvPr/>
+      </p:nvGrpSpPr>
+      <p:grpSpPr>
+        <a:xfrm>
+          <a:off x="0" y="0"/>
+          <a:ext cx="0" cy="0"/>
+          <a:chOff x="0" y="0"/>
+          <a:chExt cx="0" cy="0"/>
+        </a:xfrm>
+      </p:grpSpPr>
+      <p:sp>
+        <p:nvSpPr>
+          <p:cNvPr id="2" name="Titre 1">
+            <a:extLst>
+              <a:ext uri="{FF2B5EF4-FFF2-40B4-BE49-F238E27FC236}">
+                <a16:creationId xmlns:a16="http://schemas.microsoft.com/office/drawing/2014/main" id="{98F14790-074C-95E2-C4EF-910EA1CD2AF1}"/>
+              </a:ext>
+            </a:extLst>
+          </p:cNvPr>
+          <p:cNvSpPr>
+            <a:spLocks noGrp="1"/>
+          </p:cNvSpPr>
+          <p:nvPr>
+            <p:ph type="title"/>
+          </p:nvPr>
+        </p:nvSpPr>
+        <p:spPr/>
+        <p:txBody>
+          <a:bodyPr/>
+          <a:lstStyle/>
+          <a:p>
+            <a:r>
+              <a:rPr lang="en-US" dirty="0"/>
+              <a:t>📖 Let’s the story begin – Round n°5</a:t>
+            </a:r>
+          </a:p>
+        </p:txBody>
+      </p:sp>
+      <p:sp>
+        <p:nvSpPr>
+          <p:cNvPr id="3" name="Espace réservé du texte 2">
+            <a:extLst>
+              <a:ext uri="{FF2B5EF4-FFF2-40B4-BE49-F238E27FC236}">
+                <a16:creationId xmlns:a16="http://schemas.microsoft.com/office/drawing/2014/main" id="{BE28F0C4-9907-93B2-D5DA-46FB3B31BFBF}"/>
+              </a:ext>
+            </a:extLst>
+          </p:cNvPr>
+          <p:cNvSpPr>
+            <a:spLocks noGrp="1"/>
+          </p:cNvSpPr>
+          <p:nvPr>
+            <p:ph type="body" sz="quarter" idx="15"/>
+          </p:nvPr>
+        </p:nvSpPr>
+        <p:spPr>
+          <a:xfrm>
+            <a:off x="588000" y="977317"/>
+            <a:ext cx="11419970" cy="4949030"/>
+          </a:xfrm>
+        </p:spPr>
+        <p:txBody>
+          <a:bodyPr/>
+          <a:lstStyle/>
+          <a:p>
+            <a:r>
+              <a:rPr lang="en-US" sz="2800" b="0" dirty="0">
+                <a:solidFill>
+                  <a:schemeClr val="tx2"/>
+                </a:solidFill>
+              </a:rPr>
+              <a:t>  🤔 Test failed so the following additional validation was proposed to the team:</a:t>
+            </a:r>
+          </a:p>
+          <a:p>
+            <a:pPr lvl="1"/>
+            <a:r>
+              <a:rPr lang="en-US" sz="2400" dirty="0"/>
+              <a:t>Ensure that the provided file contains only links to allowed domains and content.</a:t>
+            </a:r>
+          </a:p>
+          <a:p>
+            <a:pPr marL="0" lvl="1" indent="0">
+              <a:buNone/>
+            </a:pPr>
+            <a:endParaRPr lang="en-US" sz="2400" b="0" dirty="0">
+              <a:solidFill>
+                <a:schemeClr val="tx2"/>
+              </a:solidFill>
+            </a:endParaRPr>
+          </a:p>
+          <a:p>
+            <a:r>
+              <a:rPr lang="en-US" sz="2800" b="0" dirty="0">
+                <a:solidFill>
+                  <a:schemeClr val="tx2"/>
+                </a:solidFill>
+              </a:rPr>
+              <a:t> ✅ Test passed after the adding of the additional validation:</a:t>
+            </a:r>
+          </a:p>
+          <a:p>
+            <a:endParaRPr lang="en-US" sz="2800" b="0" dirty="0">
+              <a:solidFill>
+                <a:schemeClr val="tx2"/>
+              </a:solidFill>
+            </a:endParaRPr>
+          </a:p>
+          <a:p>
+            <a:pPr marL="0" indent="0">
+              <a:buNone/>
+            </a:pPr>
+            <a:r>
+              <a:rPr lang="en-US" sz="2800" b="0" dirty="0">
+                <a:solidFill>
+                  <a:schemeClr val="tx2"/>
+                </a:solidFill>
+              </a:rPr>
+              <a:t>  </a:t>
+            </a:r>
+          </a:p>
+        </p:txBody>
+      </p:sp>
+      <p:sp>
+        <p:nvSpPr>
+          <p:cNvPr id="7" name="TextBox 6">
+            <a:extLst>
+              <a:ext uri="{FF2B5EF4-FFF2-40B4-BE49-F238E27FC236}">
+                <a16:creationId xmlns:a16="http://schemas.microsoft.com/office/drawing/2014/main" id="{BA798E0F-45CC-AAFD-85E7-A216053474BA}"/>
+              </a:ext>
+            </a:extLst>
+          </p:cNvPr>
+          <p:cNvSpPr txBox="1"/>
+          <p:nvPr/>
+        </p:nvSpPr>
+        <p:spPr>
+          <a:xfrm>
+            <a:off x="8967059" y="113779"/>
+            <a:ext cx="3040911" cy="246221"/>
+          </a:xfrm>
+          <a:prstGeom prst="rect">
+            <a:avLst/>
+          </a:prstGeom>
+          <a:noFill/>
+        </p:spPr>
+        <p:txBody>
+          <a:bodyPr wrap="square" lIns="0" tIns="0" rIns="0" bIns="0" rtlCol="0">
+            <a:spAutoFit/>
+          </a:bodyPr>
+          <a:lstStyle/>
+          <a:p>
+            <a:pPr algn="l"/>
+            <a:r>
+              <a:rPr lang="en-US" sz="1600" noProof="0" dirty="0">
+                <a:solidFill>
+                  <a:srgbClr val="C00000"/>
+                </a:solidFill>
+              </a:rPr>
+              <a:t>🤬 Level of exasperation: 80%</a:t>
+            </a:r>
+          </a:p>
+        </p:txBody>
+      </p:sp>
+      <p:pic>
+        <p:nvPicPr>
+          <p:cNvPr id="6" name="Picture 5">
+            <a:extLst>
+              <a:ext uri="{FF2B5EF4-FFF2-40B4-BE49-F238E27FC236}">
+                <a16:creationId xmlns:a16="http://schemas.microsoft.com/office/drawing/2014/main" id="{A12CF8EB-E28E-6000-70F9-43E20A4527EC}"/>
+              </a:ext>
+            </a:extLst>
+          </p:cNvPr>
+          <p:cNvPicPr>
+            <a:picLocks noChangeAspect="1"/>
+          </p:cNvPicPr>
+          <p:nvPr/>
+        </p:nvPicPr>
+        <p:blipFill>
+          <a:blip r:embed="rId2"/>
+          <a:stretch>
+            <a:fillRect/>
+          </a:stretch>
+        </p:blipFill>
+        <p:spPr>
+          <a:xfrm>
+            <a:off x="2154490" y="4552915"/>
+            <a:ext cx="7883020" cy="688936"/>
+          </a:xfrm>
+          <a:prstGeom prst="rect">
+            <a:avLst/>
+          </a:prstGeom>
+          <a:effectLst>
+            <a:outerShdw blurRad="50800" dist="38100" dir="2700000" algn="tl" rotWithShape="0">
+              <a:prstClr val="black">
+                <a:alpha val="40000"/>
+              </a:prstClr>
+            </a:outerShdw>
+          </a:effectLst>
+        </p:spPr>
+      </p:pic>
+    </p:spTree>
+    <p:extLst>
+      <p:ext uri="{BB962C8B-B14F-4D97-AF65-F5344CB8AC3E}">
+        <p14:creationId xmlns:p14="http://schemas.microsoft.com/office/powerpoint/2010/main" val="750126829"/>
+      </p:ext>
+    </p:extLst>
+  </p:cSld>
+  <p:clrMapOvr>
+    <a:masterClrMapping/>
+  </p:clrMapOvr>
+  <mc:AlternateContent xmlns:mc="http://schemas.openxmlformats.org/markup-compatibility/2006">
+    <mc:Choice xmlns:p14="http://schemas.microsoft.com/office/powerpoint/2010/main" Requires="p14">
+      <p:transition spd="med" p14:dur="700">
+        <p:fade/>
+      </p:transition>
+    </mc:Choice>
+    <mc:Fallback>
+      <p:transition spd="med">
+        <p:fade/>
+      </p:transition>
+    </mc:Fallback>
+  </mc:AlternateContent>
+</p:sld>
+</file>
+
+<file path=ppt/slides/slide27.xml><?xml version="1.0" encoding="utf-8"?>
+<p:sld xmlns:a="http://schemas.openxmlformats.org/drawingml/2006/main" xmlns:r="http://schemas.openxmlformats.org/officeDocument/2006/relationships" xmlns:p="http://schemas.openxmlformats.org/presentationml/2006/main">
+  <p:cSld>
+    <p:spTree>
+      <p:nvGrpSpPr>
+        <p:cNvPr id="1" name="">
+          <a:extLst>
+            <a:ext uri="{FF2B5EF4-FFF2-40B4-BE49-F238E27FC236}">
+              <a16:creationId xmlns:a16="http://schemas.microsoft.com/office/drawing/2014/main" id="{DEB742E8-1670-204D-A8E7-0672DA537A2F}"/>
+            </a:ext>
+          </a:extLst>
+        </p:cNvPr>
+        <p:cNvGrpSpPr/>
+        <p:nvPr/>
+      </p:nvGrpSpPr>
+      <p:grpSpPr>
+        <a:xfrm>
+          <a:off x="0" y="0"/>
+          <a:ext cx="0" cy="0"/>
+          <a:chOff x="0" y="0"/>
+          <a:chExt cx="0" cy="0"/>
+        </a:xfrm>
+      </p:grpSpPr>
+      <p:sp>
+        <p:nvSpPr>
+          <p:cNvPr id="2" name="Titre 1">
+            <a:extLst>
+              <a:ext uri="{FF2B5EF4-FFF2-40B4-BE49-F238E27FC236}">
+                <a16:creationId xmlns:a16="http://schemas.microsoft.com/office/drawing/2014/main" id="{C57B4822-73D2-F2DE-4902-BDBAB052CFDC}"/>
+              </a:ext>
+            </a:extLst>
+          </p:cNvPr>
+          <p:cNvSpPr>
+            <a:spLocks noGrp="1"/>
+          </p:cNvSpPr>
+          <p:nvPr>
+            <p:ph type="title"/>
+          </p:nvPr>
+        </p:nvSpPr>
+        <p:spPr/>
+        <p:txBody>
+          <a:bodyPr/>
+          <a:lstStyle/>
+          <a:p>
+            <a:r>
+              <a:rPr lang="en-US" dirty="0"/>
+              <a:t>📖 Let’s the story begin – Round n°6</a:t>
+            </a:r>
+          </a:p>
+        </p:txBody>
+      </p:sp>
+      <p:sp>
+        <p:nvSpPr>
+          <p:cNvPr id="3" name="Espace réservé du texte 2">
+            <a:extLst>
+              <a:ext uri="{FF2B5EF4-FFF2-40B4-BE49-F238E27FC236}">
+                <a16:creationId xmlns:a16="http://schemas.microsoft.com/office/drawing/2014/main" id="{2BDD3EBC-02D0-7D15-A14C-72BB94993CF4}"/>
+              </a:ext>
+            </a:extLst>
+          </p:cNvPr>
+          <p:cNvSpPr>
+            <a:spLocks noGrp="1"/>
+          </p:cNvSpPr>
+          <p:nvPr>
+            <p:ph type="body" sz="quarter" idx="15"/>
+          </p:nvPr>
+        </p:nvSpPr>
+        <p:spPr>
+          <a:xfrm>
+            <a:off x="588000" y="977317"/>
+            <a:ext cx="11419970" cy="4949030"/>
+          </a:xfrm>
+        </p:spPr>
+        <p:txBody>
+          <a:bodyPr/>
+          <a:lstStyle/>
+          <a:p>
+            <a:r>
+              <a:rPr lang="en-US" sz="2800" b="0" dirty="0">
+                <a:solidFill>
+                  <a:schemeClr val="tx2"/>
+                </a:solidFill>
+              </a:rPr>
+              <a:t> A sixth test was performed with a valid PDF file …:</a:t>
+            </a:r>
+          </a:p>
+          <a:p>
+            <a:endParaRPr lang="en-US" sz="2800" b="0" dirty="0">
+              <a:solidFill>
+                <a:schemeClr val="tx2"/>
+              </a:solidFill>
+            </a:endParaRPr>
+          </a:p>
+          <a:p>
+            <a:pPr marL="0" indent="0">
+              <a:buNone/>
+            </a:pPr>
+            <a:r>
+              <a:rPr lang="en-US" sz="2800" b="0" dirty="0">
+                <a:solidFill>
+                  <a:schemeClr val="tx2"/>
+                </a:solidFill>
+              </a:rPr>
+              <a:t> </a:t>
+            </a:r>
+          </a:p>
+          <a:p>
+            <a:pPr marL="0" indent="0">
+              <a:buNone/>
+            </a:pPr>
+            <a:endParaRPr lang="en-US" sz="2800" b="0" dirty="0">
+              <a:solidFill>
+                <a:schemeClr val="tx2"/>
+              </a:solidFill>
+            </a:endParaRPr>
+          </a:p>
+        </p:txBody>
+      </p:sp>
+    </p:spTree>
+    <p:extLst>
+      <p:ext uri="{BB962C8B-B14F-4D97-AF65-F5344CB8AC3E}">
+        <p14:creationId xmlns:p14="http://schemas.microsoft.com/office/powerpoint/2010/main" val="1989195103"/>
+      </p:ext>
+    </p:extLst>
+  </p:cSld>
+  <p:clrMapOvr>
+    <a:masterClrMapping/>
+  </p:clrMapOvr>
+  <mc:AlternateContent xmlns:mc="http://schemas.openxmlformats.org/markup-compatibility/2006">
+    <mc:Choice xmlns:p14="http://schemas.microsoft.com/office/powerpoint/2010/main" Requires="p14">
+      <p:transition spd="med" p14:dur="700">
+        <p:fade/>
+      </p:transition>
+    </mc:Choice>
+    <mc:Fallback>
+      <p:transition spd="med">
+        <p:fade/>
+      </p:transition>
+    </mc:Fallback>
+  </mc:AlternateContent>
+</p:sld>
+</file>
+
+<file path=ppt/slides/slide28.xml><?xml version="1.0" encoding="utf-8"?>
 <p:sld xmlns:a="http://schemas.openxmlformats.org/drawingml/2006/main" xmlns:r="http://schemas.openxmlformats.org/officeDocument/2006/relationships" xmlns:p="http://schemas.openxmlformats.org/presentationml/2006/main">
   <p:cSld>
     <p:spTree>

--- a/presentation.pptx
+++ b/presentation.pptx
@@ -5,7 +5,7 @@
     <p:sldMasterId id="2147483660" r:id="rId1"/>
   </p:sldMasterIdLst>
   <p:notesMasterIdLst>
-    <p:notesMasterId r:id="rId30"/>
+    <p:notesMasterId r:id="rId35"/>
   </p:notesMasterIdLst>
   <p:sldIdLst>
     <p:sldId id="257" r:id="rId2"/>
@@ -35,7 +35,12 @@
     <p:sldId id="310" r:id="rId26"/>
     <p:sldId id="312" r:id="rId27"/>
     <p:sldId id="313" r:id="rId28"/>
-    <p:sldId id="288" r:id="rId29"/>
+    <p:sldId id="314" r:id="rId29"/>
+    <p:sldId id="315" r:id="rId30"/>
+    <p:sldId id="316" r:id="rId31"/>
+    <p:sldId id="317" r:id="rId32"/>
+    <p:sldId id="319" r:id="rId33"/>
+    <p:sldId id="288" r:id="rId34"/>
   </p:sldIdLst>
   <p:sldSz cx="12192000" cy="6858000"/>
   <p:notesSz cx="6858000" cy="9144000"/>
@@ -145,7 +150,7 @@
 <file path=ppt/revisionInfo.xml><?xml version="1.0" encoding="utf-8"?>
 <p1510:revInfo xmlns:a="http://schemas.openxmlformats.org/drawingml/2006/main" xmlns:r="http://schemas.openxmlformats.org/officeDocument/2006/relationships" xmlns:p1510="http://schemas.microsoft.com/office/powerpoint/2015/10/main">
   <p1510:revLst>
-    <p1510:client id="{E2922590-C897-4D5E-94A5-7835129BD264}" v="38" dt="2026-01-05T15:51:23.733"/>
+    <p1510:client id="{E2922590-C897-4D5E-94A5-7835129BD264}" v="40" dt="2026-01-05T18:49:54.052"/>
   </p1510:revLst>
 </p1510:revInfo>
 </file>
@@ -155,7 +160,7 @@
   <pc:docChgLst>
     <pc:chgData name="Dominique RIGHETTO" userId="512fe077-82ad-424c-88a3-15e852b5861d" providerId="ADAL" clId="{8B7CB91F-10CE-42C2-B9B8-BFF2D3401655}"/>
     <pc:docChg chg="undo custSel addSld delSld modSld sldOrd modMainMaster">
-      <pc:chgData name="Dominique RIGHETTO" userId="512fe077-82ad-424c-88a3-15e852b5861d" providerId="ADAL" clId="{8B7CB91F-10CE-42C2-B9B8-BFF2D3401655}" dt="2026-01-05T15:50:13.653" v="4776" actId="20577"/>
+      <pc:chgData name="Dominique RIGHETTO" userId="512fe077-82ad-424c-88a3-15e852b5861d" providerId="ADAL" clId="{8B7CB91F-10CE-42C2-B9B8-BFF2D3401655}" dt="2026-01-05T19:40:15.637" v="5517" actId="14861"/>
       <pc:docMkLst>
         <pc:docMk/>
       </pc:docMkLst>
@@ -646,7 +651,7 @@
         </pc:picChg>
       </pc:sldChg>
       <pc:sldChg chg="addSp delSp modSp add mod ord">
-        <pc:chgData name="Dominique RIGHETTO" userId="512fe077-82ad-424c-88a3-15e852b5861d" providerId="ADAL" clId="{8B7CB91F-10CE-42C2-B9B8-BFF2D3401655}" dt="2026-01-05T09:59:30.981" v="2329" actId="14861"/>
+        <pc:chgData name="Dominique RIGHETTO" userId="512fe077-82ad-424c-88a3-15e852b5861d" providerId="ADAL" clId="{8B7CB91F-10CE-42C2-B9B8-BFF2D3401655}" dt="2026-01-05T19:40:15.637" v="5517" actId="14861"/>
         <pc:sldMkLst>
           <pc:docMk/>
           <pc:sldMk cId="546162947" sldId="296"/>
@@ -667,6 +672,14 @@
             <ac:spMk id="3" creationId="{C89D633C-3E2D-C620-330F-995671BAA090}"/>
           </ac:spMkLst>
         </pc:spChg>
+        <pc:picChg chg="add mod">
+          <ac:chgData name="Dominique RIGHETTO" userId="512fe077-82ad-424c-88a3-15e852b5861d" providerId="ADAL" clId="{8B7CB91F-10CE-42C2-B9B8-BFF2D3401655}" dt="2026-01-05T19:40:15.637" v="5517" actId="14861"/>
+          <ac:picMkLst>
+            <pc:docMk/>
+            <pc:sldMk cId="546162947" sldId="296"/>
+            <ac:picMk id="5" creationId="{305D51B7-6C8B-DF60-8292-37CF7D79B792}"/>
+          </ac:picMkLst>
+        </pc:picChg>
         <pc:picChg chg="add del mod">
           <ac:chgData name="Dominique RIGHETTO" userId="512fe077-82ad-424c-88a3-15e852b5861d" providerId="ADAL" clId="{8B7CB91F-10CE-42C2-B9B8-BFF2D3401655}" dt="2026-01-05T09:58:00.326" v="2323" actId="478"/>
           <ac:picMkLst>
@@ -683,8 +696,8 @@
             <ac:picMk id="6" creationId="{61DC0705-AD07-B80F-06C4-D877F4F1EB1A}"/>
           </ac:picMkLst>
         </pc:picChg>
-        <pc:picChg chg="add mod">
-          <ac:chgData name="Dominique RIGHETTO" userId="512fe077-82ad-424c-88a3-15e852b5861d" providerId="ADAL" clId="{8B7CB91F-10CE-42C2-B9B8-BFF2D3401655}" dt="2026-01-05T09:59:30.981" v="2329" actId="14861"/>
+        <pc:picChg chg="add del mod">
+          <ac:chgData name="Dominique RIGHETTO" userId="512fe077-82ad-424c-88a3-15e852b5861d" providerId="ADAL" clId="{8B7CB91F-10CE-42C2-B9B8-BFF2D3401655}" dt="2026-01-05T19:40:09.229" v="5514" actId="478"/>
           <ac:picMkLst>
             <pc:docMk/>
             <pc:sldMk cId="546162947" sldId="296"/>
@@ -1507,8 +1520,8 @@
           </ac:picMkLst>
         </pc:picChg>
       </pc:sldChg>
-      <pc:sldChg chg="delSp modSp add mod ord">
-        <pc:chgData name="Dominique RIGHETTO" userId="512fe077-82ad-424c-88a3-15e852b5861d" providerId="ADAL" clId="{8B7CB91F-10CE-42C2-B9B8-BFF2D3401655}" dt="2026-01-05T15:50:13.653" v="4776" actId="20577"/>
+      <pc:sldChg chg="addSp delSp modSp add mod ord">
+        <pc:chgData name="Dominique RIGHETTO" userId="512fe077-82ad-424c-88a3-15e852b5861d" providerId="ADAL" clId="{8B7CB91F-10CE-42C2-B9B8-BFF2D3401655}" dt="2026-01-05T18:54:55.317" v="4891" actId="20577"/>
         <pc:sldMkLst>
           <pc:docMk/>
           <pc:sldMk cId="1989195103" sldId="313"/>
@@ -1522,11 +1535,27 @@
           </ac:spMkLst>
         </pc:spChg>
         <pc:spChg chg="mod">
-          <ac:chgData name="Dominique RIGHETTO" userId="512fe077-82ad-424c-88a3-15e852b5861d" providerId="ADAL" clId="{8B7CB91F-10CE-42C2-B9B8-BFF2D3401655}" dt="2026-01-05T15:50:09.955" v="4774" actId="5793"/>
+          <ac:chgData name="Dominique RIGHETTO" userId="512fe077-82ad-424c-88a3-15e852b5861d" providerId="ADAL" clId="{8B7CB91F-10CE-42C2-B9B8-BFF2D3401655}" dt="2026-01-05T18:54:55.317" v="4891" actId="20577"/>
           <ac:spMkLst>
             <pc:docMk/>
             <pc:sldMk cId="1989195103" sldId="313"/>
             <ac:spMk id="3" creationId="{2BDD3EBC-02D0-7D15-A14C-72BB94993CF4}"/>
+          </ac:spMkLst>
+        </pc:spChg>
+        <pc:spChg chg="add mod">
+          <ac:chgData name="Dominique RIGHETTO" userId="512fe077-82ad-424c-88a3-15e852b5861d" providerId="ADAL" clId="{8B7CB91F-10CE-42C2-B9B8-BFF2D3401655}" dt="2026-01-05T18:49:41.910" v="4852" actId="20577"/>
+          <ac:spMkLst>
+            <pc:docMk/>
+            <pc:sldMk cId="1989195103" sldId="313"/>
+            <ac:spMk id="8" creationId="{1FC012AD-54A8-0E2D-355E-196E7ABD39BA}"/>
+          </ac:spMkLst>
+        </pc:spChg>
+        <pc:spChg chg="add mod">
+          <ac:chgData name="Dominique RIGHETTO" userId="512fe077-82ad-424c-88a3-15e852b5861d" providerId="ADAL" clId="{8B7CB91F-10CE-42C2-B9B8-BFF2D3401655}" dt="2026-01-05T18:50:02.128" v="4854" actId="1076"/>
+          <ac:spMkLst>
+            <pc:docMk/>
+            <pc:sldMk cId="1989195103" sldId="313"/>
+            <ac:spMk id="9" creationId="{B344369E-E6FB-4C1E-1CE7-D07FCE314B8B}"/>
           </ac:spMkLst>
         </pc:spChg>
         <pc:spChg chg="del">
@@ -1545,12 +1574,270 @@
             <ac:spMk id="12" creationId="{CECE5D38-4E4A-B501-5C10-170C135016C1}"/>
           </ac:spMkLst>
         </pc:spChg>
+        <pc:picChg chg="add del mod">
+          <ac:chgData name="Dominique RIGHETTO" userId="512fe077-82ad-424c-88a3-15e852b5861d" providerId="ADAL" clId="{8B7CB91F-10CE-42C2-B9B8-BFF2D3401655}" dt="2026-01-05T18:48:58.262" v="4846" actId="478"/>
+          <ac:picMkLst>
+            <pc:docMk/>
+            <pc:sldMk cId="1989195103" sldId="313"/>
+            <ac:picMk id="5" creationId="{251DF939-D23F-C64D-89CC-9ABDA3A291AD}"/>
+          </ac:picMkLst>
+        </pc:picChg>
+        <pc:picChg chg="add mod">
+          <ac:chgData name="Dominique RIGHETTO" userId="512fe077-82ad-424c-88a3-15e852b5861d" providerId="ADAL" clId="{8B7CB91F-10CE-42C2-B9B8-BFF2D3401655}" dt="2026-01-05T18:49:10.475" v="4849" actId="14861"/>
+          <ac:picMkLst>
+            <pc:docMk/>
+            <pc:sldMk cId="1989195103" sldId="313"/>
+            <ac:picMk id="7" creationId="{D90CE54D-015D-D2E7-CC34-1D4FB470868E}"/>
+          </ac:picMkLst>
+        </pc:picChg>
         <pc:picChg chg="del">
           <ac:chgData name="Dominique RIGHETTO" userId="512fe077-82ad-424c-88a3-15e852b5861d" providerId="ADAL" clId="{8B7CB91F-10CE-42C2-B9B8-BFF2D3401655}" dt="2026-01-05T15:50:00.941" v="4768" actId="478"/>
           <ac:picMkLst>
             <pc:docMk/>
             <pc:sldMk cId="1989195103" sldId="313"/>
             <ac:picMk id="14" creationId="{B9C54380-54CA-94C8-BF91-239A1FF95C15}"/>
+          </ac:picMkLst>
+        </pc:picChg>
+      </pc:sldChg>
+      <pc:sldChg chg="addSp delSp modSp add mod">
+        <pc:chgData name="Dominique RIGHETTO" userId="512fe077-82ad-424c-88a3-15e852b5861d" providerId="ADAL" clId="{8B7CB91F-10CE-42C2-B9B8-BFF2D3401655}" dt="2026-01-05T18:51:48.171" v="4870" actId="108"/>
+        <pc:sldMkLst>
+          <pc:docMk/>
+          <pc:sldMk cId="2209675377" sldId="314"/>
+        </pc:sldMkLst>
+        <pc:spChg chg="del">
+          <ac:chgData name="Dominique RIGHETTO" userId="512fe077-82ad-424c-88a3-15e852b5861d" providerId="ADAL" clId="{8B7CB91F-10CE-42C2-B9B8-BFF2D3401655}" dt="2026-01-05T18:50:18.439" v="4860" actId="478"/>
+          <ac:spMkLst>
+            <pc:docMk/>
+            <pc:sldMk cId="2209675377" sldId="314"/>
+            <ac:spMk id="3" creationId="{269847B8-204B-61C4-4D3B-1BB9A8B7FFB3}"/>
+          </ac:spMkLst>
+        </pc:spChg>
+        <pc:spChg chg="add del mod">
+          <ac:chgData name="Dominique RIGHETTO" userId="512fe077-82ad-424c-88a3-15e852b5861d" providerId="ADAL" clId="{8B7CB91F-10CE-42C2-B9B8-BFF2D3401655}" dt="2026-01-05T18:50:20.851" v="4861" actId="478"/>
+          <ac:spMkLst>
+            <pc:docMk/>
+            <pc:sldMk cId="2209675377" sldId="314"/>
+            <ac:spMk id="6" creationId="{7758ABBA-5D87-FEB6-B999-0187C1EC96F6}"/>
+          </ac:spMkLst>
+        </pc:spChg>
+        <pc:picChg chg="mod">
+          <ac:chgData name="Dominique RIGHETTO" userId="512fe077-82ad-424c-88a3-15e852b5861d" providerId="ADAL" clId="{8B7CB91F-10CE-42C2-B9B8-BFF2D3401655}" dt="2026-01-05T18:51:48.171" v="4870" actId="108"/>
+          <ac:picMkLst>
+            <pc:docMk/>
+            <pc:sldMk cId="2209675377" sldId="314"/>
+            <ac:picMk id="5" creationId="{7580EC70-E5DC-BD03-7AAC-61D4590B2495}"/>
+          </ac:picMkLst>
+        </pc:picChg>
+        <pc:picChg chg="del">
+          <ac:chgData name="Dominique RIGHETTO" userId="512fe077-82ad-424c-88a3-15e852b5861d" providerId="ADAL" clId="{8B7CB91F-10CE-42C2-B9B8-BFF2D3401655}" dt="2026-01-05T18:50:25.758" v="4862" actId="478"/>
+          <ac:picMkLst>
+            <pc:docMk/>
+            <pc:sldMk cId="2209675377" sldId="314"/>
+            <ac:picMk id="7" creationId="{3FBCE1C9-982A-00CA-A415-920004810D40}"/>
+          </ac:picMkLst>
+        </pc:picChg>
+        <pc:picChg chg="add mod">
+          <ac:chgData name="Dominique RIGHETTO" userId="512fe077-82ad-424c-88a3-15e852b5861d" providerId="ADAL" clId="{8B7CB91F-10CE-42C2-B9B8-BFF2D3401655}" dt="2026-01-05T18:51:44.915" v="4869" actId="14861"/>
+          <ac:picMkLst>
+            <pc:docMk/>
+            <pc:sldMk cId="2209675377" sldId="314"/>
+            <ac:picMk id="9" creationId="{DF5BA790-A478-9E59-5252-277F6D7E87F2}"/>
+          </ac:picMkLst>
+        </pc:picChg>
+      </pc:sldChg>
+      <pc:sldChg chg="addSp delSp modSp add mod">
+        <pc:chgData name="Dominique RIGHETTO" userId="512fe077-82ad-424c-88a3-15e852b5861d" providerId="ADAL" clId="{8B7CB91F-10CE-42C2-B9B8-BFF2D3401655}" dt="2026-01-05T18:54:41.701" v="4889" actId="1076"/>
+        <pc:sldMkLst>
+          <pc:docMk/>
+          <pc:sldMk cId="2163192230" sldId="315"/>
+        </pc:sldMkLst>
+        <pc:picChg chg="add mod">
+          <ac:chgData name="Dominique RIGHETTO" userId="512fe077-82ad-424c-88a3-15e852b5861d" providerId="ADAL" clId="{8B7CB91F-10CE-42C2-B9B8-BFF2D3401655}" dt="2026-01-05T18:54:41.701" v="4889" actId="1076"/>
+          <ac:picMkLst>
+            <pc:docMk/>
+            <pc:sldMk cId="2163192230" sldId="315"/>
+            <ac:picMk id="4" creationId="{4A9FB248-C4F7-C526-7156-99FBE75905B9}"/>
+          </ac:picMkLst>
+        </pc:picChg>
+        <pc:picChg chg="del mod modCrop">
+          <ac:chgData name="Dominique RIGHETTO" userId="512fe077-82ad-424c-88a3-15e852b5861d" providerId="ADAL" clId="{8B7CB91F-10CE-42C2-B9B8-BFF2D3401655}" dt="2026-01-05T18:54:30.227" v="4884" actId="478"/>
+          <ac:picMkLst>
+            <pc:docMk/>
+            <pc:sldMk cId="2163192230" sldId="315"/>
+            <ac:picMk id="5" creationId="{2941E2C1-7FEF-C61F-C59E-976946552185}"/>
+          </ac:picMkLst>
+        </pc:picChg>
+        <pc:picChg chg="add mod">
+          <ac:chgData name="Dominique RIGHETTO" userId="512fe077-82ad-424c-88a3-15e852b5861d" providerId="ADAL" clId="{8B7CB91F-10CE-42C2-B9B8-BFF2D3401655}" dt="2026-01-05T18:54:38.989" v="4888" actId="108"/>
+          <ac:picMkLst>
+            <pc:docMk/>
+            <pc:sldMk cId="2163192230" sldId="315"/>
+            <ac:picMk id="7" creationId="{B2BC0267-92B8-9376-BAF7-8D773C495E70}"/>
+          </ac:picMkLst>
+        </pc:picChg>
+        <pc:picChg chg="del">
+          <ac:chgData name="Dominique RIGHETTO" userId="512fe077-82ad-424c-88a3-15e852b5861d" providerId="ADAL" clId="{8B7CB91F-10CE-42C2-B9B8-BFF2D3401655}" dt="2026-01-05T18:53:12.515" v="4872" actId="478"/>
+          <ac:picMkLst>
+            <pc:docMk/>
+            <pc:sldMk cId="2163192230" sldId="315"/>
+            <ac:picMk id="9" creationId="{B9D47639-E7A8-7462-9065-6BB1F1675C6A}"/>
+          </ac:picMkLst>
+        </pc:picChg>
+      </pc:sldChg>
+      <pc:sldChg chg="addSp delSp modSp add mod ord">
+        <pc:chgData name="Dominique RIGHETTO" userId="512fe077-82ad-424c-88a3-15e852b5861d" providerId="ADAL" clId="{8B7CB91F-10CE-42C2-B9B8-BFF2D3401655}" dt="2026-01-05T19:33:30.538" v="5496" actId="14861"/>
+        <pc:sldMkLst>
+          <pc:docMk/>
+          <pc:sldMk cId="3966777535" sldId="316"/>
+        </pc:sldMkLst>
+        <pc:spChg chg="mod">
+          <ac:chgData name="Dominique RIGHETTO" userId="512fe077-82ad-424c-88a3-15e852b5861d" providerId="ADAL" clId="{8B7CB91F-10CE-42C2-B9B8-BFF2D3401655}" dt="2026-01-05T18:55:58.138" v="4896" actId="20577"/>
+          <ac:spMkLst>
+            <pc:docMk/>
+            <pc:sldMk cId="3966777535" sldId="316"/>
+            <ac:spMk id="2" creationId="{CD2756DE-81FF-0B4A-F059-A06C9ACD2CB4}"/>
+          </ac:spMkLst>
+        </pc:spChg>
+        <pc:spChg chg="mod">
+          <ac:chgData name="Dominique RIGHETTO" userId="512fe077-82ad-424c-88a3-15e852b5861d" providerId="ADAL" clId="{8B7CB91F-10CE-42C2-B9B8-BFF2D3401655}" dt="2026-01-05T19:00:49.384" v="5250" actId="20577"/>
+          <ac:spMkLst>
+            <pc:docMk/>
+            <pc:sldMk cId="3966777535" sldId="316"/>
+            <ac:spMk id="3" creationId="{ADE63D71-25FB-998D-9333-7E6F3F474244}"/>
+          </ac:spMkLst>
+        </pc:spChg>
+        <pc:picChg chg="del">
+          <ac:chgData name="Dominique RIGHETTO" userId="512fe077-82ad-424c-88a3-15e852b5861d" providerId="ADAL" clId="{8B7CB91F-10CE-42C2-B9B8-BFF2D3401655}" dt="2026-01-05T19:00:10.921" v="5245" actId="478"/>
+          <ac:picMkLst>
+            <pc:docMk/>
+            <pc:sldMk cId="3966777535" sldId="316"/>
+            <ac:picMk id="5" creationId="{EDD11653-2EF6-3D7B-7118-D105BDA3FBE9}"/>
+          </ac:picMkLst>
+        </pc:picChg>
+        <pc:picChg chg="add del mod">
+          <ac:chgData name="Dominique RIGHETTO" userId="512fe077-82ad-424c-88a3-15e852b5861d" providerId="ADAL" clId="{8B7CB91F-10CE-42C2-B9B8-BFF2D3401655}" dt="2026-01-05T19:25:36.791" v="5485" actId="478"/>
+          <ac:picMkLst>
+            <pc:docMk/>
+            <pc:sldMk cId="3966777535" sldId="316"/>
+            <ac:picMk id="6" creationId="{258DCFD8-3029-6059-E6DA-D512978327F6}"/>
+          </ac:picMkLst>
+        </pc:picChg>
+        <pc:picChg chg="add del mod">
+          <ac:chgData name="Dominique RIGHETTO" userId="512fe077-82ad-424c-88a3-15e852b5861d" providerId="ADAL" clId="{8B7CB91F-10CE-42C2-B9B8-BFF2D3401655}" dt="2026-01-05T19:33:18.012" v="5491" actId="478"/>
+          <ac:picMkLst>
+            <pc:docMk/>
+            <pc:sldMk cId="3966777535" sldId="316"/>
+            <ac:picMk id="8" creationId="{727ADC83-6FCF-CA31-30A0-15CB67B5853C}"/>
+          </ac:picMkLst>
+        </pc:picChg>
+        <pc:picChg chg="add mod">
+          <ac:chgData name="Dominique RIGHETTO" userId="512fe077-82ad-424c-88a3-15e852b5861d" providerId="ADAL" clId="{8B7CB91F-10CE-42C2-B9B8-BFF2D3401655}" dt="2026-01-05T19:33:30.538" v="5496" actId="14861"/>
+          <ac:picMkLst>
+            <pc:docMk/>
+            <pc:sldMk cId="3966777535" sldId="316"/>
+            <ac:picMk id="10" creationId="{725A494E-EB8B-111F-7855-2CCD852CD0DF}"/>
+          </ac:picMkLst>
+        </pc:picChg>
+      </pc:sldChg>
+      <pc:sldChg chg="addSp delSp modSp add mod ord">
+        <pc:chgData name="Dominique RIGHETTO" userId="512fe077-82ad-424c-88a3-15e852b5861d" providerId="ADAL" clId="{8B7CB91F-10CE-42C2-B9B8-BFF2D3401655}" dt="2026-01-05T19:37:24.208" v="5509" actId="20577"/>
+        <pc:sldMkLst>
+          <pc:docMk/>
+          <pc:sldMk cId="1987946601" sldId="317"/>
+        </pc:sldMkLst>
+        <pc:spChg chg="mod">
+          <ac:chgData name="Dominique RIGHETTO" userId="512fe077-82ad-424c-88a3-15e852b5861d" providerId="ADAL" clId="{8B7CB91F-10CE-42C2-B9B8-BFF2D3401655}" dt="2026-01-05T19:01:12.458" v="5255" actId="20577"/>
+          <ac:spMkLst>
+            <pc:docMk/>
+            <pc:sldMk cId="1987946601" sldId="317"/>
+            <ac:spMk id="2" creationId="{61F534F7-7EB6-BD99-0561-2DB58B39C6E1}"/>
+          </ac:spMkLst>
+        </pc:spChg>
+        <pc:spChg chg="mod">
+          <ac:chgData name="Dominique RIGHETTO" userId="512fe077-82ad-424c-88a3-15e852b5861d" providerId="ADAL" clId="{8B7CB91F-10CE-42C2-B9B8-BFF2D3401655}" dt="2026-01-05T19:37:24.208" v="5509" actId="20577"/>
+          <ac:spMkLst>
+            <pc:docMk/>
+            <pc:sldMk cId="1987946601" sldId="317"/>
+            <ac:spMk id="3" creationId="{4E0F90F3-7544-C418-90D2-046A579AEC6B}"/>
+          </ac:spMkLst>
+        </pc:spChg>
+        <pc:spChg chg="mod">
+          <ac:chgData name="Dominique RIGHETTO" userId="512fe077-82ad-424c-88a3-15e852b5861d" providerId="ADAL" clId="{8B7CB91F-10CE-42C2-B9B8-BFF2D3401655}" dt="2026-01-05T19:02:46.058" v="5403" actId="20577"/>
+          <ac:spMkLst>
+            <pc:docMk/>
+            <pc:sldMk cId="1987946601" sldId="317"/>
+            <ac:spMk id="7" creationId="{282F7DF4-9D6F-8286-D290-A040B93FEFAB}"/>
+          </ac:spMkLst>
+        </pc:spChg>
+        <pc:picChg chg="add del mod">
+          <ac:chgData name="Dominique RIGHETTO" userId="512fe077-82ad-424c-88a3-15e852b5861d" providerId="ADAL" clId="{8B7CB91F-10CE-42C2-B9B8-BFF2D3401655}" dt="2026-01-05T19:37:10.204" v="5505" actId="478"/>
+          <ac:picMkLst>
+            <pc:docMk/>
+            <pc:sldMk cId="1987946601" sldId="317"/>
+            <ac:picMk id="5" creationId="{54752D20-AEC0-8F43-695B-6AC911942ADE}"/>
+          </ac:picMkLst>
+        </pc:picChg>
+        <pc:picChg chg="del">
+          <ac:chgData name="Dominique RIGHETTO" userId="512fe077-82ad-424c-88a3-15e852b5861d" providerId="ADAL" clId="{8B7CB91F-10CE-42C2-B9B8-BFF2D3401655}" dt="2026-01-05T19:02:40.994" v="5401" actId="478"/>
+          <ac:picMkLst>
+            <pc:docMk/>
+            <pc:sldMk cId="1987946601" sldId="317"/>
+            <ac:picMk id="6" creationId="{291BD7F8-2321-828F-3308-367D5F45097B}"/>
+          </ac:picMkLst>
+        </pc:picChg>
+      </pc:sldChg>
+      <pc:sldChg chg="addSp delSp modSp add del mod">
+        <pc:chgData name="Dominique RIGHETTO" userId="512fe077-82ad-424c-88a3-15e852b5861d" providerId="ADAL" clId="{8B7CB91F-10CE-42C2-B9B8-BFF2D3401655}" dt="2026-01-05T19:37:39.794" v="5513" actId="47"/>
+        <pc:sldMkLst>
+          <pc:docMk/>
+          <pc:sldMk cId="2737521458" sldId="318"/>
+        </pc:sldMkLst>
+        <pc:spChg chg="del">
+          <ac:chgData name="Dominique RIGHETTO" userId="512fe077-82ad-424c-88a3-15e852b5861d" providerId="ADAL" clId="{8B7CB91F-10CE-42C2-B9B8-BFF2D3401655}" dt="2026-01-05T19:36:57.690" v="5500" actId="478"/>
+          <ac:spMkLst>
+            <pc:docMk/>
+            <pc:sldMk cId="2737521458" sldId="318"/>
+            <ac:spMk id="3" creationId="{9BBD30AA-FB9A-2E9C-9926-10E00E6B79B8}"/>
+          </ac:spMkLst>
+        </pc:spChg>
+        <pc:spChg chg="add del mod">
+          <ac:chgData name="Dominique RIGHETTO" userId="512fe077-82ad-424c-88a3-15e852b5861d" providerId="ADAL" clId="{8B7CB91F-10CE-42C2-B9B8-BFF2D3401655}" dt="2026-01-05T19:37:00.638" v="5501" actId="478"/>
+          <ac:spMkLst>
+            <pc:docMk/>
+            <pc:sldMk cId="2737521458" sldId="318"/>
+            <ac:spMk id="6" creationId="{AC85CF5B-37E0-D94B-54F2-E04E6EF9CF47}"/>
+          </ac:spMkLst>
+        </pc:spChg>
+        <pc:picChg chg="mod">
+          <ac:chgData name="Dominique RIGHETTO" userId="512fe077-82ad-424c-88a3-15e852b5861d" providerId="ADAL" clId="{8B7CB91F-10CE-42C2-B9B8-BFF2D3401655}" dt="2026-01-05T19:37:06.717" v="5504" actId="1076"/>
+          <ac:picMkLst>
+            <pc:docMk/>
+            <pc:sldMk cId="2737521458" sldId="318"/>
+            <ac:picMk id="5" creationId="{32A60881-D4FA-7677-C052-6B931C0FE123}"/>
+          </ac:picMkLst>
+        </pc:picChg>
+      </pc:sldChg>
+      <pc:sldChg chg="addSp modSp add mod">
+        <pc:chgData name="Dominique RIGHETTO" userId="512fe077-82ad-424c-88a3-15e852b5861d" providerId="ADAL" clId="{8B7CB91F-10CE-42C2-B9B8-BFF2D3401655}" dt="2026-01-05T19:37:35.669" v="5512" actId="22"/>
+        <pc:sldMkLst>
+          <pc:docMk/>
+          <pc:sldMk cId="261788013" sldId="319"/>
+        </pc:sldMkLst>
+        <pc:spChg chg="mod">
+          <ac:chgData name="Dominique RIGHETTO" userId="512fe077-82ad-424c-88a3-15e852b5861d" providerId="ADAL" clId="{8B7CB91F-10CE-42C2-B9B8-BFF2D3401655}" dt="2026-01-05T19:37:30.848" v="5511" actId="6549"/>
+          <ac:spMkLst>
+            <pc:docMk/>
+            <pc:sldMk cId="261788013" sldId="319"/>
+            <ac:spMk id="3" creationId="{E57E7D38-3558-049A-380D-1044EA6C69AF}"/>
+          </ac:spMkLst>
+        </pc:spChg>
+        <pc:picChg chg="add">
+          <ac:chgData name="Dominique RIGHETTO" userId="512fe077-82ad-424c-88a3-15e852b5861d" providerId="ADAL" clId="{8B7CB91F-10CE-42C2-B9B8-BFF2D3401655}" dt="2026-01-05T19:37:35.669" v="5512" actId="22"/>
+          <ac:picMkLst>
+            <pc:docMk/>
+            <pc:sldMk cId="261788013" sldId="319"/>
+            <ac:picMk id="5" creationId="{7044B40C-F9A7-7634-524E-19B743E3A059}"/>
           </ac:picMkLst>
         </pc:picChg>
       </pc:sldChg>
@@ -44658,10 +44945,10 @@
       </p:sp>
       <p:pic>
         <p:nvPicPr>
-          <p:cNvPr id="6" name="Picture 5">
+          <p:cNvPr id="5" name="Picture 4">
             <a:extLst>
               <a:ext uri="{FF2B5EF4-FFF2-40B4-BE49-F238E27FC236}">
-                <a16:creationId xmlns:a16="http://schemas.microsoft.com/office/drawing/2014/main" id="{99059005-BA3A-F6BB-37CD-87E255CF8D33}"/>
+                <a16:creationId xmlns:a16="http://schemas.microsoft.com/office/drawing/2014/main" id="{305D51B7-6C8B-DF60-8292-37CF7D79B792}"/>
               </a:ext>
             </a:extLst>
           </p:cNvPr>
@@ -44678,8 +44965,8 @@
         </p:blipFill>
         <p:spPr>
           <a:xfrm>
-            <a:off x="1960560" y="2001898"/>
-            <a:ext cx="8270880" cy="3924449"/>
+            <a:off x="2061599" y="1920549"/>
+            <a:ext cx="8068801" cy="4143953"/>
           </a:xfrm>
           <a:prstGeom prst="rect">
             <a:avLst/>
@@ -47150,13 +47437,13 @@
   <p:clrMapOvr>
     <a:masterClrMapping/>
   </p:clrMapOvr>
-  <mc:AlternateContent xmlns:mc="http://schemas.openxmlformats.org/markup-compatibility/2006">
-    <mc:Choice xmlns:p14="http://schemas.microsoft.com/office/powerpoint/2010/main" Requires="p14">
+  <mc:AlternateContent xmlns:mc="http://schemas.openxmlformats.org/markup-compatibility/2006" xmlns:p14="http://schemas.microsoft.com/office/powerpoint/2010/main">
+    <mc:Choice Requires="p14">
       <p:transition spd="med" p14:dur="700">
         <p:fade/>
       </p:transition>
     </mc:Choice>
-    <mc:Fallback>
+    <mc:Fallback xmlns="">
       <p:transition spd="med">
         <p:fade/>
       </p:transition>
@@ -47263,13 +47550,13 @@
   <p:clrMapOvr>
     <a:masterClrMapping/>
   </p:clrMapOvr>
-  <mc:AlternateContent xmlns:mc="http://schemas.openxmlformats.org/markup-compatibility/2006">
-    <mc:Choice xmlns:p14="http://schemas.microsoft.com/office/powerpoint/2010/main" Requires="p14">
+  <mc:AlternateContent xmlns:mc="http://schemas.openxmlformats.org/markup-compatibility/2006" xmlns:p14="http://schemas.microsoft.com/office/powerpoint/2010/main">
+    <mc:Choice Requires="p14">
       <p:transition spd="med" p14:dur="700">
         <p:fade/>
       </p:transition>
     </mc:Choice>
-    <mc:Fallback>
+    <mc:Fallback xmlns="">
       <p:transition spd="med">
         <p:fade/>
       </p:transition>
@@ -47500,13 +47787,13 @@
   <p:clrMapOvr>
     <a:masterClrMapping/>
   </p:clrMapOvr>
-  <mc:AlternateContent xmlns:mc="http://schemas.openxmlformats.org/markup-compatibility/2006">
-    <mc:Choice xmlns:p14="http://schemas.microsoft.com/office/powerpoint/2010/main" Requires="p14">
+  <mc:AlternateContent xmlns:mc="http://schemas.openxmlformats.org/markup-compatibility/2006" xmlns:p14="http://schemas.microsoft.com/office/powerpoint/2010/main">
+    <mc:Choice Requires="p14">
       <p:transition spd="med" p14:dur="700">
         <p:fade/>
       </p:transition>
     </mc:Choice>
-    <mc:Fallback>
+    <mc:Fallback xmlns="">
       <p:transition spd="med">
         <p:fade/>
       </p:transition>
@@ -47779,13 +48066,13 @@
   <p:clrMapOvr>
     <a:masterClrMapping/>
   </p:clrMapOvr>
-  <mc:AlternateContent xmlns:mc="http://schemas.openxmlformats.org/markup-compatibility/2006">
-    <mc:Choice xmlns:p14="http://schemas.microsoft.com/office/powerpoint/2010/main" Requires="p14">
+  <mc:AlternateContent xmlns:mc="http://schemas.openxmlformats.org/markup-compatibility/2006" xmlns:p14="http://schemas.microsoft.com/office/powerpoint/2010/main">
+    <mc:Choice Requires="p14">
       <p:transition spd="med" p14:dur="700">
         <p:fade/>
       </p:transition>
     </mc:Choice>
-    <mc:Fallback>
+    <mc:Fallback xmlns="">
       <p:transition spd="med">
         <p:fade/>
       </p:transition>
@@ -47930,13 +48217,13 @@
   <p:clrMapOvr>
     <a:masterClrMapping/>
   </p:clrMapOvr>
-  <mc:AlternateContent xmlns:mc="http://schemas.openxmlformats.org/markup-compatibility/2006">
-    <mc:Choice xmlns:p14="http://schemas.microsoft.com/office/powerpoint/2010/main" Requires="p14">
+  <mc:AlternateContent xmlns:mc="http://schemas.openxmlformats.org/markup-compatibility/2006" xmlns:p14="http://schemas.microsoft.com/office/powerpoint/2010/main">
+    <mc:Choice Requires="p14">
       <p:transition spd="med" p14:dur="700">
         <p:fade/>
       </p:transition>
     </mc:Choice>
-    <mc:Fallback>
+    <mc:Fallback xmlns="">
       <p:transition spd="med">
         <p:fade/>
       </p:transition>
@@ -48110,13 +48397,13 @@
   <p:clrMapOvr>
     <a:masterClrMapping/>
   </p:clrMapOvr>
-  <mc:AlternateContent xmlns:mc="http://schemas.openxmlformats.org/markup-compatibility/2006">
-    <mc:Choice xmlns:p14="http://schemas.microsoft.com/office/powerpoint/2010/main" Requires="p14">
+  <mc:AlternateContent xmlns:mc="http://schemas.openxmlformats.org/markup-compatibility/2006" xmlns:p14="http://schemas.microsoft.com/office/powerpoint/2010/main">
+    <mc:Choice Requires="p14">
       <p:transition spd="med" p14:dur="700">
         <p:fade/>
       </p:transition>
     </mc:Choice>
-    <mc:Fallback>
+    <mc:Fallback xmlns="">
       <p:transition spd="med">
         <p:fade/>
       </p:transition>
@@ -48347,13 +48634,13 @@
   <p:clrMapOvr>
     <a:masterClrMapping/>
   </p:clrMapOvr>
-  <mc:AlternateContent xmlns:mc="http://schemas.openxmlformats.org/markup-compatibility/2006">
-    <mc:Choice xmlns:p14="http://schemas.microsoft.com/office/powerpoint/2010/main" Requires="p14">
+  <mc:AlternateContent xmlns:mc="http://schemas.openxmlformats.org/markup-compatibility/2006" xmlns:p14="http://schemas.microsoft.com/office/powerpoint/2010/main">
+    <mc:Choice Requires="p14">
       <p:transition spd="med" p14:dur="700">
         <p:fade/>
       </p:transition>
     </mc:Choice>
-    <mc:Fallback>
+    <mc:Fallback xmlns="">
       <p:transition spd="med">
         <p:fade/>
       </p:transition>
@@ -48445,7 +48732,7 @@
                   <a:schemeClr val="tx2"/>
                 </a:solidFill>
               </a:rPr>
-              <a:t> A sixth test was performed with a valid PDF file …:</a:t>
+              <a:t> A sixth test was performed with a valid PDF file, in which, a malicious file was hidden using “binary concatenation”:</a:t>
             </a:r>
           </a:p>
           <a:p>
@@ -48480,6 +48767,142 @@
           </a:p>
         </p:txBody>
       </p:sp>
+      <p:pic>
+        <p:nvPicPr>
+          <p:cNvPr id="7" name="Picture 6">
+            <a:extLst>
+              <a:ext uri="{FF2B5EF4-FFF2-40B4-BE49-F238E27FC236}">
+                <a16:creationId xmlns:a16="http://schemas.microsoft.com/office/drawing/2014/main" id="{D90CE54D-015D-D2E7-CC34-1D4FB470868E}"/>
+              </a:ext>
+            </a:extLst>
+          </p:cNvPr>
+          <p:cNvPicPr>
+            <a:picLocks noChangeAspect="1"/>
+          </p:cNvPicPr>
+          <p:nvPr/>
+        </p:nvPicPr>
+        <p:blipFill>
+          <a:blip r:embed="rId2"/>
+          <a:stretch>
+            <a:fillRect/>
+          </a:stretch>
+        </p:blipFill>
+        <p:spPr>
+          <a:xfrm>
+            <a:off x="2785782" y="2087507"/>
+            <a:ext cx="6868581" cy="3651140"/>
+          </a:xfrm>
+          <a:prstGeom prst="rect">
+            <a:avLst/>
+          </a:prstGeom>
+          <a:effectLst>
+            <a:outerShdw blurRad="50800" dist="38100" dir="2700000" algn="tl" rotWithShape="0">
+              <a:prstClr val="black">
+                <a:alpha val="40000"/>
+              </a:prstClr>
+            </a:outerShdw>
+          </a:effectLst>
+        </p:spPr>
+      </p:pic>
+      <p:sp>
+        <p:nvSpPr>
+          <p:cNvPr id="8" name="TextBox 7">
+            <a:extLst>
+              <a:ext uri="{FF2B5EF4-FFF2-40B4-BE49-F238E27FC236}">
+                <a16:creationId xmlns:a16="http://schemas.microsoft.com/office/drawing/2014/main" id="{1FC012AD-54A8-0E2D-355E-196E7ABD39BA}"/>
+              </a:ext>
+            </a:extLst>
+          </p:cNvPr>
+          <p:cNvSpPr txBox="1"/>
+          <p:nvPr/>
+        </p:nvSpPr>
+        <p:spPr>
+          <a:xfrm>
+            <a:off x="244549" y="5847907"/>
+            <a:ext cx="10302949" cy="215444"/>
+          </a:xfrm>
+          <a:prstGeom prst="rect">
+            <a:avLst/>
+          </a:prstGeom>
+          <a:noFill/>
+        </p:spPr>
+        <p:txBody>
+          <a:bodyPr wrap="square" lIns="0" tIns="0" rIns="0" bIns="0" rtlCol="0">
+            <a:spAutoFit/>
+          </a:bodyPr>
+          <a:lstStyle/>
+          <a:p>
+            <a:r>
+              <a:rPr lang="fr-FR" sz="1400" dirty="0">
+                <a:latin typeface="Consolas" panose="020B0609020204030204" pitchFamily="49" charset="0"/>
+              </a:rPr>
+              <a:t>hxxps://github.com/AlessandroZ/LaZagne/releases/download/2.4.6/lazagne.exe </a:t>
+            </a:r>
+          </a:p>
+        </p:txBody>
+      </p:sp>
+      <p:sp>
+        <p:nvSpPr>
+          <p:cNvPr id="9" name="Arrow: Bent-Up 8">
+            <a:extLst>
+              <a:ext uri="{FF2B5EF4-FFF2-40B4-BE49-F238E27FC236}">
+                <a16:creationId xmlns:a16="http://schemas.microsoft.com/office/drawing/2014/main" id="{B344369E-E6FB-4C1E-1CE7-D07FCE314B8B}"/>
+              </a:ext>
+            </a:extLst>
+          </p:cNvPr>
+          <p:cNvSpPr/>
+          <p:nvPr/>
+        </p:nvSpPr>
+        <p:spPr>
+          <a:xfrm rot="10800000">
+            <a:off x="1903227" y="5138407"/>
+            <a:ext cx="1056167" cy="668742"/>
+          </a:xfrm>
+          <a:prstGeom prst="bentUpArrow">
+            <a:avLst/>
+          </a:prstGeom>
+          <a:gradFill>
+            <a:gsLst>
+              <a:gs pos="0">
+                <a:schemeClr val="tx2">
+                  <a:alpha val="0"/>
+                </a:schemeClr>
+              </a:gs>
+              <a:gs pos="100000">
+                <a:schemeClr val="tx2"/>
+              </a:gs>
+            </a:gsLst>
+            <a:lin ang="16800000" scaled="0"/>
+          </a:gradFill>
+          <a:ln>
+            <a:noFill/>
+          </a:ln>
+        </p:spPr>
+        <p:style>
+          <a:lnRef idx="2">
+            <a:schemeClr val="accent1">
+              <a:shade val="50000"/>
+            </a:schemeClr>
+          </a:lnRef>
+          <a:fillRef idx="1">
+            <a:schemeClr val="accent1"/>
+          </a:fillRef>
+          <a:effectRef idx="0">
+            <a:schemeClr val="accent1"/>
+          </a:effectRef>
+          <a:fontRef idx="minor">
+            <a:schemeClr val="lt1"/>
+          </a:fontRef>
+        </p:style>
+        <p:txBody>
+          <a:bodyPr rtlCol="0" anchor="ctr"/>
+          <a:lstStyle/>
+          <a:p>
+            <a:pPr algn="ctr"/>
+            <a:endParaRPr lang="fr-FR"/>
+          </a:p>
+        </p:txBody>
+      </p:sp>
     </p:spTree>
     <p:extLst>
       <p:ext uri="{BB962C8B-B14F-4D97-AF65-F5344CB8AC3E}">
@@ -48490,13 +48913,13 @@
   <p:clrMapOvr>
     <a:masterClrMapping/>
   </p:clrMapOvr>
-  <mc:AlternateContent xmlns:mc="http://schemas.openxmlformats.org/markup-compatibility/2006">
-    <mc:Choice xmlns:p14="http://schemas.microsoft.com/office/powerpoint/2010/main" Requires="p14">
+  <mc:AlternateContent xmlns:mc="http://schemas.openxmlformats.org/markup-compatibility/2006" xmlns:p14="http://schemas.microsoft.com/office/powerpoint/2010/main">
+    <mc:Choice Requires="p14">
       <p:transition spd="med" p14:dur="700">
         <p:fade/>
       </p:transition>
     </mc:Choice>
-    <mc:Fallback>
+    <mc:Fallback xmlns="">
       <p:transition spd="med">
         <p:fade/>
       </p:transition>
@@ -48510,7 +48933,13 @@
   <p:cSld>
     <p:spTree>
       <p:nvGrpSpPr>
-        <p:cNvPr id="1" name=""/>
+        <p:cNvPr id="1" name="">
+          <a:extLst>
+            <a:ext uri="{FF2B5EF4-FFF2-40B4-BE49-F238E27FC236}">
+              <a16:creationId xmlns:a16="http://schemas.microsoft.com/office/drawing/2014/main" id="{3755C545-0934-CC13-FB4D-E7BBD1D80ED1}"/>
+            </a:ext>
+          </a:extLst>
+        </p:cNvPr>
         <p:cNvGrpSpPr/>
         <p:nvPr/>
       </p:nvGrpSpPr>
@@ -48522,10 +48951,262 @@
           <a:chExt cx="0" cy="0"/>
         </a:xfrm>
       </p:grpSpPr>
+      <p:sp>
+        <p:nvSpPr>
+          <p:cNvPr id="2" name="Titre 1">
+            <a:extLst>
+              <a:ext uri="{FF2B5EF4-FFF2-40B4-BE49-F238E27FC236}">
+                <a16:creationId xmlns:a16="http://schemas.microsoft.com/office/drawing/2014/main" id="{5B09FCDA-E48F-D2A9-B927-B7D7A4B03154}"/>
+              </a:ext>
+            </a:extLst>
+          </p:cNvPr>
+          <p:cNvSpPr>
+            <a:spLocks noGrp="1"/>
+          </p:cNvSpPr>
+          <p:nvPr>
+            <p:ph type="title"/>
+          </p:nvPr>
+        </p:nvSpPr>
+        <p:spPr/>
+        <p:txBody>
+          <a:bodyPr/>
+          <a:lstStyle/>
+          <a:p>
+            <a:r>
+              <a:rPr lang="en-US" dirty="0"/>
+              <a:t>📖 Let’s the story begin – Round n°6</a:t>
+            </a:r>
+          </a:p>
+        </p:txBody>
+      </p:sp>
+      <p:pic>
+        <p:nvPicPr>
+          <p:cNvPr id="5" name="Picture 4">
+            <a:extLst>
+              <a:ext uri="{FF2B5EF4-FFF2-40B4-BE49-F238E27FC236}">
+                <a16:creationId xmlns:a16="http://schemas.microsoft.com/office/drawing/2014/main" id="{7580EC70-E5DC-BD03-7AAC-61D4590B2495}"/>
+              </a:ext>
+            </a:extLst>
+          </p:cNvPr>
+          <p:cNvPicPr>
+            <a:picLocks noChangeAspect="1"/>
+          </p:cNvPicPr>
+          <p:nvPr/>
+        </p:nvPicPr>
+        <p:blipFill>
+          <a:blip r:embed="rId2"/>
+          <a:stretch>
+            <a:fillRect/>
+          </a:stretch>
+        </p:blipFill>
+        <p:spPr>
+          <a:xfrm>
+            <a:off x="3643430" y="3763926"/>
+            <a:ext cx="8431559" cy="3056860"/>
+          </a:xfrm>
+          <a:prstGeom prst="rect">
+            <a:avLst/>
+          </a:prstGeom>
+          <a:effectLst>
+            <a:outerShdw blurRad="50800" dist="38100" dir="2700000" algn="tl" rotWithShape="0">
+              <a:prstClr val="black">
+                <a:alpha val="40000"/>
+              </a:prstClr>
+            </a:outerShdw>
+          </a:effectLst>
+        </p:spPr>
+      </p:pic>
+      <p:pic>
+        <p:nvPicPr>
+          <p:cNvPr id="9" name="Picture 8">
+            <a:extLst>
+              <a:ext uri="{FF2B5EF4-FFF2-40B4-BE49-F238E27FC236}">
+                <a16:creationId xmlns:a16="http://schemas.microsoft.com/office/drawing/2014/main" id="{DF5BA790-A478-9E59-5252-277F6D7E87F2}"/>
+              </a:ext>
+            </a:extLst>
+          </p:cNvPr>
+          <p:cNvPicPr>
+            <a:picLocks noChangeAspect="1"/>
+          </p:cNvPicPr>
+          <p:nvPr/>
+        </p:nvPicPr>
+        <p:blipFill>
+          <a:blip r:embed="rId3"/>
+          <a:stretch>
+            <a:fillRect/>
+          </a:stretch>
+        </p:blipFill>
+        <p:spPr>
+          <a:xfrm>
+            <a:off x="131520" y="927085"/>
+            <a:ext cx="6594481" cy="2741147"/>
+          </a:xfrm>
+          <a:prstGeom prst="rect">
+            <a:avLst/>
+          </a:prstGeom>
+          <a:effectLst>
+            <a:outerShdw blurRad="50800" dist="38100" dir="2700000" algn="tl" rotWithShape="0">
+              <a:prstClr val="black">
+                <a:alpha val="40000"/>
+              </a:prstClr>
+            </a:outerShdw>
+          </a:effectLst>
+        </p:spPr>
+      </p:pic>
     </p:spTree>
     <p:extLst>
       <p:ext uri="{BB962C8B-B14F-4D97-AF65-F5344CB8AC3E}">
-        <p14:creationId xmlns:p14="http://schemas.microsoft.com/office/powerpoint/2010/main" val="3277138299"/>
+        <p14:creationId xmlns:p14="http://schemas.microsoft.com/office/powerpoint/2010/main" val="2209675377"/>
+      </p:ext>
+    </p:extLst>
+  </p:cSld>
+  <p:clrMapOvr>
+    <a:masterClrMapping/>
+  </p:clrMapOvr>
+  <mc:AlternateContent xmlns:mc="http://schemas.openxmlformats.org/markup-compatibility/2006" xmlns:p14="http://schemas.microsoft.com/office/powerpoint/2010/main">
+    <mc:Choice Requires="p14">
+      <p:transition spd="med" p14:dur="700">
+        <p:fade/>
+      </p:transition>
+    </mc:Choice>
+    <mc:Fallback xmlns="">
+      <p:transition spd="med">
+        <p:fade/>
+      </p:transition>
+    </mc:Fallback>
+  </mc:AlternateContent>
+</p:sld>
+</file>
+
+<file path=ppt/slides/slide29.xml><?xml version="1.0" encoding="utf-8"?>
+<p:sld xmlns:a="http://schemas.openxmlformats.org/drawingml/2006/main" xmlns:r="http://schemas.openxmlformats.org/officeDocument/2006/relationships" xmlns:p="http://schemas.openxmlformats.org/presentationml/2006/main">
+  <p:cSld>
+    <p:spTree>
+      <p:nvGrpSpPr>
+        <p:cNvPr id="1" name="">
+          <a:extLst>
+            <a:ext uri="{FF2B5EF4-FFF2-40B4-BE49-F238E27FC236}">
+              <a16:creationId xmlns:a16="http://schemas.microsoft.com/office/drawing/2014/main" id="{AEE5EF1A-57B2-8E2B-1523-E632B74F1E8F}"/>
+            </a:ext>
+          </a:extLst>
+        </p:cNvPr>
+        <p:cNvGrpSpPr/>
+        <p:nvPr/>
+      </p:nvGrpSpPr>
+      <p:grpSpPr>
+        <a:xfrm>
+          <a:off x="0" y="0"/>
+          <a:ext cx="0" cy="0"/>
+          <a:chOff x="0" y="0"/>
+          <a:chExt cx="0" cy="0"/>
+        </a:xfrm>
+      </p:grpSpPr>
+      <p:sp>
+        <p:nvSpPr>
+          <p:cNvPr id="2" name="Titre 1">
+            <a:extLst>
+              <a:ext uri="{FF2B5EF4-FFF2-40B4-BE49-F238E27FC236}">
+                <a16:creationId xmlns:a16="http://schemas.microsoft.com/office/drawing/2014/main" id="{B6041EF8-0C4D-94FB-F2DC-A4618BD039B3}"/>
+              </a:ext>
+            </a:extLst>
+          </p:cNvPr>
+          <p:cNvSpPr>
+            <a:spLocks noGrp="1"/>
+          </p:cNvSpPr>
+          <p:nvPr>
+            <p:ph type="title"/>
+          </p:nvPr>
+        </p:nvSpPr>
+        <p:spPr/>
+        <p:txBody>
+          <a:bodyPr/>
+          <a:lstStyle/>
+          <a:p>
+            <a:r>
+              <a:rPr lang="en-US" dirty="0"/>
+              <a:t>📖 Let’s the story begin – Round n°6</a:t>
+            </a:r>
+          </a:p>
+        </p:txBody>
+      </p:sp>
+      <p:pic>
+        <p:nvPicPr>
+          <p:cNvPr id="4" name="Picture 3">
+            <a:extLst>
+              <a:ext uri="{FF2B5EF4-FFF2-40B4-BE49-F238E27FC236}">
+                <a16:creationId xmlns:a16="http://schemas.microsoft.com/office/drawing/2014/main" id="{4A9FB248-C4F7-C526-7156-99FBE75905B9}"/>
+              </a:ext>
+            </a:extLst>
+          </p:cNvPr>
+          <p:cNvPicPr>
+            <a:picLocks noChangeAspect="1"/>
+          </p:cNvPicPr>
+          <p:nvPr/>
+        </p:nvPicPr>
+        <p:blipFill>
+          <a:blip r:embed="rId2"/>
+          <a:stretch>
+            <a:fillRect/>
+          </a:stretch>
+        </p:blipFill>
+        <p:spPr>
+          <a:xfrm>
+            <a:off x="134774" y="2156161"/>
+            <a:ext cx="10773285" cy="3386209"/>
+          </a:xfrm>
+          <a:prstGeom prst="rect">
+            <a:avLst/>
+          </a:prstGeom>
+          <a:effectLst>
+            <a:outerShdw blurRad="50800" dist="38100" dir="2700000" algn="tl" rotWithShape="0">
+              <a:prstClr val="black">
+                <a:alpha val="40000"/>
+              </a:prstClr>
+            </a:outerShdw>
+          </a:effectLst>
+        </p:spPr>
+      </p:pic>
+      <p:pic>
+        <p:nvPicPr>
+          <p:cNvPr id="7" name="Picture 6">
+            <a:extLst>
+              <a:ext uri="{FF2B5EF4-FFF2-40B4-BE49-F238E27FC236}">
+                <a16:creationId xmlns:a16="http://schemas.microsoft.com/office/drawing/2014/main" id="{B2BC0267-92B8-9376-BAF7-8D773C495E70}"/>
+              </a:ext>
+            </a:extLst>
+          </p:cNvPr>
+          <p:cNvPicPr>
+            <a:picLocks noChangeAspect="1"/>
+          </p:cNvPicPr>
+          <p:nvPr/>
+        </p:nvPicPr>
+        <p:blipFill>
+          <a:blip r:embed="rId3"/>
+          <a:stretch>
+            <a:fillRect/>
+          </a:stretch>
+        </p:blipFill>
+        <p:spPr>
+          <a:xfrm>
+            <a:off x="134774" y="946297"/>
+            <a:ext cx="8546800" cy="744279"/>
+          </a:xfrm>
+          <a:prstGeom prst="rect">
+            <a:avLst/>
+          </a:prstGeom>
+          <a:effectLst>
+            <a:outerShdw blurRad="50800" dist="38100" dir="2700000" algn="tl" rotWithShape="0">
+              <a:prstClr val="black">
+                <a:alpha val="40000"/>
+              </a:prstClr>
+            </a:outerShdw>
+          </a:effectLst>
+        </p:spPr>
+      </p:pic>
+    </p:spTree>
+    <p:extLst>
+      <p:ext uri="{BB962C8B-B14F-4D97-AF65-F5344CB8AC3E}">
+        <p14:creationId xmlns:p14="http://schemas.microsoft.com/office/powerpoint/2010/main" val="2163192230"/>
       </p:ext>
     </p:extLst>
   </p:cSld>
@@ -48714,6 +49395,614 @@
     <p:extLst>
       <p:ext uri="{BB962C8B-B14F-4D97-AF65-F5344CB8AC3E}">
         <p14:creationId xmlns:p14="http://schemas.microsoft.com/office/powerpoint/2010/main" val="1700977977"/>
+      </p:ext>
+    </p:extLst>
+  </p:cSld>
+  <p:clrMapOvr>
+    <a:masterClrMapping/>
+  </p:clrMapOvr>
+  <mc:AlternateContent xmlns:mc="http://schemas.openxmlformats.org/markup-compatibility/2006" xmlns:p14="http://schemas.microsoft.com/office/powerpoint/2010/main">
+    <mc:Choice Requires="p14">
+      <p:transition spd="med" p14:dur="700">
+        <p:fade/>
+      </p:transition>
+    </mc:Choice>
+    <mc:Fallback xmlns="">
+      <p:transition spd="med">
+        <p:fade/>
+      </p:transition>
+    </mc:Fallback>
+  </mc:AlternateContent>
+</p:sld>
+</file>
+
+<file path=ppt/slides/slide30.xml><?xml version="1.0" encoding="utf-8"?>
+<p:sld xmlns:a="http://schemas.openxmlformats.org/drawingml/2006/main" xmlns:r="http://schemas.openxmlformats.org/officeDocument/2006/relationships" xmlns:p="http://schemas.openxmlformats.org/presentationml/2006/main">
+  <p:cSld>
+    <p:spTree>
+      <p:nvGrpSpPr>
+        <p:cNvPr id="1" name="">
+          <a:extLst>
+            <a:ext uri="{FF2B5EF4-FFF2-40B4-BE49-F238E27FC236}">
+              <a16:creationId xmlns:a16="http://schemas.microsoft.com/office/drawing/2014/main" id="{10E758B0-D4D2-F590-CC23-528FCCC33C4B}"/>
+            </a:ext>
+          </a:extLst>
+        </p:cNvPr>
+        <p:cNvGrpSpPr/>
+        <p:nvPr/>
+      </p:nvGrpSpPr>
+      <p:grpSpPr>
+        <a:xfrm>
+          <a:off x="0" y="0"/>
+          <a:ext cx="0" cy="0"/>
+          <a:chOff x="0" y="0"/>
+          <a:chExt cx="0" cy="0"/>
+        </a:xfrm>
+      </p:grpSpPr>
+      <p:sp>
+        <p:nvSpPr>
+          <p:cNvPr id="2" name="Titre 1">
+            <a:extLst>
+              <a:ext uri="{FF2B5EF4-FFF2-40B4-BE49-F238E27FC236}">
+                <a16:creationId xmlns:a16="http://schemas.microsoft.com/office/drawing/2014/main" id="{CD2756DE-81FF-0B4A-F059-A06C9ACD2CB4}"/>
+              </a:ext>
+            </a:extLst>
+          </p:cNvPr>
+          <p:cNvSpPr>
+            <a:spLocks noGrp="1"/>
+          </p:cNvSpPr>
+          <p:nvPr>
+            <p:ph type="title"/>
+          </p:nvPr>
+        </p:nvSpPr>
+        <p:spPr/>
+        <p:txBody>
+          <a:bodyPr/>
+          <a:lstStyle/>
+          <a:p>
+            <a:r>
+              <a:rPr lang="en-US" dirty="0"/>
+              <a:t>📖 Let’s the story begin – Round n°6</a:t>
+            </a:r>
+          </a:p>
+        </p:txBody>
+      </p:sp>
+      <p:sp>
+        <p:nvSpPr>
+          <p:cNvPr id="3" name="Espace réservé du texte 2">
+            <a:extLst>
+              <a:ext uri="{FF2B5EF4-FFF2-40B4-BE49-F238E27FC236}">
+                <a16:creationId xmlns:a16="http://schemas.microsoft.com/office/drawing/2014/main" id="{ADE63D71-25FB-998D-9333-7E6F3F474244}"/>
+              </a:ext>
+            </a:extLst>
+          </p:cNvPr>
+          <p:cNvSpPr>
+            <a:spLocks noGrp="1"/>
+          </p:cNvSpPr>
+          <p:nvPr>
+            <p:ph type="body" sz="quarter" idx="15"/>
+          </p:nvPr>
+        </p:nvSpPr>
+        <p:spPr>
+          <a:xfrm>
+            <a:off x="588000" y="977317"/>
+            <a:ext cx="11419970" cy="4949030"/>
+          </a:xfrm>
+        </p:spPr>
+        <p:txBody>
+          <a:bodyPr/>
+          <a:lstStyle/>
+          <a:p>
+            <a:r>
+              <a:rPr lang="en-US" sz="2800" b="0" dirty="0">
+                <a:solidFill>
+                  <a:schemeClr val="tx2"/>
+                </a:solidFill>
+              </a:rPr>
+              <a:t> The goal was to test if the service ensure that the provided PDF file do not contain any “hidden content”.</a:t>
+            </a:r>
+          </a:p>
+          <a:p>
+            <a:pPr marL="0" indent="0">
+              <a:buNone/>
+            </a:pPr>
+            <a:endParaRPr lang="en-US" sz="2800" b="0" dirty="0">
+              <a:solidFill>
+                <a:schemeClr val="tx2"/>
+              </a:solidFill>
+            </a:endParaRPr>
+          </a:p>
+          <a:p>
+            <a:r>
+              <a:rPr lang="en-US" sz="2800" b="0" dirty="0">
+                <a:solidFill>
+                  <a:schemeClr val="tx2"/>
+                </a:solidFill>
+              </a:rPr>
+              <a:t> Such technique can be used to leverage service as a relay to store malicious into the company information system and then retrieve the malicious file, once inside, the carry an attack in a second phase.</a:t>
+            </a:r>
+          </a:p>
+          <a:p>
+            <a:pPr marL="0" indent="0">
+              <a:buNone/>
+            </a:pPr>
+            <a:endParaRPr lang="en-US" sz="2800" b="0" dirty="0">
+              <a:solidFill>
+                <a:schemeClr val="tx2"/>
+              </a:solidFill>
+            </a:endParaRPr>
+          </a:p>
+        </p:txBody>
+      </p:sp>
+      <p:pic>
+        <p:nvPicPr>
+          <p:cNvPr id="10" name="Picture 9">
+            <a:extLst>
+              <a:ext uri="{FF2B5EF4-FFF2-40B4-BE49-F238E27FC236}">
+                <a16:creationId xmlns:a16="http://schemas.microsoft.com/office/drawing/2014/main" id="{725A494E-EB8B-111F-7855-2CCD852CD0DF}"/>
+              </a:ext>
+            </a:extLst>
+          </p:cNvPr>
+          <p:cNvPicPr>
+            <a:picLocks noChangeAspect="1"/>
+          </p:cNvPicPr>
+          <p:nvPr/>
+        </p:nvPicPr>
+        <p:blipFill>
+          <a:blip r:embed="rId2"/>
+          <a:stretch>
+            <a:fillRect/>
+          </a:stretch>
+        </p:blipFill>
+        <p:spPr>
+          <a:xfrm>
+            <a:off x="588000" y="5094069"/>
+            <a:ext cx="11060513" cy="573083"/>
+          </a:xfrm>
+          <a:prstGeom prst="rect">
+            <a:avLst/>
+          </a:prstGeom>
+          <a:effectLst>
+            <a:outerShdw blurRad="50800" dist="38100" dir="2700000" algn="tl" rotWithShape="0">
+              <a:prstClr val="black">
+                <a:alpha val="40000"/>
+              </a:prstClr>
+            </a:outerShdw>
+          </a:effectLst>
+        </p:spPr>
+      </p:pic>
+    </p:spTree>
+    <p:extLst>
+      <p:ext uri="{BB962C8B-B14F-4D97-AF65-F5344CB8AC3E}">
+        <p14:creationId xmlns:p14="http://schemas.microsoft.com/office/powerpoint/2010/main" val="3966777535"/>
+      </p:ext>
+    </p:extLst>
+  </p:cSld>
+  <p:clrMapOvr>
+    <a:masterClrMapping/>
+  </p:clrMapOvr>
+  <mc:AlternateContent xmlns:mc="http://schemas.openxmlformats.org/markup-compatibility/2006" xmlns:p14="http://schemas.microsoft.com/office/powerpoint/2010/main">
+    <mc:Choice Requires="p14">
+      <p:transition spd="med" p14:dur="700">
+        <p:fade/>
+      </p:transition>
+    </mc:Choice>
+    <mc:Fallback xmlns="">
+      <p:transition spd="med">
+        <p:fade/>
+      </p:transition>
+    </mc:Fallback>
+  </mc:AlternateContent>
+</p:sld>
+</file>
+
+<file path=ppt/slides/slide31.xml><?xml version="1.0" encoding="utf-8"?>
+<p:sld xmlns:a="http://schemas.openxmlformats.org/drawingml/2006/main" xmlns:r="http://schemas.openxmlformats.org/officeDocument/2006/relationships" xmlns:p="http://schemas.openxmlformats.org/presentationml/2006/main">
+  <p:cSld>
+    <p:spTree>
+      <p:nvGrpSpPr>
+        <p:cNvPr id="1" name="">
+          <a:extLst>
+            <a:ext uri="{FF2B5EF4-FFF2-40B4-BE49-F238E27FC236}">
+              <a16:creationId xmlns:a16="http://schemas.microsoft.com/office/drawing/2014/main" id="{AC5BF3BB-F1F4-8E04-DC48-93790D11F264}"/>
+            </a:ext>
+          </a:extLst>
+        </p:cNvPr>
+        <p:cNvGrpSpPr/>
+        <p:nvPr/>
+      </p:nvGrpSpPr>
+      <p:grpSpPr>
+        <a:xfrm>
+          <a:off x="0" y="0"/>
+          <a:ext cx="0" cy="0"/>
+          <a:chOff x="0" y="0"/>
+          <a:chExt cx="0" cy="0"/>
+        </a:xfrm>
+      </p:grpSpPr>
+      <p:sp>
+        <p:nvSpPr>
+          <p:cNvPr id="2" name="Titre 1">
+            <a:extLst>
+              <a:ext uri="{FF2B5EF4-FFF2-40B4-BE49-F238E27FC236}">
+                <a16:creationId xmlns:a16="http://schemas.microsoft.com/office/drawing/2014/main" id="{61F534F7-7EB6-BD99-0561-2DB58B39C6E1}"/>
+              </a:ext>
+            </a:extLst>
+          </p:cNvPr>
+          <p:cNvSpPr>
+            <a:spLocks noGrp="1"/>
+          </p:cNvSpPr>
+          <p:nvPr>
+            <p:ph type="title"/>
+          </p:nvPr>
+        </p:nvSpPr>
+        <p:spPr/>
+        <p:txBody>
+          <a:bodyPr/>
+          <a:lstStyle/>
+          <a:p>
+            <a:r>
+              <a:rPr lang="en-US" dirty="0"/>
+              <a:t>📖 Let’s the story begin – Round n°6</a:t>
+            </a:r>
+          </a:p>
+        </p:txBody>
+      </p:sp>
+      <p:sp>
+        <p:nvSpPr>
+          <p:cNvPr id="3" name="Espace réservé du texte 2">
+            <a:extLst>
+              <a:ext uri="{FF2B5EF4-FFF2-40B4-BE49-F238E27FC236}">
+                <a16:creationId xmlns:a16="http://schemas.microsoft.com/office/drawing/2014/main" id="{4E0F90F3-7544-C418-90D2-046A579AEC6B}"/>
+              </a:ext>
+            </a:extLst>
+          </p:cNvPr>
+          <p:cNvSpPr>
+            <a:spLocks noGrp="1"/>
+          </p:cNvSpPr>
+          <p:nvPr>
+            <p:ph type="body" sz="quarter" idx="15"/>
+          </p:nvPr>
+        </p:nvSpPr>
+        <p:spPr>
+          <a:xfrm>
+            <a:off x="588000" y="977317"/>
+            <a:ext cx="11419970" cy="4949030"/>
+          </a:xfrm>
+        </p:spPr>
+        <p:txBody>
+          <a:bodyPr/>
+          <a:lstStyle/>
+          <a:p>
+            <a:r>
+              <a:rPr lang="en-US" sz="2800" b="0" dirty="0">
+                <a:solidFill>
+                  <a:schemeClr val="tx2"/>
+                </a:solidFill>
+              </a:rPr>
+              <a:t>  🤔 Test failed so the following additional validation was proposed to the team:</a:t>
+            </a:r>
+          </a:p>
+          <a:p>
+            <a:pPr lvl="1"/>
+            <a:r>
+              <a:rPr lang="en-US" sz="2400" dirty="0"/>
+              <a:t>Load the PDF file in memory with a PDF parser and then, save it via the PDF library into another byte buffer to remove any additional content that is not part of the PDF structure.</a:t>
+            </a:r>
+          </a:p>
+          <a:p>
+            <a:pPr marL="0" indent="0">
+              <a:buNone/>
+            </a:pPr>
+            <a:endParaRPr lang="en-US" sz="2800" b="0" dirty="0">
+              <a:solidFill>
+                <a:schemeClr val="tx2"/>
+              </a:solidFill>
+            </a:endParaRPr>
+          </a:p>
+          <a:p>
+            <a:pPr marL="0" indent="0">
+              <a:buNone/>
+            </a:pPr>
+            <a:r>
+              <a:rPr lang="en-US" sz="2800" b="0" dirty="0">
+                <a:solidFill>
+                  <a:schemeClr val="tx2"/>
+                </a:solidFill>
+              </a:rPr>
+              <a:t>  </a:t>
+            </a:r>
+          </a:p>
+        </p:txBody>
+      </p:sp>
+      <p:sp>
+        <p:nvSpPr>
+          <p:cNvPr id="7" name="TextBox 6">
+            <a:extLst>
+              <a:ext uri="{FF2B5EF4-FFF2-40B4-BE49-F238E27FC236}">
+                <a16:creationId xmlns:a16="http://schemas.microsoft.com/office/drawing/2014/main" id="{282F7DF4-9D6F-8286-D290-A040B93FEFAB}"/>
+              </a:ext>
+            </a:extLst>
+          </p:cNvPr>
+          <p:cNvSpPr txBox="1"/>
+          <p:nvPr/>
+        </p:nvSpPr>
+        <p:spPr>
+          <a:xfrm>
+            <a:off x="8967059" y="113779"/>
+            <a:ext cx="3040911" cy="246221"/>
+          </a:xfrm>
+          <a:prstGeom prst="rect">
+            <a:avLst/>
+          </a:prstGeom>
+          <a:noFill/>
+        </p:spPr>
+        <p:txBody>
+          <a:bodyPr wrap="square" lIns="0" tIns="0" rIns="0" bIns="0" rtlCol="0">
+            <a:spAutoFit/>
+          </a:bodyPr>
+          <a:lstStyle/>
+          <a:p>
+            <a:pPr algn="l"/>
+            <a:r>
+              <a:rPr lang="en-US" sz="1600" noProof="0" dirty="0">
+                <a:solidFill>
+                  <a:srgbClr val="C00000"/>
+                </a:solidFill>
+              </a:rPr>
+              <a:t>🤬 Level of exasperation: 96%</a:t>
+            </a:r>
+          </a:p>
+        </p:txBody>
+      </p:sp>
+    </p:spTree>
+    <p:extLst>
+      <p:ext uri="{BB962C8B-B14F-4D97-AF65-F5344CB8AC3E}">
+        <p14:creationId xmlns:p14="http://schemas.microsoft.com/office/powerpoint/2010/main" val="1987946601"/>
+      </p:ext>
+    </p:extLst>
+  </p:cSld>
+  <p:clrMapOvr>
+    <a:masterClrMapping/>
+  </p:clrMapOvr>
+  <mc:AlternateContent xmlns:mc="http://schemas.openxmlformats.org/markup-compatibility/2006" xmlns:p14="http://schemas.microsoft.com/office/powerpoint/2010/main">
+    <mc:Choice Requires="p14">
+      <p:transition spd="med" p14:dur="700">
+        <p:fade/>
+      </p:transition>
+    </mc:Choice>
+    <mc:Fallback xmlns="">
+      <p:transition spd="med">
+        <p:fade/>
+      </p:transition>
+    </mc:Fallback>
+  </mc:AlternateContent>
+</p:sld>
+</file>
+
+<file path=ppt/slides/slide32.xml><?xml version="1.0" encoding="utf-8"?>
+<p:sld xmlns:a="http://schemas.openxmlformats.org/drawingml/2006/main" xmlns:r="http://schemas.openxmlformats.org/officeDocument/2006/relationships" xmlns:p="http://schemas.openxmlformats.org/presentationml/2006/main">
+  <p:cSld>
+    <p:spTree>
+      <p:nvGrpSpPr>
+        <p:cNvPr id="1" name="">
+          <a:extLst>
+            <a:ext uri="{FF2B5EF4-FFF2-40B4-BE49-F238E27FC236}">
+              <a16:creationId xmlns:a16="http://schemas.microsoft.com/office/drawing/2014/main" id="{6C81B662-827E-673B-C37F-BDDBA873FDF8}"/>
+            </a:ext>
+          </a:extLst>
+        </p:cNvPr>
+        <p:cNvGrpSpPr/>
+        <p:nvPr/>
+      </p:nvGrpSpPr>
+      <p:grpSpPr>
+        <a:xfrm>
+          <a:off x="0" y="0"/>
+          <a:ext cx="0" cy="0"/>
+          <a:chOff x="0" y="0"/>
+          <a:chExt cx="0" cy="0"/>
+        </a:xfrm>
+      </p:grpSpPr>
+      <p:sp>
+        <p:nvSpPr>
+          <p:cNvPr id="2" name="Titre 1">
+            <a:extLst>
+              <a:ext uri="{FF2B5EF4-FFF2-40B4-BE49-F238E27FC236}">
+                <a16:creationId xmlns:a16="http://schemas.microsoft.com/office/drawing/2014/main" id="{D4364BF5-2AAB-E072-15D0-CBDC9202657D}"/>
+              </a:ext>
+            </a:extLst>
+          </p:cNvPr>
+          <p:cNvSpPr>
+            <a:spLocks noGrp="1"/>
+          </p:cNvSpPr>
+          <p:nvPr>
+            <p:ph type="title"/>
+          </p:nvPr>
+        </p:nvSpPr>
+        <p:spPr/>
+        <p:txBody>
+          <a:bodyPr/>
+          <a:lstStyle/>
+          <a:p>
+            <a:r>
+              <a:rPr lang="en-US" dirty="0"/>
+              <a:t>📖 Let’s the story begin – Round n°6</a:t>
+            </a:r>
+          </a:p>
+        </p:txBody>
+      </p:sp>
+      <p:sp>
+        <p:nvSpPr>
+          <p:cNvPr id="3" name="Espace réservé du texte 2">
+            <a:extLst>
+              <a:ext uri="{FF2B5EF4-FFF2-40B4-BE49-F238E27FC236}">
+                <a16:creationId xmlns:a16="http://schemas.microsoft.com/office/drawing/2014/main" id="{E57E7D38-3558-049A-380D-1044EA6C69AF}"/>
+              </a:ext>
+            </a:extLst>
+          </p:cNvPr>
+          <p:cNvSpPr>
+            <a:spLocks noGrp="1"/>
+          </p:cNvSpPr>
+          <p:nvPr>
+            <p:ph type="body" sz="quarter" idx="15"/>
+          </p:nvPr>
+        </p:nvSpPr>
+        <p:spPr>
+          <a:xfrm>
+            <a:off x="588000" y="977317"/>
+            <a:ext cx="11419970" cy="4949030"/>
+          </a:xfrm>
+        </p:spPr>
+        <p:txBody>
+          <a:bodyPr/>
+          <a:lstStyle/>
+          <a:p>
+            <a:r>
+              <a:rPr lang="en-US" sz="2800" b="0" dirty="0">
+                <a:solidFill>
+                  <a:schemeClr val="tx2"/>
+                </a:solidFill>
+              </a:rPr>
+              <a:t> ✅ Test passed after the adding of the additional validation:</a:t>
+            </a:r>
+          </a:p>
+          <a:p>
+            <a:endParaRPr lang="en-US" sz="2800" b="0" dirty="0">
+              <a:solidFill>
+                <a:schemeClr val="tx2"/>
+              </a:solidFill>
+            </a:endParaRPr>
+          </a:p>
+          <a:p>
+            <a:pPr marL="0" indent="0">
+              <a:buNone/>
+            </a:pPr>
+            <a:r>
+              <a:rPr lang="en-US" sz="2800" b="0" dirty="0">
+                <a:solidFill>
+                  <a:schemeClr val="tx2"/>
+                </a:solidFill>
+              </a:rPr>
+              <a:t>  </a:t>
+            </a:r>
+          </a:p>
+        </p:txBody>
+      </p:sp>
+      <p:sp>
+        <p:nvSpPr>
+          <p:cNvPr id="7" name="TextBox 6">
+            <a:extLst>
+              <a:ext uri="{FF2B5EF4-FFF2-40B4-BE49-F238E27FC236}">
+                <a16:creationId xmlns:a16="http://schemas.microsoft.com/office/drawing/2014/main" id="{67C8EA75-CBF8-C05D-7AB7-5D4AF69E860E}"/>
+              </a:ext>
+            </a:extLst>
+          </p:cNvPr>
+          <p:cNvSpPr txBox="1"/>
+          <p:nvPr/>
+        </p:nvSpPr>
+        <p:spPr>
+          <a:xfrm>
+            <a:off x="8967059" y="113779"/>
+            <a:ext cx="3040911" cy="246221"/>
+          </a:xfrm>
+          <a:prstGeom prst="rect">
+            <a:avLst/>
+          </a:prstGeom>
+          <a:noFill/>
+        </p:spPr>
+        <p:txBody>
+          <a:bodyPr wrap="square" lIns="0" tIns="0" rIns="0" bIns="0" rtlCol="0">
+            <a:spAutoFit/>
+          </a:bodyPr>
+          <a:lstStyle/>
+          <a:p>
+            <a:pPr algn="l"/>
+            <a:r>
+              <a:rPr lang="en-US" sz="1600" noProof="0" dirty="0">
+                <a:solidFill>
+                  <a:srgbClr val="C00000"/>
+                </a:solidFill>
+              </a:rPr>
+              <a:t>🤬 Level of exasperation: 96%</a:t>
+            </a:r>
+          </a:p>
+        </p:txBody>
+      </p:sp>
+      <p:pic>
+        <p:nvPicPr>
+          <p:cNvPr id="5" name="Picture 4">
+            <a:extLst>
+              <a:ext uri="{FF2B5EF4-FFF2-40B4-BE49-F238E27FC236}">
+                <a16:creationId xmlns:a16="http://schemas.microsoft.com/office/drawing/2014/main" id="{7044B40C-F9A7-7634-524E-19B743E3A059}"/>
+              </a:ext>
+            </a:extLst>
+          </p:cNvPr>
+          <p:cNvPicPr>
+            <a:picLocks noChangeAspect="1"/>
+          </p:cNvPicPr>
+          <p:nvPr/>
+        </p:nvPicPr>
+        <p:blipFill>
+          <a:blip r:embed="rId2"/>
+          <a:stretch>
+            <a:fillRect/>
+          </a:stretch>
+        </p:blipFill>
+        <p:spPr>
+          <a:xfrm>
+            <a:off x="251597" y="1914313"/>
+            <a:ext cx="11688806" cy="3029373"/>
+          </a:xfrm>
+          <a:prstGeom prst="rect">
+            <a:avLst/>
+          </a:prstGeom>
+        </p:spPr>
+      </p:pic>
+    </p:spTree>
+    <p:extLst>
+      <p:ext uri="{BB962C8B-B14F-4D97-AF65-F5344CB8AC3E}">
+        <p14:creationId xmlns:p14="http://schemas.microsoft.com/office/powerpoint/2010/main" val="261788013"/>
+      </p:ext>
+    </p:extLst>
+  </p:cSld>
+  <p:clrMapOvr>
+    <a:masterClrMapping/>
+  </p:clrMapOvr>
+  <mc:AlternateContent xmlns:mc="http://schemas.openxmlformats.org/markup-compatibility/2006" xmlns:p14="http://schemas.microsoft.com/office/powerpoint/2010/main">
+    <mc:Choice Requires="p14">
+      <p:transition spd="med" p14:dur="700">
+        <p:fade/>
+      </p:transition>
+    </mc:Choice>
+    <mc:Fallback xmlns="">
+      <p:transition spd="med">
+        <p:fade/>
+      </p:transition>
+    </mc:Fallback>
+  </mc:AlternateContent>
+</p:sld>
+</file>
+
+<file path=ppt/slides/slide33.xml><?xml version="1.0" encoding="utf-8"?>
+<p:sld xmlns:a="http://schemas.openxmlformats.org/drawingml/2006/main" xmlns:r="http://schemas.openxmlformats.org/officeDocument/2006/relationships" xmlns:p="http://schemas.openxmlformats.org/presentationml/2006/main">
+  <p:cSld>
+    <p:spTree>
+      <p:nvGrpSpPr>
+        <p:cNvPr id="1" name=""/>
+        <p:cNvGrpSpPr/>
+        <p:nvPr/>
+      </p:nvGrpSpPr>
+      <p:grpSpPr>
+        <a:xfrm>
+          <a:off x="0" y="0"/>
+          <a:ext cx="0" cy="0"/>
+          <a:chOff x="0" y="0"/>
+          <a:chExt cx="0" cy="0"/>
+        </a:xfrm>
+      </p:grpSpPr>
+    </p:spTree>
+    <p:extLst>
+      <p:ext uri="{BB962C8B-B14F-4D97-AF65-F5344CB8AC3E}">
+        <p14:creationId xmlns:p14="http://schemas.microsoft.com/office/powerpoint/2010/main" val="3277138299"/>
       </p:ext>
     </p:extLst>
   </p:cSld>

--- a/presentation.pptx
+++ b/presentation.pptx
@@ -5,7 +5,7 @@
     <p:sldMasterId id="2147483660" r:id="rId1"/>
   </p:sldMasterIdLst>
   <p:notesMasterIdLst>
-    <p:notesMasterId r:id="rId35"/>
+    <p:notesMasterId r:id="rId38"/>
   </p:notesMasterIdLst>
   <p:sldIdLst>
     <p:sldId id="257" r:id="rId2"/>
@@ -39,8 +39,11 @@
     <p:sldId id="315" r:id="rId30"/>
     <p:sldId id="316" r:id="rId31"/>
     <p:sldId id="317" r:id="rId32"/>
-    <p:sldId id="319" r:id="rId33"/>
-    <p:sldId id="288" r:id="rId34"/>
+    <p:sldId id="320" r:id="rId33"/>
+    <p:sldId id="319" r:id="rId34"/>
+    <p:sldId id="322" r:id="rId35"/>
+    <p:sldId id="323" r:id="rId36"/>
+    <p:sldId id="288" r:id="rId37"/>
   </p:sldIdLst>
   <p:sldSz cx="12192000" cy="6858000"/>
   <p:notesSz cx="6858000" cy="9144000"/>
@@ -150,7 +153,7 @@
 <file path=ppt/revisionInfo.xml><?xml version="1.0" encoding="utf-8"?>
 <p1510:revInfo xmlns:a="http://schemas.openxmlformats.org/drawingml/2006/main" xmlns:r="http://schemas.openxmlformats.org/officeDocument/2006/relationships" xmlns:p1510="http://schemas.microsoft.com/office/powerpoint/2015/10/main">
   <p1510:revLst>
-    <p1510:client id="{E2922590-C897-4D5E-94A5-7835129BD264}" v="40" dt="2026-01-05T18:49:54.052"/>
+    <p1510:client id="{E2922590-C897-4D5E-94A5-7835129BD264}" v="70" dt="2026-01-06T06:06:01.279"/>
   </p1510:revLst>
 </p1510:revInfo>
 </file>
@@ -160,12 +163,12 @@
   <pc:docChgLst>
     <pc:chgData name="Dominique RIGHETTO" userId="512fe077-82ad-424c-88a3-15e852b5861d" providerId="ADAL" clId="{8B7CB91F-10CE-42C2-B9B8-BFF2D3401655}"/>
     <pc:docChg chg="undo custSel addSld delSld modSld sldOrd modMainMaster">
-      <pc:chgData name="Dominique RIGHETTO" userId="512fe077-82ad-424c-88a3-15e852b5861d" providerId="ADAL" clId="{8B7CB91F-10CE-42C2-B9B8-BFF2D3401655}" dt="2026-01-05T19:40:15.637" v="5517" actId="14861"/>
+      <pc:chgData name="Dominique RIGHETTO" userId="512fe077-82ad-424c-88a3-15e852b5861d" providerId="ADAL" clId="{8B7CB91F-10CE-42C2-B9B8-BFF2D3401655}" dt="2026-01-06T06:06:26.397" v="6870" actId="207"/>
       <pc:docMkLst>
         <pc:docMk/>
       </pc:docMkLst>
       <pc:sldChg chg="modSp mod">
-        <pc:chgData name="Dominique RIGHETTO" userId="512fe077-82ad-424c-88a3-15e852b5861d" providerId="ADAL" clId="{8B7CB91F-10CE-42C2-B9B8-BFF2D3401655}" dt="2026-01-05T07:59:34.002" v="54" actId="20577"/>
+        <pc:chgData name="Dominique RIGHETTO" userId="512fe077-82ad-424c-88a3-15e852b5861d" providerId="ADAL" clId="{8B7CB91F-10CE-42C2-B9B8-BFF2D3401655}" dt="2026-01-06T05:26:35.607" v="6620" actId="20577"/>
         <pc:sldMkLst>
           <pc:docMk/>
           <pc:sldMk cId="3134628389" sldId="257"/>
@@ -179,7 +182,7 @@
           </ac:spMkLst>
         </pc:spChg>
         <pc:spChg chg="mod">
-          <ac:chgData name="Dominique RIGHETTO" userId="512fe077-82ad-424c-88a3-15e852b5861d" providerId="ADAL" clId="{8B7CB91F-10CE-42C2-B9B8-BFF2D3401655}" dt="2026-01-05T07:59:29.703" v="52"/>
+          <ac:chgData name="Dominique RIGHETTO" userId="512fe077-82ad-424c-88a3-15e852b5861d" providerId="ADAL" clId="{8B7CB91F-10CE-42C2-B9B8-BFF2D3401655}" dt="2026-01-06T05:26:35.607" v="6620" actId="20577"/>
           <ac:spMkLst>
             <pc:docMk/>
             <pc:sldMk cId="3134628389" sldId="257"/>
@@ -216,7 +219,7 @@
         </pc:sldMkLst>
       </pc:sldChg>
       <pc:sldChg chg="modSp mod ord">
-        <pc:chgData name="Dominique RIGHETTO" userId="512fe077-82ad-424c-88a3-15e852b5861d" providerId="ADAL" clId="{8B7CB91F-10CE-42C2-B9B8-BFF2D3401655}" dt="2026-01-05T08:07:40.323" v="115" actId="20577"/>
+        <pc:chgData name="Dominique RIGHETTO" userId="512fe077-82ad-424c-88a3-15e852b5861d" providerId="ADAL" clId="{8B7CB91F-10CE-42C2-B9B8-BFF2D3401655}" dt="2026-01-06T05:29:16.203" v="6626" actId="207"/>
         <pc:sldMkLst>
           <pc:docMk/>
           <pc:sldMk cId="2121745454" sldId="262"/>
@@ -230,7 +233,7 @@
           </ac:spMkLst>
         </pc:spChg>
         <pc:spChg chg="mod">
-          <ac:chgData name="Dominique RIGHETTO" userId="512fe077-82ad-424c-88a3-15e852b5861d" providerId="ADAL" clId="{8B7CB91F-10CE-42C2-B9B8-BFF2D3401655}" dt="2026-01-05T08:07:40.323" v="115" actId="20577"/>
+          <ac:chgData name="Dominique RIGHETTO" userId="512fe077-82ad-424c-88a3-15e852b5861d" providerId="ADAL" clId="{8B7CB91F-10CE-42C2-B9B8-BFF2D3401655}" dt="2026-01-06T05:29:16.203" v="6626" actId="207"/>
           <ac:spMkLst>
             <pc:docMk/>
             <pc:sldMk cId="2121745454" sldId="262"/>
@@ -436,13 +439,13 @@
         </pc:spChg>
       </pc:sldChg>
       <pc:sldChg chg="modSp add mod">
-        <pc:chgData name="Dominique RIGHETTO" userId="512fe077-82ad-424c-88a3-15e852b5861d" providerId="ADAL" clId="{8B7CB91F-10CE-42C2-B9B8-BFF2D3401655}" dt="2026-01-05T08:19:48.581" v="1027" actId="207"/>
+        <pc:chgData name="Dominique RIGHETTO" userId="512fe077-82ad-424c-88a3-15e852b5861d" providerId="ADAL" clId="{8B7CB91F-10CE-42C2-B9B8-BFF2D3401655}" dt="2026-01-06T05:29:21.785" v="6627" actId="207"/>
         <pc:sldMkLst>
           <pc:docMk/>
           <pc:sldMk cId="2617813205" sldId="290"/>
         </pc:sldMkLst>
         <pc:spChg chg="mod">
-          <ac:chgData name="Dominique RIGHETTO" userId="512fe077-82ad-424c-88a3-15e852b5861d" providerId="ADAL" clId="{8B7CB91F-10CE-42C2-B9B8-BFF2D3401655}" dt="2026-01-05T08:19:48.581" v="1027" actId="207"/>
+          <ac:chgData name="Dominique RIGHETTO" userId="512fe077-82ad-424c-88a3-15e852b5861d" providerId="ADAL" clId="{8B7CB91F-10CE-42C2-B9B8-BFF2D3401655}" dt="2026-01-06T05:29:21.785" v="6627" actId="207"/>
           <ac:spMkLst>
             <pc:docMk/>
             <pc:sldMk cId="2617813205" sldId="290"/>
@@ -465,7 +468,7 @@
         </pc:sldMkLst>
       </pc:sldChg>
       <pc:sldChg chg="modSp add mod">
-        <pc:chgData name="Dominique RIGHETTO" userId="512fe077-82ad-424c-88a3-15e852b5861d" providerId="ADAL" clId="{8B7CB91F-10CE-42C2-B9B8-BFF2D3401655}" dt="2026-01-05T09:10:01.192" v="2097" actId="6549"/>
+        <pc:chgData name="Dominique RIGHETTO" userId="512fe077-82ad-424c-88a3-15e852b5861d" providerId="ADAL" clId="{8B7CB91F-10CE-42C2-B9B8-BFF2D3401655}" dt="2026-01-06T05:29:05.927" v="6624" actId="207"/>
         <pc:sldMkLst>
           <pc:docMk/>
           <pc:sldMk cId="3084432784" sldId="291"/>
@@ -479,7 +482,7 @@
           </ac:spMkLst>
         </pc:spChg>
         <pc:spChg chg="mod">
-          <ac:chgData name="Dominique RIGHETTO" userId="512fe077-82ad-424c-88a3-15e852b5861d" providerId="ADAL" clId="{8B7CB91F-10CE-42C2-B9B8-BFF2D3401655}" dt="2026-01-05T08:32:25.027" v="1751" actId="113"/>
+          <ac:chgData name="Dominique RIGHETTO" userId="512fe077-82ad-424c-88a3-15e852b5861d" providerId="ADAL" clId="{8B7CB91F-10CE-42C2-B9B8-BFF2D3401655}" dt="2026-01-06T05:29:05.927" v="6624" actId="207"/>
           <ac:spMkLst>
             <pc:docMk/>
             <pc:sldMk cId="3084432784" sldId="291"/>
@@ -564,8 +567,8 @@
           </ac:picMkLst>
         </pc:picChg>
       </pc:sldChg>
-      <pc:sldChg chg="addSp delSp modSp add mod">
-        <pc:chgData name="Dominique RIGHETTO" userId="512fe077-82ad-424c-88a3-15e852b5861d" providerId="ADAL" clId="{8B7CB91F-10CE-42C2-B9B8-BFF2D3401655}" dt="2026-01-05T09:06:02.430" v="2048" actId="14100"/>
+      <pc:sldChg chg="addSp delSp modSp add mod modTransition">
+        <pc:chgData name="Dominique RIGHETTO" userId="512fe077-82ad-424c-88a3-15e852b5861d" providerId="ADAL" clId="{8B7CB91F-10CE-42C2-B9B8-BFF2D3401655}" dt="2026-01-06T05:56:15.990" v="6832"/>
         <pc:sldMkLst>
           <pc:docMk/>
           <pc:sldMk cId="617590533" sldId="294"/>
@@ -612,7 +615,7 @@
         </pc:picChg>
       </pc:sldChg>
       <pc:sldChg chg="addSp delSp modSp add mod ord modNotesTx">
-        <pc:chgData name="Dominique RIGHETTO" userId="512fe077-82ad-424c-88a3-15e852b5861d" providerId="ADAL" clId="{8B7CB91F-10CE-42C2-B9B8-BFF2D3401655}" dt="2026-01-05T09:03:17.770" v="2045" actId="14100"/>
+        <pc:chgData name="Dominique RIGHETTO" userId="512fe077-82ad-424c-88a3-15e852b5861d" providerId="ADAL" clId="{8B7CB91F-10CE-42C2-B9B8-BFF2D3401655}" dt="2026-01-06T05:30:10.736" v="6628" actId="207"/>
         <pc:sldMkLst>
           <pc:docMk/>
           <pc:sldMk cId="2901458821" sldId="295"/>
@@ -626,7 +629,7 @@
           </ac:spMkLst>
         </pc:spChg>
         <pc:spChg chg="mod">
-          <ac:chgData name="Dominique RIGHETTO" userId="512fe077-82ad-424c-88a3-15e852b5861d" providerId="ADAL" clId="{8B7CB91F-10CE-42C2-B9B8-BFF2D3401655}" dt="2026-01-05T09:03:14.458" v="2044" actId="14100"/>
+          <ac:chgData name="Dominique RIGHETTO" userId="512fe077-82ad-424c-88a3-15e852b5861d" providerId="ADAL" clId="{8B7CB91F-10CE-42C2-B9B8-BFF2D3401655}" dt="2026-01-06T05:30:10.736" v="6628" actId="207"/>
           <ac:spMkLst>
             <pc:docMk/>
             <pc:sldMk cId="2901458821" sldId="295"/>
@@ -651,7 +654,7 @@
         </pc:picChg>
       </pc:sldChg>
       <pc:sldChg chg="addSp delSp modSp add mod ord">
-        <pc:chgData name="Dominique RIGHETTO" userId="512fe077-82ad-424c-88a3-15e852b5861d" providerId="ADAL" clId="{8B7CB91F-10CE-42C2-B9B8-BFF2D3401655}" dt="2026-01-05T19:40:15.637" v="5517" actId="14861"/>
+        <pc:chgData name="Dominique RIGHETTO" userId="512fe077-82ad-424c-88a3-15e852b5861d" providerId="ADAL" clId="{8B7CB91F-10CE-42C2-B9B8-BFF2D3401655}" dt="2026-01-06T05:30:31.399" v="6629" actId="20577"/>
         <pc:sldMkLst>
           <pc:docMk/>
           <pc:sldMk cId="546162947" sldId="296"/>
@@ -665,7 +668,7 @@
           </ac:spMkLst>
         </pc:spChg>
         <pc:spChg chg="mod">
-          <ac:chgData name="Dominique RIGHETTO" userId="512fe077-82ad-424c-88a3-15e852b5861d" providerId="ADAL" clId="{8B7CB91F-10CE-42C2-B9B8-BFF2D3401655}" dt="2026-01-05T09:35:39.981" v="2322" actId="20577"/>
+          <ac:chgData name="Dominique RIGHETTO" userId="512fe077-82ad-424c-88a3-15e852b5861d" providerId="ADAL" clId="{8B7CB91F-10CE-42C2-B9B8-BFF2D3401655}" dt="2026-01-06T05:30:31.399" v="6629" actId="20577"/>
           <ac:spMkLst>
             <pc:docMk/>
             <pc:sldMk cId="546162947" sldId="296"/>
@@ -753,7 +756,7 @@
         </pc:picChg>
       </pc:sldChg>
       <pc:sldChg chg="addSp delSp modSp add mod">
-        <pc:chgData name="Dominique RIGHETTO" userId="512fe077-82ad-424c-88a3-15e852b5861d" providerId="ADAL" clId="{8B7CB91F-10CE-42C2-B9B8-BFF2D3401655}" dt="2026-01-05T10:39:36.372" v="3346" actId="20577"/>
+        <pc:chgData name="Dominique RIGHETTO" userId="512fe077-82ad-424c-88a3-15e852b5861d" providerId="ADAL" clId="{8B7CB91F-10CE-42C2-B9B8-BFF2D3401655}" dt="2026-01-06T05:31:25.084" v="6631" actId="20577"/>
         <pc:sldMkLst>
           <pc:docMk/>
           <pc:sldMk cId="3961351739" sldId="298"/>
@@ -767,7 +770,7 @@
           </ac:spMkLst>
         </pc:spChg>
         <pc:spChg chg="mod">
-          <ac:chgData name="Dominique RIGHETTO" userId="512fe077-82ad-424c-88a3-15e852b5861d" providerId="ADAL" clId="{8B7CB91F-10CE-42C2-B9B8-BFF2D3401655}" dt="2026-01-05T10:39:36.372" v="3346" actId="20577"/>
+          <ac:chgData name="Dominique RIGHETTO" userId="512fe077-82ad-424c-88a3-15e852b5861d" providerId="ADAL" clId="{8B7CB91F-10CE-42C2-B9B8-BFF2D3401655}" dt="2026-01-06T05:31:25.084" v="6631" actId="20577"/>
           <ac:spMkLst>
             <pc:docMk/>
             <pc:sldMk cId="3961351739" sldId="298"/>
@@ -941,7 +944,7 @@
         </pc:picChg>
       </pc:sldChg>
       <pc:sldChg chg="addSp delSp modSp add mod ord">
-        <pc:chgData name="Dominique RIGHETTO" userId="512fe077-82ad-424c-88a3-15e852b5861d" providerId="ADAL" clId="{8B7CB91F-10CE-42C2-B9B8-BFF2D3401655}" dt="2026-01-05T10:42:38.769" v="3405" actId="20577"/>
+        <pc:chgData name="Dominique RIGHETTO" userId="512fe077-82ad-424c-88a3-15e852b5861d" providerId="ADAL" clId="{8B7CB91F-10CE-42C2-B9B8-BFF2D3401655}" dt="2026-01-06T05:32:52.543" v="6633" actId="14100"/>
         <pc:sldMkLst>
           <pc:docMk/>
           <pc:sldMk cId="3214065329" sldId="302"/>
@@ -963,7 +966,7 @@
           </ac:spMkLst>
         </pc:spChg>
         <pc:picChg chg="add mod">
-          <ac:chgData name="Dominique RIGHETTO" userId="512fe077-82ad-424c-88a3-15e852b5861d" providerId="ADAL" clId="{8B7CB91F-10CE-42C2-B9B8-BFF2D3401655}" dt="2026-01-05T10:42:19.671" v="3400" actId="14861"/>
+          <ac:chgData name="Dominique RIGHETTO" userId="512fe077-82ad-424c-88a3-15e852b5861d" providerId="ADAL" clId="{8B7CB91F-10CE-42C2-B9B8-BFF2D3401655}" dt="2026-01-06T05:32:52.543" v="6633" actId="14100"/>
           <ac:picMkLst>
             <pc:docMk/>
             <pc:sldMk cId="3214065329" sldId="302"/>
@@ -980,7 +983,7 @@
         </pc:picChg>
       </pc:sldChg>
       <pc:sldChg chg="addSp delSp modSp add mod ord">
-        <pc:chgData name="Dominique RIGHETTO" userId="512fe077-82ad-424c-88a3-15e852b5861d" providerId="ADAL" clId="{8B7CB91F-10CE-42C2-B9B8-BFF2D3401655}" dt="2026-01-05T15:06:41.432" v="4521" actId="108"/>
+        <pc:chgData name="Dominique RIGHETTO" userId="512fe077-82ad-424c-88a3-15e852b5861d" providerId="ADAL" clId="{8B7CB91F-10CE-42C2-B9B8-BFF2D3401655}" dt="2026-01-06T05:33:33.490" v="6639" actId="20577"/>
         <pc:sldMkLst>
           <pc:docMk/>
           <pc:sldMk cId="715954666" sldId="303"/>
@@ -994,7 +997,7 @@
           </ac:spMkLst>
         </pc:spChg>
         <pc:spChg chg="mod">
-          <ac:chgData name="Dominique RIGHETTO" userId="512fe077-82ad-424c-88a3-15e852b5861d" providerId="ADAL" clId="{8B7CB91F-10CE-42C2-B9B8-BFF2D3401655}" dt="2026-01-05T15:06:41.432" v="4521" actId="108"/>
+          <ac:chgData name="Dominique RIGHETTO" userId="512fe077-82ad-424c-88a3-15e852b5861d" providerId="ADAL" clId="{8B7CB91F-10CE-42C2-B9B8-BFF2D3401655}" dt="2026-01-06T05:33:33.490" v="6639" actId="20577"/>
           <ac:spMkLst>
             <pc:docMk/>
             <pc:sldMk cId="715954666" sldId="303"/>
@@ -1066,7 +1069,7 @@
         </pc:picChg>
       </pc:sldChg>
       <pc:sldChg chg="addSp delSp modSp add mod ord">
-        <pc:chgData name="Dominique RIGHETTO" userId="512fe077-82ad-424c-88a3-15e852b5861d" providerId="ADAL" clId="{8B7CB91F-10CE-42C2-B9B8-BFF2D3401655}" dt="2026-01-05T14:48:49.033" v="4197" actId="14100"/>
+        <pc:chgData name="Dominique RIGHETTO" userId="512fe077-82ad-424c-88a3-15e852b5861d" providerId="ADAL" clId="{8B7CB91F-10CE-42C2-B9B8-BFF2D3401655}" dt="2026-01-06T05:59:18.156" v="6834" actId="14100"/>
         <pc:sldMkLst>
           <pc:docMk/>
           <pc:sldMk cId="989586433" sldId="305"/>
@@ -1080,23 +1083,31 @@
           </ac:spMkLst>
         </pc:spChg>
         <pc:spChg chg="mod">
-          <ac:chgData name="Dominique RIGHETTO" userId="512fe077-82ad-424c-88a3-15e852b5861d" providerId="ADAL" clId="{8B7CB91F-10CE-42C2-B9B8-BFF2D3401655}" dt="2026-01-05T10:56:43.415" v="3760" actId="313"/>
+          <ac:chgData name="Dominique RIGHETTO" userId="512fe077-82ad-424c-88a3-15e852b5861d" providerId="ADAL" clId="{8B7CB91F-10CE-42C2-B9B8-BFF2D3401655}" dt="2026-01-06T05:51:38.821" v="6779" actId="5793"/>
           <ac:spMkLst>
             <pc:docMk/>
             <pc:sldMk cId="989586433" sldId="305"/>
             <ac:spMk id="3" creationId="{4DBACDBD-B750-A641-A360-8510B71B52F8}"/>
           </ac:spMkLst>
         </pc:spChg>
+        <pc:spChg chg="add mod">
+          <ac:chgData name="Dominique RIGHETTO" userId="512fe077-82ad-424c-88a3-15e852b5861d" providerId="ADAL" clId="{8B7CB91F-10CE-42C2-B9B8-BFF2D3401655}" dt="2026-01-06T05:51:22.131" v="6778" actId="14100"/>
+          <ac:spMkLst>
+            <pc:docMk/>
+            <pc:sldMk cId="989586433" sldId="305"/>
+            <ac:spMk id="4" creationId="{4B92274F-491B-942D-FD18-C984AC21D9B6}"/>
+          </ac:spMkLst>
+        </pc:spChg>
         <pc:spChg chg="add mod ord">
-          <ac:chgData name="Dominique RIGHETTO" userId="512fe077-82ad-424c-88a3-15e852b5861d" providerId="ADAL" clId="{8B7CB91F-10CE-42C2-B9B8-BFF2D3401655}" dt="2026-01-05T14:48:49.033" v="4197" actId="14100"/>
+          <ac:chgData name="Dominique RIGHETTO" userId="512fe077-82ad-424c-88a3-15e852b5861d" providerId="ADAL" clId="{8B7CB91F-10CE-42C2-B9B8-BFF2D3401655}" dt="2026-01-06T05:59:18.156" v="6834" actId="14100"/>
           <ac:spMkLst>
             <pc:docMk/>
             <pc:sldMk cId="989586433" sldId="305"/>
             <ac:spMk id="7" creationId="{AA1481E2-E225-CB1E-5FC0-20D0387972C4}"/>
           </ac:spMkLst>
         </pc:spChg>
-        <pc:spChg chg="add mod">
-          <ac:chgData name="Dominique RIGHETTO" userId="512fe077-82ad-424c-88a3-15e852b5861d" providerId="ADAL" clId="{8B7CB91F-10CE-42C2-B9B8-BFF2D3401655}" dt="2026-01-05T14:48:40.318" v="4194" actId="1076"/>
+        <pc:spChg chg="add del mod">
+          <ac:chgData name="Dominique RIGHETTO" userId="512fe077-82ad-424c-88a3-15e852b5861d" providerId="ADAL" clId="{8B7CB91F-10CE-42C2-B9B8-BFF2D3401655}" dt="2026-01-06T05:50:56.221" v="6774" actId="478"/>
           <ac:spMkLst>
             <pc:docMk/>
             <pc:sldMk cId="989586433" sldId="305"/>
@@ -1135,8 +1146,8 @@
             <ac:picMk id="6" creationId="{E63415D6-6D65-95E4-C7BC-8A1B52CE7E8A}"/>
           </ac:picMkLst>
         </pc:picChg>
-        <pc:picChg chg="add mod">
-          <ac:chgData name="Dominique RIGHETTO" userId="512fe077-82ad-424c-88a3-15e852b5861d" providerId="ADAL" clId="{8B7CB91F-10CE-42C2-B9B8-BFF2D3401655}" dt="2026-01-05T14:48:30.216" v="4191" actId="14100"/>
+        <pc:picChg chg="add mod ord">
+          <ac:chgData name="Dominique RIGHETTO" userId="512fe077-82ad-424c-88a3-15e852b5861d" providerId="ADAL" clId="{8B7CB91F-10CE-42C2-B9B8-BFF2D3401655}" dt="2026-01-06T05:51:43.579" v="6780" actId="166"/>
           <ac:picMkLst>
             <pc:docMk/>
             <pc:sldMk cId="989586433" sldId="305"/>
@@ -1144,7 +1155,7 @@
           </ac:picMkLst>
         </pc:picChg>
         <pc:picChg chg="add mod modCrop">
-          <ac:chgData name="Dominique RIGHETTO" userId="512fe077-82ad-424c-88a3-15e852b5861d" providerId="ADAL" clId="{8B7CB91F-10CE-42C2-B9B8-BFF2D3401655}" dt="2026-01-05T14:48:36.590" v="4193" actId="14100"/>
+          <ac:chgData name="Dominique RIGHETTO" userId="512fe077-82ad-424c-88a3-15e852b5861d" providerId="ADAL" clId="{8B7CB91F-10CE-42C2-B9B8-BFF2D3401655}" dt="2026-01-06T05:51:02.215" v="6776" actId="1076"/>
           <ac:picMkLst>
             <pc:docMk/>
             <pc:sldMk cId="989586433" sldId="305"/>
@@ -1153,7 +1164,7 @@
         </pc:picChg>
       </pc:sldChg>
       <pc:sldChg chg="delSp modSp add mod ord">
-        <pc:chgData name="Dominique RIGHETTO" userId="512fe077-82ad-424c-88a3-15e852b5861d" providerId="ADAL" clId="{8B7CB91F-10CE-42C2-B9B8-BFF2D3401655}" dt="2026-01-05T14:49:44.140" v="4207" actId="20577"/>
+        <pc:chgData name="Dominique RIGHETTO" userId="512fe077-82ad-424c-88a3-15e852b5861d" providerId="ADAL" clId="{8B7CB91F-10CE-42C2-B9B8-BFF2D3401655}" dt="2026-01-06T05:34:48.386" v="6641" actId="20577"/>
         <pc:sldMkLst>
           <pc:docMk/>
           <pc:sldMk cId="1692727651" sldId="306"/>
@@ -1167,7 +1178,7 @@
           </ac:spMkLst>
         </pc:spChg>
         <pc:spChg chg="mod">
-          <ac:chgData name="Dominique RIGHETTO" userId="512fe077-82ad-424c-88a3-15e852b5861d" providerId="ADAL" clId="{8B7CB91F-10CE-42C2-B9B8-BFF2D3401655}" dt="2026-01-05T14:49:44.140" v="4207" actId="20577"/>
+          <ac:chgData name="Dominique RIGHETTO" userId="512fe077-82ad-424c-88a3-15e852b5861d" providerId="ADAL" clId="{8B7CB91F-10CE-42C2-B9B8-BFF2D3401655}" dt="2026-01-06T05:34:48.386" v="6641" actId="20577"/>
           <ac:spMkLst>
             <pc:docMk/>
             <pc:sldMk cId="1692727651" sldId="306"/>
@@ -1357,7 +1368,7 @@
         </pc:picChg>
       </pc:sldChg>
       <pc:sldChg chg="addSp delSp modSp add mod ord">
-        <pc:chgData name="Dominique RIGHETTO" userId="512fe077-82ad-424c-88a3-15e852b5861d" providerId="ADAL" clId="{8B7CB91F-10CE-42C2-B9B8-BFF2D3401655}" dt="2026-01-05T15:23:02.147" v="4658" actId="20577"/>
+        <pc:chgData name="Dominique RIGHETTO" userId="512fe077-82ad-424c-88a3-15e852b5861d" providerId="ADAL" clId="{8B7CB91F-10CE-42C2-B9B8-BFF2D3401655}" dt="2026-01-06T05:36:49.580" v="6644" actId="20577"/>
         <pc:sldMkLst>
           <pc:docMk/>
           <pc:sldMk cId="497681082" sldId="310"/>
@@ -1371,7 +1382,7 @@
           </ac:spMkLst>
         </pc:spChg>
         <pc:spChg chg="mod">
-          <ac:chgData name="Dominique RIGHETTO" userId="512fe077-82ad-424c-88a3-15e852b5861d" providerId="ADAL" clId="{8B7CB91F-10CE-42C2-B9B8-BFF2D3401655}" dt="2026-01-05T15:23:02.147" v="4658" actId="20577"/>
+          <ac:chgData name="Dominique RIGHETTO" userId="512fe077-82ad-424c-88a3-15e852b5861d" providerId="ADAL" clId="{8B7CB91F-10CE-42C2-B9B8-BFF2D3401655}" dt="2026-01-06T05:36:49.580" v="6644" actId="20577"/>
           <ac:spMkLst>
             <pc:docMk/>
             <pc:sldMk cId="497681082" sldId="310"/>
@@ -1600,7 +1611,7 @@
         </pc:picChg>
       </pc:sldChg>
       <pc:sldChg chg="addSp delSp modSp add mod">
-        <pc:chgData name="Dominique RIGHETTO" userId="512fe077-82ad-424c-88a3-15e852b5861d" providerId="ADAL" clId="{8B7CB91F-10CE-42C2-B9B8-BFF2D3401655}" dt="2026-01-05T18:51:48.171" v="4870" actId="108"/>
+        <pc:chgData name="Dominique RIGHETTO" userId="512fe077-82ad-424c-88a3-15e852b5861d" providerId="ADAL" clId="{8B7CB91F-10CE-42C2-B9B8-BFF2D3401655}" dt="2026-01-06T05:38:36.350" v="6650" actId="1076"/>
         <pc:sldMkLst>
           <pc:docMk/>
           <pc:sldMk cId="2209675377" sldId="314"/>
@@ -1621,8 +1632,8 @@
             <ac:spMk id="6" creationId="{7758ABBA-5D87-FEB6-B999-0187C1EC96F6}"/>
           </ac:spMkLst>
         </pc:spChg>
-        <pc:picChg chg="mod">
-          <ac:chgData name="Dominique RIGHETTO" userId="512fe077-82ad-424c-88a3-15e852b5861d" providerId="ADAL" clId="{8B7CB91F-10CE-42C2-B9B8-BFF2D3401655}" dt="2026-01-05T18:51:48.171" v="4870" actId="108"/>
+        <pc:picChg chg="mod modCrop">
+          <ac:chgData name="Dominique RIGHETTO" userId="512fe077-82ad-424c-88a3-15e852b5861d" providerId="ADAL" clId="{8B7CB91F-10CE-42C2-B9B8-BFF2D3401655}" dt="2026-01-06T05:38:36.350" v="6650" actId="1076"/>
           <ac:picMkLst>
             <pc:docMk/>
             <pc:sldMk cId="2209675377" sldId="314"/>
@@ -1638,7 +1649,7 @@
           </ac:picMkLst>
         </pc:picChg>
         <pc:picChg chg="add mod">
-          <ac:chgData name="Dominique RIGHETTO" userId="512fe077-82ad-424c-88a3-15e852b5861d" providerId="ADAL" clId="{8B7CB91F-10CE-42C2-B9B8-BFF2D3401655}" dt="2026-01-05T18:51:44.915" v="4869" actId="14861"/>
+          <ac:chgData name="Dominique RIGHETTO" userId="512fe077-82ad-424c-88a3-15e852b5861d" providerId="ADAL" clId="{8B7CB91F-10CE-42C2-B9B8-BFF2D3401655}" dt="2026-01-06T05:38:34.061" v="6649" actId="1076"/>
           <ac:picMkLst>
             <pc:docMk/>
             <pc:sldMk cId="2209675377" sldId="314"/>
@@ -1647,13 +1658,13 @@
         </pc:picChg>
       </pc:sldChg>
       <pc:sldChg chg="addSp delSp modSp add mod">
-        <pc:chgData name="Dominique RIGHETTO" userId="512fe077-82ad-424c-88a3-15e852b5861d" providerId="ADAL" clId="{8B7CB91F-10CE-42C2-B9B8-BFF2D3401655}" dt="2026-01-05T18:54:41.701" v="4889" actId="1076"/>
+        <pc:chgData name="Dominique RIGHETTO" userId="512fe077-82ad-424c-88a3-15e852b5861d" providerId="ADAL" clId="{8B7CB91F-10CE-42C2-B9B8-BFF2D3401655}" dt="2026-01-06T05:38:47.086" v="6652" actId="1076"/>
         <pc:sldMkLst>
           <pc:docMk/>
           <pc:sldMk cId="2163192230" sldId="315"/>
         </pc:sldMkLst>
         <pc:picChg chg="add mod">
-          <ac:chgData name="Dominique RIGHETTO" userId="512fe077-82ad-424c-88a3-15e852b5861d" providerId="ADAL" clId="{8B7CB91F-10CE-42C2-B9B8-BFF2D3401655}" dt="2026-01-05T18:54:41.701" v="4889" actId="1076"/>
+          <ac:chgData name="Dominique RIGHETTO" userId="512fe077-82ad-424c-88a3-15e852b5861d" providerId="ADAL" clId="{8B7CB91F-10CE-42C2-B9B8-BFF2D3401655}" dt="2026-01-06T05:38:47.086" v="6652" actId="1076"/>
           <ac:picMkLst>
             <pc:docMk/>
             <pc:sldMk cId="2163192230" sldId="315"/>
@@ -1669,7 +1680,7 @@
           </ac:picMkLst>
         </pc:picChg>
         <pc:picChg chg="add mod">
-          <ac:chgData name="Dominique RIGHETTO" userId="512fe077-82ad-424c-88a3-15e852b5861d" providerId="ADAL" clId="{8B7CB91F-10CE-42C2-B9B8-BFF2D3401655}" dt="2026-01-05T18:54:38.989" v="4888" actId="108"/>
+          <ac:chgData name="Dominique RIGHETTO" userId="512fe077-82ad-424c-88a3-15e852b5861d" providerId="ADAL" clId="{8B7CB91F-10CE-42C2-B9B8-BFF2D3401655}" dt="2026-01-06T05:38:44.975" v="6651" actId="1076"/>
           <ac:picMkLst>
             <pc:docMk/>
             <pc:sldMk cId="2163192230" sldId="315"/>
@@ -1686,7 +1697,7 @@
         </pc:picChg>
       </pc:sldChg>
       <pc:sldChg chg="addSp delSp modSp add mod ord">
-        <pc:chgData name="Dominique RIGHETTO" userId="512fe077-82ad-424c-88a3-15e852b5861d" providerId="ADAL" clId="{8B7CB91F-10CE-42C2-B9B8-BFF2D3401655}" dt="2026-01-05T19:33:30.538" v="5496" actId="14861"/>
+        <pc:chgData name="Dominique RIGHETTO" userId="512fe077-82ad-424c-88a3-15e852b5861d" providerId="ADAL" clId="{8B7CB91F-10CE-42C2-B9B8-BFF2D3401655}" dt="2026-01-06T05:53:03.297" v="6783" actId="1076"/>
         <pc:sldMkLst>
           <pc:docMk/>
           <pc:sldMk cId="3966777535" sldId="316"/>
@@ -1700,7 +1711,7 @@
           </ac:spMkLst>
         </pc:spChg>
         <pc:spChg chg="mod">
-          <ac:chgData name="Dominique RIGHETTO" userId="512fe077-82ad-424c-88a3-15e852b5861d" providerId="ADAL" clId="{8B7CB91F-10CE-42C2-B9B8-BFF2D3401655}" dt="2026-01-05T19:00:49.384" v="5250" actId="20577"/>
+          <ac:chgData name="Dominique RIGHETTO" userId="512fe077-82ad-424c-88a3-15e852b5861d" providerId="ADAL" clId="{8B7CB91F-10CE-42C2-B9B8-BFF2D3401655}" dt="2026-01-06T05:39:32.613" v="6655" actId="20577"/>
           <ac:spMkLst>
             <pc:docMk/>
             <pc:sldMk cId="3966777535" sldId="316"/>
@@ -1732,7 +1743,7 @@
           </ac:picMkLst>
         </pc:picChg>
         <pc:picChg chg="add mod">
-          <ac:chgData name="Dominique RIGHETTO" userId="512fe077-82ad-424c-88a3-15e852b5861d" providerId="ADAL" clId="{8B7CB91F-10CE-42C2-B9B8-BFF2D3401655}" dt="2026-01-05T19:33:30.538" v="5496" actId="14861"/>
+          <ac:chgData name="Dominique RIGHETTO" userId="512fe077-82ad-424c-88a3-15e852b5861d" providerId="ADAL" clId="{8B7CB91F-10CE-42C2-B9B8-BFF2D3401655}" dt="2026-01-06T05:53:03.297" v="6783" actId="1076"/>
           <ac:picMkLst>
             <pc:docMk/>
             <pc:sldMk cId="3966777535" sldId="316"/>
@@ -1741,7 +1752,7 @@
         </pc:picChg>
       </pc:sldChg>
       <pc:sldChg chg="addSp delSp modSp add mod ord">
-        <pc:chgData name="Dominique RIGHETTO" userId="512fe077-82ad-424c-88a3-15e852b5861d" providerId="ADAL" clId="{8B7CB91F-10CE-42C2-B9B8-BFF2D3401655}" dt="2026-01-05T19:37:24.208" v="5509" actId="20577"/>
+        <pc:chgData name="Dominique RIGHETTO" userId="512fe077-82ad-424c-88a3-15e852b5861d" providerId="ADAL" clId="{8B7CB91F-10CE-42C2-B9B8-BFF2D3401655}" dt="2026-01-06T06:02:24.603" v="6847" actId="20577"/>
         <pc:sldMkLst>
           <pc:docMk/>
           <pc:sldMk cId="1987946601" sldId="317"/>
@@ -1755,7 +1766,7 @@
           </ac:spMkLst>
         </pc:spChg>
         <pc:spChg chg="mod">
-          <ac:chgData name="Dominique RIGHETTO" userId="512fe077-82ad-424c-88a3-15e852b5861d" providerId="ADAL" clId="{8B7CB91F-10CE-42C2-B9B8-BFF2D3401655}" dt="2026-01-05T19:37:24.208" v="5509" actId="20577"/>
+          <ac:chgData name="Dominique RIGHETTO" userId="512fe077-82ad-424c-88a3-15e852b5861d" providerId="ADAL" clId="{8B7CB91F-10CE-42C2-B9B8-BFF2D3401655}" dt="2026-01-06T06:02:24.603" v="6847" actId="20577"/>
           <ac:spMkLst>
             <pc:docMk/>
             <pc:sldMk cId="1987946601" sldId="317"/>
@@ -1818,22 +1829,46 @@
           </ac:picMkLst>
         </pc:picChg>
       </pc:sldChg>
-      <pc:sldChg chg="addSp modSp add mod">
-        <pc:chgData name="Dominique RIGHETTO" userId="512fe077-82ad-424c-88a3-15e852b5861d" providerId="ADAL" clId="{8B7CB91F-10CE-42C2-B9B8-BFF2D3401655}" dt="2026-01-05T19:37:35.669" v="5512" actId="22"/>
+      <pc:sldChg chg="addSp delSp modSp add mod modAnim">
+        <pc:chgData name="Dominique RIGHETTO" userId="512fe077-82ad-424c-88a3-15e852b5861d" providerId="ADAL" clId="{8B7CB91F-10CE-42C2-B9B8-BFF2D3401655}" dt="2026-01-06T06:06:01.276" v="6868" actId="33524"/>
         <pc:sldMkLst>
           <pc:docMk/>
           <pc:sldMk cId="261788013" sldId="319"/>
         </pc:sldMkLst>
         <pc:spChg chg="mod">
-          <ac:chgData name="Dominique RIGHETTO" userId="512fe077-82ad-424c-88a3-15e852b5861d" providerId="ADAL" clId="{8B7CB91F-10CE-42C2-B9B8-BFF2D3401655}" dt="2026-01-05T19:37:30.848" v="5511" actId="6549"/>
+          <ac:chgData name="Dominique RIGHETTO" userId="512fe077-82ad-424c-88a3-15e852b5861d" providerId="ADAL" clId="{8B7CB91F-10CE-42C2-B9B8-BFF2D3401655}" dt="2026-01-06T05:06:23.709" v="5556" actId="20577"/>
+          <ac:spMkLst>
+            <pc:docMk/>
+            <pc:sldMk cId="261788013" sldId="319"/>
+            <ac:spMk id="2" creationId="{D4364BF5-2AAB-E072-15D0-CBDC9202657D}"/>
+          </ac:spMkLst>
+        </pc:spChg>
+        <pc:spChg chg="mod">
+          <ac:chgData name="Dominique RIGHETTO" userId="512fe077-82ad-424c-88a3-15e852b5861d" providerId="ADAL" clId="{8B7CB91F-10CE-42C2-B9B8-BFF2D3401655}" dt="2026-01-06T05:54:59.601" v="6831" actId="20577"/>
           <ac:spMkLst>
             <pc:docMk/>
             <pc:sldMk cId="261788013" sldId="319"/>
             <ac:spMk id="3" creationId="{E57E7D38-3558-049A-380D-1044EA6C69AF}"/>
           </ac:spMkLst>
         </pc:spChg>
-        <pc:picChg chg="add">
-          <ac:chgData name="Dominique RIGHETTO" userId="512fe077-82ad-424c-88a3-15e852b5861d" providerId="ADAL" clId="{8B7CB91F-10CE-42C2-B9B8-BFF2D3401655}" dt="2026-01-05T19:37:35.669" v="5512" actId="22"/>
+        <pc:spChg chg="add mod">
+          <ac:chgData name="Dominique RIGHETTO" userId="512fe077-82ad-424c-88a3-15e852b5861d" providerId="ADAL" clId="{8B7CB91F-10CE-42C2-B9B8-BFF2D3401655}" dt="2026-01-06T06:06:01.276" v="6868" actId="33524"/>
+          <ac:spMkLst>
+            <pc:docMk/>
+            <pc:sldMk cId="261788013" sldId="319"/>
+            <ac:spMk id="4" creationId="{75CC2FC8-F95B-EF24-A541-FCCC55DB0D71}"/>
+          </ac:spMkLst>
+        </pc:spChg>
+        <pc:spChg chg="del">
+          <ac:chgData name="Dominique RIGHETTO" userId="512fe077-82ad-424c-88a3-15e852b5861d" providerId="ADAL" clId="{8B7CB91F-10CE-42C2-B9B8-BFF2D3401655}" dt="2026-01-06T05:13:47.443" v="5947" actId="478"/>
+          <ac:spMkLst>
+            <pc:docMk/>
+            <pc:sldMk cId="261788013" sldId="319"/>
+            <ac:spMk id="7" creationId="{67C8EA75-CBF8-C05D-7AB7-5D4AF69E860E}"/>
+          </ac:spMkLst>
+        </pc:spChg>
+        <pc:picChg chg="add del mod">
+          <ac:chgData name="Dominique RIGHETTO" userId="512fe077-82ad-424c-88a3-15e852b5861d" providerId="ADAL" clId="{8B7CB91F-10CE-42C2-B9B8-BFF2D3401655}" dt="2026-01-06T05:06:27.953" v="5557" actId="478"/>
           <ac:picMkLst>
             <pc:docMk/>
             <pc:sldMk cId="261788013" sldId="319"/>
@@ -1841,14 +1876,98 @@
           </ac:picMkLst>
         </pc:picChg>
       </pc:sldChg>
+      <pc:sldChg chg="addSp modSp add mod">
+        <pc:chgData name="Dominique RIGHETTO" userId="512fe077-82ad-424c-88a3-15e852b5861d" providerId="ADAL" clId="{8B7CB91F-10CE-42C2-B9B8-BFF2D3401655}" dt="2026-01-06T05:43:48.412" v="6701" actId="14100"/>
+        <pc:sldMkLst>
+          <pc:docMk/>
+          <pc:sldMk cId="1465579828" sldId="320"/>
+        </pc:sldMkLst>
+        <pc:spChg chg="mod">
+          <ac:chgData name="Dominique RIGHETTO" userId="512fe077-82ad-424c-88a3-15e852b5861d" providerId="ADAL" clId="{8B7CB91F-10CE-42C2-B9B8-BFF2D3401655}" dt="2026-01-06T05:43:13.810" v="6697" actId="20577"/>
+          <ac:spMkLst>
+            <pc:docMk/>
+            <pc:sldMk cId="1465579828" sldId="320"/>
+            <ac:spMk id="3" creationId="{DE2D873E-EA82-331F-BE96-6FF6C7492461}"/>
+          </ac:spMkLst>
+        </pc:spChg>
+        <pc:picChg chg="add mod">
+          <ac:chgData name="Dominique RIGHETTO" userId="512fe077-82ad-424c-88a3-15e852b5861d" providerId="ADAL" clId="{8B7CB91F-10CE-42C2-B9B8-BFF2D3401655}" dt="2026-01-06T05:43:48.412" v="6701" actId="14100"/>
+          <ac:picMkLst>
+            <pc:docMk/>
+            <pc:sldMk cId="1465579828" sldId="320"/>
+            <ac:picMk id="5" creationId="{0255F110-8AF1-2B31-E1A2-CFC2EDCA9CCD}"/>
+          </ac:picMkLst>
+        </pc:picChg>
+      </pc:sldChg>
+      <pc:sldChg chg="modSp add del mod">
+        <pc:chgData name="Dominique RIGHETTO" userId="512fe077-82ad-424c-88a3-15e852b5861d" providerId="ADAL" clId="{8B7CB91F-10CE-42C2-B9B8-BFF2D3401655}" dt="2026-01-06T05:48:45.202" v="6771" actId="47"/>
+        <pc:sldMkLst>
+          <pc:docMk/>
+          <pc:sldMk cId="3166410237" sldId="321"/>
+        </pc:sldMkLst>
+        <pc:spChg chg="mod">
+          <ac:chgData name="Dominique RIGHETTO" userId="512fe077-82ad-424c-88a3-15e852b5861d" providerId="ADAL" clId="{8B7CB91F-10CE-42C2-B9B8-BFF2D3401655}" dt="2026-01-06T05:18:03.493" v="6157"/>
+          <ac:spMkLst>
+            <pc:docMk/>
+            <pc:sldMk cId="3166410237" sldId="321"/>
+            <ac:spMk id="3" creationId="{5DB7A9F4-C34D-E597-FE58-D7921DF00573}"/>
+          </ac:spMkLst>
+        </pc:spChg>
+      </pc:sldChg>
+      <pc:sldChg chg="modSp add mod">
+        <pc:chgData name="Dominique RIGHETTO" userId="512fe077-82ad-424c-88a3-15e852b5861d" providerId="ADAL" clId="{8B7CB91F-10CE-42C2-B9B8-BFF2D3401655}" dt="2026-01-06T06:04:00.369" v="6859" actId="20577"/>
+        <pc:sldMkLst>
+          <pc:docMk/>
+          <pc:sldMk cId="2469469424" sldId="322"/>
+        </pc:sldMkLst>
+        <pc:spChg chg="mod">
+          <ac:chgData name="Dominique RIGHETTO" userId="512fe077-82ad-424c-88a3-15e852b5861d" providerId="ADAL" clId="{8B7CB91F-10CE-42C2-B9B8-BFF2D3401655}" dt="2026-01-06T05:18:39.139" v="6171" actId="6549"/>
+          <ac:spMkLst>
+            <pc:docMk/>
+            <pc:sldMk cId="2469469424" sldId="322"/>
+            <ac:spMk id="2" creationId="{7B5F710B-7C72-92A7-2EC6-B37F1470C8F2}"/>
+          </ac:spMkLst>
+        </pc:spChg>
+        <pc:spChg chg="mod">
+          <ac:chgData name="Dominique RIGHETTO" userId="512fe077-82ad-424c-88a3-15e852b5861d" providerId="ADAL" clId="{8B7CB91F-10CE-42C2-B9B8-BFF2D3401655}" dt="2026-01-06T06:04:00.369" v="6859" actId="20577"/>
+          <ac:spMkLst>
+            <pc:docMk/>
+            <pc:sldMk cId="2469469424" sldId="322"/>
+            <ac:spMk id="3" creationId="{FF2CBF5E-E258-4CD8-1B47-F4CFE1D148C1}"/>
+          </ac:spMkLst>
+        </pc:spChg>
+      </pc:sldChg>
+      <pc:sldChg chg="modSp add mod">
+        <pc:chgData name="Dominique RIGHETTO" userId="512fe077-82ad-424c-88a3-15e852b5861d" providerId="ADAL" clId="{8B7CB91F-10CE-42C2-B9B8-BFF2D3401655}" dt="2026-01-06T05:25:06.796" v="6617" actId="20577"/>
+        <pc:sldMkLst>
+          <pc:docMk/>
+          <pc:sldMk cId="1864351332" sldId="323"/>
+        </pc:sldMkLst>
+        <pc:spChg chg="mod">
+          <ac:chgData name="Dominique RIGHETTO" userId="512fe077-82ad-424c-88a3-15e852b5861d" providerId="ADAL" clId="{8B7CB91F-10CE-42C2-B9B8-BFF2D3401655}" dt="2026-01-06T05:23:37.911" v="6602" actId="6549"/>
+          <ac:spMkLst>
+            <pc:docMk/>
+            <pc:sldMk cId="1864351332" sldId="323"/>
+            <ac:spMk id="2" creationId="{D6F0257B-0D8F-597A-7407-0281BEA541A4}"/>
+          </ac:spMkLst>
+        </pc:spChg>
+        <pc:spChg chg="mod">
+          <ac:chgData name="Dominique RIGHETTO" userId="512fe077-82ad-424c-88a3-15e852b5861d" providerId="ADAL" clId="{8B7CB91F-10CE-42C2-B9B8-BFF2D3401655}" dt="2026-01-06T05:25:06.796" v="6617" actId="20577"/>
+          <ac:spMkLst>
+            <pc:docMk/>
+            <pc:sldMk cId="1864351332" sldId="323"/>
+            <ac:spMk id="3" creationId="{67471A2E-57F3-AB6A-4E4E-33D39DC06A46}"/>
+          </ac:spMkLst>
+        </pc:spChg>
+      </pc:sldChg>
       <pc:sldMasterChg chg="addSp delSp modSp mod">
-        <pc:chgData name="Dominique RIGHETTO" userId="512fe077-82ad-424c-88a3-15e852b5861d" providerId="ADAL" clId="{8B7CB91F-10CE-42C2-B9B8-BFF2D3401655}" dt="2026-01-05T08:06:56.232" v="112" actId="207"/>
+        <pc:chgData name="Dominique RIGHETTO" userId="512fe077-82ad-424c-88a3-15e852b5861d" providerId="ADAL" clId="{8B7CB91F-10CE-42C2-B9B8-BFF2D3401655}" dt="2026-01-06T06:06:26.397" v="6870" actId="207"/>
         <pc:sldMasterMkLst>
           <pc:docMk/>
           <pc:sldMasterMk cId="1793245750" sldId="2147483660"/>
         </pc:sldMasterMkLst>
         <pc:spChg chg="mod">
-          <ac:chgData name="Dominique RIGHETTO" userId="512fe077-82ad-424c-88a3-15e852b5861d" providerId="ADAL" clId="{8B7CB91F-10CE-42C2-B9B8-BFF2D3401655}" dt="2026-01-05T08:06:56.232" v="112" actId="207"/>
+          <ac:chgData name="Dominique RIGHETTO" userId="512fe077-82ad-424c-88a3-15e852b5861d" providerId="ADAL" clId="{8B7CB91F-10CE-42C2-B9B8-BFF2D3401655}" dt="2026-01-06T06:06:26.397" v="6870" actId="207"/>
           <ac:spMkLst>
             <pc:docMk/>
             <pc:sldMasterMk cId="1793245750" sldId="2147483660"/>
@@ -1967,7 +2086,7 @@
           <a:p>
             <a:fld id="{08A2296D-8F38-4121-9F4D-17CC019C25D9}" type="datetimeFigureOut">
               <a:rPr lang="fr-FR" smtClean="0"/>
-              <a:t>05/01/2026</a:t>
+              <a:t>06/01/2026</a:t>
             </a:fld>
             <a:endParaRPr lang="fr-FR"/>
           </a:p>
@@ -44310,7 +44429,7 @@
         </p:nvSpPr>
         <p:spPr>
           <a:xfrm>
-            <a:off x="11550499" y="6420071"/>
+            <a:off x="11550499" y="6413742"/>
             <a:ext cx="419002" cy="180425"/>
           </a:xfrm>
           <a:prstGeom prst="rect">
@@ -44365,7 +44484,7 @@
             <a:r>
               <a:rPr lang="en-GB" sz="700" b="1" dirty="0">
                 <a:solidFill>
-                  <a:schemeClr val="bg2"/>
+                  <a:schemeClr val="bg1"/>
                 </a:solidFill>
               </a:rPr>
               <a:t>OPEN</a:t>
@@ -44802,7 +44921,7 @@
           <a:p>
             <a:r>
               <a:rPr lang="en-US" dirty="0"/>
-              <a:t>The grueling journey of implementing a file upload feature</a:t>
+              <a:t>The grueling journey of implementing a file upload feature.</a:t>
             </a:r>
           </a:p>
         </p:txBody>
@@ -44915,21 +45034,8 @@
                   <a:schemeClr val="tx2"/>
                 </a:solidFill>
               </a:rPr>
-              <a:t> A utility script, to serve as “upload client”, was created to facilitate testing using different type of malicious </a:t>
+              <a:t> A utility script, to serve as “upload client”, was created to facilitate testing using different types of malicious PDF file:</a:t>
             </a:r>
-            <a:r>
-              <a:rPr lang="en-US" sz="2800" b="0">
-                <a:solidFill>
-                  <a:schemeClr val="tx2"/>
-                </a:solidFill>
-              </a:rPr>
-              <a:t>PDF file:</a:t>
-            </a:r>
-            <a:endParaRPr lang="en-US" sz="2800" b="0" dirty="0">
-              <a:solidFill>
-                <a:schemeClr val="tx2"/>
-              </a:solidFill>
-            </a:endParaRPr>
           </a:p>
           <a:p>
             <a:pPr marL="0" indent="0">
@@ -45322,7 +45428,7 @@
             <a:pPr lvl="1"/>
             <a:r>
               <a:rPr lang="en-US" sz="2400" dirty="0"/>
-              <a:t>Ensure that the provided file is valid PDF by try loading it via a PDF parser.</a:t>
+              <a:t>Ensure that the provided file is a valid PDF by try loading it via a PDF parser.</a:t>
             </a:r>
           </a:p>
           <a:p>
@@ -46218,8 +46324,8 @@
         </p:blipFill>
         <p:spPr>
           <a:xfrm>
-            <a:off x="2050319" y="1945758"/>
-            <a:ext cx="8893976" cy="4552242"/>
+            <a:off x="1444262" y="1945758"/>
+            <a:ext cx="9368821" cy="4795284"/>
           </a:xfrm>
           <a:prstGeom prst="rect">
             <a:avLst/>
@@ -46361,7 +46467,7 @@
                   <a:schemeClr val="tx2"/>
                 </a:solidFill>
               </a:rPr>
-              <a:t> Such attachment file can be opened and executed by the user using instruction into the PDF indented to trick him (phishing approach).</a:t>
+              <a:t> Such attachment file can be opened and executed by the user using instruction, into the PDF, intended to trick him (phishing approach).</a:t>
             </a:r>
           </a:p>
           <a:p>
@@ -46796,6 +46902,9 @@
             </a:r>
           </a:p>
           <a:p>
+            <a:pPr marL="0" indent="0">
+              <a:buNone/>
+            </a:pPr>
             <a:endParaRPr lang="en-US" sz="2800" b="0" dirty="0">
               <a:solidFill>
                 <a:schemeClr val="tx2"/>
@@ -46829,10 +46938,10 @@
       </p:sp>
       <p:pic>
         <p:nvPicPr>
-          <p:cNvPr id="8" name="Picture 7">
+          <p:cNvPr id="11" name="Picture 10">
             <a:extLst>
               <a:ext uri="{FF2B5EF4-FFF2-40B4-BE49-F238E27FC236}">
-                <a16:creationId xmlns:a16="http://schemas.microsoft.com/office/drawing/2014/main" id="{D6C333E4-EAB2-386F-0AA9-7808BDB89AD5}"/>
+                <a16:creationId xmlns:a16="http://schemas.microsoft.com/office/drawing/2014/main" id="{14FDD82F-A001-EF7F-B4A6-AC95A767E4F0}"/>
               </a:ext>
             </a:extLst>
           </p:cNvPr>
@@ -46843,14 +46952,15 @@
         </p:nvPicPr>
         <p:blipFill>
           <a:blip r:embed="rId4"/>
+          <a:srcRect b="47701"/>
           <a:stretch>
             <a:fillRect/>
           </a:stretch>
         </p:blipFill>
         <p:spPr>
           <a:xfrm>
-            <a:off x="184029" y="2423619"/>
-            <a:ext cx="5162139" cy="643830"/>
+            <a:off x="702161" y="3391786"/>
+            <a:ext cx="10787676" cy="2534561"/>
           </a:xfrm>
           <a:prstGeom prst="rect">
             <a:avLst/>
@@ -46866,10 +46976,10 @@
       </p:pic>
       <p:sp>
         <p:nvSpPr>
-          <p:cNvPr id="9" name="Arrow: Bent-Up 8">
+          <p:cNvPr id="7" name="Rectangle 6">
             <a:extLst>
               <a:ext uri="{FF2B5EF4-FFF2-40B4-BE49-F238E27FC236}">
-                <a16:creationId xmlns:a16="http://schemas.microsoft.com/office/drawing/2014/main" id="{43CC8CFB-4C99-259F-A2E1-C1966F2A9256}"/>
+                <a16:creationId xmlns:a16="http://schemas.microsoft.com/office/drawing/2014/main" id="{AA1481E2-E225-CB1E-5FC0-20D0387972C4}"/>
               </a:ext>
             </a:extLst>
           </p:cNvPr>
@@ -46877,11 +46987,63 @@
           <p:nvPr/>
         </p:nvSpPr>
         <p:spPr>
-          <a:xfrm rot="5400000">
-            <a:off x="21897" y="3450221"/>
-            <a:ext cx="1669312" cy="903767"/>
+          <a:xfrm>
+            <a:off x="1219032" y="4086390"/>
+            <a:ext cx="10157805" cy="871870"/>
           </a:xfrm>
-          <a:prstGeom prst="bentUpArrow">
+          <a:prstGeom prst="rect">
+            <a:avLst/>
+          </a:prstGeom>
+          <a:noFill/>
+          <a:ln w="31750">
+            <a:solidFill>
+              <a:schemeClr val="accent6"/>
+            </a:solidFill>
+          </a:ln>
+        </p:spPr>
+        <p:style>
+          <a:lnRef idx="2">
+            <a:schemeClr val="accent1">
+              <a:shade val="50000"/>
+            </a:schemeClr>
+          </a:lnRef>
+          <a:fillRef idx="1">
+            <a:schemeClr val="accent1"/>
+          </a:fillRef>
+          <a:effectRef idx="0">
+            <a:schemeClr val="accent1"/>
+          </a:effectRef>
+          <a:fontRef idx="minor">
+            <a:schemeClr val="lt1"/>
+          </a:fontRef>
+        </p:style>
+        <p:txBody>
+          <a:bodyPr rtlCol="0" anchor="ctr"/>
+          <a:lstStyle/>
+          <a:p>
+            <a:pPr algn="ctr"/>
+            <a:endParaRPr lang="fr-FR"/>
+          </a:p>
+        </p:txBody>
+      </p:sp>
+      <p:sp>
+        <p:nvSpPr>
+          <p:cNvPr id="4" name="Arrow: Down 3">
+            <a:extLst>
+              <a:ext uri="{FF2B5EF4-FFF2-40B4-BE49-F238E27FC236}">
+                <a16:creationId xmlns:a16="http://schemas.microsoft.com/office/drawing/2014/main" id="{4B92274F-491B-942D-FD18-C984AC21D9B6}"/>
+              </a:ext>
+            </a:extLst>
+          </p:cNvPr>
+          <p:cNvSpPr/>
+          <p:nvPr/>
+        </p:nvSpPr>
+        <p:spPr>
+          <a:xfrm>
+            <a:off x="5805377" y="2977116"/>
+            <a:ext cx="290623" cy="414670"/>
+          </a:xfrm>
+          <a:prstGeom prst="downArrow">
             <a:avLst/>
           </a:prstGeom>
           <a:gradFill>
@@ -46928,10 +47090,10 @@
       </p:sp>
       <p:pic>
         <p:nvPicPr>
-          <p:cNvPr id="11" name="Picture 10">
+          <p:cNvPr id="8" name="Picture 7">
             <a:extLst>
               <a:ext uri="{FF2B5EF4-FFF2-40B4-BE49-F238E27FC236}">
-                <a16:creationId xmlns:a16="http://schemas.microsoft.com/office/drawing/2014/main" id="{14FDD82F-A001-EF7F-B4A6-AC95A767E4F0}"/>
+                <a16:creationId xmlns:a16="http://schemas.microsoft.com/office/drawing/2014/main" id="{D6C333E4-EAB2-386F-0AA9-7808BDB89AD5}"/>
               </a:ext>
             </a:extLst>
           </p:cNvPr>
@@ -46942,15 +47104,14 @@
         </p:nvPicPr>
         <p:blipFill>
           <a:blip r:embed="rId5"/>
-          <a:srcRect b="47701"/>
           <a:stretch>
             <a:fillRect/>
           </a:stretch>
         </p:blipFill>
         <p:spPr>
           <a:xfrm>
-            <a:off x="1308437" y="3540642"/>
-            <a:ext cx="10787676" cy="2534561"/>
+            <a:off x="3514930" y="2427906"/>
+            <a:ext cx="5162139" cy="643830"/>
           </a:xfrm>
           <a:prstGeom prst="rect">
             <a:avLst/>
@@ -46964,58 +47125,6 @@
           </a:effectLst>
         </p:spPr>
       </p:pic>
-      <p:sp>
-        <p:nvSpPr>
-          <p:cNvPr id="7" name="Rectangle 6">
-            <a:extLst>
-              <a:ext uri="{FF2B5EF4-FFF2-40B4-BE49-F238E27FC236}">
-                <a16:creationId xmlns:a16="http://schemas.microsoft.com/office/drawing/2014/main" id="{AA1481E2-E225-CB1E-5FC0-20D0387972C4}"/>
-              </a:ext>
-            </a:extLst>
-          </p:cNvPr>
-          <p:cNvSpPr/>
-          <p:nvPr/>
-        </p:nvSpPr>
-        <p:spPr>
-          <a:xfrm>
-            <a:off x="1850064" y="4263656"/>
-            <a:ext cx="10157906" cy="871870"/>
-          </a:xfrm>
-          <a:prstGeom prst="rect">
-            <a:avLst/>
-          </a:prstGeom>
-          <a:noFill/>
-          <a:ln w="31750">
-            <a:solidFill>
-              <a:schemeClr val="accent6"/>
-            </a:solidFill>
-          </a:ln>
-        </p:spPr>
-        <p:style>
-          <a:lnRef idx="2">
-            <a:schemeClr val="accent1">
-              <a:shade val="50000"/>
-            </a:schemeClr>
-          </a:lnRef>
-          <a:fillRef idx="1">
-            <a:schemeClr val="accent1"/>
-          </a:fillRef>
-          <a:effectRef idx="0">
-            <a:schemeClr val="accent1"/>
-          </a:effectRef>
-          <a:fontRef idx="minor">
-            <a:schemeClr val="lt1"/>
-          </a:fontRef>
-        </p:style>
-        <p:txBody>
-          <a:bodyPr rtlCol="0" anchor="ctr"/>
-          <a:lstStyle/>
-          <a:p>
-            <a:pPr algn="ctr"/>
-            <a:endParaRPr lang="fr-FR"/>
-          </a:p>
-        </p:txBody>
-      </p:sp>
     </p:spTree>
     <p:extLst>
       <p:ext uri="{BB962C8B-B14F-4D97-AF65-F5344CB8AC3E}">
@@ -47133,6 +47242,9 @@
             </a:r>
             <a:r>
               <a:rPr lang="en-US" sz="2800" b="0" dirty="0">
+                <a:solidFill>
+                  <a:schemeClr val="accent1"/>
+                </a:solidFill>
                 <a:latin typeface="Consolas" panose="020B0609020204030204" pitchFamily="49" charset="0"/>
               </a:rPr>
               <a:t>file upload</a:t>
@@ -47166,7 +47278,23 @@
                   <a:schemeClr val="tx2"/>
                 </a:solidFill>
               </a:rPr>
-              <a:t> It is very common that PDF format was accepted for the file.</a:t>
+              <a:t> It is very common that </a:t>
+            </a:r>
+            <a:r>
+              <a:rPr lang="en-US" sz="2800" b="0" dirty="0">
+                <a:solidFill>
+                  <a:schemeClr val="accent1"/>
+                </a:solidFill>
+              </a:rPr>
+              <a:t>PDF format</a:t>
+            </a:r>
+            <a:r>
+              <a:rPr lang="en-US" sz="2800" b="0" dirty="0">
+                <a:solidFill>
+                  <a:schemeClr val="tx2"/>
+                </a:solidFill>
+              </a:rPr>
+              <a:t> was accepted for the file.</a:t>
             </a:r>
           </a:p>
         </p:txBody>
@@ -47378,7 +47506,7 @@
                   <a:schemeClr val="tx2"/>
                 </a:solidFill>
               </a:rPr>
-              <a:t>Such vulnerabilities can lead to abuse like the following:</a:t>
+              <a:t> Such vulnerabilities can lead to abuses like the following:</a:t>
             </a:r>
           </a:p>
           <a:p>
@@ -48335,7 +48463,7 @@
                   <a:schemeClr val="tx2"/>
                 </a:solidFill>
               </a:rPr>
-              <a:t> Such link can used, in addition to instruction into the PDF, to trick the user to click on the link and then download/execute the referenced malicious program (phishing approach).</a:t>
+              <a:t> Such link can be used, in addition to instruction into the PDF, to trick the user to click on the link and then download/execute the referenced malicious program (phishing approach).</a:t>
             </a:r>
           </a:p>
           <a:p>
@@ -48995,14 +49123,15 @@
         </p:nvPicPr>
         <p:blipFill>
           <a:blip r:embed="rId2"/>
+          <a:srcRect b="34957"/>
           <a:stretch>
             <a:fillRect/>
           </a:stretch>
         </p:blipFill>
         <p:spPr>
           <a:xfrm>
-            <a:off x="3643430" y="3763926"/>
-            <a:ext cx="8431559" cy="3056860"/>
+            <a:off x="1501317" y="3891517"/>
+            <a:ext cx="9189361" cy="2166989"/>
           </a:xfrm>
           <a:prstGeom prst="rect">
             <a:avLst/>
@@ -49038,7 +49167,7 @@
         </p:blipFill>
         <p:spPr>
           <a:xfrm>
-            <a:off x="131520" y="927085"/>
+            <a:off x="2798758" y="1022779"/>
             <a:ext cx="6594481" cy="2741147"/>
           </a:xfrm>
           <a:prstGeom prst="rect">
@@ -49151,7 +49280,7 @@
         </p:blipFill>
         <p:spPr>
           <a:xfrm>
-            <a:off x="134774" y="2156161"/>
+            <a:off x="709357" y="2156161"/>
             <a:ext cx="10773285" cy="3386209"/>
           </a:xfrm>
           <a:prstGeom prst="rect">
@@ -49188,7 +49317,7 @@
         </p:blipFill>
         <p:spPr>
           <a:xfrm>
-            <a:off x="134774" y="946297"/>
+            <a:off x="1822600" y="1070607"/>
             <a:ext cx="8546800" cy="744279"/>
           </a:xfrm>
           <a:prstGeom prst="rect">
@@ -49519,7 +49648,7 @@
                   <a:schemeClr val="tx2"/>
                 </a:solidFill>
               </a:rPr>
-              <a:t> Such technique can be used to leverage service as a relay to store malicious into the company information system and then retrieve the malicious file, once inside, the carry an attack in a second phase.</a:t>
+              <a:t> Such technique can be used to leverage the service as a relay to store a malicious file into the company information system and then retrieve the malicious file, once inside, to carry an attack in a second phase.</a:t>
             </a:r>
           </a:p>
           <a:p>
@@ -49556,8 +49685,8 @@
         </p:blipFill>
         <p:spPr>
           <a:xfrm>
-            <a:off x="588000" y="5094069"/>
-            <a:ext cx="11060513" cy="573083"/>
+            <a:off x="144964" y="5007935"/>
+            <a:ext cx="11902071" cy="616687"/>
           </a:xfrm>
           <a:prstGeom prst="rect">
             <a:avLst/>
@@ -49679,14 +49808,21 @@
                   <a:schemeClr val="tx2"/>
                 </a:solidFill>
               </a:rPr>
-              <a:t>  🤔 Test failed so the following additional validation was proposed to the team:</a:t>
+              <a:t>  🤔 Test failed so the following additional processing was proposed to the team:</a:t>
             </a:r>
           </a:p>
           <a:p>
             <a:pPr lvl="1"/>
             <a:r>
               <a:rPr lang="en-US" sz="2400" dirty="0"/>
-              <a:t>Load the PDF file in memory with a PDF parser and then, save it via the PDF library into another byte buffer to remove any additional content that is not part of the PDF structure.</a:t>
+              <a:t>Load the PDF file in memory with a PDF parsing library.</a:t>
+            </a:r>
+          </a:p>
+          <a:p>
+            <a:pPr lvl="1"/>
+            <a:r>
+              <a:rPr lang="en-US" sz="2400" dirty="0"/>
+              <a:t> Save it, via the same PDF library, into another byte buffer to remove any additional content that is not part of the PDF structure.</a:t>
             </a:r>
           </a:p>
           <a:p>
@@ -49787,7 +49923,7 @@
         <p:cNvPr id="1" name="">
           <a:extLst>
             <a:ext uri="{FF2B5EF4-FFF2-40B4-BE49-F238E27FC236}">
-              <a16:creationId xmlns:a16="http://schemas.microsoft.com/office/drawing/2014/main" id="{6C81B662-827E-673B-C37F-BDDBA873FDF8}"/>
+              <a16:creationId xmlns:a16="http://schemas.microsoft.com/office/drawing/2014/main" id="{0DB831D1-14C1-1277-C808-9F41E5161BCA}"/>
             </a:ext>
           </a:extLst>
         </p:cNvPr>
@@ -49807,7 +49943,7 @@
           <p:cNvPr id="2" name="Titre 1">
             <a:extLst>
               <a:ext uri="{FF2B5EF4-FFF2-40B4-BE49-F238E27FC236}">
-                <a16:creationId xmlns:a16="http://schemas.microsoft.com/office/drawing/2014/main" id="{D4364BF5-2AAB-E072-15D0-CBDC9202657D}"/>
+                <a16:creationId xmlns:a16="http://schemas.microsoft.com/office/drawing/2014/main" id="{0067B626-62D2-EA15-9946-30BFD3866D6C}"/>
               </a:ext>
             </a:extLst>
           </p:cNvPr>
@@ -49835,7 +49971,7 @@
           <p:cNvPr id="3" name="Espace réservé du texte 2">
             <a:extLst>
               <a:ext uri="{FF2B5EF4-FFF2-40B4-BE49-F238E27FC236}">
-                <a16:creationId xmlns:a16="http://schemas.microsoft.com/office/drawing/2014/main" id="{E57E7D38-3558-049A-380D-1044EA6C69AF}"/>
+                <a16:creationId xmlns:a16="http://schemas.microsoft.com/office/drawing/2014/main" id="{DE2D873E-EA82-331F-BE96-6FF6C7492461}"/>
               </a:ext>
             </a:extLst>
           </p:cNvPr>
@@ -49857,15 +49993,28 @@
           <a:lstStyle/>
           <a:p>
             <a:r>
+              <a:rPr lang="en-US" sz="2400" dirty="0"/>
+              <a:t> ✅ </a:t>
+            </a:r>
+            <a:r>
               <a:rPr lang="en-US" sz="2800" b="0" dirty="0">
                 <a:solidFill>
                   <a:schemeClr val="tx2"/>
                 </a:solidFill>
               </a:rPr>
-              <a:t> ✅ Test passed after the adding of the additional validation:</a:t>
+              <a:t>Test passed after the adding of the additional processing:</a:t>
             </a:r>
           </a:p>
           <a:p>
+            <a:pPr marL="0" lvl="1" indent="0">
+              <a:buNone/>
+            </a:pPr>
+            <a:endParaRPr lang="en-US" sz="2400" dirty="0"/>
+          </a:p>
+          <a:p>
+            <a:pPr marL="0" indent="0">
+              <a:buNone/>
+            </a:pPr>
             <a:endParaRPr lang="en-US" sz="2800" b="0" dirty="0">
               <a:solidFill>
                 <a:schemeClr val="tx2"/>
@@ -49892,7 +50041,7 @@
           <p:cNvPr id="7" name="TextBox 6">
             <a:extLst>
               <a:ext uri="{FF2B5EF4-FFF2-40B4-BE49-F238E27FC236}">
-                <a16:creationId xmlns:a16="http://schemas.microsoft.com/office/drawing/2014/main" id="{67C8EA75-CBF8-C05D-7AB7-5D4AF69E860E}"/>
+                <a16:creationId xmlns:a16="http://schemas.microsoft.com/office/drawing/2014/main" id="{FA41DF18-1CF0-931C-81B5-A98B795EC1DA}"/>
               </a:ext>
             </a:extLst>
           </p:cNvPr>
@@ -49932,7 +50081,7 @@
           <p:cNvPr id="5" name="Picture 4">
             <a:extLst>
               <a:ext uri="{FF2B5EF4-FFF2-40B4-BE49-F238E27FC236}">
-                <a16:creationId xmlns:a16="http://schemas.microsoft.com/office/drawing/2014/main" id="{7044B40C-F9A7-7634-524E-19B743E3A059}"/>
+                <a16:creationId xmlns:a16="http://schemas.microsoft.com/office/drawing/2014/main" id="{0255F110-8AF1-2B31-E1A2-CFC2EDCA9CCD}"/>
               </a:ext>
             </a:extLst>
           </p:cNvPr>
@@ -49949,14 +50098,293 @@
         </p:blipFill>
         <p:spPr>
           <a:xfrm>
-            <a:off x="251597" y="1914313"/>
-            <a:ext cx="11688806" cy="3029373"/>
+            <a:off x="99102" y="1919076"/>
+            <a:ext cx="12048050" cy="3110123"/>
           </a:xfrm>
           <a:prstGeom prst="rect">
             <a:avLst/>
           </a:prstGeom>
+          <a:effectLst>
+            <a:outerShdw blurRad="50800" dist="38100" dir="2700000" algn="tl" rotWithShape="0">
+              <a:prstClr val="black">
+                <a:alpha val="40000"/>
+              </a:prstClr>
+            </a:outerShdw>
+          </a:effectLst>
         </p:spPr>
       </p:pic>
+    </p:spTree>
+    <p:extLst>
+      <p:ext uri="{BB962C8B-B14F-4D97-AF65-F5344CB8AC3E}">
+        <p14:creationId xmlns:p14="http://schemas.microsoft.com/office/powerpoint/2010/main" val="1465579828"/>
+      </p:ext>
+    </p:extLst>
+  </p:cSld>
+  <p:clrMapOvr>
+    <a:masterClrMapping/>
+  </p:clrMapOvr>
+  <mc:AlternateContent xmlns:mc="http://schemas.openxmlformats.org/markup-compatibility/2006">
+    <mc:Choice xmlns:p14="http://schemas.microsoft.com/office/powerpoint/2010/main" Requires="p14">
+      <p:transition spd="med" p14:dur="700">
+        <p:fade/>
+      </p:transition>
+    </mc:Choice>
+    <mc:Fallback>
+      <p:transition spd="med">
+        <p:fade/>
+      </p:transition>
+    </mc:Fallback>
+  </mc:AlternateContent>
+</p:sld>
+</file>
+
+<file path=ppt/slides/slide33.xml><?xml version="1.0" encoding="utf-8"?>
+<p:sld xmlns:a="http://schemas.openxmlformats.org/drawingml/2006/main" xmlns:r="http://schemas.openxmlformats.org/officeDocument/2006/relationships" xmlns:p="http://schemas.openxmlformats.org/presentationml/2006/main">
+  <p:cSld>
+    <p:spTree>
+      <p:nvGrpSpPr>
+        <p:cNvPr id="1" name="">
+          <a:extLst>
+            <a:ext uri="{FF2B5EF4-FFF2-40B4-BE49-F238E27FC236}">
+              <a16:creationId xmlns:a16="http://schemas.microsoft.com/office/drawing/2014/main" id="{6C81B662-827E-673B-C37F-BDDBA873FDF8}"/>
+            </a:ext>
+          </a:extLst>
+        </p:cNvPr>
+        <p:cNvGrpSpPr/>
+        <p:nvPr/>
+      </p:nvGrpSpPr>
+      <p:grpSpPr>
+        <a:xfrm>
+          <a:off x="0" y="0"/>
+          <a:ext cx="0" cy="0"/>
+          <a:chOff x="0" y="0"/>
+          <a:chExt cx="0" cy="0"/>
+        </a:xfrm>
+      </p:grpSpPr>
+      <p:sp>
+        <p:nvSpPr>
+          <p:cNvPr id="2" name="Titre 1">
+            <a:extLst>
+              <a:ext uri="{FF2B5EF4-FFF2-40B4-BE49-F238E27FC236}">
+                <a16:creationId xmlns:a16="http://schemas.microsoft.com/office/drawing/2014/main" id="{D4364BF5-2AAB-E072-15D0-CBDC9202657D}"/>
+              </a:ext>
+            </a:extLst>
+          </p:cNvPr>
+          <p:cNvSpPr>
+            <a:spLocks noGrp="1"/>
+          </p:cNvSpPr>
+          <p:nvPr>
+            <p:ph type="title"/>
+          </p:nvPr>
+        </p:nvSpPr>
+        <p:spPr/>
+        <p:txBody>
+          <a:bodyPr/>
+          <a:lstStyle/>
+          <a:p>
+            <a:r>
+              <a:rPr lang="en-US" dirty="0"/>
+              <a:t>📖 Let’s the story begin – Final state</a:t>
+            </a:r>
+          </a:p>
+        </p:txBody>
+      </p:sp>
+      <p:sp>
+        <p:nvSpPr>
+          <p:cNvPr id="3" name="Espace réservé du texte 2">
+            <a:extLst>
+              <a:ext uri="{FF2B5EF4-FFF2-40B4-BE49-F238E27FC236}">
+                <a16:creationId xmlns:a16="http://schemas.microsoft.com/office/drawing/2014/main" id="{E57E7D38-3558-049A-380D-1044EA6C69AF}"/>
+              </a:ext>
+            </a:extLst>
+          </p:cNvPr>
+          <p:cNvSpPr>
+            <a:spLocks noGrp="1"/>
+          </p:cNvSpPr>
+          <p:nvPr>
+            <p:ph type="body" sz="quarter" idx="15"/>
+          </p:nvPr>
+        </p:nvSpPr>
+        <p:spPr>
+          <a:xfrm>
+            <a:off x="588000" y="977317"/>
+            <a:ext cx="11419970" cy="4949030"/>
+          </a:xfrm>
+        </p:spPr>
+        <p:txBody>
+          <a:bodyPr/>
+          <a:lstStyle/>
+          <a:p>
+            <a:r>
+              <a:rPr lang="en-US" sz="2800" b="0" dirty="0">
+                <a:solidFill>
+                  <a:schemeClr val="tx2"/>
+                </a:solidFill>
+              </a:rPr>
+              <a:t> ✅ All malicious variation of a PDF file, know by your servitor, were applied against the upload service:</a:t>
+            </a:r>
+          </a:p>
+          <a:p>
+            <a:pPr lvl="1"/>
+            <a:r>
+              <a:rPr lang="en-US" sz="2400" b="0" dirty="0">
+                <a:solidFill>
+                  <a:schemeClr val="tx2"/>
+                </a:solidFill>
+              </a:rPr>
+              <a:t>It can be considered as safe (for the moment).</a:t>
+            </a:r>
+          </a:p>
+          <a:p>
+            <a:pPr marL="0" indent="0">
+              <a:buNone/>
+            </a:pPr>
+            <a:endParaRPr lang="en-US" sz="2800" b="0" dirty="0">
+              <a:solidFill>
+                <a:schemeClr val="tx2"/>
+              </a:solidFill>
+            </a:endParaRPr>
+          </a:p>
+          <a:p>
+            <a:r>
+              <a:rPr lang="en-US" sz="2800" b="0" dirty="0">
+                <a:solidFill>
+                  <a:schemeClr val="tx2"/>
+                </a:solidFill>
+              </a:rPr>
+              <a:t> 🔬 The following additional validations/processing were added:</a:t>
+            </a:r>
+          </a:p>
+          <a:p>
+            <a:pPr lvl="1"/>
+            <a:r>
+              <a:rPr lang="en-US" sz="2400" b="0" dirty="0">
+                <a:solidFill>
+                  <a:schemeClr val="tx2"/>
+                </a:solidFill>
+              </a:rPr>
+              <a:t>File is a valid PDF file.</a:t>
+            </a:r>
+          </a:p>
+          <a:p>
+            <a:pPr lvl="1"/>
+            <a:r>
+              <a:rPr lang="en-US" sz="2400" b="0" dirty="0">
+                <a:solidFill>
+                  <a:schemeClr val="tx2"/>
+                </a:solidFill>
+              </a:rPr>
+              <a:t>File do not contain any JavaScript code, attachments files or XFA forms.</a:t>
+            </a:r>
+          </a:p>
+          <a:p>
+            <a:pPr lvl="1"/>
+            <a:r>
+              <a:rPr lang="en-US" sz="2400" b="0" dirty="0">
+                <a:solidFill>
+                  <a:schemeClr val="tx2"/>
+                </a:solidFill>
+              </a:rPr>
+              <a:t>File contains only links to allowed domains and content.</a:t>
+            </a:r>
+          </a:p>
+          <a:p>
+            <a:pPr lvl="1"/>
+            <a:r>
+              <a:rPr lang="en-US" sz="2400" b="0" dirty="0">
+                <a:solidFill>
+                  <a:schemeClr val="tx2"/>
+                </a:solidFill>
+              </a:rPr>
+              <a:t>File do not contain any "hidden content".</a:t>
+            </a:r>
+            <a:endParaRPr lang="en-US" sz="2400" dirty="0"/>
+          </a:p>
+          <a:p>
+            <a:pPr marL="0" indent="0">
+              <a:buNone/>
+            </a:pPr>
+            <a:endParaRPr lang="en-US" sz="2800" b="0" dirty="0">
+              <a:solidFill>
+                <a:schemeClr val="tx2"/>
+              </a:solidFill>
+            </a:endParaRPr>
+          </a:p>
+          <a:p>
+            <a:pPr marL="0" indent="0">
+              <a:buNone/>
+            </a:pPr>
+            <a:r>
+              <a:rPr lang="en-US" sz="2800" b="0" dirty="0">
+                <a:solidFill>
+                  <a:schemeClr val="tx2"/>
+                </a:solidFill>
+              </a:rPr>
+              <a:t>  </a:t>
+            </a:r>
+          </a:p>
+        </p:txBody>
+      </p:sp>
+      <p:sp>
+        <p:nvSpPr>
+          <p:cNvPr id="4" name="Rectangle 3">
+            <a:extLst>
+              <a:ext uri="{FF2B5EF4-FFF2-40B4-BE49-F238E27FC236}">
+                <a16:creationId xmlns:a16="http://schemas.microsoft.com/office/drawing/2014/main" id="{75CC2FC8-F95B-EF24-A541-FCCC55DB0D71}"/>
+              </a:ext>
+            </a:extLst>
+          </p:cNvPr>
+          <p:cNvSpPr/>
+          <p:nvPr/>
+        </p:nvSpPr>
+        <p:spPr>
+          <a:xfrm>
+            <a:off x="6096000" y="123276"/>
+            <a:ext cx="5911970" cy="808377"/>
+          </a:xfrm>
+          <a:prstGeom prst="rect">
+            <a:avLst/>
+          </a:prstGeom>
+          <a:solidFill>
+            <a:schemeClr val="accent3"/>
+          </a:solidFill>
+          <a:ln>
+            <a:noFill/>
+          </a:ln>
+        </p:spPr>
+        <p:style>
+          <a:lnRef idx="0">
+            <a:scrgbClr r="0" g="0" b="0"/>
+          </a:lnRef>
+          <a:fillRef idx="0">
+            <a:scrgbClr r="0" g="0" b="0"/>
+          </a:fillRef>
+          <a:effectRef idx="0">
+            <a:scrgbClr r="0" g="0" b="0"/>
+          </a:effectRef>
+          <a:fontRef idx="minor">
+            <a:schemeClr val="lt1"/>
+          </a:fontRef>
+        </p:style>
+        <p:txBody>
+          <a:bodyPr rtlCol="0" anchor="ctr"/>
+          <a:lstStyle/>
+          <a:p>
+            <a:pPr algn="ctr"/>
+            <a:r>
+              <a:rPr lang="en-US" dirty="0"/>
+              <a:t> 😉 Final level of exasperation not reached 100%. </a:t>
+            </a:r>
+          </a:p>
+          <a:p>
+            <a:pPr algn="ctr"/>
+            <a:r>
+              <a:rPr lang="en-US" dirty="0"/>
+              <a:t>So, I have not tested the effect of the gravity. </a:t>
+            </a:r>
+          </a:p>
+        </p:txBody>
+      </p:sp>
     </p:spTree>
     <p:extLst>
       <p:ext uri="{BB962C8B-B14F-4D97-AF65-F5344CB8AC3E}">
@@ -49979,10 +50407,584 @@
       </p:transition>
     </mc:Fallback>
   </mc:AlternateContent>
+  <p:timing>
+    <p:tnLst>
+      <p:par>
+        <p:cTn id="1" dur="indefinite" restart="never" nodeType="tmRoot">
+          <p:childTnLst>
+            <p:seq concurrent="1" nextAc="seek">
+              <p:cTn id="2" dur="indefinite" nodeType="mainSeq">
+                <p:childTnLst>
+                  <p:par>
+                    <p:cTn id="3" fill="hold">
+                      <p:stCondLst>
+                        <p:cond delay="indefinite"/>
+                      </p:stCondLst>
+                      <p:childTnLst>
+                        <p:par>
+                          <p:cTn id="4" fill="hold">
+                            <p:stCondLst>
+                              <p:cond delay="0"/>
+                            </p:stCondLst>
+                            <p:childTnLst>
+                              <p:par>
+                                <p:cTn id="5" presetID="42" presetClass="entr" presetSubtype="0" fill="hold" grpId="0" nodeType="clickEffect">
+                                  <p:stCondLst>
+                                    <p:cond delay="0"/>
+                                  </p:stCondLst>
+                                  <p:childTnLst>
+                                    <p:set>
+                                      <p:cBhvr>
+                                        <p:cTn id="6" dur="1" fill="hold">
+                                          <p:stCondLst>
+                                            <p:cond delay="0"/>
+                                          </p:stCondLst>
+                                        </p:cTn>
+                                        <p:tgtEl>
+                                          <p:spTgt spid="4"/>
+                                        </p:tgtEl>
+                                        <p:attrNameLst>
+                                          <p:attrName>style.visibility</p:attrName>
+                                        </p:attrNameLst>
+                                      </p:cBhvr>
+                                      <p:to>
+                                        <p:strVal val="visible"/>
+                                      </p:to>
+                                    </p:set>
+                                    <p:animEffect transition="in" filter="fade">
+                                      <p:cBhvr>
+                                        <p:cTn id="7" dur="1000"/>
+                                        <p:tgtEl>
+                                          <p:spTgt spid="4"/>
+                                        </p:tgtEl>
+                                      </p:cBhvr>
+                                    </p:animEffect>
+                                    <p:anim calcmode="lin" valueType="num">
+                                      <p:cBhvr>
+                                        <p:cTn id="8" dur="1000" fill="hold"/>
+                                        <p:tgtEl>
+                                          <p:spTgt spid="4"/>
+                                        </p:tgtEl>
+                                        <p:attrNameLst>
+                                          <p:attrName>ppt_x</p:attrName>
+                                        </p:attrNameLst>
+                                      </p:cBhvr>
+                                      <p:tavLst>
+                                        <p:tav tm="0">
+                                          <p:val>
+                                            <p:strVal val="#ppt_x"/>
+                                          </p:val>
+                                        </p:tav>
+                                        <p:tav tm="100000">
+                                          <p:val>
+                                            <p:strVal val="#ppt_x"/>
+                                          </p:val>
+                                        </p:tav>
+                                      </p:tavLst>
+                                    </p:anim>
+                                    <p:anim calcmode="lin" valueType="num">
+                                      <p:cBhvr>
+                                        <p:cTn id="9" dur="1000" fill="hold"/>
+                                        <p:tgtEl>
+                                          <p:spTgt spid="4"/>
+                                        </p:tgtEl>
+                                        <p:attrNameLst>
+                                          <p:attrName>ppt_y</p:attrName>
+                                        </p:attrNameLst>
+                                      </p:cBhvr>
+                                      <p:tavLst>
+                                        <p:tav tm="0">
+                                          <p:val>
+                                            <p:strVal val="#ppt_y+.1"/>
+                                          </p:val>
+                                        </p:tav>
+                                        <p:tav tm="100000">
+                                          <p:val>
+                                            <p:strVal val="#ppt_y"/>
+                                          </p:val>
+                                        </p:tav>
+                                      </p:tavLst>
+                                    </p:anim>
+                                  </p:childTnLst>
+                                </p:cTn>
+                              </p:par>
+                            </p:childTnLst>
+                          </p:cTn>
+                        </p:par>
+                      </p:childTnLst>
+                    </p:cTn>
+                  </p:par>
+                </p:childTnLst>
+              </p:cTn>
+              <p:prevCondLst>
+                <p:cond evt="onPrev" delay="0">
+                  <p:tgtEl>
+                    <p:sldTgt/>
+                  </p:tgtEl>
+                </p:cond>
+              </p:prevCondLst>
+              <p:nextCondLst>
+                <p:cond evt="onNext" delay="0">
+                  <p:tgtEl>
+                    <p:sldTgt/>
+                  </p:tgtEl>
+                </p:cond>
+              </p:nextCondLst>
+            </p:seq>
+          </p:childTnLst>
+        </p:cTn>
+      </p:par>
+    </p:tnLst>
+    <p:bldLst>
+      <p:bldP spid="4" grpId="0" animBg="1"/>
+    </p:bldLst>
+  </p:timing>
 </p:sld>
 </file>
 
-<file path=ppt/slides/slide33.xml><?xml version="1.0" encoding="utf-8"?>
+<file path=ppt/slides/slide34.xml><?xml version="1.0" encoding="utf-8"?>
+<p:sld xmlns:a="http://schemas.openxmlformats.org/drawingml/2006/main" xmlns:r="http://schemas.openxmlformats.org/officeDocument/2006/relationships" xmlns:p="http://schemas.openxmlformats.org/presentationml/2006/main">
+  <p:cSld>
+    <p:spTree>
+      <p:nvGrpSpPr>
+        <p:cNvPr id="1" name="">
+          <a:extLst>
+            <a:ext uri="{FF2B5EF4-FFF2-40B4-BE49-F238E27FC236}">
+              <a16:creationId xmlns:a16="http://schemas.microsoft.com/office/drawing/2014/main" id="{13F400B5-6B1B-4521-5FD8-A1304FCF4F69}"/>
+            </a:ext>
+          </a:extLst>
+        </p:cNvPr>
+        <p:cNvGrpSpPr/>
+        <p:nvPr/>
+      </p:nvGrpSpPr>
+      <p:grpSpPr>
+        <a:xfrm>
+          <a:off x="0" y="0"/>
+          <a:ext cx="0" cy="0"/>
+          <a:chOff x="0" y="0"/>
+          <a:chExt cx="0" cy="0"/>
+        </a:xfrm>
+      </p:grpSpPr>
+      <p:sp>
+        <p:nvSpPr>
+          <p:cNvPr id="2" name="Titre 1">
+            <a:extLst>
+              <a:ext uri="{FF2B5EF4-FFF2-40B4-BE49-F238E27FC236}">
+                <a16:creationId xmlns:a16="http://schemas.microsoft.com/office/drawing/2014/main" id="{7B5F710B-7C72-92A7-2EC6-B37F1470C8F2}"/>
+              </a:ext>
+            </a:extLst>
+          </p:cNvPr>
+          <p:cNvSpPr>
+            <a:spLocks noGrp="1"/>
+          </p:cNvSpPr>
+          <p:nvPr>
+            <p:ph type="title"/>
+          </p:nvPr>
+        </p:nvSpPr>
+        <p:spPr/>
+        <p:txBody>
+          <a:bodyPr/>
+          <a:lstStyle/>
+          <a:p>
+            <a:r>
+              <a:rPr lang="en-US" dirty="0"/>
+              <a:t>🛣️ Conclusion</a:t>
+            </a:r>
+          </a:p>
+        </p:txBody>
+      </p:sp>
+      <p:sp>
+        <p:nvSpPr>
+          <p:cNvPr id="3" name="Espace réservé du texte 2">
+            <a:extLst>
+              <a:ext uri="{FF2B5EF4-FFF2-40B4-BE49-F238E27FC236}">
+                <a16:creationId xmlns:a16="http://schemas.microsoft.com/office/drawing/2014/main" id="{FF2CBF5E-E258-4CD8-1B47-F4CFE1D148C1}"/>
+              </a:ext>
+            </a:extLst>
+          </p:cNvPr>
+          <p:cNvSpPr>
+            <a:spLocks noGrp="1"/>
+          </p:cNvSpPr>
+          <p:nvPr>
+            <p:ph type="body" sz="quarter" idx="15"/>
+          </p:nvPr>
+        </p:nvSpPr>
+        <p:spPr>
+          <a:xfrm>
+            <a:off x="588000" y="977317"/>
+            <a:ext cx="11419970" cy="4949030"/>
+          </a:xfrm>
+        </p:spPr>
+        <p:txBody>
+          <a:bodyPr/>
+          <a:lstStyle/>
+          <a:p>
+            <a:r>
+              <a:rPr lang="en-US" sz="2800" b="0" dirty="0">
+                <a:solidFill>
+                  <a:schemeClr val="tx2"/>
+                </a:solidFill>
+              </a:rPr>
+              <a:t> ❌ Regarding the following statement</a:t>
+            </a:r>
+          </a:p>
+          <a:p>
+            <a:pPr lvl="1"/>
+            <a:r>
+              <a:rPr lang="en-US" sz="2400" b="0" dirty="0">
+                <a:solidFill>
+                  <a:schemeClr val="tx2"/>
+                </a:solidFill>
+              </a:rPr>
+              <a:t> PDF is a safe format </a:t>
+            </a:r>
+            <a:r>
+              <a:rPr lang="en-US" sz="2400" b="0" dirty="0">
+                <a:solidFill>
+                  <a:schemeClr val="tx2"/>
+                </a:solidFill>
+                <a:sym typeface="Wingdings" panose="05000000000000000000" pitchFamily="2" charset="2"/>
+              </a:rPr>
+              <a:t> No, it require validation like all file formats.</a:t>
+            </a:r>
+            <a:endParaRPr lang="en-US" sz="2400" b="0" dirty="0">
+              <a:solidFill>
+                <a:schemeClr val="tx2"/>
+              </a:solidFill>
+            </a:endParaRPr>
+          </a:p>
+          <a:p>
+            <a:pPr lvl="1"/>
+            <a:r>
+              <a:rPr lang="en-US" sz="2400" b="0" dirty="0">
+                <a:solidFill>
+                  <a:schemeClr val="tx2"/>
+                </a:solidFill>
+              </a:rPr>
+              <a:t>A "file upload" is simple to implement </a:t>
+            </a:r>
+            <a:r>
+              <a:rPr lang="en-US" sz="2400" b="0" dirty="0">
+                <a:solidFill>
+                  <a:schemeClr val="tx2"/>
+                </a:solidFill>
+                <a:sym typeface="Wingdings" panose="05000000000000000000" pitchFamily="2" charset="2"/>
+              </a:rPr>
+              <a:t> Not really.</a:t>
+            </a:r>
+          </a:p>
+          <a:p>
+            <a:pPr lvl="1"/>
+            <a:endParaRPr lang="en-US" sz="2400" dirty="0">
+              <a:sym typeface="Wingdings" panose="05000000000000000000" pitchFamily="2" charset="2"/>
+            </a:endParaRPr>
+          </a:p>
+          <a:p>
+            <a:r>
+              <a:rPr lang="en-US" sz="2800" b="0" dirty="0">
+                <a:solidFill>
+                  <a:schemeClr val="tx2"/>
+                </a:solidFill>
+                <a:sym typeface="Wingdings" panose="05000000000000000000" pitchFamily="2" charset="2"/>
+              </a:rPr>
+              <a:t> ✅ All the frustration meet could be avoided by a more precise User Story based on the analysis of:</a:t>
+            </a:r>
+          </a:p>
+          <a:p>
+            <a:pPr lvl="1"/>
+            <a:r>
+              <a:rPr lang="en-US" sz="2400" b="0" dirty="0">
+                <a:solidFill>
+                  <a:schemeClr val="tx2"/>
+                </a:solidFill>
+                <a:sym typeface="Wingdings" panose="05000000000000000000" pitchFamily="2" charset="2"/>
+              </a:rPr>
+              <a:t> Real use cases of the wanted file format from a business perspective.</a:t>
+            </a:r>
+          </a:p>
+          <a:p>
+            <a:pPr lvl="1"/>
+            <a:r>
+              <a:rPr lang="en-US" sz="2400" dirty="0">
+                <a:sym typeface="Wingdings" panose="05000000000000000000" pitchFamily="2" charset="2"/>
+              </a:rPr>
+              <a:t> Attack vectors exposed by the wanted file format from a security perspective.</a:t>
+            </a:r>
+            <a:endParaRPr lang="en-US" sz="2400" b="0" dirty="0">
+              <a:solidFill>
+                <a:schemeClr val="tx2"/>
+              </a:solidFill>
+            </a:endParaRPr>
+          </a:p>
+          <a:p>
+            <a:endParaRPr lang="en-US" sz="2800" b="0" dirty="0">
+              <a:solidFill>
+                <a:schemeClr val="tx2"/>
+              </a:solidFill>
+            </a:endParaRPr>
+          </a:p>
+          <a:p>
+            <a:pPr marL="0" indent="0">
+              <a:buNone/>
+            </a:pPr>
+            <a:r>
+              <a:rPr lang="en-US" sz="2800" b="0" dirty="0">
+                <a:solidFill>
+                  <a:schemeClr val="tx2"/>
+                </a:solidFill>
+              </a:rPr>
+              <a:t>  </a:t>
+            </a:r>
+          </a:p>
+        </p:txBody>
+      </p:sp>
+    </p:spTree>
+    <p:extLst>
+      <p:ext uri="{BB962C8B-B14F-4D97-AF65-F5344CB8AC3E}">
+        <p14:creationId xmlns:p14="http://schemas.microsoft.com/office/powerpoint/2010/main" val="2469469424"/>
+      </p:ext>
+    </p:extLst>
+  </p:cSld>
+  <p:clrMapOvr>
+    <a:masterClrMapping/>
+  </p:clrMapOvr>
+  <mc:AlternateContent xmlns:mc="http://schemas.openxmlformats.org/markup-compatibility/2006">
+    <mc:Choice xmlns:p14="http://schemas.microsoft.com/office/powerpoint/2010/main" Requires="p14">
+      <p:transition spd="med" p14:dur="700">
+        <p:fade/>
+      </p:transition>
+    </mc:Choice>
+    <mc:Fallback>
+      <p:transition spd="med">
+        <p:fade/>
+      </p:transition>
+    </mc:Fallback>
+  </mc:AlternateContent>
+</p:sld>
+</file>
+
+<file path=ppt/slides/slide35.xml><?xml version="1.0" encoding="utf-8"?>
+<p:sld xmlns:a="http://schemas.openxmlformats.org/drawingml/2006/main" xmlns:r="http://schemas.openxmlformats.org/officeDocument/2006/relationships" xmlns:p="http://schemas.openxmlformats.org/presentationml/2006/main">
+  <p:cSld>
+    <p:spTree>
+      <p:nvGrpSpPr>
+        <p:cNvPr id="1" name="">
+          <a:extLst>
+            <a:ext uri="{FF2B5EF4-FFF2-40B4-BE49-F238E27FC236}">
+              <a16:creationId xmlns:a16="http://schemas.microsoft.com/office/drawing/2014/main" id="{35FCEB59-3FB1-8406-0357-F47AA97C38EF}"/>
+            </a:ext>
+          </a:extLst>
+        </p:cNvPr>
+        <p:cNvGrpSpPr/>
+        <p:nvPr/>
+      </p:nvGrpSpPr>
+      <p:grpSpPr>
+        <a:xfrm>
+          <a:off x="0" y="0"/>
+          <a:ext cx="0" cy="0"/>
+          <a:chOff x="0" y="0"/>
+          <a:chExt cx="0" cy="0"/>
+        </a:xfrm>
+      </p:grpSpPr>
+      <p:sp>
+        <p:nvSpPr>
+          <p:cNvPr id="2" name="Titre 1">
+            <a:extLst>
+              <a:ext uri="{FF2B5EF4-FFF2-40B4-BE49-F238E27FC236}">
+                <a16:creationId xmlns:a16="http://schemas.microsoft.com/office/drawing/2014/main" id="{D6F0257B-0D8F-597A-7407-0281BEA541A4}"/>
+              </a:ext>
+            </a:extLst>
+          </p:cNvPr>
+          <p:cNvSpPr>
+            <a:spLocks noGrp="1"/>
+          </p:cNvSpPr>
+          <p:nvPr>
+            <p:ph type="title"/>
+          </p:nvPr>
+        </p:nvSpPr>
+        <p:spPr/>
+        <p:txBody>
+          <a:bodyPr/>
+          <a:lstStyle/>
+          <a:p>
+            <a:r>
+              <a:rPr lang="en-US" dirty="0"/>
+              <a:t>📦 Resources</a:t>
+            </a:r>
+          </a:p>
+        </p:txBody>
+      </p:sp>
+      <p:sp>
+        <p:nvSpPr>
+          <p:cNvPr id="3" name="Espace réservé du texte 2">
+            <a:extLst>
+              <a:ext uri="{FF2B5EF4-FFF2-40B4-BE49-F238E27FC236}">
+                <a16:creationId xmlns:a16="http://schemas.microsoft.com/office/drawing/2014/main" id="{67471A2E-57F3-AB6A-4E4E-33D39DC06A46}"/>
+              </a:ext>
+            </a:extLst>
+          </p:cNvPr>
+          <p:cNvSpPr>
+            <a:spLocks noGrp="1"/>
+          </p:cNvSpPr>
+          <p:nvPr>
+            <p:ph type="body" sz="quarter" idx="15"/>
+          </p:nvPr>
+        </p:nvSpPr>
+        <p:spPr>
+          <a:xfrm>
+            <a:off x="588000" y="977317"/>
+            <a:ext cx="11419970" cy="4949030"/>
+          </a:xfrm>
+        </p:spPr>
+        <p:txBody>
+          <a:bodyPr/>
+          <a:lstStyle/>
+          <a:p>
+            <a:r>
+              <a:rPr lang="en-US" sz="2800" b="0" dirty="0">
+                <a:solidFill>
+                  <a:schemeClr val="tx2"/>
+                </a:solidFill>
+              </a:rPr>
+              <a:t> </a:t>
+            </a:r>
+            <a:r>
+              <a:rPr lang="en-US" sz="2800" b="0" dirty="0">
+                <a:solidFill>
+                  <a:schemeClr val="tx2"/>
+                </a:solidFill>
+                <a:hlinkClick r:id="rId2"/>
+              </a:rPr>
+              <a:t>https://github.com/righettod/voxxeddays-lux-2026</a:t>
+            </a:r>
+            <a:endParaRPr lang="en-US" sz="2800" b="0" dirty="0">
+              <a:solidFill>
+                <a:schemeClr val="tx2"/>
+              </a:solidFill>
+            </a:endParaRPr>
+          </a:p>
+          <a:p>
+            <a:r>
+              <a:rPr lang="en-US" sz="2800" b="0" dirty="0">
+                <a:solidFill>
+                  <a:schemeClr val="tx2"/>
+                </a:solidFill>
+              </a:rPr>
+              <a:t> </a:t>
+            </a:r>
+            <a:r>
+              <a:rPr lang="en-US" sz="2800" b="0" dirty="0">
+                <a:solidFill>
+                  <a:schemeClr val="tx2"/>
+                </a:solidFill>
+                <a:hlinkClick r:id="rId3"/>
+              </a:rPr>
+              <a:t>https://github.com/righettod/code-snippets-security-utils</a:t>
+            </a:r>
+            <a:r>
+              <a:rPr lang="en-US" sz="2800" b="0" dirty="0">
+                <a:solidFill>
+                  <a:schemeClr val="tx2"/>
+                </a:solidFill>
+              </a:rPr>
+              <a:t> </a:t>
+            </a:r>
+          </a:p>
+          <a:p>
+            <a:r>
+              <a:rPr lang="en-US" sz="2800" b="0" dirty="0">
+                <a:solidFill>
+                  <a:schemeClr val="tx2"/>
+                </a:solidFill>
+              </a:rPr>
+              <a:t> </a:t>
+            </a:r>
+            <a:r>
+              <a:rPr lang="en-US" sz="2800" b="0" dirty="0">
+                <a:solidFill>
+                  <a:schemeClr val="tx2"/>
+                </a:solidFill>
+                <a:hlinkClick r:id="rId4"/>
+              </a:rPr>
+              <a:t>https://github.com/corkami/mitra</a:t>
+            </a:r>
+            <a:r>
+              <a:rPr lang="en-US" sz="2800" b="0" dirty="0">
+                <a:solidFill>
+                  <a:schemeClr val="tx2"/>
+                </a:solidFill>
+              </a:rPr>
+              <a:t> </a:t>
+            </a:r>
+          </a:p>
+          <a:p>
+            <a:r>
+              <a:rPr lang="en-US" sz="2800" b="0" dirty="0">
+                <a:solidFill>
+                  <a:schemeClr val="tx2"/>
+                </a:solidFill>
+              </a:rPr>
+              <a:t> </a:t>
+            </a:r>
+            <a:r>
+              <a:rPr lang="en-US" sz="2800" b="0" dirty="0">
+                <a:solidFill>
+                  <a:schemeClr val="tx2"/>
+                </a:solidFill>
+                <a:hlinkClick r:id="rId5"/>
+              </a:rPr>
+              <a:t>https://github.com/corkami/pics</a:t>
+            </a:r>
+            <a:r>
+              <a:rPr lang="en-US" sz="2800" b="0" dirty="0">
+                <a:solidFill>
+                  <a:schemeClr val="tx2"/>
+                </a:solidFill>
+              </a:rPr>
+              <a:t> </a:t>
+            </a:r>
+          </a:p>
+          <a:p>
+            <a:pPr marL="0" indent="0">
+              <a:buNone/>
+            </a:pPr>
+            <a:r>
+              <a:rPr lang="en-US" sz="2800" b="0" dirty="0">
+                <a:solidFill>
+                  <a:schemeClr val="tx2"/>
+                </a:solidFill>
+              </a:rPr>
+              <a:t>  </a:t>
+            </a:r>
+          </a:p>
+        </p:txBody>
+      </p:sp>
+    </p:spTree>
+    <p:extLst>
+      <p:ext uri="{BB962C8B-B14F-4D97-AF65-F5344CB8AC3E}">
+        <p14:creationId xmlns:p14="http://schemas.microsoft.com/office/powerpoint/2010/main" val="1864351332"/>
+      </p:ext>
+    </p:extLst>
+  </p:cSld>
+  <p:clrMapOvr>
+    <a:masterClrMapping/>
+  </p:clrMapOvr>
+  <mc:AlternateContent xmlns:mc="http://schemas.openxmlformats.org/markup-compatibility/2006">
+    <mc:Choice xmlns:p14="http://schemas.microsoft.com/office/powerpoint/2010/main" Requires="p14">
+      <p:transition spd="med" p14:dur="700">
+        <p:fade/>
+      </p:transition>
+    </mc:Choice>
+    <mc:Fallback>
+      <p:transition spd="med">
+        <p:fade/>
+      </p:transition>
+    </mc:Fallback>
+  </mc:AlternateContent>
+</p:sld>
+</file>
+
+<file path=ppt/slides/slide36.xml><?xml version="1.0" encoding="utf-8"?>
 <p:sld xmlns:a="http://schemas.openxmlformats.org/drawingml/2006/main" xmlns:r="http://schemas.openxmlformats.org/officeDocument/2006/relationships" xmlns:p="http://schemas.openxmlformats.org/presentationml/2006/main">
   <p:cSld>
     <p:spTree>
@@ -50152,7 +51154,7 @@
             <a:r>
               <a:rPr lang="en-US" sz="2800" b="0" dirty="0">
                 <a:solidFill>
-                  <a:schemeClr val="accent5"/>
+                  <a:schemeClr val="accent1"/>
                 </a:solidFill>
               </a:rPr>
               <a:t>The Devil is in the Payloads</a:t>
@@ -50317,7 +51319,7 @@
             <a:r>
               <a:rPr lang="en-US" sz="2800" b="0" dirty="0">
                 <a:solidFill>
-                  <a:schemeClr val="accent5"/>
+                  <a:schemeClr val="accent1"/>
                 </a:solidFill>
               </a:rPr>
               <a:t>client to attach files alongside their private chat</a:t>
@@ -50894,14 +51896,14 @@
   <p:clrMapOvr>
     <a:masterClrMapping/>
   </p:clrMapOvr>
-  <mc:AlternateContent xmlns:mc="http://schemas.openxmlformats.org/markup-compatibility/2006" xmlns:p14="http://schemas.microsoft.com/office/powerpoint/2010/main">
-    <mc:Choice Requires="p14">
-      <p:transition spd="med" p14:dur="700">
-        <p:fade/>
+  <mc:AlternateContent xmlns:mc="http://schemas.openxmlformats.org/markup-compatibility/2006">
+    <mc:Choice xmlns:p159="http://schemas.microsoft.com/office/powerpoint/2015/09/main" Requires="p159">
+      <p:transition xmlns:p14="http://schemas.microsoft.com/office/powerpoint/2010/main" spd="slow" p14:dur="2000">
+        <p159:morph option="byObject"/>
       </p:transition>
     </mc:Choice>
-    <mc:Fallback xmlns="">
-      <p:transition spd="med">
+    <mc:Fallback>
+      <p:transition spd="slow">
         <p:fade/>
       </p:transition>
     </mc:Fallback>
@@ -50997,7 +51999,7 @@
             <a:r>
               <a:rPr lang="en-US" sz="2800" b="0" dirty="0">
                 <a:solidFill>
-                  <a:schemeClr val="accent5"/>
+                  <a:schemeClr val="accent1"/>
                 </a:solidFill>
               </a:rPr>
               <a:t>the level of exasperation of the team</a:t>

--- a/presentation.pptx
+++ b/presentation.pptx
@@ -5,7 +5,7 @@
     <p:sldMasterId id="2147483660" r:id="rId1"/>
   </p:sldMasterIdLst>
   <p:notesMasterIdLst>
-    <p:notesMasterId r:id="rId38"/>
+    <p:notesMasterId r:id="rId44"/>
   </p:notesMasterIdLst>
   <p:sldIdLst>
     <p:sldId id="257" r:id="rId2"/>
@@ -42,8 +42,14 @@
     <p:sldId id="320" r:id="rId33"/>
     <p:sldId id="319" r:id="rId34"/>
     <p:sldId id="322" r:id="rId35"/>
-    <p:sldId id="323" r:id="rId36"/>
-    <p:sldId id="288" r:id="rId37"/>
+    <p:sldId id="324" r:id="rId36"/>
+    <p:sldId id="325" r:id="rId37"/>
+    <p:sldId id="326" r:id="rId38"/>
+    <p:sldId id="327" r:id="rId39"/>
+    <p:sldId id="329" r:id="rId40"/>
+    <p:sldId id="328" r:id="rId41"/>
+    <p:sldId id="323" r:id="rId42"/>
+    <p:sldId id="288" r:id="rId43"/>
   </p:sldIdLst>
   <p:sldSz cx="12192000" cy="6858000"/>
   <p:notesSz cx="6858000" cy="9144000"/>
@@ -153,7 +159,7 @@
 <file path=ppt/revisionInfo.xml><?xml version="1.0" encoding="utf-8"?>
 <p1510:revInfo xmlns:a="http://schemas.openxmlformats.org/drawingml/2006/main" xmlns:r="http://schemas.openxmlformats.org/officeDocument/2006/relationships" xmlns:p1510="http://schemas.microsoft.com/office/powerpoint/2015/10/main">
   <p1510:revLst>
-    <p1510:client id="{E2922590-C897-4D5E-94A5-7835129BD264}" v="70" dt="2026-01-06T06:06:01.279"/>
+    <p1510:client id="{E2922590-C897-4D5E-94A5-7835129BD264}" v="92" dt="2026-01-06T08:32:19.853"/>
   </p1510:revLst>
 </p1510:revInfo>
 </file>
@@ -163,12 +169,12 @@
   <pc:docChgLst>
     <pc:chgData name="Dominique RIGHETTO" userId="512fe077-82ad-424c-88a3-15e852b5861d" providerId="ADAL" clId="{8B7CB91F-10CE-42C2-B9B8-BFF2D3401655}"/>
     <pc:docChg chg="undo custSel addSld delSld modSld sldOrd modMainMaster">
-      <pc:chgData name="Dominique RIGHETTO" userId="512fe077-82ad-424c-88a3-15e852b5861d" providerId="ADAL" clId="{8B7CB91F-10CE-42C2-B9B8-BFF2D3401655}" dt="2026-01-06T06:06:26.397" v="6870" actId="207"/>
+      <pc:chgData name="Dominique RIGHETTO" userId="512fe077-82ad-424c-88a3-15e852b5861d" providerId="ADAL" clId="{8B7CB91F-10CE-42C2-B9B8-BFF2D3401655}" dt="2026-01-06T08:40:31.483" v="7813" actId="732"/>
       <pc:docMkLst>
         <pc:docMk/>
       </pc:docMkLst>
-      <pc:sldChg chg="modSp mod">
-        <pc:chgData name="Dominique RIGHETTO" userId="512fe077-82ad-424c-88a3-15e852b5861d" providerId="ADAL" clId="{8B7CB91F-10CE-42C2-B9B8-BFF2D3401655}" dt="2026-01-06T05:26:35.607" v="6620" actId="20577"/>
+      <pc:sldChg chg="addSp modSp mod">
+        <pc:chgData name="Dominique RIGHETTO" userId="512fe077-82ad-424c-88a3-15e852b5861d" providerId="ADAL" clId="{8B7CB91F-10CE-42C2-B9B8-BFF2D3401655}" dt="2026-01-06T08:32:27.107" v="7796" actId="20577"/>
         <pc:sldMkLst>
           <pc:docMk/>
           <pc:sldMk cId="3134628389" sldId="257"/>
@@ -187,6 +193,14 @@
             <pc:docMk/>
             <pc:sldMk cId="3134628389" sldId="257"/>
             <ac:spMk id="3" creationId="{2C93C62D-952C-3866-AA5A-CA17B8DBDB19}"/>
+          </ac:spMkLst>
+        </pc:spChg>
+        <pc:spChg chg="add mod">
+          <ac:chgData name="Dominique RIGHETTO" userId="512fe077-82ad-424c-88a3-15e852b5861d" providerId="ADAL" clId="{8B7CB91F-10CE-42C2-B9B8-BFF2D3401655}" dt="2026-01-06T08:32:27.107" v="7796" actId="20577"/>
+          <ac:spMkLst>
+            <pc:docMk/>
+            <pc:sldMk cId="3134628389" sldId="257"/>
+            <ac:spMk id="4" creationId="{7F66B005-FAEF-EACE-8082-427A0F560E9F}"/>
           </ac:spMkLst>
         </pc:spChg>
       </pc:sldChg>
@@ -498,7 +512,7 @@
         </pc:sldMkLst>
       </pc:sldChg>
       <pc:sldChg chg="addSp modSp add mod">
-        <pc:chgData name="Dominique RIGHETTO" userId="512fe077-82ad-424c-88a3-15e852b5861d" providerId="ADAL" clId="{8B7CB91F-10CE-42C2-B9B8-BFF2D3401655}" dt="2026-01-05T09:10:09.386" v="2098"/>
+        <pc:chgData name="Dominique RIGHETTO" userId="512fe077-82ad-424c-88a3-15e852b5861d" providerId="ADAL" clId="{8B7CB91F-10CE-42C2-B9B8-BFF2D3401655}" dt="2026-01-06T08:13:39.569" v="7478" actId="1076"/>
         <pc:sldMkLst>
           <pc:docMk/>
           <pc:sldMk cId="3031573305" sldId="292"/>
@@ -520,7 +534,7 @@
           </ac:spMkLst>
         </pc:spChg>
         <pc:spChg chg="add mod">
-          <ac:chgData name="Dominique RIGHETTO" userId="512fe077-82ad-424c-88a3-15e852b5861d" providerId="ADAL" clId="{8B7CB91F-10CE-42C2-B9B8-BFF2D3401655}" dt="2026-01-05T08:29:47.503" v="1477" actId="1076"/>
+          <ac:chgData name="Dominique RIGHETTO" userId="512fe077-82ad-424c-88a3-15e852b5861d" providerId="ADAL" clId="{8B7CB91F-10CE-42C2-B9B8-BFF2D3401655}" dt="2026-01-06T08:13:39.569" v="7478" actId="1076"/>
           <ac:spMkLst>
             <pc:docMk/>
             <pc:sldMk cId="3031573305" sldId="292"/>
@@ -568,7 +582,7 @@
         </pc:picChg>
       </pc:sldChg>
       <pc:sldChg chg="addSp delSp modSp add mod modTransition">
-        <pc:chgData name="Dominique RIGHETTO" userId="512fe077-82ad-424c-88a3-15e852b5861d" providerId="ADAL" clId="{8B7CB91F-10CE-42C2-B9B8-BFF2D3401655}" dt="2026-01-06T05:56:15.990" v="6832"/>
+        <pc:chgData name="Dominique RIGHETTO" userId="512fe077-82ad-424c-88a3-15e852b5861d" providerId="ADAL" clId="{8B7CB91F-10CE-42C2-B9B8-BFF2D3401655}" dt="2026-01-06T08:20:37.707" v="7532" actId="14861"/>
         <pc:sldMkLst>
           <pc:docMk/>
           <pc:sldMk cId="617590533" sldId="294"/>
@@ -606,7 +620,7 @@
           </ac:spMkLst>
         </pc:spChg>
         <pc:picChg chg="mod modCrop">
-          <ac:chgData name="Dominique RIGHETTO" userId="512fe077-82ad-424c-88a3-15e852b5861d" providerId="ADAL" clId="{8B7CB91F-10CE-42C2-B9B8-BFF2D3401655}" dt="2026-01-05T09:06:02.430" v="2048" actId="14100"/>
+          <ac:chgData name="Dominique RIGHETTO" userId="512fe077-82ad-424c-88a3-15e852b5861d" providerId="ADAL" clId="{8B7CB91F-10CE-42C2-B9B8-BFF2D3401655}" dt="2026-01-06T08:20:37.707" v="7532" actId="14861"/>
           <ac:picMkLst>
             <pc:docMk/>
             <pc:sldMk cId="617590533" sldId="294"/>
@@ -615,7 +629,7 @@
         </pc:picChg>
       </pc:sldChg>
       <pc:sldChg chg="addSp delSp modSp add mod ord modNotesTx">
-        <pc:chgData name="Dominique RIGHETTO" userId="512fe077-82ad-424c-88a3-15e852b5861d" providerId="ADAL" clId="{8B7CB91F-10CE-42C2-B9B8-BFF2D3401655}" dt="2026-01-06T05:30:10.736" v="6628" actId="207"/>
+        <pc:chgData name="Dominique RIGHETTO" userId="512fe077-82ad-424c-88a3-15e852b5861d" providerId="ADAL" clId="{8B7CB91F-10CE-42C2-B9B8-BFF2D3401655}" dt="2026-01-06T08:20:53.536" v="7533" actId="14861"/>
         <pc:sldMkLst>
           <pc:docMk/>
           <pc:sldMk cId="2901458821" sldId="295"/>
@@ -637,7 +651,7 @@
           </ac:spMkLst>
         </pc:spChg>
         <pc:picChg chg="add mod">
-          <ac:chgData name="Dominique RIGHETTO" userId="512fe077-82ad-424c-88a3-15e852b5861d" providerId="ADAL" clId="{8B7CB91F-10CE-42C2-B9B8-BFF2D3401655}" dt="2026-01-05T09:03:17.770" v="2045" actId="14100"/>
+          <ac:chgData name="Dominique RIGHETTO" userId="512fe077-82ad-424c-88a3-15e852b5861d" providerId="ADAL" clId="{8B7CB91F-10CE-42C2-B9B8-BFF2D3401655}" dt="2026-01-06T08:20:53.536" v="7533" actId="14861"/>
           <ac:picMkLst>
             <pc:docMk/>
             <pc:sldMk cId="2901458821" sldId="295"/>
@@ -709,7 +723,7 @@
         </pc:picChg>
       </pc:sldChg>
       <pc:sldChg chg="addSp delSp modSp add mod">
-        <pc:chgData name="Dominique RIGHETTO" userId="512fe077-82ad-424c-88a3-15e852b5861d" providerId="ADAL" clId="{8B7CB91F-10CE-42C2-B9B8-BFF2D3401655}" dt="2026-01-05T15:06:24.477" v="4519" actId="108"/>
+        <pc:chgData name="Dominique RIGHETTO" userId="512fe077-82ad-424c-88a3-15e852b5861d" providerId="ADAL" clId="{8B7CB91F-10CE-42C2-B9B8-BFF2D3401655}" dt="2026-01-06T08:38:27.795" v="7805" actId="1076"/>
         <pc:sldMkLst>
           <pc:docMk/>
           <pc:sldMk cId="709545358" sldId="297"/>
@@ -747,7 +761,15 @@
           </ac:picMkLst>
         </pc:picChg>
         <pc:picChg chg="add mod">
-          <ac:chgData name="Dominique RIGHETTO" userId="512fe077-82ad-424c-88a3-15e852b5861d" providerId="ADAL" clId="{8B7CB91F-10CE-42C2-B9B8-BFF2D3401655}" dt="2026-01-05T10:05:11.914" v="2574" actId="108"/>
+          <ac:chgData name="Dominique RIGHETTO" userId="512fe077-82ad-424c-88a3-15e852b5861d" providerId="ADAL" clId="{8B7CB91F-10CE-42C2-B9B8-BFF2D3401655}" dt="2026-01-06T08:38:27.795" v="7805" actId="1076"/>
+          <ac:picMkLst>
+            <pc:docMk/>
+            <pc:sldMk cId="709545358" sldId="297"/>
+            <ac:picMk id="6" creationId="{D8DE0287-DB66-E698-385A-1A59D7E8C694}"/>
+          </ac:picMkLst>
+        </pc:picChg>
+        <pc:picChg chg="add del mod">
+          <ac:chgData name="Dominique RIGHETTO" userId="512fe077-82ad-424c-88a3-15e852b5861d" providerId="ADAL" clId="{8B7CB91F-10CE-42C2-B9B8-BFF2D3401655}" dt="2026-01-06T08:38:24.710" v="7804" actId="478"/>
           <ac:picMkLst>
             <pc:docMk/>
             <pc:sldMk cId="709545358" sldId="297"/>
@@ -1226,7 +1248,7 @@
         </pc:picChg>
       </pc:sldChg>
       <pc:sldChg chg="addSp delSp modSp add mod ord">
-        <pc:chgData name="Dominique RIGHETTO" userId="512fe077-82ad-424c-88a3-15e852b5861d" providerId="ADAL" clId="{8B7CB91F-10CE-42C2-B9B8-BFF2D3401655}" dt="2026-01-05T14:53:34.318" v="4230" actId="207"/>
+        <pc:chgData name="Dominique RIGHETTO" userId="512fe077-82ad-424c-88a3-15e852b5861d" providerId="ADAL" clId="{8B7CB91F-10CE-42C2-B9B8-BFF2D3401655}" dt="2026-01-06T08:28:12.051" v="7781" actId="20577"/>
         <pc:sldMkLst>
           <pc:docMk/>
           <pc:sldMk cId="2964034352" sldId="308"/>
@@ -1240,7 +1262,7 @@
           </ac:spMkLst>
         </pc:spChg>
         <pc:spChg chg="mod">
-          <ac:chgData name="Dominique RIGHETTO" userId="512fe077-82ad-424c-88a3-15e852b5861d" providerId="ADAL" clId="{8B7CB91F-10CE-42C2-B9B8-BFF2D3401655}" dt="2026-01-05T14:50:23.442" v="4221" actId="20577"/>
+          <ac:chgData name="Dominique RIGHETTO" userId="512fe077-82ad-424c-88a3-15e852b5861d" providerId="ADAL" clId="{8B7CB91F-10CE-42C2-B9B8-BFF2D3401655}" dt="2026-01-06T08:28:12.051" v="7781" actId="20577"/>
           <ac:spMkLst>
             <pc:docMk/>
             <pc:sldMk cId="2964034352" sldId="308"/>
@@ -1256,7 +1278,7 @@
           </ac:spMkLst>
         </pc:spChg>
         <pc:picChg chg="add mod">
-          <ac:chgData name="Dominique RIGHETTO" userId="512fe077-82ad-424c-88a3-15e852b5861d" providerId="ADAL" clId="{8B7CB91F-10CE-42C2-B9B8-BFF2D3401655}" dt="2026-01-05T14:53:03.572" v="4227" actId="108"/>
+          <ac:chgData name="Dominique RIGHETTO" userId="512fe077-82ad-424c-88a3-15e852b5861d" providerId="ADAL" clId="{8B7CB91F-10CE-42C2-B9B8-BFF2D3401655}" dt="2026-01-06T08:27:50.345" v="7777" actId="1036"/>
           <ac:picMkLst>
             <pc:docMk/>
             <pc:sldMk cId="2964034352" sldId="308"/>
@@ -1697,7 +1719,7 @@
         </pc:picChg>
       </pc:sldChg>
       <pc:sldChg chg="addSp delSp modSp add mod ord">
-        <pc:chgData name="Dominique RIGHETTO" userId="512fe077-82ad-424c-88a3-15e852b5861d" providerId="ADAL" clId="{8B7CB91F-10CE-42C2-B9B8-BFF2D3401655}" dt="2026-01-06T05:53:03.297" v="6783" actId="1076"/>
+        <pc:chgData name="Dominique RIGHETTO" userId="512fe077-82ad-424c-88a3-15e852b5861d" providerId="ADAL" clId="{8B7CB91F-10CE-42C2-B9B8-BFF2D3401655}" dt="2026-01-06T08:40:31.483" v="7813" actId="732"/>
         <pc:sldMkLst>
           <pc:docMk/>
           <pc:sldMk cId="3966777535" sldId="316"/>
@@ -1718,6 +1740,14 @@
             <ac:spMk id="3" creationId="{ADE63D71-25FB-998D-9333-7E6F3F474244}"/>
           </ac:spMkLst>
         </pc:spChg>
+        <pc:picChg chg="add mod modCrop">
+          <ac:chgData name="Dominique RIGHETTO" userId="512fe077-82ad-424c-88a3-15e852b5861d" providerId="ADAL" clId="{8B7CB91F-10CE-42C2-B9B8-BFF2D3401655}" dt="2026-01-06T08:40:31.483" v="7813" actId="732"/>
+          <ac:picMkLst>
+            <pc:docMk/>
+            <pc:sldMk cId="3966777535" sldId="316"/>
+            <ac:picMk id="5" creationId="{0FAD840C-E7B9-94FC-95FB-1B1D586F6B29}"/>
+          </ac:picMkLst>
+        </pc:picChg>
         <pc:picChg chg="del">
           <ac:chgData name="Dominique RIGHETTO" userId="512fe077-82ad-424c-88a3-15e852b5861d" providerId="ADAL" clId="{8B7CB91F-10CE-42C2-B9B8-BFF2D3401655}" dt="2026-01-05T19:00:10.921" v="5245" actId="478"/>
           <ac:picMkLst>
@@ -1742,8 +1772,8 @@
             <ac:picMk id="8" creationId="{727ADC83-6FCF-CA31-30A0-15CB67B5853C}"/>
           </ac:picMkLst>
         </pc:picChg>
-        <pc:picChg chg="add mod">
-          <ac:chgData name="Dominique RIGHETTO" userId="512fe077-82ad-424c-88a3-15e852b5861d" providerId="ADAL" clId="{8B7CB91F-10CE-42C2-B9B8-BFF2D3401655}" dt="2026-01-06T05:53:03.297" v="6783" actId="1076"/>
+        <pc:picChg chg="add del mod">
+          <ac:chgData name="Dominique RIGHETTO" userId="512fe077-82ad-424c-88a3-15e852b5861d" providerId="ADAL" clId="{8B7CB91F-10CE-42C2-B9B8-BFF2D3401655}" dt="2026-01-06T08:40:16.497" v="7808" actId="478"/>
           <ac:picMkLst>
             <pc:docMk/>
             <pc:sldMk cId="3966777535" sldId="316"/>
@@ -1877,7 +1907,7 @@
         </pc:picChg>
       </pc:sldChg>
       <pc:sldChg chg="addSp modSp add mod">
-        <pc:chgData name="Dominique RIGHETTO" userId="512fe077-82ad-424c-88a3-15e852b5861d" providerId="ADAL" clId="{8B7CB91F-10CE-42C2-B9B8-BFF2D3401655}" dt="2026-01-06T05:43:48.412" v="6701" actId="14100"/>
+        <pc:chgData name="Dominique RIGHETTO" userId="512fe077-82ad-424c-88a3-15e852b5861d" providerId="ADAL" clId="{8B7CB91F-10CE-42C2-B9B8-BFF2D3401655}" dt="2026-01-06T08:17:51.630" v="7497" actId="14100"/>
         <pc:sldMkLst>
           <pc:docMk/>
           <pc:sldMk cId="1465579828" sldId="320"/>
@@ -1888,6 +1918,22 @@
             <pc:docMk/>
             <pc:sldMk cId="1465579828" sldId="320"/>
             <ac:spMk id="3" creationId="{DE2D873E-EA82-331F-BE96-6FF6C7492461}"/>
+          </ac:spMkLst>
+        </pc:spChg>
+        <pc:spChg chg="add mod">
+          <ac:chgData name="Dominique RIGHETTO" userId="512fe077-82ad-424c-88a3-15e852b5861d" providerId="ADAL" clId="{8B7CB91F-10CE-42C2-B9B8-BFF2D3401655}" dt="2026-01-06T08:17:39.974" v="7494" actId="14100"/>
+          <ac:spMkLst>
+            <pc:docMk/>
+            <pc:sldMk cId="1465579828" sldId="320"/>
+            <ac:spMk id="4" creationId="{6AA48129-48A1-5BBC-2D82-2E12693E909F}"/>
+          </ac:spMkLst>
+        </pc:spChg>
+        <pc:spChg chg="add mod">
+          <ac:chgData name="Dominique RIGHETTO" userId="512fe077-82ad-424c-88a3-15e852b5861d" providerId="ADAL" clId="{8B7CB91F-10CE-42C2-B9B8-BFF2D3401655}" dt="2026-01-06T08:17:51.630" v="7497" actId="14100"/>
+          <ac:spMkLst>
+            <pc:docMk/>
+            <pc:sldMk cId="1465579828" sldId="320"/>
+            <ac:spMk id="6" creationId="{3E977823-69F0-55F7-53CF-8292EF184EAF}"/>
           </ac:spMkLst>
         </pc:spChg>
         <pc:picChg chg="add mod">
@@ -1915,7 +1961,7 @@
         </pc:spChg>
       </pc:sldChg>
       <pc:sldChg chg="modSp add mod">
-        <pc:chgData name="Dominique RIGHETTO" userId="512fe077-82ad-424c-88a3-15e852b5861d" providerId="ADAL" clId="{8B7CB91F-10CE-42C2-B9B8-BFF2D3401655}" dt="2026-01-06T06:04:00.369" v="6859" actId="20577"/>
+        <pc:chgData name="Dominique RIGHETTO" userId="512fe077-82ad-424c-88a3-15e852b5861d" providerId="ADAL" clId="{8B7CB91F-10CE-42C2-B9B8-BFF2D3401655}" dt="2026-01-06T08:24:27.400" v="7535" actId="207"/>
         <pc:sldMkLst>
           <pc:docMk/>
           <pc:sldMk cId="2469469424" sldId="322"/>
@@ -1929,7 +1975,7 @@
           </ac:spMkLst>
         </pc:spChg>
         <pc:spChg chg="mod">
-          <ac:chgData name="Dominique RIGHETTO" userId="512fe077-82ad-424c-88a3-15e852b5861d" providerId="ADAL" clId="{8B7CB91F-10CE-42C2-B9B8-BFF2D3401655}" dt="2026-01-06T06:04:00.369" v="6859" actId="20577"/>
+          <ac:chgData name="Dominique RIGHETTO" userId="512fe077-82ad-424c-88a3-15e852b5861d" providerId="ADAL" clId="{8B7CB91F-10CE-42C2-B9B8-BFF2D3401655}" dt="2026-01-06T08:24:27.400" v="7535" actId="207"/>
           <ac:spMkLst>
             <pc:docMk/>
             <pc:sldMk cId="2469469424" sldId="322"/>
@@ -1959,6 +2005,200 @@
             <ac:spMk id="3" creationId="{67471A2E-57F3-AB6A-4E4E-33D39DC06A46}"/>
           </ac:spMkLst>
         </pc:spChg>
+      </pc:sldChg>
+      <pc:sldChg chg="addSp modSp add mod">
+        <pc:chgData name="Dominique RIGHETTO" userId="512fe077-82ad-424c-88a3-15e852b5861d" providerId="ADAL" clId="{8B7CB91F-10CE-42C2-B9B8-BFF2D3401655}" dt="2026-01-06T08:14:10.714" v="7482" actId="20577"/>
+        <pc:sldMkLst>
+          <pc:docMk/>
+          <pc:sldMk cId="3357811245" sldId="324"/>
+        </pc:sldMkLst>
+        <pc:spChg chg="mod">
+          <ac:chgData name="Dominique RIGHETTO" userId="512fe077-82ad-424c-88a3-15e852b5861d" providerId="ADAL" clId="{8B7CB91F-10CE-42C2-B9B8-BFF2D3401655}" dt="2026-01-06T08:04:39.881" v="7121" actId="20577"/>
+          <ac:spMkLst>
+            <pc:docMk/>
+            <pc:sldMk cId="3357811245" sldId="324"/>
+            <ac:spMk id="2" creationId="{99607D1A-0517-89C0-44D0-2201B6D632E0}"/>
+          </ac:spMkLst>
+        </pc:spChg>
+        <pc:spChg chg="mod">
+          <ac:chgData name="Dominique RIGHETTO" userId="512fe077-82ad-424c-88a3-15e852b5861d" providerId="ADAL" clId="{8B7CB91F-10CE-42C2-B9B8-BFF2D3401655}" dt="2026-01-06T08:04:05.329" v="7111" actId="20577"/>
+          <ac:spMkLst>
+            <pc:docMk/>
+            <pc:sldMk cId="3357811245" sldId="324"/>
+            <ac:spMk id="3" creationId="{D780FB18-5DA9-5DB8-969B-6A863CD13878}"/>
+          </ac:spMkLst>
+        </pc:spChg>
+        <pc:spChg chg="add mod">
+          <ac:chgData name="Dominique RIGHETTO" userId="512fe077-82ad-424c-88a3-15e852b5861d" providerId="ADAL" clId="{8B7CB91F-10CE-42C2-B9B8-BFF2D3401655}" dt="2026-01-06T08:14:10.714" v="7482" actId="20577"/>
+          <ac:spMkLst>
+            <pc:docMk/>
+            <pc:sldMk cId="3357811245" sldId="324"/>
+            <ac:spMk id="4" creationId="{0E2B787C-EEA3-8CF3-11B1-F44B3B2C8115}"/>
+          </ac:spMkLst>
+        </pc:spChg>
+      </pc:sldChg>
+      <pc:sldChg chg="addSp delSp modSp add mod">
+        <pc:chgData name="Dominique RIGHETTO" userId="512fe077-82ad-424c-88a3-15e852b5861d" providerId="ADAL" clId="{8B7CB91F-10CE-42C2-B9B8-BFF2D3401655}" dt="2026-01-06T08:04:45.433" v="7122"/>
+        <pc:sldMkLst>
+          <pc:docMk/>
+          <pc:sldMk cId="2828369189" sldId="325"/>
+        </pc:sldMkLst>
+        <pc:spChg chg="mod">
+          <ac:chgData name="Dominique RIGHETTO" userId="512fe077-82ad-424c-88a3-15e852b5861d" providerId="ADAL" clId="{8B7CB91F-10CE-42C2-B9B8-BFF2D3401655}" dt="2026-01-06T08:04:45.433" v="7122"/>
+          <ac:spMkLst>
+            <pc:docMk/>
+            <pc:sldMk cId="2828369189" sldId="325"/>
+            <ac:spMk id="2" creationId="{961EA181-EAD7-0C9B-6075-CCAFB9E06DE2}"/>
+          </ac:spMkLst>
+        </pc:spChg>
+        <pc:spChg chg="del">
+          <ac:chgData name="Dominique RIGHETTO" userId="512fe077-82ad-424c-88a3-15e852b5861d" providerId="ADAL" clId="{8B7CB91F-10CE-42C2-B9B8-BFF2D3401655}" dt="2026-01-06T07:56:08.880" v="7019" actId="478"/>
+          <ac:spMkLst>
+            <pc:docMk/>
+            <pc:sldMk cId="2828369189" sldId="325"/>
+            <ac:spMk id="3" creationId="{92D4FBDE-7D6E-85FF-8F9F-7E5DF4569912}"/>
+          </ac:spMkLst>
+        </pc:spChg>
+        <pc:spChg chg="del">
+          <ac:chgData name="Dominique RIGHETTO" userId="512fe077-82ad-424c-88a3-15e852b5861d" providerId="ADAL" clId="{8B7CB91F-10CE-42C2-B9B8-BFF2D3401655}" dt="2026-01-06T07:55:51.599" v="7014" actId="478"/>
+          <ac:spMkLst>
+            <pc:docMk/>
+            <pc:sldMk cId="2828369189" sldId="325"/>
+            <ac:spMk id="4" creationId="{D17A5405-237F-2818-D6ED-47D9B20697C9}"/>
+          </ac:spMkLst>
+        </pc:spChg>
+        <pc:spChg chg="add del mod">
+          <ac:chgData name="Dominique RIGHETTO" userId="512fe077-82ad-424c-88a3-15e852b5861d" providerId="ADAL" clId="{8B7CB91F-10CE-42C2-B9B8-BFF2D3401655}" dt="2026-01-06T07:56:12.064" v="7020" actId="478"/>
+          <ac:spMkLst>
+            <pc:docMk/>
+            <pc:sldMk cId="2828369189" sldId="325"/>
+            <ac:spMk id="8" creationId="{BACCBB5C-08AB-AFBB-E820-6E2182FEC26B}"/>
+          </ac:spMkLst>
+        </pc:spChg>
+        <pc:picChg chg="add mod">
+          <ac:chgData name="Dominique RIGHETTO" userId="512fe077-82ad-424c-88a3-15e852b5861d" providerId="ADAL" clId="{8B7CB91F-10CE-42C2-B9B8-BFF2D3401655}" dt="2026-01-06T07:56:23.241" v="7024" actId="14861"/>
+          <ac:picMkLst>
+            <pc:docMk/>
+            <pc:sldMk cId="2828369189" sldId="325"/>
+            <ac:picMk id="6" creationId="{F20E73DB-B25D-FC4B-C15E-75CFC79FC828}"/>
+          </ac:picMkLst>
+        </pc:picChg>
+      </pc:sldChg>
+      <pc:sldChg chg="modSp add mod ord">
+        <pc:chgData name="Dominique RIGHETTO" userId="512fe077-82ad-424c-88a3-15e852b5861d" providerId="ADAL" clId="{8B7CB91F-10CE-42C2-B9B8-BFF2D3401655}" dt="2026-01-06T08:14:27.411" v="7486" actId="20577"/>
+        <pc:sldMkLst>
+          <pc:docMk/>
+          <pc:sldMk cId="1318273276" sldId="326"/>
+        </pc:sldMkLst>
+        <pc:spChg chg="mod">
+          <ac:chgData name="Dominique RIGHETTO" userId="512fe077-82ad-424c-88a3-15e852b5861d" providerId="ADAL" clId="{8B7CB91F-10CE-42C2-B9B8-BFF2D3401655}" dt="2026-01-06T08:04:49.620" v="7123"/>
+          <ac:spMkLst>
+            <pc:docMk/>
+            <pc:sldMk cId="1318273276" sldId="326"/>
+            <ac:spMk id="2" creationId="{B253230D-FF16-0731-521D-D75C9FDA4B5D}"/>
+          </ac:spMkLst>
+        </pc:spChg>
+        <pc:spChg chg="mod">
+          <ac:chgData name="Dominique RIGHETTO" userId="512fe077-82ad-424c-88a3-15e852b5861d" providerId="ADAL" clId="{8B7CB91F-10CE-42C2-B9B8-BFF2D3401655}" dt="2026-01-06T08:04:13.909" v="7112"/>
+          <ac:spMkLst>
+            <pc:docMk/>
+            <pc:sldMk cId="1318273276" sldId="326"/>
+            <ac:spMk id="3" creationId="{05681DCE-E000-7EA1-F0DD-4559669AEBCB}"/>
+          </ac:spMkLst>
+        </pc:spChg>
+        <pc:spChg chg="mod">
+          <ac:chgData name="Dominique RIGHETTO" userId="512fe077-82ad-424c-88a3-15e852b5861d" providerId="ADAL" clId="{8B7CB91F-10CE-42C2-B9B8-BFF2D3401655}" dt="2026-01-06T08:14:27.411" v="7486" actId="20577"/>
+          <ac:spMkLst>
+            <pc:docMk/>
+            <pc:sldMk cId="1318273276" sldId="326"/>
+            <ac:spMk id="4" creationId="{E4B76E6F-8926-EBC9-DD7E-FE5362608BC0}"/>
+          </ac:spMkLst>
+        </pc:spChg>
+      </pc:sldChg>
+      <pc:sldChg chg="addSp delSp modSp add mod">
+        <pc:chgData name="Dominique RIGHETTO" userId="512fe077-82ad-424c-88a3-15e852b5861d" providerId="ADAL" clId="{8B7CB91F-10CE-42C2-B9B8-BFF2D3401655}" dt="2026-01-06T08:04:54.698" v="7124"/>
+        <pc:sldMkLst>
+          <pc:docMk/>
+          <pc:sldMk cId="3737270670" sldId="327"/>
+        </pc:sldMkLst>
+        <pc:spChg chg="mod">
+          <ac:chgData name="Dominique RIGHETTO" userId="512fe077-82ad-424c-88a3-15e852b5861d" providerId="ADAL" clId="{8B7CB91F-10CE-42C2-B9B8-BFF2D3401655}" dt="2026-01-06T08:04:54.698" v="7124"/>
+          <ac:spMkLst>
+            <pc:docMk/>
+            <pc:sldMk cId="3737270670" sldId="327"/>
+            <ac:spMk id="2" creationId="{25605F23-5A77-C36A-9682-F6BD4D1007A7}"/>
+          </ac:spMkLst>
+        </pc:spChg>
+        <pc:spChg chg="del">
+          <ac:chgData name="Dominique RIGHETTO" userId="512fe077-82ad-424c-88a3-15e852b5861d" providerId="ADAL" clId="{8B7CB91F-10CE-42C2-B9B8-BFF2D3401655}" dt="2026-01-06T08:02:33.116" v="7080" actId="478"/>
+          <ac:spMkLst>
+            <pc:docMk/>
+            <pc:sldMk cId="3737270670" sldId="327"/>
+            <ac:spMk id="3" creationId="{8CDE14DF-BD98-7FB1-F08D-A3D86149452A}"/>
+          </ac:spMkLst>
+        </pc:spChg>
+        <pc:spChg chg="del">
+          <ac:chgData name="Dominique RIGHETTO" userId="512fe077-82ad-424c-88a3-15e852b5861d" providerId="ADAL" clId="{8B7CB91F-10CE-42C2-B9B8-BFF2D3401655}" dt="2026-01-06T08:02:30.682" v="7079" actId="478"/>
+          <ac:spMkLst>
+            <pc:docMk/>
+            <pc:sldMk cId="3737270670" sldId="327"/>
+            <ac:spMk id="4" creationId="{A3D5AE16-E855-687B-F1A5-46CD5E9BB4DF}"/>
+          </ac:spMkLst>
+        </pc:spChg>
+        <pc:spChg chg="add del mod">
+          <ac:chgData name="Dominique RIGHETTO" userId="512fe077-82ad-424c-88a3-15e852b5861d" providerId="ADAL" clId="{8B7CB91F-10CE-42C2-B9B8-BFF2D3401655}" dt="2026-01-06T08:02:35.777" v="7081" actId="478"/>
+          <ac:spMkLst>
+            <pc:docMk/>
+            <pc:sldMk cId="3737270670" sldId="327"/>
+            <ac:spMk id="6" creationId="{DDCFE94E-D86A-4BFB-0148-8BD69DA20073}"/>
+          </ac:spMkLst>
+        </pc:spChg>
+        <pc:picChg chg="add mod">
+          <ac:chgData name="Dominique RIGHETTO" userId="512fe077-82ad-424c-88a3-15e852b5861d" providerId="ADAL" clId="{8B7CB91F-10CE-42C2-B9B8-BFF2D3401655}" dt="2026-01-06T08:02:53.043" v="7087" actId="14861"/>
+          <ac:picMkLst>
+            <pc:docMk/>
+            <pc:sldMk cId="3737270670" sldId="327"/>
+            <ac:picMk id="8" creationId="{B4048B82-FBF4-4A7F-8FBB-5B914E6206FA}"/>
+          </ac:picMkLst>
+        </pc:picChg>
+      </pc:sldChg>
+      <pc:sldChg chg="delSp modSp add mod ord">
+        <pc:chgData name="Dominique RIGHETTO" userId="512fe077-82ad-424c-88a3-15e852b5861d" providerId="ADAL" clId="{8B7CB91F-10CE-42C2-B9B8-BFF2D3401655}" dt="2026-01-06T08:16:54.992" v="7489"/>
+        <pc:sldMkLst>
+          <pc:docMk/>
+          <pc:sldMk cId="1669701748" sldId="328"/>
+        </pc:sldMkLst>
+        <pc:spChg chg="mod">
+          <ac:chgData name="Dominique RIGHETTO" userId="512fe077-82ad-424c-88a3-15e852b5861d" providerId="ADAL" clId="{8B7CB91F-10CE-42C2-B9B8-BFF2D3401655}" dt="2026-01-06T08:16:54.992" v="7489"/>
+          <ac:spMkLst>
+            <pc:docMk/>
+            <pc:sldMk cId="1669701748" sldId="328"/>
+            <ac:spMk id="3" creationId="{A7F83F62-19C4-CAB5-9BFB-6728903D6D68}"/>
+          </ac:spMkLst>
+        </pc:spChg>
+        <pc:spChg chg="del">
+          <ac:chgData name="Dominique RIGHETTO" userId="512fe077-82ad-424c-88a3-15e852b5861d" providerId="ADAL" clId="{8B7CB91F-10CE-42C2-B9B8-BFF2D3401655}" dt="2026-01-06T08:06:18.992" v="7128" actId="478"/>
+          <ac:spMkLst>
+            <pc:docMk/>
+            <pc:sldMk cId="1669701748" sldId="328"/>
+            <ac:spMk id="4" creationId="{3FF94CC4-3DCC-69ED-29D3-0417BEDB5FAF}"/>
+          </ac:spMkLst>
+        </pc:spChg>
+      </pc:sldChg>
+      <pc:sldChg chg="modSp add mod modTransition">
+        <pc:chgData name="Dominique RIGHETTO" userId="512fe077-82ad-424c-88a3-15e852b5861d" providerId="ADAL" clId="{8B7CB91F-10CE-42C2-B9B8-BFF2D3401655}" dt="2026-01-06T08:09:08.157" v="7140"/>
+        <pc:sldMkLst>
+          <pc:docMk/>
+          <pc:sldMk cId="2072987811" sldId="329"/>
+        </pc:sldMkLst>
+        <pc:picChg chg="mod modCrop">
+          <ac:chgData name="Dominique RIGHETTO" userId="512fe077-82ad-424c-88a3-15e852b5861d" providerId="ADAL" clId="{8B7CB91F-10CE-42C2-B9B8-BFF2D3401655}" dt="2026-01-06T08:09:05.093" v="7139" actId="1076"/>
+          <ac:picMkLst>
+            <pc:docMk/>
+            <pc:sldMk cId="2072987811" sldId="329"/>
+            <ac:picMk id="8" creationId="{C0D52F15-9F76-2129-C1A9-80B906F005E6}"/>
+          </ac:picMkLst>
+        </pc:picChg>
       </pc:sldChg>
       <pc:sldMasterChg chg="addSp delSp modSp mod">
         <pc:chgData name="Dominique RIGHETTO" userId="512fe077-82ad-424c-88a3-15e852b5861d" providerId="ADAL" clId="{8B7CB91F-10CE-42C2-B9B8-BFF2D3401655}" dt="2026-01-06T06:06:26.397" v="6870" actId="207"/>
@@ -44926,6 +45166,66 @@
           </a:p>
         </p:txBody>
       </p:sp>
+      <p:sp>
+        <p:nvSpPr>
+          <p:cNvPr id="4" name="TextBox 3">
+            <a:extLst>
+              <a:ext uri="{FF2B5EF4-FFF2-40B4-BE49-F238E27FC236}">
+                <a16:creationId xmlns:a16="http://schemas.microsoft.com/office/drawing/2014/main" id="{7F66B005-FAEF-EACE-8082-427A0F560E9F}"/>
+              </a:ext>
+            </a:extLst>
+          </p:cNvPr>
+          <p:cNvSpPr txBox="1"/>
+          <p:nvPr/>
+        </p:nvSpPr>
+        <p:spPr>
+          <a:xfrm>
+            <a:off x="0" y="6127893"/>
+            <a:ext cx="4412512" cy="246221"/>
+          </a:xfrm>
+          <a:prstGeom prst="rect">
+            <a:avLst/>
+          </a:prstGeom>
+          <a:noFill/>
+        </p:spPr>
+        <p:txBody>
+          <a:bodyPr wrap="square" lIns="0" tIns="0" rIns="0" bIns="0" rtlCol="0">
+            <a:spAutoFit/>
+          </a:bodyPr>
+          <a:lstStyle/>
+          <a:p>
+            <a:pPr algn="l"/>
+            <a:r>
+              <a:rPr lang="en-US" sz="1600" dirty="0">
+                <a:solidFill>
+                  <a:schemeClr val="bg1"/>
+                </a:solidFill>
+              </a:rPr>
+              <a:t>🌍 </a:t>
+            </a:r>
+            <a:r>
+              <a:rPr lang="fr-FR" sz="1600" dirty="0">
+                <a:solidFill>
+                  <a:schemeClr val="bg1"/>
+                </a:solidFill>
+                <a:hlinkClick r:id="rId2">
+                  <a:extLst>
+                    <a:ext uri="{A12FA001-AC4F-418D-AE19-62706E023703}">
+                      <ahyp:hlinkClr xmlns:ahyp="http://schemas.microsoft.com/office/drawing/2018/hyperlinkcolor" val="tx"/>
+                    </a:ext>
+                  </a:extLst>
+                </a:hlinkClick>
+              </a:rPr>
+              <a:t>Dominique Righetto</a:t>
+            </a:r>
+            <a:endParaRPr lang="fr-FR" sz="1600" dirty="0">
+              <a:solidFill>
+                <a:schemeClr val="bg1"/>
+              </a:solidFill>
+            </a:endParaRPr>
+          </a:p>
+        </p:txBody>
+      </p:sp>
     </p:spTree>
     <p:extLst>
       <p:ext uri="{BB962C8B-B14F-4D97-AF65-F5344CB8AC3E}">
@@ -45278,10 +45578,10 @@
       </p:pic>
       <p:pic>
         <p:nvPicPr>
-          <p:cNvPr id="8" name="Picture 7">
+          <p:cNvPr id="6" name="Picture 5">
             <a:extLst>
               <a:ext uri="{FF2B5EF4-FFF2-40B4-BE49-F238E27FC236}">
-                <a16:creationId xmlns:a16="http://schemas.microsoft.com/office/drawing/2014/main" id="{CDEA6B6B-ADE2-DDA5-F518-5F11F0C59B9D}"/>
+                <a16:creationId xmlns:a16="http://schemas.microsoft.com/office/drawing/2014/main" id="{D8DE0287-DB66-E698-385A-1A59D7E8C694}"/>
               </a:ext>
             </a:extLst>
           </p:cNvPr>
@@ -45298,7 +45598,7 @@
         </p:blipFill>
         <p:spPr>
           <a:xfrm>
-            <a:off x="1484186" y="4802226"/>
+            <a:off x="1484186" y="4838714"/>
             <a:ext cx="9223627" cy="744312"/>
           </a:xfrm>
           <a:prstGeom prst="rect">
@@ -47787,6 +48087,13 @@
             </a:r>
           </a:p>
           <a:p>
+            <a:pPr lvl="1"/>
+            <a:r>
+              <a:rPr lang="en-US" sz="2400" dirty="0"/>
+              <a:t>That ways, PDF files stored will not contains any malicious XFA forms that can be triggered, if processed later, by an application using a vulnerable PDF library.</a:t>
+            </a:r>
+          </a:p>
+          <a:p>
             <a:pPr marL="0" lvl="1" indent="0">
               <a:buNone/>
             </a:pPr>
@@ -47890,7 +48197,7 @@
         </p:blipFill>
         <p:spPr>
           <a:xfrm>
-            <a:off x="1965851" y="4269493"/>
+            <a:off x="1965851" y="5173268"/>
             <a:ext cx="7960584" cy="653381"/>
           </a:xfrm>
           <a:prstGeom prst="rect">
@@ -49665,10 +49972,10 @@
       </p:sp>
       <p:pic>
         <p:nvPicPr>
-          <p:cNvPr id="10" name="Picture 9">
+          <p:cNvPr id="5" name="Picture 4">
             <a:extLst>
               <a:ext uri="{FF2B5EF4-FFF2-40B4-BE49-F238E27FC236}">
-                <a16:creationId xmlns:a16="http://schemas.microsoft.com/office/drawing/2014/main" id="{725A494E-EB8B-111F-7855-2CCD852CD0DF}"/>
+                <a16:creationId xmlns:a16="http://schemas.microsoft.com/office/drawing/2014/main" id="{0FAD840C-E7B9-94FC-95FB-1B1D586F6B29}"/>
               </a:ext>
             </a:extLst>
           </p:cNvPr>
@@ -49679,14 +49986,15 @@
         </p:nvPicPr>
         <p:blipFill>
           <a:blip r:embed="rId2"/>
+          <a:srcRect t="7990" b="17779"/>
           <a:stretch>
             <a:fillRect/>
           </a:stretch>
         </p:blipFill>
         <p:spPr>
           <a:xfrm>
-            <a:off x="144964" y="5007935"/>
-            <a:ext cx="11902071" cy="616687"/>
+            <a:off x="575171" y="5146157"/>
+            <a:ext cx="11354529" cy="467833"/>
           </a:xfrm>
           <a:prstGeom prst="rect">
             <a:avLst/>
@@ -50113,6 +50421,110 @@
           </a:effectLst>
         </p:spPr>
       </p:pic>
+      <p:sp>
+        <p:nvSpPr>
+          <p:cNvPr id="4" name="Rectangle 3">
+            <a:extLst>
+              <a:ext uri="{FF2B5EF4-FFF2-40B4-BE49-F238E27FC236}">
+                <a16:creationId xmlns:a16="http://schemas.microsoft.com/office/drawing/2014/main" id="{6AA48129-48A1-5BBC-2D82-2E12693E909F}"/>
+              </a:ext>
+            </a:extLst>
+          </p:cNvPr>
+          <p:cNvSpPr/>
+          <p:nvPr/>
+        </p:nvSpPr>
+        <p:spPr>
+          <a:xfrm>
+            <a:off x="99102" y="2052084"/>
+            <a:ext cx="2856749" cy="446567"/>
+          </a:xfrm>
+          <a:prstGeom prst="rect">
+            <a:avLst/>
+          </a:prstGeom>
+          <a:noFill/>
+          <a:ln w="31750">
+            <a:solidFill>
+              <a:schemeClr val="accent6"/>
+            </a:solidFill>
+          </a:ln>
+        </p:spPr>
+        <p:style>
+          <a:lnRef idx="2">
+            <a:schemeClr val="accent1">
+              <a:shade val="50000"/>
+            </a:schemeClr>
+          </a:lnRef>
+          <a:fillRef idx="1">
+            <a:schemeClr val="accent1"/>
+          </a:fillRef>
+          <a:effectRef idx="0">
+            <a:schemeClr val="accent1"/>
+          </a:effectRef>
+          <a:fontRef idx="minor">
+            <a:schemeClr val="lt1"/>
+          </a:fontRef>
+        </p:style>
+        <p:txBody>
+          <a:bodyPr rtlCol="0" anchor="ctr"/>
+          <a:lstStyle/>
+          <a:p>
+            <a:pPr algn="ctr"/>
+            <a:endParaRPr lang="fr-FR"/>
+          </a:p>
+        </p:txBody>
+      </p:sp>
+      <p:sp>
+        <p:nvSpPr>
+          <p:cNvPr id="6" name="Rectangle 5">
+            <a:extLst>
+              <a:ext uri="{FF2B5EF4-FFF2-40B4-BE49-F238E27FC236}">
+                <a16:creationId xmlns:a16="http://schemas.microsoft.com/office/drawing/2014/main" id="{3E977823-69F0-55F7-53CF-8292EF184EAF}"/>
+              </a:ext>
+            </a:extLst>
+          </p:cNvPr>
+          <p:cNvSpPr/>
+          <p:nvPr/>
+        </p:nvSpPr>
+        <p:spPr>
+          <a:xfrm>
+            <a:off x="99102" y="3834443"/>
+            <a:ext cx="3473438" cy="446567"/>
+          </a:xfrm>
+          <a:prstGeom prst="rect">
+            <a:avLst/>
+          </a:prstGeom>
+          <a:noFill/>
+          <a:ln w="31750">
+            <a:solidFill>
+              <a:schemeClr val="accent6"/>
+            </a:solidFill>
+          </a:ln>
+        </p:spPr>
+        <p:style>
+          <a:lnRef idx="2">
+            <a:schemeClr val="accent1">
+              <a:shade val="50000"/>
+            </a:schemeClr>
+          </a:lnRef>
+          <a:fillRef idx="1">
+            <a:schemeClr val="accent1"/>
+          </a:fillRef>
+          <a:effectRef idx="0">
+            <a:schemeClr val="accent1"/>
+          </a:effectRef>
+          <a:fontRef idx="minor">
+            <a:schemeClr val="lt1"/>
+          </a:fontRef>
+        </p:style>
+        <p:txBody>
+          <a:bodyPr rtlCol="0" anchor="ctr"/>
+          <a:lstStyle/>
+          <a:p>
+            <a:pPr algn="ctr"/>
+            <a:endParaRPr lang="fr-FR"/>
+          </a:p>
+        </p:txBody>
+      </p:sp>
     </p:spTree>
     <p:extLst>
       <p:ext uri="{BB962C8B-B14F-4D97-AF65-F5344CB8AC3E}">
@@ -50123,13 +50535,13 @@
   <p:clrMapOvr>
     <a:masterClrMapping/>
   </p:clrMapOvr>
-  <mc:AlternateContent xmlns:mc="http://schemas.openxmlformats.org/markup-compatibility/2006">
-    <mc:Choice xmlns:p14="http://schemas.microsoft.com/office/powerpoint/2010/main" Requires="p14">
+  <mc:AlternateContent xmlns:mc="http://schemas.openxmlformats.org/markup-compatibility/2006" xmlns:p14="http://schemas.microsoft.com/office/powerpoint/2010/main">
+    <mc:Choice Requires="p14">
       <p:transition spd="med" p14:dur="700">
         <p:fade/>
       </p:transition>
     </mc:Choice>
-    <mc:Fallback>
+    <mc:Fallback xmlns="">
       <p:transition spd="med">
         <p:fade/>
       </p:transition>
@@ -50699,7 +51111,25 @@
                 </a:solidFill>
                 <a:sym typeface="Wingdings" panose="05000000000000000000" pitchFamily="2" charset="2"/>
               </a:rPr>
-              <a:t> Real use cases of the wanted file format from a business perspective.</a:t>
+              <a:t> Real use cases of the wanted file format from a </a:t>
+            </a:r>
+            <a:r>
+              <a:rPr lang="en-US" sz="2400" b="0" dirty="0">
+                <a:solidFill>
+                  <a:schemeClr val="accent1"/>
+                </a:solidFill>
+                <a:sym typeface="Wingdings" panose="05000000000000000000" pitchFamily="2" charset="2"/>
+              </a:rPr>
+              <a:t>business perspective</a:t>
+            </a:r>
+            <a:r>
+              <a:rPr lang="en-US" sz="2400" b="0" dirty="0">
+                <a:solidFill>
+                  <a:schemeClr val="tx2"/>
+                </a:solidFill>
+                <a:sym typeface="Wingdings" panose="05000000000000000000" pitchFamily="2" charset="2"/>
+              </a:rPr>
+              <a:t>.</a:t>
             </a:r>
           </a:p>
           <a:p>
@@ -50708,7 +51138,22 @@
               <a:rPr lang="en-US" sz="2400" dirty="0">
                 <a:sym typeface="Wingdings" panose="05000000000000000000" pitchFamily="2" charset="2"/>
               </a:rPr>
-              <a:t> Attack vectors exposed by the wanted file format from a security perspective.</a:t>
+              <a:t> Attack vectors exposed by the wanted file format from a </a:t>
+            </a:r>
+            <a:r>
+              <a:rPr lang="en-US" sz="2400" dirty="0">
+                <a:solidFill>
+                  <a:schemeClr val="accent5"/>
+                </a:solidFill>
+                <a:sym typeface="Wingdings" panose="05000000000000000000" pitchFamily="2" charset="2"/>
+              </a:rPr>
+              <a:t>security perspective</a:t>
+            </a:r>
+            <a:r>
+              <a:rPr lang="en-US" sz="2400" dirty="0">
+                <a:sym typeface="Wingdings" panose="05000000000000000000" pitchFamily="2" charset="2"/>
+              </a:rPr>
+              <a:t>.</a:t>
             </a:r>
             <a:endParaRPr lang="en-US" sz="2400" b="0" dirty="0">
               <a:solidFill>
@@ -50748,6 +51193,265 @@
   <p:clrMapOvr>
     <a:masterClrMapping/>
   </p:clrMapOvr>
+  <mc:AlternateContent xmlns:mc="http://schemas.openxmlformats.org/markup-compatibility/2006" xmlns:p14="http://schemas.microsoft.com/office/powerpoint/2010/main">
+    <mc:Choice Requires="p14">
+      <p:transition spd="med" p14:dur="700">
+        <p:fade/>
+      </p:transition>
+    </mc:Choice>
+    <mc:Fallback xmlns="">
+      <p:transition spd="med">
+        <p:fade/>
+      </p:transition>
+    </mc:Fallback>
+  </mc:AlternateContent>
+</p:sld>
+</file>
+
+<file path=ppt/slides/slide35.xml><?xml version="1.0" encoding="utf-8"?>
+<p:sld xmlns:a="http://schemas.openxmlformats.org/drawingml/2006/main" xmlns:r="http://schemas.openxmlformats.org/officeDocument/2006/relationships" xmlns:p="http://schemas.openxmlformats.org/presentationml/2006/main">
+  <p:cSld>
+    <p:spTree>
+      <p:nvGrpSpPr>
+        <p:cNvPr id="1" name="">
+          <a:extLst>
+            <a:ext uri="{FF2B5EF4-FFF2-40B4-BE49-F238E27FC236}">
+              <a16:creationId xmlns:a16="http://schemas.microsoft.com/office/drawing/2014/main" id="{0717EABB-3AF8-3E8A-42D7-048E653F774A}"/>
+            </a:ext>
+          </a:extLst>
+        </p:cNvPr>
+        <p:cNvGrpSpPr/>
+        <p:nvPr/>
+      </p:nvGrpSpPr>
+      <p:grpSpPr>
+        <a:xfrm>
+          <a:off x="0" y="0"/>
+          <a:ext cx="0" cy="0"/>
+          <a:chOff x="0" y="0"/>
+          <a:chExt cx="0" cy="0"/>
+        </a:xfrm>
+      </p:grpSpPr>
+      <p:sp>
+        <p:nvSpPr>
+          <p:cNvPr id="2" name="Titre 1">
+            <a:extLst>
+              <a:ext uri="{FF2B5EF4-FFF2-40B4-BE49-F238E27FC236}">
+                <a16:creationId xmlns:a16="http://schemas.microsoft.com/office/drawing/2014/main" id="{99607D1A-0517-89C0-44D0-2201B6D632E0}"/>
+              </a:ext>
+            </a:extLst>
+          </p:cNvPr>
+          <p:cNvSpPr>
+            <a:spLocks noGrp="1"/>
+          </p:cNvSpPr>
+          <p:nvPr>
+            <p:ph type="title"/>
+          </p:nvPr>
+        </p:nvSpPr>
+        <p:spPr/>
+        <p:txBody>
+          <a:bodyPr/>
+          <a:lstStyle/>
+          <a:p>
+            <a:r>
+              <a:rPr lang="en-US" dirty="0"/>
+              <a:t>🤖 Misc: Code generated via AI</a:t>
+            </a:r>
+          </a:p>
+        </p:txBody>
+      </p:sp>
+      <p:sp>
+        <p:nvSpPr>
+          <p:cNvPr id="3" name="Espace réservé du texte 2">
+            <a:extLst>
+              <a:ext uri="{FF2B5EF4-FFF2-40B4-BE49-F238E27FC236}">
+                <a16:creationId xmlns:a16="http://schemas.microsoft.com/office/drawing/2014/main" id="{D780FB18-5DA9-5DB8-969B-6A863CD13878}"/>
+              </a:ext>
+            </a:extLst>
+          </p:cNvPr>
+          <p:cNvSpPr>
+            <a:spLocks noGrp="1"/>
+          </p:cNvSpPr>
+          <p:nvPr>
+            <p:ph type="body" sz="quarter" idx="15"/>
+          </p:nvPr>
+        </p:nvSpPr>
+        <p:spPr>
+          <a:xfrm>
+            <a:off x="588000" y="977317"/>
+            <a:ext cx="11419970" cy="4949030"/>
+          </a:xfrm>
+        </p:spPr>
+        <p:txBody>
+          <a:bodyPr/>
+          <a:lstStyle/>
+          <a:p>
+            <a:r>
+              <a:rPr lang="en-US" sz="2800" b="0" dirty="0">
+                <a:solidFill>
+                  <a:schemeClr val="tx2"/>
+                </a:solidFill>
+              </a:rPr>
+              <a:t> Using ChatGPT (model GPT-5.2–class) with a user prompt </a:t>
+            </a:r>
+            <a:r>
+              <a:rPr lang="en-US" sz="2800" b="0" dirty="0">
+                <a:solidFill>
+                  <a:schemeClr val="accent1"/>
+                </a:solidFill>
+              </a:rPr>
+              <a:t>without any mention to the security aspect</a:t>
+            </a:r>
+            <a:r>
+              <a:rPr lang="en-US" sz="2800" b="0" dirty="0">
+                <a:solidFill>
+                  <a:schemeClr val="tx2"/>
+                </a:solidFill>
+              </a:rPr>
+              <a:t>:</a:t>
+            </a:r>
+          </a:p>
+          <a:p>
+            <a:pPr marL="0" lvl="1" indent="0">
+              <a:buNone/>
+            </a:pPr>
+            <a:endParaRPr lang="en-US" sz="2800" b="0" dirty="0">
+              <a:solidFill>
+                <a:schemeClr val="tx2"/>
+              </a:solidFill>
+            </a:endParaRPr>
+          </a:p>
+          <a:p>
+            <a:pPr marL="0" indent="0">
+              <a:buNone/>
+            </a:pPr>
+            <a:r>
+              <a:rPr lang="en-US" sz="2800" b="0" dirty="0">
+                <a:solidFill>
+                  <a:schemeClr val="tx2"/>
+                </a:solidFill>
+              </a:rPr>
+              <a:t>  </a:t>
+            </a:r>
+          </a:p>
+        </p:txBody>
+      </p:sp>
+      <p:sp>
+        <p:nvSpPr>
+          <p:cNvPr id="4" name="TextBox 3">
+            <a:extLst>
+              <a:ext uri="{FF2B5EF4-FFF2-40B4-BE49-F238E27FC236}">
+                <a16:creationId xmlns:a16="http://schemas.microsoft.com/office/drawing/2014/main" id="{0E2B787C-EEA3-8CF3-11B1-F44B3B2C8115}"/>
+              </a:ext>
+            </a:extLst>
+          </p:cNvPr>
+          <p:cNvSpPr txBox="1"/>
+          <p:nvPr/>
+        </p:nvSpPr>
+        <p:spPr>
+          <a:xfrm>
+            <a:off x="184031" y="2466753"/>
+            <a:ext cx="11724434" cy="2769989"/>
+          </a:xfrm>
+          <a:prstGeom prst="rect">
+            <a:avLst/>
+          </a:prstGeom>
+          <a:noFill/>
+        </p:spPr>
+        <p:txBody>
+          <a:bodyPr wrap="square" lIns="0" tIns="0" rIns="0" bIns="0" rtlCol="0">
+            <a:spAutoFit/>
+          </a:bodyPr>
+          <a:lstStyle/>
+          <a:p>
+            <a:pPr algn="l"/>
+            <a:r>
+              <a:rPr lang="en-US" dirty="0">
+                <a:latin typeface="Consolas" panose="020B0609020204030204" pitchFamily="49" charset="0"/>
+              </a:rPr>
+              <a:t>Give me the Java code of a REST web service intended to be an upload service accepting only PDF file.</a:t>
+            </a:r>
+          </a:p>
+          <a:p>
+            <a:pPr algn="l"/>
+            <a:endParaRPr lang="en-US" dirty="0">
+              <a:latin typeface="Consolas" panose="020B0609020204030204" pitchFamily="49" charset="0"/>
+            </a:endParaRPr>
+          </a:p>
+          <a:p>
+            <a:pPr algn="l"/>
+            <a:r>
+              <a:rPr lang="en-US" dirty="0">
+                <a:latin typeface="Consolas" panose="020B0609020204030204" pitchFamily="49" charset="0"/>
+              </a:rPr>
+              <a:t>You must make the code compact and easy to read/understand/maintain.</a:t>
+            </a:r>
+          </a:p>
+          <a:p>
+            <a:pPr algn="l"/>
+            <a:endParaRPr lang="en-US" dirty="0">
+              <a:latin typeface="Consolas" panose="020B0609020204030204" pitchFamily="49" charset="0"/>
+            </a:endParaRPr>
+          </a:p>
+          <a:p>
+            <a:pPr algn="l"/>
+            <a:r>
+              <a:rPr lang="en-US" dirty="0">
+                <a:latin typeface="Consolas" panose="020B0609020204030204" pitchFamily="49" charset="0"/>
+              </a:rPr>
+              <a:t>You must fulfil all theses constraints:</a:t>
+            </a:r>
+          </a:p>
+          <a:p>
+            <a:pPr marL="285750" indent="-285750" algn="l">
+              <a:buFont typeface="Arial" panose="020B0604020202020204" pitchFamily="34" charset="0"/>
+              <a:buChar char="•"/>
+            </a:pPr>
+            <a:r>
+              <a:rPr lang="en-US" dirty="0">
+                <a:latin typeface="Consolas" panose="020B0609020204030204" pitchFamily="49" charset="0"/>
+              </a:rPr>
+              <a:t>The REST web service must use Spring Boot.</a:t>
+            </a:r>
+          </a:p>
+          <a:p>
+            <a:pPr marL="285750" indent="-285750" algn="l">
+              <a:buFont typeface="Arial" panose="020B0604020202020204" pitchFamily="34" charset="0"/>
+              <a:buChar char="•"/>
+            </a:pPr>
+            <a:r>
+              <a:rPr lang="en-US" dirty="0">
+                <a:latin typeface="Consolas" panose="020B0609020204030204" pitchFamily="49" charset="0"/>
+              </a:rPr>
+              <a:t>You must use a recommended, maintained and open-source Java PDF library as much as possible.</a:t>
+            </a:r>
+          </a:p>
+          <a:p>
+            <a:pPr marL="285750" indent="-285750" algn="l">
+              <a:buFont typeface="Arial" panose="020B0604020202020204" pitchFamily="34" charset="0"/>
+              <a:buChar char="•"/>
+            </a:pPr>
+            <a:r>
+              <a:rPr lang="en-US" dirty="0">
+                <a:latin typeface="Consolas" panose="020B0609020204030204" pitchFamily="49" charset="0"/>
+              </a:rPr>
+              <a:t>The maximum size of the size must be 10 MB.</a:t>
+            </a:r>
+            <a:endParaRPr lang="fr-FR" dirty="0" err="1">
+              <a:latin typeface="Consolas" panose="020B0609020204030204" pitchFamily="49" charset="0"/>
+            </a:endParaRPr>
+          </a:p>
+        </p:txBody>
+      </p:sp>
+    </p:spTree>
+    <p:extLst>
+      <p:ext uri="{BB962C8B-B14F-4D97-AF65-F5344CB8AC3E}">
+        <p14:creationId xmlns:p14="http://schemas.microsoft.com/office/powerpoint/2010/main" val="3357811245"/>
+      </p:ext>
+    </p:extLst>
+  </p:cSld>
+  <p:clrMapOvr>
+    <a:masterClrMapping/>
+  </p:clrMapOvr>
   <mc:AlternateContent xmlns:mc="http://schemas.openxmlformats.org/markup-compatibility/2006">
     <mc:Choice xmlns:p14="http://schemas.microsoft.com/office/powerpoint/2010/main" Requires="p14">
       <p:transition spd="med" p14:dur="700">
@@ -50763,7 +51467,1002 @@
 </p:sld>
 </file>
 
-<file path=ppt/slides/slide35.xml><?xml version="1.0" encoding="utf-8"?>
+<file path=ppt/slides/slide36.xml><?xml version="1.0" encoding="utf-8"?>
+<p:sld xmlns:a="http://schemas.openxmlformats.org/drawingml/2006/main" xmlns:r="http://schemas.openxmlformats.org/officeDocument/2006/relationships" xmlns:p="http://schemas.openxmlformats.org/presentationml/2006/main">
+  <p:cSld>
+    <p:spTree>
+      <p:nvGrpSpPr>
+        <p:cNvPr id="1" name="">
+          <a:extLst>
+            <a:ext uri="{FF2B5EF4-FFF2-40B4-BE49-F238E27FC236}">
+              <a16:creationId xmlns:a16="http://schemas.microsoft.com/office/drawing/2014/main" id="{51231B11-40A8-25E6-9F3C-A5A774E44868}"/>
+            </a:ext>
+          </a:extLst>
+        </p:cNvPr>
+        <p:cNvGrpSpPr/>
+        <p:nvPr/>
+      </p:nvGrpSpPr>
+      <p:grpSpPr>
+        <a:xfrm>
+          <a:off x="0" y="0"/>
+          <a:ext cx="0" cy="0"/>
+          <a:chOff x="0" y="0"/>
+          <a:chExt cx="0" cy="0"/>
+        </a:xfrm>
+      </p:grpSpPr>
+      <p:sp>
+        <p:nvSpPr>
+          <p:cNvPr id="2" name="Titre 1">
+            <a:extLst>
+              <a:ext uri="{FF2B5EF4-FFF2-40B4-BE49-F238E27FC236}">
+                <a16:creationId xmlns:a16="http://schemas.microsoft.com/office/drawing/2014/main" id="{961EA181-EAD7-0C9B-6075-CCAFB9E06DE2}"/>
+              </a:ext>
+            </a:extLst>
+          </p:cNvPr>
+          <p:cNvSpPr>
+            <a:spLocks noGrp="1"/>
+          </p:cNvSpPr>
+          <p:nvPr>
+            <p:ph type="title"/>
+          </p:nvPr>
+        </p:nvSpPr>
+        <p:spPr/>
+        <p:txBody>
+          <a:bodyPr/>
+          <a:lstStyle/>
+          <a:p>
+            <a:r>
+              <a:rPr lang="en-US" dirty="0"/>
+              <a:t>🤖 Misc: Code generated via AI</a:t>
+            </a:r>
+          </a:p>
+        </p:txBody>
+      </p:sp>
+      <p:pic>
+        <p:nvPicPr>
+          <p:cNvPr id="6" name="Picture 5" descr="A screen shot of a computer program&#10;&#10;AI-generated content may be incorrect.">
+            <a:extLst>
+              <a:ext uri="{FF2B5EF4-FFF2-40B4-BE49-F238E27FC236}">
+                <a16:creationId xmlns:a16="http://schemas.microsoft.com/office/drawing/2014/main" id="{F20E73DB-B25D-FC4B-C15E-75CFC79FC828}"/>
+              </a:ext>
+            </a:extLst>
+          </p:cNvPr>
+          <p:cNvPicPr>
+            <a:picLocks noChangeAspect="1"/>
+          </p:cNvPicPr>
+          <p:nvPr/>
+        </p:nvPicPr>
+        <p:blipFill>
+          <a:blip r:embed="rId2">
+            <a:extLst>
+              <a:ext uri="{28A0092B-C50C-407E-A947-70E740481C1C}">
+                <a14:useLocalDpi xmlns:a14="http://schemas.microsoft.com/office/drawing/2010/main" val="0"/>
+              </a:ext>
+            </a:extLst>
+          </a:blip>
+          <a:stretch>
+            <a:fillRect/>
+          </a:stretch>
+        </p:blipFill>
+        <p:spPr>
+          <a:xfrm>
+            <a:off x="1153632" y="808228"/>
+            <a:ext cx="9884735" cy="5241543"/>
+          </a:xfrm>
+          <a:prstGeom prst="rect">
+            <a:avLst/>
+          </a:prstGeom>
+          <a:effectLst>
+            <a:outerShdw blurRad="50800" dist="38100" dir="2700000" algn="tl" rotWithShape="0">
+              <a:prstClr val="black">
+                <a:alpha val="40000"/>
+              </a:prstClr>
+            </a:outerShdw>
+          </a:effectLst>
+        </p:spPr>
+      </p:pic>
+    </p:spTree>
+    <p:extLst>
+      <p:ext uri="{BB962C8B-B14F-4D97-AF65-F5344CB8AC3E}">
+        <p14:creationId xmlns:p14="http://schemas.microsoft.com/office/powerpoint/2010/main" val="2828369189"/>
+      </p:ext>
+    </p:extLst>
+  </p:cSld>
+  <p:clrMapOvr>
+    <a:masterClrMapping/>
+  </p:clrMapOvr>
+  <mc:AlternateContent xmlns:mc="http://schemas.openxmlformats.org/markup-compatibility/2006">
+    <mc:Choice xmlns:p14="http://schemas.microsoft.com/office/powerpoint/2010/main" Requires="p14">
+      <p:transition spd="med" p14:dur="700">
+        <p:fade/>
+      </p:transition>
+    </mc:Choice>
+    <mc:Fallback>
+      <p:transition spd="med">
+        <p:fade/>
+      </p:transition>
+    </mc:Fallback>
+  </mc:AlternateContent>
+</p:sld>
+</file>
+
+<file path=ppt/slides/slide37.xml><?xml version="1.0" encoding="utf-8"?>
+<p:sld xmlns:a="http://schemas.openxmlformats.org/drawingml/2006/main" xmlns:r="http://schemas.openxmlformats.org/officeDocument/2006/relationships" xmlns:p="http://schemas.openxmlformats.org/presentationml/2006/main">
+  <p:cSld>
+    <p:spTree>
+      <p:nvGrpSpPr>
+        <p:cNvPr id="1" name="">
+          <a:extLst>
+            <a:ext uri="{FF2B5EF4-FFF2-40B4-BE49-F238E27FC236}">
+              <a16:creationId xmlns:a16="http://schemas.microsoft.com/office/drawing/2014/main" id="{003E6023-F693-7699-F89F-1086663FCB1A}"/>
+            </a:ext>
+          </a:extLst>
+        </p:cNvPr>
+        <p:cNvGrpSpPr/>
+        <p:nvPr/>
+      </p:nvGrpSpPr>
+      <p:grpSpPr>
+        <a:xfrm>
+          <a:off x="0" y="0"/>
+          <a:ext cx="0" cy="0"/>
+          <a:chOff x="0" y="0"/>
+          <a:chExt cx="0" cy="0"/>
+        </a:xfrm>
+      </p:grpSpPr>
+      <p:sp>
+        <p:nvSpPr>
+          <p:cNvPr id="2" name="Titre 1">
+            <a:extLst>
+              <a:ext uri="{FF2B5EF4-FFF2-40B4-BE49-F238E27FC236}">
+                <a16:creationId xmlns:a16="http://schemas.microsoft.com/office/drawing/2014/main" id="{B253230D-FF16-0731-521D-D75C9FDA4B5D}"/>
+              </a:ext>
+            </a:extLst>
+          </p:cNvPr>
+          <p:cNvSpPr>
+            <a:spLocks noGrp="1"/>
+          </p:cNvSpPr>
+          <p:nvPr>
+            <p:ph type="title"/>
+          </p:nvPr>
+        </p:nvSpPr>
+        <p:spPr/>
+        <p:txBody>
+          <a:bodyPr/>
+          <a:lstStyle/>
+          <a:p>
+            <a:r>
+              <a:rPr lang="en-US" dirty="0"/>
+              <a:t>🤖 Misc: Code generated via AI</a:t>
+            </a:r>
+          </a:p>
+        </p:txBody>
+      </p:sp>
+      <p:sp>
+        <p:nvSpPr>
+          <p:cNvPr id="3" name="Espace réservé du texte 2">
+            <a:extLst>
+              <a:ext uri="{FF2B5EF4-FFF2-40B4-BE49-F238E27FC236}">
+                <a16:creationId xmlns:a16="http://schemas.microsoft.com/office/drawing/2014/main" id="{05681DCE-E000-7EA1-F0DD-4559669AEBCB}"/>
+              </a:ext>
+            </a:extLst>
+          </p:cNvPr>
+          <p:cNvSpPr>
+            <a:spLocks noGrp="1"/>
+          </p:cNvSpPr>
+          <p:nvPr>
+            <p:ph type="body" sz="quarter" idx="15"/>
+          </p:nvPr>
+        </p:nvSpPr>
+        <p:spPr>
+          <a:xfrm>
+            <a:off x="588000" y="977317"/>
+            <a:ext cx="11419970" cy="4949030"/>
+          </a:xfrm>
+        </p:spPr>
+        <p:txBody>
+          <a:bodyPr/>
+          <a:lstStyle/>
+          <a:p>
+            <a:r>
+              <a:rPr lang="en-US" sz="2800" b="0" dirty="0">
+                <a:solidFill>
+                  <a:schemeClr val="tx2"/>
+                </a:solidFill>
+              </a:rPr>
+              <a:t> Using ChatGPT (model GPT-5.2–class) with a user prompt </a:t>
+            </a:r>
+            <a:r>
+              <a:rPr lang="en-US" sz="2800" b="0" dirty="0">
+                <a:solidFill>
+                  <a:schemeClr val="accent1"/>
+                </a:solidFill>
+              </a:rPr>
+              <a:t>with explicit mention to the security aspect</a:t>
+            </a:r>
+            <a:r>
+              <a:rPr lang="en-US" sz="2800" b="0" dirty="0">
+                <a:solidFill>
+                  <a:schemeClr val="tx2"/>
+                </a:solidFill>
+              </a:rPr>
+              <a:t>:</a:t>
+            </a:r>
+          </a:p>
+          <a:p>
+            <a:pPr marL="0" lvl="1" indent="0">
+              <a:buNone/>
+            </a:pPr>
+            <a:endParaRPr lang="en-US" sz="2800" b="0" dirty="0">
+              <a:solidFill>
+                <a:schemeClr val="tx2"/>
+              </a:solidFill>
+            </a:endParaRPr>
+          </a:p>
+          <a:p>
+            <a:pPr marL="0" indent="0">
+              <a:buNone/>
+            </a:pPr>
+            <a:r>
+              <a:rPr lang="en-US" sz="2800" b="0" dirty="0">
+                <a:solidFill>
+                  <a:schemeClr val="tx2"/>
+                </a:solidFill>
+              </a:rPr>
+              <a:t>  </a:t>
+            </a:r>
+          </a:p>
+        </p:txBody>
+      </p:sp>
+      <p:sp>
+        <p:nvSpPr>
+          <p:cNvPr id="4" name="TextBox 3">
+            <a:extLst>
+              <a:ext uri="{FF2B5EF4-FFF2-40B4-BE49-F238E27FC236}">
+                <a16:creationId xmlns:a16="http://schemas.microsoft.com/office/drawing/2014/main" id="{E4B76E6F-8926-EBC9-DD7E-FE5362608BC0}"/>
+              </a:ext>
+            </a:extLst>
+          </p:cNvPr>
+          <p:cNvSpPr txBox="1"/>
+          <p:nvPr/>
+        </p:nvSpPr>
+        <p:spPr>
+          <a:xfrm>
+            <a:off x="184030" y="2466753"/>
+            <a:ext cx="11823939" cy="3046988"/>
+          </a:xfrm>
+          <a:prstGeom prst="rect">
+            <a:avLst/>
+          </a:prstGeom>
+          <a:noFill/>
+        </p:spPr>
+        <p:txBody>
+          <a:bodyPr wrap="square" lIns="0" tIns="0" rIns="0" bIns="0" rtlCol="0">
+            <a:spAutoFit/>
+          </a:bodyPr>
+          <a:lstStyle/>
+          <a:p>
+            <a:pPr algn="l"/>
+            <a:r>
+              <a:rPr lang="en-US" dirty="0">
+                <a:latin typeface="Consolas" panose="020B0609020204030204" pitchFamily="49" charset="0"/>
+              </a:rPr>
+              <a:t>Give me the Java code of a REST web service intended to be an upload service accepting only PDF file.</a:t>
+            </a:r>
+          </a:p>
+          <a:p>
+            <a:pPr algn="l"/>
+            <a:endParaRPr lang="en-US" dirty="0">
+              <a:latin typeface="Consolas" panose="020B0609020204030204" pitchFamily="49" charset="0"/>
+            </a:endParaRPr>
+          </a:p>
+          <a:p>
+            <a:pPr algn="l"/>
+            <a:r>
+              <a:rPr lang="en-US" dirty="0">
+                <a:latin typeface="Consolas" panose="020B0609020204030204" pitchFamily="49" charset="0"/>
+              </a:rPr>
+              <a:t>You must make the code compact and easy to read/understand/maintain.</a:t>
+            </a:r>
+          </a:p>
+          <a:p>
+            <a:pPr algn="l"/>
+            <a:endParaRPr lang="en-US" dirty="0">
+              <a:latin typeface="Consolas" panose="020B0609020204030204" pitchFamily="49" charset="0"/>
+            </a:endParaRPr>
+          </a:p>
+          <a:p>
+            <a:pPr algn="l"/>
+            <a:r>
+              <a:rPr lang="en-US" dirty="0">
+                <a:latin typeface="Consolas" panose="020B0609020204030204" pitchFamily="49" charset="0"/>
+              </a:rPr>
+              <a:t>You must fulfil all theses constraints:</a:t>
+            </a:r>
+          </a:p>
+          <a:p>
+            <a:pPr marL="285750" indent="-285750" algn="l">
+              <a:buFont typeface="Arial" panose="020B0604020202020204" pitchFamily="34" charset="0"/>
+              <a:buChar char="•"/>
+            </a:pPr>
+            <a:r>
+              <a:rPr lang="en-US" dirty="0">
+                <a:latin typeface="Consolas" panose="020B0609020204030204" pitchFamily="49" charset="0"/>
+              </a:rPr>
+              <a:t>The REST web service must use Spring Boot.</a:t>
+            </a:r>
+          </a:p>
+          <a:p>
+            <a:pPr marL="285750" indent="-285750" algn="l">
+              <a:buFont typeface="Arial" panose="020B0604020202020204" pitchFamily="34" charset="0"/>
+              <a:buChar char="•"/>
+            </a:pPr>
+            <a:r>
+              <a:rPr lang="en-US" dirty="0">
+                <a:latin typeface="Consolas" panose="020B0609020204030204" pitchFamily="49" charset="0"/>
+              </a:rPr>
+              <a:t>You must use a recommended, maintained and open-source Java PDF library as much as possible.</a:t>
+            </a:r>
+          </a:p>
+          <a:p>
+            <a:pPr marL="285750" indent="-285750" algn="l">
+              <a:buFont typeface="Arial" panose="020B0604020202020204" pitchFamily="34" charset="0"/>
+              <a:buChar char="•"/>
+            </a:pPr>
+            <a:r>
+              <a:rPr lang="en-US" b="1" dirty="0">
+                <a:solidFill>
+                  <a:schemeClr val="accent3"/>
+                </a:solidFill>
+                <a:latin typeface="Consolas" panose="020B0609020204030204" pitchFamily="49" charset="0"/>
+              </a:rPr>
+              <a:t>You must include all the security validations to ensure that the PDF file is safe from a security perspective.</a:t>
+            </a:r>
+          </a:p>
+          <a:p>
+            <a:pPr marL="285750" indent="-285750" algn="l">
+              <a:buFont typeface="Arial" panose="020B0604020202020204" pitchFamily="34" charset="0"/>
+              <a:buChar char="•"/>
+            </a:pPr>
+            <a:r>
+              <a:rPr lang="en-US" dirty="0">
+                <a:latin typeface="Consolas" panose="020B0609020204030204" pitchFamily="49" charset="0"/>
+              </a:rPr>
+              <a:t>The maximum size of the size must be 10 MB.</a:t>
+            </a:r>
+            <a:endParaRPr lang="fr-FR" dirty="0" err="1">
+              <a:latin typeface="Consolas" panose="020B0609020204030204" pitchFamily="49" charset="0"/>
+            </a:endParaRPr>
+          </a:p>
+        </p:txBody>
+      </p:sp>
+    </p:spTree>
+    <p:extLst>
+      <p:ext uri="{BB962C8B-B14F-4D97-AF65-F5344CB8AC3E}">
+        <p14:creationId xmlns:p14="http://schemas.microsoft.com/office/powerpoint/2010/main" val="1318273276"/>
+      </p:ext>
+    </p:extLst>
+  </p:cSld>
+  <p:clrMapOvr>
+    <a:masterClrMapping/>
+  </p:clrMapOvr>
+  <mc:AlternateContent xmlns:mc="http://schemas.openxmlformats.org/markup-compatibility/2006">
+    <mc:Choice xmlns:p14="http://schemas.microsoft.com/office/powerpoint/2010/main" Requires="p14">
+      <p:transition spd="med" p14:dur="700">
+        <p:fade/>
+      </p:transition>
+    </mc:Choice>
+    <mc:Fallback>
+      <p:transition spd="med">
+        <p:fade/>
+      </p:transition>
+    </mc:Fallback>
+  </mc:AlternateContent>
+</p:sld>
+</file>
+
+<file path=ppt/slides/slide38.xml><?xml version="1.0" encoding="utf-8"?>
+<p:sld xmlns:a="http://schemas.openxmlformats.org/drawingml/2006/main" xmlns:r="http://schemas.openxmlformats.org/officeDocument/2006/relationships" xmlns:p="http://schemas.openxmlformats.org/presentationml/2006/main">
+  <p:cSld>
+    <p:spTree>
+      <p:nvGrpSpPr>
+        <p:cNvPr id="1" name="">
+          <a:extLst>
+            <a:ext uri="{FF2B5EF4-FFF2-40B4-BE49-F238E27FC236}">
+              <a16:creationId xmlns:a16="http://schemas.microsoft.com/office/drawing/2014/main" id="{6DD8BB4A-AC8A-D165-E2D8-05BCF03F1F3E}"/>
+            </a:ext>
+          </a:extLst>
+        </p:cNvPr>
+        <p:cNvGrpSpPr/>
+        <p:nvPr/>
+      </p:nvGrpSpPr>
+      <p:grpSpPr>
+        <a:xfrm>
+          <a:off x="0" y="0"/>
+          <a:ext cx="0" cy="0"/>
+          <a:chOff x="0" y="0"/>
+          <a:chExt cx="0" cy="0"/>
+        </a:xfrm>
+      </p:grpSpPr>
+      <p:sp>
+        <p:nvSpPr>
+          <p:cNvPr id="2" name="Titre 1">
+            <a:extLst>
+              <a:ext uri="{FF2B5EF4-FFF2-40B4-BE49-F238E27FC236}">
+                <a16:creationId xmlns:a16="http://schemas.microsoft.com/office/drawing/2014/main" id="{25605F23-5A77-C36A-9682-F6BD4D1007A7}"/>
+              </a:ext>
+            </a:extLst>
+          </p:cNvPr>
+          <p:cNvSpPr>
+            <a:spLocks noGrp="1"/>
+          </p:cNvSpPr>
+          <p:nvPr>
+            <p:ph type="title"/>
+          </p:nvPr>
+        </p:nvSpPr>
+        <p:spPr/>
+        <p:txBody>
+          <a:bodyPr/>
+          <a:lstStyle/>
+          <a:p>
+            <a:r>
+              <a:rPr lang="en-US" dirty="0"/>
+              <a:t>🤖 Misc: Code generated via AI</a:t>
+            </a:r>
+          </a:p>
+        </p:txBody>
+      </p:sp>
+      <p:pic>
+        <p:nvPicPr>
+          <p:cNvPr id="8" name="Picture 7" descr="A screen shot of a computer program&#10;&#10;AI-generated content may be incorrect.">
+            <a:extLst>
+              <a:ext uri="{FF2B5EF4-FFF2-40B4-BE49-F238E27FC236}">
+                <a16:creationId xmlns:a16="http://schemas.microsoft.com/office/drawing/2014/main" id="{B4048B82-FBF4-4A7F-8FBB-5B914E6206FA}"/>
+              </a:ext>
+            </a:extLst>
+          </p:cNvPr>
+          <p:cNvPicPr>
+            <a:picLocks noChangeAspect="1"/>
+          </p:cNvPicPr>
+          <p:nvPr/>
+        </p:nvPicPr>
+        <p:blipFill>
+          <a:blip r:embed="rId2">
+            <a:extLst>
+              <a:ext uri="{28A0092B-C50C-407E-A947-70E740481C1C}">
+                <a14:useLocalDpi xmlns:a14="http://schemas.microsoft.com/office/drawing/2010/main" val="0"/>
+              </a:ext>
+            </a:extLst>
+          </a:blip>
+          <a:stretch>
+            <a:fillRect/>
+          </a:stretch>
+        </p:blipFill>
+        <p:spPr>
+          <a:xfrm>
+            <a:off x="2854939" y="729332"/>
+            <a:ext cx="6482122" cy="6071428"/>
+          </a:xfrm>
+          <a:prstGeom prst="rect">
+            <a:avLst/>
+          </a:prstGeom>
+          <a:effectLst>
+            <a:outerShdw blurRad="50800" dist="38100" dir="2700000" algn="tl" rotWithShape="0">
+              <a:prstClr val="black">
+                <a:alpha val="40000"/>
+              </a:prstClr>
+            </a:outerShdw>
+          </a:effectLst>
+        </p:spPr>
+      </p:pic>
+    </p:spTree>
+    <p:extLst>
+      <p:ext uri="{BB962C8B-B14F-4D97-AF65-F5344CB8AC3E}">
+        <p14:creationId xmlns:p14="http://schemas.microsoft.com/office/powerpoint/2010/main" val="3737270670"/>
+      </p:ext>
+    </p:extLst>
+  </p:cSld>
+  <p:clrMapOvr>
+    <a:masterClrMapping/>
+  </p:clrMapOvr>
+  <mc:AlternateContent xmlns:mc="http://schemas.openxmlformats.org/markup-compatibility/2006">
+    <mc:Choice xmlns:p14="http://schemas.microsoft.com/office/powerpoint/2010/main" Requires="p14">
+      <p:transition spd="med" p14:dur="700">
+        <p:fade/>
+      </p:transition>
+    </mc:Choice>
+    <mc:Fallback>
+      <p:transition spd="med">
+        <p:fade/>
+      </p:transition>
+    </mc:Fallback>
+  </mc:AlternateContent>
+</p:sld>
+</file>
+
+<file path=ppt/slides/slide39.xml><?xml version="1.0" encoding="utf-8"?>
+<p:sld xmlns:a="http://schemas.openxmlformats.org/drawingml/2006/main" xmlns:r="http://schemas.openxmlformats.org/officeDocument/2006/relationships" xmlns:p="http://schemas.openxmlformats.org/presentationml/2006/main">
+  <p:cSld>
+    <p:spTree>
+      <p:nvGrpSpPr>
+        <p:cNvPr id="1" name="">
+          <a:extLst>
+            <a:ext uri="{FF2B5EF4-FFF2-40B4-BE49-F238E27FC236}">
+              <a16:creationId xmlns:a16="http://schemas.microsoft.com/office/drawing/2014/main" id="{BA66D07B-C31F-BF95-3011-3A7884290F00}"/>
+            </a:ext>
+          </a:extLst>
+        </p:cNvPr>
+        <p:cNvGrpSpPr/>
+        <p:nvPr/>
+      </p:nvGrpSpPr>
+      <p:grpSpPr>
+        <a:xfrm>
+          <a:off x="0" y="0"/>
+          <a:ext cx="0" cy="0"/>
+          <a:chOff x="0" y="0"/>
+          <a:chExt cx="0" cy="0"/>
+        </a:xfrm>
+      </p:grpSpPr>
+      <p:sp>
+        <p:nvSpPr>
+          <p:cNvPr id="2" name="Titre 1">
+            <a:extLst>
+              <a:ext uri="{FF2B5EF4-FFF2-40B4-BE49-F238E27FC236}">
+                <a16:creationId xmlns:a16="http://schemas.microsoft.com/office/drawing/2014/main" id="{981167CB-24A0-FE75-AD5B-86EBD429FDAA}"/>
+              </a:ext>
+            </a:extLst>
+          </p:cNvPr>
+          <p:cNvSpPr>
+            <a:spLocks noGrp="1"/>
+          </p:cNvSpPr>
+          <p:nvPr>
+            <p:ph type="title"/>
+          </p:nvPr>
+        </p:nvSpPr>
+        <p:spPr/>
+        <p:txBody>
+          <a:bodyPr/>
+          <a:lstStyle/>
+          <a:p>
+            <a:r>
+              <a:rPr lang="en-US" dirty="0"/>
+              <a:t>🤖 Misc: Code generated via AI</a:t>
+            </a:r>
+          </a:p>
+        </p:txBody>
+      </p:sp>
+      <p:pic>
+        <p:nvPicPr>
+          <p:cNvPr id="8" name="Picture 7" descr="A screen shot of a computer program&#10;&#10;AI-generated content may be incorrect.">
+            <a:extLst>
+              <a:ext uri="{FF2B5EF4-FFF2-40B4-BE49-F238E27FC236}">
+                <a16:creationId xmlns:a16="http://schemas.microsoft.com/office/drawing/2014/main" id="{C0D52F15-9F76-2129-C1A9-80B906F005E6}"/>
+              </a:ext>
+            </a:extLst>
+          </p:cNvPr>
+          <p:cNvPicPr>
+            <a:picLocks noChangeAspect="1"/>
+          </p:cNvPicPr>
+          <p:nvPr/>
+        </p:nvPicPr>
+        <p:blipFill>
+          <a:blip r:embed="rId2">
+            <a:extLst>
+              <a:ext uri="{28A0092B-C50C-407E-A947-70E740481C1C}">
+                <a14:useLocalDpi xmlns:a14="http://schemas.microsoft.com/office/drawing/2010/main" val="0"/>
+              </a:ext>
+            </a:extLst>
+          </a:blip>
+          <a:srcRect l="6642" t="33346" b="7287"/>
+          <a:stretch>
+            <a:fillRect/>
+          </a:stretch>
+        </p:blipFill>
+        <p:spPr>
+          <a:xfrm>
+            <a:off x="1608786" y="842970"/>
+            <a:ext cx="8683530" cy="5172060"/>
+          </a:xfrm>
+          <a:prstGeom prst="rect">
+            <a:avLst/>
+          </a:prstGeom>
+          <a:effectLst>
+            <a:outerShdw blurRad="50800" dist="38100" dir="2700000" algn="tl" rotWithShape="0">
+              <a:prstClr val="black">
+                <a:alpha val="40000"/>
+              </a:prstClr>
+            </a:outerShdw>
+          </a:effectLst>
+        </p:spPr>
+      </p:pic>
+    </p:spTree>
+    <p:extLst>
+      <p:ext uri="{BB962C8B-B14F-4D97-AF65-F5344CB8AC3E}">
+        <p14:creationId xmlns:p14="http://schemas.microsoft.com/office/powerpoint/2010/main" val="2072987811"/>
+      </p:ext>
+    </p:extLst>
+  </p:cSld>
+  <p:clrMapOvr>
+    <a:masterClrMapping/>
+  </p:clrMapOvr>
+  <mc:AlternateContent xmlns:mc="http://schemas.openxmlformats.org/markup-compatibility/2006">
+    <mc:Choice xmlns:p159="http://schemas.microsoft.com/office/powerpoint/2015/09/main" Requires="p159">
+      <p:transition xmlns:p14="http://schemas.microsoft.com/office/powerpoint/2010/main" spd="slow" p14:dur="2000">
+        <p159:morph option="byObject"/>
+      </p:transition>
+    </mc:Choice>
+    <mc:Fallback>
+      <p:transition spd="slow">
+        <p:fade/>
+      </p:transition>
+    </mc:Fallback>
+  </mc:AlternateContent>
+</p:sld>
+</file>
+
+<file path=ppt/slides/slide4.xml><?xml version="1.0" encoding="utf-8"?>
+<p:sld xmlns:a="http://schemas.openxmlformats.org/drawingml/2006/main" xmlns:r="http://schemas.openxmlformats.org/officeDocument/2006/relationships" xmlns:p="http://schemas.openxmlformats.org/presentationml/2006/main">
+  <p:cSld>
+    <p:spTree>
+      <p:nvGrpSpPr>
+        <p:cNvPr id="1" name="">
+          <a:extLst>
+            <a:ext uri="{FF2B5EF4-FFF2-40B4-BE49-F238E27FC236}">
+              <a16:creationId xmlns:a16="http://schemas.microsoft.com/office/drawing/2014/main" id="{45471A1E-95EE-973E-B522-F5AA5AEFF67A}"/>
+            </a:ext>
+          </a:extLst>
+        </p:cNvPr>
+        <p:cNvGrpSpPr/>
+        <p:nvPr/>
+      </p:nvGrpSpPr>
+      <p:grpSpPr>
+        <a:xfrm>
+          <a:off x="0" y="0"/>
+          <a:ext cx="0" cy="0"/>
+          <a:chOff x="0" y="0"/>
+          <a:chExt cx="0" cy="0"/>
+        </a:xfrm>
+      </p:grpSpPr>
+      <p:sp>
+        <p:nvSpPr>
+          <p:cNvPr id="2" name="Titre 1">
+            <a:extLst>
+              <a:ext uri="{FF2B5EF4-FFF2-40B4-BE49-F238E27FC236}">
+                <a16:creationId xmlns:a16="http://schemas.microsoft.com/office/drawing/2014/main" id="{4C0CAB36-7800-3785-6EB6-597BA8E3E466}"/>
+              </a:ext>
+            </a:extLst>
+          </p:cNvPr>
+          <p:cNvSpPr>
+            <a:spLocks noGrp="1"/>
+          </p:cNvSpPr>
+          <p:nvPr>
+            <p:ph type="title"/>
+          </p:nvPr>
+        </p:nvSpPr>
+        <p:spPr/>
+        <p:txBody>
+          <a:bodyPr/>
+          <a:lstStyle/>
+          <a:p>
+            <a:r>
+              <a:rPr lang="en-US" dirty="0"/>
+              <a:t>ℹ️ Introduction</a:t>
+            </a:r>
+          </a:p>
+        </p:txBody>
+      </p:sp>
+      <p:sp>
+        <p:nvSpPr>
+          <p:cNvPr id="3" name="Espace réservé du texte 2">
+            <a:extLst>
+              <a:ext uri="{FF2B5EF4-FFF2-40B4-BE49-F238E27FC236}">
+                <a16:creationId xmlns:a16="http://schemas.microsoft.com/office/drawing/2014/main" id="{F9B0CA82-1172-E064-A39F-91CE0E6141A1}"/>
+              </a:ext>
+            </a:extLst>
+          </p:cNvPr>
+          <p:cNvSpPr>
+            <a:spLocks noGrp="1"/>
+          </p:cNvSpPr>
+          <p:nvPr>
+            <p:ph type="body" sz="quarter" idx="15"/>
+          </p:nvPr>
+        </p:nvSpPr>
+        <p:spPr>
+          <a:xfrm>
+            <a:off x="588000" y="977317"/>
+            <a:ext cx="11419970" cy="4949030"/>
+          </a:xfrm>
+        </p:spPr>
+        <p:txBody>
+          <a:bodyPr/>
+          <a:lstStyle/>
+          <a:p>
+            <a:r>
+              <a:rPr lang="en-US" sz="2800" b="0" dirty="0">
+                <a:solidFill>
+                  <a:schemeClr val="tx2"/>
+                </a:solidFill>
+              </a:rPr>
+              <a:t> Some popular statement I often hear:</a:t>
+            </a:r>
+          </a:p>
+          <a:p>
+            <a:pPr lvl="1"/>
+            <a:r>
+              <a:rPr lang="en-US" sz="2400" b="0" dirty="0">
+                <a:solidFill>
+                  <a:schemeClr val="tx2"/>
+                </a:solidFill>
+              </a:rPr>
+              <a:t>PDF is a safe format!</a:t>
+            </a:r>
+          </a:p>
+          <a:p>
+            <a:pPr lvl="1"/>
+            <a:r>
+              <a:rPr lang="en-US" sz="2400" dirty="0"/>
+              <a:t>A</a:t>
+            </a:r>
+            <a:r>
+              <a:rPr lang="en-US" sz="2400" b="0" dirty="0">
+                <a:solidFill>
+                  <a:schemeClr val="tx2"/>
+                </a:solidFill>
+              </a:rPr>
+              <a:t> "file upload" is simple to implement!</a:t>
+            </a:r>
+          </a:p>
+          <a:p>
+            <a:pPr lvl="1"/>
+            <a:endParaRPr lang="en-US" sz="2400" dirty="0"/>
+          </a:p>
+          <a:p>
+            <a:r>
+              <a:rPr lang="en-US" sz="2800" b="0" dirty="0">
+                <a:solidFill>
+                  <a:schemeClr val="tx2"/>
+                </a:solidFill>
+              </a:rPr>
+              <a:t> Let's deep dive and explore together “</a:t>
+            </a:r>
+            <a:r>
+              <a:rPr lang="en-US" sz="2800" b="0" dirty="0">
+                <a:solidFill>
+                  <a:schemeClr val="accent1"/>
+                </a:solidFill>
+              </a:rPr>
+              <a:t>The Devil is in the Payloads</a:t>
+            </a:r>
+            <a:r>
+              <a:rPr lang="en-US" sz="2800" b="0" dirty="0">
+                <a:solidFill>
+                  <a:schemeClr val="tx2"/>
+                </a:solidFill>
+              </a:rPr>
+              <a:t>” concept through a little story inspired by real events that I experienced...</a:t>
+            </a:r>
+          </a:p>
+        </p:txBody>
+      </p:sp>
+    </p:spTree>
+    <p:extLst>
+      <p:ext uri="{BB962C8B-B14F-4D97-AF65-F5344CB8AC3E}">
+        <p14:creationId xmlns:p14="http://schemas.microsoft.com/office/powerpoint/2010/main" val="2617813205"/>
+      </p:ext>
+    </p:extLst>
+  </p:cSld>
+  <p:clrMapOvr>
+    <a:masterClrMapping/>
+  </p:clrMapOvr>
+  <mc:AlternateContent xmlns:mc="http://schemas.openxmlformats.org/markup-compatibility/2006" xmlns:p14="http://schemas.microsoft.com/office/powerpoint/2010/main">
+    <mc:Choice Requires="p14">
+      <p:transition spd="med" p14:dur="700">
+        <p:fade/>
+      </p:transition>
+    </mc:Choice>
+    <mc:Fallback xmlns="">
+      <p:transition spd="med">
+        <p:fade/>
+      </p:transition>
+    </mc:Fallback>
+  </mc:AlternateContent>
+</p:sld>
+</file>
+
+<file path=ppt/slides/slide40.xml><?xml version="1.0" encoding="utf-8"?>
+<p:sld xmlns:a="http://schemas.openxmlformats.org/drawingml/2006/main" xmlns:r="http://schemas.openxmlformats.org/officeDocument/2006/relationships" xmlns:p="http://schemas.openxmlformats.org/presentationml/2006/main">
+  <p:cSld>
+    <p:spTree>
+      <p:nvGrpSpPr>
+        <p:cNvPr id="1" name="">
+          <a:extLst>
+            <a:ext uri="{FF2B5EF4-FFF2-40B4-BE49-F238E27FC236}">
+              <a16:creationId xmlns:a16="http://schemas.microsoft.com/office/drawing/2014/main" id="{C16BD849-7A21-E6E0-A641-E4CD4B5785CA}"/>
+            </a:ext>
+          </a:extLst>
+        </p:cNvPr>
+        <p:cNvGrpSpPr/>
+        <p:nvPr/>
+      </p:nvGrpSpPr>
+      <p:grpSpPr>
+        <a:xfrm>
+          <a:off x="0" y="0"/>
+          <a:ext cx="0" cy="0"/>
+          <a:chOff x="0" y="0"/>
+          <a:chExt cx="0" cy="0"/>
+        </a:xfrm>
+      </p:grpSpPr>
+      <p:sp>
+        <p:nvSpPr>
+          <p:cNvPr id="2" name="Titre 1">
+            <a:extLst>
+              <a:ext uri="{FF2B5EF4-FFF2-40B4-BE49-F238E27FC236}">
+                <a16:creationId xmlns:a16="http://schemas.microsoft.com/office/drawing/2014/main" id="{DB51865A-00A9-5E7D-A929-9DDAA73724EE}"/>
+              </a:ext>
+            </a:extLst>
+          </p:cNvPr>
+          <p:cNvSpPr>
+            <a:spLocks noGrp="1"/>
+          </p:cNvSpPr>
+          <p:nvPr>
+            <p:ph type="title"/>
+          </p:nvPr>
+        </p:nvSpPr>
+        <p:spPr/>
+        <p:txBody>
+          <a:bodyPr/>
+          <a:lstStyle/>
+          <a:p>
+            <a:r>
+              <a:rPr lang="en-US" dirty="0"/>
+              <a:t>🤖 Misc: Code generated via AI</a:t>
+            </a:r>
+          </a:p>
+        </p:txBody>
+      </p:sp>
+      <p:sp>
+        <p:nvSpPr>
+          <p:cNvPr id="3" name="Espace réservé du texte 2">
+            <a:extLst>
+              <a:ext uri="{FF2B5EF4-FFF2-40B4-BE49-F238E27FC236}">
+                <a16:creationId xmlns:a16="http://schemas.microsoft.com/office/drawing/2014/main" id="{A7F83F62-19C4-CAB5-9BFB-6728903D6D68}"/>
+              </a:ext>
+            </a:extLst>
+          </p:cNvPr>
+          <p:cNvSpPr>
+            <a:spLocks noGrp="1"/>
+          </p:cNvSpPr>
+          <p:nvPr>
+            <p:ph type="body" sz="quarter" idx="15"/>
+          </p:nvPr>
+        </p:nvSpPr>
+        <p:spPr>
+          <a:xfrm>
+            <a:off x="588000" y="977317"/>
+            <a:ext cx="11419970" cy="4949030"/>
+          </a:xfrm>
+        </p:spPr>
+        <p:txBody>
+          <a:bodyPr/>
+          <a:lstStyle/>
+          <a:p>
+            <a:r>
+              <a:rPr lang="en-US" sz="2800" b="0" dirty="0">
+                <a:solidFill>
+                  <a:schemeClr val="tx2"/>
+                </a:solidFill>
+              </a:rPr>
+              <a:t> ⚠️ Security aspect need to be mentioned in the user prompt.</a:t>
+            </a:r>
+          </a:p>
+          <a:p>
+            <a:pPr marL="0" indent="0">
+              <a:buNone/>
+            </a:pPr>
+            <a:endParaRPr lang="en-US" sz="2800" b="0" dirty="0">
+              <a:solidFill>
+                <a:schemeClr val="tx2"/>
+              </a:solidFill>
+            </a:endParaRPr>
+          </a:p>
+          <a:p>
+            <a:r>
+              <a:rPr lang="en-US" sz="2800" b="0" dirty="0">
+                <a:solidFill>
+                  <a:schemeClr val="tx2"/>
+                </a:solidFill>
+              </a:rPr>
+              <a:t> 📋 When mentioned, a good foundation of validations are applied.</a:t>
+            </a:r>
+          </a:p>
+          <a:p>
+            <a:pPr marL="0" indent="0">
+              <a:buNone/>
+            </a:pPr>
+            <a:endParaRPr lang="en-US" sz="2800" b="0" dirty="0">
+              <a:solidFill>
+                <a:schemeClr val="tx2"/>
+              </a:solidFill>
+            </a:endParaRPr>
+          </a:p>
+          <a:p>
+            <a:r>
+              <a:rPr lang="en-US" sz="2800" b="0" dirty="0">
+                <a:solidFill>
+                  <a:schemeClr val="tx2"/>
+                </a:solidFill>
+              </a:rPr>
+              <a:t> 🔬 Some validation still miss so either:</a:t>
+            </a:r>
+          </a:p>
+          <a:p>
+            <a:pPr lvl="1"/>
+            <a:r>
+              <a:rPr lang="en-US" sz="2400" dirty="0"/>
+              <a:t>User prompt must be tuned to indicate to add the missing validations.</a:t>
+            </a:r>
+          </a:p>
+          <a:p>
+            <a:pPr lvl="1"/>
+            <a:r>
+              <a:rPr lang="en-US" sz="2400" b="0" dirty="0">
+                <a:solidFill>
+                  <a:schemeClr val="tx2"/>
+                </a:solidFill>
+              </a:rPr>
+              <a:t>The generated code need to be manually enriched.</a:t>
+            </a:r>
+          </a:p>
+          <a:p>
+            <a:pPr marL="0" lvl="1" indent="0">
+              <a:buNone/>
+            </a:pPr>
+            <a:endParaRPr lang="en-US" sz="2800" b="0" dirty="0">
+              <a:solidFill>
+                <a:schemeClr val="tx2"/>
+              </a:solidFill>
+            </a:endParaRPr>
+          </a:p>
+          <a:p>
+            <a:pPr marL="0" indent="0">
+              <a:buNone/>
+            </a:pPr>
+            <a:r>
+              <a:rPr lang="en-US" sz="2800" b="0" dirty="0">
+                <a:solidFill>
+                  <a:schemeClr val="tx2"/>
+                </a:solidFill>
+              </a:rPr>
+              <a:t>  </a:t>
+            </a:r>
+          </a:p>
+        </p:txBody>
+      </p:sp>
+    </p:spTree>
+    <p:extLst>
+      <p:ext uri="{BB962C8B-B14F-4D97-AF65-F5344CB8AC3E}">
+        <p14:creationId xmlns:p14="http://schemas.microsoft.com/office/powerpoint/2010/main" val="1669701748"/>
+      </p:ext>
+    </p:extLst>
+  </p:cSld>
+  <p:clrMapOvr>
+    <a:masterClrMapping/>
+  </p:clrMapOvr>
+  <mc:AlternateContent xmlns:mc="http://schemas.openxmlformats.org/markup-compatibility/2006">
+    <mc:Choice xmlns:p14="http://schemas.microsoft.com/office/powerpoint/2010/main" Requires="p14">
+      <p:transition spd="med" p14:dur="700">
+        <p:fade/>
+      </p:transition>
+    </mc:Choice>
+    <mc:Fallback>
+      <p:transition spd="med">
+        <p:fade/>
+      </p:transition>
+    </mc:Fallback>
+  </mc:AlternateContent>
+</p:sld>
+</file>
+
+<file path=ppt/slides/slide41.xml><?xml version="1.0" encoding="utf-8"?>
 <p:sld xmlns:a="http://schemas.openxmlformats.org/drawingml/2006/main" xmlns:r="http://schemas.openxmlformats.org/officeDocument/2006/relationships" xmlns:p="http://schemas.openxmlformats.org/presentationml/2006/main">
   <p:cSld>
     <p:spTree>
@@ -50969,13 +52668,13 @@
   <p:clrMapOvr>
     <a:masterClrMapping/>
   </p:clrMapOvr>
-  <mc:AlternateContent xmlns:mc="http://schemas.openxmlformats.org/markup-compatibility/2006">
-    <mc:Choice xmlns:p14="http://schemas.microsoft.com/office/powerpoint/2010/main" Requires="p14">
+  <mc:AlternateContent xmlns:mc="http://schemas.openxmlformats.org/markup-compatibility/2006" xmlns:p14="http://schemas.microsoft.com/office/powerpoint/2010/main">
+    <mc:Choice Requires="p14">
       <p:transition spd="med" p14:dur="700">
         <p:fade/>
       </p:transition>
     </mc:Choice>
-    <mc:Fallback>
+    <mc:Fallback xmlns="">
       <p:transition spd="med">
         <p:fade/>
       </p:transition>
@@ -50984,7 +52683,7 @@
 </p:sld>
 </file>
 
-<file path=ppt/slides/slide36.xml><?xml version="1.0" encoding="utf-8"?>
+<file path=ppt/slides/slide42.xml><?xml version="1.0" encoding="utf-8"?>
 <p:sld xmlns:a="http://schemas.openxmlformats.org/drawingml/2006/main" xmlns:r="http://schemas.openxmlformats.org/officeDocument/2006/relationships" xmlns:p="http://schemas.openxmlformats.org/presentationml/2006/main">
   <p:cSld>
     <p:spTree>
@@ -51005,175 +52704,6 @@
     <p:extLst>
       <p:ext uri="{BB962C8B-B14F-4D97-AF65-F5344CB8AC3E}">
         <p14:creationId xmlns:p14="http://schemas.microsoft.com/office/powerpoint/2010/main" val="3277138299"/>
-      </p:ext>
-    </p:extLst>
-  </p:cSld>
-  <p:clrMapOvr>
-    <a:masterClrMapping/>
-  </p:clrMapOvr>
-  <mc:AlternateContent xmlns:mc="http://schemas.openxmlformats.org/markup-compatibility/2006" xmlns:p14="http://schemas.microsoft.com/office/powerpoint/2010/main">
-    <mc:Choice Requires="p14">
-      <p:transition spd="med" p14:dur="700">
-        <p:fade/>
-      </p:transition>
-    </mc:Choice>
-    <mc:Fallback xmlns="">
-      <p:transition spd="med">
-        <p:fade/>
-      </p:transition>
-    </mc:Fallback>
-  </mc:AlternateContent>
-</p:sld>
-</file>
-
-<file path=ppt/slides/slide4.xml><?xml version="1.0" encoding="utf-8"?>
-<p:sld xmlns:a="http://schemas.openxmlformats.org/drawingml/2006/main" xmlns:r="http://schemas.openxmlformats.org/officeDocument/2006/relationships" xmlns:p="http://schemas.openxmlformats.org/presentationml/2006/main">
-  <p:cSld>
-    <p:spTree>
-      <p:nvGrpSpPr>
-        <p:cNvPr id="1" name="">
-          <a:extLst>
-            <a:ext uri="{FF2B5EF4-FFF2-40B4-BE49-F238E27FC236}">
-              <a16:creationId xmlns:a16="http://schemas.microsoft.com/office/drawing/2014/main" id="{45471A1E-95EE-973E-B522-F5AA5AEFF67A}"/>
-            </a:ext>
-          </a:extLst>
-        </p:cNvPr>
-        <p:cNvGrpSpPr/>
-        <p:nvPr/>
-      </p:nvGrpSpPr>
-      <p:grpSpPr>
-        <a:xfrm>
-          <a:off x="0" y="0"/>
-          <a:ext cx="0" cy="0"/>
-          <a:chOff x="0" y="0"/>
-          <a:chExt cx="0" cy="0"/>
-        </a:xfrm>
-      </p:grpSpPr>
-      <p:sp>
-        <p:nvSpPr>
-          <p:cNvPr id="2" name="Titre 1">
-            <a:extLst>
-              <a:ext uri="{FF2B5EF4-FFF2-40B4-BE49-F238E27FC236}">
-                <a16:creationId xmlns:a16="http://schemas.microsoft.com/office/drawing/2014/main" id="{4C0CAB36-7800-3785-6EB6-597BA8E3E466}"/>
-              </a:ext>
-            </a:extLst>
-          </p:cNvPr>
-          <p:cNvSpPr>
-            <a:spLocks noGrp="1"/>
-          </p:cNvSpPr>
-          <p:nvPr>
-            <p:ph type="title"/>
-          </p:nvPr>
-        </p:nvSpPr>
-        <p:spPr/>
-        <p:txBody>
-          <a:bodyPr/>
-          <a:lstStyle/>
-          <a:p>
-            <a:r>
-              <a:rPr lang="en-US" dirty="0"/>
-              <a:t>ℹ️ Introduction</a:t>
-            </a:r>
-          </a:p>
-        </p:txBody>
-      </p:sp>
-      <p:sp>
-        <p:nvSpPr>
-          <p:cNvPr id="3" name="Espace réservé du texte 2">
-            <a:extLst>
-              <a:ext uri="{FF2B5EF4-FFF2-40B4-BE49-F238E27FC236}">
-                <a16:creationId xmlns:a16="http://schemas.microsoft.com/office/drawing/2014/main" id="{F9B0CA82-1172-E064-A39F-91CE0E6141A1}"/>
-              </a:ext>
-            </a:extLst>
-          </p:cNvPr>
-          <p:cNvSpPr>
-            <a:spLocks noGrp="1"/>
-          </p:cNvSpPr>
-          <p:nvPr>
-            <p:ph type="body" sz="quarter" idx="15"/>
-          </p:nvPr>
-        </p:nvSpPr>
-        <p:spPr>
-          <a:xfrm>
-            <a:off x="588000" y="977317"/>
-            <a:ext cx="11419970" cy="4949030"/>
-          </a:xfrm>
-        </p:spPr>
-        <p:txBody>
-          <a:bodyPr/>
-          <a:lstStyle/>
-          <a:p>
-            <a:r>
-              <a:rPr lang="en-US" sz="2800" b="0" dirty="0">
-                <a:solidFill>
-                  <a:schemeClr val="tx2"/>
-                </a:solidFill>
-              </a:rPr>
-              <a:t> Some popular statement I often hear:</a:t>
-            </a:r>
-          </a:p>
-          <a:p>
-            <a:pPr lvl="1"/>
-            <a:r>
-              <a:rPr lang="en-US" sz="2400" b="0" dirty="0">
-                <a:solidFill>
-                  <a:schemeClr val="tx2"/>
-                </a:solidFill>
-              </a:rPr>
-              <a:t>PDF is a safe format!</a:t>
-            </a:r>
-          </a:p>
-          <a:p>
-            <a:pPr lvl="1"/>
-            <a:r>
-              <a:rPr lang="en-US" sz="2400" dirty="0"/>
-              <a:t>A</a:t>
-            </a:r>
-            <a:r>
-              <a:rPr lang="en-US" sz="2400" b="0" dirty="0">
-                <a:solidFill>
-                  <a:schemeClr val="tx2"/>
-                </a:solidFill>
-              </a:rPr>
-              <a:t> "file upload" is simple to implement!</a:t>
-            </a:r>
-          </a:p>
-          <a:p>
-            <a:pPr lvl="1"/>
-            <a:endParaRPr lang="en-US" sz="2400" dirty="0"/>
-          </a:p>
-          <a:p>
-            <a:r>
-              <a:rPr lang="en-US" sz="2800" b="0" dirty="0">
-                <a:solidFill>
-                  <a:schemeClr val="tx2"/>
-                </a:solidFill>
-              </a:rPr>
-              <a:t> Let's deep dive and explore together “</a:t>
-            </a:r>
-            <a:r>
-              <a:rPr lang="en-US" sz="2800" b="0" dirty="0">
-                <a:solidFill>
-                  <a:schemeClr val="accent1"/>
-                </a:solidFill>
-              </a:rPr>
-              <a:t>The Devil is in the Payloads</a:t>
-            </a:r>
-            <a:r>
-              <a:rPr lang="en-US" sz="2800" b="0" dirty="0">
-                <a:solidFill>
-                  <a:schemeClr val="tx2"/>
-                </a:solidFill>
-              </a:rPr>
-              <a:t>” concept through a little story inspired by real events that I experienced...</a:t>
-            </a:r>
-          </a:p>
-        </p:txBody>
-      </p:sp>
-    </p:spTree>
-    <p:extLst>
-      <p:ext uri="{BB962C8B-B14F-4D97-AF65-F5344CB8AC3E}">
-        <p14:creationId xmlns:p14="http://schemas.microsoft.com/office/powerpoint/2010/main" val="2617813205"/>
       </p:ext>
     </p:extLst>
   </p:cSld>
@@ -51545,8 +53075,8 @@
         </p:nvSpPr>
         <p:spPr>
           <a:xfrm>
-            <a:off x="587999" y="2567225"/>
-            <a:ext cx="11419971" cy="1723549"/>
+            <a:off x="588000" y="2321004"/>
+            <a:ext cx="11511852" cy="2215991"/>
           </a:xfrm>
           <a:prstGeom prst="rect">
             <a:avLst/>
@@ -51564,7 +53094,7 @@
           <a:p>
             <a:pPr algn="l"/>
             <a:r>
-              <a:rPr lang="en-US" sz="1600" b="1" dirty="0">
+              <a:rPr lang="en-US" b="1" dirty="0">
                 <a:latin typeface="Consolas" panose="020B0609020204030204" pitchFamily="49" charset="0"/>
               </a:rPr>
               <a:t>User Story:</a:t>
@@ -51573,7 +53103,7 @@
           <a:p>
             <a:pPr algn="l"/>
             <a:r>
-              <a:rPr lang="en-US" sz="1600" dirty="0">
+              <a:rPr lang="en-US" dirty="0">
                 <a:latin typeface="Consolas" panose="020B0609020204030204" pitchFamily="49" charset="0"/>
               </a:rPr>
               <a:t>As a user, I want to upload a PDF file in the chat so that I can share documents with my advisors.</a:t>
@@ -51581,14 +53111,14 @@
           </a:p>
           <a:p>
             <a:pPr algn="l"/>
-            <a:endParaRPr lang="en-US" sz="1600" dirty="0">
+            <a:endParaRPr lang="en-US" dirty="0">
               <a:latin typeface="Consolas" panose="020B0609020204030204" pitchFamily="49" charset="0"/>
             </a:endParaRPr>
           </a:p>
           <a:p>
             <a:pPr algn="l"/>
             <a:r>
-              <a:rPr lang="en-US" sz="1600" b="1" dirty="0">
+              <a:rPr lang="en-US" b="1" dirty="0">
                 <a:latin typeface="Consolas" panose="020B0609020204030204" pitchFamily="49" charset="0"/>
               </a:rPr>
               <a:t>Acceptance Criteria:</a:t>
@@ -51600,7 +53130,7 @@
               <a:buAutoNum type="arabicParenR"/>
             </a:pPr>
             <a:r>
-              <a:rPr lang="en-US" sz="1600" dirty="0">
+              <a:rPr lang="en-US" dirty="0">
                 <a:latin typeface="Consolas" panose="020B0609020204030204" pitchFamily="49" charset="0"/>
               </a:rPr>
               <a:t>The system successfully transfers the file from the user interface to the storage server.</a:t>
@@ -51612,7 +53142,7 @@
               <a:buAutoNum type="arabicParenR"/>
             </a:pPr>
             <a:r>
-              <a:rPr lang="en-US" sz="1600" dirty="0">
+              <a:rPr lang="en-US" dirty="0">
                 <a:latin typeface="Consolas" panose="020B0609020204030204" pitchFamily="49" charset="0"/>
               </a:rPr>
               <a:t>Only PDF files are allowed.</a:t>
@@ -51624,12 +53154,12 @@
               <a:buAutoNum type="arabicParenR"/>
             </a:pPr>
             <a:r>
-              <a:rPr lang="en-US" sz="1600" dirty="0">
+              <a:rPr lang="en-US" dirty="0">
                 <a:latin typeface="Consolas" panose="020B0609020204030204" pitchFamily="49" charset="0"/>
               </a:rPr>
               <a:t>File size is limited to 10 MB.</a:t>
             </a:r>
-            <a:endParaRPr lang="fr-FR" sz="1600" dirty="0">
+            <a:endParaRPr lang="fr-FR" dirty="0">
               <a:latin typeface="Consolas" panose="020B0609020204030204" pitchFamily="49" charset="0"/>
             </a:endParaRPr>
           </a:p>
@@ -51884,6 +53414,13 @@
           <a:prstGeom prst="rect">
             <a:avLst/>
           </a:prstGeom>
+          <a:effectLst>
+            <a:outerShdw blurRad="50800" dist="38100" dir="2700000" algn="tl" rotWithShape="0">
+              <a:prstClr val="black">
+                <a:alpha val="40000"/>
+              </a:prstClr>
+            </a:outerShdw>
+          </a:effectLst>
         </p:spPr>
       </p:pic>
     </p:spTree>
@@ -51896,13 +53433,13 @@
   <p:clrMapOvr>
     <a:masterClrMapping/>
   </p:clrMapOvr>
-  <mc:AlternateContent xmlns:mc="http://schemas.openxmlformats.org/markup-compatibility/2006">
-    <mc:Choice xmlns:p159="http://schemas.microsoft.com/office/powerpoint/2015/09/main" Requires="p159">
+  <mc:AlternateContent xmlns:mc="http://schemas.openxmlformats.org/markup-compatibility/2006" xmlns:p159="http://schemas.microsoft.com/office/powerpoint/2015/09/main">
+    <mc:Choice Requires="p159">
       <p:transition xmlns:p14="http://schemas.microsoft.com/office/powerpoint/2010/main" spd="slow" p14:dur="2000">
         <p159:morph option="byObject"/>
       </p:transition>
     </mc:Choice>
-    <mc:Fallback>
+    <mc:Fallback xmlns="">
       <p:transition spd="slow">
         <p:fade/>
       </p:transition>
@@ -52098,6 +53635,13 @@
           <a:prstGeom prst="rect">
             <a:avLst/>
           </a:prstGeom>
+          <a:effectLst>
+            <a:outerShdw blurRad="50800" dist="38100" dir="2700000" algn="tl" rotWithShape="0">
+              <a:prstClr val="black">
+                <a:alpha val="40000"/>
+              </a:prstClr>
+            </a:outerShdw>
+          </a:effectLst>
         </p:spPr>
       </p:pic>
     </p:spTree>

--- a/presentation.pptx
+++ b/presentation.pptx
@@ -156,2089 +156,30 @@
 </p:presentation>
 </file>
 
-<file path=ppt/revisionInfo.xml><?xml version="1.0" encoding="utf-8"?>
-<p1510:revInfo xmlns:a="http://schemas.openxmlformats.org/drawingml/2006/main" xmlns:r="http://schemas.openxmlformats.org/officeDocument/2006/relationships" xmlns:p1510="http://schemas.microsoft.com/office/powerpoint/2015/10/main">
-  <p1510:revLst>
-    <p1510:client id="{E2922590-C897-4D5E-94A5-7835129BD264}" v="92" dt="2026-01-06T08:32:19.853"/>
-  </p1510:revLst>
-</p1510:revInfo>
-</file>
-
 <file path=ppt/changesInfos/changesInfo1.xml><?xml version="1.0" encoding="utf-8"?>
 <pc:chgInfo xmlns:a="http://schemas.openxmlformats.org/drawingml/2006/main" xmlns:r="http://schemas.openxmlformats.org/officeDocument/2006/relationships" xmlns:ac="http://schemas.microsoft.com/office/drawing/2013/main/command" xmlns:pc="http://schemas.microsoft.com/office/powerpoint/2013/main/command">
   <pc:docChgLst>
     <pc:chgData name="Dominique RIGHETTO" userId="512fe077-82ad-424c-88a3-15e852b5861d" providerId="ADAL" clId="{8B7CB91F-10CE-42C2-B9B8-BFF2D3401655}"/>
     <pc:docChg chg="undo custSel addSld delSld modSld sldOrd modMainMaster">
-      <pc:chgData name="Dominique RIGHETTO" userId="512fe077-82ad-424c-88a3-15e852b5861d" providerId="ADAL" clId="{8B7CB91F-10CE-42C2-B9B8-BFF2D3401655}" dt="2026-01-06T08:40:31.483" v="7813" actId="732"/>
+      <pc:chgData name="Dominique RIGHETTO" userId="512fe077-82ad-424c-88a3-15e852b5861d" providerId="ADAL" clId="{8B7CB91F-10CE-42C2-B9B8-BFF2D3401655}" dt="2026-05-05T18:31:59.517" v="7815" actId="20577"/>
       <pc:docMkLst>
         <pc:docMk/>
       </pc:docMkLst>
-      <pc:sldChg chg="addSp modSp mod">
-        <pc:chgData name="Dominique RIGHETTO" userId="512fe077-82ad-424c-88a3-15e852b5861d" providerId="ADAL" clId="{8B7CB91F-10CE-42C2-B9B8-BFF2D3401655}" dt="2026-01-06T08:32:27.107" v="7796" actId="20577"/>
-        <pc:sldMkLst>
-          <pc:docMk/>
-          <pc:sldMk cId="3134628389" sldId="257"/>
-        </pc:sldMkLst>
-        <pc:spChg chg="mod">
-          <ac:chgData name="Dominique RIGHETTO" userId="512fe077-82ad-424c-88a3-15e852b5861d" providerId="ADAL" clId="{8B7CB91F-10CE-42C2-B9B8-BFF2D3401655}" dt="2026-01-05T07:59:34.002" v="54" actId="20577"/>
-          <ac:spMkLst>
-            <pc:docMk/>
-            <pc:sldMk cId="3134628389" sldId="257"/>
-            <ac:spMk id="2" creationId="{C48248EE-9276-F13B-C146-B824E74053FA}"/>
-          </ac:spMkLst>
-        </pc:spChg>
-        <pc:spChg chg="mod">
-          <ac:chgData name="Dominique RIGHETTO" userId="512fe077-82ad-424c-88a3-15e852b5861d" providerId="ADAL" clId="{8B7CB91F-10CE-42C2-B9B8-BFF2D3401655}" dt="2026-01-06T05:26:35.607" v="6620" actId="20577"/>
-          <ac:spMkLst>
-            <pc:docMk/>
-            <pc:sldMk cId="3134628389" sldId="257"/>
-            <ac:spMk id="3" creationId="{2C93C62D-952C-3866-AA5A-CA17B8DBDB19}"/>
-          </ac:spMkLst>
-        </pc:spChg>
-        <pc:spChg chg="add mod">
-          <ac:chgData name="Dominique RIGHETTO" userId="512fe077-82ad-424c-88a3-15e852b5861d" providerId="ADAL" clId="{8B7CB91F-10CE-42C2-B9B8-BFF2D3401655}" dt="2026-01-06T08:32:27.107" v="7796" actId="20577"/>
-          <ac:spMkLst>
-            <pc:docMk/>
-            <pc:sldMk cId="3134628389" sldId="257"/>
-            <ac:spMk id="4" creationId="{7F66B005-FAEF-EACE-8082-427A0F560E9F}"/>
-          </ac:spMkLst>
-        </pc:spChg>
-      </pc:sldChg>
-      <pc:sldChg chg="del">
-        <pc:chgData name="Dominique RIGHETTO" userId="512fe077-82ad-424c-88a3-15e852b5861d" providerId="ADAL" clId="{8B7CB91F-10CE-42C2-B9B8-BFF2D3401655}" dt="2026-01-05T07:58:14.255" v="4" actId="47"/>
-        <pc:sldMkLst>
-          <pc:docMk/>
-          <pc:sldMk cId="1551370680" sldId="258"/>
-        </pc:sldMkLst>
-      </pc:sldChg>
-      <pc:sldChg chg="del">
-        <pc:chgData name="Dominique RIGHETTO" userId="512fe077-82ad-424c-88a3-15e852b5861d" providerId="ADAL" clId="{8B7CB91F-10CE-42C2-B9B8-BFF2D3401655}" dt="2026-01-05T07:58:14.255" v="4" actId="47"/>
-        <pc:sldMkLst>
-          <pc:docMk/>
-          <pc:sldMk cId="4144566480" sldId="259"/>
-        </pc:sldMkLst>
-      </pc:sldChg>
-      <pc:sldChg chg="del">
-        <pc:chgData name="Dominique RIGHETTO" userId="512fe077-82ad-424c-88a3-15e852b5861d" providerId="ADAL" clId="{8B7CB91F-10CE-42C2-B9B8-BFF2D3401655}" dt="2026-01-05T07:58:14.255" v="4" actId="47"/>
-        <pc:sldMkLst>
-          <pc:docMk/>
-          <pc:sldMk cId="1979476112" sldId="260"/>
-        </pc:sldMkLst>
-      </pc:sldChg>
-      <pc:sldChg chg="del">
-        <pc:chgData name="Dominique RIGHETTO" userId="512fe077-82ad-424c-88a3-15e852b5861d" providerId="ADAL" clId="{8B7CB91F-10CE-42C2-B9B8-BFF2D3401655}" dt="2026-01-05T07:58:14.255" v="4" actId="47"/>
-        <pc:sldMkLst>
-          <pc:docMk/>
-          <pc:sldMk cId="730977501" sldId="261"/>
-        </pc:sldMkLst>
-      </pc:sldChg>
-      <pc:sldChg chg="modSp mod ord">
-        <pc:chgData name="Dominique RIGHETTO" userId="512fe077-82ad-424c-88a3-15e852b5861d" providerId="ADAL" clId="{8B7CB91F-10CE-42C2-B9B8-BFF2D3401655}" dt="2026-01-06T05:29:16.203" v="6626" actId="207"/>
-        <pc:sldMkLst>
-          <pc:docMk/>
-          <pc:sldMk cId="2121745454" sldId="262"/>
-        </pc:sldMkLst>
-        <pc:spChg chg="mod">
-          <ac:chgData name="Dominique RIGHETTO" userId="512fe077-82ad-424c-88a3-15e852b5861d" providerId="ADAL" clId="{8B7CB91F-10CE-42C2-B9B8-BFF2D3401655}" dt="2026-01-05T08:00:04.604" v="75" actId="20577"/>
-          <ac:spMkLst>
-            <pc:docMk/>
-            <pc:sldMk cId="2121745454" sldId="262"/>
-            <ac:spMk id="2" creationId="{00000000-0000-0000-0000-000000000000}"/>
-          </ac:spMkLst>
-        </pc:spChg>
-        <pc:spChg chg="mod">
-          <ac:chgData name="Dominique RIGHETTO" userId="512fe077-82ad-424c-88a3-15e852b5861d" providerId="ADAL" clId="{8B7CB91F-10CE-42C2-B9B8-BFF2D3401655}" dt="2026-01-06T05:29:16.203" v="6626" actId="207"/>
-          <ac:spMkLst>
-            <pc:docMk/>
-            <pc:sldMk cId="2121745454" sldId="262"/>
-            <ac:spMk id="3" creationId="{00000000-0000-0000-0000-000000000000}"/>
-          </ac:spMkLst>
-        </pc:spChg>
-      </pc:sldChg>
-      <pc:sldChg chg="del">
-        <pc:chgData name="Dominique RIGHETTO" userId="512fe077-82ad-424c-88a3-15e852b5861d" providerId="ADAL" clId="{8B7CB91F-10CE-42C2-B9B8-BFF2D3401655}" dt="2026-01-05T07:58:14.255" v="4" actId="47"/>
-        <pc:sldMkLst>
-          <pc:docMk/>
-          <pc:sldMk cId="2725272047" sldId="263"/>
-        </pc:sldMkLst>
-      </pc:sldChg>
-      <pc:sldChg chg="del">
-        <pc:chgData name="Dominique RIGHETTO" userId="512fe077-82ad-424c-88a3-15e852b5861d" providerId="ADAL" clId="{8B7CB91F-10CE-42C2-B9B8-BFF2D3401655}" dt="2026-01-05T07:58:14.255" v="4" actId="47"/>
-        <pc:sldMkLst>
-          <pc:docMk/>
-          <pc:sldMk cId="2128520042" sldId="264"/>
-        </pc:sldMkLst>
-      </pc:sldChg>
-      <pc:sldChg chg="del">
-        <pc:chgData name="Dominique RIGHETTO" userId="512fe077-82ad-424c-88a3-15e852b5861d" providerId="ADAL" clId="{8B7CB91F-10CE-42C2-B9B8-BFF2D3401655}" dt="2026-01-05T07:58:14.255" v="4" actId="47"/>
-        <pc:sldMkLst>
-          <pc:docMk/>
-          <pc:sldMk cId="571281480" sldId="265"/>
-        </pc:sldMkLst>
-      </pc:sldChg>
-      <pc:sldChg chg="del">
-        <pc:chgData name="Dominique RIGHETTO" userId="512fe077-82ad-424c-88a3-15e852b5861d" providerId="ADAL" clId="{8B7CB91F-10CE-42C2-B9B8-BFF2D3401655}" dt="2026-01-05T07:58:14.255" v="4" actId="47"/>
-        <pc:sldMkLst>
-          <pc:docMk/>
-          <pc:sldMk cId="4050816099" sldId="266"/>
-        </pc:sldMkLst>
-      </pc:sldChg>
-      <pc:sldChg chg="del">
-        <pc:chgData name="Dominique RIGHETTO" userId="512fe077-82ad-424c-88a3-15e852b5861d" providerId="ADAL" clId="{8B7CB91F-10CE-42C2-B9B8-BFF2D3401655}" dt="2026-01-05T07:58:14.255" v="4" actId="47"/>
-        <pc:sldMkLst>
-          <pc:docMk/>
-          <pc:sldMk cId="632571955" sldId="267"/>
-        </pc:sldMkLst>
-      </pc:sldChg>
-      <pc:sldChg chg="del">
-        <pc:chgData name="Dominique RIGHETTO" userId="512fe077-82ad-424c-88a3-15e852b5861d" providerId="ADAL" clId="{8B7CB91F-10CE-42C2-B9B8-BFF2D3401655}" dt="2026-01-05T07:58:14.255" v="4" actId="47"/>
-        <pc:sldMkLst>
-          <pc:docMk/>
-          <pc:sldMk cId="2240049130" sldId="268"/>
-        </pc:sldMkLst>
-      </pc:sldChg>
-      <pc:sldChg chg="del">
-        <pc:chgData name="Dominique RIGHETTO" userId="512fe077-82ad-424c-88a3-15e852b5861d" providerId="ADAL" clId="{8B7CB91F-10CE-42C2-B9B8-BFF2D3401655}" dt="2026-01-05T07:58:14.255" v="4" actId="47"/>
-        <pc:sldMkLst>
-          <pc:docMk/>
-          <pc:sldMk cId="3971472328" sldId="269"/>
-        </pc:sldMkLst>
-      </pc:sldChg>
-      <pc:sldChg chg="del">
-        <pc:chgData name="Dominique RIGHETTO" userId="512fe077-82ad-424c-88a3-15e852b5861d" providerId="ADAL" clId="{8B7CB91F-10CE-42C2-B9B8-BFF2D3401655}" dt="2026-01-05T07:58:14.255" v="4" actId="47"/>
-        <pc:sldMkLst>
-          <pc:docMk/>
-          <pc:sldMk cId="1321215664" sldId="270"/>
-        </pc:sldMkLst>
-      </pc:sldChg>
-      <pc:sldChg chg="del">
-        <pc:chgData name="Dominique RIGHETTO" userId="512fe077-82ad-424c-88a3-15e852b5861d" providerId="ADAL" clId="{8B7CB91F-10CE-42C2-B9B8-BFF2D3401655}" dt="2026-01-05T07:58:14.255" v="4" actId="47"/>
-        <pc:sldMkLst>
-          <pc:docMk/>
-          <pc:sldMk cId="1986846428" sldId="271"/>
-        </pc:sldMkLst>
-      </pc:sldChg>
-      <pc:sldChg chg="del">
-        <pc:chgData name="Dominique RIGHETTO" userId="512fe077-82ad-424c-88a3-15e852b5861d" providerId="ADAL" clId="{8B7CB91F-10CE-42C2-B9B8-BFF2D3401655}" dt="2026-01-05T07:58:14.255" v="4" actId="47"/>
-        <pc:sldMkLst>
-          <pc:docMk/>
-          <pc:sldMk cId="3990768315" sldId="272"/>
-        </pc:sldMkLst>
-      </pc:sldChg>
-      <pc:sldChg chg="del">
-        <pc:chgData name="Dominique RIGHETTO" userId="512fe077-82ad-424c-88a3-15e852b5861d" providerId="ADAL" clId="{8B7CB91F-10CE-42C2-B9B8-BFF2D3401655}" dt="2026-01-05T07:58:14.255" v="4" actId="47"/>
-        <pc:sldMkLst>
-          <pc:docMk/>
-          <pc:sldMk cId="570799644" sldId="273"/>
-        </pc:sldMkLst>
-      </pc:sldChg>
-      <pc:sldChg chg="del">
-        <pc:chgData name="Dominique RIGHETTO" userId="512fe077-82ad-424c-88a3-15e852b5861d" providerId="ADAL" clId="{8B7CB91F-10CE-42C2-B9B8-BFF2D3401655}" dt="2026-01-05T07:58:14.255" v="4" actId="47"/>
-        <pc:sldMkLst>
-          <pc:docMk/>
-          <pc:sldMk cId="3536871477" sldId="274"/>
-        </pc:sldMkLst>
-      </pc:sldChg>
-      <pc:sldChg chg="del">
-        <pc:chgData name="Dominique RIGHETTO" userId="512fe077-82ad-424c-88a3-15e852b5861d" providerId="ADAL" clId="{8B7CB91F-10CE-42C2-B9B8-BFF2D3401655}" dt="2026-01-05T07:58:14.255" v="4" actId="47"/>
-        <pc:sldMkLst>
-          <pc:docMk/>
-          <pc:sldMk cId="39677355" sldId="275"/>
-        </pc:sldMkLst>
-      </pc:sldChg>
-      <pc:sldChg chg="del">
-        <pc:chgData name="Dominique RIGHETTO" userId="512fe077-82ad-424c-88a3-15e852b5861d" providerId="ADAL" clId="{8B7CB91F-10CE-42C2-B9B8-BFF2D3401655}" dt="2026-01-05T07:58:14.255" v="4" actId="47"/>
-        <pc:sldMkLst>
-          <pc:docMk/>
-          <pc:sldMk cId="693519736" sldId="276"/>
-        </pc:sldMkLst>
-      </pc:sldChg>
-      <pc:sldChg chg="del">
-        <pc:chgData name="Dominique RIGHETTO" userId="512fe077-82ad-424c-88a3-15e852b5861d" providerId="ADAL" clId="{8B7CB91F-10CE-42C2-B9B8-BFF2D3401655}" dt="2026-01-05T07:58:14.255" v="4" actId="47"/>
-        <pc:sldMkLst>
-          <pc:docMk/>
-          <pc:sldMk cId="3028727512" sldId="277"/>
-        </pc:sldMkLst>
-      </pc:sldChg>
-      <pc:sldChg chg="del">
-        <pc:chgData name="Dominique RIGHETTO" userId="512fe077-82ad-424c-88a3-15e852b5861d" providerId="ADAL" clId="{8B7CB91F-10CE-42C2-B9B8-BFF2D3401655}" dt="2026-01-05T07:58:14.255" v="4" actId="47"/>
-        <pc:sldMkLst>
-          <pc:docMk/>
-          <pc:sldMk cId="958517259" sldId="278"/>
-        </pc:sldMkLst>
-      </pc:sldChg>
-      <pc:sldChg chg="del">
-        <pc:chgData name="Dominique RIGHETTO" userId="512fe077-82ad-424c-88a3-15e852b5861d" providerId="ADAL" clId="{8B7CB91F-10CE-42C2-B9B8-BFF2D3401655}" dt="2026-01-05T07:58:14.255" v="4" actId="47"/>
-        <pc:sldMkLst>
-          <pc:docMk/>
-          <pc:sldMk cId="3575813073" sldId="279"/>
-        </pc:sldMkLst>
-      </pc:sldChg>
-      <pc:sldChg chg="del">
-        <pc:chgData name="Dominique RIGHETTO" userId="512fe077-82ad-424c-88a3-15e852b5861d" providerId="ADAL" clId="{8B7CB91F-10CE-42C2-B9B8-BFF2D3401655}" dt="2026-01-05T07:58:14.255" v="4" actId="47"/>
-        <pc:sldMkLst>
-          <pc:docMk/>
-          <pc:sldMk cId="3684295089" sldId="280"/>
-        </pc:sldMkLst>
-      </pc:sldChg>
-      <pc:sldChg chg="del">
-        <pc:chgData name="Dominique RIGHETTO" userId="512fe077-82ad-424c-88a3-15e852b5861d" providerId="ADAL" clId="{8B7CB91F-10CE-42C2-B9B8-BFF2D3401655}" dt="2026-01-05T07:58:14.255" v="4" actId="47"/>
-        <pc:sldMkLst>
-          <pc:docMk/>
-          <pc:sldMk cId="2374725439" sldId="281"/>
-        </pc:sldMkLst>
-      </pc:sldChg>
-      <pc:sldChg chg="del">
-        <pc:chgData name="Dominique RIGHETTO" userId="512fe077-82ad-424c-88a3-15e852b5861d" providerId="ADAL" clId="{8B7CB91F-10CE-42C2-B9B8-BFF2D3401655}" dt="2026-01-05T07:58:14.255" v="4" actId="47"/>
-        <pc:sldMkLst>
-          <pc:docMk/>
-          <pc:sldMk cId="2292368372" sldId="282"/>
-        </pc:sldMkLst>
-      </pc:sldChg>
-      <pc:sldChg chg="del">
-        <pc:chgData name="Dominique RIGHETTO" userId="512fe077-82ad-424c-88a3-15e852b5861d" providerId="ADAL" clId="{8B7CB91F-10CE-42C2-B9B8-BFF2D3401655}" dt="2026-01-05T07:58:14.255" v="4" actId="47"/>
-        <pc:sldMkLst>
-          <pc:docMk/>
-          <pc:sldMk cId="1246512297" sldId="283"/>
-        </pc:sldMkLst>
-      </pc:sldChg>
-      <pc:sldChg chg="del">
-        <pc:chgData name="Dominique RIGHETTO" userId="512fe077-82ad-424c-88a3-15e852b5861d" providerId="ADAL" clId="{8B7CB91F-10CE-42C2-B9B8-BFF2D3401655}" dt="2026-01-05T07:58:14.255" v="4" actId="47"/>
-        <pc:sldMkLst>
-          <pc:docMk/>
-          <pc:sldMk cId="1631144203" sldId="284"/>
-        </pc:sldMkLst>
-      </pc:sldChg>
-      <pc:sldChg chg="del">
-        <pc:chgData name="Dominique RIGHETTO" userId="512fe077-82ad-424c-88a3-15e852b5861d" providerId="ADAL" clId="{8B7CB91F-10CE-42C2-B9B8-BFF2D3401655}" dt="2026-01-05T07:58:14.255" v="4" actId="47"/>
-        <pc:sldMkLst>
-          <pc:docMk/>
-          <pc:sldMk cId="4000263753" sldId="285"/>
-        </pc:sldMkLst>
-      </pc:sldChg>
-      <pc:sldChg chg="del">
-        <pc:chgData name="Dominique RIGHETTO" userId="512fe077-82ad-424c-88a3-15e852b5861d" providerId="ADAL" clId="{8B7CB91F-10CE-42C2-B9B8-BFF2D3401655}" dt="2026-01-05T07:58:14.255" v="4" actId="47"/>
-        <pc:sldMkLst>
-          <pc:docMk/>
-          <pc:sldMk cId="2715094234" sldId="286"/>
-        </pc:sldMkLst>
-      </pc:sldChg>
-      <pc:sldChg chg="del">
-        <pc:chgData name="Dominique RIGHETTO" userId="512fe077-82ad-424c-88a3-15e852b5861d" providerId="ADAL" clId="{8B7CB91F-10CE-42C2-B9B8-BFF2D3401655}" dt="2026-01-05T07:58:14.255" v="4" actId="47"/>
-        <pc:sldMkLst>
-          <pc:docMk/>
-          <pc:sldMk cId="1553618436" sldId="287"/>
-        </pc:sldMkLst>
-      </pc:sldChg>
-      <pc:sldChg chg="del">
-        <pc:chgData name="Dominique RIGHETTO" userId="512fe077-82ad-424c-88a3-15e852b5861d" providerId="ADAL" clId="{8B7CB91F-10CE-42C2-B9B8-BFF2D3401655}" dt="2026-01-05T07:58:14.255" v="4" actId="47"/>
-        <pc:sldMkLst>
-          <pc:docMk/>
-          <pc:sldMk cId="1423159379" sldId="289"/>
-        </pc:sldMkLst>
-      </pc:sldChg>
-      <pc:sldChg chg="modSp add mod">
-        <pc:chgData name="Dominique RIGHETTO" userId="512fe077-82ad-424c-88a3-15e852b5861d" providerId="ADAL" clId="{8B7CB91F-10CE-42C2-B9B8-BFF2D3401655}" dt="2026-01-05T08:14:05.282" v="510" actId="20577"/>
-        <pc:sldMkLst>
-          <pc:docMk/>
-          <pc:sldMk cId="1700977977" sldId="289"/>
-        </pc:sldMkLst>
-        <pc:spChg chg="mod">
-          <ac:chgData name="Dominique RIGHETTO" userId="512fe077-82ad-424c-88a3-15e852b5861d" providerId="ADAL" clId="{8B7CB91F-10CE-42C2-B9B8-BFF2D3401655}" dt="2026-01-05T08:14:05.282" v="510" actId="20577"/>
-          <ac:spMkLst>
-            <pc:docMk/>
-            <pc:sldMk cId="1700977977" sldId="289"/>
-            <ac:spMk id="3" creationId="{DD39683C-541A-B4BA-B911-E5EC3EABE467}"/>
-          </ac:spMkLst>
-        </pc:spChg>
-      </pc:sldChg>
-      <pc:sldChg chg="modSp add mod">
-        <pc:chgData name="Dominique RIGHETTO" userId="512fe077-82ad-424c-88a3-15e852b5861d" providerId="ADAL" clId="{8B7CB91F-10CE-42C2-B9B8-BFF2D3401655}" dt="2026-01-06T05:29:21.785" v="6627" actId="207"/>
-        <pc:sldMkLst>
-          <pc:docMk/>
-          <pc:sldMk cId="2617813205" sldId="290"/>
-        </pc:sldMkLst>
-        <pc:spChg chg="mod">
-          <ac:chgData name="Dominique RIGHETTO" userId="512fe077-82ad-424c-88a3-15e852b5861d" providerId="ADAL" clId="{8B7CB91F-10CE-42C2-B9B8-BFF2D3401655}" dt="2026-01-06T05:29:21.785" v="6627" actId="207"/>
-          <ac:spMkLst>
-            <pc:docMk/>
-            <pc:sldMk cId="2617813205" sldId="290"/>
-            <ac:spMk id="3" creationId="{F9B0CA82-1172-E064-A39F-91CE0E6141A1}"/>
-          </ac:spMkLst>
-        </pc:spChg>
-      </pc:sldChg>
-      <pc:sldChg chg="del">
-        <pc:chgData name="Dominique RIGHETTO" userId="512fe077-82ad-424c-88a3-15e852b5861d" providerId="ADAL" clId="{8B7CB91F-10CE-42C2-B9B8-BFF2D3401655}" dt="2026-01-05T07:58:14.255" v="4" actId="47"/>
-        <pc:sldMkLst>
-          <pc:docMk/>
-          <pc:sldMk cId="3310454039" sldId="290"/>
-        </pc:sldMkLst>
-      </pc:sldChg>
-      <pc:sldChg chg="del">
-        <pc:chgData name="Dominique RIGHETTO" userId="512fe077-82ad-424c-88a3-15e852b5861d" providerId="ADAL" clId="{8B7CB91F-10CE-42C2-B9B8-BFF2D3401655}" dt="2026-01-05T07:58:14.255" v="4" actId="47"/>
-        <pc:sldMkLst>
-          <pc:docMk/>
-          <pc:sldMk cId="2973688033" sldId="291"/>
-        </pc:sldMkLst>
-      </pc:sldChg>
-      <pc:sldChg chg="modSp add mod">
-        <pc:chgData name="Dominique RIGHETTO" userId="512fe077-82ad-424c-88a3-15e852b5861d" providerId="ADAL" clId="{8B7CB91F-10CE-42C2-B9B8-BFF2D3401655}" dt="2026-01-06T05:29:05.927" v="6624" actId="207"/>
-        <pc:sldMkLst>
-          <pc:docMk/>
-          <pc:sldMk cId="3084432784" sldId="291"/>
-        </pc:sldMkLst>
-        <pc:spChg chg="mod">
-          <ac:chgData name="Dominique RIGHETTO" userId="512fe077-82ad-424c-88a3-15e852b5861d" providerId="ADAL" clId="{8B7CB91F-10CE-42C2-B9B8-BFF2D3401655}" dt="2026-01-05T09:10:01.192" v="2097" actId="6549"/>
-          <ac:spMkLst>
-            <pc:docMk/>
-            <pc:sldMk cId="3084432784" sldId="291"/>
-            <ac:spMk id="2" creationId="{90A5A9F8-D7B1-CFB1-B8C0-57440D5A186F}"/>
-          </ac:spMkLst>
-        </pc:spChg>
-        <pc:spChg chg="mod">
-          <ac:chgData name="Dominique RIGHETTO" userId="512fe077-82ad-424c-88a3-15e852b5861d" providerId="ADAL" clId="{8B7CB91F-10CE-42C2-B9B8-BFF2D3401655}" dt="2026-01-06T05:29:05.927" v="6624" actId="207"/>
-          <ac:spMkLst>
-            <pc:docMk/>
-            <pc:sldMk cId="3084432784" sldId="291"/>
-            <ac:spMk id="3" creationId="{A7541EE2-30B3-B306-B7D8-3F0B5DDEBCBF}"/>
-          </ac:spMkLst>
-        </pc:spChg>
-      </pc:sldChg>
-      <pc:sldChg chg="del">
-        <pc:chgData name="Dominique RIGHETTO" userId="512fe077-82ad-424c-88a3-15e852b5861d" providerId="ADAL" clId="{8B7CB91F-10CE-42C2-B9B8-BFF2D3401655}" dt="2026-01-05T07:58:14.255" v="4" actId="47"/>
-        <pc:sldMkLst>
-          <pc:docMk/>
-          <pc:sldMk cId="799481326" sldId="292"/>
-        </pc:sldMkLst>
-      </pc:sldChg>
-      <pc:sldChg chg="addSp modSp add mod">
-        <pc:chgData name="Dominique RIGHETTO" userId="512fe077-82ad-424c-88a3-15e852b5861d" providerId="ADAL" clId="{8B7CB91F-10CE-42C2-B9B8-BFF2D3401655}" dt="2026-01-06T08:13:39.569" v="7478" actId="1076"/>
-        <pc:sldMkLst>
-          <pc:docMk/>
-          <pc:sldMk cId="3031573305" sldId="292"/>
-        </pc:sldMkLst>
-        <pc:spChg chg="mod">
-          <ac:chgData name="Dominique RIGHETTO" userId="512fe077-82ad-424c-88a3-15e852b5861d" providerId="ADAL" clId="{8B7CB91F-10CE-42C2-B9B8-BFF2D3401655}" dt="2026-01-05T09:10:09.386" v="2098"/>
-          <ac:spMkLst>
-            <pc:docMk/>
-            <pc:sldMk cId="3031573305" sldId="292"/>
-            <ac:spMk id="2" creationId="{074592FB-20DA-7B7E-2963-1F994212B6AB}"/>
-          </ac:spMkLst>
-        </pc:spChg>
-        <pc:spChg chg="mod">
-          <ac:chgData name="Dominique RIGHETTO" userId="512fe077-82ad-424c-88a3-15e852b5861d" providerId="ADAL" clId="{8B7CB91F-10CE-42C2-B9B8-BFF2D3401655}" dt="2026-01-05T08:27:24.858" v="1463" actId="20577"/>
-          <ac:spMkLst>
-            <pc:docMk/>
-            <pc:sldMk cId="3031573305" sldId="292"/>
-            <ac:spMk id="3" creationId="{1FA3B382-E549-6472-3A22-5EDE38691E62}"/>
-          </ac:spMkLst>
-        </pc:spChg>
-        <pc:spChg chg="add mod">
-          <ac:chgData name="Dominique RIGHETTO" userId="512fe077-82ad-424c-88a3-15e852b5861d" providerId="ADAL" clId="{8B7CB91F-10CE-42C2-B9B8-BFF2D3401655}" dt="2026-01-06T08:13:39.569" v="7478" actId="1076"/>
-          <ac:spMkLst>
-            <pc:docMk/>
-            <pc:sldMk cId="3031573305" sldId="292"/>
-            <ac:spMk id="4" creationId="{071CBD58-90D4-73F6-8ADC-0CFA2AA3E41A}"/>
-          </ac:spMkLst>
-        </pc:spChg>
-      </pc:sldChg>
       <pc:sldChg chg="addSp delSp modSp add mod">
-        <pc:chgData name="Dominique RIGHETTO" userId="512fe077-82ad-424c-88a3-15e852b5861d" providerId="ADAL" clId="{8B7CB91F-10CE-42C2-B9B8-BFF2D3401655}" dt="2026-01-05T09:10:13.144" v="2099"/>
-        <pc:sldMkLst>
-          <pc:docMk/>
-          <pc:sldMk cId="730804740" sldId="293"/>
-        </pc:sldMkLst>
-        <pc:spChg chg="mod">
-          <ac:chgData name="Dominique RIGHETTO" userId="512fe077-82ad-424c-88a3-15e852b5861d" providerId="ADAL" clId="{8B7CB91F-10CE-42C2-B9B8-BFF2D3401655}" dt="2026-01-05T09:10:13.144" v="2099"/>
-          <ac:spMkLst>
-            <pc:docMk/>
-            <pc:sldMk cId="730804740" sldId="293"/>
-            <ac:spMk id="2" creationId="{0A348616-5B74-14DC-9C90-4B9F75074BBF}"/>
-          </ac:spMkLst>
-        </pc:spChg>
-        <pc:spChg chg="mod">
-          <ac:chgData name="Dominique RIGHETTO" userId="512fe077-82ad-424c-88a3-15e852b5861d" providerId="ADAL" clId="{8B7CB91F-10CE-42C2-B9B8-BFF2D3401655}" dt="2026-01-05T08:32:37.809" v="1752" actId="6549"/>
-          <ac:spMkLst>
-            <pc:docMk/>
-            <pc:sldMk cId="730804740" sldId="293"/>
-            <ac:spMk id="3" creationId="{6854D427-D7FC-33E3-A100-64B6FC01393B}"/>
-          </ac:spMkLst>
-        </pc:spChg>
-        <pc:spChg chg="del">
-          <ac:chgData name="Dominique RIGHETTO" userId="512fe077-82ad-424c-88a3-15e852b5861d" providerId="ADAL" clId="{8B7CB91F-10CE-42C2-B9B8-BFF2D3401655}" dt="2026-01-05T08:30:14.818" v="1479" actId="478"/>
-          <ac:spMkLst>
-            <pc:docMk/>
-            <pc:sldMk cId="730804740" sldId="293"/>
-            <ac:spMk id="4" creationId="{DEA7D791-D324-FEE2-51D4-C89822A864B2}"/>
-          </ac:spMkLst>
-        </pc:spChg>
-        <pc:picChg chg="add mod">
-          <ac:chgData name="Dominique RIGHETTO" userId="512fe077-82ad-424c-88a3-15e852b5861d" providerId="ADAL" clId="{8B7CB91F-10CE-42C2-B9B8-BFF2D3401655}" dt="2026-01-05T08:54:03.978" v="1759" actId="1076"/>
-          <ac:picMkLst>
-            <pc:docMk/>
-            <pc:sldMk cId="730804740" sldId="293"/>
-            <ac:picMk id="6" creationId="{832050DC-4707-B6F1-973D-2016AFF7BF74}"/>
-          </ac:picMkLst>
-        </pc:picChg>
-      </pc:sldChg>
-      <pc:sldChg chg="addSp delSp modSp add mod modTransition">
-        <pc:chgData name="Dominique RIGHETTO" userId="512fe077-82ad-424c-88a3-15e852b5861d" providerId="ADAL" clId="{8B7CB91F-10CE-42C2-B9B8-BFF2D3401655}" dt="2026-01-06T08:20:37.707" v="7532" actId="14861"/>
-        <pc:sldMkLst>
-          <pc:docMk/>
-          <pc:sldMk cId="617590533" sldId="294"/>
-        </pc:sldMkLst>
-        <pc:spChg chg="del">
-          <ac:chgData name="Dominique RIGHETTO" userId="512fe077-82ad-424c-88a3-15e852b5861d" providerId="ADAL" clId="{8B7CB91F-10CE-42C2-B9B8-BFF2D3401655}" dt="2026-01-05T08:54:30.042" v="1768" actId="478"/>
-          <ac:spMkLst>
-            <pc:docMk/>
-            <pc:sldMk cId="617590533" sldId="294"/>
-            <ac:spMk id="2" creationId="{530BA48B-C86E-8A70-4B01-C005BF4B91DE}"/>
-          </ac:spMkLst>
-        </pc:spChg>
-        <pc:spChg chg="del">
-          <ac:chgData name="Dominique RIGHETTO" userId="512fe077-82ad-424c-88a3-15e852b5861d" providerId="ADAL" clId="{8B7CB91F-10CE-42C2-B9B8-BFF2D3401655}" dt="2026-01-05T08:54:13.641" v="1761" actId="478"/>
-          <ac:spMkLst>
-            <pc:docMk/>
-            <pc:sldMk cId="617590533" sldId="294"/>
-            <ac:spMk id="3" creationId="{9DFA1284-5BA2-FFBF-BAEB-A7A98AD3F048}"/>
-          </ac:spMkLst>
-        </pc:spChg>
-        <pc:spChg chg="add del mod">
-          <ac:chgData name="Dominique RIGHETTO" userId="512fe077-82ad-424c-88a3-15e852b5861d" providerId="ADAL" clId="{8B7CB91F-10CE-42C2-B9B8-BFF2D3401655}" dt="2026-01-05T08:54:15.492" v="1762" actId="478"/>
-          <ac:spMkLst>
-            <pc:docMk/>
-            <pc:sldMk cId="617590533" sldId="294"/>
-            <ac:spMk id="5" creationId="{B8DB2EF7-6143-B2FD-D779-E706B32F8C31}"/>
-          </ac:spMkLst>
-        </pc:spChg>
-        <pc:spChg chg="add del mod">
-          <ac:chgData name="Dominique RIGHETTO" userId="512fe077-82ad-424c-88a3-15e852b5861d" providerId="ADAL" clId="{8B7CB91F-10CE-42C2-B9B8-BFF2D3401655}" dt="2026-01-05T08:54:32.146" v="1769" actId="478"/>
-          <ac:spMkLst>
-            <pc:docMk/>
-            <pc:sldMk cId="617590533" sldId="294"/>
-            <ac:spMk id="8" creationId="{7899B9E9-09D0-775D-7C24-E833F7D1D0AA}"/>
-          </ac:spMkLst>
-        </pc:spChg>
-        <pc:picChg chg="mod modCrop">
-          <ac:chgData name="Dominique RIGHETTO" userId="512fe077-82ad-424c-88a3-15e852b5861d" providerId="ADAL" clId="{8B7CB91F-10CE-42C2-B9B8-BFF2D3401655}" dt="2026-01-06T08:20:37.707" v="7532" actId="14861"/>
-          <ac:picMkLst>
-            <pc:docMk/>
-            <pc:sldMk cId="617590533" sldId="294"/>
-            <ac:picMk id="6" creationId="{1112956B-2F40-599E-049A-D4A8C3513D5A}"/>
-          </ac:picMkLst>
-        </pc:picChg>
-      </pc:sldChg>
-      <pc:sldChg chg="addSp delSp modSp add mod ord modNotesTx">
-        <pc:chgData name="Dominique RIGHETTO" userId="512fe077-82ad-424c-88a3-15e852b5861d" providerId="ADAL" clId="{8B7CB91F-10CE-42C2-B9B8-BFF2D3401655}" dt="2026-01-06T08:20:53.536" v="7533" actId="14861"/>
-        <pc:sldMkLst>
-          <pc:docMk/>
-          <pc:sldMk cId="2901458821" sldId="295"/>
-        </pc:sldMkLst>
-        <pc:spChg chg="mod">
-          <ac:chgData name="Dominique RIGHETTO" userId="512fe077-82ad-424c-88a3-15e852b5861d" providerId="ADAL" clId="{8B7CB91F-10CE-42C2-B9B8-BFF2D3401655}" dt="2026-01-05T08:56:37.098" v="1793" actId="20577"/>
-          <ac:spMkLst>
-            <pc:docMk/>
-            <pc:sldMk cId="2901458821" sldId="295"/>
-            <ac:spMk id="2" creationId="{9101858E-4AE4-5455-A79C-229865D15439}"/>
-          </ac:spMkLst>
-        </pc:spChg>
-        <pc:spChg chg="mod">
-          <ac:chgData name="Dominique RIGHETTO" userId="512fe077-82ad-424c-88a3-15e852b5861d" providerId="ADAL" clId="{8B7CB91F-10CE-42C2-B9B8-BFF2D3401655}" dt="2026-01-06T05:30:10.736" v="6628" actId="207"/>
-          <ac:spMkLst>
-            <pc:docMk/>
-            <pc:sldMk cId="2901458821" sldId="295"/>
-            <ac:spMk id="3" creationId="{4A7A6585-062B-EC32-2F44-7A3C47246AFE}"/>
-          </ac:spMkLst>
-        </pc:spChg>
-        <pc:picChg chg="add mod">
-          <ac:chgData name="Dominique RIGHETTO" userId="512fe077-82ad-424c-88a3-15e852b5861d" providerId="ADAL" clId="{8B7CB91F-10CE-42C2-B9B8-BFF2D3401655}" dt="2026-01-06T08:20:53.536" v="7533" actId="14861"/>
-          <ac:picMkLst>
-            <pc:docMk/>
-            <pc:sldMk cId="2901458821" sldId="295"/>
-            <ac:picMk id="5" creationId="{59A3C147-F111-C90C-3E05-6E41BF0EB6D3}"/>
-          </ac:picMkLst>
-        </pc:picChg>
-        <pc:picChg chg="del">
-          <ac:chgData name="Dominique RIGHETTO" userId="512fe077-82ad-424c-88a3-15e852b5861d" providerId="ADAL" clId="{8B7CB91F-10CE-42C2-B9B8-BFF2D3401655}" dt="2026-01-05T08:56:47.460" v="1794" actId="478"/>
-          <ac:picMkLst>
-            <pc:docMk/>
-            <pc:sldMk cId="2901458821" sldId="295"/>
-            <ac:picMk id="6" creationId="{71AC280B-C571-7834-62BA-EEF79942B9C0}"/>
-          </ac:picMkLst>
-        </pc:picChg>
-      </pc:sldChg>
-      <pc:sldChg chg="addSp delSp modSp add mod ord">
-        <pc:chgData name="Dominique RIGHETTO" userId="512fe077-82ad-424c-88a3-15e852b5861d" providerId="ADAL" clId="{8B7CB91F-10CE-42C2-B9B8-BFF2D3401655}" dt="2026-01-06T05:30:31.399" v="6629" actId="20577"/>
-        <pc:sldMkLst>
-          <pc:docMk/>
-          <pc:sldMk cId="546162947" sldId="296"/>
-        </pc:sldMkLst>
-        <pc:spChg chg="mod">
-          <ac:chgData name="Dominique RIGHETTO" userId="512fe077-82ad-424c-88a3-15e852b5861d" providerId="ADAL" clId="{8B7CB91F-10CE-42C2-B9B8-BFF2D3401655}" dt="2026-01-05T09:35:20.761" v="2321" actId="20577"/>
-          <ac:spMkLst>
-            <pc:docMk/>
-            <pc:sldMk cId="546162947" sldId="296"/>
-            <ac:spMk id="2" creationId="{8357D9B5-4296-FD66-6454-201612494AC3}"/>
-          </ac:spMkLst>
-        </pc:spChg>
-        <pc:spChg chg="mod">
-          <ac:chgData name="Dominique RIGHETTO" userId="512fe077-82ad-424c-88a3-15e852b5861d" providerId="ADAL" clId="{8B7CB91F-10CE-42C2-B9B8-BFF2D3401655}" dt="2026-01-06T05:30:31.399" v="6629" actId="20577"/>
-          <ac:spMkLst>
-            <pc:docMk/>
-            <pc:sldMk cId="546162947" sldId="296"/>
-            <ac:spMk id="3" creationId="{C89D633C-3E2D-C620-330F-995671BAA090}"/>
-          </ac:spMkLst>
-        </pc:spChg>
-        <pc:picChg chg="add mod">
-          <ac:chgData name="Dominique RIGHETTO" userId="512fe077-82ad-424c-88a3-15e852b5861d" providerId="ADAL" clId="{8B7CB91F-10CE-42C2-B9B8-BFF2D3401655}" dt="2026-01-05T19:40:15.637" v="5517" actId="14861"/>
-          <ac:picMkLst>
-            <pc:docMk/>
-            <pc:sldMk cId="546162947" sldId="296"/>
-            <ac:picMk id="5" creationId="{305D51B7-6C8B-DF60-8292-37CF7D79B792}"/>
-          </ac:picMkLst>
-        </pc:picChg>
-        <pc:picChg chg="add del mod">
-          <ac:chgData name="Dominique RIGHETTO" userId="512fe077-82ad-424c-88a3-15e852b5861d" providerId="ADAL" clId="{8B7CB91F-10CE-42C2-B9B8-BFF2D3401655}" dt="2026-01-05T09:58:00.326" v="2323" actId="478"/>
-          <ac:picMkLst>
-            <pc:docMk/>
-            <pc:sldMk cId="546162947" sldId="296"/>
-            <ac:picMk id="5" creationId="{E19C5A8C-6DBB-317B-9B48-46D19F9CC066}"/>
-          </ac:picMkLst>
-        </pc:picChg>
-        <pc:picChg chg="del">
-          <ac:chgData name="Dominique RIGHETTO" userId="512fe077-82ad-424c-88a3-15e852b5861d" providerId="ADAL" clId="{8B7CB91F-10CE-42C2-B9B8-BFF2D3401655}" dt="2026-01-05T09:07:32.532" v="2087" actId="478"/>
-          <ac:picMkLst>
-            <pc:docMk/>
-            <pc:sldMk cId="546162947" sldId="296"/>
-            <ac:picMk id="6" creationId="{61DC0705-AD07-B80F-06C4-D877F4F1EB1A}"/>
-          </ac:picMkLst>
-        </pc:picChg>
-        <pc:picChg chg="add del mod">
-          <ac:chgData name="Dominique RIGHETTO" userId="512fe077-82ad-424c-88a3-15e852b5861d" providerId="ADAL" clId="{8B7CB91F-10CE-42C2-B9B8-BFF2D3401655}" dt="2026-01-05T19:40:09.229" v="5514" actId="478"/>
-          <ac:picMkLst>
-            <pc:docMk/>
-            <pc:sldMk cId="546162947" sldId="296"/>
-            <ac:picMk id="6" creationId="{99059005-BA3A-F6BB-37CD-87E255CF8D33}"/>
-          </ac:picMkLst>
-        </pc:picChg>
-      </pc:sldChg>
-      <pc:sldChg chg="addSp delSp modSp add mod">
-        <pc:chgData name="Dominique RIGHETTO" userId="512fe077-82ad-424c-88a3-15e852b5861d" providerId="ADAL" clId="{8B7CB91F-10CE-42C2-B9B8-BFF2D3401655}" dt="2026-01-06T08:38:27.795" v="7805" actId="1076"/>
+        <pc:chgData name="Dominique RIGHETTO" userId="512fe077-82ad-424c-88a3-15e852b5861d" providerId="ADAL" clId="{8B7CB91F-10CE-42C2-B9B8-BFF2D3401655}" dt="2026-05-05T18:31:59.517" v="7815" actId="20577"/>
         <pc:sldMkLst>
           <pc:docMk/>
           <pc:sldMk cId="709545358" sldId="297"/>
         </pc:sldMkLst>
         <pc:spChg chg="mod">
-          <ac:chgData name="Dominique RIGHETTO" userId="512fe077-82ad-424c-88a3-15e852b5861d" providerId="ADAL" clId="{8B7CB91F-10CE-42C2-B9B8-BFF2D3401655}" dt="2026-01-05T10:24:08.837" v="3023" actId="20577"/>
-          <ac:spMkLst>
-            <pc:docMk/>
-            <pc:sldMk cId="709545358" sldId="297"/>
-            <ac:spMk id="2" creationId="{B845A4E6-506C-8A54-282B-B9A27DF974D9}"/>
-          </ac:spMkLst>
-        </pc:spChg>
-        <pc:spChg chg="mod">
-          <ac:chgData name="Dominique RIGHETTO" userId="512fe077-82ad-424c-88a3-15e852b5861d" providerId="ADAL" clId="{8B7CB91F-10CE-42C2-B9B8-BFF2D3401655}" dt="2026-01-05T15:06:24.477" v="4519" actId="108"/>
+          <ac:chgData name="Dominique RIGHETTO" userId="512fe077-82ad-424c-88a3-15e852b5861d" providerId="ADAL" clId="{8B7CB91F-10CE-42C2-B9B8-BFF2D3401655}" dt="2026-05-05T18:31:59.517" v="7815" actId="20577"/>
           <ac:spMkLst>
             <pc:docMk/>
             <pc:sldMk cId="709545358" sldId="297"/>
             <ac:spMk id="3" creationId="{EA2D3DAB-E05A-AC9C-4BBB-4A581D9BF3D5}"/>
           </ac:spMkLst>
         </pc:spChg>
-        <pc:picChg chg="add mod">
-          <ac:chgData name="Dominique RIGHETTO" userId="512fe077-82ad-424c-88a3-15e852b5861d" providerId="ADAL" clId="{8B7CB91F-10CE-42C2-B9B8-BFF2D3401655}" dt="2026-01-05T10:05:09.338" v="2573" actId="108"/>
-          <ac:picMkLst>
-            <pc:docMk/>
-            <pc:sldMk cId="709545358" sldId="297"/>
-            <ac:picMk id="5" creationId="{B2535224-3613-CF14-2DE1-50957EDA5478}"/>
-          </ac:picMkLst>
-        </pc:picChg>
-        <pc:picChg chg="del">
-          <ac:chgData name="Dominique RIGHETTO" userId="512fe077-82ad-424c-88a3-15e852b5861d" providerId="ADAL" clId="{8B7CB91F-10CE-42C2-B9B8-BFF2D3401655}" dt="2026-01-05T10:00:04.684" v="2331" actId="478"/>
-          <ac:picMkLst>
-            <pc:docMk/>
-            <pc:sldMk cId="709545358" sldId="297"/>
-            <ac:picMk id="6" creationId="{570DB731-1B05-EC28-08B1-F441A2F8AB71}"/>
-          </ac:picMkLst>
-        </pc:picChg>
-        <pc:picChg chg="add mod">
-          <ac:chgData name="Dominique RIGHETTO" userId="512fe077-82ad-424c-88a3-15e852b5861d" providerId="ADAL" clId="{8B7CB91F-10CE-42C2-B9B8-BFF2D3401655}" dt="2026-01-06T08:38:27.795" v="7805" actId="1076"/>
-          <ac:picMkLst>
-            <pc:docMk/>
-            <pc:sldMk cId="709545358" sldId="297"/>
-            <ac:picMk id="6" creationId="{D8DE0287-DB66-E698-385A-1A59D7E8C694}"/>
-          </ac:picMkLst>
-        </pc:picChg>
-        <pc:picChg chg="add del mod">
-          <ac:chgData name="Dominique RIGHETTO" userId="512fe077-82ad-424c-88a3-15e852b5861d" providerId="ADAL" clId="{8B7CB91F-10CE-42C2-B9B8-BFF2D3401655}" dt="2026-01-06T08:38:24.710" v="7804" actId="478"/>
-          <ac:picMkLst>
-            <pc:docMk/>
-            <pc:sldMk cId="709545358" sldId="297"/>
-            <ac:picMk id="8" creationId="{CDEA6B6B-ADE2-DDA5-F518-5F11F0C59B9D}"/>
-          </ac:picMkLst>
-        </pc:picChg>
       </pc:sldChg>
-      <pc:sldChg chg="addSp delSp modSp add mod">
-        <pc:chgData name="Dominique RIGHETTO" userId="512fe077-82ad-424c-88a3-15e852b5861d" providerId="ADAL" clId="{8B7CB91F-10CE-42C2-B9B8-BFF2D3401655}" dt="2026-01-06T05:31:25.084" v="6631" actId="20577"/>
-        <pc:sldMkLst>
-          <pc:docMk/>
-          <pc:sldMk cId="3961351739" sldId="298"/>
-        </pc:sldMkLst>
-        <pc:spChg chg="mod">
-          <ac:chgData name="Dominique RIGHETTO" userId="512fe077-82ad-424c-88a3-15e852b5861d" providerId="ADAL" clId="{8B7CB91F-10CE-42C2-B9B8-BFF2D3401655}" dt="2026-01-05T10:24:15.326" v="3032" actId="20577"/>
-          <ac:spMkLst>
-            <pc:docMk/>
-            <pc:sldMk cId="3961351739" sldId="298"/>
-            <ac:spMk id="2" creationId="{A48B1937-E229-DAB6-0930-B3E44E3920DE}"/>
-          </ac:spMkLst>
-        </pc:spChg>
-        <pc:spChg chg="mod">
-          <ac:chgData name="Dominique RIGHETTO" userId="512fe077-82ad-424c-88a3-15e852b5861d" providerId="ADAL" clId="{8B7CB91F-10CE-42C2-B9B8-BFF2D3401655}" dt="2026-01-06T05:31:25.084" v="6631" actId="20577"/>
-          <ac:spMkLst>
-            <pc:docMk/>
-            <pc:sldMk cId="3961351739" sldId="298"/>
-            <ac:spMk id="3" creationId="{83029DA1-9BCD-3EBD-0C74-543E48734A9E}"/>
-          </ac:spMkLst>
-        </pc:spChg>
-        <pc:spChg chg="add mod">
-          <ac:chgData name="Dominique RIGHETTO" userId="512fe077-82ad-424c-88a3-15e852b5861d" providerId="ADAL" clId="{8B7CB91F-10CE-42C2-B9B8-BFF2D3401655}" dt="2026-01-05T10:21:48.946" v="2888" actId="207"/>
-          <ac:spMkLst>
-            <pc:docMk/>
-            <pc:sldMk cId="3961351739" sldId="298"/>
-            <ac:spMk id="7" creationId="{902C893A-AE8C-38CF-319B-BB6D877250CE}"/>
-          </ac:spMkLst>
-        </pc:spChg>
-        <pc:picChg chg="del">
-          <ac:chgData name="Dominique RIGHETTO" userId="512fe077-82ad-424c-88a3-15e852b5861d" providerId="ADAL" clId="{8B7CB91F-10CE-42C2-B9B8-BFF2D3401655}" dt="2026-01-05T10:05:48.540" v="2580" actId="478"/>
-          <ac:picMkLst>
-            <pc:docMk/>
-            <pc:sldMk cId="3961351739" sldId="298"/>
-            <ac:picMk id="5" creationId="{C5659996-2D64-F9A5-690D-262F08D76BA9}"/>
-          </ac:picMkLst>
-        </pc:picChg>
-        <pc:picChg chg="add mod">
-          <ac:chgData name="Dominique RIGHETTO" userId="512fe077-82ad-424c-88a3-15e852b5861d" providerId="ADAL" clId="{8B7CB91F-10CE-42C2-B9B8-BFF2D3401655}" dt="2026-01-05T10:18:29.644" v="2858" actId="1076"/>
-          <ac:picMkLst>
-            <pc:docMk/>
-            <pc:sldMk cId="3961351739" sldId="298"/>
-            <ac:picMk id="6" creationId="{4EBD515D-220C-665B-DCFE-5BDD41EA43E8}"/>
-          </ac:picMkLst>
-        </pc:picChg>
-        <pc:picChg chg="del">
-          <ac:chgData name="Dominique RIGHETTO" userId="512fe077-82ad-424c-88a3-15e852b5861d" providerId="ADAL" clId="{8B7CB91F-10CE-42C2-B9B8-BFF2D3401655}" dt="2026-01-05T10:05:49.496" v="2581" actId="478"/>
-          <ac:picMkLst>
-            <pc:docMk/>
-            <pc:sldMk cId="3961351739" sldId="298"/>
-            <ac:picMk id="8" creationId="{E304B818-AAB6-5713-E8EC-07DE23F6D58B}"/>
-          </ac:picMkLst>
-        </pc:picChg>
-      </pc:sldChg>
-      <pc:sldChg chg="addSp delSp modSp add mod ord">
-        <pc:chgData name="Dominique RIGHETTO" userId="512fe077-82ad-424c-88a3-15e852b5861d" providerId="ADAL" clId="{8B7CB91F-10CE-42C2-B9B8-BFF2D3401655}" dt="2026-01-05T10:42:44.005" v="3407" actId="20577"/>
-        <pc:sldMkLst>
-          <pc:docMk/>
-          <pc:sldMk cId="2399632653" sldId="299"/>
-        </pc:sldMkLst>
-        <pc:spChg chg="mod">
-          <ac:chgData name="Dominique RIGHETTO" userId="512fe077-82ad-424c-88a3-15e852b5861d" providerId="ADAL" clId="{8B7CB91F-10CE-42C2-B9B8-BFF2D3401655}" dt="2026-01-05T10:24:23.262" v="3034" actId="20577"/>
-          <ac:spMkLst>
-            <pc:docMk/>
-            <pc:sldMk cId="2399632653" sldId="299"/>
-            <ac:spMk id="2" creationId="{3D5DB75B-6770-31DB-523A-9A3D7DBF1E60}"/>
-          </ac:spMkLst>
-        </pc:spChg>
-        <pc:spChg chg="mod">
-          <ac:chgData name="Dominique RIGHETTO" userId="512fe077-82ad-424c-88a3-15e852b5861d" providerId="ADAL" clId="{8B7CB91F-10CE-42C2-B9B8-BFF2D3401655}" dt="2026-01-05T10:42:44.005" v="3407" actId="20577"/>
-          <ac:spMkLst>
-            <pc:docMk/>
-            <pc:sldMk cId="2399632653" sldId="299"/>
-            <ac:spMk id="3" creationId="{741381EB-99BC-524D-D960-85D1ABC4DC70}"/>
-          </ac:spMkLst>
-        </pc:spChg>
-        <pc:picChg chg="del">
-          <ac:chgData name="Dominique RIGHETTO" userId="512fe077-82ad-424c-88a3-15e852b5861d" providerId="ADAL" clId="{8B7CB91F-10CE-42C2-B9B8-BFF2D3401655}" dt="2026-01-05T10:25:50.207" v="3035" actId="478"/>
-          <ac:picMkLst>
-            <pc:docMk/>
-            <pc:sldMk cId="2399632653" sldId="299"/>
-            <ac:picMk id="5" creationId="{27B38A17-D9B0-3D51-B75B-B556450D89EE}"/>
-          </ac:picMkLst>
-        </pc:picChg>
-        <pc:picChg chg="add mod">
-          <ac:chgData name="Dominique RIGHETTO" userId="512fe077-82ad-424c-88a3-15e852b5861d" providerId="ADAL" clId="{8B7CB91F-10CE-42C2-B9B8-BFF2D3401655}" dt="2026-01-05T10:26:57.342" v="3043" actId="108"/>
-          <ac:picMkLst>
-            <pc:docMk/>
-            <pc:sldMk cId="2399632653" sldId="299"/>
-            <ac:picMk id="6" creationId="{34B80029-5A50-92BD-D91B-7B26F946AAA4}"/>
-          </ac:picMkLst>
-        </pc:picChg>
-        <pc:picChg chg="del">
-          <ac:chgData name="Dominique RIGHETTO" userId="512fe077-82ad-424c-88a3-15e852b5861d" providerId="ADAL" clId="{8B7CB91F-10CE-42C2-B9B8-BFF2D3401655}" dt="2026-01-05T10:26:43.564" v="3039" actId="478"/>
-          <ac:picMkLst>
-            <pc:docMk/>
-            <pc:sldMk cId="2399632653" sldId="299"/>
-            <ac:picMk id="8" creationId="{0F3F0767-05F2-53BF-C4DA-6C12AAA0F513}"/>
-          </ac:picMkLst>
-        </pc:picChg>
-      </pc:sldChg>
-      <pc:sldChg chg="addSp delSp modSp add mod">
-        <pc:chgData name="Dominique RIGHETTO" userId="512fe077-82ad-424c-88a3-15e852b5861d" providerId="ADAL" clId="{8B7CB91F-10CE-42C2-B9B8-BFF2D3401655}" dt="2026-01-05T15:06:34.004" v="4520" actId="108"/>
-        <pc:sldMkLst>
-          <pc:docMk/>
-          <pc:sldMk cId="1761927550" sldId="300"/>
-        </pc:sldMkLst>
-        <pc:spChg chg="mod">
-          <ac:chgData name="Dominique RIGHETTO" userId="512fe077-82ad-424c-88a3-15e852b5861d" providerId="ADAL" clId="{8B7CB91F-10CE-42C2-B9B8-BFF2D3401655}" dt="2026-01-05T15:06:34.004" v="4520" actId="108"/>
-          <ac:spMkLst>
-            <pc:docMk/>
-            <pc:sldMk cId="1761927550" sldId="300"/>
-            <ac:spMk id="3" creationId="{0C7D0AE3-4D9F-D903-11DB-723CC3B837B9}"/>
-          </ac:spMkLst>
-        </pc:spChg>
-        <pc:picChg chg="add mod">
-          <ac:chgData name="Dominique RIGHETTO" userId="512fe077-82ad-424c-88a3-15e852b5861d" providerId="ADAL" clId="{8B7CB91F-10CE-42C2-B9B8-BFF2D3401655}" dt="2026-01-05T10:28:38.892" v="3190" actId="108"/>
-          <ac:picMkLst>
-            <pc:docMk/>
-            <pc:sldMk cId="1761927550" sldId="300"/>
-            <ac:picMk id="5" creationId="{037C562B-8E3E-0BB5-2C7F-AB3C29B44C6A}"/>
-          </ac:picMkLst>
-        </pc:picChg>
-        <pc:picChg chg="del">
-          <ac:chgData name="Dominique RIGHETTO" userId="512fe077-82ad-424c-88a3-15e852b5861d" providerId="ADAL" clId="{8B7CB91F-10CE-42C2-B9B8-BFF2D3401655}" dt="2026-01-05T10:27:13.897" v="3051" actId="478"/>
-          <ac:picMkLst>
-            <pc:docMk/>
-            <pc:sldMk cId="1761927550" sldId="300"/>
-            <ac:picMk id="6" creationId="{4899777B-5FFC-3F6A-798F-A85A809DCCBF}"/>
-          </ac:picMkLst>
-        </pc:picChg>
-        <pc:picChg chg="del">
-          <ac:chgData name="Dominique RIGHETTO" userId="512fe077-82ad-424c-88a3-15e852b5861d" providerId="ADAL" clId="{8B7CB91F-10CE-42C2-B9B8-BFF2D3401655}" dt="2026-01-05T10:28:24.277" v="3186" actId="478"/>
-          <ac:picMkLst>
-            <pc:docMk/>
-            <pc:sldMk cId="1761927550" sldId="300"/>
-            <ac:picMk id="8" creationId="{4C71C728-FF18-4D64-431A-56FB07317519}"/>
-          </ac:picMkLst>
-        </pc:picChg>
-      </pc:sldChg>
-      <pc:sldChg chg="addSp delSp modSp add mod ord">
-        <pc:chgData name="Dominique RIGHETTO" userId="512fe077-82ad-424c-88a3-15e852b5861d" providerId="ADAL" clId="{8B7CB91F-10CE-42C2-B9B8-BFF2D3401655}" dt="2026-01-05T10:39:59.145" v="3359" actId="20577"/>
-        <pc:sldMkLst>
-          <pc:docMk/>
-          <pc:sldMk cId="4107305617" sldId="301"/>
-        </pc:sldMkLst>
-        <pc:spChg chg="mod">
-          <ac:chgData name="Dominique RIGHETTO" userId="512fe077-82ad-424c-88a3-15e852b5861d" providerId="ADAL" clId="{8B7CB91F-10CE-42C2-B9B8-BFF2D3401655}" dt="2026-01-05T10:34:06.909" v="3334" actId="20577"/>
-          <ac:spMkLst>
-            <pc:docMk/>
-            <pc:sldMk cId="4107305617" sldId="301"/>
-            <ac:spMk id="2" creationId="{91F11321-5C53-C769-25FD-3C480E97DDCE}"/>
-          </ac:spMkLst>
-        </pc:spChg>
-        <pc:spChg chg="mod">
-          <ac:chgData name="Dominique RIGHETTO" userId="512fe077-82ad-424c-88a3-15e852b5861d" providerId="ADAL" clId="{8B7CB91F-10CE-42C2-B9B8-BFF2D3401655}" dt="2026-01-05T10:39:51.533" v="3355" actId="20577"/>
-          <ac:spMkLst>
-            <pc:docMk/>
-            <pc:sldMk cId="4107305617" sldId="301"/>
-            <ac:spMk id="3" creationId="{C97DF473-2026-6250-AA6D-4604CACF6121}"/>
-          </ac:spMkLst>
-        </pc:spChg>
-        <pc:spChg chg="mod">
-          <ac:chgData name="Dominique RIGHETTO" userId="512fe077-82ad-424c-88a3-15e852b5861d" providerId="ADAL" clId="{8B7CB91F-10CE-42C2-B9B8-BFF2D3401655}" dt="2026-01-05T10:39:59.145" v="3359" actId="20577"/>
-          <ac:spMkLst>
-            <pc:docMk/>
-            <pc:sldMk cId="4107305617" sldId="301"/>
-            <ac:spMk id="7" creationId="{00720CE7-DA57-E954-96B6-C6C46BD85D34}"/>
-          </ac:spMkLst>
-        </pc:spChg>
-        <pc:picChg chg="add mod">
-          <ac:chgData name="Dominique RIGHETTO" userId="512fe077-82ad-424c-88a3-15e852b5861d" providerId="ADAL" clId="{8B7CB91F-10CE-42C2-B9B8-BFF2D3401655}" dt="2026-01-05T10:37:41.652" v="3338" actId="14861"/>
-          <ac:picMkLst>
-            <pc:docMk/>
-            <pc:sldMk cId="4107305617" sldId="301"/>
-            <ac:picMk id="5" creationId="{AED93A08-AC91-1552-0522-6366FEE89055}"/>
-          </ac:picMkLst>
-        </pc:picChg>
-        <pc:picChg chg="del">
-          <ac:chgData name="Dominique RIGHETTO" userId="512fe077-82ad-424c-88a3-15e852b5861d" providerId="ADAL" clId="{8B7CB91F-10CE-42C2-B9B8-BFF2D3401655}" dt="2026-01-05T10:33:30.470" v="3332" actId="478"/>
-          <ac:picMkLst>
-            <pc:docMk/>
-            <pc:sldMk cId="4107305617" sldId="301"/>
-            <ac:picMk id="6" creationId="{121C7093-80E3-5906-5D94-7A484BABE94E}"/>
-          </ac:picMkLst>
-        </pc:picChg>
-      </pc:sldChg>
-      <pc:sldChg chg="addSp delSp modSp add mod ord">
-        <pc:chgData name="Dominique RIGHETTO" userId="512fe077-82ad-424c-88a3-15e852b5861d" providerId="ADAL" clId="{8B7CB91F-10CE-42C2-B9B8-BFF2D3401655}" dt="2026-01-06T05:32:52.543" v="6633" actId="14100"/>
-        <pc:sldMkLst>
-          <pc:docMk/>
-          <pc:sldMk cId="3214065329" sldId="302"/>
-        </pc:sldMkLst>
-        <pc:spChg chg="mod">
-          <ac:chgData name="Dominique RIGHETTO" userId="512fe077-82ad-424c-88a3-15e852b5861d" providerId="ADAL" clId="{8B7CB91F-10CE-42C2-B9B8-BFF2D3401655}" dt="2026-01-05T10:40:27.299" v="3364" actId="20577"/>
-          <ac:spMkLst>
-            <pc:docMk/>
-            <pc:sldMk cId="3214065329" sldId="302"/>
-            <ac:spMk id="2" creationId="{F53A0447-9D5C-7901-90EC-9DCA1B8EEF2E}"/>
-          </ac:spMkLst>
-        </pc:spChg>
-        <pc:spChg chg="mod">
-          <ac:chgData name="Dominique RIGHETTO" userId="512fe077-82ad-424c-88a3-15e852b5861d" providerId="ADAL" clId="{8B7CB91F-10CE-42C2-B9B8-BFF2D3401655}" dt="2026-01-05T10:42:38.769" v="3405" actId="20577"/>
-          <ac:spMkLst>
-            <pc:docMk/>
-            <pc:sldMk cId="3214065329" sldId="302"/>
-            <ac:spMk id="3" creationId="{AE353607-3A14-0643-DFFA-C974C4DCCC09}"/>
-          </ac:spMkLst>
-        </pc:spChg>
-        <pc:picChg chg="add mod">
-          <ac:chgData name="Dominique RIGHETTO" userId="512fe077-82ad-424c-88a3-15e852b5861d" providerId="ADAL" clId="{8B7CB91F-10CE-42C2-B9B8-BFF2D3401655}" dt="2026-01-06T05:32:52.543" v="6633" actId="14100"/>
-          <ac:picMkLst>
-            <pc:docMk/>
-            <pc:sldMk cId="3214065329" sldId="302"/>
-            <ac:picMk id="5" creationId="{466B5590-4ED1-AC27-53F1-E62264BECCF5}"/>
-          </ac:picMkLst>
-        </pc:picChg>
-        <pc:picChg chg="del">
-          <ac:chgData name="Dominique RIGHETTO" userId="512fe077-82ad-424c-88a3-15e852b5861d" providerId="ADAL" clId="{8B7CB91F-10CE-42C2-B9B8-BFF2D3401655}" dt="2026-01-05T10:41:58.694" v="3394" actId="478"/>
-          <ac:picMkLst>
-            <pc:docMk/>
-            <pc:sldMk cId="3214065329" sldId="302"/>
-            <ac:picMk id="6" creationId="{9A1F706E-74E3-6496-8FCE-CA94A9572665}"/>
-          </ac:picMkLst>
-        </pc:picChg>
-      </pc:sldChg>
-      <pc:sldChg chg="addSp delSp modSp add mod ord">
-        <pc:chgData name="Dominique RIGHETTO" userId="512fe077-82ad-424c-88a3-15e852b5861d" providerId="ADAL" clId="{8B7CB91F-10CE-42C2-B9B8-BFF2D3401655}" dt="2026-01-06T05:33:33.490" v="6639" actId="20577"/>
-        <pc:sldMkLst>
-          <pc:docMk/>
-          <pc:sldMk cId="715954666" sldId="303"/>
-        </pc:sldMkLst>
-        <pc:spChg chg="mod">
-          <ac:chgData name="Dominique RIGHETTO" userId="512fe077-82ad-424c-88a3-15e852b5861d" providerId="ADAL" clId="{8B7CB91F-10CE-42C2-B9B8-BFF2D3401655}" dt="2026-01-05T10:43:40.044" v="3412" actId="20577"/>
-          <ac:spMkLst>
-            <pc:docMk/>
-            <pc:sldMk cId="715954666" sldId="303"/>
-            <ac:spMk id="2" creationId="{A9F313D3-9682-06E4-65D5-8FFB9CA90034}"/>
-          </ac:spMkLst>
-        </pc:spChg>
-        <pc:spChg chg="mod">
-          <ac:chgData name="Dominique RIGHETTO" userId="512fe077-82ad-424c-88a3-15e852b5861d" providerId="ADAL" clId="{8B7CB91F-10CE-42C2-B9B8-BFF2D3401655}" dt="2026-01-06T05:33:33.490" v="6639" actId="20577"/>
-          <ac:spMkLst>
-            <pc:docMk/>
-            <pc:sldMk cId="715954666" sldId="303"/>
-            <ac:spMk id="3" creationId="{488F0DFF-4B1E-61BD-3A0C-17B1828785FB}"/>
-          </ac:spMkLst>
-        </pc:spChg>
-        <pc:picChg chg="del mod">
-          <ac:chgData name="Dominique RIGHETTO" userId="512fe077-82ad-424c-88a3-15e852b5861d" providerId="ADAL" clId="{8B7CB91F-10CE-42C2-B9B8-BFF2D3401655}" dt="2026-01-05T10:45:36.969" v="3602" actId="478"/>
-          <ac:picMkLst>
-            <pc:docMk/>
-            <pc:sldMk cId="715954666" sldId="303"/>
-            <ac:picMk id="5" creationId="{7E48A633-9522-9785-791F-5471505C42F7}"/>
-          </ac:picMkLst>
-        </pc:picChg>
-        <pc:picChg chg="add mod">
-          <ac:chgData name="Dominique RIGHETTO" userId="512fe077-82ad-424c-88a3-15e852b5861d" providerId="ADAL" clId="{8B7CB91F-10CE-42C2-B9B8-BFF2D3401655}" dt="2026-01-05T15:04:26.999" v="4510" actId="1076"/>
-          <ac:picMkLst>
-            <pc:docMk/>
-            <pc:sldMk cId="715954666" sldId="303"/>
-            <ac:picMk id="6" creationId="{475FA4F2-50B1-AA80-BC0E-12B86ECF77B6}"/>
-          </ac:picMkLst>
-        </pc:picChg>
-      </pc:sldChg>
-      <pc:sldChg chg="addSp delSp modSp add mod ord">
-        <pc:chgData name="Dominique RIGHETTO" userId="512fe077-82ad-424c-88a3-15e852b5861d" providerId="ADAL" clId="{8B7CB91F-10CE-42C2-B9B8-BFF2D3401655}" dt="2026-01-05T10:48:38.463" v="3641" actId="20577"/>
-        <pc:sldMkLst>
-          <pc:docMk/>
-          <pc:sldMk cId="24537132" sldId="304"/>
-        </pc:sldMkLst>
-        <pc:spChg chg="mod">
-          <ac:chgData name="Dominique RIGHETTO" userId="512fe077-82ad-424c-88a3-15e852b5861d" providerId="ADAL" clId="{8B7CB91F-10CE-42C2-B9B8-BFF2D3401655}" dt="2026-01-05T10:46:17.725" v="3613" actId="20577"/>
-          <ac:spMkLst>
-            <pc:docMk/>
-            <pc:sldMk cId="24537132" sldId="304"/>
-            <ac:spMk id="2" creationId="{66E27314-9212-A847-3ABE-683FE3011090}"/>
-          </ac:spMkLst>
-        </pc:spChg>
-        <pc:spChg chg="mod">
-          <ac:chgData name="Dominique RIGHETTO" userId="512fe077-82ad-424c-88a3-15e852b5861d" providerId="ADAL" clId="{8B7CB91F-10CE-42C2-B9B8-BFF2D3401655}" dt="2026-01-05T10:46:29.543" v="3632" actId="313"/>
-          <ac:spMkLst>
-            <pc:docMk/>
-            <pc:sldMk cId="24537132" sldId="304"/>
-            <ac:spMk id="3" creationId="{5A37EFEA-EF0C-F5AE-34D8-5C9A939C7816}"/>
-          </ac:spMkLst>
-        </pc:spChg>
-        <pc:spChg chg="mod">
-          <ac:chgData name="Dominique RIGHETTO" userId="512fe077-82ad-424c-88a3-15e852b5861d" providerId="ADAL" clId="{8B7CB91F-10CE-42C2-B9B8-BFF2D3401655}" dt="2026-01-05T10:48:38.463" v="3641" actId="20577"/>
-          <ac:spMkLst>
-            <pc:docMk/>
-            <pc:sldMk cId="24537132" sldId="304"/>
-            <ac:spMk id="7" creationId="{6158CC15-0C5B-B386-40D7-1FC6D70E2110}"/>
-          </ac:spMkLst>
-        </pc:spChg>
-        <pc:picChg chg="del">
-          <ac:chgData name="Dominique RIGHETTO" userId="512fe077-82ad-424c-88a3-15e852b5861d" providerId="ADAL" clId="{8B7CB91F-10CE-42C2-B9B8-BFF2D3401655}" dt="2026-01-05T10:48:05.185" v="3633" actId="478"/>
-          <ac:picMkLst>
-            <pc:docMk/>
-            <pc:sldMk cId="24537132" sldId="304"/>
-            <ac:picMk id="5" creationId="{ED462643-CC0B-F1FB-B6D0-080C0CA80837}"/>
-          </ac:picMkLst>
-        </pc:picChg>
-        <pc:picChg chg="add mod">
-          <ac:chgData name="Dominique RIGHETTO" userId="512fe077-82ad-424c-88a3-15e852b5861d" providerId="ADAL" clId="{8B7CB91F-10CE-42C2-B9B8-BFF2D3401655}" dt="2026-01-05T10:48:13.259" v="3637" actId="14861"/>
-          <ac:picMkLst>
-            <pc:docMk/>
-            <pc:sldMk cId="24537132" sldId="304"/>
-            <ac:picMk id="6" creationId="{6B4CFFA8-1969-CA7F-940D-965CDD058C7B}"/>
-          </ac:picMkLst>
-        </pc:picChg>
-      </pc:sldChg>
-      <pc:sldChg chg="addSp delSp modSp add mod ord">
-        <pc:chgData name="Dominique RIGHETTO" userId="512fe077-82ad-424c-88a3-15e852b5861d" providerId="ADAL" clId="{8B7CB91F-10CE-42C2-B9B8-BFF2D3401655}" dt="2026-01-06T05:59:18.156" v="6834" actId="14100"/>
-        <pc:sldMkLst>
-          <pc:docMk/>
-          <pc:sldMk cId="989586433" sldId="305"/>
-        </pc:sldMkLst>
-        <pc:spChg chg="mod">
-          <ac:chgData name="Dominique RIGHETTO" userId="512fe077-82ad-424c-88a3-15e852b5861d" providerId="ADAL" clId="{8B7CB91F-10CE-42C2-B9B8-BFF2D3401655}" dt="2026-01-05T10:50:35.575" v="3675" actId="20577"/>
-          <ac:spMkLst>
-            <pc:docMk/>
-            <pc:sldMk cId="989586433" sldId="305"/>
-            <ac:spMk id="2" creationId="{834B7364-6C98-7044-CEB2-5328BCDFDC6B}"/>
-          </ac:spMkLst>
-        </pc:spChg>
-        <pc:spChg chg="mod">
-          <ac:chgData name="Dominique RIGHETTO" userId="512fe077-82ad-424c-88a3-15e852b5861d" providerId="ADAL" clId="{8B7CB91F-10CE-42C2-B9B8-BFF2D3401655}" dt="2026-01-06T05:51:38.821" v="6779" actId="5793"/>
-          <ac:spMkLst>
-            <pc:docMk/>
-            <pc:sldMk cId="989586433" sldId="305"/>
-            <ac:spMk id="3" creationId="{4DBACDBD-B750-A641-A360-8510B71B52F8}"/>
-          </ac:spMkLst>
-        </pc:spChg>
-        <pc:spChg chg="add mod">
-          <ac:chgData name="Dominique RIGHETTO" userId="512fe077-82ad-424c-88a3-15e852b5861d" providerId="ADAL" clId="{8B7CB91F-10CE-42C2-B9B8-BFF2D3401655}" dt="2026-01-06T05:51:22.131" v="6778" actId="14100"/>
-          <ac:spMkLst>
-            <pc:docMk/>
-            <pc:sldMk cId="989586433" sldId="305"/>
-            <ac:spMk id="4" creationId="{4B92274F-491B-942D-FD18-C984AC21D9B6}"/>
-          </ac:spMkLst>
-        </pc:spChg>
-        <pc:spChg chg="add mod ord">
-          <ac:chgData name="Dominique RIGHETTO" userId="512fe077-82ad-424c-88a3-15e852b5861d" providerId="ADAL" clId="{8B7CB91F-10CE-42C2-B9B8-BFF2D3401655}" dt="2026-01-06T05:59:18.156" v="6834" actId="14100"/>
-          <ac:spMkLst>
-            <pc:docMk/>
-            <pc:sldMk cId="989586433" sldId="305"/>
-            <ac:spMk id="7" creationId="{AA1481E2-E225-CB1E-5FC0-20D0387972C4}"/>
-          </ac:spMkLst>
-        </pc:spChg>
-        <pc:spChg chg="add del mod">
-          <ac:chgData name="Dominique RIGHETTO" userId="512fe077-82ad-424c-88a3-15e852b5861d" providerId="ADAL" clId="{8B7CB91F-10CE-42C2-B9B8-BFF2D3401655}" dt="2026-01-06T05:50:56.221" v="6774" actId="478"/>
-          <ac:spMkLst>
-            <pc:docMk/>
-            <pc:sldMk cId="989586433" sldId="305"/>
-            <ac:spMk id="9" creationId="{43CC8CFB-4C99-259F-A2E1-C1966F2A9256}"/>
-          </ac:spMkLst>
-        </pc:spChg>
-        <pc:spChg chg="add del mod">
-          <ac:chgData name="Dominique RIGHETTO" userId="512fe077-82ad-424c-88a3-15e852b5861d" providerId="ADAL" clId="{8B7CB91F-10CE-42C2-B9B8-BFF2D3401655}" dt="2026-01-05T14:46:27.088" v="4185" actId="478"/>
-          <ac:spMkLst>
-            <pc:docMk/>
-            <pc:sldMk cId="989586433" sldId="305"/>
-            <ac:spMk id="12" creationId="{F0128405-7D4E-CF9E-D8CB-320938C1CEAC}"/>
-          </ac:spMkLst>
-        </pc:spChg>
-        <pc:picChg chg="del">
-          <ac:chgData name="Dominique RIGHETTO" userId="512fe077-82ad-424c-88a3-15e852b5861d" providerId="ADAL" clId="{8B7CB91F-10CE-42C2-B9B8-BFF2D3401655}" dt="2026-01-05T10:48:59.831" v="3645" actId="478"/>
-          <ac:picMkLst>
-            <pc:docMk/>
-            <pc:sldMk cId="989586433" sldId="305"/>
-            <ac:picMk id="5" creationId="{19E4CFDB-9F54-674E-5280-33F4416CA6C5}"/>
-          </ac:picMkLst>
-        </pc:picChg>
-        <pc:picChg chg="add del mod">
-          <ac:chgData name="Dominique RIGHETTO" userId="512fe077-82ad-424c-88a3-15e852b5861d" providerId="ADAL" clId="{8B7CB91F-10CE-42C2-B9B8-BFF2D3401655}" dt="2026-01-05T14:44:29.699" v="4160" actId="478"/>
-          <ac:picMkLst>
-            <pc:docMk/>
-            <pc:sldMk cId="989586433" sldId="305"/>
-            <ac:picMk id="5" creationId="{C7A73C33-6AB9-F717-0095-281B790D3D92}"/>
-          </ac:picMkLst>
-        </pc:picChg>
-        <pc:picChg chg="add del mod">
-          <ac:chgData name="Dominique RIGHETTO" userId="512fe077-82ad-424c-88a3-15e852b5861d" providerId="ADAL" clId="{8B7CB91F-10CE-42C2-B9B8-BFF2D3401655}" dt="2026-01-05T14:42:40.702" v="4144" actId="478"/>
-          <ac:picMkLst>
-            <pc:docMk/>
-            <pc:sldMk cId="989586433" sldId="305"/>
-            <ac:picMk id="6" creationId="{E63415D6-6D65-95E4-C7BC-8A1B52CE7E8A}"/>
-          </ac:picMkLst>
-        </pc:picChg>
-        <pc:picChg chg="add mod ord">
-          <ac:chgData name="Dominique RIGHETTO" userId="512fe077-82ad-424c-88a3-15e852b5861d" providerId="ADAL" clId="{8B7CB91F-10CE-42C2-B9B8-BFF2D3401655}" dt="2026-01-06T05:51:43.579" v="6780" actId="166"/>
-          <ac:picMkLst>
-            <pc:docMk/>
-            <pc:sldMk cId="989586433" sldId="305"/>
-            <ac:picMk id="8" creationId="{D6C333E4-EAB2-386F-0AA9-7808BDB89AD5}"/>
-          </ac:picMkLst>
-        </pc:picChg>
-        <pc:picChg chg="add mod modCrop">
-          <ac:chgData name="Dominique RIGHETTO" userId="512fe077-82ad-424c-88a3-15e852b5861d" providerId="ADAL" clId="{8B7CB91F-10CE-42C2-B9B8-BFF2D3401655}" dt="2026-01-06T05:51:02.215" v="6776" actId="1076"/>
-          <ac:picMkLst>
-            <pc:docMk/>
-            <pc:sldMk cId="989586433" sldId="305"/>
-            <ac:picMk id="11" creationId="{14FDD82F-A001-EF7F-B4A6-AC95A767E4F0}"/>
-          </ac:picMkLst>
-        </pc:picChg>
-      </pc:sldChg>
-      <pc:sldChg chg="delSp modSp add mod ord">
-        <pc:chgData name="Dominique RIGHETTO" userId="512fe077-82ad-424c-88a3-15e852b5861d" providerId="ADAL" clId="{8B7CB91F-10CE-42C2-B9B8-BFF2D3401655}" dt="2026-01-06T05:34:48.386" v="6641" actId="20577"/>
-        <pc:sldMkLst>
-          <pc:docMk/>
-          <pc:sldMk cId="1692727651" sldId="306"/>
-        </pc:sldMkLst>
-        <pc:spChg chg="mod">
-          <ac:chgData name="Dominique RIGHETTO" userId="512fe077-82ad-424c-88a3-15e852b5861d" providerId="ADAL" clId="{8B7CB91F-10CE-42C2-B9B8-BFF2D3401655}" dt="2026-01-05T13:31:31.412" v="3779" actId="20577"/>
-          <ac:spMkLst>
-            <pc:docMk/>
-            <pc:sldMk cId="1692727651" sldId="306"/>
-            <ac:spMk id="2" creationId="{11157380-E6C6-BFA4-9C04-458C2CBB76E3}"/>
-          </ac:spMkLst>
-        </pc:spChg>
-        <pc:spChg chg="mod">
-          <ac:chgData name="Dominique RIGHETTO" userId="512fe077-82ad-424c-88a3-15e852b5861d" providerId="ADAL" clId="{8B7CB91F-10CE-42C2-B9B8-BFF2D3401655}" dt="2026-01-06T05:34:48.386" v="6641" actId="20577"/>
-          <ac:spMkLst>
-            <pc:docMk/>
-            <pc:sldMk cId="1692727651" sldId="306"/>
-            <ac:spMk id="3" creationId="{3891132A-A1FF-9CE4-2144-AF041DB3EBB3}"/>
-          </ac:spMkLst>
-        </pc:spChg>
-        <pc:picChg chg="del">
-          <ac:chgData name="Dominique RIGHETTO" userId="512fe077-82ad-424c-88a3-15e852b5861d" providerId="ADAL" clId="{8B7CB91F-10CE-42C2-B9B8-BFF2D3401655}" dt="2026-01-05T13:33:21.581" v="3904" actId="478"/>
-          <ac:picMkLst>
-            <pc:docMk/>
-            <pc:sldMk cId="1692727651" sldId="306"/>
-            <ac:picMk id="6" creationId="{DDB3C190-729A-F4E7-6478-4C100CDCEB0D}"/>
-          </ac:picMkLst>
-        </pc:picChg>
-      </pc:sldChg>
-      <pc:sldChg chg="addSp delSp modSp add mod">
-        <pc:chgData name="Dominique RIGHETTO" userId="512fe077-82ad-424c-88a3-15e852b5861d" providerId="ADAL" clId="{8B7CB91F-10CE-42C2-B9B8-BFF2D3401655}" dt="2026-01-05T14:41:36.204" v="4143" actId="14861"/>
-        <pc:sldMkLst>
-          <pc:docMk/>
-          <pc:sldMk cId="3958721667" sldId="307"/>
-        </pc:sldMkLst>
-        <pc:spChg chg="del">
-          <ac:chgData name="Dominique RIGHETTO" userId="512fe077-82ad-424c-88a3-15e852b5861d" providerId="ADAL" clId="{8B7CB91F-10CE-42C2-B9B8-BFF2D3401655}" dt="2026-01-05T14:40:34.348" v="4137" actId="478"/>
-          <ac:spMkLst>
-            <pc:docMk/>
-            <pc:sldMk cId="3958721667" sldId="307"/>
-            <ac:spMk id="3" creationId="{C0CC1EA4-5EDA-5F21-FF78-5DA844B609EB}"/>
-          </ac:spMkLst>
-        </pc:spChg>
-        <pc:spChg chg="add del mod">
-          <ac:chgData name="Dominique RIGHETTO" userId="512fe077-82ad-424c-88a3-15e852b5861d" providerId="ADAL" clId="{8B7CB91F-10CE-42C2-B9B8-BFF2D3401655}" dt="2026-01-05T14:40:37.832" v="4138" actId="478"/>
-          <ac:spMkLst>
-            <pc:docMk/>
-            <pc:sldMk cId="3958721667" sldId="307"/>
-            <ac:spMk id="5" creationId="{5B0D9699-5C21-4AB7-EBBF-5A4BB39B4F42}"/>
-          </ac:spMkLst>
-        </pc:spChg>
-        <pc:picChg chg="add mod">
-          <ac:chgData name="Dominique RIGHETTO" userId="512fe077-82ad-424c-88a3-15e852b5861d" providerId="ADAL" clId="{8B7CB91F-10CE-42C2-B9B8-BFF2D3401655}" dt="2026-01-05T14:41:36.204" v="4143" actId="14861"/>
-          <ac:picMkLst>
-            <pc:docMk/>
-            <pc:sldMk cId="3958721667" sldId="307"/>
-            <ac:picMk id="7" creationId="{1E8E8772-F4E3-6F5A-F5C5-E01FF188109F}"/>
-          </ac:picMkLst>
-        </pc:picChg>
-      </pc:sldChg>
-      <pc:sldChg chg="addSp delSp modSp add mod ord">
-        <pc:chgData name="Dominique RIGHETTO" userId="512fe077-82ad-424c-88a3-15e852b5861d" providerId="ADAL" clId="{8B7CB91F-10CE-42C2-B9B8-BFF2D3401655}" dt="2026-01-06T08:28:12.051" v="7781" actId="20577"/>
-        <pc:sldMkLst>
-          <pc:docMk/>
-          <pc:sldMk cId="2964034352" sldId="308"/>
-        </pc:sldMkLst>
-        <pc:spChg chg="mod">
-          <ac:chgData name="Dominique RIGHETTO" userId="512fe077-82ad-424c-88a3-15e852b5861d" providerId="ADAL" clId="{8B7CB91F-10CE-42C2-B9B8-BFF2D3401655}" dt="2026-01-05T14:50:16.554" v="4212" actId="20577"/>
-          <ac:spMkLst>
-            <pc:docMk/>
-            <pc:sldMk cId="2964034352" sldId="308"/>
-            <ac:spMk id="2" creationId="{315112D2-667A-5ACA-2D54-8841534A1F0B}"/>
-          </ac:spMkLst>
-        </pc:spChg>
-        <pc:spChg chg="mod">
-          <ac:chgData name="Dominique RIGHETTO" userId="512fe077-82ad-424c-88a3-15e852b5861d" providerId="ADAL" clId="{8B7CB91F-10CE-42C2-B9B8-BFF2D3401655}" dt="2026-01-06T08:28:12.051" v="7781" actId="20577"/>
-          <ac:spMkLst>
-            <pc:docMk/>
-            <pc:sldMk cId="2964034352" sldId="308"/>
-            <ac:spMk id="3" creationId="{A8F0DB80-3BA9-573F-68E4-4730BBA07D63}"/>
-          </ac:spMkLst>
-        </pc:spChg>
-        <pc:spChg chg="mod">
-          <ac:chgData name="Dominique RIGHETTO" userId="512fe077-82ad-424c-88a3-15e852b5861d" providerId="ADAL" clId="{8B7CB91F-10CE-42C2-B9B8-BFF2D3401655}" dt="2026-01-05T14:53:34.318" v="4230" actId="207"/>
-          <ac:spMkLst>
-            <pc:docMk/>
-            <pc:sldMk cId="2964034352" sldId="308"/>
-            <ac:spMk id="7" creationId="{57A1192D-9FD8-26B8-E303-C1AD3B37DEEE}"/>
-          </ac:spMkLst>
-        </pc:spChg>
-        <pc:picChg chg="add mod">
-          <ac:chgData name="Dominique RIGHETTO" userId="512fe077-82ad-424c-88a3-15e852b5861d" providerId="ADAL" clId="{8B7CB91F-10CE-42C2-B9B8-BFF2D3401655}" dt="2026-01-06T08:27:50.345" v="7777" actId="1036"/>
-          <ac:picMkLst>
-            <pc:docMk/>
-            <pc:sldMk cId="2964034352" sldId="308"/>
-            <ac:picMk id="5" creationId="{40913B38-1455-23B0-9894-4B7225F128A5}"/>
-          </ac:picMkLst>
-        </pc:picChg>
-        <pc:picChg chg="del">
-          <ac:chgData name="Dominique RIGHETTO" userId="512fe077-82ad-424c-88a3-15e852b5861d" providerId="ADAL" clId="{8B7CB91F-10CE-42C2-B9B8-BFF2D3401655}" dt="2026-01-05T14:52:51.224" v="4222" actId="478"/>
-          <ac:picMkLst>
-            <pc:docMk/>
-            <pc:sldMk cId="2964034352" sldId="308"/>
-            <ac:picMk id="6" creationId="{7B801C81-762A-D5EE-7DAD-6E34625E8A73}"/>
-          </ac:picMkLst>
-        </pc:picChg>
-      </pc:sldChg>
-      <pc:sldChg chg="addSp delSp modSp add mod ord">
-        <pc:chgData name="Dominique RIGHETTO" userId="512fe077-82ad-424c-88a3-15e852b5861d" providerId="ADAL" clId="{8B7CB91F-10CE-42C2-B9B8-BFF2D3401655}" dt="2026-01-05T15:21:18.865" v="4624" actId="14100"/>
-        <pc:sldMkLst>
-          <pc:docMk/>
-          <pc:sldMk cId="625439952" sldId="309"/>
-        </pc:sldMkLst>
-        <pc:spChg chg="mod">
-          <ac:chgData name="Dominique RIGHETTO" userId="512fe077-82ad-424c-88a3-15e852b5861d" providerId="ADAL" clId="{8B7CB91F-10CE-42C2-B9B8-BFF2D3401655}" dt="2026-01-05T14:59:21.621" v="4235" actId="20577"/>
-          <ac:spMkLst>
-            <pc:docMk/>
-            <pc:sldMk cId="625439952" sldId="309"/>
-            <ac:spMk id="2" creationId="{0F3B0007-69E6-BDDF-D1A7-F14E86700773}"/>
-          </ac:spMkLst>
-        </pc:spChg>
-        <pc:spChg chg="mod">
-          <ac:chgData name="Dominique RIGHETTO" userId="512fe077-82ad-424c-88a3-15e852b5861d" providerId="ADAL" clId="{8B7CB91F-10CE-42C2-B9B8-BFF2D3401655}" dt="2026-01-05T15:08:46.969" v="4555" actId="20577"/>
-          <ac:spMkLst>
-            <pc:docMk/>
-            <pc:sldMk cId="625439952" sldId="309"/>
-            <ac:spMk id="3" creationId="{278B57A3-956B-6E65-1863-5D3E5605B75E}"/>
-          </ac:spMkLst>
-        </pc:spChg>
-        <pc:spChg chg="del">
-          <ac:chgData name="Dominique RIGHETTO" userId="512fe077-82ad-424c-88a3-15e852b5861d" providerId="ADAL" clId="{8B7CB91F-10CE-42C2-B9B8-BFF2D3401655}" dt="2026-01-05T14:59:36.995" v="4244" actId="478"/>
-          <ac:spMkLst>
-            <pc:docMk/>
-            <pc:sldMk cId="625439952" sldId="309"/>
-            <ac:spMk id="7" creationId="{30A8EB54-950B-AE3D-6A7B-0D5A0E87E466}"/>
-          </ac:spMkLst>
-        </pc:spChg>
-        <pc:spChg chg="del">
-          <ac:chgData name="Dominique RIGHETTO" userId="512fe077-82ad-424c-88a3-15e852b5861d" providerId="ADAL" clId="{8B7CB91F-10CE-42C2-B9B8-BFF2D3401655}" dt="2026-01-05T14:59:33.876" v="4242" actId="478"/>
-          <ac:spMkLst>
-            <pc:docMk/>
-            <pc:sldMk cId="625439952" sldId="309"/>
-            <ac:spMk id="9" creationId="{61CA3FDA-0972-D95E-580C-1D7E1A643872}"/>
-          </ac:spMkLst>
-        </pc:spChg>
-        <pc:spChg chg="add mod">
-          <ac:chgData name="Dominique RIGHETTO" userId="512fe077-82ad-424c-88a3-15e852b5861d" providerId="ADAL" clId="{8B7CB91F-10CE-42C2-B9B8-BFF2D3401655}" dt="2026-01-05T15:19:11.214" v="4608" actId="20577"/>
-          <ac:spMkLst>
-            <pc:docMk/>
-            <pc:sldMk cId="625439952" sldId="309"/>
-            <ac:spMk id="10" creationId="{A7BFD8A7-ED6E-CB26-E0EE-5F2A6543B2BE}"/>
-          </ac:spMkLst>
-        </pc:spChg>
-        <pc:spChg chg="add mod ord">
-          <ac:chgData name="Dominique RIGHETTO" userId="512fe077-82ad-424c-88a3-15e852b5861d" providerId="ADAL" clId="{8B7CB91F-10CE-42C2-B9B8-BFF2D3401655}" dt="2026-01-05T15:21:18.865" v="4624" actId="14100"/>
-          <ac:spMkLst>
-            <pc:docMk/>
-            <pc:sldMk cId="625439952" sldId="309"/>
-            <ac:spMk id="12" creationId="{0364D1ED-1FFF-D3D7-3378-10C1EA44D21F}"/>
-          </ac:spMkLst>
-        </pc:spChg>
-        <pc:picChg chg="add del mod modCrop">
-          <ac:chgData name="Dominique RIGHETTO" userId="512fe077-82ad-424c-88a3-15e852b5861d" providerId="ADAL" clId="{8B7CB91F-10CE-42C2-B9B8-BFF2D3401655}" dt="2026-01-05T15:20:51.214" v="4614" actId="478"/>
-          <ac:picMkLst>
-            <pc:docMk/>
-            <pc:sldMk cId="625439952" sldId="309"/>
-            <ac:picMk id="5" creationId="{565F0C9E-6E6E-F1F9-48D7-936F32B20595}"/>
-          </ac:picMkLst>
-        </pc:picChg>
-        <pc:picChg chg="add mod">
-          <ac:chgData name="Dominique RIGHETTO" userId="512fe077-82ad-424c-88a3-15e852b5861d" providerId="ADAL" clId="{8B7CB91F-10CE-42C2-B9B8-BFF2D3401655}" dt="2026-01-05T15:07:11.046" v="4527"/>
-          <ac:picMkLst>
-            <pc:docMk/>
-            <pc:sldMk cId="625439952" sldId="309"/>
-            <ac:picMk id="6" creationId="{060D9616-7F41-3059-7EFF-243BEF9597F9}"/>
-          </ac:picMkLst>
-        </pc:picChg>
-        <pc:picChg chg="del">
-          <ac:chgData name="Dominique RIGHETTO" userId="512fe077-82ad-424c-88a3-15e852b5861d" providerId="ADAL" clId="{8B7CB91F-10CE-42C2-B9B8-BFF2D3401655}" dt="2026-01-05T14:59:32.356" v="4241" actId="478"/>
-          <ac:picMkLst>
-            <pc:docMk/>
-            <pc:sldMk cId="625439952" sldId="309"/>
-            <ac:picMk id="8" creationId="{A62A7847-7334-10FE-79FE-06D50DE8DBC4}"/>
-          </ac:picMkLst>
-        </pc:picChg>
-        <pc:picChg chg="del">
-          <ac:chgData name="Dominique RIGHETTO" userId="512fe077-82ad-424c-88a3-15e852b5861d" providerId="ADAL" clId="{8B7CB91F-10CE-42C2-B9B8-BFF2D3401655}" dt="2026-01-05T14:59:34.716" v="4243" actId="478"/>
-          <ac:picMkLst>
-            <pc:docMk/>
-            <pc:sldMk cId="625439952" sldId="309"/>
-            <ac:picMk id="11" creationId="{FF1A43D7-04AD-62F4-0529-434A05957678}"/>
-          </ac:picMkLst>
-        </pc:picChg>
-        <pc:picChg chg="add mod">
-          <ac:chgData name="Dominique RIGHETTO" userId="512fe077-82ad-424c-88a3-15e852b5861d" providerId="ADAL" clId="{8B7CB91F-10CE-42C2-B9B8-BFF2D3401655}" dt="2026-01-05T15:21:03.305" v="4619" actId="14100"/>
-          <ac:picMkLst>
-            <pc:docMk/>
-            <pc:sldMk cId="625439952" sldId="309"/>
-            <ac:picMk id="14" creationId="{6ECDF1AA-B65E-A525-23B4-1B6370788CE5}"/>
-          </ac:picMkLst>
-        </pc:picChg>
-      </pc:sldChg>
-      <pc:sldChg chg="addSp delSp modSp add mod ord">
-        <pc:chgData name="Dominique RIGHETTO" userId="512fe077-82ad-424c-88a3-15e852b5861d" providerId="ADAL" clId="{8B7CB91F-10CE-42C2-B9B8-BFF2D3401655}" dt="2026-01-06T05:36:49.580" v="6644" actId="20577"/>
-        <pc:sldMkLst>
-          <pc:docMk/>
-          <pc:sldMk cId="497681082" sldId="310"/>
-        </pc:sldMkLst>
-        <pc:spChg chg="mod">
-          <ac:chgData name="Dominique RIGHETTO" userId="512fe077-82ad-424c-88a3-15e852b5861d" providerId="ADAL" clId="{8B7CB91F-10CE-42C2-B9B8-BFF2D3401655}" dt="2026-01-05T15:01:47.219" v="4293" actId="20577"/>
-          <ac:spMkLst>
-            <pc:docMk/>
-            <pc:sldMk cId="497681082" sldId="310"/>
-            <ac:spMk id="2" creationId="{C48E3CF9-CB24-1DB0-A3CE-9DBCDE187153}"/>
-          </ac:spMkLst>
-        </pc:spChg>
-        <pc:spChg chg="mod">
-          <ac:chgData name="Dominique RIGHETTO" userId="512fe077-82ad-424c-88a3-15e852b5861d" providerId="ADAL" clId="{8B7CB91F-10CE-42C2-B9B8-BFF2D3401655}" dt="2026-01-06T05:36:49.580" v="6644" actId="20577"/>
-          <ac:spMkLst>
-            <pc:docMk/>
-            <pc:sldMk cId="497681082" sldId="310"/>
-            <ac:spMk id="3" creationId="{7724CFBE-895C-529D-962F-48F3B3F99C9A}"/>
-          </ac:spMkLst>
-        </pc:spChg>
-        <pc:picChg chg="add mod">
-          <ac:chgData name="Dominique RIGHETTO" userId="512fe077-82ad-424c-88a3-15e852b5861d" providerId="ADAL" clId="{8B7CB91F-10CE-42C2-B9B8-BFF2D3401655}" dt="2026-01-05T15:04:44.524" v="4517" actId="1076"/>
-          <ac:picMkLst>
-            <pc:docMk/>
-            <pc:sldMk cId="497681082" sldId="310"/>
-            <ac:picMk id="5" creationId="{98E7A59E-620D-AB2E-0ABE-776E5686CFD5}"/>
-          </ac:picMkLst>
-        </pc:picChg>
-        <pc:picChg chg="del">
-          <ac:chgData name="Dominique RIGHETTO" userId="512fe077-82ad-424c-88a3-15e852b5861d" providerId="ADAL" clId="{8B7CB91F-10CE-42C2-B9B8-BFF2D3401655}" dt="2026-01-05T15:03:32.051" v="4474" actId="478"/>
-          <ac:picMkLst>
-            <pc:docMk/>
-            <pc:sldMk cId="497681082" sldId="310"/>
-            <ac:picMk id="6" creationId="{CEF149A3-B6C9-B8F6-6621-F9AE4F7B490C}"/>
-          </ac:picMkLst>
-        </pc:picChg>
-      </pc:sldChg>
-      <pc:sldChg chg="addSp delSp modSp add mod">
-        <pc:chgData name="Dominique RIGHETTO" userId="512fe077-82ad-424c-88a3-15e852b5861d" providerId="ADAL" clId="{8B7CB91F-10CE-42C2-B9B8-BFF2D3401655}" dt="2026-01-05T15:19:26.609" v="4610" actId="1076"/>
-        <pc:sldMkLst>
-          <pc:docMk/>
-          <pc:sldMk cId="1502947638" sldId="311"/>
-        </pc:sldMkLst>
-        <pc:spChg chg="del">
-          <ac:chgData name="Dominique RIGHETTO" userId="512fe077-82ad-424c-88a3-15e852b5861d" providerId="ADAL" clId="{8B7CB91F-10CE-42C2-B9B8-BFF2D3401655}" dt="2026-01-05T15:07:19.483" v="4529" actId="478"/>
-          <ac:spMkLst>
-            <pc:docMk/>
-            <pc:sldMk cId="1502947638" sldId="311"/>
-            <ac:spMk id="3" creationId="{0A2D07C9-CB99-6D3B-F209-98AA779960A1}"/>
-          </ac:spMkLst>
-        </pc:spChg>
-        <pc:spChg chg="add del mod">
-          <ac:chgData name="Dominique RIGHETTO" userId="512fe077-82ad-424c-88a3-15e852b5861d" providerId="ADAL" clId="{8B7CB91F-10CE-42C2-B9B8-BFF2D3401655}" dt="2026-01-05T15:07:20.928" v="4530" actId="478"/>
-          <ac:spMkLst>
-            <pc:docMk/>
-            <pc:sldMk cId="1502947638" sldId="311"/>
-            <ac:spMk id="6" creationId="{F4DF2A68-AD91-9259-9EFD-F55BE655885D}"/>
-          </ac:spMkLst>
-        </pc:spChg>
-        <pc:picChg chg="del">
-          <ac:chgData name="Dominique RIGHETTO" userId="512fe077-82ad-424c-88a3-15e852b5861d" providerId="ADAL" clId="{8B7CB91F-10CE-42C2-B9B8-BFF2D3401655}" dt="2026-01-05T15:07:21.789" v="4531" actId="478"/>
-          <ac:picMkLst>
-            <pc:docMk/>
-            <pc:sldMk cId="1502947638" sldId="311"/>
-            <ac:picMk id="5" creationId="{9D05FDD9-2189-4212-83A0-3FB54DAABE3D}"/>
-          </ac:picMkLst>
-        </pc:picChg>
-        <pc:picChg chg="add del mod modCrop">
-          <ac:chgData name="Dominique RIGHETTO" userId="512fe077-82ad-424c-88a3-15e852b5861d" providerId="ADAL" clId="{8B7CB91F-10CE-42C2-B9B8-BFF2D3401655}" dt="2026-01-05T15:17:00.266" v="4580" actId="478"/>
-          <ac:picMkLst>
-            <pc:docMk/>
-            <pc:sldMk cId="1502947638" sldId="311"/>
-            <ac:picMk id="8" creationId="{6B0BB634-23C3-A70A-54AC-D138D5B822EA}"/>
-          </ac:picMkLst>
-        </pc:picChg>
-        <pc:picChg chg="add mod modCrop">
-          <ac:chgData name="Dominique RIGHETTO" userId="512fe077-82ad-424c-88a3-15e852b5861d" providerId="ADAL" clId="{8B7CB91F-10CE-42C2-B9B8-BFF2D3401655}" dt="2026-01-05T15:19:26.609" v="4610" actId="1076"/>
-          <ac:picMkLst>
-            <pc:docMk/>
-            <pc:sldMk cId="1502947638" sldId="311"/>
-            <ac:picMk id="10" creationId="{C676507D-8D55-F03F-60D5-6EA1D309D23F}"/>
-          </ac:picMkLst>
-        </pc:picChg>
-        <pc:picChg chg="add mod">
-          <ac:chgData name="Dominique RIGHETTO" userId="512fe077-82ad-424c-88a3-15e852b5861d" providerId="ADAL" clId="{8B7CB91F-10CE-42C2-B9B8-BFF2D3401655}" dt="2026-01-05T15:19:23.010" v="4609" actId="1076"/>
-          <ac:picMkLst>
-            <pc:docMk/>
-            <pc:sldMk cId="1502947638" sldId="311"/>
-            <ac:picMk id="12" creationId="{7029D462-864D-D455-3E8C-2BC297238028}"/>
-          </ac:picMkLst>
-        </pc:picChg>
-      </pc:sldChg>
-      <pc:sldChg chg="addSp delSp modSp add del mod">
-        <pc:chgData name="Dominique RIGHETTO" userId="512fe077-82ad-424c-88a3-15e852b5861d" providerId="ADAL" clId="{8B7CB91F-10CE-42C2-B9B8-BFF2D3401655}" dt="2026-01-05T15:22:10.947" v="4625" actId="47"/>
-        <pc:sldMkLst>
-          <pc:docMk/>
-          <pc:sldMk cId="417307664" sldId="312"/>
-        </pc:sldMkLst>
-        <pc:picChg chg="add del mod">
-          <ac:chgData name="Dominique RIGHETTO" userId="512fe077-82ad-424c-88a3-15e852b5861d" providerId="ADAL" clId="{8B7CB91F-10CE-42C2-B9B8-BFF2D3401655}" dt="2026-01-05T15:09:55.101" v="4556" actId="478"/>
-          <ac:picMkLst>
-            <pc:docMk/>
-            <pc:sldMk cId="417307664" sldId="312"/>
-            <ac:picMk id="4" creationId="{F09F7F5E-ADAB-2E25-FA07-EC95D2B68FDE}"/>
-          </ac:picMkLst>
-        </pc:picChg>
-        <pc:picChg chg="del">
-          <ac:chgData name="Dominique RIGHETTO" userId="512fe077-82ad-424c-88a3-15e852b5861d" providerId="ADAL" clId="{8B7CB91F-10CE-42C2-B9B8-BFF2D3401655}" dt="2026-01-05T15:08:25.100" v="4539" actId="478"/>
-          <ac:picMkLst>
-            <pc:docMk/>
-            <pc:sldMk cId="417307664" sldId="312"/>
-            <ac:picMk id="8" creationId="{34F69B83-5398-119C-60A6-C14965AA410B}"/>
-          </ac:picMkLst>
-        </pc:picChg>
-      </pc:sldChg>
-      <pc:sldChg chg="addSp delSp modSp add mod ord">
-        <pc:chgData name="Dominique RIGHETTO" userId="512fe077-82ad-424c-88a3-15e852b5861d" providerId="ADAL" clId="{8B7CB91F-10CE-42C2-B9B8-BFF2D3401655}" dt="2026-01-05T15:49:14.065" v="4755" actId="14861"/>
-        <pc:sldMkLst>
-          <pc:docMk/>
-          <pc:sldMk cId="750126829" sldId="312"/>
-        </pc:sldMkLst>
-        <pc:spChg chg="mod">
-          <ac:chgData name="Dominique RIGHETTO" userId="512fe077-82ad-424c-88a3-15e852b5861d" providerId="ADAL" clId="{8B7CB91F-10CE-42C2-B9B8-BFF2D3401655}" dt="2026-01-05T15:23:31.737" v="4665" actId="20577"/>
-          <ac:spMkLst>
-            <pc:docMk/>
-            <pc:sldMk cId="750126829" sldId="312"/>
-            <ac:spMk id="2" creationId="{98F14790-074C-95E2-C4EF-910EA1CD2AF1}"/>
-          </ac:spMkLst>
-        </pc:spChg>
-        <pc:spChg chg="mod">
-          <ac:chgData name="Dominique RIGHETTO" userId="512fe077-82ad-424c-88a3-15e852b5861d" providerId="ADAL" clId="{8B7CB91F-10CE-42C2-B9B8-BFF2D3401655}" dt="2026-01-05T15:24:03.038" v="4748" actId="20577"/>
-          <ac:spMkLst>
-            <pc:docMk/>
-            <pc:sldMk cId="750126829" sldId="312"/>
-            <ac:spMk id="3" creationId="{BE28F0C4-9907-93B2-D5DA-46FB3B31BFBF}"/>
-          </ac:spMkLst>
-        </pc:spChg>
-        <pc:spChg chg="mod">
-          <ac:chgData name="Dominique RIGHETTO" userId="512fe077-82ad-424c-88a3-15e852b5861d" providerId="ADAL" clId="{8B7CB91F-10CE-42C2-B9B8-BFF2D3401655}" dt="2026-01-05T15:24:29.591" v="4751" actId="207"/>
-          <ac:spMkLst>
-            <pc:docMk/>
-            <pc:sldMk cId="750126829" sldId="312"/>
-            <ac:spMk id="7" creationId="{BA798E0F-45CC-AAFD-85E7-A216053474BA}"/>
-          </ac:spMkLst>
-        </pc:spChg>
-        <pc:picChg chg="del">
-          <ac:chgData name="Dominique RIGHETTO" userId="512fe077-82ad-424c-88a3-15e852b5861d" providerId="ADAL" clId="{8B7CB91F-10CE-42C2-B9B8-BFF2D3401655}" dt="2026-01-05T15:23:34.457" v="4666" actId="478"/>
-          <ac:picMkLst>
-            <pc:docMk/>
-            <pc:sldMk cId="750126829" sldId="312"/>
-            <ac:picMk id="5" creationId="{F4CE89E5-16AC-4C09-B9BF-3738906E7E27}"/>
-          </ac:picMkLst>
-        </pc:picChg>
-        <pc:picChg chg="add mod">
-          <ac:chgData name="Dominique RIGHETTO" userId="512fe077-82ad-424c-88a3-15e852b5861d" providerId="ADAL" clId="{8B7CB91F-10CE-42C2-B9B8-BFF2D3401655}" dt="2026-01-05T15:49:14.065" v="4755" actId="14861"/>
-          <ac:picMkLst>
-            <pc:docMk/>
-            <pc:sldMk cId="750126829" sldId="312"/>
-            <ac:picMk id="6" creationId="{A12CF8EB-E28E-6000-70F9-43E20A4527EC}"/>
-          </ac:picMkLst>
-        </pc:picChg>
-      </pc:sldChg>
-      <pc:sldChg chg="addSp delSp modSp add mod ord">
-        <pc:chgData name="Dominique RIGHETTO" userId="512fe077-82ad-424c-88a3-15e852b5861d" providerId="ADAL" clId="{8B7CB91F-10CE-42C2-B9B8-BFF2D3401655}" dt="2026-01-05T18:54:55.317" v="4891" actId="20577"/>
-        <pc:sldMkLst>
-          <pc:docMk/>
-          <pc:sldMk cId="1989195103" sldId="313"/>
-        </pc:sldMkLst>
-        <pc:spChg chg="mod">
-          <ac:chgData name="Dominique RIGHETTO" userId="512fe077-82ad-424c-88a3-15e852b5861d" providerId="ADAL" clId="{8B7CB91F-10CE-42C2-B9B8-BFF2D3401655}" dt="2026-01-05T15:50:13.653" v="4776" actId="20577"/>
-          <ac:spMkLst>
-            <pc:docMk/>
-            <pc:sldMk cId="1989195103" sldId="313"/>
-            <ac:spMk id="2" creationId="{C57B4822-73D2-F2DE-4902-BDBAB052CFDC}"/>
-          </ac:spMkLst>
-        </pc:spChg>
-        <pc:spChg chg="mod">
-          <ac:chgData name="Dominique RIGHETTO" userId="512fe077-82ad-424c-88a3-15e852b5861d" providerId="ADAL" clId="{8B7CB91F-10CE-42C2-B9B8-BFF2D3401655}" dt="2026-01-05T18:54:55.317" v="4891" actId="20577"/>
-          <ac:spMkLst>
-            <pc:docMk/>
-            <pc:sldMk cId="1989195103" sldId="313"/>
-            <ac:spMk id="3" creationId="{2BDD3EBC-02D0-7D15-A14C-72BB94993CF4}"/>
-          </ac:spMkLst>
-        </pc:spChg>
-        <pc:spChg chg="add mod">
-          <ac:chgData name="Dominique RIGHETTO" userId="512fe077-82ad-424c-88a3-15e852b5861d" providerId="ADAL" clId="{8B7CB91F-10CE-42C2-B9B8-BFF2D3401655}" dt="2026-01-05T18:49:41.910" v="4852" actId="20577"/>
-          <ac:spMkLst>
-            <pc:docMk/>
-            <pc:sldMk cId="1989195103" sldId="313"/>
-            <ac:spMk id="8" creationId="{1FC012AD-54A8-0E2D-355E-196E7ABD39BA}"/>
-          </ac:spMkLst>
-        </pc:spChg>
-        <pc:spChg chg="add mod">
-          <ac:chgData name="Dominique RIGHETTO" userId="512fe077-82ad-424c-88a3-15e852b5861d" providerId="ADAL" clId="{8B7CB91F-10CE-42C2-B9B8-BFF2D3401655}" dt="2026-01-05T18:50:02.128" v="4854" actId="1076"/>
-          <ac:spMkLst>
-            <pc:docMk/>
-            <pc:sldMk cId="1989195103" sldId="313"/>
-            <ac:spMk id="9" creationId="{B344369E-E6FB-4C1E-1CE7-D07FCE314B8B}"/>
-          </ac:spMkLst>
-        </pc:spChg>
-        <pc:spChg chg="del">
-          <ac:chgData name="Dominique RIGHETTO" userId="512fe077-82ad-424c-88a3-15e852b5861d" providerId="ADAL" clId="{8B7CB91F-10CE-42C2-B9B8-BFF2D3401655}" dt="2026-01-05T15:50:04.100" v="4770" actId="478"/>
-          <ac:spMkLst>
-            <pc:docMk/>
-            <pc:sldMk cId="1989195103" sldId="313"/>
-            <ac:spMk id="10" creationId="{3F184BA4-1FB2-84AE-360A-E469D75A8F7A}"/>
-          </ac:spMkLst>
-        </pc:spChg>
-        <pc:spChg chg="del">
-          <ac:chgData name="Dominique RIGHETTO" userId="512fe077-82ad-424c-88a3-15e852b5861d" providerId="ADAL" clId="{8B7CB91F-10CE-42C2-B9B8-BFF2D3401655}" dt="2026-01-05T15:50:02.238" v="4769" actId="478"/>
-          <ac:spMkLst>
-            <pc:docMk/>
-            <pc:sldMk cId="1989195103" sldId="313"/>
-            <ac:spMk id="12" creationId="{CECE5D38-4E4A-B501-5C10-170C135016C1}"/>
-          </ac:spMkLst>
-        </pc:spChg>
-        <pc:picChg chg="add del mod">
-          <ac:chgData name="Dominique RIGHETTO" userId="512fe077-82ad-424c-88a3-15e852b5861d" providerId="ADAL" clId="{8B7CB91F-10CE-42C2-B9B8-BFF2D3401655}" dt="2026-01-05T18:48:58.262" v="4846" actId="478"/>
-          <ac:picMkLst>
-            <pc:docMk/>
-            <pc:sldMk cId="1989195103" sldId="313"/>
-            <ac:picMk id="5" creationId="{251DF939-D23F-C64D-89CC-9ABDA3A291AD}"/>
-          </ac:picMkLst>
-        </pc:picChg>
-        <pc:picChg chg="add mod">
-          <ac:chgData name="Dominique RIGHETTO" userId="512fe077-82ad-424c-88a3-15e852b5861d" providerId="ADAL" clId="{8B7CB91F-10CE-42C2-B9B8-BFF2D3401655}" dt="2026-01-05T18:49:10.475" v="4849" actId="14861"/>
-          <ac:picMkLst>
-            <pc:docMk/>
-            <pc:sldMk cId="1989195103" sldId="313"/>
-            <ac:picMk id="7" creationId="{D90CE54D-015D-D2E7-CC34-1D4FB470868E}"/>
-          </ac:picMkLst>
-        </pc:picChg>
-        <pc:picChg chg="del">
-          <ac:chgData name="Dominique RIGHETTO" userId="512fe077-82ad-424c-88a3-15e852b5861d" providerId="ADAL" clId="{8B7CB91F-10CE-42C2-B9B8-BFF2D3401655}" dt="2026-01-05T15:50:00.941" v="4768" actId="478"/>
-          <ac:picMkLst>
-            <pc:docMk/>
-            <pc:sldMk cId="1989195103" sldId="313"/>
-            <ac:picMk id="14" creationId="{B9C54380-54CA-94C8-BF91-239A1FF95C15}"/>
-          </ac:picMkLst>
-        </pc:picChg>
-      </pc:sldChg>
-      <pc:sldChg chg="addSp delSp modSp add mod">
-        <pc:chgData name="Dominique RIGHETTO" userId="512fe077-82ad-424c-88a3-15e852b5861d" providerId="ADAL" clId="{8B7CB91F-10CE-42C2-B9B8-BFF2D3401655}" dt="2026-01-06T05:38:36.350" v="6650" actId="1076"/>
-        <pc:sldMkLst>
-          <pc:docMk/>
-          <pc:sldMk cId="2209675377" sldId="314"/>
-        </pc:sldMkLst>
-        <pc:spChg chg="del">
-          <ac:chgData name="Dominique RIGHETTO" userId="512fe077-82ad-424c-88a3-15e852b5861d" providerId="ADAL" clId="{8B7CB91F-10CE-42C2-B9B8-BFF2D3401655}" dt="2026-01-05T18:50:18.439" v="4860" actId="478"/>
-          <ac:spMkLst>
-            <pc:docMk/>
-            <pc:sldMk cId="2209675377" sldId="314"/>
-            <ac:spMk id="3" creationId="{269847B8-204B-61C4-4D3B-1BB9A8B7FFB3}"/>
-          </ac:spMkLst>
-        </pc:spChg>
-        <pc:spChg chg="add del mod">
-          <ac:chgData name="Dominique RIGHETTO" userId="512fe077-82ad-424c-88a3-15e852b5861d" providerId="ADAL" clId="{8B7CB91F-10CE-42C2-B9B8-BFF2D3401655}" dt="2026-01-05T18:50:20.851" v="4861" actId="478"/>
-          <ac:spMkLst>
-            <pc:docMk/>
-            <pc:sldMk cId="2209675377" sldId="314"/>
-            <ac:spMk id="6" creationId="{7758ABBA-5D87-FEB6-B999-0187C1EC96F6}"/>
-          </ac:spMkLst>
-        </pc:spChg>
-        <pc:picChg chg="mod modCrop">
-          <ac:chgData name="Dominique RIGHETTO" userId="512fe077-82ad-424c-88a3-15e852b5861d" providerId="ADAL" clId="{8B7CB91F-10CE-42C2-B9B8-BFF2D3401655}" dt="2026-01-06T05:38:36.350" v="6650" actId="1076"/>
-          <ac:picMkLst>
-            <pc:docMk/>
-            <pc:sldMk cId="2209675377" sldId="314"/>
-            <ac:picMk id="5" creationId="{7580EC70-E5DC-BD03-7AAC-61D4590B2495}"/>
-          </ac:picMkLst>
-        </pc:picChg>
-        <pc:picChg chg="del">
-          <ac:chgData name="Dominique RIGHETTO" userId="512fe077-82ad-424c-88a3-15e852b5861d" providerId="ADAL" clId="{8B7CB91F-10CE-42C2-B9B8-BFF2D3401655}" dt="2026-01-05T18:50:25.758" v="4862" actId="478"/>
-          <ac:picMkLst>
-            <pc:docMk/>
-            <pc:sldMk cId="2209675377" sldId="314"/>
-            <ac:picMk id="7" creationId="{3FBCE1C9-982A-00CA-A415-920004810D40}"/>
-          </ac:picMkLst>
-        </pc:picChg>
-        <pc:picChg chg="add mod">
-          <ac:chgData name="Dominique RIGHETTO" userId="512fe077-82ad-424c-88a3-15e852b5861d" providerId="ADAL" clId="{8B7CB91F-10CE-42C2-B9B8-BFF2D3401655}" dt="2026-01-06T05:38:34.061" v="6649" actId="1076"/>
-          <ac:picMkLst>
-            <pc:docMk/>
-            <pc:sldMk cId="2209675377" sldId="314"/>
-            <ac:picMk id="9" creationId="{DF5BA790-A478-9E59-5252-277F6D7E87F2}"/>
-          </ac:picMkLst>
-        </pc:picChg>
-      </pc:sldChg>
-      <pc:sldChg chg="addSp delSp modSp add mod">
-        <pc:chgData name="Dominique RIGHETTO" userId="512fe077-82ad-424c-88a3-15e852b5861d" providerId="ADAL" clId="{8B7CB91F-10CE-42C2-B9B8-BFF2D3401655}" dt="2026-01-06T05:38:47.086" v="6652" actId="1076"/>
-        <pc:sldMkLst>
-          <pc:docMk/>
-          <pc:sldMk cId="2163192230" sldId="315"/>
-        </pc:sldMkLst>
-        <pc:picChg chg="add mod">
-          <ac:chgData name="Dominique RIGHETTO" userId="512fe077-82ad-424c-88a3-15e852b5861d" providerId="ADAL" clId="{8B7CB91F-10CE-42C2-B9B8-BFF2D3401655}" dt="2026-01-06T05:38:47.086" v="6652" actId="1076"/>
-          <ac:picMkLst>
-            <pc:docMk/>
-            <pc:sldMk cId="2163192230" sldId="315"/>
-            <ac:picMk id="4" creationId="{4A9FB248-C4F7-C526-7156-99FBE75905B9}"/>
-          </ac:picMkLst>
-        </pc:picChg>
-        <pc:picChg chg="del mod modCrop">
-          <ac:chgData name="Dominique RIGHETTO" userId="512fe077-82ad-424c-88a3-15e852b5861d" providerId="ADAL" clId="{8B7CB91F-10CE-42C2-B9B8-BFF2D3401655}" dt="2026-01-05T18:54:30.227" v="4884" actId="478"/>
-          <ac:picMkLst>
-            <pc:docMk/>
-            <pc:sldMk cId="2163192230" sldId="315"/>
-            <ac:picMk id="5" creationId="{2941E2C1-7FEF-C61F-C59E-976946552185}"/>
-          </ac:picMkLst>
-        </pc:picChg>
-        <pc:picChg chg="add mod">
-          <ac:chgData name="Dominique RIGHETTO" userId="512fe077-82ad-424c-88a3-15e852b5861d" providerId="ADAL" clId="{8B7CB91F-10CE-42C2-B9B8-BFF2D3401655}" dt="2026-01-06T05:38:44.975" v="6651" actId="1076"/>
-          <ac:picMkLst>
-            <pc:docMk/>
-            <pc:sldMk cId="2163192230" sldId="315"/>
-            <ac:picMk id="7" creationId="{B2BC0267-92B8-9376-BAF7-8D773C495E70}"/>
-          </ac:picMkLst>
-        </pc:picChg>
-        <pc:picChg chg="del">
-          <ac:chgData name="Dominique RIGHETTO" userId="512fe077-82ad-424c-88a3-15e852b5861d" providerId="ADAL" clId="{8B7CB91F-10CE-42C2-B9B8-BFF2D3401655}" dt="2026-01-05T18:53:12.515" v="4872" actId="478"/>
-          <ac:picMkLst>
-            <pc:docMk/>
-            <pc:sldMk cId="2163192230" sldId="315"/>
-            <ac:picMk id="9" creationId="{B9D47639-E7A8-7462-9065-6BB1F1675C6A}"/>
-          </ac:picMkLst>
-        </pc:picChg>
-      </pc:sldChg>
-      <pc:sldChg chg="addSp delSp modSp add mod ord">
-        <pc:chgData name="Dominique RIGHETTO" userId="512fe077-82ad-424c-88a3-15e852b5861d" providerId="ADAL" clId="{8B7CB91F-10CE-42C2-B9B8-BFF2D3401655}" dt="2026-01-06T08:40:31.483" v="7813" actId="732"/>
-        <pc:sldMkLst>
-          <pc:docMk/>
-          <pc:sldMk cId="3966777535" sldId="316"/>
-        </pc:sldMkLst>
-        <pc:spChg chg="mod">
-          <ac:chgData name="Dominique RIGHETTO" userId="512fe077-82ad-424c-88a3-15e852b5861d" providerId="ADAL" clId="{8B7CB91F-10CE-42C2-B9B8-BFF2D3401655}" dt="2026-01-05T18:55:58.138" v="4896" actId="20577"/>
-          <ac:spMkLst>
-            <pc:docMk/>
-            <pc:sldMk cId="3966777535" sldId="316"/>
-            <ac:spMk id="2" creationId="{CD2756DE-81FF-0B4A-F059-A06C9ACD2CB4}"/>
-          </ac:spMkLst>
-        </pc:spChg>
-        <pc:spChg chg="mod">
-          <ac:chgData name="Dominique RIGHETTO" userId="512fe077-82ad-424c-88a3-15e852b5861d" providerId="ADAL" clId="{8B7CB91F-10CE-42C2-B9B8-BFF2D3401655}" dt="2026-01-06T05:39:32.613" v="6655" actId="20577"/>
-          <ac:spMkLst>
-            <pc:docMk/>
-            <pc:sldMk cId="3966777535" sldId="316"/>
-            <ac:spMk id="3" creationId="{ADE63D71-25FB-998D-9333-7E6F3F474244}"/>
-          </ac:spMkLst>
-        </pc:spChg>
-        <pc:picChg chg="add mod modCrop">
-          <ac:chgData name="Dominique RIGHETTO" userId="512fe077-82ad-424c-88a3-15e852b5861d" providerId="ADAL" clId="{8B7CB91F-10CE-42C2-B9B8-BFF2D3401655}" dt="2026-01-06T08:40:31.483" v="7813" actId="732"/>
-          <ac:picMkLst>
-            <pc:docMk/>
-            <pc:sldMk cId="3966777535" sldId="316"/>
-            <ac:picMk id="5" creationId="{0FAD840C-E7B9-94FC-95FB-1B1D586F6B29}"/>
-          </ac:picMkLst>
-        </pc:picChg>
-        <pc:picChg chg="del">
-          <ac:chgData name="Dominique RIGHETTO" userId="512fe077-82ad-424c-88a3-15e852b5861d" providerId="ADAL" clId="{8B7CB91F-10CE-42C2-B9B8-BFF2D3401655}" dt="2026-01-05T19:00:10.921" v="5245" actId="478"/>
-          <ac:picMkLst>
-            <pc:docMk/>
-            <pc:sldMk cId="3966777535" sldId="316"/>
-            <ac:picMk id="5" creationId="{EDD11653-2EF6-3D7B-7118-D105BDA3FBE9}"/>
-          </ac:picMkLst>
-        </pc:picChg>
-        <pc:picChg chg="add del mod">
-          <ac:chgData name="Dominique RIGHETTO" userId="512fe077-82ad-424c-88a3-15e852b5861d" providerId="ADAL" clId="{8B7CB91F-10CE-42C2-B9B8-BFF2D3401655}" dt="2026-01-05T19:25:36.791" v="5485" actId="478"/>
-          <ac:picMkLst>
-            <pc:docMk/>
-            <pc:sldMk cId="3966777535" sldId="316"/>
-            <ac:picMk id="6" creationId="{258DCFD8-3029-6059-E6DA-D512978327F6}"/>
-          </ac:picMkLst>
-        </pc:picChg>
-        <pc:picChg chg="add del mod">
-          <ac:chgData name="Dominique RIGHETTO" userId="512fe077-82ad-424c-88a3-15e852b5861d" providerId="ADAL" clId="{8B7CB91F-10CE-42C2-B9B8-BFF2D3401655}" dt="2026-01-05T19:33:18.012" v="5491" actId="478"/>
-          <ac:picMkLst>
-            <pc:docMk/>
-            <pc:sldMk cId="3966777535" sldId="316"/>
-            <ac:picMk id="8" creationId="{727ADC83-6FCF-CA31-30A0-15CB67B5853C}"/>
-          </ac:picMkLst>
-        </pc:picChg>
-        <pc:picChg chg="add del mod">
-          <ac:chgData name="Dominique RIGHETTO" userId="512fe077-82ad-424c-88a3-15e852b5861d" providerId="ADAL" clId="{8B7CB91F-10CE-42C2-B9B8-BFF2D3401655}" dt="2026-01-06T08:40:16.497" v="7808" actId="478"/>
-          <ac:picMkLst>
-            <pc:docMk/>
-            <pc:sldMk cId="3966777535" sldId="316"/>
-            <ac:picMk id="10" creationId="{725A494E-EB8B-111F-7855-2CCD852CD0DF}"/>
-          </ac:picMkLst>
-        </pc:picChg>
-      </pc:sldChg>
-      <pc:sldChg chg="addSp delSp modSp add mod ord">
-        <pc:chgData name="Dominique RIGHETTO" userId="512fe077-82ad-424c-88a3-15e852b5861d" providerId="ADAL" clId="{8B7CB91F-10CE-42C2-B9B8-BFF2D3401655}" dt="2026-01-06T06:02:24.603" v="6847" actId="20577"/>
-        <pc:sldMkLst>
-          <pc:docMk/>
-          <pc:sldMk cId="1987946601" sldId="317"/>
-        </pc:sldMkLst>
-        <pc:spChg chg="mod">
-          <ac:chgData name="Dominique RIGHETTO" userId="512fe077-82ad-424c-88a3-15e852b5861d" providerId="ADAL" clId="{8B7CB91F-10CE-42C2-B9B8-BFF2D3401655}" dt="2026-01-05T19:01:12.458" v="5255" actId="20577"/>
-          <ac:spMkLst>
-            <pc:docMk/>
-            <pc:sldMk cId="1987946601" sldId="317"/>
-            <ac:spMk id="2" creationId="{61F534F7-7EB6-BD99-0561-2DB58B39C6E1}"/>
-          </ac:spMkLst>
-        </pc:spChg>
-        <pc:spChg chg="mod">
-          <ac:chgData name="Dominique RIGHETTO" userId="512fe077-82ad-424c-88a3-15e852b5861d" providerId="ADAL" clId="{8B7CB91F-10CE-42C2-B9B8-BFF2D3401655}" dt="2026-01-06T06:02:24.603" v="6847" actId="20577"/>
-          <ac:spMkLst>
-            <pc:docMk/>
-            <pc:sldMk cId="1987946601" sldId="317"/>
-            <ac:spMk id="3" creationId="{4E0F90F3-7544-C418-90D2-046A579AEC6B}"/>
-          </ac:spMkLst>
-        </pc:spChg>
-        <pc:spChg chg="mod">
-          <ac:chgData name="Dominique RIGHETTO" userId="512fe077-82ad-424c-88a3-15e852b5861d" providerId="ADAL" clId="{8B7CB91F-10CE-42C2-B9B8-BFF2D3401655}" dt="2026-01-05T19:02:46.058" v="5403" actId="20577"/>
-          <ac:spMkLst>
-            <pc:docMk/>
-            <pc:sldMk cId="1987946601" sldId="317"/>
-            <ac:spMk id="7" creationId="{282F7DF4-9D6F-8286-D290-A040B93FEFAB}"/>
-          </ac:spMkLst>
-        </pc:spChg>
-        <pc:picChg chg="add del mod">
-          <ac:chgData name="Dominique RIGHETTO" userId="512fe077-82ad-424c-88a3-15e852b5861d" providerId="ADAL" clId="{8B7CB91F-10CE-42C2-B9B8-BFF2D3401655}" dt="2026-01-05T19:37:10.204" v="5505" actId="478"/>
-          <ac:picMkLst>
-            <pc:docMk/>
-            <pc:sldMk cId="1987946601" sldId="317"/>
-            <ac:picMk id="5" creationId="{54752D20-AEC0-8F43-695B-6AC911942ADE}"/>
-          </ac:picMkLst>
-        </pc:picChg>
-        <pc:picChg chg="del">
-          <ac:chgData name="Dominique RIGHETTO" userId="512fe077-82ad-424c-88a3-15e852b5861d" providerId="ADAL" clId="{8B7CB91F-10CE-42C2-B9B8-BFF2D3401655}" dt="2026-01-05T19:02:40.994" v="5401" actId="478"/>
-          <ac:picMkLst>
-            <pc:docMk/>
-            <pc:sldMk cId="1987946601" sldId="317"/>
-            <ac:picMk id="6" creationId="{291BD7F8-2321-828F-3308-367D5F45097B}"/>
-          </ac:picMkLst>
-        </pc:picChg>
-      </pc:sldChg>
-      <pc:sldChg chg="addSp delSp modSp add del mod">
-        <pc:chgData name="Dominique RIGHETTO" userId="512fe077-82ad-424c-88a3-15e852b5861d" providerId="ADAL" clId="{8B7CB91F-10CE-42C2-B9B8-BFF2D3401655}" dt="2026-01-05T19:37:39.794" v="5513" actId="47"/>
-        <pc:sldMkLst>
-          <pc:docMk/>
-          <pc:sldMk cId="2737521458" sldId="318"/>
-        </pc:sldMkLst>
-        <pc:spChg chg="del">
-          <ac:chgData name="Dominique RIGHETTO" userId="512fe077-82ad-424c-88a3-15e852b5861d" providerId="ADAL" clId="{8B7CB91F-10CE-42C2-B9B8-BFF2D3401655}" dt="2026-01-05T19:36:57.690" v="5500" actId="478"/>
-          <ac:spMkLst>
-            <pc:docMk/>
-            <pc:sldMk cId="2737521458" sldId="318"/>
-            <ac:spMk id="3" creationId="{9BBD30AA-FB9A-2E9C-9926-10E00E6B79B8}"/>
-          </ac:spMkLst>
-        </pc:spChg>
-        <pc:spChg chg="add del mod">
-          <ac:chgData name="Dominique RIGHETTO" userId="512fe077-82ad-424c-88a3-15e852b5861d" providerId="ADAL" clId="{8B7CB91F-10CE-42C2-B9B8-BFF2D3401655}" dt="2026-01-05T19:37:00.638" v="5501" actId="478"/>
-          <ac:spMkLst>
-            <pc:docMk/>
-            <pc:sldMk cId="2737521458" sldId="318"/>
-            <ac:spMk id="6" creationId="{AC85CF5B-37E0-D94B-54F2-E04E6EF9CF47}"/>
-          </ac:spMkLst>
-        </pc:spChg>
-        <pc:picChg chg="mod">
-          <ac:chgData name="Dominique RIGHETTO" userId="512fe077-82ad-424c-88a3-15e852b5861d" providerId="ADAL" clId="{8B7CB91F-10CE-42C2-B9B8-BFF2D3401655}" dt="2026-01-05T19:37:06.717" v="5504" actId="1076"/>
-          <ac:picMkLst>
-            <pc:docMk/>
-            <pc:sldMk cId="2737521458" sldId="318"/>
-            <ac:picMk id="5" creationId="{32A60881-D4FA-7677-C052-6B931C0FE123}"/>
-          </ac:picMkLst>
-        </pc:picChg>
-      </pc:sldChg>
-      <pc:sldChg chg="addSp delSp modSp add mod modAnim">
-        <pc:chgData name="Dominique RIGHETTO" userId="512fe077-82ad-424c-88a3-15e852b5861d" providerId="ADAL" clId="{8B7CB91F-10CE-42C2-B9B8-BFF2D3401655}" dt="2026-01-06T06:06:01.276" v="6868" actId="33524"/>
-        <pc:sldMkLst>
-          <pc:docMk/>
-          <pc:sldMk cId="261788013" sldId="319"/>
-        </pc:sldMkLst>
-        <pc:spChg chg="mod">
-          <ac:chgData name="Dominique RIGHETTO" userId="512fe077-82ad-424c-88a3-15e852b5861d" providerId="ADAL" clId="{8B7CB91F-10CE-42C2-B9B8-BFF2D3401655}" dt="2026-01-06T05:06:23.709" v="5556" actId="20577"/>
-          <ac:spMkLst>
-            <pc:docMk/>
-            <pc:sldMk cId="261788013" sldId="319"/>
-            <ac:spMk id="2" creationId="{D4364BF5-2AAB-E072-15D0-CBDC9202657D}"/>
-          </ac:spMkLst>
-        </pc:spChg>
-        <pc:spChg chg="mod">
-          <ac:chgData name="Dominique RIGHETTO" userId="512fe077-82ad-424c-88a3-15e852b5861d" providerId="ADAL" clId="{8B7CB91F-10CE-42C2-B9B8-BFF2D3401655}" dt="2026-01-06T05:54:59.601" v="6831" actId="20577"/>
-          <ac:spMkLst>
-            <pc:docMk/>
-            <pc:sldMk cId="261788013" sldId="319"/>
-            <ac:spMk id="3" creationId="{E57E7D38-3558-049A-380D-1044EA6C69AF}"/>
-          </ac:spMkLst>
-        </pc:spChg>
-        <pc:spChg chg="add mod">
-          <ac:chgData name="Dominique RIGHETTO" userId="512fe077-82ad-424c-88a3-15e852b5861d" providerId="ADAL" clId="{8B7CB91F-10CE-42C2-B9B8-BFF2D3401655}" dt="2026-01-06T06:06:01.276" v="6868" actId="33524"/>
-          <ac:spMkLst>
-            <pc:docMk/>
-            <pc:sldMk cId="261788013" sldId="319"/>
-            <ac:spMk id="4" creationId="{75CC2FC8-F95B-EF24-A541-FCCC55DB0D71}"/>
-          </ac:spMkLst>
-        </pc:spChg>
-        <pc:spChg chg="del">
-          <ac:chgData name="Dominique RIGHETTO" userId="512fe077-82ad-424c-88a3-15e852b5861d" providerId="ADAL" clId="{8B7CB91F-10CE-42C2-B9B8-BFF2D3401655}" dt="2026-01-06T05:13:47.443" v="5947" actId="478"/>
-          <ac:spMkLst>
-            <pc:docMk/>
-            <pc:sldMk cId="261788013" sldId="319"/>
-            <ac:spMk id="7" creationId="{67C8EA75-CBF8-C05D-7AB7-5D4AF69E860E}"/>
-          </ac:spMkLst>
-        </pc:spChg>
-        <pc:picChg chg="add del mod">
-          <ac:chgData name="Dominique RIGHETTO" userId="512fe077-82ad-424c-88a3-15e852b5861d" providerId="ADAL" clId="{8B7CB91F-10CE-42C2-B9B8-BFF2D3401655}" dt="2026-01-06T05:06:27.953" v="5557" actId="478"/>
-          <ac:picMkLst>
-            <pc:docMk/>
-            <pc:sldMk cId="261788013" sldId="319"/>
-            <ac:picMk id="5" creationId="{7044B40C-F9A7-7634-524E-19B743E3A059}"/>
-          </ac:picMkLst>
-        </pc:picChg>
-      </pc:sldChg>
-      <pc:sldChg chg="addSp modSp add mod">
-        <pc:chgData name="Dominique RIGHETTO" userId="512fe077-82ad-424c-88a3-15e852b5861d" providerId="ADAL" clId="{8B7CB91F-10CE-42C2-B9B8-BFF2D3401655}" dt="2026-01-06T08:17:51.630" v="7497" actId="14100"/>
-        <pc:sldMkLst>
-          <pc:docMk/>
-          <pc:sldMk cId="1465579828" sldId="320"/>
-        </pc:sldMkLst>
-        <pc:spChg chg="mod">
-          <ac:chgData name="Dominique RIGHETTO" userId="512fe077-82ad-424c-88a3-15e852b5861d" providerId="ADAL" clId="{8B7CB91F-10CE-42C2-B9B8-BFF2D3401655}" dt="2026-01-06T05:43:13.810" v="6697" actId="20577"/>
-          <ac:spMkLst>
-            <pc:docMk/>
-            <pc:sldMk cId="1465579828" sldId="320"/>
-            <ac:spMk id="3" creationId="{DE2D873E-EA82-331F-BE96-6FF6C7492461}"/>
-          </ac:spMkLst>
-        </pc:spChg>
-        <pc:spChg chg="add mod">
-          <ac:chgData name="Dominique RIGHETTO" userId="512fe077-82ad-424c-88a3-15e852b5861d" providerId="ADAL" clId="{8B7CB91F-10CE-42C2-B9B8-BFF2D3401655}" dt="2026-01-06T08:17:39.974" v="7494" actId="14100"/>
-          <ac:spMkLst>
-            <pc:docMk/>
-            <pc:sldMk cId="1465579828" sldId="320"/>
-            <ac:spMk id="4" creationId="{6AA48129-48A1-5BBC-2D82-2E12693E909F}"/>
-          </ac:spMkLst>
-        </pc:spChg>
-        <pc:spChg chg="add mod">
-          <ac:chgData name="Dominique RIGHETTO" userId="512fe077-82ad-424c-88a3-15e852b5861d" providerId="ADAL" clId="{8B7CB91F-10CE-42C2-B9B8-BFF2D3401655}" dt="2026-01-06T08:17:51.630" v="7497" actId="14100"/>
-          <ac:spMkLst>
-            <pc:docMk/>
-            <pc:sldMk cId="1465579828" sldId="320"/>
-            <ac:spMk id="6" creationId="{3E977823-69F0-55F7-53CF-8292EF184EAF}"/>
-          </ac:spMkLst>
-        </pc:spChg>
-        <pc:picChg chg="add mod">
-          <ac:chgData name="Dominique RIGHETTO" userId="512fe077-82ad-424c-88a3-15e852b5861d" providerId="ADAL" clId="{8B7CB91F-10CE-42C2-B9B8-BFF2D3401655}" dt="2026-01-06T05:43:48.412" v="6701" actId="14100"/>
-          <ac:picMkLst>
-            <pc:docMk/>
-            <pc:sldMk cId="1465579828" sldId="320"/>
-            <ac:picMk id="5" creationId="{0255F110-8AF1-2B31-E1A2-CFC2EDCA9CCD}"/>
-          </ac:picMkLst>
-        </pc:picChg>
-      </pc:sldChg>
-      <pc:sldChg chg="modSp add del mod">
-        <pc:chgData name="Dominique RIGHETTO" userId="512fe077-82ad-424c-88a3-15e852b5861d" providerId="ADAL" clId="{8B7CB91F-10CE-42C2-B9B8-BFF2D3401655}" dt="2026-01-06T05:48:45.202" v="6771" actId="47"/>
-        <pc:sldMkLst>
-          <pc:docMk/>
-          <pc:sldMk cId="3166410237" sldId="321"/>
-        </pc:sldMkLst>
-        <pc:spChg chg="mod">
-          <ac:chgData name="Dominique RIGHETTO" userId="512fe077-82ad-424c-88a3-15e852b5861d" providerId="ADAL" clId="{8B7CB91F-10CE-42C2-B9B8-BFF2D3401655}" dt="2026-01-06T05:18:03.493" v="6157"/>
-          <ac:spMkLst>
-            <pc:docMk/>
-            <pc:sldMk cId="3166410237" sldId="321"/>
-            <ac:spMk id="3" creationId="{5DB7A9F4-C34D-E597-FE58-D7921DF00573}"/>
-          </ac:spMkLst>
-        </pc:spChg>
-      </pc:sldChg>
-      <pc:sldChg chg="modSp add mod">
-        <pc:chgData name="Dominique RIGHETTO" userId="512fe077-82ad-424c-88a3-15e852b5861d" providerId="ADAL" clId="{8B7CB91F-10CE-42C2-B9B8-BFF2D3401655}" dt="2026-01-06T08:24:27.400" v="7535" actId="207"/>
-        <pc:sldMkLst>
-          <pc:docMk/>
-          <pc:sldMk cId="2469469424" sldId="322"/>
-        </pc:sldMkLst>
-        <pc:spChg chg="mod">
-          <ac:chgData name="Dominique RIGHETTO" userId="512fe077-82ad-424c-88a3-15e852b5861d" providerId="ADAL" clId="{8B7CB91F-10CE-42C2-B9B8-BFF2D3401655}" dt="2026-01-06T05:18:39.139" v="6171" actId="6549"/>
-          <ac:spMkLst>
-            <pc:docMk/>
-            <pc:sldMk cId="2469469424" sldId="322"/>
-            <ac:spMk id="2" creationId="{7B5F710B-7C72-92A7-2EC6-B37F1470C8F2}"/>
-          </ac:spMkLst>
-        </pc:spChg>
-        <pc:spChg chg="mod">
-          <ac:chgData name="Dominique RIGHETTO" userId="512fe077-82ad-424c-88a3-15e852b5861d" providerId="ADAL" clId="{8B7CB91F-10CE-42C2-B9B8-BFF2D3401655}" dt="2026-01-06T08:24:27.400" v="7535" actId="207"/>
-          <ac:spMkLst>
-            <pc:docMk/>
-            <pc:sldMk cId="2469469424" sldId="322"/>
-            <ac:spMk id="3" creationId="{FF2CBF5E-E258-4CD8-1B47-F4CFE1D148C1}"/>
-          </ac:spMkLst>
-        </pc:spChg>
-      </pc:sldChg>
-      <pc:sldChg chg="modSp add mod">
-        <pc:chgData name="Dominique RIGHETTO" userId="512fe077-82ad-424c-88a3-15e852b5861d" providerId="ADAL" clId="{8B7CB91F-10CE-42C2-B9B8-BFF2D3401655}" dt="2026-01-06T05:25:06.796" v="6617" actId="20577"/>
-        <pc:sldMkLst>
-          <pc:docMk/>
-          <pc:sldMk cId="1864351332" sldId="323"/>
-        </pc:sldMkLst>
-        <pc:spChg chg="mod">
-          <ac:chgData name="Dominique RIGHETTO" userId="512fe077-82ad-424c-88a3-15e852b5861d" providerId="ADAL" clId="{8B7CB91F-10CE-42C2-B9B8-BFF2D3401655}" dt="2026-01-06T05:23:37.911" v="6602" actId="6549"/>
-          <ac:spMkLst>
-            <pc:docMk/>
-            <pc:sldMk cId="1864351332" sldId="323"/>
-            <ac:spMk id="2" creationId="{D6F0257B-0D8F-597A-7407-0281BEA541A4}"/>
-          </ac:spMkLst>
-        </pc:spChg>
-        <pc:spChg chg="mod">
-          <ac:chgData name="Dominique RIGHETTO" userId="512fe077-82ad-424c-88a3-15e852b5861d" providerId="ADAL" clId="{8B7CB91F-10CE-42C2-B9B8-BFF2D3401655}" dt="2026-01-06T05:25:06.796" v="6617" actId="20577"/>
-          <ac:spMkLst>
-            <pc:docMk/>
-            <pc:sldMk cId="1864351332" sldId="323"/>
-            <ac:spMk id="3" creationId="{67471A2E-57F3-AB6A-4E4E-33D39DC06A46}"/>
-          </ac:spMkLst>
-        </pc:spChg>
-      </pc:sldChg>
-      <pc:sldChg chg="addSp modSp add mod">
-        <pc:chgData name="Dominique RIGHETTO" userId="512fe077-82ad-424c-88a3-15e852b5861d" providerId="ADAL" clId="{8B7CB91F-10CE-42C2-B9B8-BFF2D3401655}" dt="2026-01-06T08:14:10.714" v="7482" actId="20577"/>
-        <pc:sldMkLst>
-          <pc:docMk/>
-          <pc:sldMk cId="3357811245" sldId="324"/>
-        </pc:sldMkLst>
-        <pc:spChg chg="mod">
-          <ac:chgData name="Dominique RIGHETTO" userId="512fe077-82ad-424c-88a3-15e852b5861d" providerId="ADAL" clId="{8B7CB91F-10CE-42C2-B9B8-BFF2D3401655}" dt="2026-01-06T08:04:39.881" v="7121" actId="20577"/>
-          <ac:spMkLst>
-            <pc:docMk/>
-            <pc:sldMk cId="3357811245" sldId="324"/>
-            <ac:spMk id="2" creationId="{99607D1A-0517-89C0-44D0-2201B6D632E0}"/>
-          </ac:spMkLst>
-        </pc:spChg>
-        <pc:spChg chg="mod">
-          <ac:chgData name="Dominique RIGHETTO" userId="512fe077-82ad-424c-88a3-15e852b5861d" providerId="ADAL" clId="{8B7CB91F-10CE-42C2-B9B8-BFF2D3401655}" dt="2026-01-06T08:04:05.329" v="7111" actId="20577"/>
-          <ac:spMkLst>
-            <pc:docMk/>
-            <pc:sldMk cId="3357811245" sldId="324"/>
-            <ac:spMk id="3" creationId="{D780FB18-5DA9-5DB8-969B-6A863CD13878}"/>
-          </ac:spMkLst>
-        </pc:spChg>
-        <pc:spChg chg="add mod">
-          <ac:chgData name="Dominique RIGHETTO" userId="512fe077-82ad-424c-88a3-15e852b5861d" providerId="ADAL" clId="{8B7CB91F-10CE-42C2-B9B8-BFF2D3401655}" dt="2026-01-06T08:14:10.714" v="7482" actId="20577"/>
-          <ac:spMkLst>
-            <pc:docMk/>
-            <pc:sldMk cId="3357811245" sldId="324"/>
-            <ac:spMk id="4" creationId="{0E2B787C-EEA3-8CF3-11B1-F44B3B2C8115}"/>
-          </ac:spMkLst>
-        </pc:spChg>
-      </pc:sldChg>
-      <pc:sldChg chg="addSp delSp modSp add mod">
-        <pc:chgData name="Dominique RIGHETTO" userId="512fe077-82ad-424c-88a3-15e852b5861d" providerId="ADAL" clId="{8B7CB91F-10CE-42C2-B9B8-BFF2D3401655}" dt="2026-01-06T08:04:45.433" v="7122"/>
-        <pc:sldMkLst>
-          <pc:docMk/>
-          <pc:sldMk cId="2828369189" sldId="325"/>
-        </pc:sldMkLst>
-        <pc:spChg chg="mod">
-          <ac:chgData name="Dominique RIGHETTO" userId="512fe077-82ad-424c-88a3-15e852b5861d" providerId="ADAL" clId="{8B7CB91F-10CE-42C2-B9B8-BFF2D3401655}" dt="2026-01-06T08:04:45.433" v="7122"/>
-          <ac:spMkLst>
-            <pc:docMk/>
-            <pc:sldMk cId="2828369189" sldId="325"/>
-            <ac:spMk id="2" creationId="{961EA181-EAD7-0C9B-6075-CCAFB9E06DE2}"/>
-          </ac:spMkLst>
-        </pc:spChg>
-        <pc:spChg chg="del">
-          <ac:chgData name="Dominique RIGHETTO" userId="512fe077-82ad-424c-88a3-15e852b5861d" providerId="ADAL" clId="{8B7CB91F-10CE-42C2-B9B8-BFF2D3401655}" dt="2026-01-06T07:56:08.880" v="7019" actId="478"/>
-          <ac:spMkLst>
-            <pc:docMk/>
-            <pc:sldMk cId="2828369189" sldId="325"/>
-            <ac:spMk id="3" creationId="{92D4FBDE-7D6E-85FF-8F9F-7E5DF4569912}"/>
-          </ac:spMkLst>
-        </pc:spChg>
-        <pc:spChg chg="del">
-          <ac:chgData name="Dominique RIGHETTO" userId="512fe077-82ad-424c-88a3-15e852b5861d" providerId="ADAL" clId="{8B7CB91F-10CE-42C2-B9B8-BFF2D3401655}" dt="2026-01-06T07:55:51.599" v="7014" actId="478"/>
-          <ac:spMkLst>
-            <pc:docMk/>
-            <pc:sldMk cId="2828369189" sldId="325"/>
-            <ac:spMk id="4" creationId="{D17A5405-237F-2818-D6ED-47D9B20697C9}"/>
-          </ac:spMkLst>
-        </pc:spChg>
-        <pc:spChg chg="add del mod">
-          <ac:chgData name="Dominique RIGHETTO" userId="512fe077-82ad-424c-88a3-15e852b5861d" providerId="ADAL" clId="{8B7CB91F-10CE-42C2-B9B8-BFF2D3401655}" dt="2026-01-06T07:56:12.064" v="7020" actId="478"/>
-          <ac:spMkLst>
-            <pc:docMk/>
-            <pc:sldMk cId="2828369189" sldId="325"/>
-            <ac:spMk id="8" creationId="{BACCBB5C-08AB-AFBB-E820-6E2182FEC26B}"/>
-          </ac:spMkLst>
-        </pc:spChg>
-        <pc:picChg chg="add mod">
-          <ac:chgData name="Dominique RIGHETTO" userId="512fe077-82ad-424c-88a3-15e852b5861d" providerId="ADAL" clId="{8B7CB91F-10CE-42C2-B9B8-BFF2D3401655}" dt="2026-01-06T07:56:23.241" v="7024" actId="14861"/>
-          <ac:picMkLst>
-            <pc:docMk/>
-            <pc:sldMk cId="2828369189" sldId="325"/>
-            <ac:picMk id="6" creationId="{F20E73DB-B25D-FC4B-C15E-75CFC79FC828}"/>
-          </ac:picMkLst>
-        </pc:picChg>
-      </pc:sldChg>
-      <pc:sldChg chg="modSp add mod ord">
-        <pc:chgData name="Dominique RIGHETTO" userId="512fe077-82ad-424c-88a3-15e852b5861d" providerId="ADAL" clId="{8B7CB91F-10CE-42C2-B9B8-BFF2D3401655}" dt="2026-01-06T08:14:27.411" v="7486" actId="20577"/>
-        <pc:sldMkLst>
-          <pc:docMk/>
-          <pc:sldMk cId="1318273276" sldId="326"/>
-        </pc:sldMkLst>
-        <pc:spChg chg="mod">
-          <ac:chgData name="Dominique RIGHETTO" userId="512fe077-82ad-424c-88a3-15e852b5861d" providerId="ADAL" clId="{8B7CB91F-10CE-42C2-B9B8-BFF2D3401655}" dt="2026-01-06T08:04:49.620" v="7123"/>
-          <ac:spMkLst>
-            <pc:docMk/>
-            <pc:sldMk cId="1318273276" sldId="326"/>
-            <ac:spMk id="2" creationId="{B253230D-FF16-0731-521D-D75C9FDA4B5D}"/>
-          </ac:spMkLst>
-        </pc:spChg>
-        <pc:spChg chg="mod">
-          <ac:chgData name="Dominique RIGHETTO" userId="512fe077-82ad-424c-88a3-15e852b5861d" providerId="ADAL" clId="{8B7CB91F-10CE-42C2-B9B8-BFF2D3401655}" dt="2026-01-06T08:04:13.909" v="7112"/>
-          <ac:spMkLst>
-            <pc:docMk/>
-            <pc:sldMk cId="1318273276" sldId="326"/>
-            <ac:spMk id="3" creationId="{05681DCE-E000-7EA1-F0DD-4559669AEBCB}"/>
-          </ac:spMkLst>
-        </pc:spChg>
-        <pc:spChg chg="mod">
-          <ac:chgData name="Dominique RIGHETTO" userId="512fe077-82ad-424c-88a3-15e852b5861d" providerId="ADAL" clId="{8B7CB91F-10CE-42C2-B9B8-BFF2D3401655}" dt="2026-01-06T08:14:27.411" v="7486" actId="20577"/>
-          <ac:spMkLst>
-            <pc:docMk/>
-            <pc:sldMk cId="1318273276" sldId="326"/>
-            <ac:spMk id="4" creationId="{E4B76E6F-8926-EBC9-DD7E-FE5362608BC0}"/>
-          </ac:spMkLst>
-        </pc:spChg>
-      </pc:sldChg>
-      <pc:sldChg chg="addSp delSp modSp add mod">
-        <pc:chgData name="Dominique RIGHETTO" userId="512fe077-82ad-424c-88a3-15e852b5861d" providerId="ADAL" clId="{8B7CB91F-10CE-42C2-B9B8-BFF2D3401655}" dt="2026-01-06T08:04:54.698" v="7124"/>
-        <pc:sldMkLst>
-          <pc:docMk/>
-          <pc:sldMk cId="3737270670" sldId="327"/>
-        </pc:sldMkLst>
-        <pc:spChg chg="mod">
-          <ac:chgData name="Dominique RIGHETTO" userId="512fe077-82ad-424c-88a3-15e852b5861d" providerId="ADAL" clId="{8B7CB91F-10CE-42C2-B9B8-BFF2D3401655}" dt="2026-01-06T08:04:54.698" v="7124"/>
-          <ac:spMkLst>
-            <pc:docMk/>
-            <pc:sldMk cId="3737270670" sldId="327"/>
-            <ac:spMk id="2" creationId="{25605F23-5A77-C36A-9682-F6BD4D1007A7}"/>
-          </ac:spMkLst>
-        </pc:spChg>
-        <pc:spChg chg="del">
-          <ac:chgData name="Dominique RIGHETTO" userId="512fe077-82ad-424c-88a3-15e852b5861d" providerId="ADAL" clId="{8B7CB91F-10CE-42C2-B9B8-BFF2D3401655}" dt="2026-01-06T08:02:33.116" v="7080" actId="478"/>
-          <ac:spMkLst>
-            <pc:docMk/>
-            <pc:sldMk cId="3737270670" sldId="327"/>
-            <ac:spMk id="3" creationId="{8CDE14DF-BD98-7FB1-F08D-A3D86149452A}"/>
-          </ac:spMkLst>
-        </pc:spChg>
-        <pc:spChg chg="del">
-          <ac:chgData name="Dominique RIGHETTO" userId="512fe077-82ad-424c-88a3-15e852b5861d" providerId="ADAL" clId="{8B7CB91F-10CE-42C2-B9B8-BFF2D3401655}" dt="2026-01-06T08:02:30.682" v="7079" actId="478"/>
-          <ac:spMkLst>
-            <pc:docMk/>
-            <pc:sldMk cId="3737270670" sldId="327"/>
-            <ac:spMk id="4" creationId="{A3D5AE16-E855-687B-F1A5-46CD5E9BB4DF}"/>
-          </ac:spMkLst>
-        </pc:spChg>
-        <pc:spChg chg="add del mod">
-          <ac:chgData name="Dominique RIGHETTO" userId="512fe077-82ad-424c-88a3-15e852b5861d" providerId="ADAL" clId="{8B7CB91F-10CE-42C2-B9B8-BFF2D3401655}" dt="2026-01-06T08:02:35.777" v="7081" actId="478"/>
-          <ac:spMkLst>
-            <pc:docMk/>
-            <pc:sldMk cId="3737270670" sldId="327"/>
-            <ac:spMk id="6" creationId="{DDCFE94E-D86A-4BFB-0148-8BD69DA20073}"/>
-          </ac:spMkLst>
-        </pc:spChg>
-        <pc:picChg chg="add mod">
-          <ac:chgData name="Dominique RIGHETTO" userId="512fe077-82ad-424c-88a3-15e852b5861d" providerId="ADAL" clId="{8B7CB91F-10CE-42C2-B9B8-BFF2D3401655}" dt="2026-01-06T08:02:53.043" v="7087" actId="14861"/>
-          <ac:picMkLst>
-            <pc:docMk/>
-            <pc:sldMk cId="3737270670" sldId="327"/>
-            <ac:picMk id="8" creationId="{B4048B82-FBF4-4A7F-8FBB-5B914E6206FA}"/>
-          </ac:picMkLst>
-        </pc:picChg>
-      </pc:sldChg>
-      <pc:sldChg chg="delSp modSp add mod ord">
-        <pc:chgData name="Dominique RIGHETTO" userId="512fe077-82ad-424c-88a3-15e852b5861d" providerId="ADAL" clId="{8B7CB91F-10CE-42C2-B9B8-BFF2D3401655}" dt="2026-01-06T08:16:54.992" v="7489"/>
-        <pc:sldMkLst>
-          <pc:docMk/>
-          <pc:sldMk cId="1669701748" sldId="328"/>
-        </pc:sldMkLst>
-        <pc:spChg chg="mod">
-          <ac:chgData name="Dominique RIGHETTO" userId="512fe077-82ad-424c-88a3-15e852b5861d" providerId="ADAL" clId="{8B7CB91F-10CE-42C2-B9B8-BFF2D3401655}" dt="2026-01-06T08:16:54.992" v="7489"/>
-          <ac:spMkLst>
-            <pc:docMk/>
-            <pc:sldMk cId="1669701748" sldId="328"/>
-            <ac:spMk id="3" creationId="{A7F83F62-19C4-CAB5-9BFB-6728903D6D68}"/>
-          </ac:spMkLst>
-        </pc:spChg>
-        <pc:spChg chg="del">
-          <ac:chgData name="Dominique RIGHETTO" userId="512fe077-82ad-424c-88a3-15e852b5861d" providerId="ADAL" clId="{8B7CB91F-10CE-42C2-B9B8-BFF2D3401655}" dt="2026-01-06T08:06:18.992" v="7128" actId="478"/>
-          <ac:spMkLst>
-            <pc:docMk/>
-            <pc:sldMk cId="1669701748" sldId="328"/>
-            <ac:spMk id="4" creationId="{3FF94CC4-3DCC-69ED-29D3-0417BEDB5FAF}"/>
-          </ac:spMkLst>
-        </pc:spChg>
-      </pc:sldChg>
-      <pc:sldChg chg="modSp add mod modTransition">
-        <pc:chgData name="Dominique RIGHETTO" userId="512fe077-82ad-424c-88a3-15e852b5861d" providerId="ADAL" clId="{8B7CB91F-10CE-42C2-B9B8-BFF2D3401655}" dt="2026-01-06T08:09:08.157" v="7140"/>
-        <pc:sldMkLst>
-          <pc:docMk/>
-          <pc:sldMk cId="2072987811" sldId="329"/>
-        </pc:sldMkLst>
-        <pc:picChg chg="mod modCrop">
-          <ac:chgData name="Dominique RIGHETTO" userId="512fe077-82ad-424c-88a3-15e852b5861d" providerId="ADAL" clId="{8B7CB91F-10CE-42C2-B9B8-BFF2D3401655}" dt="2026-01-06T08:09:05.093" v="7139" actId="1076"/>
-          <ac:picMkLst>
-            <pc:docMk/>
-            <pc:sldMk cId="2072987811" sldId="329"/>
-            <ac:picMk id="8" creationId="{C0D52F15-9F76-2129-C1A9-80B906F005E6}"/>
-          </ac:picMkLst>
-        </pc:picChg>
-      </pc:sldChg>
-      <pc:sldMasterChg chg="addSp delSp modSp mod">
-        <pc:chgData name="Dominique RIGHETTO" userId="512fe077-82ad-424c-88a3-15e852b5861d" providerId="ADAL" clId="{8B7CB91F-10CE-42C2-B9B8-BFF2D3401655}" dt="2026-01-06T06:06:26.397" v="6870" actId="207"/>
-        <pc:sldMasterMkLst>
-          <pc:docMk/>
-          <pc:sldMasterMk cId="1793245750" sldId="2147483660"/>
-        </pc:sldMasterMkLst>
-        <pc:spChg chg="mod">
-          <ac:chgData name="Dominique RIGHETTO" userId="512fe077-82ad-424c-88a3-15e852b5861d" providerId="ADAL" clId="{8B7CB91F-10CE-42C2-B9B8-BFF2D3401655}" dt="2026-01-06T06:06:26.397" v="6870" actId="207"/>
-          <ac:spMkLst>
-            <pc:docMk/>
-            <pc:sldMasterMk cId="1793245750" sldId="2147483660"/>
-            <ac:spMk id="4" creationId="{ED83292F-AC8A-143B-9890-6915DA5A9A3C}"/>
-          </ac:spMkLst>
-        </pc:spChg>
-        <pc:spChg chg="add del">
-          <ac:chgData name="Dominique RIGHETTO" userId="512fe077-82ad-424c-88a3-15e852b5861d" providerId="ADAL" clId="{8B7CB91F-10CE-42C2-B9B8-BFF2D3401655}" dt="2026-01-05T08:06:15.206" v="110" actId="478"/>
-          <ac:spMkLst>
-            <pc:docMk/>
-            <pc:sldMasterMk cId="1793245750" sldId="2147483660"/>
-            <ac:spMk id="9" creationId="{96E298DD-28E2-4F1F-A4F0-407D8199D6F6}"/>
-          </ac:spMkLst>
-        </pc:spChg>
-        <pc:spChg chg="del mod">
-          <ac:chgData name="Dominique RIGHETTO" userId="512fe077-82ad-424c-88a3-15e852b5861d" providerId="ADAL" clId="{8B7CB91F-10CE-42C2-B9B8-BFF2D3401655}" dt="2026-01-05T08:06:02.351" v="108" actId="478"/>
-          <ac:spMkLst>
-            <pc:docMk/>
-            <pc:sldMasterMk cId="1793245750" sldId="2147483660"/>
-            <ac:spMk id="10" creationId="{EDD6BA80-B3B1-41ED-94FC-30F2434D99FA}"/>
-          </ac:spMkLst>
-        </pc:spChg>
-        <pc:spChg chg="add del">
-          <ac:chgData name="Dominique RIGHETTO" userId="512fe077-82ad-424c-88a3-15e852b5861d" providerId="ADAL" clId="{8B7CB91F-10CE-42C2-B9B8-BFF2D3401655}" dt="2026-01-05T08:02:35.963" v="88" actId="478"/>
-          <ac:spMkLst>
-            <pc:docMk/>
-            <pc:sldMasterMk cId="1793245750" sldId="2147483660"/>
-            <ac:spMk id="13" creationId="{F98C9CA4-8A09-4C8A-B688-AF68F27D86FA}"/>
-          </ac:spMkLst>
-        </pc:spChg>
-      </pc:sldMasterChg>
     </pc:docChg>
   </pc:docChgLst>
 </pc:chgInfo>
@@ -2326,7 +267,7 @@
           <a:p>
             <a:fld id="{08A2296D-8F38-4121-9F4D-17CC019C25D9}" type="datetimeFigureOut">
               <a:rPr lang="fr-FR" smtClean="0"/>
-              <a:t>06/01/2026</a:t>
+              <a:t>05/05/2026</a:t>
             </a:fld>
             <a:endParaRPr lang="fr-FR"/>
           </a:p>
@@ -45524,7 +43465,23 @@
                   <a:schemeClr val="tx2"/>
                 </a:solidFill>
               </a:rPr>
-              <a:t> The goal was to test is the service ensure that the provided file is a valid PDF file:</a:t>
+              <a:t> The goal was to </a:t>
+            </a:r>
+            <a:r>
+              <a:rPr lang="en-US" sz="2800" b="0">
+                <a:solidFill>
+                  <a:schemeClr val="tx2"/>
+                </a:solidFill>
+              </a:rPr>
+              <a:t>test if </a:t>
+            </a:r>
+            <a:r>
+              <a:rPr lang="en-US" sz="2800" b="0" dirty="0">
+                <a:solidFill>
+                  <a:schemeClr val="tx2"/>
+                </a:solidFill>
+              </a:rPr>
+              <a:t>the service ensure that the provided file is a valid PDF file:</a:t>
             </a:r>
           </a:p>
           <a:p>
@@ -51452,13 +49409,13 @@
   <p:clrMapOvr>
     <a:masterClrMapping/>
   </p:clrMapOvr>
-  <mc:AlternateContent xmlns:mc="http://schemas.openxmlformats.org/markup-compatibility/2006">
-    <mc:Choice xmlns:p14="http://schemas.microsoft.com/office/powerpoint/2010/main" Requires="p14">
+  <mc:AlternateContent xmlns:mc="http://schemas.openxmlformats.org/markup-compatibility/2006" xmlns:p14="http://schemas.microsoft.com/office/powerpoint/2010/main">
+    <mc:Choice Requires="p14">
       <p:transition spd="med" p14:dur="700">
         <p:fade/>
       </p:transition>
     </mc:Choice>
-    <mc:Fallback>
+    <mc:Fallback xmlns="">
       <p:transition spd="med">
         <p:fade/>
       </p:transition>
@@ -51571,13 +49528,13 @@
   <p:clrMapOvr>
     <a:masterClrMapping/>
   </p:clrMapOvr>
-  <mc:AlternateContent xmlns:mc="http://schemas.openxmlformats.org/markup-compatibility/2006">
-    <mc:Choice xmlns:p14="http://schemas.microsoft.com/office/powerpoint/2010/main" Requires="p14">
+  <mc:AlternateContent xmlns:mc="http://schemas.openxmlformats.org/markup-compatibility/2006" xmlns:p14="http://schemas.microsoft.com/office/powerpoint/2010/main">
+    <mc:Choice Requires="p14">
       <p:transition spd="med" p14:dur="700">
         <p:fade/>
       </p:transition>
     </mc:Choice>
-    <mc:Fallback>
+    <mc:Fallback xmlns="">
       <p:transition spd="med">
         <p:fade/>
       </p:transition>
@@ -51845,13 +49802,13 @@
   <p:clrMapOvr>
     <a:masterClrMapping/>
   </p:clrMapOvr>
-  <mc:AlternateContent xmlns:mc="http://schemas.openxmlformats.org/markup-compatibility/2006">
-    <mc:Choice xmlns:p14="http://schemas.microsoft.com/office/powerpoint/2010/main" Requires="p14">
+  <mc:AlternateContent xmlns:mc="http://schemas.openxmlformats.org/markup-compatibility/2006" xmlns:p14="http://schemas.microsoft.com/office/powerpoint/2010/main">
+    <mc:Choice Requires="p14">
       <p:transition spd="med" p14:dur="700">
         <p:fade/>
       </p:transition>
     </mc:Choice>
-    <mc:Fallback>
+    <mc:Fallback xmlns="">
       <p:transition spd="med">
         <p:fade/>
       </p:transition>
@@ -51964,13 +49921,13 @@
   <p:clrMapOvr>
     <a:masterClrMapping/>
   </p:clrMapOvr>
-  <mc:AlternateContent xmlns:mc="http://schemas.openxmlformats.org/markup-compatibility/2006">
-    <mc:Choice xmlns:p14="http://schemas.microsoft.com/office/powerpoint/2010/main" Requires="p14">
+  <mc:AlternateContent xmlns:mc="http://schemas.openxmlformats.org/markup-compatibility/2006" xmlns:p14="http://schemas.microsoft.com/office/powerpoint/2010/main">
+    <mc:Choice Requires="p14">
       <p:transition spd="med" p14:dur="700">
         <p:fade/>
       </p:transition>
     </mc:Choice>
-    <mc:Fallback>
+    <mc:Fallback xmlns="">
       <p:transition spd="med">
         <p:fade/>
       </p:transition>
@@ -52084,13 +50041,13 @@
   <p:clrMapOvr>
     <a:masterClrMapping/>
   </p:clrMapOvr>
-  <mc:AlternateContent xmlns:mc="http://schemas.openxmlformats.org/markup-compatibility/2006">
-    <mc:Choice xmlns:p159="http://schemas.microsoft.com/office/powerpoint/2015/09/main" Requires="p159">
+  <mc:AlternateContent xmlns:mc="http://schemas.openxmlformats.org/markup-compatibility/2006" xmlns:p159="http://schemas.microsoft.com/office/powerpoint/2015/09/main">
+    <mc:Choice Requires="p159">
       <p:transition xmlns:p14="http://schemas.microsoft.com/office/powerpoint/2010/main" spd="slow" p14:dur="2000">
         <p159:morph option="byObject"/>
       </p:transition>
     </mc:Choice>
-    <mc:Fallback>
+    <mc:Fallback xmlns="">
       <p:transition spd="slow">
         <p:fade/>
       </p:transition>
@@ -52447,13 +50404,13 @@
   <p:clrMapOvr>
     <a:masterClrMapping/>
   </p:clrMapOvr>
-  <mc:AlternateContent xmlns:mc="http://schemas.openxmlformats.org/markup-compatibility/2006">
-    <mc:Choice xmlns:p14="http://schemas.microsoft.com/office/powerpoint/2010/main" Requires="p14">
+  <mc:AlternateContent xmlns:mc="http://schemas.openxmlformats.org/markup-compatibility/2006" xmlns:p14="http://schemas.microsoft.com/office/powerpoint/2010/main">
+    <mc:Choice Requires="p14">
       <p:transition spd="med" p14:dur="700">
         <p:fade/>
       </p:transition>
     </mc:Choice>
-    <mc:Fallback>
+    <mc:Fallback xmlns="">
       <p:transition spd="med">
         <p:fade/>
       </p:transition>
@@ -54299,4 +52256,10 @@
     </a:ext>
   </a:extLst>
 </a:theme>
+</file>
+
+<file path=docMetadata/LabelInfo.xml><?xml version="1.0" encoding="utf-8"?>
+<clbl:labelList xmlns:clbl="http://schemas.microsoft.com/office/2020/mipLabelMetadata">
+  <clbl:label id="{6fbe6025-1d0f-498d-ae44-23b34f048283}" enabled="0" method="" siteId="{6fbe6025-1d0f-498d-ae44-23b34f048283}" removed="1"/>
+</clbl:labelList>
 </file>
--- a/presentation.pptx
+++ b/presentation.pptx
@@ -5,7 +5,7 @@
     <p:sldMasterId id="2147483660" r:id="rId1"/>
   </p:sldMasterIdLst>
   <p:notesMasterIdLst>
-    <p:notesMasterId r:id="rId44"/>
+    <p:notesMasterId r:id="rId49"/>
   </p:notesMasterIdLst>
   <p:sldIdLst>
     <p:sldId id="257" r:id="rId2"/>
@@ -24,32 +24,37 @@
     <p:sldId id="300" r:id="rId15"/>
     <p:sldId id="301" r:id="rId16"/>
     <p:sldId id="302" r:id="rId17"/>
-    <p:sldId id="303" r:id="rId18"/>
-    <p:sldId id="304" r:id="rId19"/>
-    <p:sldId id="305" r:id="rId20"/>
-    <p:sldId id="306" r:id="rId21"/>
-    <p:sldId id="307" r:id="rId22"/>
-    <p:sldId id="308" r:id="rId23"/>
-    <p:sldId id="309" r:id="rId24"/>
-    <p:sldId id="311" r:id="rId25"/>
-    <p:sldId id="310" r:id="rId26"/>
-    <p:sldId id="312" r:id="rId27"/>
-    <p:sldId id="313" r:id="rId28"/>
-    <p:sldId id="314" r:id="rId29"/>
-    <p:sldId id="315" r:id="rId30"/>
-    <p:sldId id="316" r:id="rId31"/>
-    <p:sldId id="317" r:id="rId32"/>
-    <p:sldId id="320" r:id="rId33"/>
-    <p:sldId id="319" r:id="rId34"/>
-    <p:sldId id="322" r:id="rId35"/>
-    <p:sldId id="324" r:id="rId36"/>
-    <p:sldId id="325" r:id="rId37"/>
-    <p:sldId id="326" r:id="rId38"/>
-    <p:sldId id="327" r:id="rId39"/>
-    <p:sldId id="329" r:id="rId40"/>
-    <p:sldId id="328" r:id="rId41"/>
-    <p:sldId id="323" r:id="rId42"/>
-    <p:sldId id="288" r:id="rId43"/>
+    <p:sldId id="330" r:id="rId18"/>
+    <p:sldId id="331" r:id="rId19"/>
+    <p:sldId id="303" r:id="rId20"/>
+    <p:sldId id="304" r:id="rId21"/>
+    <p:sldId id="305" r:id="rId22"/>
+    <p:sldId id="306" r:id="rId23"/>
+    <p:sldId id="307" r:id="rId24"/>
+    <p:sldId id="308" r:id="rId25"/>
+    <p:sldId id="309" r:id="rId26"/>
+    <p:sldId id="311" r:id="rId27"/>
+    <p:sldId id="310" r:id="rId28"/>
+    <p:sldId id="312" r:id="rId29"/>
+    <p:sldId id="313" r:id="rId30"/>
+    <p:sldId id="314" r:id="rId31"/>
+    <p:sldId id="315" r:id="rId32"/>
+    <p:sldId id="316" r:id="rId33"/>
+    <p:sldId id="332" r:id="rId34"/>
+    <p:sldId id="317" r:id="rId35"/>
+    <p:sldId id="320" r:id="rId36"/>
+    <p:sldId id="319" r:id="rId37"/>
+    <p:sldId id="322" r:id="rId38"/>
+    <p:sldId id="324" r:id="rId39"/>
+    <p:sldId id="325" r:id="rId40"/>
+    <p:sldId id="326" r:id="rId41"/>
+    <p:sldId id="327" r:id="rId42"/>
+    <p:sldId id="334" r:id="rId43"/>
+    <p:sldId id="333" r:id="rId44"/>
+    <p:sldId id="335" r:id="rId45"/>
+    <p:sldId id="328" r:id="rId46"/>
+    <p:sldId id="323" r:id="rId47"/>
+    <p:sldId id="288" r:id="rId48"/>
   </p:sldIdLst>
   <p:sldSz cx="12192000" cy="6858000"/>
   <p:notesSz cx="6858000" cy="9144000"/>
@@ -156,29 +161,1511 @@
 </p:presentation>
 </file>
 
+<file path=ppt/revisionInfo.xml><?xml version="1.0" encoding="utf-8"?>
+<p1510:revInfo xmlns:a="http://schemas.openxmlformats.org/drawingml/2006/main" xmlns:r="http://schemas.openxmlformats.org/officeDocument/2006/relationships" xmlns:p1510="http://schemas.microsoft.com/office/powerpoint/2015/10/main">
+  <p1510:revLst>
+    <p1510:client id="{0C8E2EC8-760B-4B79-844A-A108C8A5A2C0}" v="159" dt="2026-05-09T13:54:02.228"/>
+  </p1510:revLst>
+</p1510:revInfo>
+</file>
+
 <file path=ppt/changesInfos/changesInfo1.xml><?xml version="1.0" encoding="utf-8"?>
 <pc:chgInfo xmlns:a="http://schemas.openxmlformats.org/drawingml/2006/main" xmlns:r="http://schemas.openxmlformats.org/officeDocument/2006/relationships" xmlns:ac="http://schemas.microsoft.com/office/drawing/2013/main/command" xmlns:pc="http://schemas.microsoft.com/office/powerpoint/2013/main/command">
   <pc:docChgLst>
     <pc:chgData name="Dominique RIGHETTO" userId="512fe077-82ad-424c-88a3-15e852b5861d" providerId="ADAL" clId="{8B7CB91F-10CE-42C2-B9B8-BFF2D3401655}"/>
     <pc:docChg chg="undo custSel addSld delSld modSld sldOrd modMainMaster">
-      <pc:chgData name="Dominique RIGHETTO" userId="512fe077-82ad-424c-88a3-15e852b5861d" providerId="ADAL" clId="{8B7CB91F-10CE-42C2-B9B8-BFF2D3401655}" dt="2026-05-05T18:31:59.517" v="7815" actId="20577"/>
+      <pc:chgData name="Dominique RIGHETTO" userId="512fe077-82ad-424c-88a3-15e852b5861d" providerId="ADAL" clId="{8B7CB91F-10CE-42C2-B9B8-BFF2D3401655}" dt="2026-05-09T14:00:44.903" v="8794" actId="20577"/>
       <pc:docMkLst>
         <pc:docMk/>
       </pc:docMkLst>
+      <pc:sldChg chg="modSp mod">
+        <pc:chgData name="Dominique RIGHETTO" userId="512fe077-82ad-424c-88a3-15e852b5861d" providerId="ADAL" clId="{8B7CB91F-10CE-42C2-B9B8-BFF2D3401655}" dt="2026-05-09T13:22:04.557" v="8694" actId="207"/>
+        <pc:sldMkLst>
+          <pc:docMk/>
+          <pc:sldMk cId="3134628389" sldId="257"/>
+        </pc:sldMkLst>
+        <pc:spChg chg="mod">
+          <ac:chgData name="Dominique RIGHETTO" userId="512fe077-82ad-424c-88a3-15e852b5861d" providerId="ADAL" clId="{8B7CB91F-10CE-42C2-B9B8-BFF2D3401655}" dt="2026-05-09T13:22:04.557" v="8694" actId="207"/>
+          <ac:spMkLst>
+            <pc:docMk/>
+            <pc:sldMk cId="3134628389" sldId="257"/>
+            <ac:spMk id="2" creationId="{C48248EE-9276-F13B-C146-B824E74053FA}"/>
+          </ac:spMkLst>
+        </pc:spChg>
+        <pc:spChg chg="mod">
+          <ac:chgData name="Dominique RIGHETTO" userId="512fe077-82ad-424c-88a3-15e852b5861d" providerId="ADAL" clId="{8B7CB91F-10CE-42C2-B9B8-BFF2D3401655}" dt="2026-05-09T12:30:47.663" v="8129" actId="790"/>
+          <ac:spMkLst>
+            <pc:docMk/>
+            <pc:sldMk cId="3134628389" sldId="257"/>
+            <ac:spMk id="3" creationId="{2C93C62D-952C-3866-AA5A-CA17B8DBDB19}"/>
+          </ac:spMkLst>
+        </pc:spChg>
+        <pc:spChg chg="mod">
+          <ac:chgData name="Dominique RIGHETTO" userId="512fe077-82ad-424c-88a3-15e852b5861d" providerId="ADAL" clId="{8B7CB91F-10CE-42C2-B9B8-BFF2D3401655}" dt="2026-05-09T12:30:47.663" v="8129" actId="790"/>
+          <ac:spMkLst>
+            <pc:docMk/>
+            <pc:sldMk cId="3134628389" sldId="257"/>
+            <ac:spMk id="4" creationId="{7F66B005-FAEF-EACE-8082-427A0F560E9F}"/>
+          </ac:spMkLst>
+        </pc:spChg>
+      </pc:sldChg>
+      <pc:sldChg chg="modSp mod">
+        <pc:chgData name="Dominique RIGHETTO" userId="512fe077-82ad-424c-88a3-15e852b5861d" providerId="ADAL" clId="{8B7CB91F-10CE-42C2-B9B8-BFF2D3401655}" dt="2026-05-09T12:30:47.663" v="8129" actId="790"/>
+        <pc:sldMkLst>
+          <pc:docMk/>
+          <pc:sldMk cId="2121745454" sldId="262"/>
+        </pc:sldMkLst>
+        <pc:spChg chg="mod">
+          <ac:chgData name="Dominique RIGHETTO" userId="512fe077-82ad-424c-88a3-15e852b5861d" providerId="ADAL" clId="{8B7CB91F-10CE-42C2-B9B8-BFF2D3401655}" dt="2026-05-09T12:30:47.663" v="8129" actId="790"/>
+          <ac:spMkLst>
+            <pc:docMk/>
+            <pc:sldMk cId="2121745454" sldId="262"/>
+            <ac:spMk id="2" creationId="{00000000-0000-0000-0000-000000000000}"/>
+          </ac:spMkLst>
+        </pc:spChg>
+        <pc:spChg chg="mod">
+          <ac:chgData name="Dominique RIGHETTO" userId="512fe077-82ad-424c-88a3-15e852b5861d" providerId="ADAL" clId="{8B7CB91F-10CE-42C2-B9B8-BFF2D3401655}" dt="2026-05-09T12:30:47.663" v="8129" actId="790"/>
+          <ac:spMkLst>
+            <pc:docMk/>
+            <pc:sldMk cId="2121745454" sldId="262"/>
+            <ac:spMk id="3" creationId="{00000000-0000-0000-0000-000000000000}"/>
+          </ac:spMkLst>
+        </pc:spChg>
+      </pc:sldChg>
+      <pc:sldChg chg="modSp mod">
+        <pc:chgData name="Dominique RIGHETTO" userId="512fe077-82ad-424c-88a3-15e852b5861d" providerId="ADAL" clId="{8B7CB91F-10CE-42C2-B9B8-BFF2D3401655}" dt="2026-05-09T12:30:47.663" v="8129" actId="790"/>
+        <pc:sldMkLst>
+          <pc:docMk/>
+          <pc:sldMk cId="1700977977" sldId="289"/>
+        </pc:sldMkLst>
+        <pc:spChg chg="mod">
+          <ac:chgData name="Dominique RIGHETTO" userId="512fe077-82ad-424c-88a3-15e852b5861d" providerId="ADAL" clId="{8B7CB91F-10CE-42C2-B9B8-BFF2D3401655}" dt="2026-05-09T12:30:47.663" v="8129" actId="790"/>
+          <ac:spMkLst>
+            <pc:docMk/>
+            <pc:sldMk cId="1700977977" sldId="289"/>
+            <ac:spMk id="2" creationId="{ECC41D0F-4E65-EE8F-6EC1-60C60CADE2A0}"/>
+          </ac:spMkLst>
+        </pc:spChg>
+        <pc:spChg chg="mod">
+          <ac:chgData name="Dominique RIGHETTO" userId="512fe077-82ad-424c-88a3-15e852b5861d" providerId="ADAL" clId="{8B7CB91F-10CE-42C2-B9B8-BFF2D3401655}" dt="2026-05-09T12:30:47.663" v="8129" actId="790"/>
+          <ac:spMkLst>
+            <pc:docMk/>
+            <pc:sldMk cId="1700977977" sldId="289"/>
+            <ac:spMk id="3" creationId="{DD39683C-541A-B4BA-B911-E5EC3EABE467}"/>
+          </ac:spMkLst>
+        </pc:spChg>
+      </pc:sldChg>
+      <pc:sldChg chg="modSp mod">
+        <pc:chgData name="Dominique RIGHETTO" userId="512fe077-82ad-424c-88a3-15e852b5861d" providerId="ADAL" clId="{8B7CB91F-10CE-42C2-B9B8-BFF2D3401655}" dt="2026-05-09T12:30:47.663" v="8129" actId="790"/>
+        <pc:sldMkLst>
+          <pc:docMk/>
+          <pc:sldMk cId="2617813205" sldId="290"/>
+        </pc:sldMkLst>
+        <pc:spChg chg="mod">
+          <ac:chgData name="Dominique RIGHETTO" userId="512fe077-82ad-424c-88a3-15e852b5861d" providerId="ADAL" clId="{8B7CB91F-10CE-42C2-B9B8-BFF2D3401655}" dt="2026-05-09T12:30:47.663" v="8129" actId="790"/>
+          <ac:spMkLst>
+            <pc:docMk/>
+            <pc:sldMk cId="2617813205" sldId="290"/>
+            <ac:spMk id="2" creationId="{4C0CAB36-7800-3785-6EB6-597BA8E3E466}"/>
+          </ac:spMkLst>
+        </pc:spChg>
+        <pc:spChg chg="mod">
+          <ac:chgData name="Dominique RIGHETTO" userId="512fe077-82ad-424c-88a3-15e852b5861d" providerId="ADAL" clId="{8B7CB91F-10CE-42C2-B9B8-BFF2D3401655}" dt="2026-05-09T12:30:47.663" v="8129" actId="790"/>
+          <ac:spMkLst>
+            <pc:docMk/>
+            <pc:sldMk cId="2617813205" sldId="290"/>
+            <ac:spMk id="3" creationId="{F9B0CA82-1172-E064-A39F-91CE0E6141A1}"/>
+          </ac:spMkLst>
+        </pc:spChg>
+      </pc:sldChg>
+      <pc:sldChg chg="modSp mod">
+        <pc:chgData name="Dominique RIGHETTO" userId="512fe077-82ad-424c-88a3-15e852b5861d" providerId="ADAL" clId="{8B7CB91F-10CE-42C2-B9B8-BFF2D3401655}" dt="2026-05-09T12:30:47.663" v="8129" actId="790"/>
+        <pc:sldMkLst>
+          <pc:docMk/>
+          <pc:sldMk cId="3084432784" sldId="291"/>
+        </pc:sldMkLst>
+        <pc:spChg chg="mod">
+          <ac:chgData name="Dominique RIGHETTO" userId="512fe077-82ad-424c-88a3-15e852b5861d" providerId="ADAL" clId="{8B7CB91F-10CE-42C2-B9B8-BFF2D3401655}" dt="2026-05-09T12:30:47.663" v="8129" actId="790"/>
+          <ac:spMkLst>
+            <pc:docMk/>
+            <pc:sldMk cId="3084432784" sldId="291"/>
+            <ac:spMk id="2" creationId="{90A5A9F8-D7B1-CFB1-B8C0-57440D5A186F}"/>
+          </ac:spMkLst>
+        </pc:spChg>
+        <pc:spChg chg="mod">
+          <ac:chgData name="Dominique RIGHETTO" userId="512fe077-82ad-424c-88a3-15e852b5861d" providerId="ADAL" clId="{8B7CB91F-10CE-42C2-B9B8-BFF2D3401655}" dt="2026-05-09T12:30:47.663" v="8129" actId="790"/>
+          <ac:spMkLst>
+            <pc:docMk/>
+            <pc:sldMk cId="3084432784" sldId="291"/>
+            <ac:spMk id="3" creationId="{A7541EE2-30B3-B306-B7D8-3F0B5DDEBCBF}"/>
+          </ac:spMkLst>
+        </pc:spChg>
+      </pc:sldChg>
+      <pc:sldChg chg="modSp mod">
+        <pc:chgData name="Dominique RIGHETTO" userId="512fe077-82ad-424c-88a3-15e852b5861d" providerId="ADAL" clId="{8B7CB91F-10CE-42C2-B9B8-BFF2D3401655}" dt="2026-05-09T12:30:47.663" v="8129" actId="790"/>
+        <pc:sldMkLst>
+          <pc:docMk/>
+          <pc:sldMk cId="3031573305" sldId="292"/>
+        </pc:sldMkLst>
+        <pc:spChg chg="mod">
+          <ac:chgData name="Dominique RIGHETTO" userId="512fe077-82ad-424c-88a3-15e852b5861d" providerId="ADAL" clId="{8B7CB91F-10CE-42C2-B9B8-BFF2D3401655}" dt="2026-05-09T12:30:47.663" v="8129" actId="790"/>
+          <ac:spMkLst>
+            <pc:docMk/>
+            <pc:sldMk cId="3031573305" sldId="292"/>
+            <ac:spMk id="2" creationId="{074592FB-20DA-7B7E-2963-1F994212B6AB}"/>
+          </ac:spMkLst>
+        </pc:spChg>
+        <pc:spChg chg="mod">
+          <ac:chgData name="Dominique RIGHETTO" userId="512fe077-82ad-424c-88a3-15e852b5861d" providerId="ADAL" clId="{8B7CB91F-10CE-42C2-B9B8-BFF2D3401655}" dt="2026-05-09T12:30:47.663" v="8129" actId="790"/>
+          <ac:spMkLst>
+            <pc:docMk/>
+            <pc:sldMk cId="3031573305" sldId="292"/>
+            <ac:spMk id="3" creationId="{1FA3B382-E549-6472-3A22-5EDE38691E62}"/>
+          </ac:spMkLst>
+        </pc:spChg>
+        <pc:spChg chg="mod">
+          <ac:chgData name="Dominique RIGHETTO" userId="512fe077-82ad-424c-88a3-15e852b5861d" providerId="ADAL" clId="{8B7CB91F-10CE-42C2-B9B8-BFF2D3401655}" dt="2026-05-09T12:30:47.663" v="8129" actId="790"/>
+          <ac:spMkLst>
+            <pc:docMk/>
+            <pc:sldMk cId="3031573305" sldId="292"/>
+            <ac:spMk id="4" creationId="{071CBD58-90D4-73F6-8ADC-0CFA2AA3E41A}"/>
+          </ac:spMkLst>
+        </pc:spChg>
+      </pc:sldChg>
+      <pc:sldChg chg="addSp delSp modSp mod">
+        <pc:chgData name="Dominique RIGHETTO" userId="512fe077-82ad-424c-88a3-15e852b5861d" providerId="ADAL" clId="{8B7CB91F-10CE-42C2-B9B8-BFF2D3401655}" dt="2026-05-09T13:53:58.549" v="8725" actId="14861"/>
+        <pc:sldMkLst>
+          <pc:docMk/>
+          <pc:sldMk cId="730804740" sldId="293"/>
+        </pc:sldMkLst>
+        <pc:spChg chg="mod">
+          <ac:chgData name="Dominique RIGHETTO" userId="512fe077-82ad-424c-88a3-15e852b5861d" providerId="ADAL" clId="{8B7CB91F-10CE-42C2-B9B8-BFF2D3401655}" dt="2026-05-09T12:30:47.663" v="8129" actId="790"/>
+          <ac:spMkLst>
+            <pc:docMk/>
+            <pc:sldMk cId="730804740" sldId="293"/>
+            <ac:spMk id="2" creationId="{0A348616-5B74-14DC-9C90-4B9F75074BBF}"/>
+          </ac:spMkLst>
+        </pc:spChg>
+        <pc:spChg chg="mod">
+          <ac:chgData name="Dominique RIGHETTO" userId="512fe077-82ad-424c-88a3-15e852b5861d" providerId="ADAL" clId="{8B7CB91F-10CE-42C2-B9B8-BFF2D3401655}" dt="2026-05-09T12:30:47.663" v="8129" actId="790"/>
+          <ac:spMkLst>
+            <pc:docMk/>
+            <pc:sldMk cId="730804740" sldId="293"/>
+            <ac:spMk id="3" creationId="{6854D427-D7FC-33E3-A100-64B6FC01393B}"/>
+          </ac:spMkLst>
+        </pc:spChg>
+        <pc:picChg chg="add del mod">
+          <ac:chgData name="Dominique RIGHETTO" userId="512fe077-82ad-424c-88a3-15e852b5861d" providerId="ADAL" clId="{8B7CB91F-10CE-42C2-B9B8-BFF2D3401655}" dt="2026-05-09T13:48:47.735" v="8707" actId="478"/>
+          <ac:picMkLst>
+            <pc:docMk/>
+            <pc:sldMk cId="730804740" sldId="293"/>
+            <ac:picMk id="5" creationId="{0754215B-B48A-91C2-F179-FF6080C5BC3F}"/>
+          </ac:picMkLst>
+        </pc:picChg>
+        <pc:picChg chg="del">
+          <ac:chgData name="Dominique RIGHETTO" userId="512fe077-82ad-424c-88a3-15e852b5861d" providerId="ADAL" clId="{8B7CB91F-10CE-42C2-B9B8-BFF2D3401655}" dt="2026-05-09T13:46:24.555" v="8696" actId="478"/>
+          <ac:picMkLst>
+            <pc:docMk/>
+            <pc:sldMk cId="730804740" sldId="293"/>
+            <ac:picMk id="6" creationId="{832050DC-4707-B6F1-973D-2016AFF7BF74}"/>
+          </ac:picMkLst>
+        </pc:picChg>
+        <pc:picChg chg="add del mod">
+          <ac:chgData name="Dominique RIGHETTO" userId="512fe077-82ad-424c-88a3-15e852b5861d" providerId="ADAL" clId="{8B7CB91F-10CE-42C2-B9B8-BFF2D3401655}" dt="2026-05-09T13:53:46.195" v="8721" actId="478"/>
+          <ac:picMkLst>
+            <pc:docMk/>
+            <pc:sldMk cId="730804740" sldId="293"/>
+            <ac:picMk id="8" creationId="{5F02890B-84A7-989E-6870-BC838BBB8528}"/>
+          </ac:picMkLst>
+        </pc:picChg>
+        <pc:picChg chg="add mod">
+          <ac:chgData name="Dominique RIGHETTO" userId="512fe077-82ad-424c-88a3-15e852b5861d" providerId="ADAL" clId="{8B7CB91F-10CE-42C2-B9B8-BFF2D3401655}" dt="2026-05-09T13:53:58.549" v="8725" actId="14861"/>
+          <ac:picMkLst>
+            <pc:docMk/>
+            <pc:sldMk cId="730804740" sldId="293"/>
+            <ac:picMk id="10" creationId="{374319D4-680A-759C-60BE-C352FE38F8B5}"/>
+          </ac:picMkLst>
+        </pc:picChg>
+      </pc:sldChg>
+      <pc:sldChg chg="addSp delSp modSp mod">
+        <pc:chgData name="Dominique RIGHETTO" userId="512fe077-82ad-424c-88a3-15e852b5861d" providerId="ADAL" clId="{8B7CB91F-10CE-42C2-B9B8-BFF2D3401655}" dt="2026-05-09T13:54:11.716" v="8731" actId="1076"/>
+        <pc:sldMkLst>
+          <pc:docMk/>
+          <pc:sldMk cId="617590533" sldId="294"/>
+        </pc:sldMkLst>
+        <pc:picChg chg="add del mod">
+          <ac:chgData name="Dominique RIGHETTO" userId="512fe077-82ad-424c-88a3-15e852b5861d" providerId="ADAL" clId="{8B7CB91F-10CE-42C2-B9B8-BFF2D3401655}" dt="2026-05-09T13:49:04.859" v="8712" actId="478"/>
+          <ac:picMkLst>
+            <pc:docMk/>
+            <pc:sldMk cId="617590533" sldId="294"/>
+            <ac:picMk id="2" creationId="{8331BC0A-B81F-BE09-E6F2-32C7F91B0FE2}"/>
+          </ac:picMkLst>
+        </pc:picChg>
+        <pc:picChg chg="add del mod">
+          <ac:chgData name="Dominique RIGHETTO" userId="512fe077-82ad-424c-88a3-15e852b5861d" providerId="ADAL" clId="{8B7CB91F-10CE-42C2-B9B8-BFF2D3401655}" dt="2026-05-09T13:53:42.466" v="8720" actId="478"/>
+          <ac:picMkLst>
+            <pc:docMk/>
+            <pc:sldMk cId="617590533" sldId="294"/>
+            <ac:picMk id="3" creationId="{7D9DE856-9258-2C89-1661-032845C16C94}"/>
+          </ac:picMkLst>
+        </pc:picChg>
+        <pc:picChg chg="add mod">
+          <ac:chgData name="Dominique RIGHETTO" userId="512fe077-82ad-424c-88a3-15e852b5861d" providerId="ADAL" clId="{8B7CB91F-10CE-42C2-B9B8-BFF2D3401655}" dt="2026-05-09T13:54:11.716" v="8731" actId="1076"/>
+          <ac:picMkLst>
+            <pc:docMk/>
+            <pc:sldMk cId="617590533" sldId="294"/>
+            <ac:picMk id="4" creationId="{A19EC75C-ED00-33DC-237E-ACBDFDEB5187}"/>
+          </ac:picMkLst>
+        </pc:picChg>
+        <pc:picChg chg="del mod">
+          <ac:chgData name="Dominique RIGHETTO" userId="512fe077-82ad-424c-88a3-15e852b5861d" providerId="ADAL" clId="{8B7CB91F-10CE-42C2-B9B8-BFF2D3401655}" dt="2026-05-09T13:46:21.437" v="8695" actId="478"/>
+          <ac:picMkLst>
+            <pc:docMk/>
+            <pc:sldMk cId="617590533" sldId="294"/>
+            <ac:picMk id="6" creationId="{1112956B-2F40-599E-049A-D4A8C3513D5A}"/>
+          </ac:picMkLst>
+        </pc:picChg>
+      </pc:sldChg>
+      <pc:sldChg chg="modSp mod">
+        <pc:chgData name="Dominique RIGHETTO" userId="512fe077-82ad-424c-88a3-15e852b5861d" providerId="ADAL" clId="{8B7CB91F-10CE-42C2-B9B8-BFF2D3401655}" dt="2026-05-09T12:30:47.663" v="8129" actId="790"/>
+        <pc:sldMkLst>
+          <pc:docMk/>
+          <pc:sldMk cId="2901458821" sldId="295"/>
+        </pc:sldMkLst>
+        <pc:spChg chg="mod">
+          <ac:chgData name="Dominique RIGHETTO" userId="512fe077-82ad-424c-88a3-15e852b5861d" providerId="ADAL" clId="{8B7CB91F-10CE-42C2-B9B8-BFF2D3401655}" dt="2026-05-09T12:30:47.663" v="8129" actId="790"/>
+          <ac:spMkLst>
+            <pc:docMk/>
+            <pc:sldMk cId="2901458821" sldId="295"/>
+            <ac:spMk id="2" creationId="{9101858E-4AE4-5455-A79C-229865D15439}"/>
+          </ac:spMkLst>
+        </pc:spChg>
+        <pc:spChg chg="mod">
+          <ac:chgData name="Dominique RIGHETTO" userId="512fe077-82ad-424c-88a3-15e852b5861d" providerId="ADAL" clId="{8B7CB91F-10CE-42C2-B9B8-BFF2D3401655}" dt="2026-05-09T12:30:47.663" v="8129" actId="790"/>
+          <ac:spMkLst>
+            <pc:docMk/>
+            <pc:sldMk cId="2901458821" sldId="295"/>
+            <ac:spMk id="3" creationId="{4A7A6585-062B-EC32-2F44-7A3C47246AFE}"/>
+          </ac:spMkLst>
+        </pc:spChg>
+      </pc:sldChg>
+      <pc:sldChg chg="addSp modSp mod">
+        <pc:chgData name="Dominique RIGHETTO" userId="512fe077-82ad-424c-88a3-15e852b5861d" providerId="ADAL" clId="{8B7CB91F-10CE-42C2-B9B8-BFF2D3401655}" dt="2026-05-09T12:30:47.663" v="8129" actId="790"/>
+        <pc:sldMkLst>
+          <pc:docMk/>
+          <pc:sldMk cId="546162947" sldId="296"/>
+        </pc:sldMkLst>
+        <pc:spChg chg="mod">
+          <ac:chgData name="Dominique RIGHETTO" userId="512fe077-82ad-424c-88a3-15e852b5861d" providerId="ADAL" clId="{8B7CB91F-10CE-42C2-B9B8-BFF2D3401655}" dt="2026-05-09T12:30:47.663" v="8129" actId="790"/>
+          <ac:spMkLst>
+            <pc:docMk/>
+            <pc:sldMk cId="546162947" sldId="296"/>
+            <ac:spMk id="2" creationId="{8357D9B5-4296-FD66-6454-201612494AC3}"/>
+          </ac:spMkLst>
+        </pc:spChg>
+        <pc:spChg chg="mod">
+          <ac:chgData name="Dominique RIGHETTO" userId="512fe077-82ad-424c-88a3-15e852b5861d" providerId="ADAL" clId="{8B7CB91F-10CE-42C2-B9B8-BFF2D3401655}" dt="2026-05-09T12:30:47.663" v="8129" actId="790"/>
+          <ac:spMkLst>
+            <pc:docMk/>
+            <pc:sldMk cId="546162947" sldId="296"/>
+            <ac:spMk id="3" creationId="{C89D633C-3E2D-C620-330F-995671BAA090}"/>
+          </ac:spMkLst>
+        </pc:spChg>
+        <pc:spChg chg="add mod">
+          <ac:chgData name="Dominique RIGHETTO" userId="512fe077-82ad-424c-88a3-15e852b5861d" providerId="ADAL" clId="{8B7CB91F-10CE-42C2-B9B8-BFF2D3401655}" dt="2026-05-09T12:30:47.663" v="8129" actId="790"/>
+          <ac:spMkLst>
+            <pc:docMk/>
+            <pc:sldMk cId="546162947" sldId="296"/>
+            <ac:spMk id="4" creationId="{DB4E5291-4FF3-C031-1DA5-26005B6E6CC0}"/>
+          </ac:spMkLst>
+        </pc:spChg>
+        <pc:spChg chg="add mod">
+          <ac:chgData name="Dominique RIGHETTO" userId="512fe077-82ad-424c-88a3-15e852b5861d" providerId="ADAL" clId="{8B7CB91F-10CE-42C2-B9B8-BFF2D3401655}" dt="2026-05-09T12:30:47.663" v="8129" actId="790"/>
+          <ac:spMkLst>
+            <pc:docMk/>
+            <pc:sldMk cId="546162947" sldId="296"/>
+            <ac:spMk id="6" creationId="{19B2A4CF-87A8-DAA1-7D37-4DD3141B455D}"/>
+          </ac:spMkLst>
+        </pc:spChg>
+      </pc:sldChg>
       <pc:sldChg chg="addSp delSp modSp add mod">
-        <pc:chgData name="Dominique RIGHETTO" userId="512fe077-82ad-424c-88a3-15e852b5861d" providerId="ADAL" clId="{8B7CB91F-10CE-42C2-B9B8-BFF2D3401655}" dt="2026-05-05T18:31:59.517" v="7815" actId="20577"/>
+        <pc:chgData name="Dominique RIGHETTO" userId="512fe077-82ad-424c-88a3-15e852b5861d" providerId="ADAL" clId="{8B7CB91F-10CE-42C2-B9B8-BFF2D3401655}" dt="2026-05-09T13:55:44.505" v="8732" actId="6549"/>
         <pc:sldMkLst>
           <pc:docMk/>
           <pc:sldMk cId="709545358" sldId="297"/>
         </pc:sldMkLst>
         <pc:spChg chg="mod">
-          <ac:chgData name="Dominique RIGHETTO" userId="512fe077-82ad-424c-88a3-15e852b5861d" providerId="ADAL" clId="{8B7CB91F-10CE-42C2-B9B8-BFF2D3401655}" dt="2026-05-05T18:31:59.517" v="7815" actId="20577"/>
+          <ac:chgData name="Dominique RIGHETTO" userId="512fe077-82ad-424c-88a3-15e852b5861d" providerId="ADAL" clId="{8B7CB91F-10CE-42C2-B9B8-BFF2D3401655}" dt="2026-05-09T13:55:44.505" v="8732" actId="6549"/>
+          <ac:spMkLst>
+            <pc:docMk/>
+            <pc:sldMk cId="709545358" sldId="297"/>
+            <ac:spMk id="2" creationId="{B845A4E6-506C-8A54-282B-B9A27DF974D9}"/>
+          </ac:spMkLst>
+        </pc:spChg>
+        <pc:spChg chg="mod">
+          <ac:chgData name="Dominique RIGHETTO" userId="512fe077-82ad-424c-88a3-15e852b5861d" providerId="ADAL" clId="{8B7CB91F-10CE-42C2-B9B8-BFF2D3401655}" dt="2026-05-09T12:30:47.663" v="8129" actId="790"/>
           <ac:spMkLst>
             <pc:docMk/>
             <pc:sldMk cId="709545358" sldId="297"/>
             <ac:spMk id="3" creationId="{EA2D3DAB-E05A-AC9C-4BBB-4A581D9BF3D5}"/>
           </ac:spMkLst>
         </pc:spChg>
+      </pc:sldChg>
+      <pc:sldChg chg="modSp mod">
+        <pc:chgData name="Dominique RIGHETTO" userId="512fe077-82ad-424c-88a3-15e852b5861d" providerId="ADAL" clId="{8B7CB91F-10CE-42C2-B9B8-BFF2D3401655}" dt="2026-05-09T13:55:49.687" v="8733" actId="6549"/>
+        <pc:sldMkLst>
+          <pc:docMk/>
+          <pc:sldMk cId="3961351739" sldId="298"/>
+        </pc:sldMkLst>
+        <pc:spChg chg="mod">
+          <ac:chgData name="Dominique RIGHETTO" userId="512fe077-82ad-424c-88a3-15e852b5861d" providerId="ADAL" clId="{8B7CB91F-10CE-42C2-B9B8-BFF2D3401655}" dt="2026-05-09T13:55:49.687" v="8733" actId="6549"/>
+          <ac:spMkLst>
+            <pc:docMk/>
+            <pc:sldMk cId="3961351739" sldId="298"/>
+            <ac:spMk id="2" creationId="{A48B1937-E229-DAB6-0930-B3E44E3920DE}"/>
+          </ac:spMkLst>
+        </pc:spChg>
+        <pc:spChg chg="mod">
+          <ac:chgData name="Dominique RIGHETTO" userId="512fe077-82ad-424c-88a3-15e852b5861d" providerId="ADAL" clId="{8B7CB91F-10CE-42C2-B9B8-BFF2D3401655}" dt="2026-05-09T12:30:47.663" v="8129" actId="790"/>
+          <ac:spMkLst>
+            <pc:docMk/>
+            <pc:sldMk cId="3961351739" sldId="298"/>
+            <ac:spMk id="3" creationId="{83029DA1-9BCD-3EBD-0C74-543E48734A9E}"/>
+          </ac:spMkLst>
+        </pc:spChg>
+        <pc:spChg chg="mod">
+          <ac:chgData name="Dominique RIGHETTO" userId="512fe077-82ad-424c-88a3-15e852b5861d" providerId="ADAL" clId="{8B7CB91F-10CE-42C2-B9B8-BFF2D3401655}" dt="2026-05-09T12:30:47.663" v="8129" actId="790"/>
+          <ac:spMkLst>
+            <pc:docMk/>
+            <pc:sldMk cId="3961351739" sldId="298"/>
+            <ac:spMk id="7" creationId="{902C893A-AE8C-38CF-319B-BB6D877250CE}"/>
+          </ac:spMkLst>
+        </pc:spChg>
+      </pc:sldChg>
+      <pc:sldChg chg="modSp mod">
+        <pc:chgData name="Dominique RIGHETTO" userId="512fe077-82ad-424c-88a3-15e852b5861d" providerId="ADAL" clId="{8B7CB91F-10CE-42C2-B9B8-BFF2D3401655}" dt="2026-05-09T13:55:55.215" v="8734" actId="6549"/>
+        <pc:sldMkLst>
+          <pc:docMk/>
+          <pc:sldMk cId="2399632653" sldId="299"/>
+        </pc:sldMkLst>
+        <pc:spChg chg="mod">
+          <ac:chgData name="Dominique RIGHETTO" userId="512fe077-82ad-424c-88a3-15e852b5861d" providerId="ADAL" clId="{8B7CB91F-10CE-42C2-B9B8-BFF2D3401655}" dt="2026-05-09T13:55:55.215" v="8734" actId="6549"/>
+          <ac:spMkLst>
+            <pc:docMk/>
+            <pc:sldMk cId="2399632653" sldId="299"/>
+            <ac:spMk id="2" creationId="{3D5DB75B-6770-31DB-523A-9A3D7DBF1E60}"/>
+          </ac:spMkLst>
+        </pc:spChg>
+        <pc:spChg chg="mod">
+          <ac:chgData name="Dominique RIGHETTO" userId="512fe077-82ad-424c-88a3-15e852b5861d" providerId="ADAL" clId="{8B7CB91F-10CE-42C2-B9B8-BFF2D3401655}" dt="2026-05-09T12:30:47.663" v="8129" actId="790"/>
+          <ac:spMkLst>
+            <pc:docMk/>
+            <pc:sldMk cId="2399632653" sldId="299"/>
+            <ac:spMk id="3" creationId="{741381EB-99BC-524D-D960-85D1ABC4DC70}"/>
+          </ac:spMkLst>
+        </pc:spChg>
+      </pc:sldChg>
+      <pc:sldChg chg="modSp mod">
+        <pc:chgData name="Dominique RIGHETTO" userId="512fe077-82ad-424c-88a3-15e852b5861d" providerId="ADAL" clId="{8B7CB91F-10CE-42C2-B9B8-BFF2D3401655}" dt="2026-05-09T13:56:00.511" v="8735" actId="6549"/>
+        <pc:sldMkLst>
+          <pc:docMk/>
+          <pc:sldMk cId="1761927550" sldId="300"/>
+        </pc:sldMkLst>
+        <pc:spChg chg="mod">
+          <ac:chgData name="Dominique RIGHETTO" userId="512fe077-82ad-424c-88a3-15e852b5861d" providerId="ADAL" clId="{8B7CB91F-10CE-42C2-B9B8-BFF2D3401655}" dt="2026-05-09T13:56:00.511" v="8735" actId="6549"/>
+          <ac:spMkLst>
+            <pc:docMk/>
+            <pc:sldMk cId="1761927550" sldId="300"/>
+            <ac:spMk id="2" creationId="{F12FADC8-4494-0183-9CC5-4A0F2526C85E}"/>
+          </ac:spMkLst>
+        </pc:spChg>
+        <pc:spChg chg="mod">
+          <ac:chgData name="Dominique RIGHETTO" userId="512fe077-82ad-424c-88a3-15e852b5861d" providerId="ADAL" clId="{8B7CB91F-10CE-42C2-B9B8-BFF2D3401655}" dt="2026-05-09T12:30:47.663" v="8129" actId="790"/>
+          <ac:spMkLst>
+            <pc:docMk/>
+            <pc:sldMk cId="1761927550" sldId="300"/>
+            <ac:spMk id="3" creationId="{0C7D0AE3-4D9F-D903-11DB-723CC3B837B9}"/>
+          </ac:spMkLst>
+        </pc:spChg>
+      </pc:sldChg>
+      <pc:sldChg chg="modSp mod">
+        <pc:chgData name="Dominique RIGHETTO" userId="512fe077-82ad-424c-88a3-15e852b5861d" providerId="ADAL" clId="{8B7CB91F-10CE-42C2-B9B8-BFF2D3401655}" dt="2026-05-09T13:56:05.400" v="8736" actId="6549"/>
+        <pc:sldMkLst>
+          <pc:docMk/>
+          <pc:sldMk cId="4107305617" sldId="301"/>
+        </pc:sldMkLst>
+        <pc:spChg chg="mod">
+          <ac:chgData name="Dominique RIGHETTO" userId="512fe077-82ad-424c-88a3-15e852b5861d" providerId="ADAL" clId="{8B7CB91F-10CE-42C2-B9B8-BFF2D3401655}" dt="2026-05-09T13:56:05.400" v="8736" actId="6549"/>
+          <ac:spMkLst>
+            <pc:docMk/>
+            <pc:sldMk cId="4107305617" sldId="301"/>
+            <ac:spMk id="2" creationId="{91F11321-5C53-C769-25FD-3C480E97DDCE}"/>
+          </ac:spMkLst>
+        </pc:spChg>
+        <pc:spChg chg="mod">
+          <ac:chgData name="Dominique RIGHETTO" userId="512fe077-82ad-424c-88a3-15e852b5861d" providerId="ADAL" clId="{8B7CB91F-10CE-42C2-B9B8-BFF2D3401655}" dt="2026-05-09T12:30:47.663" v="8129" actId="790"/>
+          <ac:spMkLst>
+            <pc:docMk/>
+            <pc:sldMk cId="4107305617" sldId="301"/>
+            <ac:spMk id="3" creationId="{C97DF473-2026-6250-AA6D-4604CACF6121}"/>
+          </ac:spMkLst>
+        </pc:spChg>
+        <pc:spChg chg="mod">
+          <ac:chgData name="Dominique RIGHETTO" userId="512fe077-82ad-424c-88a3-15e852b5861d" providerId="ADAL" clId="{8B7CB91F-10CE-42C2-B9B8-BFF2D3401655}" dt="2026-05-09T12:30:47.663" v="8129" actId="790"/>
+          <ac:spMkLst>
+            <pc:docMk/>
+            <pc:sldMk cId="4107305617" sldId="301"/>
+            <ac:spMk id="7" creationId="{00720CE7-DA57-E954-96B6-C6C46BD85D34}"/>
+          </ac:spMkLst>
+        </pc:spChg>
+      </pc:sldChg>
+      <pc:sldChg chg="modSp mod">
+        <pc:chgData name="Dominique RIGHETTO" userId="512fe077-82ad-424c-88a3-15e852b5861d" providerId="ADAL" clId="{8B7CB91F-10CE-42C2-B9B8-BFF2D3401655}" dt="2026-05-09T13:56:18.724" v="8737" actId="6549"/>
+        <pc:sldMkLst>
+          <pc:docMk/>
+          <pc:sldMk cId="3214065329" sldId="302"/>
+        </pc:sldMkLst>
+        <pc:spChg chg="mod">
+          <ac:chgData name="Dominique RIGHETTO" userId="512fe077-82ad-424c-88a3-15e852b5861d" providerId="ADAL" clId="{8B7CB91F-10CE-42C2-B9B8-BFF2D3401655}" dt="2026-05-09T13:56:18.724" v="8737" actId="6549"/>
+          <ac:spMkLst>
+            <pc:docMk/>
+            <pc:sldMk cId="3214065329" sldId="302"/>
+            <ac:spMk id="2" creationId="{F53A0447-9D5C-7901-90EC-9DCA1B8EEF2E}"/>
+          </ac:spMkLst>
+        </pc:spChg>
+        <pc:spChg chg="mod">
+          <ac:chgData name="Dominique RIGHETTO" userId="512fe077-82ad-424c-88a3-15e852b5861d" providerId="ADAL" clId="{8B7CB91F-10CE-42C2-B9B8-BFF2D3401655}" dt="2026-05-09T12:30:47.663" v="8129" actId="790"/>
+          <ac:spMkLst>
+            <pc:docMk/>
+            <pc:sldMk cId="3214065329" sldId="302"/>
+            <ac:spMk id="3" creationId="{AE353607-3A14-0643-DFFA-C974C4DCCC09}"/>
+          </ac:spMkLst>
+        </pc:spChg>
+      </pc:sldChg>
+      <pc:sldChg chg="modSp mod">
+        <pc:chgData name="Dominique RIGHETTO" userId="512fe077-82ad-424c-88a3-15e852b5861d" providerId="ADAL" clId="{8B7CB91F-10CE-42C2-B9B8-BFF2D3401655}" dt="2026-05-09T13:56:46.869" v="8739" actId="6549"/>
+        <pc:sldMkLst>
+          <pc:docMk/>
+          <pc:sldMk cId="715954666" sldId="303"/>
+        </pc:sldMkLst>
+        <pc:spChg chg="mod">
+          <ac:chgData name="Dominique RIGHETTO" userId="512fe077-82ad-424c-88a3-15e852b5861d" providerId="ADAL" clId="{8B7CB91F-10CE-42C2-B9B8-BFF2D3401655}" dt="2026-05-09T13:56:46.869" v="8739" actId="6549"/>
+          <ac:spMkLst>
+            <pc:docMk/>
+            <pc:sldMk cId="715954666" sldId="303"/>
+            <ac:spMk id="2" creationId="{A9F313D3-9682-06E4-65D5-8FFB9CA90034}"/>
+          </ac:spMkLst>
+        </pc:spChg>
+        <pc:spChg chg="mod">
+          <ac:chgData name="Dominique RIGHETTO" userId="512fe077-82ad-424c-88a3-15e852b5861d" providerId="ADAL" clId="{8B7CB91F-10CE-42C2-B9B8-BFF2D3401655}" dt="2026-05-09T12:30:47.663" v="8129" actId="790"/>
+          <ac:spMkLst>
+            <pc:docMk/>
+            <pc:sldMk cId="715954666" sldId="303"/>
+            <ac:spMk id="3" creationId="{488F0DFF-4B1E-61BD-3A0C-17B1828785FB}"/>
+          </ac:spMkLst>
+        </pc:spChg>
+      </pc:sldChg>
+      <pc:sldChg chg="modSp mod">
+        <pc:chgData name="Dominique RIGHETTO" userId="512fe077-82ad-424c-88a3-15e852b5861d" providerId="ADAL" clId="{8B7CB91F-10CE-42C2-B9B8-BFF2D3401655}" dt="2026-05-09T13:56:52.294" v="8740" actId="6549"/>
+        <pc:sldMkLst>
+          <pc:docMk/>
+          <pc:sldMk cId="24537132" sldId="304"/>
+        </pc:sldMkLst>
+        <pc:spChg chg="mod">
+          <ac:chgData name="Dominique RIGHETTO" userId="512fe077-82ad-424c-88a3-15e852b5861d" providerId="ADAL" clId="{8B7CB91F-10CE-42C2-B9B8-BFF2D3401655}" dt="2026-05-09T13:56:52.294" v="8740" actId="6549"/>
+          <ac:spMkLst>
+            <pc:docMk/>
+            <pc:sldMk cId="24537132" sldId="304"/>
+            <ac:spMk id="2" creationId="{66E27314-9212-A847-3ABE-683FE3011090}"/>
+          </ac:spMkLst>
+        </pc:spChg>
+        <pc:spChg chg="mod">
+          <ac:chgData name="Dominique RIGHETTO" userId="512fe077-82ad-424c-88a3-15e852b5861d" providerId="ADAL" clId="{8B7CB91F-10CE-42C2-B9B8-BFF2D3401655}" dt="2026-05-09T12:30:47.663" v="8129" actId="790"/>
+          <ac:spMkLst>
+            <pc:docMk/>
+            <pc:sldMk cId="24537132" sldId="304"/>
+            <ac:spMk id="3" creationId="{5A37EFEA-EF0C-F5AE-34D8-5C9A939C7816}"/>
+          </ac:spMkLst>
+        </pc:spChg>
+        <pc:spChg chg="mod">
+          <ac:chgData name="Dominique RIGHETTO" userId="512fe077-82ad-424c-88a3-15e852b5861d" providerId="ADAL" clId="{8B7CB91F-10CE-42C2-B9B8-BFF2D3401655}" dt="2026-05-09T12:30:47.663" v="8129" actId="790"/>
+          <ac:spMkLst>
+            <pc:docMk/>
+            <pc:sldMk cId="24537132" sldId="304"/>
+            <ac:spMk id="7" creationId="{6158CC15-0C5B-B386-40D7-1FC6D70E2110}"/>
+          </ac:spMkLst>
+        </pc:spChg>
+      </pc:sldChg>
+      <pc:sldChg chg="modSp mod">
+        <pc:chgData name="Dominique RIGHETTO" userId="512fe077-82ad-424c-88a3-15e852b5861d" providerId="ADAL" clId="{8B7CB91F-10CE-42C2-B9B8-BFF2D3401655}" dt="2026-05-09T13:56:57.855" v="8741" actId="6549"/>
+        <pc:sldMkLst>
+          <pc:docMk/>
+          <pc:sldMk cId="989586433" sldId="305"/>
+        </pc:sldMkLst>
+        <pc:spChg chg="mod">
+          <ac:chgData name="Dominique RIGHETTO" userId="512fe077-82ad-424c-88a3-15e852b5861d" providerId="ADAL" clId="{8B7CB91F-10CE-42C2-B9B8-BFF2D3401655}" dt="2026-05-09T13:56:57.855" v="8741" actId="6549"/>
+          <ac:spMkLst>
+            <pc:docMk/>
+            <pc:sldMk cId="989586433" sldId="305"/>
+            <ac:spMk id="2" creationId="{834B7364-6C98-7044-CEB2-5328BCDFDC6B}"/>
+          </ac:spMkLst>
+        </pc:spChg>
+        <pc:spChg chg="mod">
+          <ac:chgData name="Dominique RIGHETTO" userId="512fe077-82ad-424c-88a3-15e852b5861d" providerId="ADAL" clId="{8B7CB91F-10CE-42C2-B9B8-BFF2D3401655}" dt="2026-05-09T12:30:47.663" v="8129" actId="790"/>
+          <ac:spMkLst>
+            <pc:docMk/>
+            <pc:sldMk cId="989586433" sldId="305"/>
+            <ac:spMk id="3" creationId="{4DBACDBD-B750-A641-A360-8510B71B52F8}"/>
+          </ac:spMkLst>
+        </pc:spChg>
+        <pc:spChg chg="mod">
+          <ac:chgData name="Dominique RIGHETTO" userId="512fe077-82ad-424c-88a3-15e852b5861d" providerId="ADAL" clId="{8B7CB91F-10CE-42C2-B9B8-BFF2D3401655}" dt="2026-05-09T12:30:47.663" v="8129" actId="790"/>
+          <ac:spMkLst>
+            <pc:docMk/>
+            <pc:sldMk cId="989586433" sldId="305"/>
+            <ac:spMk id="4" creationId="{4B92274F-491B-942D-FD18-C984AC21D9B6}"/>
+          </ac:spMkLst>
+        </pc:spChg>
+        <pc:spChg chg="mod">
+          <ac:chgData name="Dominique RIGHETTO" userId="512fe077-82ad-424c-88a3-15e852b5861d" providerId="ADAL" clId="{8B7CB91F-10CE-42C2-B9B8-BFF2D3401655}" dt="2026-05-09T12:30:47.663" v="8129" actId="790"/>
+          <ac:spMkLst>
+            <pc:docMk/>
+            <pc:sldMk cId="989586433" sldId="305"/>
+            <ac:spMk id="7" creationId="{AA1481E2-E225-CB1E-5FC0-20D0387972C4}"/>
+          </ac:spMkLst>
+        </pc:spChg>
+      </pc:sldChg>
+      <pc:sldChg chg="modSp mod">
+        <pc:chgData name="Dominique RIGHETTO" userId="512fe077-82ad-424c-88a3-15e852b5861d" providerId="ADAL" clId="{8B7CB91F-10CE-42C2-B9B8-BFF2D3401655}" dt="2026-05-09T13:57:04.094" v="8742" actId="6549"/>
+        <pc:sldMkLst>
+          <pc:docMk/>
+          <pc:sldMk cId="1692727651" sldId="306"/>
+        </pc:sldMkLst>
+        <pc:spChg chg="mod">
+          <ac:chgData name="Dominique RIGHETTO" userId="512fe077-82ad-424c-88a3-15e852b5861d" providerId="ADAL" clId="{8B7CB91F-10CE-42C2-B9B8-BFF2D3401655}" dt="2026-05-09T13:57:04.094" v="8742" actId="6549"/>
+          <ac:spMkLst>
+            <pc:docMk/>
+            <pc:sldMk cId="1692727651" sldId="306"/>
+            <ac:spMk id="2" creationId="{11157380-E6C6-BFA4-9C04-458C2CBB76E3}"/>
+          </ac:spMkLst>
+        </pc:spChg>
+        <pc:spChg chg="mod">
+          <ac:chgData name="Dominique RIGHETTO" userId="512fe077-82ad-424c-88a3-15e852b5861d" providerId="ADAL" clId="{8B7CB91F-10CE-42C2-B9B8-BFF2D3401655}" dt="2026-05-09T12:30:47.663" v="8129" actId="790"/>
+          <ac:spMkLst>
+            <pc:docMk/>
+            <pc:sldMk cId="1692727651" sldId="306"/>
+            <ac:spMk id="3" creationId="{3891132A-A1FF-9CE4-2144-AF041DB3EBB3}"/>
+          </ac:spMkLst>
+        </pc:spChg>
+      </pc:sldChg>
+      <pc:sldChg chg="modSp mod">
+        <pc:chgData name="Dominique RIGHETTO" userId="512fe077-82ad-424c-88a3-15e852b5861d" providerId="ADAL" clId="{8B7CB91F-10CE-42C2-B9B8-BFF2D3401655}" dt="2026-05-09T13:57:10.613" v="8743" actId="6549"/>
+        <pc:sldMkLst>
+          <pc:docMk/>
+          <pc:sldMk cId="3958721667" sldId="307"/>
+        </pc:sldMkLst>
+        <pc:spChg chg="mod">
+          <ac:chgData name="Dominique RIGHETTO" userId="512fe077-82ad-424c-88a3-15e852b5861d" providerId="ADAL" clId="{8B7CB91F-10CE-42C2-B9B8-BFF2D3401655}" dt="2026-05-09T13:57:10.613" v="8743" actId="6549"/>
+          <ac:spMkLst>
+            <pc:docMk/>
+            <pc:sldMk cId="3958721667" sldId="307"/>
+            <ac:spMk id="2" creationId="{4E724C6E-524B-07A1-0402-CF686FCF8071}"/>
+          </ac:spMkLst>
+        </pc:spChg>
+      </pc:sldChg>
+      <pc:sldChg chg="modSp mod">
+        <pc:chgData name="Dominique RIGHETTO" userId="512fe077-82ad-424c-88a3-15e852b5861d" providerId="ADAL" clId="{8B7CB91F-10CE-42C2-B9B8-BFF2D3401655}" dt="2026-05-09T13:57:14.903" v="8744" actId="6549"/>
+        <pc:sldMkLst>
+          <pc:docMk/>
+          <pc:sldMk cId="2964034352" sldId="308"/>
+        </pc:sldMkLst>
+        <pc:spChg chg="mod">
+          <ac:chgData name="Dominique RIGHETTO" userId="512fe077-82ad-424c-88a3-15e852b5861d" providerId="ADAL" clId="{8B7CB91F-10CE-42C2-B9B8-BFF2D3401655}" dt="2026-05-09T13:57:14.903" v="8744" actId="6549"/>
+          <ac:spMkLst>
+            <pc:docMk/>
+            <pc:sldMk cId="2964034352" sldId="308"/>
+            <ac:spMk id="2" creationId="{315112D2-667A-5ACA-2D54-8841534A1F0B}"/>
+          </ac:spMkLst>
+        </pc:spChg>
+        <pc:spChg chg="mod">
+          <ac:chgData name="Dominique RIGHETTO" userId="512fe077-82ad-424c-88a3-15e852b5861d" providerId="ADAL" clId="{8B7CB91F-10CE-42C2-B9B8-BFF2D3401655}" dt="2026-05-09T12:30:47.663" v="8129" actId="790"/>
+          <ac:spMkLst>
+            <pc:docMk/>
+            <pc:sldMk cId="2964034352" sldId="308"/>
+            <ac:spMk id="3" creationId="{A8F0DB80-3BA9-573F-68E4-4730BBA07D63}"/>
+          </ac:spMkLst>
+        </pc:spChg>
+        <pc:spChg chg="mod">
+          <ac:chgData name="Dominique RIGHETTO" userId="512fe077-82ad-424c-88a3-15e852b5861d" providerId="ADAL" clId="{8B7CB91F-10CE-42C2-B9B8-BFF2D3401655}" dt="2026-05-09T12:30:47.663" v="8129" actId="790"/>
+          <ac:spMkLst>
+            <pc:docMk/>
+            <pc:sldMk cId="2964034352" sldId="308"/>
+            <ac:spMk id="7" creationId="{57A1192D-9FD8-26B8-E303-C1AD3B37DEEE}"/>
+          </ac:spMkLst>
+        </pc:spChg>
+      </pc:sldChg>
+      <pc:sldChg chg="modSp mod">
+        <pc:chgData name="Dominique RIGHETTO" userId="512fe077-82ad-424c-88a3-15e852b5861d" providerId="ADAL" clId="{8B7CB91F-10CE-42C2-B9B8-BFF2D3401655}" dt="2026-05-09T13:57:20.556" v="8745" actId="6549"/>
+        <pc:sldMkLst>
+          <pc:docMk/>
+          <pc:sldMk cId="625439952" sldId="309"/>
+        </pc:sldMkLst>
+        <pc:spChg chg="mod">
+          <ac:chgData name="Dominique RIGHETTO" userId="512fe077-82ad-424c-88a3-15e852b5861d" providerId="ADAL" clId="{8B7CB91F-10CE-42C2-B9B8-BFF2D3401655}" dt="2026-05-09T13:57:20.556" v="8745" actId="6549"/>
+          <ac:spMkLst>
+            <pc:docMk/>
+            <pc:sldMk cId="625439952" sldId="309"/>
+            <ac:spMk id="2" creationId="{0F3B0007-69E6-BDDF-D1A7-F14E86700773}"/>
+          </ac:spMkLst>
+        </pc:spChg>
+        <pc:spChg chg="mod">
+          <ac:chgData name="Dominique RIGHETTO" userId="512fe077-82ad-424c-88a3-15e852b5861d" providerId="ADAL" clId="{8B7CB91F-10CE-42C2-B9B8-BFF2D3401655}" dt="2026-05-09T12:30:47.663" v="8129" actId="790"/>
+          <ac:spMkLst>
+            <pc:docMk/>
+            <pc:sldMk cId="625439952" sldId="309"/>
+            <ac:spMk id="3" creationId="{278B57A3-956B-6E65-1863-5D3E5605B75E}"/>
+          </ac:spMkLst>
+        </pc:spChg>
+        <pc:spChg chg="mod">
+          <ac:chgData name="Dominique RIGHETTO" userId="512fe077-82ad-424c-88a3-15e852b5861d" providerId="ADAL" clId="{8B7CB91F-10CE-42C2-B9B8-BFF2D3401655}" dt="2026-05-09T12:30:47.663" v="8129" actId="790"/>
+          <ac:spMkLst>
+            <pc:docMk/>
+            <pc:sldMk cId="625439952" sldId="309"/>
+            <ac:spMk id="10" creationId="{A7BFD8A7-ED6E-CB26-E0EE-5F2A6543B2BE}"/>
+          </ac:spMkLst>
+        </pc:spChg>
+        <pc:spChg chg="mod">
+          <ac:chgData name="Dominique RIGHETTO" userId="512fe077-82ad-424c-88a3-15e852b5861d" providerId="ADAL" clId="{8B7CB91F-10CE-42C2-B9B8-BFF2D3401655}" dt="2026-05-09T12:30:47.663" v="8129" actId="790"/>
+          <ac:spMkLst>
+            <pc:docMk/>
+            <pc:sldMk cId="625439952" sldId="309"/>
+            <ac:spMk id="12" creationId="{0364D1ED-1FFF-D3D7-3378-10C1EA44D21F}"/>
+          </ac:spMkLst>
+        </pc:spChg>
+      </pc:sldChg>
+      <pc:sldChg chg="modSp mod">
+        <pc:chgData name="Dominique RIGHETTO" userId="512fe077-82ad-424c-88a3-15e852b5861d" providerId="ADAL" clId="{8B7CB91F-10CE-42C2-B9B8-BFF2D3401655}" dt="2026-05-09T13:57:42.299" v="8767" actId="20577"/>
+        <pc:sldMkLst>
+          <pc:docMk/>
+          <pc:sldMk cId="497681082" sldId="310"/>
+        </pc:sldMkLst>
+        <pc:spChg chg="mod">
+          <ac:chgData name="Dominique RIGHETTO" userId="512fe077-82ad-424c-88a3-15e852b5861d" providerId="ADAL" clId="{8B7CB91F-10CE-42C2-B9B8-BFF2D3401655}" dt="2026-05-09T13:57:42.299" v="8767" actId="20577"/>
+          <ac:spMkLst>
+            <pc:docMk/>
+            <pc:sldMk cId="497681082" sldId="310"/>
+            <ac:spMk id="2" creationId="{C48E3CF9-CB24-1DB0-A3CE-9DBCDE187153}"/>
+          </ac:spMkLst>
+        </pc:spChg>
+        <pc:spChg chg="mod">
+          <ac:chgData name="Dominique RIGHETTO" userId="512fe077-82ad-424c-88a3-15e852b5861d" providerId="ADAL" clId="{8B7CB91F-10CE-42C2-B9B8-BFF2D3401655}" dt="2026-05-09T12:30:47.663" v="8129" actId="790"/>
+          <ac:spMkLst>
+            <pc:docMk/>
+            <pc:sldMk cId="497681082" sldId="310"/>
+            <ac:spMk id="3" creationId="{7724CFBE-895C-529D-962F-48F3B3F99C9A}"/>
+          </ac:spMkLst>
+        </pc:spChg>
+      </pc:sldChg>
+      <pc:sldChg chg="addSp delSp modSp mod">
+        <pc:chgData name="Dominique RIGHETTO" userId="512fe077-82ad-424c-88a3-15e852b5861d" providerId="ADAL" clId="{8B7CB91F-10CE-42C2-B9B8-BFF2D3401655}" dt="2026-05-09T13:57:36.284" v="8766" actId="478"/>
+        <pc:sldMkLst>
+          <pc:docMk/>
+          <pc:sldMk cId="1502947638" sldId="311"/>
+        </pc:sldMkLst>
+        <pc:spChg chg="mod">
+          <ac:chgData name="Dominique RIGHETTO" userId="512fe077-82ad-424c-88a3-15e852b5861d" providerId="ADAL" clId="{8B7CB91F-10CE-42C2-B9B8-BFF2D3401655}" dt="2026-05-09T13:57:32.074" v="8765" actId="20577"/>
+          <ac:spMkLst>
+            <pc:docMk/>
+            <pc:sldMk cId="1502947638" sldId="311"/>
+            <ac:spMk id="2" creationId="{74300DE6-754B-0978-BC1C-9A5D3C6088FA}"/>
+          </ac:spMkLst>
+        </pc:spChg>
+        <pc:spChg chg="add mod">
+          <ac:chgData name="Dominique RIGHETTO" userId="512fe077-82ad-424c-88a3-15e852b5861d" providerId="ADAL" clId="{8B7CB91F-10CE-42C2-B9B8-BFF2D3401655}" dt="2026-05-09T12:30:47.663" v="8129" actId="790"/>
+          <ac:spMkLst>
+            <pc:docMk/>
+            <pc:sldMk cId="1502947638" sldId="311"/>
+            <ac:spMk id="3" creationId="{0447DF56-3A01-AEBB-C440-FD5B70F1AB43}"/>
+          </ac:spMkLst>
+        </pc:spChg>
+        <pc:spChg chg="add del mod">
+          <ac:chgData name="Dominique RIGHETTO" userId="512fe077-82ad-424c-88a3-15e852b5861d" providerId="ADAL" clId="{8B7CB91F-10CE-42C2-B9B8-BFF2D3401655}" dt="2026-05-09T13:57:36.284" v="8766" actId="478"/>
+          <ac:spMkLst>
+            <pc:docMk/>
+            <pc:sldMk cId="1502947638" sldId="311"/>
+            <ac:spMk id="4" creationId="{31C426E6-2A5E-45E0-26D5-BB5B0DB415BD}"/>
+          </ac:spMkLst>
+        </pc:spChg>
+        <pc:spChg chg="add mod">
+          <ac:chgData name="Dominique RIGHETTO" userId="512fe077-82ad-424c-88a3-15e852b5861d" providerId="ADAL" clId="{8B7CB91F-10CE-42C2-B9B8-BFF2D3401655}" dt="2026-05-09T12:30:47.663" v="8129" actId="790"/>
+          <ac:spMkLst>
+            <pc:docMk/>
+            <pc:sldMk cId="1502947638" sldId="311"/>
+            <ac:spMk id="5" creationId="{C31C9B39-3EB6-2F28-91BC-023A9DD3409A}"/>
+          </ac:spMkLst>
+        </pc:spChg>
+      </pc:sldChg>
+      <pc:sldChg chg="modSp mod">
+        <pc:chgData name="Dominique RIGHETTO" userId="512fe077-82ad-424c-88a3-15e852b5861d" providerId="ADAL" clId="{8B7CB91F-10CE-42C2-B9B8-BFF2D3401655}" dt="2026-05-09T13:57:48.216" v="8768" actId="20577"/>
+        <pc:sldMkLst>
+          <pc:docMk/>
+          <pc:sldMk cId="750126829" sldId="312"/>
+        </pc:sldMkLst>
+        <pc:spChg chg="mod">
+          <ac:chgData name="Dominique RIGHETTO" userId="512fe077-82ad-424c-88a3-15e852b5861d" providerId="ADAL" clId="{8B7CB91F-10CE-42C2-B9B8-BFF2D3401655}" dt="2026-05-09T13:57:48.216" v="8768" actId="20577"/>
+          <ac:spMkLst>
+            <pc:docMk/>
+            <pc:sldMk cId="750126829" sldId="312"/>
+            <ac:spMk id="2" creationId="{98F14790-074C-95E2-C4EF-910EA1CD2AF1}"/>
+          </ac:spMkLst>
+        </pc:spChg>
+        <pc:spChg chg="mod">
+          <ac:chgData name="Dominique RIGHETTO" userId="512fe077-82ad-424c-88a3-15e852b5861d" providerId="ADAL" clId="{8B7CB91F-10CE-42C2-B9B8-BFF2D3401655}" dt="2026-05-09T12:30:47.663" v="8129" actId="790"/>
+          <ac:spMkLst>
+            <pc:docMk/>
+            <pc:sldMk cId="750126829" sldId="312"/>
+            <ac:spMk id="3" creationId="{BE28F0C4-9907-93B2-D5DA-46FB3B31BFBF}"/>
+          </ac:spMkLst>
+        </pc:spChg>
+        <pc:spChg chg="mod">
+          <ac:chgData name="Dominique RIGHETTO" userId="512fe077-82ad-424c-88a3-15e852b5861d" providerId="ADAL" clId="{8B7CB91F-10CE-42C2-B9B8-BFF2D3401655}" dt="2026-05-09T12:30:47.663" v="8129" actId="790"/>
+          <ac:spMkLst>
+            <pc:docMk/>
+            <pc:sldMk cId="750126829" sldId="312"/>
+            <ac:spMk id="7" creationId="{BA798E0F-45CC-AAFD-85E7-A216053474BA}"/>
+          </ac:spMkLst>
+        </pc:spChg>
+      </pc:sldChg>
+      <pc:sldChg chg="modSp mod">
+        <pc:chgData name="Dominique RIGHETTO" userId="512fe077-82ad-424c-88a3-15e852b5861d" providerId="ADAL" clId="{8B7CB91F-10CE-42C2-B9B8-BFF2D3401655}" dt="2026-05-09T13:57:53.084" v="8769" actId="20577"/>
+        <pc:sldMkLst>
+          <pc:docMk/>
+          <pc:sldMk cId="1989195103" sldId="313"/>
+        </pc:sldMkLst>
+        <pc:spChg chg="mod">
+          <ac:chgData name="Dominique RIGHETTO" userId="512fe077-82ad-424c-88a3-15e852b5861d" providerId="ADAL" clId="{8B7CB91F-10CE-42C2-B9B8-BFF2D3401655}" dt="2026-05-09T13:57:53.084" v="8769" actId="20577"/>
+          <ac:spMkLst>
+            <pc:docMk/>
+            <pc:sldMk cId="1989195103" sldId="313"/>
+            <ac:spMk id="2" creationId="{C57B4822-73D2-F2DE-4902-BDBAB052CFDC}"/>
+          </ac:spMkLst>
+        </pc:spChg>
+        <pc:spChg chg="mod">
+          <ac:chgData name="Dominique RIGHETTO" userId="512fe077-82ad-424c-88a3-15e852b5861d" providerId="ADAL" clId="{8B7CB91F-10CE-42C2-B9B8-BFF2D3401655}" dt="2026-05-09T12:30:47.663" v="8129" actId="790"/>
+          <ac:spMkLst>
+            <pc:docMk/>
+            <pc:sldMk cId="1989195103" sldId="313"/>
+            <ac:spMk id="3" creationId="{2BDD3EBC-02D0-7D15-A14C-72BB94993CF4}"/>
+          </ac:spMkLst>
+        </pc:spChg>
+        <pc:spChg chg="mod">
+          <ac:chgData name="Dominique RIGHETTO" userId="512fe077-82ad-424c-88a3-15e852b5861d" providerId="ADAL" clId="{8B7CB91F-10CE-42C2-B9B8-BFF2D3401655}" dt="2026-05-09T12:30:47.663" v="8129" actId="790"/>
+          <ac:spMkLst>
+            <pc:docMk/>
+            <pc:sldMk cId="1989195103" sldId="313"/>
+            <ac:spMk id="8" creationId="{1FC012AD-54A8-0E2D-355E-196E7ABD39BA}"/>
+          </ac:spMkLst>
+        </pc:spChg>
+        <pc:spChg chg="mod">
+          <ac:chgData name="Dominique RIGHETTO" userId="512fe077-82ad-424c-88a3-15e852b5861d" providerId="ADAL" clId="{8B7CB91F-10CE-42C2-B9B8-BFF2D3401655}" dt="2026-05-09T12:30:47.663" v="8129" actId="790"/>
+          <ac:spMkLst>
+            <pc:docMk/>
+            <pc:sldMk cId="1989195103" sldId="313"/>
+            <ac:spMk id="9" creationId="{B344369E-E6FB-4C1E-1CE7-D07FCE314B8B}"/>
+          </ac:spMkLst>
+        </pc:spChg>
+      </pc:sldChg>
+      <pc:sldChg chg="addSp modSp mod">
+        <pc:chgData name="Dominique RIGHETTO" userId="512fe077-82ad-424c-88a3-15e852b5861d" providerId="ADAL" clId="{8B7CB91F-10CE-42C2-B9B8-BFF2D3401655}" dt="2026-05-09T13:57:58.630" v="8770" actId="20577"/>
+        <pc:sldMkLst>
+          <pc:docMk/>
+          <pc:sldMk cId="2209675377" sldId="314"/>
+        </pc:sldMkLst>
+        <pc:spChg chg="mod">
+          <ac:chgData name="Dominique RIGHETTO" userId="512fe077-82ad-424c-88a3-15e852b5861d" providerId="ADAL" clId="{8B7CB91F-10CE-42C2-B9B8-BFF2D3401655}" dt="2026-05-09T13:57:58.630" v="8770" actId="20577"/>
+          <ac:spMkLst>
+            <pc:docMk/>
+            <pc:sldMk cId="2209675377" sldId="314"/>
+            <ac:spMk id="2" creationId="{5B09FCDA-E48F-D2A9-B927-B7D7A4B03154}"/>
+          </ac:spMkLst>
+        </pc:spChg>
+        <pc:spChg chg="add mod">
+          <ac:chgData name="Dominique RIGHETTO" userId="512fe077-82ad-424c-88a3-15e852b5861d" providerId="ADAL" clId="{8B7CB91F-10CE-42C2-B9B8-BFF2D3401655}" dt="2026-05-09T12:30:47.663" v="8129" actId="790"/>
+          <ac:spMkLst>
+            <pc:docMk/>
+            <pc:sldMk cId="2209675377" sldId="314"/>
+            <ac:spMk id="3" creationId="{29A57597-86D6-1977-E435-70D11356F338}"/>
+          </ac:spMkLst>
+        </pc:spChg>
+        <pc:spChg chg="add mod">
+          <ac:chgData name="Dominique RIGHETTO" userId="512fe077-82ad-424c-88a3-15e852b5861d" providerId="ADAL" clId="{8B7CB91F-10CE-42C2-B9B8-BFF2D3401655}" dt="2026-05-09T12:30:47.663" v="8129" actId="790"/>
+          <ac:spMkLst>
+            <pc:docMk/>
+            <pc:sldMk cId="2209675377" sldId="314"/>
+            <ac:spMk id="4" creationId="{F83A617A-9ACC-E25D-2D41-9F583CFFA2FD}"/>
+          </ac:spMkLst>
+        </pc:spChg>
+        <pc:spChg chg="add mod">
+          <ac:chgData name="Dominique RIGHETTO" userId="512fe077-82ad-424c-88a3-15e852b5861d" providerId="ADAL" clId="{8B7CB91F-10CE-42C2-B9B8-BFF2D3401655}" dt="2026-05-09T12:30:47.663" v="8129" actId="790"/>
+          <ac:spMkLst>
+            <pc:docMk/>
+            <pc:sldMk cId="2209675377" sldId="314"/>
+            <ac:spMk id="6" creationId="{AEB8C20C-EF20-3861-94E8-C58A6CD093D3}"/>
+          </ac:spMkLst>
+        </pc:spChg>
+      </pc:sldChg>
+      <pc:sldChg chg="addSp modSp mod">
+        <pc:chgData name="Dominique RIGHETTO" userId="512fe077-82ad-424c-88a3-15e852b5861d" providerId="ADAL" clId="{8B7CB91F-10CE-42C2-B9B8-BFF2D3401655}" dt="2026-05-09T13:58:07.825" v="8788" actId="20577"/>
+        <pc:sldMkLst>
+          <pc:docMk/>
+          <pc:sldMk cId="2163192230" sldId="315"/>
+        </pc:sldMkLst>
+        <pc:spChg chg="mod">
+          <ac:chgData name="Dominique RIGHETTO" userId="512fe077-82ad-424c-88a3-15e852b5861d" providerId="ADAL" clId="{8B7CB91F-10CE-42C2-B9B8-BFF2D3401655}" dt="2026-05-09T13:58:07.825" v="8788" actId="20577"/>
+          <ac:spMkLst>
+            <pc:docMk/>
+            <pc:sldMk cId="2163192230" sldId="315"/>
+            <ac:spMk id="2" creationId="{B6041EF8-0C4D-94FB-F2DC-A4618BD039B3}"/>
+          </ac:spMkLst>
+        </pc:spChg>
+        <pc:spChg chg="add mod">
+          <ac:chgData name="Dominique RIGHETTO" userId="512fe077-82ad-424c-88a3-15e852b5861d" providerId="ADAL" clId="{8B7CB91F-10CE-42C2-B9B8-BFF2D3401655}" dt="2026-05-09T12:30:47.663" v="8129" actId="790"/>
+          <ac:spMkLst>
+            <pc:docMk/>
+            <pc:sldMk cId="2163192230" sldId="315"/>
+            <ac:spMk id="3" creationId="{51E8C977-ADEC-2479-33D9-EB6672BC644A}"/>
+          </ac:spMkLst>
+        </pc:spChg>
+        <pc:spChg chg="add mod">
+          <ac:chgData name="Dominique RIGHETTO" userId="512fe077-82ad-424c-88a3-15e852b5861d" providerId="ADAL" clId="{8B7CB91F-10CE-42C2-B9B8-BFF2D3401655}" dt="2026-05-09T12:30:47.663" v="8129" actId="790"/>
+          <ac:spMkLst>
+            <pc:docMk/>
+            <pc:sldMk cId="2163192230" sldId="315"/>
+            <ac:spMk id="5" creationId="{9ED5C52D-8915-2B45-D7AB-6DB933CFA733}"/>
+          </ac:spMkLst>
+        </pc:spChg>
+      </pc:sldChg>
+      <pc:sldChg chg="delSp modSp mod">
+        <pc:chgData name="Dominique RIGHETTO" userId="512fe077-82ad-424c-88a3-15e852b5861d" providerId="ADAL" clId="{8B7CB91F-10CE-42C2-B9B8-BFF2D3401655}" dt="2026-05-09T13:58:14.671" v="8789" actId="20577"/>
+        <pc:sldMkLst>
+          <pc:docMk/>
+          <pc:sldMk cId="3966777535" sldId="316"/>
+        </pc:sldMkLst>
+        <pc:spChg chg="mod">
+          <ac:chgData name="Dominique RIGHETTO" userId="512fe077-82ad-424c-88a3-15e852b5861d" providerId="ADAL" clId="{8B7CB91F-10CE-42C2-B9B8-BFF2D3401655}" dt="2026-05-09T13:58:14.671" v="8789" actId="20577"/>
+          <ac:spMkLst>
+            <pc:docMk/>
+            <pc:sldMk cId="3966777535" sldId="316"/>
+            <ac:spMk id="2" creationId="{CD2756DE-81FF-0B4A-F059-A06C9ACD2CB4}"/>
+          </ac:spMkLst>
+        </pc:spChg>
+        <pc:spChg chg="mod">
+          <ac:chgData name="Dominique RIGHETTO" userId="512fe077-82ad-424c-88a3-15e852b5861d" providerId="ADAL" clId="{8B7CB91F-10CE-42C2-B9B8-BFF2D3401655}" dt="2026-05-09T12:30:47.663" v="8129" actId="790"/>
+          <ac:spMkLst>
+            <pc:docMk/>
+            <pc:sldMk cId="3966777535" sldId="316"/>
+            <ac:spMk id="3" creationId="{ADE63D71-25FB-998D-9333-7E6F3F474244}"/>
+          </ac:spMkLst>
+        </pc:spChg>
+        <pc:picChg chg="del">
+          <ac:chgData name="Dominique RIGHETTO" userId="512fe077-82ad-424c-88a3-15e852b5861d" providerId="ADAL" clId="{8B7CB91F-10CE-42C2-B9B8-BFF2D3401655}" dt="2026-05-09T12:28:55.525" v="8094" actId="478"/>
+          <ac:picMkLst>
+            <pc:docMk/>
+            <pc:sldMk cId="3966777535" sldId="316"/>
+            <ac:picMk id="5" creationId="{0FAD840C-E7B9-94FC-95FB-1B1D586F6B29}"/>
+          </ac:picMkLst>
+        </pc:picChg>
+      </pc:sldChg>
+      <pc:sldChg chg="modSp mod">
+        <pc:chgData name="Dominique RIGHETTO" userId="512fe077-82ad-424c-88a3-15e852b5861d" providerId="ADAL" clId="{8B7CB91F-10CE-42C2-B9B8-BFF2D3401655}" dt="2026-05-09T13:58:27.838" v="8791" actId="20577"/>
+        <pc:sldMkLst>
+          <pc:docMk/>
+          <pc:sldMk cId="1987946601" sldId="317"/>
+        </pc:sldMkLst>
+        <pc:spChg chg="mod">
+          <ac:chgData name="Dominique RIGHETTO" userId="512fe077-82ad-424c-88a3-15e852b5861d" providerId="ADAL" clId="{8B7CB91F-10CE-42C2-B9B8-BFF2D3401655}" dt="2026-05-09T13:58:27.838" v="8791" actId="20577"/>
+          <ac:spMkLst>
+            <pc:docMk/>
+            <pc:sldMk cId="1987946601" sldId="317"/>
+            <ac:spMk id="2" creationId="{61F534F7-7EB6-BD99-0561-2DB58B39C6E1}"/>
+          </ac:spMkLst>
+        </pc:spChg>
+        <pc:spChg chg="mod">
+          <ac:chgData name="Dominique RIGHETTO" userId="512fe077-82ad-424c-88a3-15e852b5861d" providerId="ADAL" clId="{8B7CB91F-10CE-42C2-B9B8-BFF2D3401655}" dt="2026-05-09T12:30:47.663" v="8129" actId="790"/>
+          <ac:spMkLst>
+            <pc:docMk/>
+            <pc:sldMk cId="1987946601" sldId="317"/>
+            <ac:spMk id="3" creationId="{4E0F90F3-7544-C418-90D2-046A579AEC6B}"/>
+          </ac:spMkLst>
+        </pc:spChg>
+        <pc:spChg chg="mod">
+          <ac:chgData name="Dominique RIGHETTO" userId="512fe077-82ad-424c-88a3-15e852b5861d" providerId="ADAL" clId="{8B7CB91F-10CE-42C2-B9B8-BFF2D3401655}" dt="2026-05-09T12:30:47.663" v="8129" actId="790"/>
+          <ac:spMkLst>
+            <pc:docMk/>
+            <pc:sldMk cId="1987946601" sldId="317"/>
+            <ac:spMk id="7" creationId="{282F7DF4-9D6F-8286-D290-A040B93FEFAB}"/>
+          </ac:spMkLst>
+        </pc:spChg>
+      </pc:sldChg>
+      <pc:sldChg chg="modSp mod">
+        <pc:chgData name="Dominique RIGHETTO" userId="512fe077-82ad-424c-88a3-15e852b5861d" providerId="ADAL" clId="{8B7CB91F-10CE-42C2-B9B8-BFF2D3401655}" dt="2026-05-09T13:58:40.955" v="8793" actId="20577"/>
+        <pc:sldMkLst>
+          <pc:docMk/>
+          <pc:sldMk cId="261788013" sldId="319"/>
+        </pc:sldMkLst>
+        <pc:spChg chg="mod">
+          <ac:chgData name="Dominique RIGHETTO" userId="512fe077-82ad-424c-88a3-15e852b5861d" providerId="ADAL" clId="{8B7CB91F-10CE-42C2-B9B8-BFF2D3401655}" dt="2026-05-09T13:58:40.955" v="8793" actId="20577"/>
+          <ac:spMkLst>
+            <pc:docMk/>
+            <pc:sldMk cId="261788013" sldId="319"/>
+            <ac:spMk id="2" creationId="{D4364BF5-2AAB-E072-15D0-CBDC9202657D}"/>
+          </ac:spMkLst>
+        </pc:spChg>
+        <pc:spChg chg="mod">
+          <ac:chgData name="Dominique RIGHETTO" userId="512fe077-82ad-424c-88a3-15e852b5861d" providerId="ADAL" clId="{8B7CB91F-10CE-42C2-B9B8-BFF2D3401655}" dt="2026-05-09T12:30:47.663" v="8129" actId="790"/>
+          <ac:spMkLst>
+            <pc:docMk/>
+            <pc:sldMk cId="261788013" sldId="319"/>
+            <ac:spMk id="3" creationId="{E57E7D38-3558-049A-380D-1044EA6C69AF}"/>
+          </ac:spMkLst>
+        </pc:spChg>
+        <pc:spChg chg="mod">
+          <ac:chgData name="Dominique RIGHETTO" userId="512fe077-82ad-424c-88a3-15e852b5861d" providerId="ADAL" clId="{8B7CB91F-10CE-42C2-B9B8-BFF2D3401655}" dt="2026-05-09T12:52:33.181" v="8385" actId="1076"/>
+          <ac:spMkLst>
+            <pc:docMk/>
+            <pc:sldMk cId="261788013" sldId="319"/>
+            <ac:spMk id="4" creationId="{75CC2FC8-F95B-EF24-A541-FCCC55DB0D71}"/>
+          </ac:spMkLst>
+        </pc:spChg>
+      </pc:sldChg>
+      <pc:sldChg chg="addSp delSp modSp mod">
+        <pc:chgData name="Dominique RIGHETTO" userId="512fe077-82ad-424c-88a3-15e852b5861d" providerId="ADAL" clId="{8B7CB91F-10CE-42C2-B9B8-BFF2D3401655}" dt="2026-05-09T13:58:35.555" v="8792" actId="20577"/>
+        <pc:sldMkLst>
+          <pc:docMk/>
+          <pc:sldMk cId="1465579828" sldId="320"/>
+        </pc:sldMkLst>
+        <pc:spChg chg="mod">
+          <ac:chgData name="Dominique RIGHETTO" userId="512fe077-82ad-424c-88a3-15e852b5861d" providerId="ADAL" clId="{8B7CB91F-10CE-42C2-B9B8-BFF2D3401655}" dt="2026-05-09T13:58:35.555" v="8792" actId="20577"/>
+          <ac:spMkLst>
+            <pc:docMk/>
+            <pc:sldMk cId="1465579828" sldId="320"/>
+            <ac:spMk id="2" creationId="{0067B626-62D2-EA15-9946-30BFD3866D6C}"/>
+          </ac:spMkLst>
+        </pc:spChg>
+        <pc:spChg chg="mod">
+          <ac:chgData name="Dominique RIGHETTO" userId="512fe077-82ad-424c-88a3-15e852b5861d" providerId="ADAL" clId="{8B7CB91F-10CE-42C2-B9B8-BFF2D3401655}" dt="2026-05-09T12:30:47.663" v="8129" actId="790"/>
+          <ac:spMkLst>
+            <pc:docMk/>
+            <pc:sldMk cId="1465579828" sldId="320"/>
+            <ac:spMk id="3" creationId="{DE2D873E-EA82-331F-BE96-6FF6C7492461}"/>
+          </ac:spMkLst>
+        </pc:spChg>
+        <pc:spChg chg="mod">
+          <ac:chgData name="Dominique RIGHETTO" userId="512fe077-82ad-424c-88a3-15e852b5861d" providerId="ADAL" clId="{8B7CB91F-10CE-42C2-B9B8-BFF2D3401655}" dt="2026-05-09T12:45:08.841" v="8374" actId="1038"/>
+          <ac:spMkLst>
+            <pc:docMk/>
+            <pc:sldMk cId="1465579828" sldId="320"/>
+            <ac:spMk id="4" creationId="{6AA48129-48A1-5BBC-2D82-2E12693E909F}"/>
+          </ac:spMkLst>
+        </pc:spChg>
+        <pc:spChg chg="del mod">
+          <ac:chgData name="Dominique RIGHETTO" userId="512fe077-82ad-424c-88a3-15e852b5861d" providerId="ADAL" clId="{8B7CB91F-10CE-42C2-B9B8-BFF2D3401655}" dt="2026-05-09T12:45:19.386" v="8375" actId="478"/>
+          <ac:spMkLst>
+            <pc:docMk/>
+            <pc:sldMk cId="1465579828" sldId="320"/>
+            <ac:spMk id="6" creationId="{3E977823-69F0-55F7-53CF-8292EF184EAF}"/>
+          </ac:spMkLst>
+        </pc:spChg>
+        <pc:spChg chg="mod">
+          <ac:chgData name="Dominique RIGHETTO" userId="512fe077-82ad-424c-88a3-15e852b5861d" providerId="ADAL" clId="{8B7CB91F-10CE-42C2-B9B8-BFF2D3401655}" dt="2026-05-09T12:30:47.663" v="8129" actId="790"/>
+          <ac:spMkLst>
+            <pc:docMk/>
+            <pc:sldMk cId="1465579828" sldId="320"/>
+            <ac:spMk id="7" creationId="{FA41DF18-1CF0-931C-81B5-A98B795EC1DA}"/>
+          </ac:spMkLst>
+        </pc:spChg>
+        <pc:spChg chg="add mod">
+          <ac:chgData name="Dominique RIGHETTO" userId="512fe077-82ad-424c-88a3-15e852b5861d" providerId="ADAL" clId="{8B7CB91F-10CE-42C2-B9B8-BFF2D3401655}" dt="2026-05-09T12:45:43.005" v="8382" actId="14100"/>
+          <ac:spMkLst>
+            <pc:docMk/>
+            <pc:sldMk cId="1465579828" sldId="320"/>
+            <ac:spMk id="8" creationId="{1F9D45D0-447E-BD6E-BD7D-D94A1F4B1D12}"/>
+          </ac:spMkLst>
+        </pc:spChg>
+        <pc:spChg chg="add mod">
+          <ac:chgData name="Dominique RIGHETTO" userId="512fe077-82ad-424c-88a3-15e852b5861d" providerId="ADAL" clId="{8B7CB91F-10CE-42C2-B9B8-BFF2D3401655}" dt="2026-05-09T12:45:35.385" v="8379" actId="14100"/>
+          <ac:spMkLst>
+            <pc:docMk/>
+            <pc:sldMk cId="1465579828" sldId="320"/>
+            <ac:spMk id="11" creationId="{83AAEDF6-18D7-8808-1288-EBA4A88BB068}"/>
+          </ac:spMkLst>
+        </pc:spChg>
+        <pc:picChg chg="del">
+          <ac:chgData name="Dominique RIGHETTO" userId="512fe077-82ad-424c-88a3-15e852b5861d" providerId="ADAL" clId="{8B7CB91F-10CE-42C2-B9B8-BFF2D3401655}" dt="2026-05-09T12:44:33.825" v="8362" actId="478"/>
+          <ac:picMkLst>
+            <pc:docMk/>
+            <pc:sldMk cId="1465579828" sldId="320"/>
+            <ac:picMk id="5" creationId="{0255F110-8AF1-2B31-E1A2-CFC2EDCA9CCD}"/>
+          </ac:picMkLst>
+        </pc:picChg>
+        <pc:picChg chg="add mod ord">
+          <ac:chgData name="Dominique RIGHETTO" userId="512fe077-82ad-424c-88a3-15e852b5861d" providerId="ADAL" clId="{8B7CB91F-10CE-42C2-B9B8-BFF2D3401655}" dt="2026-05-09T12:44:53.134" v="8367" actId="167"/>
+          <ac:picMkLst>
+            <pc:docMk/>
+            <pc:sldMk cId="1465579828" sldId="320"/>
+            <ac:picMk id="10" creationId="{2B3BC93F-F296-481D-2987-6AE737808F23}"/>
+          </ac:picMkLst>
+        </pc:picChg>
+      </pc:sldChg>
+      <pc:sldChg chg="modSp mod">
+        <pc:chgData name="Dominique RIGHETTO" userId="512fe077-82ad-424c-88a3-15e852b5861d" providerId="ADAL" clId="{8B7CB91F-10CE-42C2-B9B8-BFF2D3401655}" dt="2026-05-09T12:58:04.706" v="8459" actId="20577"/>
+        <pc:sldMkLst>
+          <pc:docMk/>
+          <pc:sldMk cId="2469469424" sldId="322"/>
+        </pc:sldMkLst>
+        <pc:spChg chg="mod">
+          <ac:chgData name="Dominique RIGHETTO" userId="512fe077-82ad-424c-88a3-15e852b5861d" providerId="ADAL" clId="{8B7CB91F-10CE-42C2-B9B8-BFF2D3401655}" dt="2026-05-09T12:30:47.663" v="8129" actId="790"/>
+          <ac:spMkLst>
+            <pc:docMk/>
+            <pc:sldMk cId="2469469424" sldId="322"/>
+            <ac:spMk id="2" creationId="{7B5F710B-7C72-92A7-2EC6-B37F1470C8F2}"/>
+          </ac:spMkLst>
+        </pc:spChg>
+        <pc:spChg chg="mod">
+          <ac:chgData name="Dominique RIGHETTO" userId="512fe077-82ad-424c-88a3-15e852b5861d" providerId="ADAL" clId="{8B7CB91F-10CE-42C2-B9B8-BFF2D3401655}" dt="2026-05-09T12:58:04.706" v="8459" actId="20577"/>
+          <ac:spMkLst>
+            <pc:docMk/>
+            <pc:sldMk cId="2469469424" sldId="322"/>
+            <ac:spMk id="3" creationId="{FF2CBF5E-E258-4CD8-1B47-F4CFE1D148C1}"/>
+          </ac:spMkLst>
+        </pc:spChg>
+      </pc:sldChg>
+      <pc:sldChg chg="modSp mod">
+        <pc:chgData name="Dominique RIGHETTO" userId="512fe077-82ad-424c-88a3-15e852b5861d" providerId="ADAL" clId="{8B7CB91F-10CE-42C2-B9B8-BFF2D3401655}" dt="2026-05-09T12:56:16.270" v="8445" actId="20577"/>
+        <pc:sldMkLst>
+          <pc:docMk/>
+          <pc:sldMk cId="1864351332" sldId="323"/>
+        </pc:sldMkLst>
+        <pc:spChg chg="mod">
+          <ac:chgData name="Dominique RIGHETTO" userId="512fe077-82ad-424c-88a3-15e852b5861d" providerId="ADAL" clId="{8B7CB91F-10CE-42C2-B9B8-BFF2D3401655}" dt="2026-05-09T12:30:47.663" v="8129" actId="790"/>
+          <ac:spMkLst>
+            <pc:docMk/>
+            <pc:sldMk cId="1864351332" sldId="323"/>
+            <ac:spMk id="2" creationId="{D6F0257B-0D8F-597A-7407-0281BEA541A4}"/>
+          </ac:spMkLst>
+        </pc:spChg>
+        <pc:spChg chg="mod">
+          <ac:chgData name="Dominique RIGHETTO" userId="512fe077-82ad-424c-88a3-15e852b5861d" providerId="ADAL" clId="{8B7CB91F-10CE-42C2-B9B8-BFF2D3401655}" dt="2026-05-09T12:56:16.270" v="8445" actId="20577"/>
+          <ac:spMkLst>
+            <pc:docMk/>
+            <pc:sldMk cId="1864351332" sldId="323"/>
+            <ac:spMk id="3" creationId="{67471A2E-57F3-AB6A-4E4E-33D39DC06A46}"/>
+          </ac:spMkLst>
+        </pc:spChg>
+      </pc:sldChg>
+      <pc:sldChg chg="modSp mod">
+        <pc:chgData name="Dominique RIGHETTO" userId="512fe077-82ad-424c-88a3-15e852b5861d" providerId="ADAL" clId="{8B7CB91F-10CE-42C2-B9B8-BFF2D3401655}" dt="2026-05-09T13:20:24.850" v="8692" actId="113"/>
+        <pc:sldMkLst>
+          <pc:docMk/>
+          <pc:sldMk cId="3357811245" sldId="324"/>
+        </pc:sldMkLst>
+        <pc:spChg chg="mod">
+          <ac:chgData name="Dominique RIGHETTO" userId="512fe077-82ad-424c-88a3-15e852b5861d" providerId="ADAL" clId="{8B7CB91F-10CE-42C2-B9B8-BFF2D3401655}" dt="2026-05-09T12:30:47.663" v="8129" actId="790"/>
+          <ac:spMkLst>
+            <pc:docMk/>
+            <pc:sldMk cId="3357811245" sldId="324"/>
+            <ac:spMk id="2" creationId="{99607D1A-0517-89C0-44D0-2201B6D632E0}"/>
+          </ac:spMkLst>
+        </pc:spChg>
+        <pc:spChg chg="mod">
+          <ac:chgData name="Dominique RIGHETTO" userId="512fe077-82ad-424c-88a3-15e852b5861d" providerId="ADAL" clId="{8B7CB91F-10CE-42C2-B9B8-BFF2D3401655}" dt="2026-05-09T13:20:24.850" v="8692" actId="113"/>
+          <ac:spMkLst>
+            <pc:docMk/>
+            <pc:sldMk cId="3357811245" sldId="324"/>
+            <ac:spMk id="3" creationId="{D780FB18-5DA9-5DB8-969B-6A863CD13878}"/>
+          </ac:spMkLst>
+        </pc:spChg>
+        <pc:spChg chg="mod">
+          <ac:chgData name="Dominique RIGHETTO" userId="512fe077-82ad-424c-88a3-15e852b5861d" providerId="ADAL" clId="{8B7CB91F-10CE-42C2-B9B8-BFF2D3401655}" dt="2026-05-09T12:30:47.663" v="8129" actId="790"/>
+          <ac:spMkLst>
+            <pc:docMk/>
+            <pc:sldMk cId="3357811245" sldId="324"/>
+            <ac:spMk id="4" creationId="{0E2B787C-EEA3-8CF3-11B1-F44B3B2C8115}"/>
+          </ac:spMkLst>
+        </pc:spChg>
+      </pc:sldChg>
+      <pc:sldChg chg="addSp delSp modSp mod modAnim">
+        <pc:chgData name="Dominique RIGHETTO" userId="512fe077-82ad-424c-88a3-15e852b5861d" providerId="ADAL" clId="{8B7CB91F-10CE-42C2-B9B8-BFF2D3401655}" dt="2026-05-09T13:19:36.544" v="8690"/>
+        <pc:sldMkLst>
+          <pc:docMk/>
+          <pc:sldMk cId="2828369189" sldId="325"/>
+        </pc:sldMkLst>
+        <pc:spChg chg="mod">
+          <ac:chgData name="Dominique RIGHETTO" userId="512fe077-82ad-424c-88a3-15e852b5861d" providerId="ADAL" clId="{8B7CB91F-10CE-42C2-B9B8-BFF2D3401655}" dt="2026-05-09T12:30:47.663" v="8129" actId="790"/>
+          <ac:spMkLst>
+            <pc:docMk/>
+            <pc:sldMk cId="2828369189" sldId="325"/>
+            <ac:spMk id="2" creationId="{961EA181-EAD7-0C9B-6075-CCAFB9E06DE2}"/>
+          </ac:spMkLst>
+        </pc:spChg>
+        <pc:spChg chg="add mod">
+          <ac:chgData name="Dominique RIGHETTO" userId="512fe077-82ad-424c-88a3-15e852b5861d" providerId="ADAL" clId="{8B7CB91F-10CE-42C2-B9B8-BFF2D3401655}" dt="2026-05-09T13:19:24.535" v="8689" actId="20577"/>
+          <ac:spMkLst>
+            <pc:docMk/>
+            <pc:sldMk cId="2828369189" sldId="325"/>
+            <ac:spMk id="8" creationId="{8758C063-4C3B-FFCD-59BA-9F7D9A7B3B2F}"/>
+          </ac:spMkLst>
+        </pc:spChg>
+        <pc:picChg chg="add del mod modCrop">
+          <ac:chgData name="Dominique RIGHETTO" userId="512fe077-82ad-424c-88a3-15e852b5861d" providerId="ADAL" clId="{8B7CB91F-10CE-42C2-B9B8-BFF2D3401655}" dt="2026-05-09T13:04:01.854" v="8469" actId="478"/>
+          <ac:picMkLst>
+            <pc:docMk/>
+            <pc:sldMk cId="2828369189" sldId="325"/>
+            <ac:picMk id="4" creationId="{6AB16B9B-20BF-08D7-8A7D-932091BD13C6}"/>
+          </ac:picMkLst>
+        </pc:picChg>
+        <pc:picChg chg="del">
+          <ac:chgData name="Dominique RIGHETTO" userId="512fe077-82ad-424c-88a3-15e852b5861d" providerId="ADAL" clId="{8B7CB91F-10CE-42C2-B9B8-BFF2D3401655}" dt="2026-05-09T13:03:19.215" v="8465" actId="478"/>
+          <ac:picMkLst>
+            <pc:docMk/>
+            <pc:sldMk cId="2828369189" sldId="325"/>
+            <ac:picMk id="6" creationId="{F20E73DB-B25D-FC4B-C15E-75CFC79FC828}"/>
+          </ac:picMkLst>
+        </pc:picChg>
+        <pc:picChg chg="add mod modCrop">
+          <ac:chgData name="Dominique RIGHETTO" userId="512fe077-82ad-424c-88a3-15e852b5861d" providerId="ADAL" clId="{8B7CB91F-10CE-42C2-B9B8-BFF2D3401655}" dt="2026-05-09T13:17:43.705" v="8595" actId="1076"/>
+          <ac:picMkLst>
+            <pc:docMk/>
+            <pc:sldMk cId="2828369189" sldId="325"/>
+            <ac:picMk id="7" creationId="{DA3545AE-7F6F-D02F-27A0-8861F173A941}"/>
+          </ac:picMkLst>
+        </pc:picChg>
+      </pc:sldChg>
+      <pc:sldChg chg="modSp mod">
+        <pc:chgData name="Dominique RIGHETTO" userId="512fe077-82ad-424c-88a3-15e852b5861d" providerId="ADAL" clId="{8B7CB91F-10CE-42C2-B9B8-BFF2D3401655}" dt="2026-05-09T13:20:30.745" v="8693" actId="113"/>
+        <pc:sldMkLst>
+          <pc:docMk/>
+          <pc:sldMk cId="1318273276" sldId="326"/>
+        </pc:sldMkLst>
+        <pc:spChg chg="mod">
+          <ac:chgData name="Dominique RIGHETTO" userId="512fe077-82ad-424c-88a3-15e852b5861d" providerId="ADAL" clId="{8B7CB91F-10CE-42C2-B9B8-BFF2D3401655}" dt="2026-05-09T12:30:47.663" v="8129" actId="790"/>
+          <ac:spMkLst>
+            <pc:docMk/>
+            <pc:sldMk cId="1318273276" sldId="326"/>
+            <ac:spMk id="2" creationId="{B253230D-FF16-0731-521D-D75C9FDA4B5D}"/>
+          </ac:spMkLst>
+        </pc:spChg>
+        <pc:spChg chg="mod">
+          <ac:chgData name="Dominique RIGHETTO" userId="512fe077-82ad-424c-88a3-15e852b5861d" providerId="ADAL" clId="{8B7CB91F-10CE-42C2-B9B8-BFF2D3401655}" dt="2026-05-09T13:20:30.745" v="8693" actId="113"/>
+          <ac:spMkLst>
+            <pc:docMk/>
+            <pc:sldMk cId="1318273276" sldId="326"/>
+            <ac:spMk id="3" creationId="{05681DCE-E000-7EA1-F0DD-4559669AEBCB}"/>
+          </ac:spMkLst>
+        </pc:spChg>
+        <pc:spChg chg="mod">
+          <ac:chgData name="Dominique RIGHETTO" userId="512fe077-82ad-424c-88a3-15e852b5861d" providerId="ADAL" clId="{8B7CB91F-10CE-42C2-B9B8-BFF2D3401655}" dt="2026-05-09T12:30:47.663" v="8129" actId="790"/>
+          <ac:spMkLst>
+            <pc:docMk/>
+            <pc:sldMk cId="1318273276" sldId="326"/>
+            <ac:spMk id="4" creationId="{E4B76E6F-8926-EBC9-DD7E-FE5362608BC0}"/>
+          </ac:spMkLst>
+        </pc:spChg>
+      </pc:sldChg>
+      <pc:sldChg chg="addSp delSp modSp mod modAnim">
+        <pc:chgData name="Dominique RIGHETTO" userId="512fe077-82ad-424c-88a3-15e852b5861d" providerId="ADAL" clId="{8B7CB91F-10CE-42C2-B9B8-BFF2D3401655}" dt="2026-05-09T13:19:39.914" v="8691"/>
+        <pc:sldMkLst>
+          <pc:docMk/>
+          <pc:sldMk cId="3737270670" sldId="327"/>
+        </pc:sldMkLst>
+        <pc:spChg chg="mod">
+          <ac:chgData name="Dominique RIGHETTO" userId="512fe077-82ad-424c-88a3-15e852b5861d" providerId="ADAL" clId="{8B7CB91F-10CE-42C2-B9B8-BFF2D3401655}" dt="2026-05-09T12:30:47.663" v="8129" actId="790"/>
+          <ac:spMkLst>
+            <pc:docMk/>
+            <pc:sldMk cId="3737270670" sldId="327"/>
+            <ac:spMk id="2" creationId="{25605F23-5A77-C36A-9682-F6BD4D1007A7}"/>
+          </ac:spMkLst>
+        </pc:spChg>
+        <pc:spChg chg="add mod">
+          <ac:chgData name="Dominique RIGHETTO" userId="512fe077-82ad-424c-88a3-15e852b5861d" providerId="ADAL" clId="{8B7CB91F-10CE-42C2-B9B8-BFF2D3401655}" dt="2026-05-09T13:18:45.003" v="8688" actId="14100"/>
+          <ac:spMkLst>
+            <pc:docMk/>
+            <pc:sldMk cId="3737270670" sldId="327"/>
+            <ac:spMk id="5" creationId="{32E4286E-89EF-2D2A-0229-506DF7FE3ECA}"/>
+          </ac:spMkLst>
+        </pc:spChg>
+        <pc:picChg chg="add mod">
+          <ac:chgData name="Dominique RIGHETTO" userId="512fe077-82ad-424c-88a3-15e852b5861d" providerId="ADAL" clId="{8B7CB91F-10CE-42C2-B9B8-BFF2D3401655}" dt="2026-05-09T13:18:07.435" v="8598" actId="1076"/>
+          <ac:picMkLst>
+            <pc:docMk/>
+            <pc:sldMk cId="3737270670" sldId="327"/>
+            <ac:picMk id="4" creationId="{8EA0712E-D652-C226-B9E6-D733FC10F768}"/>
+          </ac:picMkLst>
+        </pc:picChg>
+        <pc:picChg chg="del">
+          <ac:chgData name="Dominique RIGHETTO" userId="512fe077-82ad-424c-88a3-15e852b5861d" providerId="ADAL" clId="{8B7CB91F-10CE-42C2-B9B8-BFF2D3401655}" dt="2026-05-09T13:12:32.824" v="8475" actId="478"/>
+          <ac:picMkLst>
+            <pc:docMk/>
+            <pc:sldMk cId="3737270670" sldId="327"/>
+            <ac:picMk id="8" creationId="{B4048B82-FBF4-4A7F-8FBB-5B914E6206FA}"/>
+          </ac:picMkLst>
+        </pc:picChg>
+      </pc:sldChg>
+      <pc:sldChg chg="modSp mod">
+        <pc:chgData name="Dominique RIGHETTO" userId="512fe077-82ad-424c-88a3-15e852b5861d" providerId="ADAL" clId="{8B7CB91F-10CE-42C2-B9B8-BFF2D3401655}" dt="2026-05-09T12:30:47.663" v="8129" actId="790"/>
+        <pc:sldMkLst>
+          <pc:docMk/>
+          <pc:sldMk cId="1669701748" sldId="328"/>
+        </pc:sldMkLst>
+        <pc:spChg chg="mod">
+          <ac:chgData name="Dominique RIGHETTO" userId="512fe077-82ad-424c-88a3-15e852b5861d" providerId="ADAL" clId="{8B7CB91F-10CE-42C2-B9B8-BFF2D3401655}" dt="2026-05-09T12:30:47.663" v="8129" actId="790"/>
+          <ac:spMkLst>
+            <pc:docMk/>
+            <pc:sldMk cId="1669701748" sldId="328"/>
+            <ac:spMk id="2" creationId="{DB51865A-00A9-5E7D-A929-9DDAA73724EE}"/>
+          </ac:spMkLst>
+        </pc:spChg>
+        <pc:spChg chg="mod">
+          <ac:chgData name="Dominique RIGHETTO" userId="512fe077-82ad-424c-88a3-15e852b5861d" providerId="ADAL" clId="{8B7CB91F-10CE-42C2-B9B8-BFF2D3401655}" dt="2026-05-09T12:30:47.663" v="8129" actId="790"/>
+          <ac:spMkLst>
+            <pc:docMk/>
+            <pc:sldMk cId="1669701748" sldId="328"/>
+            <ac:spMk id="3" creationId="{A7F83F62-19C4-CAB5-9BFB-6728903D6D68}"/>
+          </ac:spMkLst>
+        </pc:spChg>
+      </pc:sldChg>
+      <pc:sldChg chg="modSp del mod">
+        <pc:chgData name="Dominique RIGHETTO" userId="512fe077-82ad-424c-88a3-15e852b5861d" providerId="ADAL" clId="{8B7CB91F-10CE-42C2-B9B8-BFF2D3401655}" dt="2026-05-09T13:12:46.066" v="8480" actId="47"/>
+        <pc:sldMkLst>
+          <pc:docMk/>
+          <pc:sldMk cId="2072987811" sldId="329"/>
+        </pc:sldMkLst>
+        <pc:spChg chg="mod">
+          <ac:chgData name="Dominique RIGHETTO" userId="512fe077-82ad-424c-88a3-15e852b5861d" providerId="ADAL" clId="{8B7CB91F-10CE-42C2-B9B8-BFF2D3401655}" dt="2026-05-09T12:30:47.663" v="8129" actId="790"/>
+          <ac:spMkLst>
+            <pc:docMk/>
+            <pc:sldMk cId="2072987811" sldId="329"/>
+            <ac:spMk id="2" creationId="{981167CB-24A0-FE75-AD5B-86EBD429FDAA}"/>
+          </ac:spMkLst>
+        </pc:spChg>
+      </pc:sldChg>
+      <pc:sldChg chg="addSp modSp add mod modTransition">
+        <pc:chgData name="Dominique RIGHETTO" userId="512fe077-82ad-424c-88a3-15e852b5861d" providerId="ADAL" clId="{8B7CB91F-10CE-42C2-B9B8-BFF2D3401655}" dt="2026-05-09T14:00:44.903" v="8794" actId="20577"/>
+        <pc:sldMkLst>
+          <pc:docMk/>
+          <pc:sldMk cId="3474088291" sldId="330"/>
+        </pc:sldMkLst>
+        <pc:spChg chg="mod">
+          <ac:chgData name="Dominique RIGHETTO" userId="512fe077-82ad-424c-88a3-15e852b5861d" providerId="ADAL" clId="{8B7CB91F-10CE-42C2-B9B8-BFF2D3401655}" dt="2026-05-09T14:00:44.903" v="8794" actId="20577"/>
+          <ac:spMkLst>
+            <pc:docMk/>
+            <pc:sldMk cId="3474088291" sldId="330"/>
+            <ac:spMk id="2" creationId="{FAC46617-5CFF-4AA6-184B-21566F6883A3}"/>
+          </ac:spMkLst>
+        </pc:spChg>
+        <pc:spChg chg="mod">
+          <ac:chgData name="Dominique RIGHETTO" userId="512fe077-82ad-424c-88a3-15e852b5861d" providerId="ADAL" clId="{8B7CB91F-10CE-42C2-B9B8-BFF2D3401655}" dt="2026-05-09T12:30:47.663" v="8129" actId="790"/>
+          <ac:spMkLst>
+            <pc:docMk/>
+            <pc:sldMk cId="3474088291" sldId="330"/>
+            <ac:spMk id="3" creationId="{A35AEF19-125B-3C3A-9C1D-49869541C97D}"/>
+          </ac:spMkLst>
+        </pc:spChg>
+        <pc:spChg chg="add mod">
+          <ac:chgData name="Dominique RIGHETTO" userId="512fe077-82ad-424c-88a3-15e852b5861d" providerId="ADAL" clId="{8B7CB91F-10CE-42C2-B9B8-BFF2D3401655}" dt="2026-05-09T12:30:47.663" v="8129" actId="790"/>
+          <ac:spMkLst>
+            <pc:docMk/>
+            <pc:sldMk cId="3474088291" sldId="330"/>
+            <ac:spMk id="4" creationId="{18BA3881-C1BA-2385-3947-E2C6162D7205}"/>
+          </ac:spMkLst>
+        </pc:spChg>
+        <pc:picChg chg="mod modCrop">
+          <ac:chgData name="Dominique RIGHETTO" userId="512fe077-82ad-424c-88a3-15e852b5861d" providerId="ADAL" clId="{8B7CB91F-10CE-42C2-B9B8-BFF2D3401655}" dt="2026-05-09T11:58:55.678" v="8015" actId="1076"/>
+          <ac:picMkLst>
+            <pc:docMk/>
+            <pc:sldMk cId="3474088291" sldId="330"/>
+            <ac:picMk id="5" creationId="{D2F4ED0F-4FAA-D797-ABF1-3F2F38292DB1}"/>
+          </ac:picMkLst>
+        </pc:picChg>
+      </pc:sldChg>
+      <pc:sldChg chg="addSp delSp modSp add mod modTransition">
+        <pc:chgData name="Dominique RIGHETTO" userId="512fe077-82ad-424c-88a3-15e852b5861d" providerId="ADAL" clId="{8B7CB91F-10CE-42C2-B9B8-BFF2D3401655}" dt="2026-05-09T13:56:42.359" v="8738" actId="6549"/>
+        <pc:sldMkLst>
+          <pc:docMk/>
+          <pc:sldMk cId="3164403635" sldId="331"/>
+        </pc:sldMkLst>
+        <pc:spChg chg="mod">
+          <ac:chgData name="Dominique RIGHETTO" userId="512fe077-82ad-424c-88a3-15e852b5861d" providerId="ADAL" clId="{8B7CB91F-10CE-42C2-B9B8-BFF2D3401655}" dt="2026-05-09T13:56:42.359" v="8738" actId="6549"/>
+          <ac:spMkLst>
+            <pc:docMk/>
+            <pc:sldMk cId="3164403635" sldId="331"/>
+            <ac:spMk id="2" creationId="{A4F23D99-F75E-7B2E-65B0-14CBE99C51FB}"/>
+          </ac:spMkLst>
+        </pc:spChg>
+        <pc:spChg chg="del">
+          <ac:chgData name="Dominique RIGHETTO" userId="512fe077-82ad-424c-88a3-15e852b5861d" providerId="ADAL" clId="{8B7CB91F-10CE-42C2-B9B8-BFF2D3401655}" dt="2026-05-09T11:59:30.857" v="8021" actId="478"/>
+          <ac:spMkLst>
+            <pc:docMk/>
+            <pc:sldMk cId="3164403635" sldId="331"/>
+            <ac:spMk id="3" creationId="{8CB94F0A-59A3-9707-6423-51AB30002290}"/>
+          </ac:spMkLst>
+        </pc:spChg>
+        <pc:spChg chg="add del mod">
+          <ac:chgData name="Dominique RIGHETTO" userId="512fe077-82ad-424c-88a3-15e852b5861d" providerId="ADAL" clId="{8B7CB91F-10CE-42C2-B9B8-BFF2D3401655}" dt="2026-05-09T11:59:33.953" v="8022" actId="478"/>
+          <ac:spMkLst>
+            <pc:docMk/>
+            <pc:sldMk cId="3164403635" sldId="331"/>
+            <ac:spMk id="6" creationId="{7C6F5D1C-E8E4-512D-2E6C-F249A3EBDD56}"/>
+          </ac:spMkLst>
+        </pc:spChg>
+        <pc:spChg chg="add mod">
+          <ac:chgData name="Dominique RIGHETTO" userId="512fe077-82ad-424c-88a3-15e852b5861d" providerId="ADAL" clId="{8B7CB91F-10CE-42C2-B9B8-BFF2D3401655}" dt="2026-05-09T12:30:47.663" v="8129" actId="790"/>
+          <ac:spMkLst>
+            <pc:docMk/>
+            <pc:sldMk cId="3164403635" sldId="331"/>
+            <ac:spMk id="7" creationId="{5C6D2E9A-D10D-9758-CF1D-A854D4EFF41B}"/>
+          </ac:spMkLst>
+        </pc:spChg>
+        <pc:spChg chg="add mod">
+          <ac:chgData name="Dominique RIGHETTO" userId="512fe077-82ad-424c-88a3-15e852b5861d" providerId="ADAL" clId="{8B7CB91F-10CE-42C2-B9B8-BFF2D3401655}" dt="2026-05-09T12:30:47.663" v="8129" actId="790"/>
+          <ac:spMkLst>
+            <pc:docMk/>
+            <pc:sldMk cId="3164403635" sldId="331"/>
+            <ac:spMk id="8" creationId="{4D10DD66-92D0-5535-DB34-A54B6206BF0E}"/>
+          </ac:spMkLst>
+        </pc:spChg>
+        <pc:picChg chg="mod modCrop">
+          <ac:chgData name="Dominique RIGHETTO" userId="512fe077-82ad-424c-88a3-15e852b5861d" providerId="ADAL" clId="{8B7CB91F-10CE-42C2-B9B8-BFF2D3401655}" dt="2026-05-09T12:00:31.150" v="8033" actId="1076"/>
+          <ac:picMkLst>
+            <pc:docMk/>
+            <pc:sldMk cId="3164403635" sldId="331"/>
+            <ac:picMk id="5" creationId="{2D5AE245-00BE-A16E-8570-F052FDF0B804}"/>
+          </ac:picMkLst>
+        </pc:picChg>
+      </pc:sldChg>
+      <pc:sldChg chg="addSp delSp modSp add mod modAnim">
+        <pc:chgData name="Dominique RIGHETTO" userId="512fe077-82ad-424c-88a3-15e852b5861d" providerId="ADAL" clId="{8B7CB91F-10CE-42C2-B9B8-BFF2D3401655}" dt="2026-05-09T13:58:22.292" v="8790" actId="20577"/>
+        <pc:sldMkLst>
+          <pc:docMk/>
+          <pc:sldMk cId="1273305529" sldId="332"/>
+        </pc:sldMkLst>
+        <pc:spChg chg="mod">
+          <ac:chgData name="Dominique RIGHETTO" userId="512fe077-82ad-424c-88a3-15e852b5861d" providerId="ADAL" clId="{8B7CB91F-10CE-42C2-B9B8-BFF2D3401655}" dt="2026-05-09T13:58:22.292" v="8790" actId="20577"/>
+          <ac:spMkLst>
+            <pc:docMk/>
+            <pc:sldMk cId="1273305529" sldId="332"/>
+            <ac:spMk id="2" creationId="{02B81B4E-1561-9B47-389A-F088C64829B2}"/>
+          </ac:spMkLst>
+        </pc:spChg>
+        <pc:spChg chg="del">
+          <ac:chgData name="Dominique RIGHETTO" userId="512fe077-82ad-424c-88a3-15e852b5861d" providerId="ADAL" clId="{8B7CB91F-10CE-42C2-B9B8-BFF2D3401655}" dt="2026-05-09T12:29:04.049" v="8096" actId="478"/>
+          <ac:spMkLst>
+            <pc:docMk/>
+            <pc:sldMk cId="1273305529" sldId="332"/>
+            <ac:spMk id="3" creationId="{EBEC8905-924F-453D-C40A-F4194E64E7E9}"/>
+          </ac:spMkLst>
+        </pc:spChg>
+        <pc:spChg chg="add del mod">
+          <ac:chgData name="Dominique RIGHETTO" userId="512fe077-82ad-424c-88a3-15e852b5861d" providerId="ADAL" clId="{8B7CB91F-10CE-42C2-B9B8-BFF2D3401655}" dt="2026-05-09T12:29:12.750" v="8097" actId="478"/>
+          <ac:spMkLst>
+            <pc:docMk/>
+            <pc:sldMk cId="1273305529" sldId="332"/>
+            <ac:spMk id="6" creationId="{E1F61B0D-CE17-59FF-276A-B99E4C3FDC56}"/>
+          </ac:spMkLst>
+        </pc:spChg>
+        <pc:spChg chg="add mod">
+          <ac:chgData name="Dominique RIGHETTO" userId="512fe077-82ad-424c-88a3-15e852b5861d" providerId="ADAL" clId="{8B7CB91F-10CE-42C2-B9B8-BFF2D3401655}" dt="2026-05-09T12:32:27.316" v="8227" actId="20577"/>
+          <ac:spMkLst>
+            <pc:docMk/>
+            <pc:sldMk cId="1273305529" sldId="332"/>
+            <ac:spMk id="9" creationId="{B08EA7B6-F031-68EF-BFD0-0171D484A263}"/>
+          </ac:spMkLst>
+        </pc:spChg>
+        <pc:spChg chg="add mod">
+          <ac:chgData name="Dominique RIGHETTO" userId="512fe077-82ad-424c-88a3-15e852b5861d" providerId="ADAL" clId="{8B7CB91F-10CE-42C2-B9B8-BFF2D3401655}" dt="2026-05-09T12:35:04.743" v="8361" actId="20577"/>
+          <ac:spMkLst>
+            <pc:docMk/>
+            <pc:sldMk cId="1273305529" sldId="332"/>
+            <ac:spMk id="10" creationId="{4136DF96-760C-47AF-AA9D-BD79405E47C4}"/>
+          </ac:spMkLst>
+        </pc:spChg>
+        <pc:spChg chg="add mod">
+          <ac:chgData name="Dominique RIGHETTO" userId="512fe077-82ad-424c-88a3-15e852b5861d" providerId="ADAL" clId="{8B7CB91F-10CE-42C2-B9B8-BFF2D3401655}" dt="2026-05-09T12:35:02.105" v="8360" actId="20577"/>
+          <ac:spMkLst>
+            <pc:docMk/>
+            <pc:sldMk cId="1273305529" sldId="332"/>
+            <ac:spMk id="11" creationId="{5CD7E399-0A5A-D95C-E502-C9A774A09E38}"/>
+          </ac:spMkLst>
+        </pc:spChg>
+        <pc:spChg chg="add mod">
+          <ac:chgData name="Dominique RIGHETTO" userId="512fe077-82ad-424c-88a3-15e852b5861d" providerId="ADAL" clId="{8B7CB91F-10CE-42C2-B9B8-BFF2D3401655}" dt="2026-05-09T12:33:38.490" v="8355" actId="14100"/>
+          <ac:spMkLst>
+            <pc:docMk/>
+            <pc:sldMk cId="1273305529" sldId="332"/>
+            <ac:spMk id="12" creationId="{1D3AB877-F8A2-1F5B-5AA4-0999A0998EC5}"/>
+          </ac:spMkLst>
+        </pc:spChg>
+        <pc:picChg chg="del">
+          <ac:chgData name="Dominique RIGHETTO" userId="512fe077-82ad-424c-88a3-15e852b5861d" providerId="ADAL" clId="{8B7CB91F-10CE-42C2-B9B8-BFF2D3401655}" dt="2026-05-09T12:29:00.218" v="8095" actId="478"/>
+          <ac:picMkLst>
+            <pc:docMk/>
+            <pc:sldMk cId="1273305529" sldId="332"/>
+            <ac:picMk id="5" creationId="{21780B12-A428-58A1-E839-785D44F4FF27}"/>
+          </ac:picMkLst>
+        </pc:picChg>
+        <pc:picChg chg="add mod">
+          <ac:chgData name="Dominique RIGHETTO" userId="512fe077-82ad-424c-88a3-15e852b5861d" providerId="ADAL" clId="{8B7CB91F-10CE-42C2-B9B8-BFF2D3401655}" dt="2026-05-09T12:29:32.099" v="8101" actId="14861"/>
+          <ac:picMkLst>
+            <pc:docMk/>
+            <pc:sldMk cId="1273305529" sldId="332"/>
+            <ac:picMk id="8" creationId="{E187C630-AFC0-4518-3446-3E04AE825682}"/>
+          </ac:picMkLst>
+        </pc:picChg>
+      </pc:sldChg>
+      <pc:sldChg chg="modSp add mod modTransition">
+        <pc:chgData name="Dominique RIGHETTO" userId="512fe077-82ad-424c-88a3-15e852b5861d" providerId="ADAL" clId="{8B7CB91F-10CE-42C2-B9B8-BFF2D3401655}" dt="2026-05-09T13:14:30.751" v="8506"/>
+        <pc:sldMkLst>
+          <pc:docMk/>
+          <pc:sldMk cId="1699415481" sldId="333"/>
+        </pc:sldMkLst>
+        <pc:picChg chg="mod modCrop">
+          <ac:chgData name="Dominique RIGHETTO" userId="512fe077-82ad-424c-88a3-15e852b5861d" providerId="ADAL" clId="{8B7CB91F-10CE-42C2-B9B8-BFF2D3401655}" dt="2026-05-09T13:13:56.225" v="8499" actId="1076"/>
+          <ac:picMkLst>
+            <pc:docMk/>
+            <pc:sldMk cId="1699415481" sldId="333"/>
+            <ac:picMk id="4" creationId="{48119B59-00E5-1A7E-5111-4086316DF5F5}"/>
+          </ac:picMkLst>
+        </pc:picChg>
+      </pc:sldChg>
+      <pc:sldChg chg="modSp add mod modTransition">
+        <pc:chgData name="Dominique RIGHETTO" userId="512fe077-82ad-424c-88a3-15e852b5861d" providerId="ADAL" clId="{8B7CB91F-10CE-42C2-B9B8-BFF2D3401655}" dt="2026-05-09T13:14:25.070" v="8505"/>
+        <pc:sldMkLst>
+          <pc:docMk/>
+          <pc:sldMk cId="1173886756" sldId="334"/>
+        </pc:sldMkLst>
+        <pc:picChg chg="mod modCrop">
+          <ac:chgData name="Dominique RIGHETTO" userId="512fe077-82ad-424c-88a3-15e852b5861d" providerId="ADAL" clId="{8B7CB91F-10CE-42C2-B9B8-BFF2D3401655}" dt="2026-05-09T13:13:12.834" v="8490" actId="1076"/>
+          <ac:picMkLst>
+            <pc:docMk/>
+            <pc:sldMk cId="1173886756" sldId="334"/>
+            <ac:picMk id="4" creationId="{5BBC0FEA-5A12-C2EC-C948-F82A385F6F28}"/>
+          </ac:picMkLst>
+        </pc:picChg>
+      </pc:sldChg>
+      <pc:sldChg chg="modSp add mod modTransition">
+        <pc:chgData name="Dominique RIGHETTO" userId="512fe077-82ad-424c-88a3-15e852b5861d" providerId="ADAL" clId="{8B7CB91F-10CE-42C2-B9B8-BFF2D3401655}" dt="2026-05-09T13:14:35.490" v="8507"/>
+        <pc:sldMkLst>
+          <pc:docMk/>
+          <pc:sldMk cId="3164441729" sldId="335"/>
+        </pc:sldMkLst>
+        <pc:picChg chg="mod modCrop">
+          <ac:chgData name="Dominique RIGHETTO" userId="512fe077-82ad-424c-88a3-15e852b5861d" providerId="ADAL" clId="{8B7CB91F-10CE-42C2-B9B8-BFF2D3401655}" dt="2026-05-09T13:14:20.468" v="8504" actId="1076"/>
+          <ac:picMkLst>
+            <pc:docMk/>
+            <pc:sldMk cId="3164441729" sldId="335"/>
+            <ac:picMk id="4" creationId="{D88061FF-665C-234A-C5B0-67AA9A58B3B0}"/>
+          </ac:picMkLst>
+        </pc:picChg>
       </pc:sldChg>
     </pc:docChg>
   </pc:docChgLst>
@@ -267,7 +1754,7 @@
           <a:p>
             <a:fld id="{08A2296D-8F38-4121-9F4D-17CC019C25D9}" type="datetimeFigureOut">
               <a:rPr lang="fr-FR" smtClean="0"/>
-              <a:t>05/05/2026</a:t>
+              <a:t>09/05/2026</a:t>
             </a:fld>
             <a:endParaRPr lang="fr-FR"/>
           </a:p>
@@ -43067,10 +44554,13 @@
           <a:lstStyle/>
           <a:p>
             <a:r>
-              <a:rPr lang="en-US" dirty="0"/>
+              <a:rPr lang="en-US" noProof="0" dirty="0">
+                <a:solidFill>
+                  <a:schemeClr val="accent5"/>
+                </a:solidFill>
+              </a:rPr>
               <a:t>Devil is in the Payloads.</a:t>
             </a:r>
-            <a:endParaRPr lang="fr-FR" dirty="0"/>
           </a:p>
         </p:txBody>
       </p:sp>
@@ -43101,7 +44591,7 @@
           <a:lstStyle/>
           <a:p>
             <a:r>
-              <a:rPr lang="en-US" dirty="0"/>
+              <a:rPr lang="en-US" noProof="0" dirty="0"/>
               <a:t>The grueling journey of implementing a file upload feature.</a:t>
             </a:r>
           </a:p>
@@ -43137,7 +44627,7 @@
           <a:p>
             <a:pPr algn="l"/>
             <a:r>
-              <a:rPr lang="en-US" sz="1600" dirty="0">
+              <a:rPr lang="en-US" sz="1600" noProof="0" dirty="0">
                 <a:solidFill>
                   <a:schemeClr val="bg1"/>
                 </a:solidFill>
@@ -43145,7 +44635,7 @@
               <a:t>🌍 </a:t>
             </a:r>
             <a:r>
-              <a:rPr lang="fr-FR" sz="1600" dirty="0">
+              <a:rPr lang="en-US" sz="1600" noProof="0" dirty="0">
                 <a:solidFill>
                   <a:schemeClr val="bg1"/>
                 </a:solidFill>
@@ -43159,7 +44649,7 @@
               </a:rPr>
               <a:t>Dominique Righetto</a:t>
             </a:r>
-            <a:endParaRPr lang="fr-FR" sz="1600" dirty="0">
+            <a:endParaRPr lang="en-US" sz="1600" noProof="0" dirty="0">
               <a:solidFill>
                 <a:schemeClr val="bg1"/>
               </a:solidFill>
@@ -43237,7 +44727,7 @@
           <a:lstStyle/>
           <a:p>
             <a:r>
-              <a:rPr lang="en-US" dirty="0"/>
+              <a:rPr lang="en-US" noProof="0" dirty="0"/>
               <a:t>📖 Let’s the story begin – Setup for the tests</a:t>
             </a:r>
           </a:p>
@@ -43270,7 +44760,7 @@
           <a:lstStyle/>
           <a:p>
             <a:r>
-              <a:rPr lang="en-US" sz="2800" b="0" dirty="0">
+              <a:rPr lang="en-US" sz="2800" b="0" noProof="0" dirty="0">
                 <a:solidFill>
                   <a:schemeClr val="tx2"/>
                 </a:solidFill>
@@ -43282,7 +44772,7 @@
             <a:pPr marL="0" indent="0">
               <a:buNone/>
             </a:pPr>
-            <a:endParaRPr lang="en-US" sz="2800" b="0" dirty="0">
+            <a:endParaRPr lang="en-US" sz="2800" b="0" noProof="0" dirty="0">
               <a:solidFill>
                 <a:schemeClr val="tx2"/>
               </a:solidFill>
@@ -43327,6 +44817,110 @@
           </a:effectLst>
         </p:spPr>
       </p:pic>
+      <p:sp>
+        <p:nvSpPr>
+          <p:cNvPr id="4" name="Rectangle 3">
+            <a:extLst>
+              <a:ext uri="{FF2B5EF4-FFF2-40B4-BE49-F238E27FC236}">
+                <a16:creationId xmlns:a16="http://schemas.microsoft.com/office/drawing/2014/main" id="{DB4E5291-4FF3-C031-1DA5-26005B6E6CC0}"/>
+              </a:ext>
+            </a:extLst>
+          </p:cNvPr>
+          <p:cNvSpPr/>
+          <p:nvPr/>
+        </p:nvSpPr>
+        <p:spPr>
+          <a:xfrm>
+            <a:off x="2381693" y="3157870"/>
+            <a:ext cx="4614530" cy="1095153"/>
+          </a:xfrm>
+          <a:prstGeom prst="rect">
+            <a:avLst/>
+          </a:prstGeom>
+          <a:noFill/>
+          <a:ln w="31750">
+            <a:solidFill>
+              <a:schemeClr val="accent6"/>
+            </a:solidFill>
+          </a:ln>
+        </p:spPr>
+        <p:style>
+          <a:lnRef idx="2">
+            <a:schemeClr val="accent1">
+              <a:shade val="50000"/>
+            </a:schemeClr>
+          </a:lnRef>
+          <a:fillRef idx="1">
+            <a:schemeClr val="accent1"/>
+          </a:fillRef>
+          <a:effectRef idx="0">
+            <a:schemeClr val="accent1"/>
+          </a:effectRef>
+          <a:fontRef idx="minor">
+            <a:schemeClr val="lt1"/>
+          </a:fontRef>
+        </p:style>
+        <p:txBody>
+          <a:bodyPr rtlCol="0" anchor="ctr"/>
+          <a:lstStyle/>
+          <a:p>
+            <a:pPr algn="ctr"/>
+            <a:endParaRPr lang="en-US" noProof="0" dirty="0"/>
+          </a:p>
+        </p:txBody>
+      </p:sp>
+      <p:sp>
+        <p:nvSpPr>
+          <p:cNvPr id="6" name="Rectangle 5">
+            <a:extLst>
+              <a:ext uri="{FF2B5EF4-FFF2-40B4-BE49-F238E27FC236}">
+                <a16:creationId xmlns:a16="http://schemas.microsoft.com/office/drawing/2014/main" id="{19B2A4CF-87A8-DAA1-7D37-4DD3141B455D}"/>
+              </a:ext>
+            </a:extLst>
+          </p:cNvPr>
+          <p:cNvSpPr/>
+          <p:nvPr/>
+        </p:nvSpPr>
+        <p:spPr>
+          <a:xfrm>
+            <a:off x="2381692" y="5688420"/>
+            <a:ext cx="7666075" cy="237928"/>
+          </a:xfrm>
+          <a:prstGeom prst="rect">
+            <a:avLst/>
+          </a:prstGeom>
+          <a:noFill/>
+          <a:ln w="31750">
+            <a:solidFill>
+              <a:schemeClr val="accent6"/>
+            </a:solidFill>
+          </a:ln>
+        </p:spPr>
+        <p:style>
+          <a:lnRef idx="2">
+            <a:schemeClr val="accent1">
+              <a:shade val="50000"/>
+            </a:schemeClr>
+          </a:lnRef>
+          <a:fillRef idx="1">
+            <a:schemeClr val="accent1"/>
+          </a:fillRef>
+          <a:effectRef idx="0">
+            <a:schemeClr val="accent1"/>
+          </a:effectRef>
+          <a:fontRef idx="minor">
+            <a:schemeClr val="lt1"/>
+          </a:fontRef>
+        </p:style>
+        <p:txBody>
+          <a:bodyPr rtlCol="0" anchor="ctr"/>
+          <a:lstStyle/>
+          <a:p>
+            <a:pPr algn="ctr"/>
+            <a:endParaRPr lang="en-US" noProof="0" dirty="0"/>
+          </a:p>
+        </p:txBody>
+      </p:sp>
     </p:spTree>
     <p:extLst>
       <p:ext uri="{BB962C8B-B14F-4D97-AF65-F5344CB8AC3E}">
@@ -43397,8 +44991,8 @@
           <a:lstStyle/>
           <a:p>
             <a:r>
-              <a:rPr lang="en-US" dirty="0"/>
-              <a:t>📖 Let’s the story begin – Round n°1</a:t>
+              <a:rPr lang="en-US" noProof="0" dirty="0"/>
+              <a:t>📖 Round n°1</a:t>
             </a:r>
           </a:p>
         </p:txBody>
@@ -43430,7 +45024,7 @@
           <a:lstStyle/>
           <a:p>
             <a:r>
-              <a:rPr lang="en-US" sz="2800" b="0" dirty="0">
+              <a:rPr lang="en-US" sz="2800" b="0" noProof="0" dirty="0">
                 <a:solidFill>
                   <a:schemeClr val="tx2"/>
                 </a:solidFill>
@@ -43439,7 +45033,7 @@
             </a:r>
           </a:p>
           <a:p>
-            <a:endParaRPr lang="en-US" sz="2800" b="0" dirty="0">
+            <a:endParaRPr lang="en-US" sz="2800" b="0" noProof="0" dirty="0">
               <a:solidFill>
                 <a:schemeClr val="tx2"/>
               </a:solidFill>
@@ -43450,7 +45044,7 @@
               <a:buNone/>
             </a:pPr>
             <a:r>
-              <a:rPr lang="en-US" sz="2800" b="0" dirty="0">
+              <a:rPr lang="en-US" sz="2800" b="0" noProof="0" dirty="0">
                 <a:solidFill>
                   <a:schemeClr val="tx2"/>
                 </a:solidFill>
@@ -43460,35 +45054,19 @@
           </a:p>
           <a:p>
             <a:r>
-              <a:rPr lang="en-US" sz="2800" b="0" dirty="0">
+              <a:rPr lang="en-US" sz="2800" b="0" noProof="0" dirty="0">
                 <a:solidFill>
                   <a:schemeClr val="tx2"/>
                 </a:solidFill>
               </a:rPr>
-              <a:t> The goal was to </a:t>
-            </a:r>
-            <a:r>
-              <a:rPr lang="en-US" sz="2800" b="0">
-                <a:solidFill>
-                  <a:schemeClr val="tx2"/>
-                </a:solidFill>
-              </a:rPr>
-              <a:t>test if </a:t>
-            </a:r>
-            <a:r>
-              <a:rPr lang="en-US" sz="2800" b="0" dirty="0">
-                <a:solidFill>
-                  <a:schemeClr val="tx2"/>
-                </a:solidFill>
-              </a:rPr>
-              <a:t>the service ensure that the provided file is a valid PDF file:</a:t>
+              <a:t> The goal was to test if the service ensure that the provided file is a valid PDF file:</a:t>
             </a:r>
           </a:p>
           <a:p>
             <a:pPr marL="0" indent="0">
               <a:buNone/>
             </a:pPr>
-            <a:endParaRPr lang="en-US" sz="2800" b="0" dirty="0">
+            <a:endParaRPr lang="en-US" sz="2800" b="0" noProof="0" dirty="0">
               <a:solidFill>
                 <a:schemeClr val="tx2"/>
               </a:solidFill>
@@ -43640,8 +45218,8 @@
           <a:lstStyle/>
           <a:p>
             <a:r>
-              <a:rPr lang="en-US" dirty="0"/>
-              <a:t>📖 Let’s the story begin – Round n°1</a:t>
+              <a:rPr lang="en-US" noProof="0" dirty="0"/>
+              <a:t>📖 Round n°1</a:t>
             </a:r>
           </a:p>
         </p:txBody>
@@ -43673,18 +45251,34 @@
           <a:lstStyle/>
           <a:p>
             <a:r>
-              <a:rPr lang="en-US" sz="2800" b="0" dirty="0">
+              <a:rPr lang="en-US" sz="2800" b="0" noProof="0" dirty="0">
                 <a:solidFill>
                   <a:schemeClr val="tx2"/>
                 </a:solidFill>
               </a:rPr>
-              <a:t> 🤔 Test failed so the following additional validation was proposed to the team:</a:t>
+              <a:t> 🤔 </a:t>
+            </a:r>
+            <a:r>
+              <a:rPr lang="en-US" sz="2800" b="0" noProof="0" dirty="0">
+                <a:solidFill>
+                  <a:schemeClr val="accent5"/>
+                </a:solidFill>
+              </a:rPr>
+              <a:t>Test failed </a:t>
+            </a:r>
+            <a:r>
+              <a:rPr lang="en-US" sz="2800" b="0" noProof="0" dirty="0">
+                <a:solidFill>
+                  <a:schemeClr val="tx2"/>
+                </a:solidFill>
+              </a:rPr>
+              <a:t>so the following additional validation was proposed to the team:</a:t>
             </a:r>
           </a:p>
           <a:p>
             <a:pPr lvl="1"/>
             <a:r>
-              <a:rPr lang="en-US" sz="2400" dirty="0"/>
+              <a:rPr lang="en-US" sz="2400" noProof="0" dirty="0"/>
               <a:t>Ensure that the provided file is a valid PDF by try loading it via a PDF parser.</a:t>
             </a:r>
           </a:p>
@@ -43692,7 +45286,7 @@
             <a:pPr marL="0" lvl="1" indent="0">
               <a:buNone/>
             </a:pPr>
-            <a:endParaRPr lang="en-US" sz="2400" b="0" dirty="0">
+            <a:endParaRPr lang="en-US" sz="2400" b="0" noProof="0" dirty="0">
               <a:solidFill>
                 <a:schemeClr val="tx2"/>
               </a:solidFill>
@@ -43700,7 +45294,7 @@
           </a:p>
           <a:p>
             <a:r>
-              <a:rPr lang="en-US" sz="2800" b="0" dirty="0">
+              <a:rPr lang="en-US" sz="2800" b="0" noProof="0" dirty="0">
                 <a:solidFill>
                   <a:schemeClr val="tx2"/>
                 </a:solidFill>
@@ -43709,7 +45303,7 @@
             </a:r>
           </a:p>
           <a:p>
-            <a:endParaRPr lang="en-US" sz="2800" b="0" dirty="0">
+            <a:endParaRPr lang="en-US" sz="2800" b="0" noProof="0" dirty="0">
               <a:solidFill>
                 <a:schemeClr val="tx2"/>
               </a:solidFill>
@@ -43720,7 +45314,7 @@
               <a:buNone/>
             </a:pPr>
             <a:r>
-              <a:rPr lang="en-US" sz="2800" b="0" dirty="0">
+              <a:rPr lang="en-US" sz="2800" b="0" noProof="0" dirty="0">
                 <a:solidFill>
                   <a:schemeClr val="tx2"/>
                 </a:solidFill>
@@ -43877,8 +45471,8 @@
           <a:lstStyle/>
           <a:p>
             <a:r>
-              <a:rPr lang="en-US" dirty="0"/>
-              <a:t>📖 Let’s the story begin – Round n°2</a:t>
+              <a:rPr lang="en-US" noProof="0" dirty="0"/>
+              <a:t>📖 Round n°2</a:t>
             </a:r>
           </a:p>
         </p:txBody>
@@ -43910,7 +45504,7 @@
           <a:lstStyle/>
           <a:p>
             <a:r>
-              <a:rPr lang="en-US" sz="2800" b="0" dirty="0">
+              <a:rPr lang="en-US" sz="2800" b="0" noProof="0" dirty="0">
                 <a:solidFill>
                   <a:schemeClr val="tx2"/>
                 </a:solidFill>
@@ -43919,7 +45513,7 @@
             </a:r>
           </a:p>
           <a:p>
-            <a:endParaRPr lang="en-US" sz="2800" b="0" dirty="0">
+            <a:endParaRPr lang="en-US" sz="2800" b="0" noProof="0" dirty="0">
               <a:solidFill>
                 <a:schemeClr val="tx2"/>
               </a:solidFill>
@@ -43930,7 +45524,7 @@
               <a:buNone/>
             </a:pPr>
             <a:r>
-              <a:rPr lang="en-US" sz="2800" b="0" dirty="0">
+              <a:rPr lang="en-US" sz="2800" b="0" noProof="0" dirty="0">
                 <a:solidFill>
                   <a:schemeClr val="tx2"/>
                 </a:solidFill>
@@ -43942,7 +45536,7 @@
             <a:pPr marL="0" indent="0">
               <a:buNone/>
             </a:pPr>
-            <a:endParaRPr lang="en-US" sz="2800" b="0" dirty="0">
+            <a:endParaRPr lang="en-US" sz="2800" b="0" noProof="0" dirty="0">
               <a:solidFill>
                 <a:schemeClr val="tx2"/>
               </a:solidFill>
@@ -44057,8 +45651,8 @@
           <a:lstStyle/>
           <a:p>
             <a:r>
-              <a:rPr lang="en-US" dirty="0"/>
-              <a:t>📖 Let’s the story begin – Round n°2</a:t>
+              <a:rPr lang="en-US" noProof="0" dirty="0"/>
+              <a:t>📖 Round n°2</a:t>
             </a:r>
           </a:p>
         </p:txBody>
@@ -44090,7 +45684,7 @@
           <a:lstStyle/>
           <a:p>
             <a:r>
-              <a:rPr lang="en-US" sz="2800" b="0" dirty="0">
+              <a:rPr lang="en-US" sz="2800" b="0" noProof="0" dirty="0">
                 <a:solidFill>
                   <a:schemeClr val="tx2"/>
                 </a:solidFill>
@@ -44098,7 +45692,7 @@
               <a:t> The goal was to test if the service ensure that the provided PDF file do not contain any JavaScript code that can trigger actions on behalf of the user</a:t>
             </a:r>
             <a:r>
-              <a:rPr lang="en-US" sz="2800" b="0" dirty="0">
+              <a:rPr lang="en-US" sz="2800" b="0" noProof="0" dirty="0">
                 <a:solidFill>
                   <a:schemeClr val="accent5"/>
                 </a:solidFill>
@@ -44106,7 +45700,7 @@
               <a:t> </a:t>
             </a:r>
             <a:r>
-              <a:rPr lang="en-US" sz="2800" b="0" dirty="0">
+              <a:rPr lang="en-US" sz="2800" b="0" noProof="0" dirty="0">
                 <a:solidFill>
                   <a:schemeClr val="tx2"/>
                 </a:solidFill>
@@ -44118,7 +45712,7 @@
             <a:pPr marL="0" indent="0">
               <a:buNone/>
             </a:pPr>
-            <a:endParaRPr lang="en-US" sz="2800" b="0" dirty="0">
+            <a:endParaRPr lang="en-US" sz="2800" b="0" noProof="0" dirty="0">
               <a:solidFill>
                 <a:schemeClr val="tx2"/>
               </a:solidFill>
@@ -44233,8 +45827,8 @@
           <a:lstStyle/>
           <a:p>
             <a:r>
-              <a:rPr lang="en-US" dirty="0"/>
-              <a:t>📖 Let’s the story begin – Round n°2</a:t>
+              <a:rPr lang="en-US" noProof="0" dirty="0"/>
+              <a:t>📖 Round n°2</a:t>
             </a:r>
           </a:p>
         </p:txBody>
@@ -44266,18 +45860,34 @@
           <a:lstStyle/>
           <a:p>
             <a:r>
-              <a:rPr lang="en-US" sz="2800" b="0" dirty="0">
+              <a:rPr lang="en-US" sz="2800" b="0" noProof="0" dirty="0">
                 <a:solidFill>
                   <a:schemeClr val="tx2"/>
                 </a:solidFill>
               </a:rPr>
-              <a:t>  🤔 Test failed so the following additional validation was proposed to the team:</a:t>
+              <a:t>  🤔 </a:t>
+            </a:r>
+            <a:r>
+              <a:rPr lang="en-US" sz="2800" b="0" noProof="0" dirty="0">
+                <a:solidFill>
+                  <a:schemeClr val="accent5"/>
+                </a:solidFill>
+              </a:rPr>
+              <a:t>Test failed </a:t>
+            </a:r>
+            <a:r>
+              <a:rPr lang="en-US" sz="2800" b="0" noProof="0" dirty="0">
+                <a:solidFill>
+                  <a:schemeClr val="tx2"/>
+                </a:solidFill>
+              </a:rPr>
+              <a:t>so the following additional validation was proposed to the team:</a:t>
             </a:r>
           </a:p>
           <a:p>
             <a:pPr lvl="1"/>
             <a:r>
-              <a:rPr lang="en-US" sz="2400" dirty="0"/>
+              <a:rPr lang="en-US" sz="2400" noProof="0" dirty="0"/>
               <a:t>Ensure that the provided file do not contains any JavaScript code.</a:t>
             </a:r>
           </a:p>
@@ -44285,7 +45895,7 @@
             <a:pPr marL="0" lvl="1" indent="0">
               <a:buNone/>
             </a:pPr>
-            <a:endParaRPr lang="en-US" sz="2400" b="0" dirty="0">
+            <a:endParaRPr lang="en-US" sz="2400" b="0" noProof="0" dirty="0">
               <a:solidFill>
                 <a:schemeClr val="tx2"/>
               </a:solidFill>
@@ -44293,7 +45903,7 @@
           </a:p>
           <a:p>
             <a:r>
-              <a:rPr lang="en-US" sz="2800" b="0" dirty="0">
+              <a:rPr lang="en-US" sz="2800" b="0" noProof="0" dirty="0">
                 <a:solidFill>
                   <a:schemeClr val="tx2"/>
                 </a:solidFill>
@@ -44302,7 +45912,7 @@
             </a:r>
           </a:p>
           <a:p>
-            <a:endParaRPr lang="en-US" sz="2800" b="0" dirty="0">
+            <a:endParaRPr lang="en-US" sz="2800" b="0" noProof="0" dirty="0">
               <a:solidFill>
                 <a:schemeClr val="tx2"/>
               </a:solidFill>
@@ -44313,7 +45923,7 @@
               <a:buNone/>
             </a:pPr>
             <a:r>
-              <a:rPr lang="en-US" sz="2800" b="0" dirty="0">
+              <a:rPr lang="en-US" sz="2800" b="0" noProof="0" dirty="0">
                 <a:solidFill>
                   <a:schemeClr val="tx2"/>
                 </a:solidFill>
@@ -44358,23 +45968,7 @@
                   <a:schemeClr val="accent3"/>
                 </a:solidFill>
               </a:rPr>
-              <a:t>🤬 Level of exasperation: </a:t>
-            </a:r>
-            <a:r>
-              <a:rPr lang="en-US" sz="1600" dirty="0">
-                <a:solidFill>
-                  <a:schemeClr val="accent3"/>
-                </a:solidFill>
-              </a:rPr>
-              <a:t>32</a:t>
-            </a:r>
-            <a:r>
-              <a:rPr lang="en-US" sz="1600" noProof="0" dirty="0">
-                <a:solidFill>
-                  <a:schemeClr val="accent3"/>
-                </a:solidFill>
-              </a:rPr>
-              <a:t>%</a:t>
+              <a:t>🤬 Level of exasperation: 32%</a:t>
             </a:r>
           </a:p>
         </p:txBody>
@@ -44486,8 +46080,8 @@
           <a:lstStyle/>
           <a:p>
             <a:r>
-              <a:rPr lang="en-US" dirty="0"/>
-              <a:t>📖 Let’s the story begin – Round n°3</a:t>
+              <a:rPr lang="en-US" noProof="0" dirty="0"/>
+              <a:t>📖 Round n°3</a:t>
             </a:r>
           </a:p>
         </p:txBody>
@@ -44519,7 +46113,7 @@
           <a:lstStyle/>
           <a:p>
             <a:r>
-              <a:rPr lang="en-US" sz="2800" b="0" dirty="0">
+              <a:rPr lang="en-US" sz="2800" b="0" noProof="0" dirty="0">
                 <a:solidFill>
                   <a:schemeClr val="tx2"/>
                 </a:solidFill>
@@ -44528,7 +46122,7 @@
             </a:r>
           </a:p>
           <a:p>
-            <a:endParaRPr lang="en-US" sz="2800" b="0" dirty="0">
+            <a:endParaRPr lang="en-US" sz="2800" b="0" noProof="0" dirty="0">
               <a:solidFill>
                 <a:schemeClr val="tx2"/>
               </a:solidFill>
@@ -44539,7 +46133,7 @@
               <a:buNone/>
             </a:pPr>
             <a:r>
-              <a:rPr lang="en-US" sz="2800" b="0" dirty="0">
+              <a:rPr lang="en-US" sz="2800" b="0" noProof="0" dirty="0">
                 <a:solidFill>
                   <a:schemeClr val="tx2"/>
                 </a:solidFill>
@@ -44551,7 +46145,7 @@
             <a:pPr marL="0" indent="0">
               <a:buNone/>
             </a:pPr>
-            <a:endParaRPr lang="en-US" sz="2800" b="0" dirty="0">
+            <a:endParaRPr lang="en-US" sz="2800" b="0" noProof="0" dirty="0">
               <a:solidFill>
                 <a:schemeClr val="tx2"/>
               </a:solidFill>
@@ -44629,6 +46223,457 @@
         <p:cNvPr id="1" name="">
           <a:extLst>
             <a:ext uri="{FF2B5EF4-FFF2-40B4-BE49-F238E27FC236}">
+              <a16:creationId xmlns:a16="http://schemas.microsoft.com/office/drawing/2014/main" id="{E57213DD-2C23-2513-10BE-2301BC085FB9}"/>
+            </a:ext>
+          </a:extLst>
+        </p:cNvPr>
+        <p:cNvGrpSpPr/>
+        <p:nvPr/>
+      </p:nvGrpSpPr>
+      <p:grpSpPr>
+        <a:xfrm>
+          <a:off x="0" y="0"/>
+          <a:ext cx="0" cy="0"/>
+          <a:chOff x="0" y="0"/>
+          <a:chExt cx="0" cy="0"/>
+        </a:xfrm>
+      </p:grpSpPr>
+      <p:sp>
+        <p:nvSpPr>
+          <p:cNvPr id="2" name="Titre 1">
+            <a:extLst>
+              <a:ext uri="{FF2B5EF4-FFF2-40B4-BE49-F238E27FC236}">
+                <a16:creationId xmlns:a16="http://schemas.microsoft.com/office/drawing/2014/main" id="{FAC46617-5CFF-4AA6-184B-21566F6883A3}"/>
+              </a:ext>
+            </a:extLst>
+          </p:cNvPr>
+          <p:cNvSpPr>
+            <a:spLocks noGrp="1"/>
+          </p:cNvSpPr>
+          <p:nvPr>
+            <p:ph type="title"/>
+          </p:nvPr>
+        </p:nvSpPr>
+        <p:spPr/>
+        <p:txBody>
+          <a:bodyPr/>
+          <a:lstStyle/>
+          <a:p>
+            <a:r>
+              <a:rPr lang="en-US" noProof="0" dirty="0"/>
+              <a:t>📖 Round n°3</a:t>
+            </a:r>
+          </a:p>
+        </p:txBody>
+      </p:sp>
+      <p:sp>
+        <p:nvSpPr>
+          <p:cNvPr id="3" name="Espace réservé du texte 2">
+            <a:extLst>
+              <a:ext uri="{FF2B5EF4-FFF2-40B4-BE49-F238E27FC236}">
+                <a16:creationId xmlns:a16="http://schemas.microsoft.com/office/drawing/2014/main" id="{A35AEF19-125B-3C3A-9C1D-49869541C97D}"/>
+              </a:ext>
+            </a:extLst>
+          </p:cNvPr>
+          <p:cNvSpPr>
+            <a:spLocks noGrp="1"/>
+          </p:cNvSpPr>
+          <p:nvPr>
+            <p:ph type="body" sz="quarter" idx="15"/>
+          </p:nvPr>
+        </p:nvSpPr>
+        <p:spPr>
+          <a:xfrm>
+            <a:off x="588000" y="977317"/>
+            <a:ext cx="11419970" cy="4949030"/>
+          </a:xfrm>
+        </p:spPr>
+        <p:txBody>
+          <a:bodyPr/>
+          <a:lstStyle/>
+          <a:p>
+            <a:r>
+              <a:rPr lang="en-US" sz="2800" b="0" noProof="0" dirty="0">
+                <a:solidFill>
+                  <a:schemeClr val="tx2"/>
+                </a:solidFill>
+              </a:rPr>
+              <a:t> A third test was performed with a valid PDF file containing an attached malicious file:</a:t>
+            </a:r>
+          </a:p>
+          <a:p>
+            <a:endParaRPr lang="en-US" sz="2800" b="0" noProof="0" dirty="0">
+              <a:solidFill>
+                <a:schemeClr val="tx2"/>
+              </a:solidFill>
+            </a:endParaRPr>
+          </a:p>
+          <a:p>
+            <a:pPr marL="0" indent="0">
+              <a:buNone/>
+            </a:pPr>
+            <a:r>
+              <a:rPr lang="en-US" sz="2800" b="0" noProof="0" dirty="0">
+                <a:solidFill>
+                  <a:schemeClr val="tx2"/>
+                </a:solidFill>
+              </a:rPr>
+              <a:t> </a:t>
+            </a:r>
+          </a:p>
+          <a:p>
+            <a:pPr marL="0" indent="0">
+              <a:buNone/>
+            </a:pPr>
+            <a:endParaRPr lang="en-US" sz="2800" b="0" noProof="0" dirty="0">
+              <a:solidFill>
+                <a:schemeClr val="tx2"/>
+              </a:solidFill>
+            </a:endParaRPr>
+          </a:p>
+        </p:txBody>
+      </p:sp>
+      <p:pic>
+        <p:nvPicPr>
+          <p:cNvPr id="5" name="Picture 4">
+            <a:extLst>
+              <a:ext uri="{FF2B5EF4-FFF2-40B4-BE49-F238E27FC236}">
+                <a16:creationId xmlns:a16="http://schemas.microsoft.com/office/drawing/2014/main" id="{D2F4ED0F-4FAA-D797-ABF1-3F2F38292DB1}"/>
+              </a:ext>
+            </a:extLst>
+          </p:cNvPr>
+          <p:cNvPicPr>
+            <a:picLocks noChangeAspect="1"/>
+          </p:cNvPicPr>
+          <p:nvPr/>
+        </p:nvPicPr>
+        <p:blipFill>
+          <a:blip r:embed="rId2"/>
+          <a:srcRect r="78304" b="68881"/>
+          <a:stretch>
+            <a:fillRect/>
+          </a:stretch>
+        </p:blipFill>
+        <p:spPr>
+          <a:xfrm>
+            <a:off x="3214240" y="1977352"/>
+            <a:ext cx="5525721" cy="4056491"/>
+          </a:xfrm>
+          <a:prstGeom prst="rect">
+            <a:avLst/>
+          </a:prstGeom>
+          <a:effectLst>
+            <a:outerShdw blurRad="50800" dist="38100" dir="2700000" algn="tl" rotWithShape="0">
+              <a:prstClr val="black">
+                <a:alpha val="40000"/>
+              </a:prstClr>
+            </a:outerShdw>
+          </a:effectLst>
+        </p:spPr>
+      </p:pic>
+      <p:sp>
+        <p:nvSpPr>
+          <p:cNvPr id="4" name="Rectangle 3">
+            <a:extLst>
+              <a:ext uri="{FF2B5EF4-FFF2-40B4-BE49-F238E27FC236}">
+                <a16:creationId xmlns:a16="http://schemas.microsoft.com/office/drawing/2014/main" id="{18BA3881-C1BA-2385-3947-E2C6162D7205}"/>
+              </a:ext>
+            </a:extLst>
+          </p:cNvPr>
+          <p:cNvSpPr/>
+          <p:nvPr/>
+        </p:nvSpPr>
+        <p:spPr>
+          <a:xfrm>
+            <a:off x="3214240" y="5161973"/>
+            <a:ext cx="1559779" cy="871870"/>
+          </a:xfrm>
+          <a:prstGeom prst="rect">
+            <a:avLst/>
+          </a:prstGeom>
+          <a:noFill/>
+          <a:ln w="31750">
+            <a:solidFill>
+              <a:schemeClr val="accent6"/>
+            </a:solidFill>
+          </a:ln>
+        </p:spPr>
+        <p:style>
+          <a:lnRef idx="2">
+            <a:schemeClr val="accent1">
+              <a:shade val="50000"/>
+            </a:schemeClr>
+          </a:lnRef>
+          <a:fillRef idx="1">
+            <a:schemeClr val="accent1"/>
+          </a:fillRef>
+          <a:effectRef idx="0">
+            <a:schemeClr val="accent1"/>
+          </a:effectRef>
+          <a:fontRef idx="minor">
+            <a:schemeClr val="lt1"/>
+          </a:fontRef>
+        </p:style>
+        <p:txBody>
+          <a:bodyPr rtlCol="0" anchor="ctr"/>
+          <a:lstStyle/>
+          <a:p>
+            <a:pPr algn="ctr"/>
+            <a:endParaRPr lang="en-US" noProof="0" dirty="0"/>
+          </a:p>
+        </p:txBody>
+      </p:sp>
+    </p:spTree>
+    <p:extLst>
+      <p:ext uri="{BB962C8B-B14F-4D97-AF65-F5344CB8AC3E}">
+        <p14:creationId xmlns:p14="http://schemas.microsoft.com/office/powerpoint/2010/main" val="3474088291"/>
+      </p:ext>
+    </p:extLst>
+  </p:cSld>
+  <p:clrMapOvr>
+    <a:masterClrMapping/>
+  </p:clrMapOvr>
+  <mc:AlternateContent xmlns:mc="http://schemas.openxmlformats.org/markup-compatibility/2006">
+    <mc:Choice xmlns:p159="http://schemas.microsoft.com/office/powerpoint/2015/09/main" Requires="p159">
+      <p:transition xmlns:p14="http://schemas.microsoft.com/office/powerpoint/2010/main" spd="slow" p14:dur="2000">
+        <p159:morph option="byObject"/>
+      </p:transition>
+    </mc:Choice>
+    <mc:Fallback>
+      <p:transition spd="slow">
+        <p:fade/>
+      </p:transition>
+    </mc:Fallback>
+  </mc:AlternateContent>
+</p:sld>
+</file>
+
+<file path=ppt/slides/slide18.xml><?xml version="1.0" encoding="utf-8"?>
+<p:sld xmlns:a="http://schemas.openxmlformats.org/drawingml/2006/main" xmlns:r="http://schemas.openxmlformats.org/officeDocument/2006/relationships" xmlns:p="http://schemas.openxmlformats.org/presentationml/2006/main">
+  <p:cSld>
+    <p:spTree>
+      <p:nvGrpSpPr>
+        <p:cNvPr id="1" name="">
+          <a:extLst>
+            <a:ext uri="{FF2B5EF4-FFF2-40B4-BE49-F238E27FC236}">
+              <a16:creationId xmlns:a16="http://schemas.microsoft.com/office/drawing/2014/main" id="{8A1C72D0-FC28-AAA8-63D5-6131DC851276}"/>
+            </a:ext>
+          </a:extLst>
+        </p:cNvPr>
+        <p:cNvGrpSpPr/>
+        <p:nvPr/>
+      </p:nvGrpSpPr>
+      <p:grpSpPr>
+        <a:xfrm>
+          <a:off x="0" y="0"/>
+          <a:ext cx="0" cy="0"/>
+          <a:chOff x="0" y="0"/>
+          <a:chExt cx="0" cy="0"/>
+        </a:xfrm>
+      </p:grpSpPr>
+      <p:sp>
+        <p:nvSpPr>
+          <p:cNvPr id="2" name="Titre 1">
+            <a:extLst>
+              <a:ext uri="{FF2B5EF4-FFF2-40B4-BE49-F238E27FC236}">
+                <a16:creationId xmlns:a16="http://schemas.microsoft.com/office/drawing/2014/main" id="{A4F23D99-F75E-7B2E-65B0-14CBE99C51FB}"/>
+              </a:ext>
+            </a:extLst>
+          </p:cNvPr>
+          <p:cNvSpPr>
+            <a:spLocks noGrp="1"/>
+          </p:cNvSpPr>
+          <p:nvPr>
+            <p:ph type="title"/>
+          </p:nvPr>
+        </p:nvSpPr>
+        <p:spPr/>
+        <p:txBody>
+          <a:bodyPr/>
+          <a:lstStyle/>
+          <a:p>
+            <a:r>
+              <a:rPr lang="en-US" noProof="0" dirty="0"/>
+              <a:t>📖 Round n°3</a:t>
+            </a:r>
+          </a:p>
+        </p:txBody>
+      </p:sp>
+      <p:pic>
+        <p:nvPicPr>
+          <p:cNvPr id="5" name="Picture 4">
+            <a:extLst>
+              <a:ext uri="{FF2B5EF4-FFF2-40B4-BE49-F238E27FC236}">
+                <a16:creationId xmlns:a16="http://schemas.microsoft.com/office/drawing/2014/main" id="{2D5AE245-00BE-A16E-8570-F052FDF0B804}"/>
+              </a:ext>
+            </a:extLst>
+          </p:cNvPr>
+          <p:cNvPicPr>
+            <a:picLocks noChangeAspect="1"/>
+          </p:cNvPicPr>
+          <p:nvPr/>
+        </p:nvPicPr>
+        <p:blipFill>
+          <a:blip r:embed="rId2"/>
+          <a:srcRect l="25655" t="23745"/>
+          <a:stretch>
+            <a:fillRect/>
+          </a:stretch>
+        </p:blipFill>
+        <p:spPr>
+          <a:xfrm>
+            <a:off x="1116799" y="760951"/>
+            <a:ext cx="10164345" cy="5336098"/>
+          </a:xfrm>
+          <a:prstGeom prst="rect">
+            <a:avLst/>
+          </a:prstGeom>
+          <a:effectLst>
+            <a:outerShdw blurRad="50800" dist="38100" dir="2700000" algn="tl" rotWithShape="0">
+              <a:prstClr val="black">
+                <a:alpha val="40000"/>
+              </a:prstClr>
+            </a:outerShdw>
+          </a:effectLst>
+        </p:spPr>
+      </p:pic>
+      <p:sp>
+        <p:nvSpPr>
+          <p:cNvPr id="7" name="Rectangle 6">
+            <a:extLst>
+              <a:ext uri="{FF2B5EF4-FFF2-40B4-BE49-F238E27FC236}">
+                <a16:creationId xmlns:a16="http://schemas.microsoft.com/office/drawing/2014/main" id="{5C6D2E9A-D10D-9758-CF1D-A854D4EFF41B}"/>
+              </a:ext>
+            </a:extLst>
+          </p:cNvPr>
+          <p:cNvSpPr/>
+          <p:nvPr/>
+        </p:nvSpPr>
+        <p:spPr>
+          <a:xfrm>
+            <a:off x="1250931" y="2562445"/>
+            <a:ext cx="9834904" cy="233916"/>
+          </a:xfrm>
+          <a:prstGeom prst="rect">
+            <a:avLst/>
+          </a:prstGeom>
+          <a:noFill/>
+          <a:ln w="31750">
+            <a:solidFill>
+              <a:schemeClr val="accent6"/>
+            </a:solidFill>
+          </a:ln>
+        </p:spPr>
+        <p:style>
+          <a:lnRef idx="2">
+            <a:schemeClr val="accent1">
+              <a:shade val="50000"/>
+            </a:schemeClr>
+          </a:lnRef>
+          <a:fillRef idx="1">
+            <a:schemeClr val="accent1"/>
+          </a:fillRef>
+          <a:effectRef idx="0">
+            <a:schemeClr val="accent1"/>
+          </a:effectRef>
+          <a:fontRef idx="minor">
+            <a:schemeClr val="lt1"/>
+          </a:fontRef>
+        </p:style>
+        <p:txBody>
+          <a:bodyPr rtlCol="0" anchor="ctr"/>
+          <a:lstStyle/>
+          <a:p>
+            <a:pPr algn="ctr"/>
+            <a:endParaRPr lang="en-US" noProof="0" dirty="0"/>
+          </a:p>
+        </p:txBody>
+      </p:sp>
+      <p:sp>
+        <p:nvSpPr>
+          <p:cNvPr id="8" name="Rectangle 7">
+            <a:extLst>
+              <a:ext uri="{FF2B5EF4-FFF2-40B4-BE49-F238E27FC236}">
+                <a16:creationId xmlns:a16="http://schemas.microsoft.com/office/drawing/2014/main" id="{4D10DD66-92D0-5535-DB34-A54B6206BF0E}"/>
+              </a:ext>
+            </a:extLst>
+          </p:cNvPr>
+          <p:cNvSpPr/>
+          <p:nvPr/>
+        </p:nvSpPr>
+        <p:spPr>
+          <a:xfrm>
+            <a:off x="3249850" y="4661653"/>
+            <a:ext cx="2640587" cy="369332"/>
+          </a:xfrm>
+          <a:prstGeom prst="rect">
+            <a:avLst/>
+          </a:prstGeom>
+          <a:noFill/>
+          <a:ln w="31750">
+            <a:solidFill>
+              <a:schemeClr val="accent6"/>
+            </a:solidFill>
+          </a:ln>
+        </p:spPr>
+        <p:style>
+          <a:lnRef idx="2">
+            <a:schemeClr val="accent1">
+              <a:shade val="50000"/>
+            </a:schemeClr>
+          </a:lnRef>
+          <a:fillRef idx="1">
+            <a:schemeClr val="accent1"/>
+          </a:fillRef>
+          <a:effectRef idx="0">
+            <a:schemeClr val="accent1"/>
+          </a:effectRef>
+          <a:fontRef idx="minor">
+            <a:schemeClr val="lt1"/>
+          </a:fontRef>
+        </p:style>
+        <p:txBody>
+          <a:bodyPr rtlCol="0" anchor="ctr"/>
+          <a:lstStyle/>
+          <a:p>
+            <a:pPr algn="ctr"/>
+            <a:endParaRPr lang="en-US" noProof="0" dirty="0"/>
+          </a:p>
+        </p:txBody>
+      </p:sp>
+    </p:spTree>
+    <p:extLst>
+      <p:ext uri="{BB962C8B-B14F-4D97-AF65-F5344CB8AC3E}">
+        <p14:creationId xmlns:p14="http://schemas.microsoft.com/office/powerpoint/2010/main" val="3164403635"/>
+      </p:ext>
+    </p:extLst>
+  </p:cSld>
+  <p:clrMapOvr>
+    <a:masterClrMapping/>
+  </p:clrMapOvr>
+  <mc:AlternateContent xmlns:mc="http://schemas.openxmlformats.org/markup-compatibility/2006">
+    <mc:Choice xmlns:p159="http://schemas.microsoft.com/office/powerpoint/2015/09/main" Requires="p159">
+      <p:transition xmlns:p14="http://schemas.microsoft.com/office/powerpoint/2010/main" spd="slow" p14:dur="2000">
+        <p159:morph option="byObject"/>
+      </p:transition>
+    </mc:Choice>
+    <mc:Fallback>
+      <p:transition spd="slow">
+        <p:fade/>
+      </p:transition>
+    </mc:Fallback>
+  </mc:AlternateContent>
+</p:sld>
+</file>
+
+<file path=ppt/slides/slide19.xml><?xml version="1.0" encoding="utf-8"?>
+<p:sld xmlns:a="http://schemas.openxmlformats.org/drawingml/2006/main" xmlns:r="http://schemas.openxmlformats.org/officeDocument/2006/relationships" xmlns:p="http://schemas.openxmlformats.org/presentationml/2006/main">
+  <p:cSld>
+    <p:spTree>
+      <p:nvGrpSpPr>
+        <p:cNvPr id="1" name="">
+          <a:extLst>
+            <a:ext uri="{FF2B5EF4-FFF2-40B4-BE49-F238E27FC236}">
               <a16:creationId xmlns:a16="http://schemas.microsoft.com/office/drawing/2014/main" id="{90D5AE30-FC26-0A47-77B2-F81AA5ACC79F}"/>
             </a:ext>
           </a:extLst>
@@ -44666,8 +46711,8 @@
           <a:lstStyle/>
           <a:p>
             <a:r>
-              <a:rPr lang="en-US" dirty="0"/>
-              <a:t>📖 Let’s the story begin – Round n°3</a:t>
+              <a:rPr lang="en-US" noProof="0" dirty="0"/>
+              <a:t>📖 Round n°3</a:t>
             </a:r>
           </a:p>
         </p:txBody>
@@ -44699,7 +46744,7 @@
           <a:lstStyle/>
           <a:p>
             <a:r>
-              <a:rPr lang="en-US" sz="2800" b="0" dirty="0">
+              <a:rPr lang="en-US" sz="2800" b="0" noProof="0" dirty="0">
                 <a:solidFill>
                   <a:schemeClr val="tx2"/>
                 </a:solidFill>
@@ -44711,7 +46756,7 @@
             <a:pPr marL="0" indent="0">
               <a:buNone/>
             </a:pPr>
-            <a:endParaRPr lang="en-US" sz="2800" b="0" dirty="0">
+            <a:endParaRPr lang="en-US" sz="2800" b="0" noProof="0" dirty="0">
               <a:solidFill>
                 <a:schemeClr val="tx2"/>
               </a:solidFill>
@@ -44719,7 +46764,7 @@
           </a:p>
           <a:p>
             <a:r>
-              <a:rPr lang="en-US" sz="2800" b="0" dirty="0">
+              <a:rPr lang="en-US" sz="2800" b="0" noProof="0" dirty="0">
                 <a:solidFill>
                   <a:schemeClr val="tx2"/>
                 </a:solidFill>
@@ -44731,7 +46776,7 @@
             <a:pPr marL="0" indent="0">
               <a:buNone/>
             </a:pPr>
-            <a:endParaRPr lang="en-US" sz="2800" b="0" dirty="0">
+            <a:endParaRPr lang="en-US" sz="2800" b="0" noProof="0" dirty="0">
               <a:solidFill>
                 <a:schemeClr val="tx2"/>
               </a:solidFill>
@@ -44801,7 +46846,181 @@
 </p:sld>
 </file>
 
-<file path=ppt/slides/slide18.xml><?xml version="1.0" encoding="utf-8"?>
+<file path=ppt/slides/slide2.xml><?xml version="1.0" encoding="utf-8"?>
+<p:sld xmlns:a="http://schemas.openxmlformats.org/drawingml/2006/main" xmlns:r="http://schemas.openxmlformats.org/officeDocument/2006/relationships" xmlns:p="http://schemas.openxmlformats.org/presentationml/2006/main">
+  <p:cSld>
+    <p:spTree>
+      <p:nvGrpSpPr>
+        <p:cNvPr id="1" name=""/>
+        <p:cNvGrpSpPr/>
+        <p:nvPr/>
+      </p:nvGrpSpPr>
+      <p:grpSpPr>
+        <a:xfrm>
+          <a:off x="0" y="0"/>
+          <a:ext cx="0" cy="0"/>
+          <a:chOff x="0" y="0"/>
+          <a:chExt cx="0" cy="0"/>
+        </a:xfrm>
+      </p:grpSpPr>
+      <p:sp>
+        <p:nvSpPr>
+          <p:cNvPr id="2" name="Titre 1"/>
+          <p:cNvSpPr>
+            <a:spLocks noGrp="1"/>
+          </p:cNvSpPr>
+          <p:nvPr>
+            <p:ph type="title"/>
+          </p:nvPr>
+        </p:nvSpPr>
+        <p:spPr/>
+        <p:txBody>
+          <a:bodyPr/>
+          <a:lstStyle/>
+          <a:p>
+            <a:r>
+              <a:rPr lang="en-US" noProof="0" dirty="0"/>
+              <a:t>ℹ️ Introduction</a:t>
+            </a:r>
+          </a:p>
+        </p:txBody>
+      </p:sp>
+      <p:sp>
+        <p:nvSpPr>
+          <p:cNvPr id="3" name="Espace réservé du texte 2"/>
+          <p:cNvSpPr>
+            <a:spLocks noGrp="1"/>
+          </p:cNvSpPr>
+          <p:nvPr>
+            <p:ph type="body" sz="quarter" idx="15"/>
+          </p:nvPr>
+        </p:nvSpPr>
+        <p:spPr>
+          <a:xfrm>
+            <a:off x="588000" y="977317"/>
+            <a:ext cx="11419970" cy="4540025"/>
+          </a:xfrm>
+        </p:spPr>
+        <p:txBody>
+          <a:bodyPr/>
+          <a:lstStyle/>
+          <a:p>
+            <a:r>
+              <a:rPr lang="en-US" sz="2800" b="0" noProof="0" dirty="0">
+                <a:solidFill>
+                  <a:schemeClr val="tx2"/>
+                </a:solidFill>
+              </a:rPr>
+              <a:t> Most of the modern web-based application provide a feature to allow a user to send a file.</a:t>
+            </a:r>
+          </a:p>
+          <a:p>
+            <a:pPr marL="0" indent="0">
+              <a:buNone/>
+            </a:pPr>
+            <a:r>
+              <a:rPr lang="en-US" sz="2800" b="0" noProof="0" dirty="0">
+                <a:solidFill>
+                  <a:schemeClr val="tx2"/>
+                </a:solidFill>
+              </a:rPr>
+              <a:t> </a:t>
+            </a:r>
+          </a:p>
+          <a:p>
+            <a:r>
+              <a:rPr lang="en-US" sz="2800" b="0" noProof="0" dirty="0">
+                <a:solidFill>
+                  <a:schemeClr val="tx2"/>
+                </a:solidFill>
+              </a:rPr>
+              <a:t> Such feature is called "</a:t>
+            </a:r>
+            <a:r>
+              <a:rPr lang="en-US" sz="2800" b="0" noProof="0" dirty="0">
+                <a:solidFill>
+                  <a:schemeClr val="accent1"/>
+                </a:solidFill>
+                <a:latin typeface="Consolas" panose="020B0609020204030204" pitchFamily="49" charset="0"/>
+              </a:rPr>
+              <a:t>file upload</a:t>
+            </a:r>
+            <a:r>
+              <a:rPr lang="en-US" sz="2800" b="0" noProof="0" dirty="0">
+                <a:solidFill>
+                  <a:schemeClr val="tx2"/>
+                </a:solidFill>
+              </a:rPr>
+              <a:t>".</a:t>
+            </a:r>
+          </a:p>
+          <a:p>
+            <a:pPr marL="0" indent="0">
+              <a:buNone/>
+            </a:pPr>
+            <a:r>
+              <a:rPr lang="en-US" sz="2800" b="0" noProof="0" dirty="0">
+                <a:solidFill>
+                  <a:schemeClr val="tx2"/>
+                </a:solidFill>
+              </a:rPr>
+              <a:t> </a:t>
+            </a:r>
+          </a:p>
+          <a:p>
+            <a:r>
+              <a:rPr lang="en-US" sz="2800" b="0" noProof="0" dirty="0">
+                <a:solidFill>
+                  <a:schemeClr val="tx2"/>
+                </a:solidFill>
+              </a:rPr>
+              <a:t> It is very common that </a:t>
+            </a:r>
+            <a:r>
+              <a:rPr lang="en-US" sz="2800" b="0" noProof="0" dirty="0">
+                <a:solidFill>
+                  <a:schemeClr val="accent1"/>
+                </a:solidFill>
+              </a:rPr>
+              <a:t>PDF format</a:t>
+            </a:r>
+            <a:r>
+              <a:rPr lang="en-US" sz="2800" b="0" noProof="0" dirty="0">
+                <a:solidFill>
+                  <a:schemeClr val="tx2"/>
+                </a:solidFill>
+              </a:rPr>
+              <a:t> was accepted for the file.</a:t>
+            </a:r>
+          </a:p>
+        </p:txBody>
+      </p:sp>
+    </p:spTree>
+    <p:extLst>
+      <p:ext uri="{BB962C8B-B14F-4D97-AF65-F5344CB8AC3E}">
+        <p14:creationId xmlns:p14="http://schemas.microsoft.com/office/powerpoint/2010/main" val="2121745454"/>
+      </p:ext>
+    </p:extLst>
+  </p:cSld>
+  <p:clrMapOvr>
+    <a:masterClrMapping/>
+  </p:clrMapOvr>
+  <mc:AlternateContent xmlns:mc="http://schemas.openxmlformats.org/markup-compatibility/2006" xmlns:p14="http://schemas.microsoft.com/office/powerpoint/2010/main">
+    <mc:Choice Requires="p14">
+      <p:transition spd="med" p14:dur="700">
+        <p:fade/>
+      </p:transition>
+    </mc:Choice>
+    <mc:Fallback xmlns="">
+      <p:transition spd="med">
+        <p:fade/>
+      </p:transition>
+    </mc:Fallback>
+  </mc:AlternateContent>
+</p:sld>
+</file>
+
+<file path=ppt/slides/slide20.xml><?xml version="1.0" encoding="utf-8"?>
 <p:sld xmlns:a="http://schemas.openxmlformats.org/drawingml/2006/main" xmlns:r="http://schemas.openxmlformats.org/officeDocument/2006/relationships" xmlns:p="http://schemas.openxmlformats.org/presentationml/2006/main">
   <p:cSld>
     <p:spTree>
@@ -44846,8 +47065,8 @@
           <a:lstStyle/>
           <a:p>
             <a:r>
-              <a:rPr lang="en-US" dirty="0"/>
-              <a:t>📖 Let’s the story begin – Round n°3</a:t>
+              <a:rPr lang="en-US" noProof="0" dirty="0"/>
+              <a:t>📖 Round n°3</a:t>
             </a:r>
           </a:p>
         </p:txBody>
@@ -44879,18 +47098,34 @@
           <a:lstStyle/>
           <a:p>
             <a:r>
-              <a:rPr lang="en-US" sz="2800" b="0" dirty="0">
+              <a:rPr lang="en-US" sz="2800" b="0" noProof="0" dirty="0">
                 <a:solidFill>
                   <a:schemeClr val="tx2"/>
                 </a:solidFill>
               </a:rPr>
-              <a:t>  🤔 Test failed so the following additional validation was proposed to the team:</a:t>
+              <a:t>  🤔 </a:t>
+            </a:r>
+            <a:r>
+              <a:rPr lang="en-US" sz="2800" b="0" noProof="0" dirty="0">
+                <a:solidFill>
+                  <a:schemeClr val="accent5"/>
+                </a:solidFill>
+              </a:rPr>
+              <a:t>Test failed </a:t>
+            </a:r>
+            <a:r>
+              <a:rPr lang="en-US" sz="2800" b="0" noProof="0" dirty="0">
+                <a:solidFill>
+                  <a:schemeClr val="tx2"/>
+                </a:solidFill>
+              </a:rPr>
+              <a:t>so the following additional validation was proposed to the team:</a:t>
             </a:r>
           </a:p>
           <a:p>
             <a:pPr lvl="1"/>
             <a:r>
-              <a:rPr lang="en-US" sz="2400" dirty="0"/>
+              <a:rPr lang="en-US" sz="2400" noProof="0" dirty="0"/>
               <a:t>Ensure that the provided file do not contains any attachments files.</a:t>
             </a:r>
           </a:p>
@@ -44898,7 +47133,7 @@
             <a:pPr marL="0" lvl="1" indent="0">
               <a:buNone/>
             </a:pPr>
-            <a:endParaRPr lang="en-US" sz="2400" b="0" dirty="0">
+            <a:endParaRPr lang="en-US" sz="2400" b="0" noProof="0" dirty="0">
               <a:solidFill>
                 <a:schemeClr val="tx2"/>
               </a:solidFill>
@@ -44906,7 +47141,7 @@
           </a:p>
           <a:p>
             <a:r>
-              <a:rPr lang="en-US" sz="2800" b="0" dirty="0">
+              <a:rPr lang="en-US" sz="2800" b="0" noProof="0" dirty="0">
                 <a:solidFill>
                   <a:schemeClr val="tx2"/>
                 </a:solidFill>
@@ -44915,7 +47150,7 @@
             </a:r>
           </a:p>
           <a:p>
-            <a:endParaRPr lang="en-US" sz="2800" b="0" dirty="0">
+            <a:endParaRPr lang="en-US" sz="2800" b="0" noProof="0" dirty="0">
               <a:solidFill>
                 <a:schemeClr val="tx2"/>
               </a:solidFill>
@@ -44926,7 +47161,7 @@
               <a:buNone/>
             </a:pPr>
             <a:r>
-              <a:rPr lang="en-US" sz="2800" b="0" dirty="0">
+              <a:rPr lang="en-US" sz="2800" b="0" noProof="0" dirty="0">
                 <a:solidFill>
                   <a:schemeClr val="tx2"/>
                 </a:solidFill>
@@ -45038,7 +47273,7 @@
 </p:sld>
 </file>
 
-<file path=ppt/slides/slide19.xml><?xml version="1.0" encoding="utf-8"?>
+<file path=ppt/slides/slide21.xml><?xml version="1.0" encoding="utf-8"?>
 <p:sld xmlns:a="http://schemas.openxmlformats.org/drawingml/2006/main" xmlns:r="http://schemas.openxmlformats.org/officeDocument/2006/relationships" xmlns:p="http://schemas.openxmlformats.org/presentationml/2006/main">
   <p:cSld>
     <p:spTree>
@@ -45083,8 +47318,8 @@
           <a:lstStyle/>
           <a:p>
             <a:r>
-              <a:rPr lang="en-US" dirty="0"/>
-              <a:t>📖 Let’s the story begin – Round n°4</a:t>
+              <a:rPr lang="en-US" noProof="0" dirty="0"/>
+              <a:t>📖 Round n°4</a:t>
             </a:r>
           </a:p>
         </p:txBody>
@@ -45116,7 +47351,7 @@
           <a:lstStyle/>
           <a:p>
             <a:r>
-              <a:rPr lang="en-US" sz="2800" b="0" dirty="0">
+              <a:rPr lang="en-US" sz="2800" b="0" noProof="0" dirty="0">
                 <a:solidFill>
                   <a:schemeClr val="tx2"/>
                 </a:solidFill>
@@ -45124,7 +47359,7 @@
               <a:t> A fourth test was performed with a valid PDF file containing an </a:t>
             </a:r>
             <a:r>
-              <a:rPr lang="en-US" sz="2800" b="0" dirty="0">
+              <a:rPr lang="en-US" sz="2800" b="0" noProof="0" dirty="0">
                 <a:solidFill>
                   <a:schemeClr val="tx2"/>
                 </a:solidFill>
@@ -45133,7 +47368,7 @@
               <a:t>XML Forms Architecture</a:t>
             </a:r>
             <a:r>
-              <a:rPr lang="en-US" sz="2800" b="0" dirty="0">
+              <a:rPr lang="en-US" sz="2800" b="0" noProof="0" dirty="0">
                 <a:solidFill>
                   <a:schemeClr val="tx2"/>
                 </a:solidFill>
@@ -45141,7 +47376,7 @@
               <a:t> (XFA) form with an </a:t>
             </a:r>
             <a:r>
-              <a:rPr lang="en-US" sz="2800" b="0" dirty="0">
+              <a:rPr lang="en-US" sz="2800" b="0" noProof="0" dirty="0">
                 <a:solidFill>
                   <a:schemeClr val="tx2"/>
                 </a:solidFill>
@@ -45150,7 +47385,7 @@
               <a:t>XML External Entity </a:t>
             </a:r>
             <a:r>
-              <a:rPr lang="en-US" sz="2800" b="0" dirty="0">
+              <a:rPr lang="en-US" sz="2800" b="0" noProof="0" dirty="0">
                 <a:solidFill>
                   <a:schemeClr val="tx2"/>
                 </a:solidFill>
@@ -45162,7 +47397,7 @@
             <a:pPr marL="0" indent="0">
               <a:buNone/>
             </a:pPr>
-            <a:endParaRPr lang="en-US" sz="2800" b="0" dirty="0">
+            <a:endParaRPr lang="en-US" sz="2800" b="0" noProof="0" dirty="0">
               <a:solidFill>
                 <a:schemeClr val="tx2"/>
               </a:solidFill>
@@ -45173,7 +47408,7 @@
               <a:buNone/>
             </a:pPr>
             <a:r>
-              <a:rPr lang="en-US" sz="2800" b="0" dirty="0">
+              <a:rPr lang="en-US" sz="2800" b="0" noProof="0" dirty="0">
                 <a:solidFill>
                   <a:schemeClr val="tx2"/>
                 </a:solidFill>
@@ -45185,7 +47420,7 @@
             <a:pPr marL="0" indent="0">
               <a:buNone/>
             </a:pPr>
-            <a:endParaRPr lang="en-US" sz="2800" b="0" dirty="0">
+            <a:endParaRPr lang="en-US" sz="2800" b="0" noProof="0" dirty="0">
               <a:solidFill>
                 <a:schemeClr val="tx2"/>
               </a:solidFill>
@@ -45279,7 +47514,7 @@
           <a:lstStyle/>
           <a:p>
             <a:pPr algn="ctr"/>
-            <a:endParaRPr lang="fr-FR"/>
+            <a:endParaRPr lang="en-US" noProof="0" dirty="0"/>
           </a:p>
         </p:txBody>
       </p:sp>
@@ -45341,7 +47576,7 @@
           <a:lstStyle/>
           <a:p>
             <a:pPr algn="ctr"/>
-            <a:endParaRPr lang="fr-FR"/>
+            <a:endParaRPr lang="en-US" noProof="0" dirty="0"/>
           </a:p>
         </p:txBody>
       </p:sp>
@@ -45407,181 +47642,7 @@
 </p:sld>
 </file>
 
-<file path=ppt/slides/slide2.xml><?xml version="1.0" encoding="utf-8"?>
-<p:sld xmlns:a="http://schemas.openxmlformats.org/drawingml/2006/main" xmlns:r="http://schemas.openxmlformats.org/officeDocument/2006/relationships" xmlns:p="http://schemas.openxmlformats.org/presentationml/2006/main">
-  <p:cSld>
-    <p:spTree>
-      <p:nvGrpSpPr>
-        <p:cNvPr id="1" name=""/>
-        <p:cNvGrpSpPr/>
-        <p:nvPr/>
-      </p:nvGrpSpPr>
-      <p:grpSpPr>
-        <a:xfrm>
-          <a:off x="0" y="0"/>
-          <a:ext cx="0" cy="0"/>
-          <a:chOff x="0" y="0"/>
-          <a:chExt cx="0" cy="0"/>
-        </a:xfrm>
-      </p:grpSpPr>
-      <p:sp>
-        <p:nvSpPr>
-          <p:cNvPr id="2" name="Titre 1"/>
-          <p:cNvSpPr>
-            <a:spLocks noGrp="1"/>
-          </p:cNvSpPr>
-          <p:nvPr>
-            <p:ph type="title"/>
-          </p:nvPr>
-        </p:nvSpPr>
-        <p:spPr/>
-        <p:txBody>
-          <a:bodyPr/>
-          <a:lstStyle/>
-          <a:p>
-            <a:r>
-              <a:rPr lang="en-US" dirty="0"/>
-              <a:t>ℹ️ Introduction</a:t>
-            </a:r>
-          </a:p>
-        </p:txBody>
-      </p:sp>
-      <p:sp>
-        <p:nvSpPr>
-          <p:cNvPr id="3" name="Espace réservé du texte 2"/>
-          <p:cNvSpPr>
-            <a:spLocks noGrp="1"/>
-          </p:cNvSpPr>
-          <p:nvPr>
-            <p:ph type="body" sz="quarter" idx="15"/>
-          </p:nvPr>
-        </p:nvSpPr>
-        <p:spPr>
-          <a:xfrm>
-            <a:off x="588000" y="977317"/>
-            <a:ext cx="11419970" cy="4540025"/>
-          </a:xfrm>
-        </p:spPr>
-        <p:txBody>
-          <a:bodyPr/>
-          <a:lstStyle/>
-          <a:p>
-            <a:r>
-              <a:rPr lang="en-US" sz="2800" b="0" dirty="0">
-                <a:solidFill>
-                  <a:schemeClr val="tx2"/>
-                </a:solidFill>
-              </a:rPr>
-              <a:t> Most of the modern web-based application provide a feature to allow a user to send a file.</a:t>
-            </a:r>
-          </a:p>
-          <a:p>
-            <a:pPr marL="0" indent="0">
-              <a:buNone/>
-            </a:pPr>
-            <a:r>
-              <a:rPr lang="en-US" sz="2800" b="0" dirty="0">
-                <a:solidFill>
-                  <a:schemeClr val="tx2"/>
-                </a:solidFill>
-              </a:rPr>
-              <a:t> </a:t>
-            </a:r>
-          </a:p>
-          <a:p>
-            <a:r>
-              <a:rPr lang="en-US" sz="2800" b="0" dirty="0">
-                <a:solidFill>
-                  <a:schemeClr val="tx2"/>
-                </a:solidFill>
-              </a:rPr>
-              <a:t> Such feature is called "</a:t>
-            </a:r>
-            <a:r>
-              <a:rPr lang="en-US" sz="2800" b="0" dirty="0">
-                <a:solidFill>
-                  <a:schemeClr val="accent1"/>
-                </a:solidFill>
-                <a:latin typeface="Consolas" panose="020B0609020204030204" pitchFamily="49" charset="0"/>
-              </a:rPr>
-              <a:t>file upload</a:t>
-            </a:r>
-            <a:r>
-              <a:rPr lang="en-US" sz="2800" b="0" dirty="0">
-                <a:solidFill>
-                  <a:schemeClr val="tx2"/>
-                </a:solidFill>
-              </a:rPr>
-              <a:t>".</a:t>
-            </a:r>
-          </a:p>
-          <a:p>
-            <a:pPr marL="0" indent="0">
-              <a:buNone/>
-            </a:pPr>
-            <a:r>
-              <a:rPr lang="en-US" sz="2800" b="0" dirty="0">
-                <a:solidFill>
-                  <a:schemeClr val="tx2"/>
-                </a:solidFill>
-              </a:rPr>
-              <a:t> </a:t>
-            </a:r>
-          </a:p>
-          <a:p>
-            <a:r>
-              <a:rPr lang="en-US" sz="2800" b="0" dirty="0">
-                <a:solidFill>
-                  <a:schemeClr val="tx2"/>
-                </a:solidFill>
-              </a:rPr>
-              <a:t> It is very common that </a:t>
-            </a:r>
-            <a:r>
-              <a:rPr lang="en-US" sz="2800" b="0" dirty="0">
-                <a:solidFill>
-                  <a:schemeClr val="accent1"/>
-                </a:solidFill>
-              </a:rPr>
-              <a:t>PDF format</a:t>
-            </a:r>
-            <a:r>
-              <a:rPr lang="en-US" sz="2800" b="0" dirty="0">
-                <a:solidFill>
-                  <a:schemeClr val="tx2"/>
-                </a:solidFill>
-              </a:rPr>
-              <a:t> was accepted for the file.</a:t>
-            </a:r>
-          </a:p>
-        </p:txBody>
-      </p:sp>
-    </p:spTree>
-    <p:extLst>
-      <p:ext uri="{BB962C8B-B14F-4D97-AF65-F5344CB8AC3E}">
-        <p14:creationId xmlns:p14="http://schemas.microsoft.com/office/powerpoint/2010/main" val="2121745454"/>
-      </p:ext>
-    </p:extLst>
-  </p:cSld>
-  <p:clrMapOvr>
-    <a:masterClrMapping/>
-  </p:clrMapOvr>
-  <mc:AlternateContent xmlns:mc="http://schemas.openxmlformats.org/markup-compatibility/2006" xmlns:p14="http://schemas.microsoft.com/office/powerpoint/2010/main">
-    <mc:Choice Requires="p14">
-      <p:transition spd="med" p14:dur="700">
-        <p:fade/>
-      </p:transition>
-    </mc:Choice>
-    <mc:Fallback xmlns="">
-      <p:transition spd="med">
-        <p:fade/>
-      </p:transition>
-    </mc:Fallback>
-  </mc:AlternateContent>
-</p:sld>
-</file>
-
-<file path=ppt/slides/slide20.xml><?xml version="1.0" encoding="utf-8"?>
+<file path=ppt/slides/slide22.xml><?xml version="1.0" encoding="utf-8"?>
 <p:sld xmlns:a="http://schemas.openxmlformats.org/drawingml/2006/main" xmlns:r="http://schemas.openxmlformats.org/officeDocument/2006/relationships" xmlns:p="http://schemas.openxmlformats.org/presentationml/2006/main">
   <p:cSld>
     <p:spTree>
@@ -45626,8 +47687,8 @@
           <a:lstStyle/>
           <a:p>
             <a:r>
-              <a:rPr lang="en-US" dirty="0"/>
-              <a:t>📖 Let’s the story begin – Round n°4</a:t>
+              <a:rPr lang="en-US" noProof="0" dirty="0"/>
+              <a:t>📖 Round n°4</a:t>
             </a:r>
           </a:p>
         </p:txBody>
@@ -45659,7 +47720,7 @@
           <a:lstStyle/>
           <a:p>
             <a:r>
-              <a:rPr lang="en-US" sz="2800" b="0" dirty="0">
+              <a:rPr lang="en-US" sz="2800" b="0" noProof="0" dirty="0">
                 <a:solidFill>
                   <a:schemeClr val="tx2"/>
                 </a:solidFill>
@@ -45670,52 +47731,16 @@
           <a:p>
             <a:pPr lvl="1"/>
             <a:r>
-              <a:rPr lang="fr-FR" sz="2400" b="0" dirty="0">
+              <a:rPr lang="en-US" sz="2400" b="0" noProof="0" dirty="0">
                 <a:solidFill>
                   <a:schemeClr val="tx2"/>
                 </a:solidFill>
                 <a:hlinkClick r:id="rId2"/>
               </a:rPr>
-              <a:t>XML </a:t>
+              <a:t>XML External Entity injection</a:t>
             </a:r>
             <a:r>
-              <a:rPr lang="fr-FR" sz="2400" b="0" dirty="0" err="1">
-                <a:solidFill>
-                  <a:schemeClr val="tx2"/>
-                </a:solidFill>
-                <a:hlinkClick r:id="rId2"/>
-              </a:rPr>
-              <a:t>External</a:t>
-            </a:r>
-            <a:r>
-              <a:rPr lang="fr-FR" sz="2400" b="0" dirty="0">
-                <a:solidFill>
-                  <a:schemeClr val="tx2"/>
-                </a:solidFill>
-                <a:hlinkClick r:id="rId2"/>
-              </a:rPr>
-              <a:t> </a:t>
-            </a:r>
-            <a:r>
-              <a:rPr lang="fr-FR" sz="2400" b="0" dirty="0" err="1">
-                <a:solidFill>
-                  <a:schemeClr val="tx2"/>
-                </a:solidFill>
-                <a:hlinkClick r:id="rId2"/>
-              </a:rPr>
-              <a:t>Entity</a:t>
-            </a:r>
-            <a:r>
-              <a:rPr lang="fr-FR" sz="2400" b="0" dirty="0">
-                <a:solidFill>
-                  <a:schemeClr val="tx2"/>
-                </a:solidFill>
-                <a:hlinkClick r:id="rId2"/>
-              </a:rPr>
-              <a:t> injection</a:t>
-            </a:r>
-            <a:r>
-              <a:rPr lang="fr-FR" sz="2400" b="0" dirty="0">
+              <a:rPr lang="en-US" sz="2400" b="0" noProof="0" dirty="0">
                 <a:solidFill>
                   <a:schemeClr val="tx2"/>
                 </a:solidFill>
@@ -45726,7 +47751,7 @@
           <a:p>
             <a:pPr lvl="1"/>
             <a:r>
-              <a:rPr lang="en-US" sz="2400" b="0" dirty="0">
+              <a:rPr lang="en-US" sz="2400" b="0" noProof="0" dirty="0">
                 <a:solidFill>
                   <a:schemeClr val="tx2"/>
                 </a:solidFill>
@@ -45735,7 +47760,7 @@
               <a:t>Server-Side Request Forgery</a:t>
             </a:r>
             <a:r>
-              <a:rPr lang="en-US" sz="2400" b="0" dirty="0">
+              <a:rPr lang="en-US" sz="2400" b="0" noProof="0" dirty="0">
                 <a:solidFill>
                   <a:schemeClr val="tx2"/>
                 </a:solidFill>
@@ -45748,7 +47773,7 @@
               <a:buNone/>
             </a:pPr>
             <a:r>
-              <a:rPr lang="en-US" sz="2800" b="0" dirty="0">
+              <a:rPr lang="en-US" sz="2800" b="0" noProof="0" dirty="0">
                 <a:solidFill>
                   <a:schemeClr val="tx2"/>
                 </a:solidFill>
@@ -45758,7 +47783,7 @@
           </a:p>
           <a:p>
             <a:r>
-              <a:rPr lang="en-US" sz="2800" b="0" dirty="0">
+              <a:rPr lang="en-US" sz="2800" b="0" noProof="0" dirty="0">
                 <a:solidFill>
                   <a:schemeClr val="tx2"/>
                 </a:solidFill>
@@ -45769,14 +47794,14 @@
           <a:p>
             <a:pPr lvl="1"/>
             <a:r>
-              <a:rPr lang="en-US" sz="2400" dirty="0"/>
+              <a:rPr lang="en-US" sz="2400" noProof="0" dirty="0"/>
               <a:t>Read local files on the host on which the service is deployed.</a:t>
             </a:r>
           </a:p>
           <a:p>
             <a:pPr lvl="1"/>
             <a:r>
-              <a:rPr lang="en-US" sz="2400" b="0" dirty="0">
+              <a:rPr lang="en-US" sz="2400" b="0" noProof="0" dirty="0">
                 <a:solidFill>
                   <a:schemeClr val="tx2"/>
                 </a:solidFill>
@@ -45784,17 +47809,17 @@
               <a:t>Instruct the </a:t>
             </a:r>
             <a:r>
-              <a:rPr lang="en-US" sz="2400" dirty="0"/>
+              <a:rPr lang="en-US" sz="2400" noProof="0" dirty="0"/>
               <a:t>host, on which the service is deployed, to perform network requests.</a:t>
             </a:r>
           </a:p>
           <a:p>
             <a:pPr lvl="1"/>
             <a:r>
-              <a:rPr lang="en-US" sz="2400" dirty="0"/>
+              <a:rPr lang="en-US" sz="2400" noProof="0" dirty="0"/>
               <a:t>…</a:t>
             </a:r>
-            <a:endParaRPr lang="en-US" sz="2400" b="0" dirty="0">
+            <a:endParaRPr lang="en-US" sz="2400" b="0" noProof="0" dirty="0">
               <a:solidFill>
                 <a:schemeClr val="tx2"/>
               </a:solidFill>
@@ -45804,7 +47829,7 @@
             <a:pPr marL="0" indent="0">
               <a:buNone/>
             </a:pPr>
-            <a:endParaRPr lang="en-US" sz="2800" b="0" dirty="0">
+            <a:endParaRPr lang="en-US" sz="2800" b="0" noProof="0" dirty="0">
               <a:solidFill>
                 <a:schemeClr val="tx2"/>
               </a:solidFill>
@@ -45837,7 +47862,7 @@
 </p:sld>
 </file>
 
-<file path=ppt/slides/slide21.xml><?xml version="1.0" encoding="utf-8"?>
+<file path=ppt/slides/slide23.xml><?xml version="1.0" encoding="utf-8"?>
 <p:sld xmlns:a="http://schemas.openxmlformats.org/drawingml/2006/main" xmlns:r="http://schemas.openxmlformats.org/officeDocument/2006/relationships" xmlns:p="http://schemas.openxmlformats.org/presentationml/2006/main">
   <p:cSld>
     <p:spTree>
@@ -45882,8 +47907,8 @@
           <a:lstStyle/>
           <a:p>
             <a:r>
-              <a:rPr lang="en-US" dirty="0"/>
-              <a:t>📖 Let’s the story begin – Round n°4</a:t>
+              <a:rPr lang="en-US" noProof="0" dirty="0"/>
+              <a:t>📖 Round n°4</a:t>
             </a:r>
           </a:p>
         </p:txBody>
@@ -45950,7 +47975,7 @@
 </p:sld>
 </file>
 
-<file path=ppt/slides/slide22.xml><?xml version="1.0" encoding="utf-8"?>
+<file path=ppt/slides/slide24.xml><?xml version="1.0" encoding="utf-8"?>
 <p:sld xmlns:a="http://schemas.openxmlformats.org/drawingml/2006/main" xmlns:r="http://schemas.openxmlformats.org/officeDocument/2006/relationships" xmlns:p="http://schemas.openxmlformats.org/presentationml/2006/main">
   <p:cSld>
     <p:spTree>
@@ -45995,8 +48020,8 @@
           <a:lstStyle/>
           <a:p>
             <a:r>
-              <a:rPr lang="en-US" dirty="0"/>
-              <a:t>📖 Let’s the story begin – Round n°4</a:t>
+              <a:rPr lang="en-US" noProof="0" dirty="0"/>
+              <a:t>📖 Round n°4</a:t>
             </a:r>
           </a:p>
         </p:txBody>
@@ -46028,25 +48053,41 @@
           <a:lstStyle/>
           <a:p>
             <a:r>
-              <a:rPr lang="en-US" sz="2800" b="0" dirty="0">
+              <a:rPr lang="en-US" sz="2800" b="0" noProof="0" dirty="0">
                 <a:solidFill>
                   <a:schemeClr val="tx2"/>
                 </a:solidFill>
               </a:rPr>
-              <a:t>  🤔 Test failed so the following additional validation was proposed to the team:</a:t>
+              <a:t>  🤔 </a:t>
+            </a:r>
+            <a:r>
+              <a:rPr lang="en-US" sz="2800" b="0" noProof="0" dirty="0">
+                <a:solidFill>
+                  <a:schemeClr val="accent5"/>
+                </a:solidFill>
+              </a:rPr>
+              <a:t>Test failed </a:t>
+            </a:r>
+            <a:r>
+              <a:rPr lang="en-US" sz="2800" b="0" noProof="0" dirty="0">
+                <a:solidFill>
+                  <a:schemeClr val="tx2"/>
+                </a:solidFill>
+              </a:rPr>
+              <a:t>so the following additional validation was proposed to the team:</a:t>
             </a:r>
           </a:p>
           <a:p>
             <a:pPr lvl="1"/>
             <a:r>
-              <a:rPr lang="en-US" sz="2400" dirty="0"/>
+              <a:rPr lang="en-US" sz="2400" noProof="0" dirty="0"/>
               <a:t>Ensure that the provided file do not contains any XFA forms.</a:t>
             </a:r>
           </a:p>
           <a:p>
             <a:pPr lvl="1"/>
             <a:r>
-              <a:rPr lang="en-US" sz="2400" dirty="0"/>
+              <a:rPr lang="en-US" sz="2400" noProof="0" dirty="0"/>
               <a:t>That ways, PDF files stored will not contains any malicious XFA forms that can be triggered, if processed later, by an application using a vulnerable PDF library.</a:t>
             </a:r>
           </a:p>
@@ -46054,7 +48095,7 @@
             <a:pPr marL="0" lvl="1" indent="0">
               <a:buNone/>
             </a:pPr>
-            <a:endParaRPr lang="en-US" sz="2400" b="0" dirty="0">
+            <a:endParaRPr lang="en-US" sz="2400" b="0" noProof="0" dirty="0">
               <a:solidFill>
                 <a:schemeClr val="tx2"/>
               </a:solidFill>
@@ -46062,7 +48103,7 @@
           </a:p>
           <a:p>
             <a:r>
-              <a:rPr lang="en-US" sz="2800" b="0" dirty="0">
+              <a:rPr lang="en-US" sz="2800" b="0" noProof="0" dirty="0">
                 <a:solidFill>
                   <a:schemeClr val="tx2"/>
                 </a:solidFill>
@@ -46071,7 +48112,7 @@
             </a:r>
           </a:p>
           <a:p>
-            <a:endParaRPr lang="en-US" sz="2800" b="0" dirty="0">
+            <a:endParaRPr lang="en-US" sz="2800" b="0" noProof="0" dirty="0">
               <a:solidFill>
                 <a:schemeClr val="tx2"/>
               </a:solidFill>
@@ -46082,7 +48123,7 @@
               <a:buNone/>
             </a:pPr>
             <a:r>
-              <a:rPr lang="en-US" sz="2800" b="0" dirty="0">
+              <a:rPr lang="en-US" sz="2800" b="0" noProof="0" dirty="0">
                 <a:solidFill>
                   <a:schemeClr val="tx2"/>
                 </a:solidFill>
@@ -46194,7 +48235,7 @@
 </p:sld>
 </file>
 
-<file path=ppt/slides/slide23.xml><?xml version="1.0" encoding="utf-8"?>
+<file path=ppt/slides/slide25.xml><?xml version="1.0" encoding="utf-8"?>
 <p:sld xmlns:a="http://schemas.openxmlformats.org/drawingml/2006/main" xmlns:r="http://schemas.openxmlformats.org/officeDocument/2006/relationships" xmlns:p="http://schemas.openxmlformats.org/presentationml/2006/main">
   <p:cSld>
     <p:spTree>
@@ -46239,8 +48280,8 @@
           <a:lstStyle/>
           <a:p>
             <a:r>
-              <a:rPr lang="en-US" dirty="0"/>
-              <a:t>📖 Let’s the story begin – Round n°5</a:t>
+              <a:rPr lang="en-US" noProof="0" dirty="0"/>
+              <a:t>📖 Round n°5</a:t>
             </a:r>
           </a:p>
         </p:txBody>
@@ -46272,7 +48313,7 @@
           <a:lstStyle/>
           <a:p>
             <a:r>
-              <a:rPr lang="en-US" sz="2800" b="0" dirty="0">
+              <a:rPr lang="en-US" sz="2800" b="0" noProof="0" dirty="0">
                 <a:solidFill>
                   <a:schemeClr val="tx2"/>
                 </a:solidFill>
@@ -46281,7 +48322,7 @@
             </a:r>
           </a:p>
           <a:p>
-            <a:endParaRPr lang="en-US" sz="2800" b="0" dirty="0">
+            <a:endParaRPr lang="en-US" sz="2800" b="0" noProof="0" dirty="0">
               <a:solidFill>
                 <a:schemeClr val="tx2"/>
               </a:solidFill>
@@ -46292,7 +48333,7 @@
               <a:buNone/>
             </a:pPr>
             <a:r>
-              <a:rPr lang="en-US" sz="2800" b="0" dirty="0">
+              <a:rPr lang="en-US" sz="2800" b="0" noProof="0" dirty="0">
                 <a:solidFill>
                   <a:schemeClr val="tx2"/>
                 </a:solidFill>
@@ -46304,7 +48345,7 @@
             <a:pPr marL="0" indent="0">
               <a:buNone/>
             </a:pPr>
-            <a:endParaRPr lang="en-US" sz="2800" b="0" dirty="0">
+            <a:endParaRPr lang="en-US" sz="2800" b="0" noProof="0" dirty="0">
               <a:solidFill>
                 <a:schemeClr val="tx2"/>
               </a:solidFill>
@@ -46341,7 +48382,7 @@
           <a:lstStyle/>
           <a:p>
             <a:r>
-              <a:rPr lang="fr-FR" sz="1400" dirty="0">
+              <a:rPr lang="en-US" sz="1400" noProof="0" dirty="0">
                 <a:latin typeface="Consolas" panose="020B0609020204030204" pitchFamily="49" charset="0"/>
               </a:rPr>
               <a:t>hxxps://github.com/AlessandroZ/LaZagne/releases/download/2.4.3/lazagne.exe </a:t>
@@ -46444,7 +48485,7 @@
           <a:lstStyle/>
           <a:p>
             <a:pPr algn="ctr"/>
-            <a:endParaRPr lang="fr-FR"/>
+            <a:endParaRPr lang="en-US" noProof="0" dirty="0"/>
           </a:p>
         </p:txBody>
       </p:sp>
@@ -46473,7 +48514,7 @@
 </p:sld>
 </file>
 
-<file path=ppt/slides/slide24.xml><?xml version="1.0" encoding="utf-8"?>
+<file path=ppt/slides/slide26.xml><?xml version="1.0" encoding="utf-8"?>
 <p:sld xmlns:a="http://schemas.openxmlformats.org/drawingml/2006/main" xmlns:r="http://schemas.openxmlformats.org/officeDocument/2006/relationships" xmlns:p="http://schemas.openxmlformats.org/presentationml/2006/main">
   <p:cSld>
     <p:spTree>
@@ -46518,8 +48559,8 @@
           <a:lstStyle/>
           <a:p>
             <a:r>
-              <a:rPr lang="en-US" dirty="0"/>
-              <a:t>📖 Let’s the story begin – Round n°5</a:t>
+              <a:rPr lang="en-US" noProof="0" dirty="0"/>
+              <a:t>📖 Round n°5 – Linked file detection by antivirus tools</a:t>
             </a:r>
           </a:p>
         </p:txBody>
@@ -46599,6 +48640,110 @@
           </a:effectLst>
         </p:spPr>
       </p:pic>
+      <p:sp>
+        <p:nvSpPr>
+          <p:cNvPr id="3" name="Rectangle 2">
+            <a:extLst>
+              <a:ext uri="{FF2B5EF4-FFF2-40B4-BE49-F238E27FC236}">
+                <a16:creationId xmlns:a16="http://schemas.microsoft.com/office/drawing/2014/main" id="{0447DF56-3A01-AEBB-C440-FD5B70F1AB43}"/>
+              </a:ext>
+            </a:extLst>
+          </p:cNvPr>
+          <p:cNvSpPr/>
+          <p:nvPr/>
+        </p:nvSpPr>
+        <p:spPr>
+          <a:xfrm>
+            <a:off x="4185516" y="3809943"/>
+            <a:ext cx="3703841" cy="464345"/>
+          </a:xfrm>
+          <a:prstGeom prst="rect">
+            <a:avLst/>
+          </a:prstGeom>
+          <a:noFill/>
+          <a:ln w="31750">
+            <a:solidFill>
+              <a:schemeClr val="accent6"/>
+            </a:solidFill>
+          </a:ln>
+        </p:spPr>
+        <p:style>
+          <a:lnRef idx="2">
+            <a:schemeClr val="accent1">
+              <a:shade val="50000"/>
+            </a:schemeClr>
+          </a:lnRef>
+          <a:fillRef idx="1">
+            <a:schemeClr val="accent1"/>
+          </a:fillRef>
+          <a:effectRef idx="0">
+            <a:schemeClr val="accent1"/>
+          </a:effectRef>
+          <a:fontRef idx="minor">
+            <a:schemeClr val="lt1"/>
+          </a:fontRef>
+        </p:style>
+        <p:txBody>
+          <a:bodyPr rtlCol="0" anchor="ctr"/>
+          <a:lstStyle/>
+          <a:p>
+            <a:pPr algn="ctr"/>
+            <a:endParaRPr lang="en-US" noProof="0" dirty="0"/>
+          </a:p>
+        </p:txBody>
+      </p:sp>
+      <p:sp>
+        <p:nvSpPr>
+          <p:cNvPr id="5" name="Rectangle 4">
+            <a:extLst>
+              <a:ext uri="{FF2B5EF4-FFF2-40B4-BE49-F238E27FC236}">
+                <a16:creationId xmlns:a16="http://schemas.microsoft.com/office/drawing/2014/main" id="{C31C9B39-3EB6-2F28-91BC-023A9DD3409A}"/>
+              </a:ext>
+            </a:extLst>
+          </p:cNvPr>
+          <p:cNvSpPr/>
+          <p:nvPr/>
+        </p:nvSpPr>
+        <p:spPr>
+          <a:xfrm>
+            <a:off x="2310116" y="1924492"/>
+            <a:ext cx="7280451" cy="287078"/>
+          </a:xfrm>
+          <a:prstGeom prst="rect">
+            <a:avLst/>
+          </a:prstGeom>
+          <a:noFill/>
+          <a:ln w="31750">
+            <a:solidFill>
+              <a:schemeClr val="accent6"/>
+            </a:solidFill>
+          </a:ln>
+        </p:spPr>
+        <p:style>
+          <a:lnRef idx="2">
+            <a:schemeClr val="accent1">
+              <a:shade val="50000"/>
+            </a:schemeClr>
+          </a:lnRef>
+          <a:fillRef idx="1">
+            <a:schemeClr val="accent1"/>
+          </a:fillRef>
+          <a:effectRef idx="0">
+            <a:schemeClr val="accent1"/>
+          </a:effectRef>
+          <a:fontRef idx="minor">
+            <a:schemeClr val="lt1"/>
+          </a:fontRef>
+        </p:style>
+        <p:txBody>
+          <a:bodyPr rtlCol="0" anchor="ctr"/>
+          <a:lstStyle/>
+          <a:p>
+            <a:pPr algn="ctr"/>
+            <a:endParaRPr lang="en-US" noProof="0" dirty="0"/>
+          </a:p>
+        </p:txBody>
+      </p:sp>
     </p:spTree>
     <p:extLst>
       <p:ext uri="{BB962C8B-B14F-4D97-AF65-F5344CB8AC3E}">
@@ -46624,7 +48769,7 @@
 </p:sld>
 </file>
 
-<file path=ppt/slides/slide25.xml><?xml version="1.0" encoding="utf-8"?>
+<file path=ppt/slides/slide27.xml><?xml version="1.0" encoding="utf-8"?>
 <p:sld xmlns:a="http://schemas.openxmlformats.org/drawingml/2006/main" xmlns:r="http://schemas.openxmlformats.org/officeDocument/2006/relationships" xmlns:p="http://schemas.openxmlformats.org/presentationml/2006/main">
   <p:cSld>
     <p:spTree>
@@ -46669,8 +48814,8 @@
           <a:lstStyle/>
           <a:p>
             <a:r>
-              <a:rPr lang="en-US" dirty="0"/>
-              <a:t>📖 Let’s the story begin – Round n°5</a:t>
+              <a:rPr lang="en-US" noProof="0" dirty="0"/>
+              <a:t>📖 Round n°5</a:t>
             </a:r>
           </a:p>
         </p:txBody>
@@ -46702,7 +48847,7 @@
           <a:lstStyle/>
           <a:p>
             <a:r>
-              <a:rPr lang="en-US" sz="2800" b="0" dirty="0">
+              <a:rPr lang="en-US" sz="2800" b="0" noProof="0" dirty="0">
                 <a:solidFill>
                   <a:schemeClr val="tx2"/>
                 </a:solidFill>
@@ -46714,7 +48859,7 @@
             <a:pPr marL="0" indent="0">
               <a:buNone/>
             </a:pPr>
-            <a:endParaRPr lang="en-US" sz="2800" b="0" dirty="0">
+            <a:endParaRPr lang="en-US" sz="2800" b="0" noProof="0" dirty="0">
               <a:solidFill>
                 <a:schemeClr val="tx2"/>
               </a:solidFill>
@@ -46722,7 +48867,7 @@
           </a:p>
           <a:p>
             <a:r>
-              <a:rPr lang="en-US" sz="2800" b="0" dirty="0">
+              <a:rPr lang="en-US" sz="2800" b="0" noProof="0" dirty="0">
                 <a:solidFill>
                   <a:schemeClr val="tx2"/>
                 </a:solidFill>
@@ -46734,7 +48879,7 @@
             <a:pPr marL="0" indent="0">
               <a:buNone/>
             </a:pPr>
-            <a:endParaRPr lang="en-US" sz="2800" b="0" dirty="0">
+            <a:endParaRPr lang="en-US" sz="2800" b="0" noProof="0" dirty="0">
               <a:solidFill>
                 <a:schemeClr val="tx2"/>
               </a:solidFill>
@@ -46804,7 +48949,7 @@
 </p:sld>
 </file>
 
-<file path=ppt/slides/slide26.xml><?xml version="1.0" encoding="utf-8"?>
+<file path=ppt/slides/slide28.xml><?xml version="1.0" encoding="utf-8"?>
 <p:sld xmlns:a="http://schemas.openxmlformats.org/drawingml/2006/main" xmlns:r="http://schemas.openxmlformats.org/officeDocument/2006/relationships" xmlns:p="http://schemas.openxmlformats.org/presentationml/2006/main">
   <p:cSld>
     <p:spTree>
@@ -46849,8 +48994,8 @@
           <a:lstStyle/>
           <a:p>
             <a:r>
-              <a:rPr lang="en-US" dirty="0"/>
-              <a:t>📖 Let’s the story begin – Round n°5</a:t>
+              <a:rPr lang="en-US" noProof="0" dirty="0"/>
+              <a:t>📖 Round n°5</a:t>
             </a:r>
           </a:p>
         </p:txBody>
@@ -46882,18 +49027,34 @@
           <a:lstStyle/>
           <a:p>
             <a:r>
-              <a:rPr lang="en-US" sz="2800" b="0" dirty="0">
+              <a:rPr lang="en-US" sz="2800" b="0" noProof="0" dirty="0">
                 <a:solidFill>
                   <a:schemeClr val="tx2"/>
                 </a:solidFill>
               </a:rPr>
-              <a:t>  🤔 Test failed so the following additional validation was proposed to the team:</a:t>
+              <a:t>  🤔 </a:t>
+            </a:r>
+            <a:r>
+              <a:rPr lang="en-US" sz="2800" b="0" noProof="0" dirty="0">
+                <a:solidFill>
+                  <a:schemeClr val="accent5"/>
+                </a:solidFill>
+              </a:rPr>
+              <a:t>Test failed </a:t>
+            </a:r>
+            <a:r>
+              <a:rPr lang="en-US" sz="2800" b="0" noProof="0" dirty="0">
+                <a:solidFill>
+                  <a:schemeClr val="tx2"/>
+                </a:solidFill>
+              </a:rPr>
+              <a:t>so the following additional validation was proposed to the team:</a:t>
             </a:r>
           </a:p>
           <a:p>
             <a:pPr lvl="1"/>
             <a:r>
-              <a:rPr lang="en-US" sz="2400" dirty="0"/>
+              <a:rPr lang="en-US" sz="2400" noProof="0" dirty="0"/>
               <a:t>Ensure that the provided file contains only links to allowed domains and content.</a:t>
             </a:r>
           </a:p>
@@ -46901,7 +49062,7 @@
             <a:pPr marL="0" lvl="1" indent="0">
               <a:buNone/>
             </a:pPr>
-            <a:endParaRPr lang="en-US" sz="2400" b="0" dirty="0">
+            <a:endParaRPr lang="en-US" sz="2400" b="0" noProof="0" dirty="0">
               <a:solidFill>
                 <a:schemeClr val="tx2"/>
               </a:solidFill>
@@ -46909,7 +49070,7 @@
           </a:p>
           <a:p>
             <a:r>
-              <a:rPr lang="en-US" sz="2800" b="0" dirty="0">
+              <a:rPr lang="en-US" sz="2800" b="0" noProof="0" dirty="0">
                 <a:solidFill>
                   <a:schemeClr val="tx2"/>
                 </a:solidFill>
@@ -46918,7 +49079,7 @@
             </a:r>
           </a:p>
           <a:p>
-            <a:endParaRPr lang="en-US" sz="2800" b="0" dirty="0">
+            <a:endParaRPr lang="en-US" sz="2800" b="0" noProof="0" dirty="0">
               <a:solidFill>
                 <a:schemeClr val="tx2"/>
               </a:solidFill>
@@ -46929,7 +49090,7 @@
               <a:buNone/>
             </a:pPr>
             <a:r>
-              <a:rPr lang="en-US" sz="2800" b="0" dirty="0">
+              <a:rPr lang="en-US" sz="2800" b="0" noProof="0" dirty="0">
                 <a:solidFill>
                   <a:schemeClr val="tx2"/>
                 </a:solidFill>
@@ -47041,7 +49202,7 @@
 </p:sld>
 </file>
 
-<file path=ppt/slides/slide27.xml><?xml version="1.0" encoding="utf-8"?>
+<file path=ppt/slides/slide29.xml><?xml version="1.0" encoding="utf-8"?>
 <p:sld xmlns:a="http://schemas.openxmlformats.org/drawingml/2006/main" xmlns:r="http://schemas.openxmlformats.org/officeDocument/2006/relationships" xmlns:p="http://schemas.openxmlformats.org/presentationml/2006/main">
   <p:cSld>
     <p:spTree>
@@ -47086,8 +49247,8 @@
           <a:lstStyle/>
           <a:p>
             <a:r>
-              <a:rPr lang="en-US" dirty="0"/>
-              <a:t>📖 Let’s the story begin – Round n°6</a:t>
+              <a:rPr lang="en-US" noProof="0" dirty="0"/>
+              <a:t>📖 Round n°6</a:t>
             </a:r>
           </a:p>
         </p:txBody>
@@ -47119,7 +49280,7 @@
           <a:lstStyle/>
           <a:p>
             <a:r>
-              <a:rPr lang="en-US" sz="2800" b="0" dirty="0">
+              <a:rPr lang="en-US" sz="2800" b="0" noProof="0" dirty="0">
                 <a:solidFill>
                   <a:schemeClr val="tx2"/>
                 </a:solidFill>
@@ -47128,7 +49289,7 @@
             </a:r>
           </a:p>
           <a:p>
-            <a:endParaRPr lang="en-US" sz="2800" b="0" dirty="0">
+            <a:endParaRPr lang="en-US" sz="2800" b="0" noProof="0" dirty="0">
               <a:solidFill>
                 <a:schemeClr val="tx2"/>
               </a:solidFill>
@@ -47139,7 +49300,7 @@
               <a:buNone/>
             </a:pPr>
             <a:r>
-              <a:rPr lang="en-US" sz="2800" b="0" dirty="0">
+              <a:rPr lang="en-US" sz="2800" b="0" noProof="0" dirty="0">
                 <a:solidFill>
                   <a:schemeClr val="tx2"/>
                 </a:solidFill>
@@ -47151,7 +49312,7 @@
             <a:pPr marL="0" indent="0">
               <a:buNone/>
             </a:pPr>
-            <a:endParaRPr lang="en-US" sz="2800" b="0" dirty="0">
+            <a:endParaRPr lang="en-US" sz="2800" b="0" noProof="0" dirty="0">
               <a:solidFill>
                 <a:schemeClr val="tx2"/>
               </a:solidFill>
@@ -47225,7 +49386,7 @@
           <a:lstStyle/>
           <a:p>
             <a:r>
-              <a:rPr lang="fr-FR" sz="1400" dirty="0">
+              <a:rPr lang="en-US" sz="1400" noProof="0" dirty="0">
                 <a:latin typeface="Consolas" panose="020B0609020204030204" pitchFamily="49" charset="0"/>
               </a:rPr>
               <a:t>hxxps://github.com/AlessandroZ/LaZagne/releases/download/2.4.6/lazagne.exe </a:t>
@@ -47291,7 +49452,7 @@
           <a:lstStyle/>
           <a:p>
             <a:pPr algn="ctr"/>
-            <a:endParaRPr lang="fr-FR"/>
+            <a:endParaRPr lang="en-US" noProof="0" dirty="0"/>
           </a:p>
         </p:txBody>
       </p:sp>
@@ -47320,7 +49481,195 @@
 </p:sld>
 </file>
 
-<file path=ppt/slides/slide28.xml><?xml version="1.0" encoding="utf-8"?>
+<file path=ppt/slides/slide3.xml><?xml version="1.0" encoding="utf-8"?>
+<p:sld xmlns:a="http://schemas.openxmlformats.org/drawingml/2006/main" xmlns:r="http://schemas.openxmlformats.org/officeDocument/2006/relationships" xmlns:p="http://schemas.openxmlformats.org/presentationml/2006/main">
+  <p:cSld>
+    <p:spTree>
+      <p:nvGrpSpPr>
+        <p:cNvPr id="1" name="">
+          <a:extLst>
+            <a:ext uri="{FF2B5EF4-FFF2-40B4-BE49-F238E27FC236}">
+              <a16:creationId xmlns:a16="http://schemas.microsoft.com/office/drawing/2014/main" id="{3E16E9E5-B1FA-1BAA-A72E-867E69E0CFFB}"/>
+            </a:ext>
+          </a:extLst>
+        </p:cNvPr>
+        <p:cNvGrpSpPr/>
+        <p:nvPr/>
+      </p:nvGrpSpPr>
+      <p:grpSpPr>
+        <a:xfrm>
+          <a:off x="0" y="0"/>
+          <a:ext cx="0" cy="0"/>
+          <a:chOff x="0" y="0"/>
+          <a:chExt cx="0" cy="0"/>
+        </a:xfrm>
+      </p:grpSpPr>
+      <p:sp>
+        <p:nvSpPr>
+          <p:cNvPr id="2" name="Titre 1">
+            <a:extLst>
+              <a:ext uri="{FF2B5EF4-FFF2-40B4-BE49-F238E27FC236}">
+                <a16:creationId xmlns:a16="http://schemas.microsoft.com/office/drawing/2014/main" id="{ECC41D0F-4E65-EE8F-6EC1-60C60CADE2A0}"/>
+              </a:ext>
+            </a:extLst>
+          </p:cNvPr>
+          <p:cNvSpPr>
+            <a:spLocks noGrp="1"/>
+          </p:cNvSpPr>
+          <p:nvPr>
+            <p:ph type="title"/>
+          </p:nvPr>
+        </p:nvSpPr>
+        <p:spPr/>
+        <p:txBody>
+          <a:bodyPr/>
+          <a:lstStyle/>
+          <a:p>
+            <a:r>
+              <a:rPr lang="en-US" noProof="0" dirty="0"/>
+              <a:t>ℹ️ Introduction</a:t>
+            </a:r>
+          </a:p>
+        </p:txBody>
+      </p:sp>
+      <p:sp>
+        <p:nvSpPr>
+          <p:cNvPr id="3" name="Espace réservé du texte 2">
+            <a:extLst>
+              <a:ext uri="{FF2B5EF4-FFF2-40B4-BE49-F238E27FC236}">
+                <a16:creationId xmlns:a16="http://schemas.microsoft.com/office/drawing/2014/main" id="{DD39683C-541A-B4BA-B911-E5EC3EABE467}"/>
+              </a:ext>
+            </a:extLst>
+          </p:cNvPr>
+          <p:cNvSpPr>
+            <a:spLocks noGrp="1"/>
+          </p:cNvSpPr>
+          <p:nvPr>
+            <p:ph type="body" sz="quarter" idx="15"/>
+          </p:nvPr>
+        </p:nvSpPr>
+        <p:spPr>
+          <a:xfrm>
+            <a:off x="588000" y="977317"/>
+            <a:ext cx="11419970" cy="4949030"/>
+          </a:xfrm>
+        </p:spPr>
+        <p:txBody>
+          <a:bodyPr/>
+          <a:lstStyle/>
+          <a:p>
+            <a:r>
+              <a:rPr lang="en-US" sz="2800" b="0" noProof="0" dirty="0">
+                <a:solidFill>
+                  <a:schemeClr val="tx2"/>
+                </a:solidFill>
+              </a:rPr>
+              <a:t> Been able to provide malicious information to an application is an important source of security vulnerabilities (</a:t>
+            </a:r>
+            <a:r>
+              <a:rPr lang="en-US" sz="2800" b="0" noProof="0" dirty="0">
+                <a:solidFill>
+                  <a:schemeClr val="tx2"/>
+                </a:solidFill>
+                <a:hlinkClick r:id="rId2"/>
+              </a:rPr>
+              <a:t>source</a:t>
+            </a:r>
+            <a:r>
+              <a:rPr lang="en-US" sz="2800" b="0" noProof="0" dirty="0">
+                <a:solidFill>
+                  <a:schemeClr val="tx2"/>
+                </a:solidFill>
+              </a:rPr>
+              <a:t>).</a:t>
+            </a:r>
+          </a:p>
+          <a:p>
+            <a:endParaRPr lang="en-US" sz="2800" b="0" noProof="0" dirty="0">
+              <a:solidFill>
+                <a:schemeClr val="tx2"/>
+              </a:solidFill>
+            </a:endParaRPr>
+          </a:p>
+          <a:p>
+            <a:r>
+              <a:rPr lang="en-US" sz="2800" b="0" noProof="0" dirty="0">
+                <a:solidFill>
+                  <a:schemeClr val="tx2"/>
+                </a:solidFill>
+              </a:rPr>
+              <a:t> In 2025, 50 security vulnerabilities affecting a "file upload" feature were identified (</a:t>
+            </a:r>
+            <a:r>
+              <a:rPr lang="en-US" sz="2800" b="0" noProof="0" dirty="0">
+                <a:solidFill>
+                  <a:schemeClr val="tx2"/>
+                </a:solidFill>
+                <a:hlinkClick r:id="rId3"/>
+              </a:rPr>
+              <a:t>source</a:t>
+            </a:r>
+            <a:r>
+              <a:rPr lang="en-US" sz="2800" b="0" noProof="0" dirty="0">
+                <a:solidFill>
+                  <a:schemeClr val="tx2"/>
+                </a:solidFill>
+              </a:rPr>
+              <a:t>).</a:t>
+            </a:r>
+          </a:p>
+          <a:p>
+            <a:endParaRPr lang="en-US" sz="2800" b="0" noProof="0" dirty="0">
+              <a:solidFill>
+                <a:schemeClr val="tx2"/>
+              </a:solidFill>
+            </a:endParaRPr>
+          </a:p>
+          <a:p>
+            <a:r>
+              <a:rPr lang="en-US" sz="2800" b="0" noProof="0" dirty="0">
+                <a:solidFill>
+                  <a:schemeClr val="tx2"/>
+                </a:solidFill>
+              </a:rPr>
+              <a:t> Across all security assessment I performed in 2025, almost all of “file upload” feature evaluated were accepting malicious files.</a:t>
+            </a:r>
+          </a:p>
+          <a:p>
+            <a:endParaRPr lang="en-US" sz="2800" b="0" noProof="0" dirty="0">
+              <a:solidFill>
+                <a:schemeClr val="tx2"/>
+              </a:solidFill>
+            </a:endParaRPr>
+          </a:p>
+        </p:txBody>
+      </p:sp>
+    </p:spTree>
+    <p:extLst>
+      <p:ext uri="{BB962C8B-B14F-4D97-AF65-F5344CB8AC3E}">
+        <p14:creationId xmlns:p14="http://schemas.microsoft.com/office/powerpoint/2010/main" val="1700977977"/>
+      </p:ext>
+    </p:extLst>
+  </p:cSld>
+  <p:clrMapOvr>
+    <a:masterClrMapping/>
+  </p:clrMapOvr>
+  <mc:AlternateContent xmlns:mc="http://schemas.openxmlformats.org/markup-compatibility/2006" xmlns:p14="http://schemas.microsoft.com/office/powerpoint/2010/main">
+    <mc:Choice Requires="p14">
+      <p:transition spd="med" p14:dur="700">
+        <p:fade/>
+      </p:transition>
+    </mc:Choice>
+    <mc:Fallback xmlns="">
+      <p:transition spd="med">
+        <p:fade/>
+      </p:transition>
+    </mc:Fallback>
+  </mc:AlternateContent>
+</p:sld>
+</file>
+
+<file path=ppt/slides/slide30.xml><?xml version="1.0" encoding="utf-8"?>
 <p:sld xmlns:a="http://schemas.openxmlformats.org/drawingml/2006/main" xmlns:r="http://schemas.openxmlformats.org/officeDocument/2006/relationships" xmlns:p="http://schemas.openxmlformats.org/presentationml/2006/main">
   <p:cSld>
     <p:spTree>
@@ -47365,8 +49714,8 @@
           <a:lstStyle/>
           <a:p>
             <a:r>
-              <a:rPr lang="en-US" dirty="0"/>
-              <a:t>📖 Let’s the story begin – Round n°6</a:t>
+              <a:rPr lang="en-US" noProof="0" dirty="0"/>
+              <a:t>📖 Round n°6 – Test file content</a:t>
             </a:r>
           </a:p>
         </p:txBody>
@@ -47446,6 +49795,162 @@
           </a:effectLst>
         </p:spPr>
       </p:pic>
+      <p:sp>
+        <p:nvSpPr>
+          <p:cNvPr id="3" name="Rectangle 2">
+            <a:extLst>
+              <a:ext uri="{FF2B5EF4-FFF2-40B4-BE49-F238E27FC236}">
+                <a16:creationId xmlns:a16="http://schemas.microsoft.com/office/drawing/2014/main" id="{29A57597-86D6-1977-E435-70D11356F338}"/>
+              </a:ext>
+            </a:extLst>
+          </p:cNvPr>
+          <p:cNvSpPr/>
+          <p:nvPr/>
+        </p:nvSpPr>
+        <p:spPr>
+          <a:xfrm>
+            <a:off x="2798758" y="2062717"/>
+            <a:ext cx="6594481" cy="180754"/>
+          </a:xfrm>
+          <a:prstGeom prst="rect">
+            <a:avLst/>
+          </a:prstGeom>
+          <a:noFill/>
+          <a:ln w="31750">
+            <a:solidFill>
+              <a:schemeClr val="accent6"/>
+            </a:solidFill>
+          </a:ln>
+        </p:spPr>
+        <p:style>
+          <a:lnRef idx="2">
+            <a:schemeClr val="accent1">
+              <a:shade val="50000"/>
+            </a:schemeClr>
+          </a:lnRef>
+          <a:fillRef idx="1">
+            <a:schemeClr val="accent1"/>
+          </a:fillRef>
+          <a:effectRef idx="0">
+            <a:schemeClr val="accent1"/>
+          </a:effectRef>
+          <a:fontRef idx="minor">
+            <a:schemeClr val="lt1"/>
+          </a:fontRef>
+        </p:style>
+        <p:txBody>
+          <a:bodyPr rtlCol="0" anchor="ctr"/>
+          <a:lstStyle/>
+          <a:p>
+            <a:pPr algn="ctr"/>
+            <a:endParaRPr lang="en-US" noProof="0" dirty="0"/>
+          </a:p>
+        </p:txBody>
+      </p:sp>
+      <p:sp>
+        <p:nvSpPr>
+          <p:cNvPr id="4" name="Rectangle 3">
+            <a:extLst>
+              <a:ext uri="{FF2B5EF4-FFF2-40B4-BE49-F238E27FC236}">
+                <a16:creationId xmlns:a16="http://schemas.microsoft.com/office/drawing/2014/main" id="{F83A617A-9ACC-E25D-2D41-9F583CFFA2FD}"/>
+              </a:ext>
+            </a:extLst>
+          </p:cNvPr>
+          <p:cNvSpPr/>
+          <p:nvPr/>
+        </p:nvSpPr>
+        <p:spPr>
+          <a:xfrm>
+            <a:off x="2798759" y="3283409"/>
+            <a:ext cx="4856684" cy="480517"/>
+          </a:xfrm>
+          <a:prstGeom prst="rect">
+            <a:avLst/>
+          </a:prstGeom>
+          <a:noFill/>
+          <a:ln w="31750">
+            <a:solidFill>
+              <a:schemeClr val="accent6"/>
+            </a:solidFill>
+          </a:ln>
+        </p:spPr>
+        <p:style>
+          <a:lnRef idx="2">
+            <a:schemeClr val="accent1">
+              <a:shade val="50000"/>
+            </a:schemeClr>
+          </a:lnRef>
+          <a:fillRef idx="1">
+            <a:schemeClr val="accent1"/>
+          </a:fillRef>
+          <a:effectRef idx="0">
+            <a:schemeClr val="accent1"/>
+          </a:effectRef>
+          <a:fontRef idx="minor">
+            <a:schemeClr val="lt1"/>
+          </a:fontRef>
+        </p:style>
+        <p:txBody>
+          <a:bodyPr rtlCol="0" anchor="ctr"/>
+          <a:lstStyle/>
+          <a:p>
+            <a:pPr algn="ctr"/>
+            <a:endParaRPr lang="en-US" noProof="0" dirty="0"/>
+          </a:p>
+        </p:txBody>
+      </p:sp>
+      <p:sp>
+        <p:nvSpPr>
+          <p:cNvPr id="6" name="Rectangle 5">
+            <a:extLst>
+              <a:ext uri="{FF2B5EF4-FFF2-40B4-BE49-F238E27FC236}">
+                <a16:creationId xmlns:a16="http://schemas.microsoft.com/office/drawing/2014/main" id="{AEB8C20C-EF20-3861-94E8-C58A6CD093D3}"/>
+              </a:ext>
+            </a:extLst>
+          </p:cNvPr>
+          <p:cNvSpPr/>
+          <p:nvPr/>
+        </p:nvSpPr>
+        <p:spPr>
+          <a:xfrm>
+            <a:off x="1501317" y="5688367"/>
+            <a:ext cx="8695306" cy="293708"/>
+          </a:xfrm>
+          <a:prstGeom prst="rect">
+            <a:avLst/>
+          </a:prstGeom>
+          <a:noFill/>
+          <a:ln w="31750">
+            <a:solidFill>
+              <a:schemeClr val="accent6"/>
+            </a:solidFill>
+          </a:ln>
+        </p:spPr>
+        <p:style>
+          <a:lnRef idx="2">
+            <a:schemeClr val="accent1">
+              <a:shade val="50000"/>
+            </a:schemeClr>
+          </a:lnRef>
+          <a:fillRef idx="1">
+            <a:schemeClr val="accent1"/>
+          </a:fillRef>
+          <a:effectRef idx="0">
+            <a:schemeClr val="accent1"/>
+          </a:effectRef>
+          <a:fontRef idx="minor">
+            <a:schemeClr val="lt1"/>
+          </a:fontRef>
+        </p:style>
+        <p:txBody>
+          <a:bodyPr rtlCol="0" anchor="ctr"/>
+          <a:lstStyle/>
+          <a:p>
+            <a:pPr algn="ctr"/>
+            <a:endParaRPr lang="en-US" noProof="0" dirty="0"/>
+          </a:p>
+        </p:txBody>
+      </p:sp>
     </p:spTree>
     <p:extLst>
       <p:ext uri="{BB962C8B-B14F-4D97-AF65-F5344CB8AC3E}">
@@ -47471,7 +49976,7 @@
 </p:sld>
 </file>
 
-<file path=ppt/slides/slide29.xml><?xml version="1.0" encoding="utf-8"?>
+<file path=ppt/slides/slide31.xml><?xml version="1.0" encoding="utf-8"?>
 <p:sld xmlns:a="http://schemas.openxmlformats.org/drawingml/2006/main" xmlns:r="http://schemas.openxmlformats.org/officeDocument/2006/relationships" xmlns:p="http://schemas.openxmlformats.org/presentationml/2006/main">
   <p:cSld>
     <p:spTree>
@@ -47516,8 +50021,8 @@
           <a:lstStyle/>
           <a:p>
             <a:r>
-              <a:rPr lang="en-US" dirty="0"/>
-              <a:t>📖 Let’s the story begin – Round n°6</a:t>
+              <a:rPr lang="en-US" noProof="0" dirty="0"/>
+              <a:t>📖 Round n°6 – Hidden file detection by antivirus tools</a:t>
             </a:r>
           </a:p>
         </p:txBody>
@@ -47596,6 +50101,110 @@
           </a:effectLst>
         </p:spPr>
       </p:pic>
+      <p:sp>
+        <p:nvSpPr>
+          <p:cNvPr id="3" name="Rectangle 2">
+            <a:extLst>
+              <a:ext uri="{FF2B5EF4-FFF2-40B4-BE49-F238E27FC236}">
+                <a16:creationId xmlns:a16="http://schemas.microsoft.com/office/drawing/2014/main" id="{51E8C977-ADEC-2479-33D9-EB6672BC644A}"/>
+              </a:ext>
+            </a:extLst>
+          </p:cNvPr>
+          <p:cNvSpPr/>
+          <p:nvPr/>
+        </p:nvSpPr>
+        <p:spPr>
+          <a:xfrm>
+            <a:off x="4221125" y="3671721"/>
+            <a:ext cx="4125433" cy="560037"/>
+          </a:xfrm>
+          <a:prstGeom prst="rect">
+            <a:avLst/>
+          </a:prstGeom>
+          <a:noFill/>
+          <a:ln w="31750">
+            <a:solidFill>
+              <a:schemeClr val="accent6"/>
+            </a:solidFill>
+          </a:ln>
+        </p:spPr>
+        <p:style>
+          <a:lnRef idx="2">
+            <a:schemeClr val="accent1">
+              <a:shade val="50000"/>
+            </a:schemeClr>
+          </a:lnRef>
+          <a:fillRef idx="1">
+            <a:schemeClr val="accent1"/>
+          </a:fillRef>
+          <a:effectRef idx="0">
+            <a:schemeClr val="accent1"/>
+          </a:effectRef>
+          <a:fontRef idx="minor">
+            <a:schemeClr val="lt1"/>
+          </a:fontRef>
+        </p:style>
+        <p:txBody>
+          <a:bodyPr rtlCol="0" anchor="ctr"/>
+          <a:lstStyle/>
+          <a:p>
+            <a:pPr algn="ctr"/>
+            <a:endParaRPr lang="en-US" noProof="0" dirty="0"/>
+          </a:p>
+        </p:txBody>
+      </p:sp>
+      <p:sp>
+        <p:nvSpPr>
+          <p:cNvPr id="5" name="Rectangle 4">
+            <a:extLst>
+              <a:ext uri="{FF2B5EF4-FFF2-40B4-BE49-F238E27FC236}">
+                <a16:creationId xmlns:a16="http://schemas.microsoft.com/office/drawing/2014/main" id="{9ED5C52D-8915-2B45-D7AB-6DB933CFA733}"/>
+              </a:ext>
+            </a:extLst>
+          </p:cNvPr>
+          <p:cNvSpPr/>
+          <p:nvPr/>
+        </p:nvSpPr>
+        <p:spPr>
+          <a:xfrm>
+            <a:off x="1822600" y="1521179"/>
+            <a:ext cx="8546800" cy="293708"/>
+          </a:xfrm>
+          <a:prstGeom prst="rect">
+            <a:avLst/>
+          </a:prstGeom>
+          <a:noFill/>
+          <a:ln w="31750">
+            <a:solidFill>
+              <a:schemeClr val="accent6"/>
+            </a:solidFill>
+          </a:ln>
+        </p:spPr>
+        <p:style>
+          <a:lnRef idx="2">
+            <a:schemeClr val="accent1">
+              <a:shade val="50000"/>
+            </a:schemeClr>
+          </a:lnRef>
+          <a:fillRef idx="1">
+            <a:schemeClr val="accent1"/>
+          </a:fillRef>
+          <a:effectRef idx="0">
+            <a:schemeClr val="accent1"/>
+          </a:effectRef>
+          <a:fontRef idx="minor">
+            <a:schemeClr val="lt1"/>
+          </a:fontRef>
+        </p:style>
+        <p:txBody>
+          <a:bodyPr rtlCol="0" anchor="ctr"/>
+          <a:lstStyle/>
+          <a:p>
+            <a:pPr algn="ctr"/>
+            <a:endParaRPr lang="en-US" noProof="0" dirty="0"/>
+          </a:p>
+        </p:txBody>
+      </p:sp>
     </p:spTree>
     <p:extLst>
       <p:ext uri="{BB962C8B-B14F-4D97-AF65-F5344CB8AC3E}">
@@ -47621,195 +50230,7 @@
 </p:sld>
 </file>
 
-<file path=ppt/slides/slide3.xml><?xml version="1.0" encoding="utf-8"?>
-<p:sld xmlns:a="http://schemas.openxmlformats.org/drawingml/2006/main" xmlns:r="http://schemas.openxmlformats.org/officeDocument/2006/relationships" xmlns:p="http://schemas.openxmlformats.org/presentationml/2006/main">
-  <p:cSld>
-    <p:spTree>
-      <p:nvGrpSpPr>
-        <p:cNvPr id="1" name="">
-          <a:extLst>
-            <a:ext uri="{FF2B5EF4-FFF2-40B4-BE49-F238E27FC236}">
-              <a16:creationId xmlns:a16="http://schemas.microsoft.com/office/drawing/2014/main" id="{3E16E9E5-B1FA-1BAA-A72E-867E69E0CFFB}"/>
-            </a:ext>
-          </a:extLst>
-        </p:cNvPr>
-        <p:cNvGrpSpPr/>
-        <p:nvPr/>
-      </p:nvGrpSpPr>
-      <p:grpSpPr>
-        <a:xfrm>
-          <a:off x="0" y="0"/>
-          <a:ext cx="0" cy="0"/>
-          <a:chOff x="0" y="0"/>
-          <a:chExt cx="0" cy="0"/>
-        </a:xfrm>
-      </p:grpSpPr>
-      <p:sp>
-        <p:nvSpPr>
-          <p:cNvPr id="2" name="Titre 1">
-            <a:extLst>
-              <a:ext uri="{FF2B5EF4-FFF2-40B4-BE49-F238E27FC236}">
-                <a16:creationId xmlns:a16="http://schemas.microsoft.com/office/drawing/2014/main" id="{ECC41D0F-4E65-EE8F-6EC1-60C60CADE2A0}"/>
-              </a:ext>
-            </a:extLst>
-          </p:cNvPr>
-          <p:cNvSpPr>
-            <a:spLocks noGrp="1"/>
-          </p:cNvSpPr>
-          <p:nvPr>
-            <p:ph type="title"/>
-          </p:nvPr>
-        </p:nvSpPr>
-        <p:spPr/>
-        <p:txBody>
-          <a:bodyPr/>
-          <a:lstStyle/>
-          <a:p>
-            <a:r>
-              <a:rPr lang="en-US" dirty="0"/>
-              <a:t>ℹ️ Introduction</a:t>
-            </a:r>
-          </a:p>
-        </p:txBody>
-      </p:sp>
-      <p:sp>
-        <p:nvSpPr>
-          <p:cNvPr id="3" name="Espace réservé du texte 2">
-            <a:extLst>
-              <a:ext uri="{FF2B5EF4-FFF2-40B4-BE49-F238E27FC236}">
-                <a16:creationId xmlns:a16="http://schemas.microsoft.com/office/drawing/2014/main" id="{DD39683C-541A-B4BA-B911-E5EC3EABE467}"/>
-              </a:ext>
-            </a:extLst>
-          </p:cNvPr>
-          <p:cNvSpPr>
-            <a:spLocks noGrp="1"/>
-          </p:cNvSpPr>
-          <p:nvPr>
-            <p:ph type="body" sz="quarter" idx="15"/>
-          </p:nvPr>
-        </p:nvSpPr>
-        <p:spPr>
-          <a:xfrm>
-            <a:off x="588000" y="977317"/>
-            <a:ext cx="11419970" cy="4949030"/>
-          </a:xfrm>
-        </p:spPr>
-        <p:txBody>
-          <a:bodyPr/>
-          <a:lstStyle/>
-          <a:p>
-            <a:r>
-              <a:rPr lang="en-US" sz="2800" b="0" dirty="0">
-                <a:solidFill>
-                  <a:schemeClr val="tx2"/>
-                </a:solidFill>
-              </a:rPr>
-              <a:t> Been able to provide malicious information to an application is an important source of security vulnerabilities (</a:t>
-            </a:r>
-            <a:r>
-              <a:rPr lang="en-US" sz="2800" b="0" dirty="0">
-                <a:solidFill>
-                  <a:schemeClr val="tx2"/>
-                </a:solidFill>
-                <a:hlinkClick r:id="rId2"/>
-              </a:rPr>
-              <a:t>source</a:t>
-            </a:r>
-            <a:r>
-              <a:rPr lang="en-US" sz="2800" b="0" dirty="0">
-                <a:solidFill>
-                  <a:schemeClr val="tx2"/>
-                </a:solidFill>
-              </a:rPr>
-              <a:t>).</a:t>
-            </a:r>
-          </a:p>
-          <a:p>
-            <a:endParaRPr lang="en-US" sz="2800" b="0" dirty="0">
-              <a:solidFill>
-                <a:schemeClr val="tx2"/>
-              </a:solidFill>
-            </a:endParaRPr>
-          </a:p>
-          <a:p>
-            <a:r>
-              <a:rPr lang="en-US" sz="2800" b="0" dirty="0">
-                <a:solidFill>
-                  <a:schemeClr val="tx2"/>
-                </a:solidFill>
-              </a:rPr>
-              <a:t> In 2025, 50 security vulnerabilities affecting a "file upload" feature were identified (</a:t>
-            </a:r>
-            <a:r>
-              <a:rPr lang="en-US" sz="2800" b="0" dirty="0">
-                <a:solidFill>
-                  <a:schemeClr val="tx2"/>
-                </a:solidFill>
-                <a:hlinkClick r:id="rId3"/>
-              </a:rPr>
-              <a:t>source</a:t>
-            </a:r>
-            <a:r>
-              <a:rPr lang="en-US" sz="2800" b="0" dirty="0">
-                <a:solidFill>
-                  <a:schemeClr val="tx2"/>
-                </a:solidFill>
-              </a:rPr>
-              <a:t>).</a:t>
-            </a:r>
-          </a:p>
-          <a:p>
-            <a:endParaRPr lang="en-US" sz="2800" b="0" dirty="0">
-              <a:solidFill>
-                <a:schemeClr val="tx2"/>
-              </a:solidFill>
-            </a:endParaRPr>
-          </a:p>
-          <a:p>
-            <a:r>
-              <a:rPr lang="en-US" sz="2800" b="0" dirty="0">
-                <a:solidFill>
-                  <a:schemeClr val="tx2"/>
-                </a:solidFill>
-              </a:rPr>
-              <a:t> Across all security assessment I performed in 2025, almost all of “file upload” feature evaluated were accepting malicious files.</a:t>
-            </a:r>
-          </a:p>
-          <a:p>
-            <a:endParaRPr lang="en-US" sz="2800" b="0" dirty="0">
-              <a:solidFill>
-                <a:schemeClr val="tx2"/>
-              </a:solidFill>
-            </a:endParaRPr>
-          </a:p>
-        </p:txBody>
-      </p:sp>
-    </p:spTree>
-    <p:extLst>
-      <p:ext uri="{BB962C8B-B14F-4D97-AF65-F5344CB8AC3E}">
-        <p14:creationId xmlns:p14="http://schemas.microsoft.com/office/powerpoint/2010/main" val="1700977977"/>
-      </p:ext>
-    </p:extLst>
-  </p:cSld>
-  <p:clrMapOvr>
-    <a:masterClrMapping/>
-  </p:clrMapOvr>
-  <mc:AlternateContent xmlns:mc="http://schemas.openxmlformats.org/markup-compatibility/2006" xmlns:p14="http://schemas.microsoft.com/office/powerpoint/2010/main">
-    <mc:Choice Requires="p14">
-      <p:transition spd="med" p14:dur="700">
-        <p:fade/>
-      </p:transition>
-    </mc:Choice>
-    <mc:Fallback xmlns="">
-      <p:transition spd="med">
-        <p:fade/>
-      </p:transition>
-    </mc:Fallback>
-  </mc:AlternateContent>
-</p:sld>
-</file>
-
-<file path=ppt/slides/slide30.xml><?xml version="1.0" encoding="utf-8"?>
+<file path=ppt/slides/slide32.xml><?xml version="1.0" encoding="utf-8"?>
 <p:sld xmlns:a="http://schemas.openxmlformats.org/drawingml/2006/main" xmlns:r="http://schemas.openxmlformats.org/officeDocument/2006/relationships" xmlns:p="http://schemas.openxmlformats.org/presentationml/2006/main">
   <p:cSld>
     <p:spTree>
@@ -47854,8 +50275,8 @@
           <a:lstStyle/>
           <a:p>
             <a:r>
-              <a:rPr lang="en-US" dirty="0"/>
-              <a:t>📖 Let’s the story begin – Round n°6</a:t>
+              <a:rPr lang="en-US" noProof="0" dirty="0"/>
+              <a:t>📖 Round n°6</a:t>
             </a:r>
           </a:p>
         </p:txBody>
@@ -47887,7 +50308,7 @@
           <a:lstStyle/>
           <a:p>
             <a:r>
-              <a:rPr lang="en-US" sz="2800" b="0" dirty="0">
+              <a:rPr lang="en-US" sz="2800" b="0" noProof="0" dirty="0">
                 <a:solidFill>
                   <a:schemeClr val="tx2"/>
                 </a:solidFill>
@@ -47899,7 +50320,7 @@
             <a:pPr marL="0" indent="0">
               <a:buNone/>
             </a:pPr>
-            <a:endParaRPr lang="en-US" sz="2800" b="0" dirty="0">
+            <a:endParaRPr lang="en-US" sz="2800" b="0" noProof="0" dirty="0">
               <a:solidFill>
                 <a:schemeClr val="tx2"/>
               </a:solidFill>
@@ -47907,7 +50328,7 @@
           </a:p>
           <a:p>
             <a:r>
-              <a:rPr lang="en-US" sz="2800" b="0" dirty="0">
+              <a:rPr lang="en-US" sz="2800" b="0" noProof="0" dirty="0">
                 <a:solidFill>
                   <a:schemeClr val="tx2"/>
                 </a:solidFill>
@@ -47919,7 +50340,7 @@
             <a:pPr marL="0" indent="0">
               <a:buNone/>
             </a:pPr>
-            <a:endParaRPr lang="en-US" sz="2800" b="0" dirty="0">
+            <a:endParaRPr lang="en-US" sz="2800" b="0" noProof="0" dirty="0">
               <a:solidFill>
                 <a:schemeClr val="tx2"/>
               </a:solidFill>
@@ -47927,44 +50348,6 @@
           </a:p>
         </p:txBody>
       </p:sp>
-      <p:pic>
-        <p:nvPicPr>
-          <p:cNvPr id="5" name="Picture 4">
-            <a:extLst>
-              <a:ext uri="{FF2B5EF4-FFF2-40B4-BE49-F238E27FC236}">
-                <a16:creationId xmlns:a16="http://schemas.microsoft.com/office/drawing/2014/main" id="{0FAD840C-E7B9-94FC-95FB-1B1D586F6B29}"/>
-              </a:ext>
-            </a:extLst>
-          </p:cNvPr>
-          <p:cNvPicPr>
-            <a:picLocks noChangeAspect="1"/>
-          </p:cNvPicPr>
-          <p:nvPr/>
-        </p:nvPicPr>
-        <p:blipFill>
-          <a:blip r:embed="rId2"/>
-          <a:srcRect t="7990" b="17779"/>
-          <a:stretch>
-            <a:fillRect/>
-          </a:stretch>
-        </p:blipFill>
-        <p:spPr>
-          <a:xfrm>
-            <a:off x="575171" y="5146157"/>
-            <a:ext cx="11354529" cy="467833"/>
-          </a:xfrm>
-          <a:prstGeom prst="rect">
-            <a:avLst/>
-          </a:prstGeom>
-          <a:effectLst>
-            <a:outerShdw blurRad="50800" dist="38100" dir="2700000" algn="tl" rotWithShape="0">
-              <a:prstClr val="black">
-                <a:alpha val="40000"/>
-              </a:prstClr>
-            </a:outerShdw>
-          </a:effectLst>
-        </p:spPr>
-      </p:pic>
     </p:spTree>
     <p:extLst>
       <p:ext uri="{BB962C8B-B14F-4D97-AF65-F5344CB8AC3E}">
@@ -47990,7 +50373,586 @@
 </p:sld>
 </file>
 
-<file path=ppt/slides/slide31.xml><?xml version="1.0" encoding="utf-8"?>
+<file path=ppt/slides/slide33.xml><?xml version="1.0" encoding="utf-8"?>
+<p:sld xmlns:a="http://schemas.openxmlformats.org/drawingml/2006/main" xmlns:r="http://schemas.openxmlformats.org/officeDocument/2006/relationships" xmlns:p="http://schemas.openxmlformats.org/presentationml/2006/main">
+  <p:cSld>
+    <p:spTree>
+      <p:nvGrpSpPr>
+        <p:cNvPr id="1" name="">
+          <a:extLst>
+            <a:ext uri="{FF2B5EF4-FFF2-40B4-BE49-F238E27FC236}">
+              <a16:creationId xmlns:a16="http://schemas.microsoft.com/office/drawing/2014/main" id="{12AC5239-3290-81E8-61B7-BD327BA04A01}"/>
+            </a:ext>
+          </a:extLst>
+        </p:cNvPr>
+        <p:cNvGrpSpPr/>
+        <p:nvPr/>
+      </p:nvGrpSpPr>
+      <p:grpSpPr>
+        <a:xfrm>
+          <a:off x="0" y="0"/>
+          <a:ext cx="0" cy="0"/>
+          <a:chOff x="0" y="0"/>
+          <a:chExt cx="0" cy="0"/>
+        </a:xfrm>
+      </p:grpSpPr>
+      <p:sp>
+        <p:nvSpPr>
+          <p:cNvPr id="2" name="Titre 1">
+            <a:extLst>
+              <a:ext uri="{FF2B5EF4-FFF2-40B4-BE49-F238E27FC236}">
+                <a16:creationId xmlns:a16="http://schemas.microsoft.com/office/drawing/2014/main" id="{02B81B4E-1561-9B47-389A-F088C64829B2}"/>
+              </a:ext>
+            </a:extLst>
+          </p:cNvPr>
+          <p:cNvSpPr>
+            <a:spLocks noGrp="1"/>
+          </p:cNvSpPr>
+          <p:nvPr>
+            <p:ph type="title"/>
+          </p:nvPr>
+        </p:nvSpPr>
+        <p:spPr/>
+        <p:txBody>
+          <a:bodyPr/>
+          <a:lstStyle/>
+          <a:p>
+            <a:r>
+              <a:rPr lang="en-US" noProof="0" dirty="0"/>
+              <a:t>📖 Round n°6</a:t>
+            </a:r>
+          </a:p>
+        </p:txBody>
+      </p:sp>
+      <p:pic>
+        <p:nvPicPr>
+          <p:cNvPr id="8" name="Picture 7">
+            <a:extLst>
+              <a:ext uri="{FF2B5EF4-FFF2-40B4-BE49-F238E27FC236}">
+                <a16:creationId xmlns:a16="http://schemas.microsoft.com/office/drawing/2014/main" id="{E187C630-AFC0-4518-3446-3E04AE825682}"/>
+              </a:ext>
+            </a:extLst>
+          </p:cNvPr>
+          <p:cNvPicPr>
+            <a:picLocks noChangeAspect="1"/>
+          </p:cNvPicPr>
+          <p:nvPr/>
+        </p:nvPicPr>
+        <p:blipFill>
+          <a:blip r:embed="rId2"/>
+          <a:stretch>
+            <a:fillRect/>
+          </a:stretch>
+        </p:blipFill>
+        <p:spPr>
+          <a:xfrm>
+            <a:off x="74524" y="1499918"/>
+            <a:ext cx="11929303" cy="3976434"/>
+          </a:xfrm>
+          <a:prstGeom prst="rect">
+            <a:avLst/>
+          </a:prstGeom>
+          <a:effectLst>
+            <a:outerShdw blurRad="50800" dist="38100" dir="2700000" algn="tl" rotWithShape="0">
+              <a:prstClr val="black">
+                <a:alpha val="40000"/>
+              </a:prstClr>
+            </a:outerShdw>
+          </a:effectLst>
+        </p:spPr>
+      </p:pic>
+      <p:sp>
+        <p:nvSpPr>
+          <p:cNvPr id="9" name="Speech Bubble: Rectangle 8">
+            <a:extLst>
+              <a:ext uri="{FF2B5EF4-FFF2-40B4-BE49-F238E27FC236}">
+                <a16:creationId xmlns:a16="http://schemas.microsoft.com/office/drawing/2014/main" id="{B08EA7B6-F031-68EF-BFD0-0171D484A263}"/>
+              </a:ext>
+            </a:extLst>
+          </p:cNvPr>
+          <p:cNvSpPr/>
+          <p:nvPr/>
+        </p:nvSpPr>
+        <p:spPr>
+          <a:xfrm>
+            <a:off x="9103806" y="1608575"/>
+            <a:ext cx="2150347" cy="555372"/>
+          </a:xfrm>
+          <a:prstGeom prst="wedgeRectCallout">
+            <a:avLst>
+              <a:gd name="adj1" fmla="val -82510"/>
+              <a:gd name="adj2" fmla="val 18180"/>
+            </a:avLst>
+          </a:prstGeom>
+          <a:ln/>
+        </p:spPr>
+        <p:style>
+          <a:lnRef idx="3">
+            <a:schemeClr val="lt1"/>
+          </a:lnRef>
+          <a:fillRef idx="1">
+            <a:schemeClr val="accent5"/>
+          </a:fillRef>
+          <a:effectRef idx="1">
+            <a:schemeClr val="accent5"/>
+          </a:effectRef>
+          <a:fontRef idx="minor">
+            <a:schemeClr val="lt1"/>
+          </a:fontRef>
+        </p:style>
+        <p:txBody>
+          <a:bodyPr rtlCol="0" anchor="ctr"/>
+          <a:lstStyle/>
+          <a:p>
+            <a:pPr algn="ctr"/>
+            <a:r>
+              <a:rPr lang="en-US" noProof="0" dirty="0">
+                <a:latin typeface="Consolas" panose="020B0609020204030204" pitchFamily="49" charset="0"/>
+              </a:rPr>
+              <a:t>File was accepted.</a:t>
+            </a:r>
+          </a:p>
+        </p:txBody>
+      </p:sp>
+      <p:sp>
+        <p:nvSpPr>
+          <p:cNvPr id="10" name="Speech Bubble: Rectangle 9">
+            <a:extLst>
+              <a:ext uri="{FF2B5EF4-FFF2-40B4-BE49-F238E27FC236}">
+                <a16:creationId xmlns:a16="http://schemas.microsoft.com/office/drawing/2014/main" id="{4136DF96-760C-47AF-AA9D-BD79405E47C4}"/>
+              </a:ext>
+            </a:extLst>
+          </p:cNvPr>
+          <p:cNvSpPr/>
+          <p:nvPr/>
+        </p:nvSpPr>
+        <p:spPr>
+          <a:xfrm>
+            <a:off x="8402097" y="2827975"/>
+            <a:ext cx="3356149" cy="960254"/>
+          </a:xfrm>
+          <a:prstGeom prst="wedgeRectCallout">
+            <a:avLst>
+              <a:gd name="adj1" fmla="val 1023"/>
+              <a:gd name="adj2" fmla="val -82068"/>
+            </a:avLst>
+          </a:prstGeom>
+          <a:ln/>
+        </p:spPr>
+        <p:style>
+          <a:lnRef idx="3">
+            <a:schemeClr val="lt1"/>
+          </a:lnRef>
+          <a:fillRef idx="1">
+            <a:schemeClr val="accent5"/>
+          </a:fillRef>
+          <a:effectRef idx="1">
+            <a:schemeClr val="accent5"/>
+          </a:effectRef>
+          <a:fontRef idx="minor">
+            <a:schemeClr val="lt1"/>
+          </a:fontRef>
+        </p:style>
+        <p:txBody>
+          <a:bodyPr rtlCol="0" anchor="ctr"/>
+          <a:lstStyle/>
+          <a:p>
+            <a:pPr algn="ctr"/>
+            <a:r>
+              <a:rPr lang="en-US" noProof="0" dirty="0">
+                <a:latin typeface="Consolas" panose="020B0609020204030204" pitchFamily="49" charset="0"/>
+              </a:rPr>
+              <a:t>Download the stored file to check if the hidden file was removed?</a:t>
+            </a:r>
+          </a:p>
+        </p:txBody>
+      </p:sp>
+      <p:sp>
+        <p:nvSpPr>
+          <p:cNvPr id="11" name="Speech Bubble: Rectangle 10">
+            <a:extLst>
+              <a:ext uri="{FF2B5EF4-FFF2-40B4-BE49-F238E27FC236}">
+                <a16:creationId xmlns:a16="http://schemas.microsoft.com/office/drawing/2014/main" id="{5CD7E399-0A5A-D95C-E502-C9A774A09E38}"/>
+              </a:ext>
+            </a:extLst>
+          </p:cNvPr>
+          <p:cNvSpPr/>
+          <p:nvPr/>
+        </p:nvSpPr>
+        <p:spPr>
+          <a:xfrm>
+            <a:off x="4595447" y="2827975"/>
+            <a:ext cx="3356149" cy="960254"/>
+          </a:xfrm>
+          <a:prstGeom prst="wedgeRectCallout">
+            <a:avLst>
+              <a:gd name="adj1" fmla="val -99276"/>
+              <a:gd name="adj2" fmla="val 17342"/>
+            </a:avLst>
+          </a:prstGeom>
+          <a:ln/>
+        </p:spPr>
+        <p:style>
+          <a:lnRef idx="3">
+            <a:schemeClr val="lt1"/>
+          </a:lnRef>
+          <a:fillRef idx="1">
+            <a:schemeClr val="accent5"/>
+          </a:fillRef>
+          <a:effectRef idx="1">
+            <a:schemeClr val="accent5"/>
+          </a:effectRef>
+          <a:fontRef idx="minor">
+            <a:schemeClr val="lt1"/>
+          </a:fontRef>
+        </p:style>
+        <p:txBody>
+          <a:bodyPr rtlCol="0" anchor="ctr"/>
+          <a:lstStyle/>
+          <a:p>
+            <a:pPr algn="ctr"/>
+            <a:r>
+              <a:rPr lang="en-US" dirty="0">
+                <a:latin typeface="Consolas" panose="020B0609020204030204" pitchFamily="49" charset="0"/>
+              </a:rPr>
+              <a:t>Replace the source file to use the extraction script.</a:t>
+            </a:r>
+            <a:endParaRPr lang="en-US" noProof="0" dirty="0">
+              <a:latin typeface="Consolas" panose="020B0609020204030204" pitchFamily="49" charset="0"/>
+            </a:endParaRPr>
+          </a:p>
+        </p:txBody>
+      </p:sp>
+      <p:sp>
+        <p:nvSpPr>
+          <p:cNvPr id="12" name="Speech Bubble: Rectangle 11">
+            <a:extLst>
+              <a:ext uri="{FF2B5EF4-FFF2-40B4-BE49-F238E27FC236}">
+                <a16:creationId xmlns:a16="http://schemas.microsoft.com/office/drawing/2014/main" id="{1D3AB877-F8A2-1F5B-5AA4-0999A0998EC5}"/>
+              </a:ext>
+            </a:extLst>
+          </p:cNvPr>
+          <p:cNvSpPr/>
+          <p:nvPr/>
+        </p:nvSpPr>
+        <p:spPr>
+          <a:xfrm>
+            <a:off x="8247851" y="4367985"/>
+            <a:ext cx="3356149" cy="960254"/>
+          </a:xfrm>
+          <a:prstGeom prst="wedgeRectCallout">
+            <a:avLst>
+              <a:gd name="adj1" fmla="val -88498"/>
+              <a:gd name="adj2" fmla="val -20329"/>
+            </a:avLst>
+          </a:prstGeom>
+          <a:ln/>
+        </p:spPr>
+        <p:style>
+          <a:lnRef idx="3">
+            <a:schemeClr val="lt1"/>
+          </a:lnRef>
+          <a:fillRef idx="1">
+            <a:schemeClr val="accent5"/>
+          </a:fillRef>
+          <a:effectRef idx="1">
+            <a:schemeClr val="accent5"/>
+          </a:effectRef>
+          <a:fontRef idx="minor">
+            <a:schemeClr val="lt1"/>
+          </a:fontRef>
+        </p:style>
+        <p:txBody>
+          <a:bodyPr rtlCol="0" anchor="ctr"/>
+          <a:lstStyle/>
+          <a:p>
+            <a:pPr algn="ctr"/>
+            <a:r>
+              <a:rPr lang="en-US" dirty="0">
+                <a:latin typeface="Consolas" panose="020B0609020204030204" pitchFamily="49" charset="0"/>
+              </a:rPr>
+              <a:t>Hidden file was present.</a:t>
+            </a:r>
+            <a:endParaRPr lang="en-US" noProof="0" dirty="0">
+              <a:latin typeface="Consolas" panose="020B0609020204030204" pitchFamily="49" charset="0"/>
+            </a:endParaRPr>
+          </a:p>
+        </p:txBody>
+      </p:sp>
+    </p:spTree>
+    <p:extLst>
+      <p:ext uri="{BB962C8B-B14F-4D97-AF65-F5344CB8AC3E}">
+        <p14:creationId xmlns:p14="http://schemas.microsoft.com/office/powerpoint/2010/main" val="1273305529"/>
+      </p:ext>
+    </p:extLst>
+  </p:cSld>
+  <p:clrMapOvr>
+    <a:masterClrMapping/>
+  </p:clrMapOvr>
+  <mc:AlternateContent xmlns:mc="http://schemas.openxmlformats.org/markup-compatibility/2006">
+    <mc:Choice xmlns:p14="http://schemas.microsoft.com/office/powerpoint/2010/main" Requires="p14">
+      <p:transition spd="med" p14:dur="700">
+        <p:fade/>
+      </p:transition>
+    </mc:Choice>
+    <mc:Fallback>
+      <p:transition spd="med">
+        <p:fade/>
+      </p:transition>
+    </mc:Fallback>
+  </mc:AlternateContent>
+  <p:timing>
+    <p:tnLst>
+      <p:par>
+        <p:cTn id="1" dur="indefinite" restart="never" nodeType="tmRoot">
+          <p:childTnLst>
+            <p:seq concurrent="1" nextAc="seek">
+              <p:cTn id="2" dur="indefinite" nodeType="mainSeq">
+                <p:childTnLst>
+                  <p:par>
+                    <p:cTn id="3" fill="hold">
+                      <p:stCondLst>
+                        <p:cond delay="indefinite"/>
+                      </p:stCondLst>
+                      <p:childTnLst>
+                        <p:par>
+                          <p:cTn id="4" fill="hold">
+                            <p:stCondLst>
+                              <p:cond delay="0"/>
+                            </p:stCondLst>
+                            <p:childTnLst>
+                              <p:par>
+                                <p:cTn id="5" presetID="10" presetClass="entr" presetSubtype="0" fill="hold" grpId="0" nodeType="clickEffect">
+                                  <p:stCondLst>
+                                    <p:cond delay="0"/>
+                                  </p:stCondLst>
+                                  <p:childTnLst>
+                                    <p:set>
+                                      <p:cBhvr>
+                                        <p:cTn id="6" dur="1" fill="hold">
+                                          <p:stCondLst>
+                                            <p:cond delay="0"/>
+                                          </p:stCondLst>
+                                        </p:cTn>
+                                        <p:tgtEl>
+                                          <p:spTgt spid="9"/>
+                                        </p:tgtEl>
+                                        <p:attrNameLst>
+                                          <p:attrName>style.visibility</p:attrName>
+                                        </p:attrNameLst>
+                                      </p:cBhvr>
+                                      <p:to>
+                                        <p:strVal val="visible"/>
+                                      </p:to>
+                                    </p:set>
+                                    <p:animEffect transition="in" filter="fade">
+                                      <p:cBhvr>
+                                        <p:cTn id="7" dur="500"/>
+                                        <p:tgtEl>
+                                          <p:spTgt spid="9"/>
+                                        </p:tgtEl>
+                                      </p:cBhvr>
+                                    </p:animEffect>
+                                  </p:childTnLst>
+                                </p:cTn>
+                              </p:par>
+                            </p:childTnLst>
+                          </p:cTn>
+                        </p:par>
+                      </p:childTnLst>
+                    </p:cTn>
+                  </p:par>
+                  <p:par>
+                    <p:cTn id="8" fill="hold">
+                      <p:stCondLst>
+                        <p:cond delay="indefinite"/>
+                      </p:stCondLst>
+                      <p:childTnLst>
+                        <p:par>
+                          <p:cTn id="9" fill="hold">
+                            <p:stCondLst>
+                              <p:cond delay="0"/>
+                            </p:stCondLst>
+                            <p:childTnLst>
+                              <p:par>
+                                <p:cTn id="10" presetID="10" presetClass="entr" presetSubtype="0" fill="hold" grpId="0" nodeType="clickEffect">
+                                  <p:stCondLst>
+                                    <p:cond delay="0"/>
+                                  </p:stCondLst>
+                                  <p:childTnLst>
+                                    <p:set>
+                                      <p:cBhvr>
+                                        <p:cTn id="11" dur="1" fill="hold">
+                                          <p:stCondLst>
+                                            <p:cond delay="0"/>
+                                          </p:stCondLst>
+                                        </p:cTn>
+                                        <p:tgtEl>
+                                          <p:spTgt spid="10"/>
+                                        </p:tgtEl>
+                                        <p:attrNameLst>
+                                          <p:attrName>style.visibility</p:attrName>
+                                        </p:attrNameLst>
+                                      </p:cBhvr>
+                                      <p:to>
+                                        <p:strVal val="visible"/>
+                                      </p:to>
+                                    </p:set>
+                                    <p:animEffect transition="in" filter="fade">
+                                      <p:cBhvr>
+                                        <p:cTn id="12" dur="500"/>
+                                        <p:tgtEl>
+                                          <p:spTgt spid="10"/>
+                                        </p:tgtEl>
+                                      </p:cBhvr>
+                                    </p:animEffect>
+                                  </p:childTnLst>
+                                </p:cTn>
+                              </p:par>
+                            </p:childTnLst>
+                          </p:cTn>
+                        </p:par>
+                      </p:childTnLst>
+                    </p:cTn>
+                  </p:par>
+                  <p:par>
+                    <p:cTn id="13" fill="hold">
+                      <p:stCondLst>
+                        <p:cond delay="indefinite"/>
+                      </p:stCondLst>
+                      <p:childTnLst>
+                        <p:par>
+                          <p:cTn id="14" fill="hold">
+                            <p:stCondLst>
+                              <p:cond delay="0"/>
+                            </p:stCondLst>
+                            <p:childTnLst>
+                              <p:par>
+                                <p:cTn id="15" presetID="10" presetClass="entr" presetSubtype="0" fill="hold" grpId="0" nodeType="clickEffect">
+                                  <p:stCondLst>
+                                    <p:cond delay="0"/>
+                                  </p:stCondLst>
+                                  <p:childTnLst>
+                                    <p:set>
+                                      <p:cBhvr>
+                                        <p:cTn id="16" dur="1" fill="hold">
+                                          <p:stCondLst>
+                                            <p:cond delay="0"/>
+                                          </p:stCondLst>
+                                        </p:cTn>
+                                        <p:tgtEl>
+                                          <p:spTgt spid="11"/>
+                                        </p:tgtEl>
+                                        <p:attrNameLst>
+                                          <p:attrName>style.visibility</p:attrName>
+                                        </p:attrNameLst>
+                                      </p:cBhvr>
+                                      <p:to>
+                                        <p:strVal val="visible"/>
+                                      </p:to>
+                                    </p:set>
+                                    <p:animEffect transition="in" filter="fade">
+                                      <p:cBhvr>
+                                        <p:cTn id="17" dur="500"/>
+                                        <p:tgtEl>
+                                          <p:spTgt spid="11"/>
+                                        </p:tgtEl>
+                                      </p:cBhvr>
+                                    </p:animEffect>
+                                  </p:childTnLst>
+                                </p:cTn>
+                              </p:par>
+                            </p:childTnLst>
+                          </p:cTn>
+                        </p:par>
+                      </p:childTnLst>
+                    </p:cTn>
+                  </p:par>
+                  <p:par>
+                    <p:cTn id="18" fill="hold">
+                      <p:stCondLst>
+                        <p:cond delay="indefinite"/>
+                      </p:stCondLst>
+                      <p:childTnLst>
+                        <p:par>
+                          <p:cTn id="19" fill="hold">
+                            <p:stCondLst>
+                              <p:cond delay="0"/>
+                            </p:stCondLst>
+                            <p:childTnLst>
+                              <p:par>
+                                <p:cTn id="20" presetID="10" presetClass="entr" presetSubtype="0" fill="hold" grpId="0" nodeType="clickEffect">
+                                  <p:stCondLst>
+                                    <p:cond delay="0"/>
+                                  </p:stCondLst>
+                                  <p:childTnLst>
+                                    <p:set>
+                                      <p:cBhvr>
+                                        <p:cTn id="21" dur="1" fill="hold">
+                                          <p:stCondLst>
+                                            <p:cond delay="0"/>
+                                          </p:stCondLst>
+                                        </p:cTn>
+                                        <p:tgtEl>
+                                          <p:spTgt spid="12"/>
+                                        </p:tgtEl>
+                                        <p:attrNameLst>
+                                          <p:attrName>style.visibility</p:attrName>
+                                        </p:attrNameLst>
+                                      </p:cBhvr>
+                                      <p:to>
+                                        <p:strVal val="visible"/>
+                                      </p:to>
+                                    </p:set>
+                                    <p:animEffect transition="in" filter="fade">
+                                      <p:cBhvr>
+                                        <p:cTn id="22" dur="500"/>
+                                        <p:tgtEl>
+                                          <p:spTgt spid="12"/>
+                                        </p:tgtEl>
+                                      </p:cBhvr>
+                                    </p:animEffect>
+                                  </p:childTnLst>
+                                </p:cTn>
+                              </p:par>
+                            </p:childTnLst>
+                          </p:cTn>
+                        </p:par>
+                      </p:childTnLst>
+                    </p:cTn>
+                  </p:par>
+                </p:childTnLst>
+              </p:cTn>
+              <p:prevCondLst>
+                <p:cond evt="onPrev" delay="0">
+                  <p:tgtEl>
+                    <p:sldTgt/>
+                  </p:tgtEl>
+                </p:cond>
+              </p:prevCondLst>
+              <p:nextCondLst>
+                <p:cond evt="onNext" delay="0">
+                  <p:tgtEl>
+                    <p:sldTgt/>
+                  </p:tgtEl>
+                </p:cond>
+              </p:nextCondLst>
+            </p:seq>
+          </p:childTnLst>
+        </p:cTn>
+      </p:par>
+    </p:tnLst>
+    <p:bldLst>
+      <p:bldP spid="9" grpId="0" animBg="1"/>
+      <p:bldP spid="10" grpId="0" animBg="1"/>
+      <p:bldP spid="11" grpId="0" animBg="1"/>
+      <p:bldP spid="12" grpId="0" animBg="1"/>
+    </p:bldLst>
+  </p:timing>
+</p:sld>
+</file>
+
+<file path=ppt/slides/slide34.xml><?xml version="1.0" encoding="utf-8"?>
 <p:sld xmlns:a="http://schemas.openxmlformats.org/drawingml/2006/main" xmlns:r="http://schemas.openxmlformats.org/officeDocument/2006/relationships" xmlns:p="http://schemas.openxmlformats.org/presentationml/2006/main">
   <p:cSld>
     <p:spTree>
@@ -48035,8 +50997,8 @@
           <a:lstStyle/>
           <a:p>
             <a:r>
-              <a:rPr lang="en-US" dirty="0"/>
-              <a:t>📖 Let’s the story begin – Round n°6</a:t>
+              <a:rPr lang="en-US" noProof="0" dirty="0"/>
+              <a:t>📖 Round n°6</a:t>
             </a:r>
           </a:p>
         </p:txBody>
@@ -48068,25 +51030,41 @@
           <a:lstStyle/>
           <a:p>
             <a:r>
-              <a:rPr lang="en-US" sz="2800" b="0" dirty="0">
+              <a:rPr lang="en-US" sz="2800" b="0" noProof="0" dirty="0">
                 <a:solidFill>
                   <a:schemeClr val="tx2"/>
                 </a:solidFill>
               </a:rPr>
-              <a:t>  🤔 Test failed so the following additional processing was proposed to the team:</a:t>
+              <a:t>  🤔 </a:t>
+            </a:r>
+            <a:r>
+              <a:rPr lang="en-US" sz="2800" b="0" noProof="0" dirty="0">
+                <a:solidFill>
+                  <a:schemeClr val="accent5"/>
+                </a:solidFill>
+              </a:rPr>
+              <a:t>Test failed </a:t>
+            </a:r>
+            <a:r>
+              <a:rPr lang="en-US" sz="2800" b="0" noProof="0" dirty="0">
+                <a:solidFill>
+                  <a:schemeClr val="tx2"/>
+                </a:solidFill>
+              </a:rPr>
+              <a:t>so the following additional processing was proposed to the team:</a:t>
             </a:r>
           </a:p>
           <a:p>
             <a:pPr lvl="1"/>
             <a:r>
-              <a:rPr lang="en-US" sz="2400" dirty="0"/>
+              <a:rPr lang="en-US" sz="2400" noProof="0" dirty="0"/>
               <a:t>Load the PDF file in memory with a PDF parsing library.</a:t>
             </a:r>
           </a:p>
           <a:p>
             <a:pPr lvl="1"/>
             <a:r>
-              <a:rPr lang="en-US" sz="2400" dirty="0"/>
+              <a:rPr lang="en-US" sz="2400" noProof="0" dirty="0"/>
               <a:t> Save it, via the same PDF library, into another byte buffer to remove any additional content that is not part of the PDF structure.</a:t>
             </a:r>
           </a:p>
@@ -48094,7 +51072,7 @@
             <a:pPr marL="0" indent="0">
               <a:buNone/>
             </a:pPr>
-            <a:endParaRPr lang="en-US" sz="2800" b="0" dirty="0">
+            <a:endParaRPr lang="en-US" sz="2800" b="0" noProof="0" dirty="0">
               <a:solidFill>
                 <a:schemeClr val="tx2"/>
               </a:solidFill>
@@ -48105,7 +51083,7 @@
               <a:buNone/>
             </a:pPr>
             <a:r>
-              <a:rPr lang="en-US" sz="2800" b="0" dirty="0">
+              <a:rPr lang="en-US" sz="2800" b="0" noProof="0" dirty="0">
                 <a:solidFill>
                   <a:schemeClr val="tx2"/>
                 </a:solidFill>
@@ -48180,7 +51158,7 @@
 </p:sld>
 </file>
 
-<file path=ppt/slides/slide32.xml><?xml version="1.0" encoding="utf-8"?>
+<file path=ppt/slides/slide35.xml><?xml version="1.0" encoding="utf-8"?>
 <p:sld xmlns:a="http://schemas.openxmlformats.org/drawingml/2006/main" xmlns:r="http://schemas.openxmlformats.org/officeDocument/2006/relationships" xmlns:p="http://schemas.openxmlformats.org/presentationml/2006/main">
   <p:cSld>
     <p:spTree>
@@ -48203,6 +51181,43 @@
           <a:chExt cx="0" cy="0"/>
         </a:xfrm>
       </p:grpSpPr>
+      <p:pic>
+        <p:nvPicPr>
+          <p:cNvPr id="10" name="Picture 9">
+            <a:extLst>
+              <a:ext uri="{FF2B5EF4-FFF2-40B4-BE49-F238E27FC236}">
+                <a16:creationId xmlns:a16="http://schemas.microsoft.com/office/drawing/2014/main" id="{2B3BC93F-F296-481D-2987-6AE737808F23}"/>
+              </a:ext>
+            </a:extLst>
+          </p:cNvPr>
+          <p:cNvPicPr>
+            <a:picLocks noChangeAspect="1"/>
+          </p:cNvPicPr>
+          <p:nvPr/>
+        </p:nvPicPr>
+        <p:blipFill>
+          <a:blip r:embed="rId2"/>
+          <a:stretch>
+            <a:fillRect/>
+          </a:stretch>
+        </p:blipFill>
+        <p:spPr>
+          <a:xfrm>
+            <a:off x="99102" y="2038646"/>
+            <a:ext cx="12071523" cy="2814707"/>
+          </a:xfrm>
+          <a:prstGeom prst="rect">
+            <a:avLst/>
+          </a:prstGeom>
+          <a:effectLst>
+            <a:outerShdw blurRad="50800" dist="38100" dir="2700000" algn="tl" rotWithShape="0">
+              <a:prstClr val="black">
+                <a:alpha val="40000"/>
+              </a:prstClr>
+            </a:outerShdw>
+          </a:effectLst>
+        </p:spPr>
+      </p:pic>
       <p:sp>
         <p:nvSpPr>
           <p:cNvPr id="2" name="Titre 1">
@@ -48225,8 +51240,8 @@
           <a:lstStyle/>
           <a:p>
             <a:r>
-              <a:rPr lang="en-US" dirty="0"/>
-              <a:t>📖 Let’s the story begin – Round n°6</a:t>
+              <a:rPr lang="en-US" noProof="0" dirty="0"/>
+              <a:t>📖 Round n°6</a:t>
             </a:r>
           </a:p>
         </p:txBody>
@@ -48258,11 +51273,11 @@
           <a:lstStyle/>
           <a:p>
             <a:r>
-              <a:rPr lang="en-US" sz="2400" dirty="0"/>
+              <a:rPr lang="en-US" sz="2400" noProof="0" dirty="0"/>
               <a:t> ✅ </a:t>
             </a:r>
             <a:r>
-              <a:rPr lang="en-US" sz="2800" b="0" dirty="0">
+              <a:rPr lang="en-US" sz="2800" b="0" noProof="0" dirty="0">
                 <a:solidFill>
                   <a:schemeClr val="tx2"/>
                 </a:solidFill>
@@ -48274,13 +51289,13 @@
             <a:pPr marL="0" lvl="1" indent="0">
               <a:buNone/>
             </a:pPr>
-            <a:endParaRPr lang="en-US" sz="2400" dirty="0"/>
+            <a:endParaRPr lang="en-US" sz="2400" noProof="0" dirty="0"/>
           </a:p>
           <a:p>
             <a:pPr marL="0" indent="0">
               <a:buNone/>
             </a:pPr>
-            <a:endParaRPr lang="en-US" sz="2800" b="0" dirty="0">
+            <a:endParaRPr lang="en-US" sz="2800" b="0" noProof="0" dirty="0">
               <a:solidFill>
                 <a:schemeClr val="tx2"/>
               </a:solidFill>
@@ -48291,7 +51306,7 @@
               <a:buNone/>
             </a:pPr>
             <a:r>
-              <a:rPr lang="en-US" sz="2800" b="0" dirty="0">
+              <a:rPr lang="en-US" sz="2800" b="0" noProof="0" dirty="0">
                 <a:solidFill>
                   <a:schemeClr val="tx2"/>
                 </a:solidFill>
@@ -48341,43 +51356,6 @@
           </a:p>
         </p:txBody>
       </p:sp>
-      <p:pic>
-        <p:nvPicPr>
-          <p:cNvPr id="5" name="Picture 4">
-            <a:extLst>
-              <a:ext uri="{FF2B5EF4-FFF2-40B4-BE49-F238E27FC236}">
-                <a16:creationId xmlns:a16="http://schemas.microsoft.com/office/drawing/2014/main" id="{0255F110-8AF1-2B31-E1A2-CFC2EDCA9CCD}"/>
-              </a:ext>
-            </a:extLst>
-          </p:cNvPr>
-          <p:cNvPicPr>
-            <a:picLocks noChangeAspect="1"/>
-          </p:cNvPicPr>
-          <p:nvPr/>
-        </p:nvPicPr>
-        <p:blipFill>
-          <a:blip r:embed="rId2"/>
-          <a:stretch>
-            <a:fillRect/>
-          </a:stretch>
-        </p:blipFill>
-        <p:spPr>
-          <a:xfrm>
-            <a:off x="99102" y="1919076"/>
-            <a:ext cx="12048050" cy="3110123"/>
-          </a:xfrm>
-          <a:prstGeom prst="rect">
-            <a:avLst/>
-          </a:prstGeom>
-          <a:effectLst>
-            <a:outerShdw blurRad="50800" dist="38100" dir="2700000" algn="tl" rotWithShape="0">
-              <a:prstClr val="black">
-                <a:alpha val="40000"/>
-              </a:prstClr>
-            </a:outerShdw>
-          </a:effectLst>
-        </p:spPr>
-      </p:pic>
       <p:sp>
         <p:nvSpPr>
           <p:cNvPr id="4" name="Rectangle 3">
@@ -48392,8 +51370,8 @@
         </p:nvSpPr>
         <p:spPr>
           <a:xfrm>
-            <a:off x="99102" y="2052084"/>
-            <a:ext cx="2856749" cy="446567"/>
+            <a:off x="119198" y="2670416"/>
+            <a:ext cx="2856749" cy="373238"/>
           </a:xfrm>
           <a:prstGeom prst="rect">
             <a:avLst/>
@@ -48426,16 +51404,16 @@
           <a:lstStyle/>
           <a:p>
             <a:pPr algn="ctr"/>
-            <a:endParaRPr lang="fr-FR"/>
+            <a:endParaRPr lang="en-US" noProof="0" dirty="0"/>
           </a:p>
         </p:txBody>
       </p:sp>
       <p:sp>
         <p:nvSpPr>
-          <p:cNvPr id="6" name="Rectangle 5">
+          <p:cNvPr id="8" name="Rectangle 7">
             <a:extLst>
               <a:ext uri="{FF2B5EF4-FFF2-40B4-BE49-F238E27FC236}">
-                <a16:creationId xmlns:a16="http://schemas.microsoft.com/office/drawing/2014/main" id="{3E977823-69F0-55F7-53CF-8292EF184EAF}"/>
+                <a16:creationId xmlns:a16="http://schemas.microsoft.com/office/drawing/2014/main" id="{1F9D45D0-447E-BD6E-BD7D-D94A1F4B1D12}"/>
               </a:ext>
             </a:extLst>
           </p:cNvPr>
@@ -48444,8 +51422,8 @@
         </p:nvSpPr>
         <p:spPr>
           <a:xfrm>
-            <a:off x="99102" y="3834443"/>
-            <a:ext cx="3473438" cy="446567"/>
+            <a:off x="10711543" y="3938954"/>
+            <a:ext cx="1459082" cy="243965"/>
           </a:xfrm>
           <a:prstGeom prst="rect">
             <a:avLst/>
@@ -48478,7 +51456,59 @@
           <a:lstStyle/>
           <a:p>
             <a:pPr algn="ctr"/>
-            <a:endParaRPr lang="fr-FR"/>
+            <a:endParaRPr lang="en-US" noProof="0" dirty="0"/>
+          </a:p>
+        </p:txBody>
+      </p:sp>
+      <p:sp>
+        <p:nvSpPr>
+          <p:cNvPr id="11" name="Rectangle 10">
+            <a:extLst>
+              <a:ext uri="{FF2B5EF4-FFF2-40B4-BE49-F238E27FC236}">
+                <a16:creationId xmlns:a16="http://schemas.microsoft.com/office/drawing/2014/main" id="{83AAEDF6-18D7-8808-1288-EBA4A88BB068}"/>
+              </a:ext>
+            </a:extLst>
+          </p:cNvPr>
+          <p:cNvSpPr/>
+          <p:nvPr/>
+        </p:nvSpPr>
+        <p:spPr>
+          <a:xfrm>
+            <a:off x="99102" y="4391130"/>
+            <a:ext cx="3468063" cy="462223"/>
+          </a:xfrm>
+          <a:prstGeom prst="rect">
+            <a:avLst/>
+          </a:prstGeom>
+          <a:noFill/>
+          <a:ln w="31750">
+            <a:solidFill>
+              <a:schemeClr val="accent6"/>
+            </a:solidFill>
+          </a:ln>
+        </p:spPr>
+        <p:style>
+          <a:lnRef idx="2">
+            <a:schemeClr val="accent1">
+              <a:shade val="50000"/>
+            </a:schemeClr>
+          </a:lnRef>
+          <a:fillRef idx="1">
+            <a:schemeClr val="accent1"/>
+          </a:fillRef>
+          <a:effectRef idx="0">
+            <a:schemeClr val="accent1"/>
+          </a:effectRef>
+          <a:fontRef idx="minor">
+            <a:schemeClr val="lt1"/>
+          </a:fontRef>
+        </p:style>
+        <p:txBody>
+          <a:bodyPr rtlCol="0" anchor="ctr"/>
+          <a:lstStyle/>
+          <a:p>
+            <a:pPr algn="ctr"/>
+            <a:endParaRPr lang="en-US" noProof="0" dirty="0"/>
           </a:p>
         </p:txBody>
       </p:sp>
@@ -48507,7 +51537,7 @@
 </p:sld>
 </file>
 
-<file path=ppt/slides/slide33.xml><?xml version="1.0" encoding="utf-8"?>
+<file path=ppt/slides/slide36.xml><?xml version="1.0" encoding="utf-8"?>
 <p:sld xmlns:a="http://schemas.openxmlformats.org/drawingml/2006/main" xmlns:r="http://schemas.openxmlformats.org/officeDocument/2006/relationships" xmlns:p="http://schemas.openxmlformats.org/presentationml/2006/main">
   <p:cSld>
     <p:spTree>
@@ -48552,8 +51582,8 @@
           <a:lstStyle/>
           <a:p>
             <a:r>
-              <a:rPr lang="en-US" dirty="0"/>
-              <a:t>📖 Let’s the story begin – Final state</a:t>
+              <a:rPr lang="en-US" noProof="0" dirty="0"/>
+              <a:t>📖 Final state</a:t>
             </a:r>
           </a:p>
         </p:txBody>
@@ -48585,7 +51615,7 @@
           <a:lstStyle/>
           <a:p>
             <a:r>
-              <a:rPr lang="en-US" sz="2800" b="0" dirty="0">
+              <a:rPr lang="en-US" sz="2800" b="0" noProof="0" dirty="0">
                 <a:solidFill>
                   <a:schemeClr val="tx2"/>
                 </a:solidFill>
@@ -48596,7 +51626,7 @@
           <a:p>
             <a:pPr lvl="1"/>
             <a:r>
-              <a:rPr lang="en-US" sz="2400" b="0" dirty="0">
+              <a:rPr lang="en-US" sz="2400" b="0" noProof="0" dirty="0">
                 <a:solidFill>
                   <a:schemeClr val="tx2"/>
                 </a:solidFill>
@@ -48608,7 +51638,7 @@
             <a:pPr marL="0" indent="0">
               <a:buNone/>
             </a:pPr>
-            <a:endParaRPr lang="en-US" sz="2800" b="0" dirty="0">
+            <a:endParaRPr lang="en-US" sz="2800" b="0" noProof="0" dirty="0">
               <a:solidFill>
                 <a:schemeClr val="tx2"/>
               </a:solidFill>
@@ -48616,7 +51646,7 @@
           </a:p>
           <a:p>
             <a:r>
-              <a:rPr lang="en-US" sz="2800" b="0" dirty="0">
+              <a:rPr lang="en-US" sz="2800" b="0" noProof="0" dirty="0">
                 <a:solidFill>
                   <a:schemeClr val="tx2"/>
                 </a:solidFill>
@@ -48627,7 +51657,7 @@
           <a:p>
             <a:pPr lvl="1"/>
             <a:r>
-              <a:rPr lang="en-US" sz="2400" b="0" dirty="0">
+              <a:rPr lang="en-US" sz="2400" b="0" noProof="0" dirty="0">
                 <a:solidFill>
                   <a:schemeClr val="tx2"/>
                 </a:solidFill>
@@ -48638,7 +51668,7 @@
           <a:p>
             <a:pPr lvl="1"/>
             <a:r>
-              <a:rPr lang="en-US" sz="2400" b="0" dirty="0">
+              <a:rPr lang="en-US" sz="2400" b="0" noProof="0" dirty="0">
                 <a:solidFill>
                   <a:schemeClr val="tx2"/>
                 </a:solidFill>
@@ -48649,7 +51679,7 @@
           <a:p>
             <a:pPr lvl="1"/>
             <a:r>
-              <a:rPr lang="en-US" sz="2400" b="0" dirty="0">
+              <a:rPr lang="en-US" sz="2400" b="0" noProof="0" dirty="0">
                 <a:solidFill>
                   <a:schemeClr val="tx2"/>
                 </a:solidFill>
@@ -48660,20 +51690,20 @@
           <a:p>
             <a:pPr lvl="1"/>
             <a:r>
-              <a:rPr lang="en-US" sz="2400" b="0" dirty="0">
+              <a:rPr lang="en-US" sz="2400" b="0" noProof="0" dirty="0">
                 <a:solidFill>
                   <a:schemeClr val="tx2"/>
                 </a:solidFill>
               </a:rPr>
               <a:t>File do not contain any "hidden content".</a:t>
             </a:r>
-            <a:endParaRPr lang="en-US" sz="2400" dirty="0"/>
+            <a:endParaRPr lang="en-US" sz="2400" noProof="0" dirty="0"/>
           </a:p>
           <a:p>
             <a:pPr marL="0" indent="0">
               <a:buNone/>
             </a:pPr>
-            <a:endParaRPr lang="en-US" sz="2800" b="0" dirty="0">
+            <a:endParaRPr lang="en-US" sz="2800" b="0" noProof="0" dirty="0">
               <a:solidFill>
                 <a:schemeClr val="tx2"/>
               </a:solidFill>
@@ -48684,7 +51714,7 @@
               <a:buNone/>
             </a:pPr>
             <a:r>
-              <a:rPr lang="en-US" sz="2800" b="0" dirty="0">
+              <a:rPr lang="en-US" sz="2800" b="0" noProof="0" dirty="0">
                 <a:solidFill>
                   <a:schemeClr val="tx2"/>
                 </a:solidFill>
@@ -48708,8 +51738,8 @@
         </p:nvSpPr>
         <p:spPr>
           <a:xfrm>
-            <a:off x="6096000" y="123276"/>
-            <a:ext cx="5911970" cy="808377"/>
+            <a:off x="3044651" y="5880683"/>
+            <a:ext cx="5834586" cy="808377"/>
           </a:xfrm>
           <a:prstGeom prst="rect">
             <a:avLst/>
@@ -48741,14 +51771,14 @@
           <a:p>
             <a:pPr algn="ctr"/>
             <a:r>
-              <a:rPr lang="en-US" dirty="0"/>
+              <a:rPr lang="en-US" noProof="0" dirty="0"/>
               <a:t> 😉 Final level of exasperation not reached 100%. </a:t>
             </a:r>
           </a:p>
           <a:p>
             <a:pPr algn="ctr"/>
             <a:r>
-              <a:rPr lang="en-US" dirty="0"/>
+              <a:rPr lang="en-US" noProof="0" dirty="0"/>
               <a:t>So, I have not tested the effect of the gravity. </a:t>
             </a:r>
           </a:p>
@@ -48911,7 +51941,7 @@
 </p:sld>
 </file>
 
-<file path=ppt/slides/slide34.xml><?xml version="1.0" encoding="utf-8"?>
+<file path=ppt/slides/slide37.xml><?xml version="1.0" encoding="utf-8"?>
 <p:sld xmlns:a="http://schemas.openxmlformats.org/drawingml/2006/main" xmlns:r="http://schemas.openxmlformats.org/officeDocument/2006/relationships" xmlns:p="http://schemas.openxmlformats.org/presentationml/2006/main">
   <p:cSld>
     <p:spTree>
@@ -48956,7 +51986,7 @@
           <a:lstStyle/>
           <a:p>
             <a:r>
-              <a:rPr lang="en-US" dirty="0"/>
+              <a:rPr lang="en-US" noProof="0" dirty="0"/>
               <a:t>🛣️ Conclusion</a:t>
             </a:r>
           </a:p>
@@ -48989,7 +52019,7 @@
           <a:lstStyle/>
           <a:p>
             <a:r>
-              <a:rPr lang="en-US" sz="2800" b="0" dirty="0">
+              <a:rPr lang="en-US" sz="2800" b="0" noProof="0" dirty="0">
                 <a:solidFill>
                   <a:schemeClr val="tx2"/>
                 </a:solidFill>
@@ -49000,7 +52030,7 @@
           <a:p>
             <a:pPr lvl="1"/>
             <a:r>
-              <a:rPr lang="en-US" sz="2400" b="0" dirty="0">
+              <a:rPr lang="en-US" sz="2400" b="0" noProof="0" dirty="0">
                 <a:solidFill>
                   <a:schemeClr val="tx2"/>
                 </a:solidFill>
@@ -49008,7 +52038,7 @@
               <a:t> PDF is a safe format </a:t>
             </a:r>
             <a:r>
-              <a:rPr lang="en-US" sz="2400" b="0" dirty="0">
+              <a:rPr lang="en-US" sz="2400" b="0" noProof="0" dirty="0">
                 <a:solidFill>
                   <a:schemeClr val="tx2"/>
                 </a:solidFill>
@@ -49016,7 +52046,7 @@
               </a:rPr>
               <a:t> No, it require validation like all file formats.</a:t>
             </a:r>
-            <a:endParaRPr lang="en-US" sz="2400" b="0" dirty="0">
+            <a:endParaRPr lang="en-US" sz="2400" b="0" noProof="0" dirty="0">
               <a:solidFill>
                 <a:schemeClr val="tx2"/>
               </a:solidFill>
@@ -49025,7 +52055,7 @@
           <a:p>
             <a:pPr lvl="1"/>
             <a:r>
-              <a:rPr lang="en-US" sz="2400" b="0" dirty="0">
+              <a:rPr lang="en-US" sz="2400" b="0" noProof="0" dirty="0">
                 <a:solidFill>
                   <a:schemeClr val="tx2"/>
                 </a:solidFill>
@@ -49033,7 +52063,7 @@
               <a:t>A "file upload" is simple to implement </a:t>
             </a:r>
             <a:r>
-              <a:rPr lang="en-US" sz="2400" b="0" dirty="0">
+              <a:rPr lang="en-US" sz="2400" b="0" noProof="0" dirty="0">
                 <a:solidFill>
                   <a:schemeClr val="tx2"/>
                 </a:solidFill>
@@ -49044,25 +52074,44 @@
           </a:p>
           <a:p>
             <a:pPr lvl="1"/>
-            <a:endParaRPr lang="en-US" sz="2400" dirty="0">
+            <a:endParaRPr lang="en-US" sz="2400" noProof="0" dirty="0">
               <a:sym typeface="Wingdings" panose="05000000000000000000" pitchFamily="2" charset="2"/>
             </a:endParaRPr>
           </a:p>
           <a:p>
             <a:r>
-              <a:rPr lang="en-US" sz="2800" b="0" dirty="0">
+              <a:rPr lang="en-US" sz="2800" b="0" noProof="0" dirty="0">
                 <a:solidFill>
                   <a:schemeClr val="tx2"/>
                 </a:solidFill>
                 <a:sym typeface="Wingdings" panose="05000000000000000000" pitchFamily="2" charset="2"/>
               </a:rPr>
-              <a:t> ✅ All the frustration meet could be avoided by a more precise User Story based on the analysis of:</a:t>
+              <a:t> ✅ All the frustration meet could be avoided by a User Story enhanced with corresponding </a:t>
+            </a:r>
+            <a:r>
+              <a:rPr lang="en-US" sz="2800" b="0" noProof="0" dirty="0">
+                <a:solidFill>
+                  <a:schemeClr val="tx2"/>
+                </a:solidFill>
+                <a:sym typeface="Wingdings" panose="05000000000000000000" pitchFamily="2" charset="2"/>
+                <a:hlinkClick r:id="rId2"/>
+              </a:rPr>
+              <a:t>Evil User Stories</a:t>
+            </a:r>
+            <a:r>
+              <a:rPr lang="en-US" sz="2800" b="0" noProof="0" dirty="0">
+                <a:solidFill>
+                  <a:schemeClr val="tx2"/>
+                </a:solidFill>
+                <a:sym typeface="Wingdings" panose="05000000000000000000" pitchFamily="2" charset="2"/>
+              </a:rPr>
+              <a:t> based on the analysis of:</a:t>
             </a:r>
           </a:p>
           <a:p>
             <a:pPr lvl="1"/>
             <a:r>
-              <a:rPr lang="en-US" sz="2400" b="0" dirty="0">
+              <a:rPr lang="en-US" sz="2400" b="0" noProof="0" dirty="0">
                 <a:solidFill>
                   <a:schemeClr val="tx2"/>
                 </a:solidFill>
@@ -49071,7 +52120,7 @@
               <a:t> Real use cases of the wanted file format from a </a:t>
             </a:r>
             <a:r>
-              <a:rPr lang="en-US" sz="2400" b="0" dirty="0">
+              <a:rPr lang="en-US" sz="2400" b="0" noProof="0" dirty="0">
                 <a:solidFill>
                   <a:schemeClr val="accent1"/>
                 </a:solidFill>
@@ -49080,7 +52129,7 @@
               <a:t>business perspective</a:t>
             </a:r>
             <a:r>
-              <a:rPr lang="en-US" sz="2400" b="0" dirty="0">
+              <a:rPr lang="en-US" sz="2400" b="0" noProof="0" dirty="0">
                 <a:solidFill>
                   <a:schemeClr val="tx2"/>
                 </a:solidFill>
@@ -49092,13 +52141,13 @@
           <a:p>
             <a:pPr lvl="1"/>
             <a:r>
-              <a:rPr lang="en-US" sz="2400" dirty="0">
+              <a:rPr lang="en-US" sz="2400" noProof="0" dirty="0">
                 <a:sym typeface="Wingdings" panose="05000000000000000000" pitchFamily="2" charset="2"/>
               </a:rPr>
               <a:t> Attack vectors exposed by the wanted file format from a </a:t>
             </a:r>
             <a:r>
-              <a:rPr lang="en-US" sz="2400" dirty="0">
+              <a:rPr lang="en-US" sz="2400" noProof="0" dirty="0">
                 <a:solidFill>
                   <a:schemeClr val="accent5"/>
                 </a:solidFill>
@@ -49107,19 +52156,19 @@
               <a:t>security perspective</a:t>
             </a:r>
             <a:r>
-              <a:rPr lang="en-US" sz="2400" dirty="0">
+              <a:rPr lang="en-US" sz="2400" noProof="0" dirty="0">
                 <a:sym typeface="Wingdings" panose="05000000000000000000" pitchFamily="2" charset="2"/>
               </a:rPr>
               <a:t>.</a:t>
             </a:r>
-            <a:endParaRPr lang="en-US" sz="2400" b="0" dirty="0">
+            <a:endParaRPr lang="en-US" sz="2400" b="0" noProof="0" dirty="0">
               <a:solidFill>
                 <a:schemeClr val="tx2"/>
               </a:solidFill>
             </a:endParaRPr>
           </a:p>
           <a:p>
-            <a:endParaRPr lang="en-US" sz="2800" b="0" dirty="0">
+            <a:endParaRPr lang="en-US" sz="2800" b="0" noProof="0" dirty="0">
               <a:solidFill>
                 <a:schemeClr val="tx2"/>
               </a:solidFill>
@@ -49130,7 +52179,7 @@
               <a:buNone/>
             </a:pPr>
             <a:r>
-              <a:rPr lang="en-US" sz="2800" b="0" dirty="0">
+              <a:rPr lang="en-US" sz="2800" b="0" noProof="0" dirty="0">
                 <a:solidFill>
                   <a:schemeClr val="tx2"/>
                 </a:solidFill>
@@ -49165,7 +52214,7 @@
 </p:sld>
 </file>
 
-<file path=ppt/slides/slide35.xml><?xml version="1.0" encoding="utf-8"?>
+<file path=ppt/slides/slide38.xml><?xml version="1.0" encoding="utf-8"?>
 <p:sld xmlns:a="http://schemas.openxmlformats.org/drawingml/2006/main" xmlns:r="http://schemas.openxmlformats.org/officeDocument/2006/relationships" xmlns:p="http://schemas.openxmlformats.org/presentationml/2006/main">
   <p:cSld>
     <p:spTree>
@@ -49210,8 +52259,16 @@
           <a:lstStyle/>
           <a:p>
             <a:r>
-              <a:rPr lang="en-US" dirty="0"/>
-              <a:t>🤖 Misc: Code generated via AI</a:t>
+              <a:rPr lang="en-US" noProof="0" dirty="0"/>
+              <a:t>🤖 </a:t>
+            </a:r>
+            <a:r>
+              <a:rPr lang="en-US" noProof="0" dirty="0" err="1"/>
+              <a:t>Misc</a:t>
+            </a:r>
+            <a:r>
+              <a:rPr lang="en-US" noProof="0" dirty="0"/>
+              <a:t>: Code generated via AI</a:t>
             </a:r>
           </a:p>
         </p:txBody>
@@ -49243,23 +52300,31 @@
           <a:lstStyle/>
           <a:p>
             <a:r>
-              <a:rPr lang="en-US" sz="2800" b="0" dirty="0">
+              <a:rPr lang="en-US" sz="2800" b="0" noProof="0" dirty="0">
                 <a:solidFill>
                   <a:schemeClr val="tx2"/>
                 </a:solidFill>
               </a:rPr>
-              <a:t> Using ChatGPT (model GPT-5.2–class) with a user prompt </a:t>
+              <a:t> Using Claude (model Sonnet 4.6 without adaptive thinking) with a user prompt </a:t>
             </a:r>
             <a:r>
-              <a:rPr lang="en-US" sz="2800" b="0" dirty="0">
+              <a:rPr lang="en-US" sz="2800" noProof="0" dirty="0">
                 <a:solidFill>
                   <a:schemeClr val="accent1"/>
                 </a:solidFill>
               </a:rPr>
-              <a:t>without any mention to the security aspect</a:t>
+              <a:t>without any mention </a:t>
             </a:r>
             <a:r>
-              <a:rPr lang="en-US" sz="2800" b="0" dirty="0">
+              <a:rPr lang="en-US" sz="2800" b="0" noProof="0" dirty="0">
+                <a:solidFill>
+                  <a:schemeClr val="accent1"/>
+                </a:solidFill>
+              </a:rPr>
+              <a:t>to the security aspect</a:t>
+            </a:r>
+            <a:r>
+              <a:rPr lang="en-US" sz="2800" b="0" noProof="0" dirty="0">
                 <a:solidFill>
                   <a:schemeClr val="tx2"/>
                 </a:solidFill>
@@ -49271,7 +52336,7 @@
             <a:pPr marL="0" lvl="1" indent="0">
               <a:buNone/>
             </a:pPr>
-            <a:endParaRPr lang="en-US" sz="2800" b="0" dirty="0">
+            <a:endParaRPr lang="en-US" sz="2800" b="0" noProof="0" dirty="0">
               <a:solidFill>
                 <a:schemeClr val="tx2"/>
               </a:solidFill>
@@ -49282,7 +52347,7 @@
               <a:buNone/>
             </a:pPr>
             <a:r>
-              <a:rPr lang="en-US" sz="2800" b="0" dirty="0">
+              <a:rPr lang="en-US" sz="2800" b="0" noProof="0" dirty="0">
                 <a:solidFill>
                   <a:schemeClr val="tx2"/>
                 </a:solidFill>
@@ -49322,7 +52387,7 @@
           <a:p>
             <a:pPr algn="l"/>
             <a:r>
-              <a:rPr lang="en-US" dirty="0">
+              <a:rPr lang="en-US" noProof="0" dirty="0">
                 <a:latin typeface="Consolas" panose="020B0609020204030204" pitchFamily="49" charset="0"/>
               </a:rPr>
               <a:t>Give me the Java code of a REST web service intended to be an upload service accepting only PDF file.</a:t>
@@ -49330,14 +52395,14 @@
           </a:p>
           <a:p>
             <a:pPr algn="l"/>
-            <a:endParaRPr lang="en-US" dirty="0">
+            <a:endParaRPr lang="en-US" noProof="0" dirty="0">
               <a:latin typeface="Consolas" panose="020B0609020204030204" pitchFamily="49" charset="0"/>
             </a:endParaRPr>
           </a:p>
           <a:p>
             <a:pPr algn="l"/>
             <a:r>
-              <a:rPr lang="en-US" dirty="0">
+              <a:rPr lang="en-US" noProof="0" dirty="0">
                 <a:latin typeface="Consolas" panose="020B0609020204030204" pitchFamily="49" charset="0"/>
               </a:rPr>
               <a:t>You must make the code compact and easy to read/understand/maintain.</a:t>
@@ -49345,14 +52410,14 @@
           </a:p>
           <a:p>
             <a:pPr algn="l"/>
-            <a:endParaRPr lang="en-US" dirty="0">
+            <a:endParaRPr lang="en-US" noProof="0" dirty="0">
               <a:latin typeface="Consolas" panose="020B0609020204030204" pitchFamily="49" charset="0"/>
             </a:endParaRPr>
           </a:p>
           <a:p>
             <a:pPr algn="l"/>
             <a:r>
-              <a:rPr lang="en-US" dirty="0">
+              <a:rPr lang="en-US" noProof="0" dirty="0">
                 <a:latin typeface="Consolas" panose="020B0609020204030204" pitchFamily="49" charset="0"/>
               </a:rPr>
               <a:t>You must fulfil all theses constraints:</a:t>
@@ -49364,7 +52429,7 @@
               <a:buChar char="•"/>
             </a:pPr>
             <a:r>
-              <a:rPr lang="en-US" dirty="0">
+              <a:rPr lang="en-US" noProof="0" dirty="0">
                 <a:latin typeface="Consolas" panose="020B0609020204030204" pitchFamily="49" charset="0"/>
               </a:rPr>
               <a:t>The REST web service must use Spring Boot.</a:t>
@@ -49376,7 +52441,7 @@
               <a:buChar char="•"/>
             </a:pPr>
             <a:r>
-              <a:rPr lang="en-US" dirty="0">
+              <a:rPr lang="en-US" noProof="0" dirty="0">
                 <a:latin typeface="Consolas" panose="020B0609020204030204" pitchFamily="49" charset="0"/>
               </a:rPr>
               <a:t>You must use a recommended, maintained and open-source Java PDF library as much as possible.</a:t>
@@ -49388,14 +52453,11 @@
               <a:buChar char="•"/>
             </a:pPr>
             <a:r>
-              <a:rPr lang="en-US" dirty="0">
+              <a:rPr lang="en-US" noProof="0" dirty="0">
                 <a:latin typeface="Consolas" panose="020B0609020204030204" pitchFamily="49" charset="0"/>
               </a:rPr>
               <a:t>The maximum size of the size must be 10 MB.</a:t>
             </a:r>
-            <a:endParaRPr lang="fr-FR" dirty="0" err="1">
-              <a:latin typeface="Consolas" panose="020B0609020204030204" pitchFamily="49" charset="0"/>
-            </a:endParaRPr>
           </a:p>
         </p:txBody>
       </p:sp>
@@ -49424,7 +52486,7 @@
 </p:sld>
 </file>
 
-<file path=ppt/slides/slide36.xml><?xml version="1.0" encoding="utf-8"?>
+<file path=ppt/slides/slide39.xml><?xml version="1.0" encoding="utf-8"?>
 <p:sld xmlns:a="http://schemas.openxmlformats.org/drawingml/2006/main" xmlns:r="http://schemas.openxmlformats.org/officeDocument/2006/relationships" xmlns:p="http://schemas.openxmlformats.org/presentationml/2006/main">
   <p:cSld>
     <p:spTree>
@@ -49469,18 +52531,26 @@
           <a:lstStyle/>
           <a:p>
             <a:r>
-              <a:rPr lang="en-US" dirty="0"/>
-              <a:t>🤖 Misc: Code generated via AI</a:t>
+              <a:rPr lang="en-US" noProof="0" dirty="0"/>
+              <a:t>🤖 </a:t>
+            </a:r>
+            <a:r>
+              <a:rPr lang="en-US" noProof="0" dirty="0" err="1"/>
+              <a:t>Misc</a:t>
+            </a:r>
+            <a:r>
+              <a:rPr lang="en-US" noProof="0" dirty="0"/>
+              <a:t>: Code generated via AI</a:t>
             </a:r>
           </a:p>
         </p:txBody>
       </p:sp>
       <p:pic>
         <p:nvPicPr>
-          <p:cNvPr id="6" name="Picture 5" descr="A screen shot of a computer program&#10;&#10;AI-generated content may be incorrect.">
+          <p:cNvPr id="7" name="Picture 6">
             <a:extLst>
               <a:ext uri="{FF2B5EF4-FFF2-40B4-BE49-F238E27FC236}">
-                <a16:creationId xmlns:a16="http://schemas.microsoft.com/office/drawing/2014/main" id="{F20E73DB-B25D-FC4B-C15E-75CFC79FC828}"/>
+                <a16:creationId xmlns:a16="http://schemas.microsoft.com/office/drawing/2014/main" id="{DA3545AE-7F6F-D02F-27A0-8861F173A941}"/>
               </a:ext>
             </a:extLst>
           </p:cNvPr>
@@ -49490,21 +52560,16 @@
           <p:nvPr/>
         </p:nvPicPr>
         <p:blipFill>
-          <a:blip r:embed="rId2">
-            <a:extLst>
-              <a:ext uri="{28A0092B-C50C-407E-A947-70E740481C1C}">
-                <a14:useLocalDpi xmlns:a14="http://schemas.microsoft.com/office/drawing/2010/main" val="0"/>
-              </a:ext>
-            </a:extLst>
-          </a:blip>
+          <a:blip r:embed="rId2"/>
+          <a:srcRect t="23573"/>
           <a:stretch>
             <a:fillRect/>
           </a:stretch>
         </p:blipFill>
         <p:spPr>
           <a:xfrm>
-            <a:off x="1153632" y="808228"/>
-            <a:ext cx="9884735" cy="5241543"/>
+            <a:off x="107609" y="1759300"/>
+            <a:ext cx="11976781" cy="4210259"/>
           </a:xfrm>
           <a:prstGeom prst="rect">
             <a:avLst/>
@@ -49518,6 +52583,59 @@
           </a:effectLst>
         </p:spPr>
       </p:pic>
+      <p:sp>
+        <p:nvSpPr>
+          <p:cNvPr id="8" name="Speech Bubble: Rectangle 7">
+            <a:extLst>
+              <a:ext uri="{FF2B5EF4-FFF2-40B4-BE49-F238E27FC236}">
+                <a16:creationId xmlns:a16="http://schemas.microsoft.com/office/drawing/2014/main" id="{8758C063-4C3B-FFCD-59BA-9F7D9A7B3B2F}"/>
+              </a:ext>
+            </a:extLst>
+          </p:cNvPr>
+          <p:cNvSpPr/>
+          <p:nvPr/>
+        </p:nvSpPr>
+        <p:spPr>
+          <a:xfrm>
+            <a:off x="6219930" y="888441"/>
+            <a:ext cx="4391130" cy="555372"/>
+          </a:xfrm>
+          <a:prstGeom prst="wedgeRectCallout">
+            <a:avLst>
+              <a:gd name="adj1" fmla="val -40223"/>
+              <a:gd name="adj2" fmla="val 291385"/>
+            </a:avLst>
+          </a:prstGeom>
+          <a:ln/>
+        </p:spPr>
+        <p:style>
+          <a:lnRef idx="3">
+            <a:schemeClr val="lt1"/>
+          </a:lnRef>
+          <a:fillRef idx="1">
+            <a:schemeClr val="accent5"/>
+          </a:fillRef>
+          <a:effectRef idx="1">
+            <a:schemeClr val="accent5"/>
+          </a:effectRef>
+          <a:fontRef idx="minor">
+            <a:schemeClr val="lt1"/>
+          </a:fontRef>
+        </p:style>
+        <p:txBody>
+          <a:bodyPr rtlCol="0" anchor="ctr"/>
+          <a:lstStyle/>
+          <a:p>
+            <a:pPr algn="ctr"/>
+            <a:r>
+              <a:rPr lang="en-US" noProof="0" dirty="0">
+                <a:latin typeface="Consolas" panose="020B0609020204030204" pitchFamily="49" charset="0"/>
+              </a:rPr>
+              <a:t>Minimal validations added.</a:t>
+            </a:r>
+          </a:p>
+        </p:txBody>
+      </p:sp>
     </p:spTree>
     <p:extLst>
       <p:ext uri="{BB962C8B-B14F-4D97-AF65-F5344CB8AC3E}">
@@ -49536,519 +52654,6 @@
     </mc:Choice>
     <mc:Fallback xmlns="">
       <p:transition spd="med">
-        <p:fade/>
-      </p:transition>
-    </mc:Fallback>
-  </mc:AlternateContent>
-</p:sld>
-</file>
-
-<file path=ppt/slides/slide37.xml><?xml version="1.0" encoding="utf-8"?>
-<p:sld xmlns:a="http://schemas.openxmlformats.org/drawingml/2006/main" xmlns:r="http://schemas.openxmlformats.org/officeDocument/2006/relationships" xmlns:p="http://schemas.openxmlformats.org/presentationml/2006/main">
-  <p:cSld>
-    <p:spTree>
-      <p:nvGrpSpPr>
-        <p:cNvPr id="1" name="">
-          <a:extLst>
-            <a:ext uri="{FF2B5EF4-FFF2-40B4-BE49-F238E27FC236}">
-              <a16:creationId xmlns:a16="http://schemas.microsoft.com/office/drawing/2014/main" id="{003E6023-F693-7699-F89F-1086663FCB1A}"/>
-            </a:ext>
-          </a:extLst>
-        </p:cNvPr>
-        <p:cNvGrpSpPr/>
-        <p:nvPr/>
-      </p:nvGrpSpPr>
-      <p:grpSpPr>
-        <a:xfrm>
-          <a:off x="0" y="0"/>
-          <a:ext cx="0" cy="0"/>
-          <a:chOff x="0" y="0"/>
-          <a:chExt cx="0" cy="0"/>
-        </a:xfrm>
-      </p:grpSpPr>
-      <p:sp>
-        <p:nvSpPr>
-          <p:cNvPr id="2" name="Titre 1">
-            <a:extLst>
-              <a:ext uri="{FF2B5EF4-FFF2-40B4-BE49-F238E27FC236}">
-                <a16:creationId xmlns:a16="http://schemas.microsoft.com/office/drawing/2014/main" id="{B253230D-FF16-0731-521D-D75C9FDA4B5D}"/>
-              </a:ext>
-            </a:extLst>
-          </p:cNvPr>
-          <p:cNvSpPr>
-            <a:spLocks noGrp="1"/>
-          </p:cNvSpPr>
-          <p:nvPr>
-            <p:ph type="title"/>
-          </p:nvPr>
-        </p:nvSpPr>
-        <p:spPr/>
-        <p:txBody>
-          <a:bodyPr/>
-          <a:lstStyle/>
-          <a:p>
-            <a:r>
-              <a:rPr lang="en-US" dirty="0"/>
-              <a:t>🤖 Misc: Code generated via AI</a:t>
-            </a:r>
-          </a:p>
-        </p:txBody>
-      </p:sp>
-      <p:sp>
-        <p:nvSpPr>
-          <p:cNvPr id="3" name="Espace réservé du texte 2">
-            <a:extLst>
-              <a:ext uri="{FF2B5EF4-FFF2-40B4-BE49-F238E27FC236}">
-                <a16:creationId xmlns:a16="http://schemas.microsoft.com/office/drawing/2014/main" id="{05681DCE-E000-7EA1-F0DD-4559669AEBCB}"/>
-              </a:ext>
-            </a:extLst>
-          </p:cNvPr>
-          <p:cNvSpPr>
-            <a:spLocks noGrp="1"/>
-          </p:cNvSpPr>
-          <p:nvPr>
-            <p:ph type="body" sz="quarter" idx="15"/>
-          </p:nvPr>
-        </p:nvSpPr>
-        <p:spPr>
-          <a:xfrm>
-            <a:off x="588000" y="977317"/>
-            <a:ext cx="11419970" cy="4949030"/>
-          </a:xfrm>
-        </p:spPr>
-        <p:txBody>
-          <a:bodyPr/>
-          <a:lstStyle/>
-          <a:p>
-            <a:r>
-              <a:rPr lang="en-US" sz="2800" b="0" dirty="0">
-                <a:solidFill>
-                  <a:schemeClr val="tx2"/>
-                </a:solidFill>
-              </a:rPr>
-              <a:t> Using ChatGPT (model GPT-5.2–class) with a user prompt </a:t>
-            </a:r>
-            <a:r>
-              <a:rPr lang="en-US" sz="2800" b="0" dirty="0">
-                <a:solidFill>
-                  <a:schemeClr val="accent1"/>
-                </a:solidFill>
-              </a:rPr>
-              <a:t>with explicit mention to the security aspect</a:t>
-            </a:r>
-            <a:r>
-              <a:rPr lang="en-US" sz="2800" b="0" dirty="0">
-                <a:solidFill>
-                  <a:schemeClr val="tx2"/>
-                </a:solidFill>
-              </a:rPr>
-              <a:t>:</a:t>
-            </a:r>
-          </a:p>
-          <a:p>
-            <a:pPr marL="0" lvl="1" indent="0">
-              <a:buNone/>
-            </a:pPr>
-            <a:endParaRPr lang="en-US" sz="2800" b="0" dirty="0">
-              <a:solidFill>
-                <a:schemeClr val="tx2"/>
-              </a:solidFill>
-            </a:endParaRPr>
-          </a:p>
-          <a:p>
-            <a:pPr marL="0" indent="0">
-              <a:buNone/>
-            </a:pPr>
-            <a:r>
-              <a:rPr lang="en-US" sz="2800" b="0" dirty="0">
-                <a:solidFill>
-                  <a:schemeClr val="tx2"/>
-                </a:solidFill>
-              </a:rPr>
-              <a:t>  </a:t>
-            </a:r>
-          </a:p>
-        </p:txBody>
-      </p:sp>
-      <p:sp>
-        <p:nvSpPr>
-          <p:cNvPr id="4" name="TextBox 3">
-            <a:extLst>
-              <a:ext uri="{FF2B5EF4-FFF2-40B4-BE49-F238E27FC236}">
-                <a16:creationId xmlns:a16="http://schemas.microsoft.com/office/drawing/2014/main" id="{E4B76E6F-8926-EBC9-DD7E-FE5362608BC0}"/>
-              </a:ext>
-            </a:extLst>
-          </p:cNvPr>
-          <p:cNvSpPr txBox="1"/>
-          <p:nvPr/>
-        </p:nvSpPr>
-        <p:spPr>
-          <a:xfrm>
-            <a:off x="184030" y="2466753"/>
-            <a:ext cx="11823939" cy="3046988"/>
-          </a:xfrm>
-          <a:prstGeom prst="rect">
-            <a:avLst/>
-          </a:prstGeom>
-          <a:noFill/>
-        </p:spPr>
-        <p:txBody>
-          <a:bodyPr wrap="square" lIns="0" tIns="0" rIns="0" bIns="0" rtlCol="0">
-            <a:spAutoFit/>
-          </a:bodyPr>
-          <a:lstStyle/>
-          <a:p>
-            <a:pPr algn="l"/>
-            <a:r>
-              <a:rPr lang="en-US" dirty="0">
-                <a:latin typeface="Consolas" panose="020B0609020204030204" pitchFamily="49" charset="0"/>
-              </a:rPr>
-              <a:t>Give me the Java code of a REST web service intended to be an upload service accepting only PDF file.</a:t>
-            </a:r>
-          </a:p>
-          <a:p>
-            <a:pPr algn="l"/>
-            <a:endParaRPr lang="en-US" dirty="0">
-              <a:latin typeface="Consolas" panose="020B0609020204030204" pitchFamily="49" charset="0"/>
-            </a:endParaRPr>
-          </a:p>
-          <a:p>
-            <a:pPr algn="l"/>
-            <a:r>
-              <a:rPr lang="en-US" dirty="0">
-                <a:latin typeface="Consolas" panose="020B0609020204030204" pitchFamily="49" charset="0"/>
-              </a:rPr>
-              <a:t>You must make the code compact and easy to read/understand/maintain.</a:t>
-            </a:r>
-          </a:p>
-          <a:p>
-            <a:pPr algn="l"/>
-            <a:endParaRPr lang="en-US" dirty="0">
-              <a:latin typeface="Consolas" panose="020B0609020204030204" pitchFamily="49" charset="0"/>
-            </a:endParaRPr>
-          </a:p>
-          <a:p>
-            <a:pPr algn="l"/>
-            <a:r>
-              <a:rPr lang="en-US" dirty="0">
-                <a:latin typeface="Consolas" panose="020B0609020204030204" pitchFamily="49" charset="0"/>
-              </a:rPr>
-              <a:t>You must fulfil all theses constraints:</a:t>
-            </a:r>
-          </a:p>
-          <a:p>
-            <a:pPr marL="285750" indent="-285750" algn="l">
-              <a:buFont typeface="Arial" panose="020B0604020202020204" pitchFamily="34" charset="0"/>
-              <a:buChar char="•"/>
-            </a:pPr>
-            <a:r>
-              <a:rPr lang="en-US" dirty="0">
-                <a:latin typeface="Consolas" panose="020B0609020204030204" pitchFamily="49" charset="0"/>
-              </a:rPr>
-              <a:t>The REST web service must use Spring Boot.</a:t>
-            </a:r>
-          </a:p>
-          <a:p>
-            <a:pPr marL="285750" indent="-285750" algn="l">
-              <a:buFont typeface="Arial" panose="020B0604020202020204" pitchFamily="34" charset="0"/>
-              <a:buChar char="•"/>
-            </a:pPr>
-            <a:r>
-              <a:rPr lang="en-US" dirty="0">
-                <a:latin typeface="Consolas" panose="020B0609020204030204" pitchFamily="49" charset="0"/>
-              </a:rPr>
-              <a:t>You must use a recommended, maintained and open-source Java PDF library as much as possible.</a:t>
-            </a:r>
-          </a:p>
-          <a:p>
-            <a:pPr marL="285750" indent="-285750" algn="l">
-              <a:buFont typeface="Arial" panose="020B0604020202020204" pitchFamily="34" charset="0"/>
-              <a:buChar char="•"/>
-            </a:pPr>
-            <a:r>
-              <a:rPr lang="en-US" b="1" dirty="0">
-                <a:solidFill>
-                  <a:schemeClr val="accent3"/>
-                </a:solidFill>
-                <a:latin typeface="Consolas" panose="020B0609020204030204" pitchFamily="49" charset="0"/>
-              </a:rPr>
-              <a:t>You must include all the security validations to ensure that the PDF file is safe from a security perspective.</a:t>
-            </a:r>
-          </a:p>
-          <a:p>
-            <a:pPr marL="285750" indent="-285750" algn="l">
-              <a:buFont typeface="Arial" panose="020B0604020202020204" pitchFamily="34" charset="0"/>
-              <a:buChar char="•"/>
-            </a:pPr>
-            <a:r>
-              <a:rPr lang="en-US" dirty="0">
-                <a:latin typeface="Consolas" panose="020B0609020204030204" pitchFamily="49" charset="0"/>
-              </a:rPr>
-              <a:t>The maximum size of the size must be 10 MB.</a:t>
-            </a:r>
-            <a:endParaRPr lang="fr-FR" dirty="0" err="1">
-              <a:latin typeface="Consolas" panose="020B0609020204030204" pitchFamily="49" charset="0"/>
-            </a:endParaRPr>
-          </a:p>
-        </p:txBody>
-      </p:sp>
-    </p:spTree>
-    <p:extLst>
-      <p:ext uri="{BB962C8B-B14F-4D97-AF65-F5344CB8AC3E}">
-        <p14:creationId xmlns:p14="http://schemas.microsoft.com/office/powerpoint/2010/main" val="1318273276"/>
-      </p:ext>
-    </p:extLst>
-  </p:cSld>
-  <p:clrMapOvr>
-    <a:masterClrMapping/>
-  </p:clrMapOvr>
-  <mc:AlternateContent xmlns:mc="http://schemas.openxmlformats.org/markup-compatibility/2006" xmlns:p14="http://schemas.microsoft.com/office/powerpoint/2010/main">
-    <mc:Choice Requires="p14">
-      <p:transition spd="med" p14:dur="700">
-        <p:fade/>
-      </p:transition>
-    </mc:Choice>
-    <mc:Fallback xmlns="">
-      <p:transition spd="med">
-        <p:fade/>
-      </p:transition>
-    </mc:Fallback>
-  </mc:AlternateContent>
-</p:sld>
-</file>
-
-<file path=ppt/slides/slide38.xml><?xml version="1.0" encoding="utf-8"?>
-<p:sld xmlns:a="http://schemas.openxmlformats.org/drawingml/2006/main" xmlns:r="http://schemas.openxmlformats.org/officeDocument/2006/relationships" xmlns:p="http://schemas.openxmlformats.org/presentationml/2006/main">
-  <p:cSld>
-    <p:spTree>
-      <p:nvGrpSpPr>
-        <p:cNvPr id="1" name="">
-          <a:extLst>
-            <a:ext uri="{FF2B5EF4-FFF2-40B4-BE49-F238E27FC236}">
-              <a16:creationId xmlns:a16="http://schemas.microsoft.com/office/drawing/2014/main" id="{6DD8BB4A-AC8A-D165-E2D8-05BCF03F1F3E}"/>
-            </a:ext>
-          </a:extLst>
-        </p:cNvPr>
-        <p:cNvGrpSpPr/>
-        <p:nvPr/>
-      </p:nvGrpSpPr>
-      <p:grpSpPr>
-        <a:xfrm>
-          <a:off x="0" y="0"/>
-          <a:ext cx="0" cy="0"/>
-          <a:chOff x="0" y="0"/>
-          <a:chExt cx="0" cy="0"/>
-        </a:xfrm>
-      </p:grpSpPr>
-      <p:sp>
-        <p:nvSpPr>
-          <p:cNvPr id="2" name="Titre 1">
-            <a:extLst>
-              <a:ext uri="{FF2B5EF4-FFF2-40B4-BE49-F238E27FC236}">
-                <a16:creationId xmlns:a16="http://schemas.microsoft.com/office/drawing/2014/main" id="{25605F23-5A77-C36A-9682-F6BD4D1007A7}"/>
-              </a:ext>
-            </a:extLst>
-          </p:cNvPr>
-          <p:cNvSpPr>
-            <a:spLocks noGrp="1"/>
-          </p:cNvSpPr>
-          <p:nvPr>
-            <p:ph type="title"/>
-          </p:nvPr>
-        </p:nvSpPr>
-        <p:spPr/>
-        <p:txBody>
-          <a:bodyPr/>
-          <a:lstStyle/>
-          <a:p>
-            <a:r>
-              <a:rPr lang="en-US" dirty="0"/>
-              <a:t>🤖 Misc: Code generated via AI</a:t>
-            </a:r>
-          </a:p>
-        </p:txBody>
-      </p:sp>
-      <p:pic>
-        <p:nvPicPr>
-          <p:cNvPr id="8" name="Picture 7" descr="A screen shot of a computer program&#10;&#10;AI-generated content may be incorrect.">
-            <a:extLst>
-              <a:ext uri="{FF2B5EF4-FFF2-40B4-BE49-F238E27FC236}">
-                <a16:creationId xmlns:a16="http://schemas.microsoft.com/office/drawing/2014/main" id="{B4048B82-FBF4-4A7F-8FBB-5B914E6206FA}"/>
-              </a:ext>
-            </a:extLst>
-          </p:cNvPr>
-          <p:cNvPicPr>
-            <a:picLocks noChangeAspect="1"/>
-          </p:cNvPicPr>
-          <p:nvPr/>
-        </p:nvPicPr>
-        <p:blipFill>
-          <a:blip r:embed="rId2">
-            <a:extLst>
-              <a:ext uri="{28A0092B-C50C-407E-A947-70E740481C1C}">
-                <a14:useLocalDpi xmlns:a14="http://schemas.microsoft.com/office/drawing/2010/main" val="0"/>
-              </a:ext>
-            </a:extLst>
-          </a:blip>
-          <a:stretch>
-            <a:fillRect/>
-          </a:stretch>
-        </p:blipFill>
-        <p:spPr>
-          <a:xfrm>
-            <a:off x="2854939" y="729332"/>
-            <a:ext cx="6482122" cy="6071428"/>
-          </a:xfrm>
-          <a:prstGeom prst="rect">
-            <a:avLst/>
-          </a:prstGeom>
-          <a:effectLst>
-            <a:outerShdw blurRad="50800" dist="38100" dir="2700000" algn="tl" rotWithShape="0">
-              <a:prstClr val="black">
-                <a:alpha val="40000"/>
-              </a:prstClr>
-            </a:outerShdw>
-          </a:effectLst>
-        </p:spPr>
-      </p:pic>
-    </p:spTree>
-    <p:extLst>
-      <p:ext uri="{BB962C8B-B14F-4D97-AF65-F5344CB8AC3E}">
-        <p14:creationId xmlns:p14="http://schemas.microsoft.com/office/powerpoint/2010/main" val="3737270670"/>
-      </p:ext>
-    </p:extLst>
-  </p:cSld>
-  <p:clrMapOvr>
-    <a:masterClrMapping/>
-  </p:clrMapOvr>
-  <mc:AlternateContent xmlns:mc="http://schemas.openxmlformats.org/markup-compatibility/2006" xmlns:p14="http://schemas.microsoft.com/office/powerpoint/2010/main">
-    <mc:Choice Requires="p14">
-      <p:transition spd="med" p14:dur="700">
-        <p:fade/>
-      </p:transition>
-    </mc:Choice>
-    <mc:Fallback xmlns="">
-      <p:transition spd="med">
-        <p:fade/>
-      </p:transition>
-    </mc:Fallback>
-  </mc:AlternateContent>
-</p:sld>
-</file>
-
-<file path=ppt/slides/slide39.xml><?xml version="1.0" encoding="utf-8"?>
-<p:sld xmlns:a="http://schemas.openxmlformats.org/drawingml/2006/main" xmlns:r="http://schemas.openxmlformats.org/officeDocument/2006/relationships" xmlns:p="http://schemas.openxmlformats.org/presentationml/2006/main">
-  <p:cSld>
-    <p:spTree>
-      <p:nvGrpSpPr>
-        <p:cNvPr id="1" name="">
-          <a:extLst>
-            <a:ext uri="{FF2B5EF4-FFF2-40B4-BE49-F238E27FC236}">
-              <a16:creationId xmlns:a16="http://schemas.microsoft.com/office/drawing/2014/main" id="{BA66D07B-C31F-BF95-3011-3A7884290F00}"/>
-            </a:ext>
-          </a:extLst>
-        </p:cNvPr>
-        <p:cNvGrpSpPr/>
-        <p:nvPr/>
-      </p:nvGrpSpPr>
-      <p:grpSpPr>
-        <a:xfrm>
-          <a:off x="0" y="0"/>
-          <a:ext cx="0" cy="0"/>
-          <a:chOff x="0" y="0"/>
-          <a:chExt cx="0" cy="0"/>
-        </a:xfrm>
-      </p:grpSpPr>
-      <p:sp>
-        <p:nvSpPr>
-          <p:cNvPr id="2" name="Titre 1">
-            <a:extLst>
-              <a:ext uri="{FF2B5EF4-FFF2-40B4-BE49-F238E27FC236}">
-                <a16:creationId xmlns:a16="http://schemas.microsoft.com/office/drawing/2014/main" id="{981167CB-24A0-FE75-AD5B-86EBD429FDAA}"/>
-              </a:ext>
-            </a:extLst>
-          </p:cNvPr>
-          <p:cNvSpPr>
-            <a:spLocks noGrp="1"/>
-          </p:cNvSpPr>
-          <p:nvPr>
-            <p:ph type="title"/>
-          </p:nvPr>
-        </p:nvSpPr>
-        <p:spPr/>
-        <p:txBody>
-          <a:bodyPr/>
-          <a:lstStyle/>
-          <a:p>
-            <a:r>
-              <a:rPr lang="en-US" dirty="0"/>
-              <a:t>🤖 Misc: Code generated via AI</a:t>
-            </a:r>
-          </a:p>
-        </p:txBody>
-      </p:sp>
-      <p:pic>
-        <p:nvPicPr>
-          <p:cNvPr id="8" name="Picture 7" descr="A screen shot of a computer program&#10;&#10;AI-generated content may be incorrect.">
-            <a:extLst>
-              <a:ext uri="{FF2B5EF4-FFF2-40B4-BE49-F238E27FC236}">
-                <a16:creationId xmlns:a16="http://schemas.microsoft.com/office/drawing/2014/main" id="{C0D52F15-9F76-2129-C1A9-80B906F005E6}"/>
-              </a:ext>
-            </a:extLst>
-          </p:cNvPr>
-          <p:cNvPicPr>
-            <a:picLocks noChangeAspect="1"/>
-          </p:cNvPicPr>
-          <p:nvPr/>
-        </p:nvPicPr>
-        <p:blipFill>
-          <a:blip r:embed="rId2">
-            <a:extLst>
-              <a:ext uri="{28A0092B-C50C-407E-A947-70E740481C1C}">
-                <a14:useLocalDpi xmlns:a14="http://schemas.microsoft.com/office/drawing/2010/main" val="0"/>
-              </a:ext>
-            </a:extLst>
-          </a:blip>
-          <a:srcRect l="6642" t="33346" b="7287"/>
-          <a:stretch>
-            <a:fillRect/>
-          </a:stretch>
-        </p:blipFill>
-        <p:spPr>
-          <a:xfrm>
-            <a:off x="1608786" y="842970"/>
-            <a:ext cx="8683530" cy="5172060"/>
-          </a:xfrm>
-          <a:prstGeom prst="rect">
-            <a:avLst/>
-          </a:prstGeom>
-          <a:effectLst>
-            <a:outerShdw blurRad="50800" dist="38100" dir="2700000" algn="tl" rotWithShape="0">
-              <a:prstClr val="black">
-                <a:alpha val="40000"/>
-              </a:prstClr>
-            </a:outerShdw>
-          </a:effectLst>
-        </p:spPr>
-      </p:pic>
-    </p:spTree>
-    <p:extLst>
-      <p:ext uri="{BB962C8B-B14F-4D97-AF65-F5344CB8AC3E}">
-        <p14:creationId xmlns:p14="http://schemas.microsoft.com/office/powerpoint/2010/main" val="2072987811"/>
-      </p:ext>
-    </p:extLst>
-  </p:cSld>
-  <p:clrMapOvr>
-    <a:masterClrMapping/>
-  </p:clrMapOvr>
-  <mc:AlternateContent xmlns:mc="http://schemas.openxmlformats.org/markup-compatibility/2006" xmlns:p159="http://schemas.microsoft.com/office/powerpoint/2015/09/main">
-    <mc:Choice Requires="p159">
-      <p:transition xmlns:p14="http://schemas.microsoft.com/office/powerpoint/2010/main" spd="slow" p14:dur="2000">
-        <p159:morph option="byObject"/>
-      </p:transition>
-    </mc:Choice>
-    <mc:Fallback xmlns="">
-      <p:transition spd="slow">
         <p:fade/>
       </p:transition>
     </mc:Fallback>
@@ -50101,7 +52706,7 @@
           <a:lstStyle/>
           <a:p>
             <a:r>
-              <a:rPr lang="en-US" dirty="0"/>
+              <a:rPr lang="en-US" noProof="0" dirty="0"/>
               <a:t>ℹ️ Introduction</a:t>
             </a:r>
           </a:p>
@@ -50134,7 +52739,7 @@
           <a:lstStyle/>
           <a:p>
             <a:r>
-              <a:rPr lang="en-US" sz="2800" b="0" dirty="0">
+              <a:rPr lang="en-US" sz="2800" b="0" noProof="0" dirty="0">
                 <a:solidFill>
                   <a:schemeClr val="tx2"/>
                 </a:solidFill>
@@ -50145,7 +52750,7 @@
           <a:p>
             <a:pPr lvl="1"/>
             <a:r>
-              <a:rPr lang="en-US" sz="2400" b="0" dirty="0">
+              <a:rPr lang="en-US" sz="2400" b="0" noProof="0" dirty="0">
                 <a:solidFill>
                   <a:schemeClr val="tx2"/>
                 </a:solidFill>
@@ -50156,11 +52761,11 @@
           <a:p>
             <a:pPr lvl="1"/>
             <a:r>
-              <a:rPr lang="en-US" sz="2400" dirty="0"/>
+              <a:rPr lang="en-US" sz="2400" noProof="0" dirty="0"/>
               <a:t>A</a:t>
             </a:r>
             <a:r>
-              <a:rPr lang="en-US" sz="2400" b="0" dirty="0">
+              <a:rPr lang="en-US" sz="2400" b="0" noProof="0" dirty="0">
                 <a:solidFill>
                   <a:schemeClr val="tx2"/>
                 </a:solidFill>
@@ -50170,11 +52775,11 @@
           </a:p>
           <a:p>
             <a:pPr lvl="1"/>
-            <a:endParaRPr lang="en-US" sz="2400" dirty="0"/>
+            <a:endParaRPr lang="en-US" sz="2400" noProof="0" dirty="0"/>
           </a:p>
           <a:p>
             <a:r>
-              <a:rPr lang="en-US" sz="2800" b="0" dirty="0">
+              <a:rPr lang="en-US" sz="2800" b="0" noProof="0" dirty="0">
                 <a:solidFill>
                   <a:schemeClr val="tx2"/>
                 </a:solidFill>
@@ -50182,7 +52787,7 @@
               <a:t> Let's deep dive and explore together “</a:t>
             </a:r>
             <a:r>
-              <a:rPr lang="en-US" sz="2800" b="0" dirty="0">
+              <a:rPr lang="en-US" sz="2800" b="0" noProof="0" dirty="0">
                 <a:solidFill>
                   <a:schemeClr val="accent1"/>
                 </a:solidFill>
@@ -50190,7 +52795,7 @@
               <a:t>The Devil is in the Payloads</a:t>
             </a:r>
             <a:r>
-              <a:rPr lang="en-US" sz="2800" b="0" dirty="0">
+              <a:rPr lang="en-US" sz="2800" b="0" noProof="0" dirty="0">
                 <a:solidFill>
                   <a:schemeClr val="tx2"/>
                 </a:solidFill>
@@ -50226,6 +52831,849 @@
 </file>
 
 <file path=ppt/slides/slide40.xml><?xml version="1.0" encoding="utf-8"?>
+<p:sld xmlns:a="http://schemas.openxmlformats.org/drawingml/2006/main" xmlns:r="http://schemas.openxmlformats.org/officeDocument/2006/relationships" xmlns:p="http://schemas.openxmlformats.org/presentationml/2006/main">
+  <p:cSld>
+    <p:spTree>
+      <p:nvGrpSpPr>
+        <p:cNvPr id="1" name="">
+          <a:extLst>
+            <a:ext uri="{FF2B5EF4-FFF2-40B4-BE49-F238E27FC236}">
+              <a16:creationId xmlns:a16="http://schemas.microsoft.com/office/drawing/2014/main" id="{003E6023-F693-7699-F89F-1086663FCB1A}"/>
+            </a:ext>
+          </a:extLst>
+        </p:cNvPr>
+        <p:cNvGrpSpPr/>
+        <p:nvPr/>
+      </p:nvGrpSpPr>
+      <p:grpSpPr>
+        <a:xfrm>
+          <a:off x="0" y="0"/>
+          <a:ext cx="0" cy="0"/>
+          <a:chOff x="0" y="0"/>
+          <a:chExt cx="0" cy="0"/>
+        </a:xfrm>
+      </p:grpSpPr>
+      <p:sp>
+        <p:nvSpPr>
+          <p:cNvPr id="2" name="Titre 1">
+            <a:extLst>
+              <a:ext uri="{FF2B5EF4-FFF2-40B4-BE49-F238E27FC236}">
+                <a16:creationId xmlns:a16="http://schemas.microsoft.com/office/drawing/2014/main" id="{B253230D-FF16-0731-521D-D75C9FDA4B5D}"/>
+              </a:ext>
+            </a:extLst>
+          </p:cNvPr>
+          <p:cNvSpPr>
+            <a:spLocks noGrp="1"/>
+          </p:cNvSpPr>
+          <p:nvPr>
+            <p:ph type="title"/>
+          </p:nvPr>
+        </p:nvSpPr>
+        <p:spPr/>
+        <p:txBody>
+          <a:bodyPr/>
+          <a:lstStyle/>
+          <a:p>
+            <a:r>
+              <a:rPr lang="en-US" noProof="0" dirty="0"/>
+              <a:t>🤖 </a:t>
+            </a:r>
+            <a:r>
+              <a:rPr lang="en-US" noProof="0" dirty="0" err="1"/>
+              <a:t>Misc</a:t>
+            </a:r>
+            <a:r>
+              <a:rPr lang="en-US" noProof="0" dirty="0"/>
+              <a:t>: Code generated via AI</a:t>
+            </a:r>
+          </a:p>
+        </p:txBody>
+      </p:sp>
+      <p:sp>
+        <p:nvSpPr>
+          <p:cNvPr id="3" name="Espace réservé du texte 2">
+            <a:extLst>
+              <a:ext uri="{FF2B5EF4-FFF2-40B4-BE49-F238E27FC236}">
+                <a16:creationId xmlns:a16="http://schemas.microsoft.com/office/drawing/2014/main" id="{05681DCE-E000-7EA1-F0DD-4559669AEBCB}"/>
+              </a:ext>
+            </a:extLst>
+          </p:cNvPr>
+          <p:cNvSpPr>
+            <a:spLocks noGrp="1"/>
+          </p:cNvSpPr>
+          <p:nvPr>
+            <p:ph type="body" sz="quarter" idx="15"/>
+          </p:nvPr>
+        </p:nvSpPr>
+        <p:spPr>
+          <a:xfrm>
+            <a:off x="588000" y="977317"/>
+            <a:ext cx="11419970" cy="4949030"/>
+          </a:xfrm>
+        </p:spPr>
+        <p:txBody>
+          <a:bodyPr/>
+          <a:lstStyle/>
+          <a:p>
+            <a:r>
+              <a:rPr lang="en-US" sz="2800" b="0" noProof="0" dirty="0">
+                <a:solidFill>
+                  <a:schemeClr val="tx2"/>
+                </a:solidFill>
+              </a:rPr>
+              <a:t> Using ChatGPT (</a:t>
+            </a:r>
+            <a:r>
+              <a:rPr lang="en-US" sz="2800" b="0" dirty="0">
+                <a:solidFill>
+                  <a:schemeClr val="tx2"/>
+                </a:solidFill>
+              </a:rPr>
+              <a:t>model Sonnet 4.6 without adaptive thinking</a:t>
+            </a:r>
+            <a:r>
+              <a:rPr lang="en-US" sz="2800" b="0" noProof="0" dirty="0">
+                <a:solidFill>
+                  <a:schemeClr val="tx2"/>
+                </a:solidFill>
+              </a:rPr>
+              <a:t>) with a user prompt </a:t>
+            </a:r>
+            <a:r>
+              <a:rPr lang="en-US" sz="2800" noProof="0" dirty="0">
+                <a:solidFill>
+                  <a:schemeClr val="accent1"/>
+                </a:solidFill>
+              </a:rPr>
+              <a:t>with explicit mention </a:t>
+            </a:r>
+            <a:r>
+              <a:rPr lang="en-US" sz="2800" b="0" noProof="0" dirty="0">
+                <a:solidFill>
+                  <a:schemeClr val="accent1"/>
+                </a:solidFill>
+              </a:rPr>
+              <a:t>to the security aspect</a:t>
+            </a:r>
+            <a:r>
+              <a:rPr lang="en-US" sz="2800" b="0" noProof="0" dirty="0">
+                <a:solidFill>
+                  <a:schemeClr val="tx2"/>
+                </a:solidFill>
+              </a:rPr>
+              <a:t>:</a:t>
+            </a:r>
+          </a:p>
+          <a:p>
+            <a:pPr marL="0" lvl="1" indent="0">
+              <a:buNone/>
+            </a:pPr>
+            <a:endParaRPr lang="en-US" sz="2800" b="0" noProof="0" dirty="0">
+              <a:solidFill>
+                <a:schemeClr val="tx2"/>
+              </a:solidFill>
+            </a:endParaRPr>
+          </a:p>
+          <a:p>
+            <a:pPr marL="0" indent="0">
+              <a:buNone/>
+            </a:pPr>
+            <a:r>
+              <a:rPr lang="en-US" sz="2800" b="0" noProof="0" dirty="0">
+                <a:solidFill>
+                  <a:schemeClr val="tx2"/>
+                </a:solidFill>
+              </a:rPr>
+              <a:t>  </a:t>
+            </a:r>
+          </a:p>
+        </p:txBody>
+      </p:sp>
+      <p:sp>
+        <p:nvSpPr>
+          <p:cNvPr id="4" name="TextBox 3">
+            <a:extLst>
+              <a:ext uri="{FF2B5EF4-FFF2-40B4-BE49-F238E27FC236}">
+                <a16:creationId xmlns:a16="http://schemas.microsoft.com/office/drawing/2014/main" id="{E4B76E6F-8926-EBC9-DD7E-FE5362608BC0}"/>
+              </a:ext>
+            </a:extLst>
+          </p:cNvPr>
+          <p:cNvSpPr txBox="1"/>
+          <p:nvPr/>
+        </p:nvSpPr>
+        <p:spPr>
+          <a:xfrm>
+            <a:off x="184030" y="2466753"/>
+            <a:ext cx="11823939" cy="3046988"/>
+          </a:xfrm>
+          <a:prstGeom prst="rect">
+            <a:avLst/>
+          </a:prstGeom>
+          <a:noFill/>
+        </p:spPr>
+        <p:txBody>
+          <a:bodyPr wrap="square" lIns="0" tIns="0" rIns="0" bIns="0" rtlCol="0">
+            <a:spAutoFit/>
+          </a:bodyPr>
+          <a:lstStyle/>
+          <a:p>
+            <a:pPr algn="l"/>
+            <a:r>
+              <a:rPr lang="en-US" noProof="0" dirty="0">
+                <a:latin typeface="Consolas" panose="020B0609020204030204" pitchFamily="49" charset="0"/>
+              </a:rPr>
+              <a:t>Give me the Java code of a REST web service intended to be an upload service accepting only PDF file.</a:t>
+            </a:r>
+          </a:p>
+          <a:p>
+            <a:pPr algn="l"/>
+            <a:endParaRPr lang="en-US" noProof="0" dirty="0">
+              <a:latin typeface="Consolas" panose="020B0609020204030204" pitchFamily="49" charset="0"/>
+            </a:endParaRPr>
+          </a:p>
+          <a:p>
+            <a:pPr algn="l"/>
+            <a:r>
+              <a:rPr lang="en-US" noProof="0" dirty="0">
+                <a:latin typeface="Consolas" panose="020B0609020204030204" pitchFamily="49" charset="0"/>
+              </a:rPr>
+              <a:t>You must make the code compact and easy to read/understand/maintain.</a:t>
+            </a:r>
+          </a:p>
+          <a:p>
+            <a:pPr algn="l"/>
+            <a:endParaRPr lang="en-US" noProof="0" dirty="0">
+              <a:latin typeface="Consolas" panose="020B0609020204030204" pitchFamily="49" charset="0"/>
+            </a:endParaRPr>
+          </a:p>
+          <a:p>
+            <a:pPr algn="l"/>
+            <a:r>
+              <a:rPr lang="en-US" noProof="0" dirty="0">
+                <a:latin typeface="Consolas" panose="020B0609020204030204" pitchFamily="49" charset="0"/>
+              </a:rPr>
+              <a:t>You must fulfil all theses constraints:</a:t>
+            </a:r>
+          </a:p>
+          <a:p>
+            <a:pPr marL="285750" indent="-285750" algn="l">
+              <a:buFont typeface="Arial" panose="020B0604020202020204" pitchFamily="34" charset="0"/>
+              <a:buChar char="•"/>
+            </a:pPr>
+            <a:r>
+              <a:rPr lang="en-US" noProof="0" dirty="0">
+                <a:latin typeface="Consolas" panose="020B0609020204030204" pitchFamily="49" charset="0"/>
+              </a:rPr>
+              <a:t>The REST web service must use Spring Boot.</a:t>
+            </a:r>
+          </a:p>
+          <a:p>
+            <a:pPr marL="285750" indent="-285750" algn="l">
+              <a:buFont typeface="Arial" panose="020B0604020202020204" pitchFamily="34" charset="0"/>
+              <a:buChar char="•"/>
+            </a:pPr>
+            <a:r>
+              <a:rPr lang="en-US" noProof="0" dirty="0">
+                <a:latin typeface="Consolas" panose="020B0609020204030204" pitchFamily="49" charset="0"/>
+              </a:rPr>
+              <a:t>You must use a recommended, maintained and open-source Java PDF library as much as possible.</a:t>
+            </a:r>
+          </a:p>
+          <a:p>
+            <a:pPr marL="285750" indent="-285750" algn="l">
+              <a:buFont typeface="Arial" panose="020B0604020202020204" pitchFamily="34" charset="0"/>
+              <a:buChar char="•"/>
+            </a:pPr>
+            <a:r>
+              <a:rPr lang="en-US" b="1" noProof="0" dirty="0">
+                <a:solidFill>
+                  <a:schemeClr val="accent3"/>
+                </a:solidFill>
+                <a:latin typeface="Consolas" panose="020B0609020204030204" pitchFamily="49" charset="0"/>
+              </a:rPr>
+              <a:t>You must include all the security validations to ensure that the PDF file is safe from a security perspective.</a:t>
+            </a:r>
+          </a:p>
+          <a:p>
+            <a:pPr marL="285750" indent="-285750" algn="l">
+              <a:buFont typeface="Arial" panose="020B0604020202020204" pitchFamily="34" charset="0"/>
+              <a:buChar char="•"/>
+            </a:pPr>
+            <a:r>
+              <a:rPr lang="en-US" noProof="0" dirty="0">
+                <a:latin typeface="Consolas" panose="020B0609020204030204" pitchFamily="49" charset="0"/>
+              </a:rPr>
+              <a:t>The maximum size of the size must be 10 MB.</a:t>
+            </a:r>
+          </a:p>
+        </p:txBody>
+      </p:sp>
+    </p:spTree>
+    <p:extLst>
+      <p:ext uri="{BB962C8B-B14F-4D97-AF65-F5344CB8AC3E}">
+        <p14:creationId xmlns:p14="http://schemas.microsoft.com/office/powerpoint/2010/main" val="1318273276"/>
+      </p:ext>
+    </p:extLst>
+  </p:cSld>
+  <p:clrMapOvr>
+    <a:masterClrMapping/>
+  </p:clrMapOvr>
+  <mc:AlternateContent xmlns:mc="http://schemas.openxmlformats.org/markup-compatibility/2006" xmlns:p14="http://schemas.microsoft.com/office/powerpoint/2010/main">
+    <mc:Choice Requires="p14">
+      <p:transition spd="med" p14:dur="700">
+        <p:fade/>
+      </p:transition>
+    </mc:Choice>
+    <mc:Fallback xmlns="">
+      <p:transition spd="med">
+        <p:fade/>
+      </p:transition>
+    </mc:Fallback>
+  </mc:AlternateContent>
+</p:sld>
+</file>
+
+<file path=ppt/slides/slide41.xml><?xml version="1.0" encoding="utf-8"?>
+<p:sld xmlns:a="http://schemas.openxmlformats.org/drawingml/2006/main" xmlns:r="http://schemas.openxmlformats.org/officeDocument/2006/relationships" xmlns:p="http://schemas.openxmlformats.org/presentationml/2006/main">
+  <p:cSld>
+    <p:spTree>
+      <p:nvGrpSpPr>
+        <p:cNvPr id="1" name="">
+          <a:extLst>
+            <a:ext uri="{FF2B5EF4-FFF2-40B4-BE49-F238E27FC236}">
+              <a16:creationId xmlns:a16="http://schemas.microsoft.com/office/drawing/2014/main" id="{6DD8BB4A-AC8A-D165-E2D8-05BCF03F1F3E}"/>
+            </a:ext>
+          </a:extLst>
+        </p:cNvPr>
+        <p:cNvGrpSpPr/>
+        <p:nvPr/>
+      </p:nvGrpSpPr>
+      <p:grpSpPr>
+        <a:xfrm>
+          <a:off x="0" y="0"/>
+          <a:ext cx="0" cy="0"/>
+          <a:chOff x="0" y="0"/>
+          <a:chExt cx="0" cy="0"/>
+        </a:xfrm>
+      </p:grpSpPr>
+      <p:sp>
+        <p:nvSpPr>
+          <p:cNvPr id="2" name="Titre 1">
+            <a:extLst>
+              <a:ext uri="{FF2B5EF4-FFF2-40B4-BE49-F238E27FC236}">
+                <a16:creationId xmlns:a16="http://schemas.microsoft.com/office/drawing/2014/main" id="{25605F23-5A77-C36A-9682-F6BD4D1007A7}"/>
+              </a:ext>
+            </a:extLst>
+          </p:cNvPr>
+          <p:cNvSpPr>
+            <a:spLocks noGrp="1"/>
+          </p:cNvSpPr>
+          <p:nvPr>
+            <p:ph type="title"/>
+          </p:nvPr>
+        </p:nvSpPr>
+        <p:spPr/>
+        <p:txBody>
+          <a:bodyPr/>
+          <a:lstStyle/>
+          <a:p>
+            <a:r>
+              <a:rPr lang="en-US" noProof="0" dirty="0"/>
+              <a:t>🤖 </a:t>
+            </a:r>
+            <a:r>
+              <a:rPr lang="en-US" noProof="0" dirty="0" err="1"/>
+              <a:t>Misc</a:t>
+            </a:r>
+            <a:r>
+              <a:rPr lang="en-US" noProof="0" dirty="0"/>
+              <a:t>: Code generated via AI</a:t>
+            </a:r>
+          </a:p>
+        </p:txBody>
+      </p:sp>
+      <p:pic>
+        <p:nvPicPr>
+          <p:cNvPr id="4" name="Picture 3">
+            <a:extLst>
+              <a:ext uri="{FF2B5EF4-FFF2-40B4-BE49-F238E27FC236}">
+                <a16:creationId xmlns:a16="http://schemas.microsoft.com/office/drawing/2014/main" id="{8EA0712E-D652-C226-B9E6-D733FC10F768}"/>
+              </a:ext>
+            </a:extLst>
+          </p:cNvPr>
+          <p:cNvPicPr>
+            <a:picLocks noChangeAspect="1"/>
+          </p:cNvPicPr>
+          <p:nvPr/>
+        </p:nvPicPr>
+        <p:blipFill>
+          <a:blip r:embed="rId2"/>
+          <a:stretch>
+            <a:fillRect/>
+          </a:stretch>
+        </p:blipFill>
+        <p:spPr>
+          <a:xfrm>
+            <a:off x="3828421" y="840685"/>
+            <a:ext cx="7287817" cy="5926880"/>
+          </a:xfrm>
+          <a:prstGeom prst="rect">
+            <a:avLst/>
+          </a:prstGeom>
+          <a:effectLst>
+            <a:outerShdw blurRad="50800" dist="38100" dir="2700000" algn="tl" rotWithShape="0">
+              <a:prstClr val="black">
+                <a:alpha val="40000"/>
+              </a:prstClr>
+            </a:outerShdw>
+          </a:effectLst>
+        </p:spPr>
+      </p:pic>
+      <p:sp>
+        <p:nvSpPr>
+          <p:cNvPr id="5" name="Speech Bubble: Rectangle 4">
+            <a:extLst>
+              <a:ext uri="{FF2B5EF4-FFF2-40B4-BE49-F238E27FC236}">
+                <a16:creationId xmlns:a16="http://schemas.microsoft.com/office/drawing/2014/main" id="{32E4286E-89EF-2D2A-0229-506DF7FE3ECA}"/>
+              </a:ext>
+            </a:extLst>
+          </p:cNvPr>
+          <p:cNvSpPr/>
+          <p:nvPr/>
+        </p:nvSpPr>
+        <p:spPr>
+          <a:xfrm>
+            <a:off x="190919" y="1360714"/>
+            <a:ext cx="3064747" cy="819778"/>
+          </a:xfrm>
+          <a:prstGeom prst="wedgeRectCallout">
+            <a:avLst>
+              <a:gd name="adj1" fmla="val 73220"/>
+              <a:gd name="adj2" fmla="val 37657"/>
+            </a:avLst>
+          </a:prstGeom>
+          <a:ln/>
+        </p:spPr>
+        <p:style>
+          <a:lnRef idx="3">
+            <a:schemeClr val="lt1"/>
+          </a:lnRef>
+          <a:fillRef idx="1">
+            <a:schemeClr val="accent3"/>
+          </a:fillRef>
+          <a:effectRef idx="1">
+            <a:schemeClr val="accent3"/>
+          </a:effectRef>
+          <a:fontRef idx="minor">
+            <a:schemeClr val="lt1"/>
+          </a:fontRef>
+        </p:style>
+        <p:txBody>
+          <a:bodyPr rtlCol="0" anchor="ctr"/>
+          <a:lstStyle/>
+          <a:p>
+            <a:pPr algn="ctr"/>
+            <a:r>
+              <a:rPr lang="en-US" noProof="0" dirty="0">
+                <a:latin typeface="Consolas" panose="020B0609020204030204" pitchFamily="49" charset="0"/>
+              </a:rPr>
+              <a:t>A strong sequence of validation was added!</a:t>
+            </a:r>
+          </a:p>
+        </p:txBody>
+      </p:sp>
+    </p:spTree>
+    <p:extLst>
+      <p:ext uri="{BB962C8B-B14F-4D97-AF65-F5344CB8AC3E}">
+        <p14:creationId xmlns:p14="http://schemas.microsoft.com/office/powerpoint/2010/main" val="3737270670"/>
+      </p:ext>
+    </p:extLst>
+  </p:cSld>
+  <p:clrMapOvr>
+    <a:masterClrMapping/>
+  </p:clrMapOvr>
+  <mc:AlternateContent xmlns:mc="http://schemas.openxmlformats.org/markup-compatibility/2006" xmlns:p14="http://schemas.microsoft.com/office/powerpoint/2010/main">
+    <mc:Choice Requires="p14">
+      <p:transition spd="med" p14:dur="700">
+        <p:fade/>
+      </p:transition>
+    </mc:Choice>
+    <mc:Fallback xmlns="">
+      <p:transition spd="med">
+        <p:fade/>
+      </p:transition>
+    </mc:Fallback>
+  </mc:AlternateContent>
+</p:sld>
+</file>
+
+<file path=ppt/slides/slide42.xml><?xml version="1.0" encoding="utf-8"?>
+<p:sld xmlns:a="http://schemas.openxmlformats.org/drawingml/2006/main" xmlns:r="http://schemas.openxmlformats.org/officeDocument/2006/relationships" xmlns:p="http://schemas.openxmlformats.org/presentationml/2006/main">
+  <p:cSld>
+    <p:spTree>
+      <p:nvGrpSpPr>
+        <p:cNvPr id="1" name="">
+          <a:extLst>
+            <a:ext uri="{FF2B5EF4-FFF2-40B4-BE49-F238E27FC236}">
+              <a16:creationId xmlns:a16="http://schemas.microsoft.com/office/drawing/2014/main" id="{5BEBC560-4144-30AC-9315-39F62985CFD4}"/>
+            </a:ext>
+          </a:extLst>
+        </p:cNvPr>
+        <p:cNvGrpSpPr/>
+        <p:nvPr/>
+      </p:nvGrpSpPr>
+      <p:grpSpPr>
+        <a:xfrm>
+          <a:off x="0" y="0"/>
+          <a:ext cx="0" cy="0"/>
+          <a:chOff x="0" y="0"/>
+          <a:chExt cx="0" cy="0"/>
+        </a:xfrm>
+      </p:grpSpPr>
+      <p:sp>
+        <p:nvSpPr>
+          <p:cNvPr id="2" name="Titre 1">
+            <a:extLst>
+              <a:ext uri="{FF2B5EF4-FFF2-40B4-BE49-F238E27FC236}">
+                <a16:creationId xmlns:a16="http://schemas.microsoft.com/office/drawing/2014/main" id="{C8723601-C3C9-3B8D-3A08-6B2DDEB13BDA}"/>
+              </a:ext>
+            </a:extLst>
+          </p:cNvPr>
+          <p:cNvSpPr>
+            <a:spLocks noGrp="1"/>
+          </p:cNvSpPr>
+          <p:nvPr>
+            <p:ph type="title"/>
+          </p:nvPr>
+        </p:nvSpPr>
+        <p:spPr/>
+        <p:txBody>
+          <a:bodyPr/>
+          <a:lstStyle/>
+          <a:p>
+            <a:r>
+              <a:rPr lang="en-US" noProof="0" dirty="0"/>
+              <a:t>🤖 </a:t>
+            </a:r>
+            <a:r>
+              <a:rPr lang="en-US" noProof="0" dirty="0" err="1"/>
+              <a:t>Misc</a:t>
+            </a:r>
+            <a:r>
+              <a:rPr lang="en-US" noProof="0" dirty="0"/>
+              <a:t>: Code generated via AI</a:t>
+            </a:r>
+          </a:p>
+        </p:txBody>
+      </p:sp>
+      <p:pic>
+        <p:nvPicPr>
+          <p:cNvPr id="4" name="Picture 3">
+            <a:extLst>
+              <a:ext uri="{FF2B5EF4-FFF2-40B4-BE49-F238E27FC236}">
+                <a16:creationId xmlns:a16="http://schemas.microsoft.com/office/drawing/2014/main" id="{5BBC0FEA-5A12-C2EC-C948-F82A385F6F28}"/>
+              </a:ext>
+            </a:extLst>
+          </p:cNvPr>
+          <p:cNvPicPr>
+            <a:picLocks noChangeAspect="1"/>
+          </p:cNvPicPr>
+          <p:nvPr/>
+        </p:nvPicPr>
+        <p:blipFill>
+          <a:blip r:embed="rId2"/>
+          <a:srcRect b="72817"/>
+          <a:stretch>
+            <a:fillRect/>
+          </a:stretch>
+        </p:blipFill>
+        <p:spPr>
+          <a:xfrm>
+            <a:off x="264771" y="1993788"/>
+            <a:ext cx="11662458" cy="2578212"/>
+          </a:xfrm>
+          <a:prstGeom prst="rect">
+            <a:avLst/>
+          </a:prstGeom>
+          <a:effectLst>
+            <a:outerShdw blurRad="50800" dist="38100" dir="2700000" algn="tl" rotWithShape="0">
+              <a:prstClr val="black">
+                <a:alpha val="40000"/>
+              </a:prstClr>
+            </a:outerShdw>
+          </a:effectLst>
+        </p:spPr>
+      </p:pic>
+    </p:spTree>
+    <p:extLst>
+      <p:ext uri="{BB962C8B-B14F-4D97-AF65-F5344CB8AC3E}">
+        <p14:creationId xmlns:p14="http://schemas.microsoft.com/office/powerpoint/2010/main" val="1173886756"/>
+      </p:ext>
+    </p:extLst>
+  </p:cSld>
+  <p:clrMapOvr>
+    <a:masterClrMapping/>
+  </p:clrMapOvr>
+  <mc:AlternateContent xmlns:mc="http://schemas.openxmlformats.org/markup-compatibility/2006">
+    <mc:Choice xmlns:p159="http://schemas.microsoft.com/office/powerpoint/2015/09/main" Requires="p159">
+      <p:transition xmlns:p14="http://schemas.microsoft.com/office/powerpoint/2010/main" spd="slow" p14:dur="2000">
+        <p159:morph option="byObject"/>
+      </p:transition>
+    </mc:Choice>
+    <mc:Fallback>
+      <p:transition spd="slow">
+        <p:fade/>
+      </p:transition>
+    </mc:Fallback>
+  </mc:AlternateContent>
+</p:sld>
+</file>
+
+<file path=ppt/slides/slide43.xml><?xml version="1.0" encoding="utf-8"?>
+<p:sld xmlns:a="http://schemas.openxmlformats.org/drawingml/2006/main" xmlns:r="http://schemas.openxmlformats.org/officeDocument/2006/relationships" xmlns:p="http://schemas.openxmlformats.org/presentationml/2006/main">
+  <p:cSld>
+    <p:spTree>
+      <p:nvGrpSpPr>
+        <p:cNvPr id="1" name="">
+          <a:extLst>
+            <a:ext uri="{FF2B5EF4-FFF2-40B4-BE49-F238E27FC236}">
+              <a16:creationId xmlns:a16="http://schemas.microsoft.com/office/drawing/2014/main" id="{BCC1ACE7-742F-7213-027B-33DFC7CE2188}"/>
+            </a:ext>
+          </a:extLst>
+        </p:cNvPr>
+        <p:cNvGrpSpPr/>
+        <p:nvPr/>
+      </p:nvGrpSpPr>
+      <p:grpSpPr>
+        <a:xfrm>
+          <a:off x="0" y="0"/>
+          <a:ext cx="0" cy="0"/>
+          <a:chOff x="0" y="0"/>
+          <a:chExt cx="0" cy="0"/>
+        </a:xfrm>
+      </p:grpSpPr>
+      <p:sp>
+        <p:nvSpPr>
+          <p:cNvPr id="2" name="Titre 1">
+            <a:extLst>
+              <a:ext uri="{FF2B5EF4-FFF2-40B4-BE49-F238E27FC236}">
+                <a16:creationId xmlns:a16="http://schemas.microsoft.com/office/drawing/2014/main" id="{D0176EE0-02B2-817F-E2A4-DFF8E39EE365}"/>
+              </a:ext>
+            </a:extLst>
+          </p:cNvPr>
+          <p:cNvSpPr>
+            <a:spLocks noGrp="1"/>
+          </p:cNvSpPr>
+          <p:nvPr>
+            <p:ph type="title"/>
+          </p:nvPr>
+        </p:nvSpPr>
+        <p:spPr/>
+        <p:txBody>
+          <a:bodyPr/>
+          <a:lstStyle/>
+          <a:p>
+            <a:r>
+              <a:rPr lang="en-US" noProof="0" dirty="0"/>
+              <a:t>🤖 </a:t>
+            </a:r>
+            <a:r>
+              <a:rPr lang="en-US" noProof="0" dirty="0" err="1"/>
+              <a:t>Misc</a:t>
+            </a:r>
+            <a:r>
+              <a:rPr lang="en-US" noProof="0" dirty="0"/>
+              <a:t>: Code generated via AI</a:t>
+            </a:r>
+          </a:p>
+        </p:txBody>
+      </p:sp>
+      <p:pic>
+        <p:nvPicPr>
+          <p:cNvPr id="4" name="Picture 3">
+            <a:extLst>
+              <a:ext uri="{FF2B5EF4-FFF2-40B4-BE49-F238E27FC236}">
+                <a16:creationId xmlns:a16="http://schemas.microsoft.com/office/drawing/2014/main" id="{48119B59-00E5-1A7E-5111-4086316DF5F5}"/>
+              </a:ext>
+            </a:extLst>
+          </p:cNvPr>
+          <p:cNvPicPr>
+            <a:picLocks noChangeAspect="1"/>
+          </p:cNvPicPr>
+          <p:nvPr/>
+        </p:nvPicPr>
+        <p:blipFill>
+          <a:blip r:embed="rId2"/>
+          <a:srcRect l="3309" t="25827" b="15174"/>
+          <a:stretch>
+            <a:fillRect/>
+          </a:stretch>
+        </p:blipFill>
+        <p:spPr>
+          <a:xfrm>
+            <a:off x="778919" y="872922"/>
+            <a:ext cx="10301796" cy="5112155"/>
+          </a:xfrm>
+          <a:prstGeom prst="rect">
+            <a:avLst/>
+          </a:prstGeom>
+          <a:effectLst>
+            <a:outerShdw blurRad="50800" dist="38100" dir="2700000" algn="tl" rotWithShape="0">
+              <a:prstClr val="black">
+                <a:alpha val="40000"/>
+              </a:prstClr>
+            </a:outerShdw>
+          </a:effectLst>
+        </p:spPr>
+      </p:pic>
+    </p:spTree>
+    <p:extLst>
+      <p:ext uri="{BB962C8B-B14F-4D97-AF65-F5344CB8AC3E}">
+        <p14:creationId xmlns:p14="http://schemas.microsoft.com/office/powerpoint/2010/main" val="1699415481"/>
+      </p:ext>
+    </p:extLst>
+  </p:cSld>
+  <p:clrMapOvr>
+    <a:masterClrMapping/>
+  </p:clrMapOvr>
+  <mc:AlternateContent xmlns:mc="http://schemas.openxmlformats.org/markup-compatibility/2006">
+    <mc:Choice xmlns:p159="http://schemas.microsoft.com/office/powerpoint/2015/09/main" Requires="p159">
+      <p:transition xmlns:p14="http://schemas.microsoft.com/office/powerpoint/2010/main" spd="slow" p14:dur="2000">
+        <p159:morph option="byObject"/>
+      </p:transition>
+    </mc:Choice>
+    <mc:Fallback>
+      <p:transition spd="slow">
+        <p:fade/>
+      </p:transition>
+    </mc:Fallback>
+  </mc:AlternateContent>
+</p:sld>
+</file>
+
+<file path=ppt/slides/slide44.xml><?xml version="1.0" encoding="utf-8"?>
+<p:sld xmlns:a="http://schemas.openxmlformats.org/drawingml/2006/main" xmlns:r="http://schemas.openxmlformats.org/officeDocument/2006/relationships" xmlns:p="http://schemas.openxmlformats.org/presentationml/2006/main">
+  <p:cSld>
+    <p:spTree>
+      <p:nvGrpSpPr>
+        <p:cNvPr id="1" name="">
+          <a:extLst>
+            <a:ext uri="{FF2B5EF4-FFF2-40B4-BE49-F238E27FC236}">
+              <a16:creationId xmlns:a16="http://schemas.microsoft.com/office/drawing/2014/main" id="{E8E5D261-BBFA-0761-8C5D-044574E12778}"/>
+            </a:ext>
+          </a:extLst>
+        </p:cNvPr>
+        <p:cNvGrpSpPr/>
+        <p:nvPr/>
+      </p:nvGrpSpPr>
+      <p:grpSpPr>
+        <a:xfrm>
+          <a:off x="0" y="0"/>
+          <a:ext cx="0" cy="0"/>
+          <a:chOff x="0" y="0"/>
+          <a:chExt cx="0" cy="0"/>
+        </a:xfrm>
+      </p:grpSpPr>
+      <p:sp>
+        <p:nvSpPr>
+          <p:cNvPr id="2" name="Titre 1">
+            <a:extLst>
+              <a:ext uri="{FF2B5EF4-FFF2-40B4-BE49-F238E27FC236}">
+                <a16:creationId xmlns:a16="http://schemas.microsoft.com/office/drawing/2014/main" id="{F1B55949-6EB0-330C-978A-1F530146BB67}"/>
+              </a:ext>
+            </a:extLst>
+          </p:cNvPr>
+          <p:cNvSpPr>
+            <a:spLocks noGrp="1"/>
+          </p:cNvSpPr>
+          <p:nvPr>
+            <p:ph type="title"/>
+          </p:nvPr>
+        </p:nvSpPr>
+        <p:spPr/>
+        <p:txBody>
+          <a:bodyPr/>
+          <a:lstStyle/>
+          <a:p>
+            <a:r>
+              <a:rPr lang="en-US" noProof="0" dirty="0"/>
+              <a:t>🤖 </a:t>
+            </a:r>
+            <a:r>
+              <a:rPr lang="en-US" noProof="0" dirty="0" err="1"/>
+              <a:t>Misc</a:t>
+            </a:r>
+            <a:r>
+              <a:rPr lang="en-US" noProof="0" dirty="0"/>
+              <a:t>: Code generated via AI</a:t>
+            </a:r>
+          </a:p>
+        </p:txBody>
+      </p:sp>
+      <p:pic>
+        <p:nvPicPr>
+          <p:cNvPr id="4" name="Picture 3">
+            <a:extLst>
+              <a:ext uri="{FF2B5EF4-FFF2-40B4-BE49-F238E27FC236}">
+                <a16:creationId xmlns:a16="http://schemas.microsoft.com/office/drawing/2014/main" id="{D88061FF-665C-234A-C5B0-67AA9A58B3B0}"/>
+              </a:ext>
+            </a:extLst>
+          </p:cNvPr>
+          <p:cNvPicPr>
+            <a:picLocks noChangeAspect="1"/>
+          </p:cNvPicPr>
+          <p:nvPr/>
+        </p:nvPicPr>
+        <p:blipFill>
+          <a:blip r:embed="rId2"/>
+          <a:srcRect t="81096" r="19617"/>
+          <a:stretch>
+            <a:fillRect/>
+          </a:stretch>
+        </p:blipFill>
+        <p:spPr>
+          <a:xfrm>
+            <a:off x="1145512" y="2198131"/>
+            <a:ext cx="9719872" cy="1858946"/>
+          </a:xfrm>
+          <a:prstGeom prst="rect">
+            <a:avLst/>
+          </a:prstGeom>
+          <a:effectLst>
+            <a:outerShdw blurRad="50800" dist="38100" dir="2700000" algn="tl" rotWithShape="0">
+              <a:prstClr val="black">
+                <a:alpha val="40000"/>
+              </a:prstClr>
+            </a:outerShdw>
+          </a:effectLst>
+        </p:spPr>
+      </p:pic>
+    </p:spTree>
+    <p:extLst>
+      <p:ext uri="{BB962C8B-B14F-4D97-AF65-F5344CB8AC3E}">
+        <p14:creationId xmlns:p14="http://schemas.microsoft.com/office/powerpoint/2010/main" val="3164441729"/>
+      </p:ext>
+    </p:extLst>
+  </p:cSld>
+  <p:clrMapOvr>
+    <a:masterClrMapping/>
+  </p:clrMapOvr>
+  <mc:AlternateContent xmlns:mc="http://schemas.openxmlformats.org/markup-compatibility/2006">
+    <mc:Choice xmlns:p159="http://schemas.microsoft.com/office/powerpoint/2015/09/main" Requires="p159">
+      <p:transition xmlns:p14="http://schemas.microsoft.com/office/powerpoint/2010/main" spd="slow" p14:dur="2000">
+        <p159:morph option="byObject"/>
+      </p:transition>
+    </mc:Choice>
+    <mc:Fallback>
+      <p:transition spd="slow">
+        <p:fade/>
+      </p:transition>
+    </mc:Fallback>
+  </mc:AlternateContent>
+</p:sld>
+</file>
+
+<file path=ppt/slides/slide45.xml><?xml version="1.0" encoding="utf-8"?>
 <p:sld xmlns:a="http://schemas.openxmlformats.org/drawingml/2006/main" xmlns:r="http://schemas.openxmlformats.org/officeDocument/2006/relationships" xmlns:p="http://schemas.openxmlformats.org/presentationml/2006/main">
   <p:cSld>
     <p:spTree>
@@ -50270,8 +53718,16 @@
           <a:lstStyle/>
           <a:p>
             <a:r>
-              <a:rPr lang="en-US" dirty="0"/>
-              <a:t>🤖 Misc: Code generated via AI</a:t>
+              <a:rPr lang="en-US" noProof="0" dirty="0"/>
+              <a:t>🤖 </a:t>
+            </a:r>
+            <a:r>
+              <a:rPr lang="en-US" noProof="0" dirty="0" err="1"/>
+              <a:t>Misc</a:t>
+            </a:r>
+            <a:r>
+              <a:rPr lang="en-US" noProof="0" dirty="0"/>
+              <a:t>: Code generated via AI</a:t>
             </a:r>
           </a:p>
         </p:txBody>
@@ -50303,7 +53759,7 @@
           <a:lstStyle/>
           <a:p>
             <a:r>
-              <a:rPr lang="en-US" sz="2800" b="0" dirty="0">
+              <a:rPr lang="en-US" sz="2800" b="0" noProof="0" dirty="0">
                 <a:solidFill>
                   <a:schemeClr val="tx2"/>
                 </a:solidFill>
@@ -50315,7 +53771,7 @@
             <a:pPr marL="0" indent="0">
               <a:buNone/>
             </a:pPr>
-            <a:endParaRPr lang="en-US" sz="2800" b="0" dirty="0">
+            <a:endParaRPr lang="en-US" sz="2800" b="0" noProof="0" dirty="0">
               <a:solidFill>
                 <a:schemeClr val="tx2"/>
               </a:solidFill>
@@ -50323,7 +53779,7 @@
           </a:p>
           <a:p>
             <a:r>
-              <a:rPr lang="en-US" sz="2800" b="0" dirty="0">
+              <a:rPr lang="en-US" sz="2800" b="0" noProof="0" dirty="0">
                 <a:solidFill>
                   <a:schemeClr val="tx2"/>
                 </a:solidFill>
@@ -50335,7 +53791,7 @@
             <a:pPr marL="0" indent="0">
               <a:buNone/>
             </a:pPr>
-            <a:endParaRPr lang="en-US" sz="2800" b="0" dirty="0">
+            <a:endParaRPr lang="en-US" sz="2800" b="0" noProof="0" dirty="0">
               <a:solidFill>
                 <a:schemeClr val="tx2"/>
               </a:solidFill>
@@ -50343,7 +53799,7 @@
           </a:p>
           <a:p>
             <a:r>
-              <a:rPr lang="en-US" sz="2800" b="0" dirty="0">
+              <a:rPr lang="en-US" sz="2800" b="0" noProof="0" dirty="0">
                 <a:solidFill>
                   <a:schemeClr val="tx2"/>
                 </a:solidFill>
@@ -50354,14 +53810,14 @@
           <a:p>
             <a:pPr lvl="1"/>
             <a:r>
-              <a:rPr lang="en-US" sz="2400" dirty="0"/>
+              <a:rPr lang="en-US" sz="2400" noProof="0" dirty="0"/>
               <a:t>User prompt must be tuned to indicate to add the missing validations.</a:t>
             </a:r>
           </a:p>
           <a:p>
             <a:pPr lvl="1"/>
             <a:r>
-              <a:rPr lang="en-US" sz="2400" b="0" dirty="0">
+              <a:rPr lang="en-US" sz="2400" b="0" noProof="0" dirty="0">
                 <a:solidFill>
                   <a:schemeClr val="tx2"/>
                 </a:solidFill>
@@ -50373,7 +53829,7 @@
             <a:pPr marL="0" lvl="1" indent="0">
               <a:buNone/>
             </a:pPr>
-            <a:endParaRPr lang="en-US" sz="2800" b="0" dirty="0">
+            <a:endParaRPr lang="en-US" sz="2800" b="0" noProof="0" dirty="0">
               <a:solidFill>
                 <a:schemeClr val="tx2"/>
               </a:solidFill>
@@ -50384,7 +53840,7 @@
               <a:buNone/>
             </a:pPr>
             <a:r>
-              <a:rPr lang="en-US" sz="2800" b="0" dirty="0">
+              <a:rPr lang="en-US" sz="2800" b="0" noProof="0" dirty="0">
                 <a:solidFill>
                   <a:schemeClr val="tx2"/>
                 </a:solidFill>
@@ -50419,7 +53875,7 @@
 </p:sld>
 </file>
 
-<file path=ppt/slides/slide41.xml><?xml version="1.0" encoding="utf-8"?>
+<file path=ppt/slides/slide46.xml><?xml version="1.0" encoding="utf-8"?>
 <p:sld xmlns:a="http://schemas.openxmlformats.org/drawingml/2006/main" xmlns:r="http://schemas.openxmlformats.org/officeDocument/2006/relationships" xmlns:p="http://schemas.openxmlformats.org/presentationml/2006/main">
   <p:cSld>
     <p:spTree>
@@ -50464,7 +53920,7 @@
           <a:lstStyle/>
           <a:p>
             <a:r>
-              <a:rPr lang="en-US" dirty="0"/>
+              <a:rPr lang="en-US" noProof="0" dirty="0"/>
               <a:t>📦 Resources</a:t>
             </a:r>
           </a:p>
@@ -50497,7 +53953,7 @@
           <a:lstStyle/>
           <a:p>
             <a:r>
-              <a:rPr lang="en-US" sz="2800" b="0" dirty="0">
+              <a:rPr lang="en-US" sz="2800" b="0" noProof="0" dirty="0">
                 <a:solidFill>
                   <a:schemeClr val="tx2"/>
                 </a:solidFill>
@@ -50505,7 +53961,7 @@
               <a:t> </a:t>
             </a:r>
             <a:r>
-              <a:rPr lang="en-US" sz="2800" b="0" dirty="0">
+              <a:rPr lang="en-US" sz="2800" b="0" noProof="0" dirty="0">
                 <a:solidFill>
                   <a:schemeClr val="tx2"/>
                 </a:solidFill>
@@ -50513,7 +53969,7 @@
               </a:rPr>
               <a:t>https://github.com/righettod/voxxeddays-lux-2026</a:t>
             </a:r>
-            <a:endParaRPr lang="en-US" sz="2800" b="0" dirty="0">
+            <a:endParaRPr lang="en-US" sz="2800" b="0" noProof="0" dirty="0">
               <a:solidFill>
                 <a:schemeClr val="tx2"/>
               </a:solidFill>
@@ -50521,7 +53977,7 @@
           </a:p>
           <a:p>
             <a:r>
-              <a:rPr lang="en-US" sz="2800" b="0" dirty="0">
+              <a:rPr lang="en-US" sz="2800" b="0" noProof="0" dirty="0">
                 <a:solidFill>
                   <a:schemeClr val="tx2"/>
                 </a:solidFill>
@@ -50529,16 +53985,97 @@
               <a:t> </a:t>
             </a:r>
             <a:r>
-              <a:rPr lang="en-US" sz="2800" b="0" dirty="0">
+              <a:rPr lang="en-US" sz="2800" b="0" noProof="0" dirty="0">
                 <a:solidFill>
                   <a:schemeClr val="tx2"/>
                 </a:solidFill>
                 <a:hlinkClick r:id="rId3"/>
               </a:rPr>
+              <a:t>https://github.com/righettod/code-assistant-skills-security-utils</a:t>
+            </a:r>
+            <a:r>
+              <a:rPr lang="en-US" sz="2800" b="0" noProof="0" dirty="0">
+                <a:solidFill>
+                  <a:schemeClr val="tx2"/>
+                </a:solidFill>
+              </a:rPr>
+              <a:t> </a:t>
+            </a:r>
+          </a:p>
+          <a:p>
+            <a:r>
+              <a:rPr lang="en-US" sz="2800" b="0" noProof="0" dirty="0">
+                <a:solidFill>
+                  <a:schemeClr val="tx2"/>
+                </a:solidFill>
+              </a:rPr>
+              <a:t> </a:t>
+            </a:r>
+            <a:r>
+              <a:rPr lang="en-US" sz="2800" b="0" noProof="0" dirty="0">
+                <a:solidFill>
+                  <a:schemeClr val="tx2"/>
+                </a:solidFill>
+                <a:hlinkClick r:id="rId4"/>
+              </a:rPr>
               <a:t>https://github.com/righettod/code-snippets-security-utils</a:t>
             </a:r>
             <a:r>
-              <a:rPr lang="en-US" sz="2800" b="0" dirty="0">
+              <a:rPr lang="en-US" sz="2800" b="0" noProof="0" dirty="0">
+                <a:solidFill>
+                  <a:schemeClr val="tx2"/>
+                </a:solidFill>
+              </a:rPr>
+              <a:t> </a:t>
+            </a:r>
+          </a:p>
+          <a:p>
+            <a:r>
+              <a:rPr lang="en-US" sz="2800" b="0" noProof="0" dirty="0">
+                <a:solidFill>
+                  <a:schemeClr val="tx2"/>
+                </a:solidFill>
+              </a:rPr>
+              <a:t> </a:t>
+            </a:r>
+            <a:r>
+              <a:rPr lang="en-US" sz="2800" b="0" noProof="0" dirty="0">
+                <a:solidFill>
+                  <a:schemeClr val="tx2"/>
+                </a:solidFill>
+                <a:hlinkClick r:id="rId5"/>
+              </a:rPr>
+              <a:t>https://github.com/corkami/mitra</a:t>
+            </a:r>
+            <a:r>
+              <a:rPr lang="en-US" sz="2800" b="0" noProof="0" dirty="0">
+                <a:solidFill>
+                  <a:schemeClr val="tx2"/>
+                </a:solidFill>
+              </a:rPr>
+              <a:t> </a:t>
+            </a:r>
+          </a:p>
+          <a:p>
+            <a:r>
+              <a:rPr lang="en-US" sz="2800" b="0" noProof="0" dirty="0">
+                <a:solidFill>
+                  <a:schemeClr val="tx2"/>
+                </a:solidFill>
+              </a:rPr>
+              <a:t> </a:t>
+            </a:r>
+            <a:r>
+              <a:rPr lang="en-US" sz="2800" b="0" noProof="0" dirty="0">
+                <a:solidFill>
+                  <a:schemeClr val="tx2"/>
+                </a:solidFill>
+                <a:hlinkClick r:id="rId6"/>
+              </a:rPr>
+              <a:t>https://github.com/corkami/pics</a:t>
+            </a:r>
+            <a:r>
+              <a:rPr lang="en-US" sz="2800" b="0" noProof="0" dirty="0">
                 <a:solidFill>
                   <a:schemeClr val="tx2"/>
                 </a:solidFill>
@@ -50560,9 +54097,9 @@
                 <a:solidFill>
                   <a:schemeClr val="tx2"/>
                 </a:solidFill>
-                <a:hlinkClick r:id="rId4"/>
+                <a:hlinkClick r:id="rId7"/>
               </a:rPr>
-              <a:t>https://github.com/corkami/mitra</a:t>
+              <a:t>https://www.headmind.com/evil-user-stories/</a:t>
             </a:r>
             <a:r>
               <a:rPr lang="en-US" sz="2800" b="0" dirty="0">
@@ -50570,42 +54107,20 @@
                   <a:schemeClr val="tx2"/>
                 </a:solidFill>
               </a:rPr>
-              <a:t> </a:t>
+              <a:t> (FR)</a:t>
             </a:r>
-          </a:p>
-          <a:p>
-            <a:r>
-              <a:rPr lang="en-US" sz="2800" b="0" dirty="0">
-                <a:solidFill>
-                  <a:schemeClr val="tx2"/>
-                </a:solidFill>
-              </a:rPr>
-              <a:t> </a:t>
-            </a:r>
-            <a:r>
-              <a:rPr lang="en-US" sz="2800" b="0" dirty="0">
-                <a:solidFill>
-                  <a:schemeClr val="tx2"/>
-                </a:solidFill>
-                <a:hlinkClick r:id="rId5"/>
-              </a:rPr>
-              <a:t>https://github.com/corkami/pics</a:t>
-            </a:r>
-            <a:r>
-              <a:rPr lang="en-US" sz="2800" b="0" dirty="0">
-                <a:solidFill>
-                  <a:schemeClr val="tx2"/>
-                </a:solidFill>
-              </a:rPr>
-              <a:t> </a:t>
-            </a:r>
+            <a:endParaRPr lang="en-US" sz="2800" b="0" noProof="0" dirty="0">
+              <a:solidFill>
+                <a:schemeClr val="tx2"/>
+              </a:solidFill>
+            </a:endParaRPr>
           </a:p>
           <a:p>
             <a:pPr marL="0" indent="0">
               <a:buNone/>
             </a:pPr>
             <a:r>
-              <a:rPr lang="en-US" sz="2800" b="0" dirty="0">
+              <a:rPr lang="en-US" sz="2800" b="0" noProof="0" dirty="0">
                 <a:solidFill>
                   <a:schemeClr val="tx2"/>
                 </a:solidFill>
@@ -50640,7 +54155,7 @@
 </p:sld>
 </file>
 
-<file path=ppt/slides/slide42.xml><?xml version="1.0" encoding="utf-8"?>
+<file path=ppt/slides/slide47.xml><?xml version="1.0" encoding="utf-8"?>
 <p:sld xmlns:a="http://schemas.openxmlformats.org/drawingml/2006/main" xmlns:r="http://schemas.openxmlformats.org/officeDocument/2006/relationships" xmlns:p="http://schemas.openxmlformats.org/presentationml/2006/main">
   <p:cSld>
     <p:spTree>
@@ -50727,7 +54242,7 @@
           <a:lstStyle/>
           <a:p>
             <a:r>
-              <a:rPr lang="en-US" dirty="0"/>
+              <a:rPr lang="en-US" noProof="0" dirty="0"/>
               <a:t>📜 Context of our story</a:t>
             </a:r>
           </a:p>
@@ -50760,7 +54275,7 @@
           <a:lstStyle/>
           <a:p>
             <a:r>
-              <a:rPr lang="en-US" sz="2800" b="0" dirty="0">
+              <a:rPr lang="en-US" sz="2800" b="0" noProof="0" dirty="0">
                 <a:solidFill>
                   <a:schemeClr val="tx2"/>
                 </a:solidFill>
@@ -50768,7 +54283,7 @@
               <a:t> Our story take place in a company, precisely in the development team (called </a:t>
             </a:r>
             <a:r>
-              <a:rPr lang="en-US" sz="2800" dirty="0">
+              <a:rPr lang="en-US" sz="2800" noProof="0" dirty="0">
                 <a:solidFill>
                   <a:schemeClr val="tx2"/>
                 </a:solidFill>
@@ -50776,7 +54291,7 @@
               <a:t>team</a:t>
             </a:r>
             <a:r>
-              <a:rPr lang="en-US" sz="2800" b="0" dirty="0">
+              <a:rPr lang="en-US" sz="2800" b="0" noProof="0" dirty="0">
                 <a:solidFill>
                   <a:schemeClr val="tx2"/>
                 </a:solidFill>
@@ -50788,7 +54303,7 @@
             <a:pPr marL="0" indent="0">
               <a:buNone/>
             </a:pPr>
-            <a:endParaRPr lang="en-US" sz="2800" b="0" dirty="0">
+            <a:endParaRPr lang="en-US" sz="2800" b="0" noProof="0" dirty="0">
               <a:solidFill>
                 <a:schemeClr val="tx2"/>
               </a:solidFill>
@@ -50796,7 +54311,7 @@
           </a:p>
           <a:p>
             <a:r>
-              <a:rPr lang="en-US" sz="2800" b="0" dirty="0">
+              <a:rPr lang="en-US" sz="2800" b="0" noProof="0" dirty="0">
                 <a:solidFill>
                   <a:schemeClr val="tx2"/>
                 </a:solidFill>
@@ -50804,7 +54319,7 @@
               <a:t> The company wanted to offer the possibility to their </a:t>
             </a:r>
             <a:r>
-              <a:rPr lang="en-US" sz="2800" b="0" dirty="0">
+              <a:rPr lang="en-US" sz="2800" b="0" noProof="0" dirty="0">
                 <a:solidFill>
                   <a:schemeClr val="accent1"/>
                 </a:solidFill>
@@ -50812,7 +54327,7 @@
               <a:t>client to attach files alongside their private chat</a:t>
             </a:r>
             <a:r>
-              <a:rPr lang="en-US" sz="2800" b="0" dirty="0">
+              <a:rPr lang="en-US" sz="2800" b="0" noProof="0" dirty="0">
                 <a:solidFill>
                   <a:schemeClr val="tx2"/>
                 </a:solidFill>
@@ -50821,7 +54336,7 @@
             </a:r>
           </a:p>
           <a:p>
-            <a:endParaRPr lang="en-US" sz="2800" b="0" dirty="0">
+            <a:endParaRPr lang="en-US" sz="2800" b="0" noProof="0" dirty="0">
               <a:solidFill>
                 <a:schemeClr val="tx2"/>
               </a:solidFill>
@@ -50829,7 +54344,7 @@
           </a:p>
           <a:p>
             <a:r>
-              <a:rPr lang="en-US" sz="2800" b="0" dirty="0">
+              <a:rPr lang="en-US" sz="2800" b="0" noProof="0" dirty="0">
                 <a:solidFill>
                   <a:schemeClr val="tx2"/>
                 </a:solidFill>
@@ -50909,7 +54424,7 @@
           <a:lstStyle/>
           <a:p>
             <a:r>
-              <a:rPr lang="en-US" dirty="0"/>
+              <a:rPr lang="en-US" noProof="0" dirty="0"/>
               <a:t>📜 Context of our story</a:t>
             </a:r>
           </a:p>
@@ -50942,7 +54457,7 @@
           <a:lstStyle/>
           <a:p>
             <a:r>
-              <a:rPr lang="en-US" sz="2800" b="0" dirty="0">
+              <a:rPr lang="en-US" sz="2800" b="0" noProof="0" dirty="0">
                 <a:solidFill>
                   <a:schemeClr val="tx2"/>
                 </a:solidFill>
@@ -50954,7 +54469,7 @@
             <a:pPr marL="0" indent="0">
               <a:buNone/>
             </a:pPr>
-            <a:endParaRPr lang="en-US" sz="2800" b="0" dirty="0">
+            <a:endParaRPr lang="en-US" sz="2800" b="0" noProof="0" dirty="0">
               <a:solidFill>
                 <a:schemeClr val="tx2"/>
               </a:solidFill>
@@ -50964,7 +54479,7 @@
             <a:pPr marL="0" indent="0">
               <a:buNone/>
             </a:pPr>
-            <a:endParaRPr lang="en-US" sz="2800" b="0" dirty="0">
+            <a:endParaRPr lang="en-US" sz="2800" b="0" noProof="0" dirty="0">
               <a:solidFill>
                 <a:schemeClr val="tx2"/>
               </a:solidFill>
@@ -50974,7 +54489,7 @@
             <a:pPr marL="0" indent="0">
               <a:buNone/>
             </a:pPr>
-            <a:endParaRPr lang="en-US" sz="2800" b="0" dirty="0">
+            <a:endParaRPr lang="en-US" sz="2800" b="0" noProof="0" dirty="0">
               <a:solidFill>
                 <a:schemeClr val="tx2"/>
               </a:solidFill>
@@ -50984,7 +54499,7 @@
             <a:pPr marL="0" indent="0">
               <a:buNone/>
             </a:pPr>
-            <a:endParaRPr lang="en-US" sz="2800" b="0" dirty="0">
+            <a:endParaRPr lang="en-US" sz="2800" b="0" noProof="0" dirty="0">
               <a:solidFill>
                 <a:schemeClr val="tx2"/>
               </a:solidFill>
@@ -50992,7 +54507,7 @@
           </a:p>
           <a:p>
             <a:r>
-              <a:rPr lang="en-US" sz="2800" b="0" dirty="0">
+              <a:rPr lang="en-US" sz="2800" b="0" noProof="0" dirty="0">
                 <a:solidFill>
                   <a:schemeClr val="tx2"/>
                 </a:solidFill>
@@ -51000,7 +54515,7 @@
               <a:t> The team decided to implement a REST web service that the front end (</a:t>
             </a:r>
             <a:r>
-              <a:rPr lang="en-US" sz="2800" b="0" i="1" dirty="0">
+              <a:rPr lang="en-US" sz="2800" b="0" i="1" noProof="0" dirty="0">
                 <a:solidFill>
                   <a:schemeClr val="tx2"/>
                 </a:solidFill>
@@ -51008,7 +54523,7 @@
               <a:t>single page application</a:t>
             </a:r>
             <a:r>
-              <a:rPr lang="en-US" sz="2800" b="0" dirty="0">
+              <a:rPr lang="en-US" sz="2800" b="0" noProof="0" dirty="0">
                 <a:solidFill>
                   <a:schemeClr val="tx2"/>
                 </a:solidFill>
@@ -51051,7 +54566,7 @@
           <a:p>
             <a:pPr algn="l"/>
             <a:r>
-              <a:rPr lang="en-US" b="1" dirty="0">
+              <a:rPr lang="en-US" b="1" noProof="0" dirty="0">
                 <a:latin typeface="Consolas" panose="020B0609020204030204" pitchFamily="49" charset="0"/>
               </a:rPr>
               <a:t>User Story:</a:t>
@@ -51060,7 +54575,7 @@
           <a:p>
             <a:pPr algn="l"/>
             <a:r>
-              <a:rPr lang="en-US" dirty="0">
+              <a:rPr lang="en-US" noProof="0" dirty="0">
                 <a:latin typeface="Consolas" panose="020B0609020204030204" pitchFamily="49" charset="0"/>
               </a:rPr>
               <a:t>As a user, I want to upload a PDF file in the chat so that I can share documents with my advisors.</a:t>
@@ -51068,14 +54583,14 @@
           </a:p>
           <a:p>
             <a:pPr algn="l"/>
-            <a:endParaRPr lang="en-US" dirty="0">
+            <a:endParaRPr lang="en-US" noProof="0" dirty="0">
               <a:latin typeface="Consolas" panose="020B0609020204030204" pitchFamily="49" charset="0"/>
             </a:endParaRPr>
           </a:p>
           <a:p>
             <a:pPr algn="l"/>
             <a:r>
-              <a:rPr lang="en-US" b="1" dirty="0">
+              <a:rPr lang="en-US" b="1" noProof="0" dirty="0">
                 <a:latin typeface="Consolas" panose="020B0609020204030204" pitchFamily="49" charset="0"/>
               </a:rPr>
               <a:t>Acceptance Criteria:</a:t>
@@ -51087,7 +54602,7 @@
               <a:buAutoNum type="arabicParenR"/>
             </a:pPr>
             <a:r>
-              <a:rPr lang="en-US" dirty="0">
+              <a:rPr lang="en-US" noProof="0" dirty="0">
                 <a:latin typeface="Consolas" panose="020B0609020204030204" pitchFamily="49" charset="0"/>
               </a:rPr>
               <a:t>The system successfully transfers the file from the user interface to the storage server.</a:t>
@@ -51099,7 +54614,7 @@
               <a:buAutoNum type="arabicParenR"/>
             </a:pPr>
             <a:r>
-              <a:rPr lang="en-US" dirty="0">
+              <a:rPr lang="en-US" noProof="0" dirty="0">
                 <a:latin typeface="Consolas" panose="020B0609020204030204" pitchFamily="49" charset="0"/>
               </a:rPr>
               <a:t>Only PDF files are allowed.</a:t>
@@ -51111,14 +54626,11 @@
               <a:buAutoNum type="arabicParenR"/>
             </a:pPr>
             <a:r>
-              <a:rPr lang="en-US" dirty="0">
+              <a:rPr lang="en-US" noProof="0" dirty="0">
                 <a:latin typeface="Consolas" panose="020B0609020204030204" pitchFamily="49" charset="0"/>
               </a:rPr>
               <a:t>File size is limited to 10 MB.</a:t>
             </a:r>
-            <a:endParaRPr lang="fr-FR" dirty="0">
-              <a:latin typeface="Consolas" panose="020B0609020204030204" pitchFamily="49" charset="0"/>
-            </a:endParaRPr>
           </a:p>
         </p:txBody>
       </p:sp>
@@ -51192,7 +54704,7 @@
           <a:lstStyle/>
           <a:p>
             <a:r>
-              <a:rPr lang="en-US" dirty="0"/>
+              <a:rPr lang="en-US" noProof="0" dirty="0"/>
               <a:t>📜 Context of our story</a:t>
             </a:r>
           </a:p>
@@ -51225,7 +54737,7 @@
           <a:lstStyle/>
           <a:p>
             <a:r>
-              <a:rPr lang="en-US" sz="2800" b="0" dirty="0">
+              <a:rPr lang="en-US" sz="2800" b="0" noProof="0" dirty="0">
                 <a:solidFill>
                   <a:schemeClr val="tx2"/>
                 </a:solidFill>
@@ -51234,7 +54746,7 @@
             </a:r>
           </a:p>
           <a:p>
-            <a:endParaRPr lang="en-US" sz="2800" b="0" dirty="0">
+            <a:endParaRPr lang="en-US" sz="2800" b="0" noProof="0" dirty="0">
               <a:solidFill>
                 <a:schemeClr val="tx2"/>
               </a:solidFill>
@@ -51242,7 +54754,7 @@
           </a:p>
           <a:p>
             <a:r>
-              <a:rPr lang="en-US" sz="2800" b="0" dirty="0">
+              <a:rPr lang="en-US" sz="2800" b="0" noProof="0" dirty="0">
                 <a:solidFill>
                   <a:schemeClr val="tx2"/>
                 </a:solidFill>
@@ -51254,10 +54766,10 @@
       </p:sp>
       <p:pic>
         <p:nvPicPr>
-          <p:cNvPr id="6" name="Picture 5" descr="A screenshot of a computer program&#10;&#10;AI-generated content may be incorrect.">
+          <p:cNvPr id="10" name="Picture 9">
             <a:extLst>
               <a:ext uri="{FF2B5EF4-FFF2-40B4-BE49-F238E27FC236}">
-                <a16:creationId xmlns:a16="http://schemas.microsoft.com/office/drawing/2014/main" id="{832050DC-4707-B6F1-973D-2016AFF7BF74}"/>
+                <a16:creationId xmlns:a16="http://schemas.microsoft.com/office/drawing/2014/main" id="{374319D4-680A-759C-60BE-C352FE38F8B5}"/>
               </a:ext>
             </a:extLst>
           </p:cNvPr>
@@ -51280,12 +54792,19 @@
         </p:blipFill>
         <p:spPr>
           <a:xfrm>
-            <a:off x="5291667" y="3994030"/>
-            <a:ext cx="1250510" cy="1777041"/>
+            <a:off x="4913644" y="4167543"/>
+            <a:ext cx="1274877" cy="1575090"/>
           </a:xfrm>
           <a:prstGeom prst="rect">
             <a:avLst/>
           </a:prstGeom>
+          <a:effectLst>
+            <a:outerShdw blurRad="50800" dist="38100" dir="2700000" algn="tl" rotWithShape="0">
+              <a:prstClr val="black">
+                <a:alpha val="40000"/>
+              </a:prstClr>
+            </a:outerShdw>
+          </a:effectLst>
         </p:spPr>
       </p:pic>
     </p:spTree>
@@ -51338,10 +54857,10 @@
       </p:grpSpPr>
       <p:pic>
         <p:nvPicPr>
-          <p:cNvPr id="6" name="Picture 5" descr="A screenshot of a computer program&#10;&#10;AI-generated content may be incorrect.">
+          <p:cNvPr id="4" name="Picture 3">
             <a:extLst>
               <a:ext uri="{FF2B5EF4-FFF2-40B4-BE49-F238E27FC236}">
-                <a16:creationId xmlns:a16="http://schemas.microsoft.com/office/drawing/2014/main" id="{1112956B-2F40-599E-049A-D4A8C3513D5A}"/>
+                <a16:creationId xmlns:a16="http://schemas.microsoft.com/office/drawing/2014/main" id="{A19EC75C-ED00-33DC-237E-ACBDFDEB5187}"/>
               </a:ext>
             </a:extLst>
           </p:cNvPr>
@@ -51358,15 +54877,14 @@
               </a:ext>
             </a:extLst>
           </a:blip>
-          <a:srcRect b="9050"/>
           <a:stretch>
             <a:fillRect/>
           </a:stretch>
         </p:blipFill>
         <p:spPr>
           <a:xfrm>
-            <a:off x="3540643" y="52190"/>
-            <a:ext cx="4657060" cy="6019001"/>
+            <a:off x="2642717" y="132930"/>
+            <a:ext cx="5335674" cy="6592139"/>
           </a:xfrm>
           <a:prstGeom prst="rect">
             <a:avLst/>
@@ -51450,7 +54968,7 @@
           <a:lstStyle/>
           <a:p>
             <a:r>
-              <a:rPr lang="en-US" dirty="0"/>
+              <a:rPr lang="en-US" noProof="0" dirty="0"/>
               <a:t>🥵 My challenge</a:t>
             </a:r>
           </a:p>
@@ -51483,7 +55001,7 @@
           <a:lstStyle/>
           <a:p>
             <a:r>
-              <a:rPr lang="en-US" sz="2800" b="0" dirty="0">
+              <a:rPr lang="en-US" sz="2800" b="0" noProof="0" dirty="0">
                 <a:solidFill>
                   <a:schemeClr val="tx2"/>
                 </a:solidFill>
@@ -51491,7 +55009,7 @@
               <a:t> Your servitor has a lifespan represented by </a:t>
             </a:r>
             <a:r>
-              <a:rPr lang="en-US" sz="2800" b="0" dirty="0">
+              <a:rPr lang="en-US" sz="2800" b="0" noProof="0" dirty="0">
                 <a:solidFill>
                   <a:schemeClr val="accent1"/>
                 </a:solidFill>
@@ -51499,7 +55017,7 @@
               <a:t>the level of exasperation of the team</a:t>
             </a:r>
             <a:r>
-              <a:rPr lang="en-US" sz="2800" b="0" dirty="0">
+              <a:rPr lang="en-US" sz="2800" b="0" noProof="0" dirty="0">
                 <a:solidFill>
                   <a:schemeClr val="tx2"/>
                 </a:solidFill>
@@ -51508,7 +55026,7 @@
             </a:r>
           </a:p>
           <a:p>
-            <a:endParaRPr lang="en-US" sz="2800" b="0" dirty="0">
+            <a:endParaRPr lang="en-US" sz="2800" b="0" noProof="0" dirty="0">
               <a:solidFill>
                 <a:schemeClr val="tx2"/>
               </a:solidFill>
@@ -51516,7 +55034,7 @@
           </a:p>
           <a:p>
             <a:r>
-              <a:rPr lang="en-US" sz="2800" b="0" dirty="0">
+              <a:rPr lang="en-US" sz="2800" b="0" noProof="0" dirty="0">
                 <a:solidFill>
                   <a:schemeClr val="tx2"/>
                 </a:solidFill>
@@ -51524,7 +55042,7 @@
               <a:t> If it reach </a:t>
             </a:r>
             <a:r>
-              <a:rPr lang="en-US" sz="2800" b="0" dirty="0">
+              <a:rPr lang="en-US" sz="2800" b="0" noProof="0" dirty="0">
                 <a:solidFill>
                   <a:srgbClr val="C00000"/>
                 </a:solidFill>
@@ -51532,7 +55050,7 @@
               <a:t>100%</a:t>
             </a:r>
             <a:r>
-              <a:rPr lang="en-US" sz="2800" b="0" dirty="0">
+              <a:rPr lang="en-US" sz="2800" b="0" noProof="0" dirty="0">
                 <a:solidFill>
                   <a:schemeClr val="tx2"/>
                 </a:solidFill>
@@ -51540,7 +55058,7 @@
               <a:t>, the team warned me that </a:t>
             </a:r>
             <a:r>
-              <a:rPr lang="en-US" sz="2800" b="0" dirty="0">
+              <a:rPr lang="en-US" sz="2800" b="0" noProof="0" dirty="0">
                 <a:solidFill>
                   <a:srgbClr val="C00000"/>
                 </a:solidFill>
@@ -51548,7 +55066,7 @@
               <a:t>they're going to throw me out the window</a:t>
             </a:r>
             <a:r>
-              <a:rPr lang="en-US" sz="2800" b="0" dirty="0">
+              <a:rPr lang="en-US" sz="2800" b="0" noProof="0" dirty="0">
                 <a:solidFill>
                   <a:schemeClr val="tx2"/>
                 </a:solidFill>
